--- a/output/3.pptx
+++ b/output/3.pptx
@@ -3166,6 +3166,889 @@
           </a:fontRef>
         </p:style>
       </p:cxnSp>
+      <p:cxnSp>
+        <p:nvCxnSpPr>
+          <p:cNvPr id="4" name="Connector 3"/>
+          <p:cNvCxnSpPr/>
+          <p:nvPr/>
+        </p:nvCxnSpPr>
+        <p:spPr>
+          <a:xfrm flipV="1">
+            <a:off x="4572000.0" y="2519172.0"/>
+            <a:ext cx="9144.0" cy="52578.0"/>
+          </a:xfrm>
+          <a:prstGeom prst="line">
+            <a:avLst/>
+          </a:prstGeom>
+          <a:ln w="25400">
+            <a:solidFill>
+              <a:srgbClr val="00C8FF"/>
+            </a:solidFill>
+          </a:ln>
+        </p:spPr>
+        <p:style>
+          <a:lnRef idx="2">
+            <a:schemeClr val="accent1"/>
+          </a:lnRef>
+          <a:fillRef idx="0">
+            <a:schemeClr val="accent1"/>
+          </a:fillRef>
+          <a:effectRef idx="1">
+            <a:schemeClr val="accent1"/>
+          </a:effectRef>
+          <a:fontRef idx="minor">
+            <a:schemeClr val="tx1"/>
+          </a:fontRef>
+        </p:style>
+      </p:cxnSp>
+      <p:cxnSp>
+        <p:nvCxnSpPr>
+          <p:cNvPr id="5" name="Connector 4"/>
+          <p:cNvCxnSpPr/>
+          <p:nvPr/>
+        </p:nvCxnSpPr>
+        <p:spPr>
+          <a:xfrm flipV="1">
+            <a:off x="4581144.0" y="2497683.6"/>
+            <a:ext cx="9144.0" cy="21488.399999999907"/>
+          </a:xfrm>
+          <a:prstGeom prst="line">
+            <a:avLst/>
+          </a:prstGeom>
+          <a:ln w="25400">
+            <a:solidFill>
+              <a:srgbClr val="00C8FF"/>
+            </a:solidFill>
+          </a:ln>
+        </p:spPr>
+        <p:style>
+          <a:lnRef idx="2">
+            <a:schemeClr val="accent1"/>
+          </a:lnRef>
+          <a:fillRef idx="0">
+            <a:schemeClr val="accent1"/>
+          </a:fillRef>
+          <a:effectRef idx="1">
+            <a:schemeClr val="accent1"/>
+          </a:effectRef>
+          <a:fontRef idx="minor">
+            <a:schemeClr val="tx1"/>
+          </a:fontRef>
+        </p:style>
+      </p:cxnSp>
+      <p:cxnSp>
+        <p:nvCxnSpPr>
+          <p:cNvPr id="6" name="Connector 5"/>
+          <p:cNvCxnSpPr/>
+          <p:nvPr/>
+        </p:nvCxnSpPr>
+        <p:spPr>
+          <a:xfrm flipV="1">
+            <a:off x="4590288.0" y="2481224.4"/>
+            <a:ext cx="9144.0" cy="16459.200000000186"/>
+          </a:xfrm>
+          <a:prstGeom prst="line">
+            <a:avLst/>
+          </a:prstGeom>
+          <a:ln w="25400">
+            <a:solidFill>
+              <a:srgbClr val="00C8FF"/>
+            </a:solidFill>
+          </a:ln>
+        </p:spPr>
+        <p:style>
+          <a:lnRef idx="2">
+            <a:schemeClr val="accent1"/>
+          </a:lnRef>
+          <a:fillRef idx="0">
+            <a:schemeClr val="accent1"/>
+          </a:fillRef>
+          <a:effectRef idx="1">
+            <a:schemeClr val="accent1"/>
+          </a:effectRef>
+          <a:fontRef idx="minor">
+            <a:schemeClr val="tx1"/>
+          </a:fontRef>
+        </p:style>
+      </p:cxnSp>
+      <p:cxnSp>
+        <p:nvCxnSpPr>
+          <p:cNvPr id="7" name="Connector 6"/>
+          <p:cNvCxnSpPr/>
+          <p:nvPr/>
+        </p:nvCxnSpPr>
+        <p:spPr>
+          <a:xfrm flipV="1">
+            <a:off x="4599432.0" y="2467051.2"/>
+            <a:ext cx="9144.0" cy="14173.19999999972"/>
+          </a:xfrm>
+          <a:prstGeom prst="line">
+            <a:avLst/>
+          </a:prstGeom>
+          <a:ln w="25400">
+            <a:solidFill>
+              <a:srgbClr val="00C8FF"/>
+            </a:solidFill>
+          </a:ln>
+        </p:spPr>
+        <p:style>
+          <a:lnRef idx="2">
+            <a:schemeClr val="accent1"/>
+          </a:lnRef>
+          <a:fillRef idx="0">
+            <a:schemeClr val="accent1"/>
+          </a:fillRef>
+          <a:effectRef idx="1">
+            <a:schemeClr val="accent1"/>
+          </a:effectRef>
+          <a:fontRef idx="minor">
+            <a:schemeClr val="tx1"/>
+          </a:fontRef>
+        </p:style>
+      </p:cxnSp>
+      <p:cxnSp>
+        <p:nvCxnSpPr>
+          <p:cNvPr id="8" name="Connector 7"/>
+          <p:cNvCxnSpPr/>
+          <p:nvPr/>
+        </p:nvCxnSpPr>
+        <p:spPr>
+          <a:xfrm flipV="1">
+            <a:off x="4608576.0" y="2454706.8"/>
+            <a:ext cx="9144.0" cy="12344.400000000373"/>
+          </a:xfrm>
+          <a:prstGeom prst="line">
+            <a:avLst/>
+          </a:prstGeom>
+          <a:ln w="25400">
+            <a:solidFill>
+              <a:srgbClr val="00C8FF"/>
+            </a:solidFill>
+          </a:ln>
+        </p:spPr>
+        <p:style>
+          <a:lnRef idx="2">
+            <a:schemeClr val="accent1"/>
+          </a:lnRef>
+          <a:fillRef idx="0">
+            <a:schemeClr val="accent1"/>
+          </a:fillRef>
+          <a:effectRef idx="1">
+            <a:schemeClr val="accent1"/>
+          </a:effectRef>
+          <a:fontRef idx="minor">
+            <a:schemeClr val="tx1"/>
+          </a:fontRef>
+        </p:style>
+      </p:cxnSp>
+      <p:cxnSp>
+        <p:nvCxnSpPr>
+          <p:cNvPr id="9" name="Connector 8"/>
+          <p:cNvCxnSpPr/>
+          <p:nvPr/>
+        </p:nvCxnSpPr>
+        <p:spPr>
+          <a:xfrm flipV="1">
+            <a:off x="4617720.0" y="2443276.8"/>
+            <a:ext cx="9144.0" cy="11430.0"/>
+          </a:xfrm>
+          <a:prstGeom prst="line">
+            <a:avLst/>
+          </a:prstGeom>
+          <a:ln w="25400">
+            <a:solidFill>
+              <a:srgbClr val="00C8FF"/>
+            </a:solidFill>
+          </a:ln>
+        </p:spPr>
+        <p:style>
+          <a:lnRef idx="2">
+            <a:schemeClr val="accent1"/>
+          </a:lnRef>
+          <a:fillRef idx="0">
+            <a:schemeClr val="accent1"/>
+          </a:fillRef>
+          <a:effectRef idx="1">
+            <a:schemeClr val="accent1"/>
+          </a:effectRef>
+          <a:fontRef idx="minor">
+            <a:schemeClr val="tx1"/>
+          </a:fontRef>
+        </p:style>
+      </p:cxnSp>
+      <p:cxnSp>
+        <p:nvCxnSpPr>
+          <p:cNvPr id="10" name="Connector 9"/>
+          <p:cNvCxnSpPr/>
+          <p:nvPr/>
+        </p:nvCxnSpPr>
+        <p:spPr>
+          <a:xfrm flipV="1">
+            <a:off x="4626864.0" y="2432761.2"/>
+            <a:ext cx="9144.0" cy="10515.599999999627"/>
+          </a:xfrm>
+          <a:prstGeom prst="line">
+            <a:avLst/>
+          </a:prstGeom>
+          <a:ln w="25400">
+            <a:solidFill>
+              <a:srgbClr val="00C8FF"/>
+            </a:solidFill>
+          </a:ln>
+        </p:spPr>
+        <p:style>
+          <a:lnRef idx="2">
+            <a:schemeClr val="accent1"/>
+          </a:lnRef>
+          <a:fillRef idx="0">
+            <a:schemeClr val="accent1"/>
+          </a:fillRef>
+          <a:effectRef idx="1">
+            <a:schemeClr val="accent1"/>
+          </a:effectRef>
+          <a:fontRef idx="minor">
+            <a:schemeClr val="tx1"/>
+          </a:fontRef>
+        </p:style>
+      </p:cxnSp>
+      <p:cxnSp>
+        <p:nvCxnSpPr>
+          <p:cNvPr id="11" name="Connector 10"/>
+          <p:cNvCxnSpPr/>
+          <p:nvPr/>
+        </p:nvCxnSpPr>
+        <p:spPr>
+          <a:xfrm flipV="1">
+            <a:off x="4636008.0" y="2422702.8"/>
+            <a:ext cx="9144.0" cy="10058.400000000373"/>
+          </a:xfrm>
+          <a:prstGeom prst="line">
+            <a:avLst/>
+          </a:prstGeom>
+          <a:ln w="25400">
+            <a:solidFill>
+              <a:srgbClr val="00C8FF"/>
+            </a:solidFill>
+          </a:ln>
+        </p:spPr>
+        <p:style>
+          <a:lnRef idx="2">
+            <a:schemeClr val="accent1"/>
+          </a:lnRef>
+          <a:fillRef idx="0">
+            <a:schemeClr val="accent1"/>
+          </a:fillRef>
+          <a:effectRef idx="1">
+            <a:schemeClr val="accent1"/>
+          </a:effectRef>
+          <a:fontRef idx="minor">
+            <a:schemeClr val="tx1"/>
+          </a:fontRef>
+        </p:style>
+      </p:cxnSp>
+      <p:cxnSp>
+        <p:nvCxnSpPr>
+          <p:cNvPr id="12" name="Connector 11"/>
+          <p:cNvCxnSpPr/>
+          <p:nvPr/>
+        </p:nvCxnSpPr>
+        <p:spPr>
+          <a:xfrm flipV="1">
+            <a:off x="4645152.0" y="2413101.6"/>
+            <a:ext cx="9144.0" cy="9601.19999999972"/>
+          </a:xfrm>
+          <a:prstGeom prst="line">
+            <a:avLst/>
+          </a:prstGeom>
+          <a:ln w="25400">
+            <a:solidFill>
+              <a:srgbClr val="00C8FF"/>
+            </a:solidFill>
+          </a:ln>
+        </p:spPr>
+        <p:style>
+          <a:lnRef idx="2">
+            <a:schemeClr val="accent1"/>
+          </a:lnRef>
+          <a:fillRef idx="0">
+            <a:schemeClr val="accent1"/>
+          </a:fillRef>
+          <a:effectRef idx="1">
+            <a:schemeClr val="accent1"/>
+          </a:effectRef>
+          <a:fontRef idx="minor">
+            <a:schemeClr val="tx1"/>
+          </a:fontRef>
+        </p:style>
+      </p:cxnSp>
+      <p:cxnSp>
+        <p:nvCxnSpPr>
+          <p:cNvPr id="13" name="Connector 12"/>
+          <p:cNvCxnSpPr/>
+          <p:nvPr/>
+        </p:nvCxnSpPr>
+        <p:spPr>
+          <a:xfrm flipV="1">
+            <a:off x="4654296.0" y="2404414.8"/>
+            <a:ext cx="9144.0" cy="8686.80000000028"/>
+          </a:xfrm>
+          <a:prstGeom prst="line">
+            <a:avLst/>
+          </a:prstGeom>
+          <a:ln w="25400">
+            <a:solidFill>
+              <a:srgbClr val="00C8FF"/>
+            </a:solidFill>
+          </a:ln>
+        </p:spPr>
+        <p:style>
+          <a:lnRef idx="2">
+            <a:schemeClr val="accent1"/>
+          </a:lnRef>
+          <a:fillRef idx="0">
+            <a:schemeClr val="accent1"/>
+          </a:fillRef>
+          <a:effectRef idx="1">
+            <a:schemeClr val="accent1"/>
+          </a:effectRef>
+          <a:fontRef idx="minor">
+            <a:schemeClr val="tx1"/>
+          </a:fontRef>
+        </p:style>
+      </p:cxnSp>
+      <p:cxnSp>
+        <p:nvCxnSpPr>
+          <p:cNvPr id="14" name="Connector 13"/>
+          <p:cNvCxnSpPr/>
+          <p:nvPr/>
+        </p:nvCxnSpPr>
+        <p:spPr>
+          <a:xfrm flipV="1">
+            <a:off x="4663440.0" y="2396185.2"/>
+            <a:ext cx="9144.0" cy="8229.599999999627"/>
+          </a:xfrm>
+          <a:prstGeom prst="line">
+            <a:avLst/>
+          </a:prstGeom>
+          <a:ln w="25400">
+            <a:solidFill>
+              <a:srgbClr val="00C8FF"/>
+            </a:solidFill>
+          </a:ln>
+        </p:spPr>
+        <p:style>
+          <a:lnRef idx="2">
+            <a:schemeClr val="accent1"/>
+          </a:lnRef>
+          <a:fillRef idx="0">
+            <a:schemeClr val="accent1"/>
+          </a:fillRef>
+          <a:effectRef idx="1">
+            <a:schemeClr val="accent1"/>
+          </a:effectRef>
+          <a:fontRef idx="minor">
+            <a:schemeClr val="tx1"/>
+          </a:fontRef>
+        </p:style>
+      </p:cxnSp>
+      <p:cxnSp>
+        <p:nvCxnSpPr>
+          <p:cNvPr id="15" name="Connector 14"/>
+          <p:cNvCxnSpPr/>
+          <p:nvPr/>
+        </p:nvCxnSpPr>
+        <p:spPr>
+          <a:xfrm flipV="1">
+            <a:off x="4672584.0" y="2387955.6"/>
+            <a:ext cx="9144.0" cy="8229.600000000093"/>
+          </a:xfrm>
+          <a:prstGeom prst="line">
+            <a:avLst/>
+          </a:prstGeom>
+          <a:ln w="25400">
+            <a:solidFill>
+              <a:srgbClr val="00C8FF"/>
+            </a:solidFill>
+          </a:ln>
+        </p:spPr>
+        <p:style>
+          <a:lnRef idx="2">
+            <a:schemeClr val="accent1"/>
+          </a:lnRef>
+          <a:fillRef idx="0">
+            <a:schemeClr val="accent1"/>
+          </a:fillRef>
+          <a:effectRef idx="1">
+            <a:schemeClr val="accent1"/>
+          </a:effectRef>
+          <a:fontRef idx="minor">
+            <a:schemeClr val="tx1"/>
+          </a:fontRef>
+        </p:style>
+      </p:cxnSp>
+      <p:cxnSp>
+        <p:nvCxnSpPr>
+          <p:cNvPr id="16" name="Connector 15"/>
+          <p:cNvCxnSpPr/>
+          <p:nvPr/>
+        </p:nvCxnSpPr>
+        <p:spPr>
+          <a:xfrm flipV="1">
+            <a:off x="4681728.0" y="2380183.2"/>
+            <a:ext cx="9144.0" cy="7772.399999999907"/>
+          </a:xfrm>
+          <a:prstGeom prst="line">
+            <a:avLst/>
+          </a:prstGeom>
+          <a:ln w="25400">
+            <a:solidFill>
+              <a:srgbClr val="00C8FF"/>
+            </a:solidFill>
+          </a:ln>
+        </p:spPr>
+        <p:style>
+          <a:lnRef idx="2">
+            <a:schemeClr val="accent1"/>
+          </a:lnRef>
+          <a:fillRef idx="0">
+            <a:schemeClr val="accent1"/>
+          </a:fillRef>
+          <a:effectRef idx="1">
+            <a:schemeClr val="accent1"/>
+          </a:effectRef>
+          <a:fontRef idx="minor">
+            <a:schemeClr val="tx1"/>
+          </a:fontRef>
+        </p:style>
+      </p:cxnSp>
+      <p:cxnSp>
+        <p:nvCxnSpPr>
+          <p:cNvPr id="17" name="Connector 16"/>
+          <p:cNvCxnSpPr/>
+          <p:nvPr/>
+        </p:nvCxnSpPr>
+        <p:spPr>
+          <a:xfrm flipV="1">
+            <a:off x="4690872.0" y="2372868.0"/>
+            <a:ext cx="9144.0" cy="7315.200000000186"/>
+          </a:xfrm>
+          <a:prstGeom prst="line">
+            <a:avLst/>
+          </a:prstGeom>
+          <a:ln w="25400">
+            <a:solidFill>
+              <a:srgbClr val="00C8FF"/>
+            </a:solidFill>
+          </a:ln>
+        </p:spPr>
+        <p:style>
+          <a:lnRef idx="2">
+            <a:schemeClr val="accent1"/>
+          </a:lnRef>
+          <a:fillRef idx="0">
+            <a:schemeClr val="accent1"/>
+          </a:fillRef>
+          <a:effectRef idx="1">
+            <a:schemeClr val="accent1"/>
+          </a:effectRef>
+          <a:fontRef idx="minor">
+            <a:schemeClr val="tx1"/>
+          </a:fontRef>
+        </p:style>
+      </p:cxnSp>
+      <p:cxnSp>
+        <p:nvCxnSpPr>
+          <p:cNvPr id="18" name="Connector 17"/>
+          <p:cNvCxnSpPr/>
+          <p:nvPr/>
+        </p:nvCxnSpPr>
+        <p:spPr>
+          <a:xfrm flipV="1">
+            <a:off x="4700016.0" y="2365552.8"/>
+            <a:ext cx="9144.0" cy="7315.200000000186"/>
+          </a:xfrm>
+          <a:prstGeom prst="line">
+            <a:avLst/>
+          </a:prstGeom>
+          <a:ln w="25400">
+            <a:solidFill>
+              <a:srgbClr val="00C8FF"/>
+            </a:solidFill>
+          </a:ln>
+        </p:spPr>
+        <p:style>
+          <a:lnRef idx="2">
+            <a:schemeClr val="accent1"/>
+          </a:lnRef>
+          <a:fillRef idx="0">
+            <a:schemeClr val="accent1"/>
+          </a:fillRef>
+          <a:effectRef idx="1">
+            <a:schemeClr val="accent1"/>
+          </a:effectRef>
+          <a:fontRef idx="minor">
+            <a:schemeClr val="tx1"/>
+          </a:fontRef>
+        </p:style>
+      </p:cxnSp>
+      <p:cxnSp>
+        <p:nvCxnSpPr>
+          <p:cNvPr id="19" name="Connector 18"/>
+          <p:cNvCxnSpPr/>
+          <p:nvPr/>
+        </p:nvCxnSpPr>
+        <p:spPr>
+          <a:xfrm flipV="1">
+            <a:off x="4709160.0" y="2358237.6"/>
+            <a:ext cx="9144.0" cy="7315.199999999721"/>
+          </a:xfrm>
+          <a:prstGeom prst="line">
+            <a:avLst/>
+          </a:prstGeom>
+          <a:ln w="25400">
+            <a:solidFill>
+              <a:srgbClr val="00C8FF"/>
+            </a:solidFill>
+          </a:ln>
+        </p:spPr>
+        <p:style>
+          <a:lnRef idx="2">
+            <a:schemeClr val="accent1"/>
+          </a:lnRef>
+          <a:fillRef idx="0">
+            <a:schemeClr val="accent1"/>
+          </a:fillRef>
+          <a:effectRef idx="1">
+            <a:schemeClr val="accent1"/>
+          </a:effectRef>
+          <a:fontRef idx="minor">
+            <a:schemeClr val="tx1"/>
+          </a:fontRef>
+        </p:style>
+      </p:cxnSp>
+      <p:cxnSp>
+        <p:nvCxnSpPr>
+          <p:cNvPr id="20" name="Connector 19"/>
+          <p:cNvCxnSpPr/>
+          <p:nvPr/>
+        </p:nvCxnSpPr>
+        <p:spPr>
+          <a:xfrm flipV="1">
+            <a:off x="4718304.0" y="2351379.6"/>
+            <a:ext cx="9144.0" cy="6858.0"/>
+          </a:xfrm>
+          <a:prstGeom prst="line">
+            <a:avLst/>
+          </a:prstGeom>
+          <a:ln w="25400">
+            <a:solidFill>
+              <a:srgbClr val="00C8FF"/>
+            </a:solidFill>
+          </a:ln>
+        </p:spPr>
+        <p:style>
+          <a:lnRef idx="2">
+            <a:schemeClr val="accent1"/>
+          </a:lnRef>
+          <a:fillRef idx="0">
+            <a:schemeClr val="accent1"/>
+          </a:fillRef>
+          <a:effectRef idx="1">
+            <a:schemeClr val="accent1"/>
+          </a:effectRef>
+          <a:fontRef idx="minor">
+            <a:schemeClr val="tx1"/>
+          </a:fontRef>
+        </p:style>
+      </p:cxnSp>
+      <p:cxnSp>
+        <p:nvCxnSpPr>
+          <p:cNvPr id="21" name="Connector 20"/>
+          <p:cNvCxnSpPr/>
+          <p:nvPr/>
+        </p:nvCxnSpPr>
+        <p:spPr>
+          <a:xfrm flipV="1">
+            <a:off x="4727448.0" y="2344978.8"/>
+            <a:ext cx="9144.0" cy="6400.800000000279"/>
+          </a:xfrm>
+          <a:prstGeom prst="line">
+            <a:avLst/>
+          </a:prstGeom>
+          <a:ln w="25400">
+            <a:solidFill>
+              <a:srgbClr val="00C8FF"/>
+            </a:solidFill>
+          </a:ln>
+        </p:spPr>
+        <p:style>
+          <a:lnRef idx="2">
+            <a:schemeClr val="accent1"/>
+          </a:lnRef>
+          <a:fillRef idx="0">
+            <a:schemeClr val="accent1"/>
+          </a:fillRef>
+          <a:effectRef idx="1">
+            <a:schemeClr val="accent1"/>
+          </a:effectRef>
+          <a:fontRef idx="minor">
+            <a:schemeClr val="tx1"/>
+          </a:fontRef>
+        </p:style>
+      </p:cxnSp>
+      <p:cxnSp>
+        <p:nvCxnSpPr>
+          <p:cNvPr id="22" name="Connector 21"/>
+          <p:cNvCxnSpPr/>
+          <p:nvPr/>
+        </p:nvCxnSpPr>
+        <p:spPr>
+          <a:xfrm flipV="1">
+            <a:off x="4736592.0" y="2338578.0"/>
+            <a:ext cx="9144.0" cy="6400.799999999814"/>
+          </a:xfrm>
+          <a:prstGeom prst="line">
+            <a:avLst/>
+          </a:prstGeom>
+          <a:ln w="25400">
+            <a:solidFill>
+              <a:srgbClr val="00C8FF"/>
+            </a:solidFill>
+          </a:ln>
+        </p:spPr>
+        <p:style>
+          <a:lnRef idx="2">
+            <a:schemeClr val="accent1"/>
+          </a:lnRef>
+          <a:fillRef idx="0">
+            <a:schemeClr val="accent1"/>
+          </a:fillRef>
+          <a:effectRef idx="1">
+            <a:schemeClr val="accent1"/>
+          </a:effectRef>
+          <a:fontRef idx="minor">
+            <a:schemeClr val="tx1"/>
+          </a:fontRef>
+        </p:style>
+      </p:cxnSp>
+      <p:cxnSp>
+        <p:nvCxnSpPr>
+          <p:cNvPr id="23" name="Connector 22"/>
+          <p:cNvCxnSpPr/>
+          <p:nvPr/>
+        </p:nvCxnSpPr>
+        <p:spPr>
+          <a:xfrm flipV="1">
+            <a:off x="4745736.0" y="2332177.2"/>
+            <a:ext cx="9144.0" cy="6400.799999999814"/>
+          </a:xfrm>
+          <a:prstGeom prst="line">
+            <a:avLst/>
+          </a:prstGeom>
+          <a:ln w="25400">
+            <a:solidFill>
+              <a:srgbClr val="00C8FF"/>
+            </a:solidFill>
+          </a:ln>
+        </p:spPr>
+        <p:style>
+          <a:lnRef idx="2">
+            <a:schemeClr val="accent1"/>
+          </a:lnRef>
+          <a:fillRef idx="0">
+            <a:schemeClr val="accent1"/>
+          </a:fillRef>
+          <a:effectRef idx="1">
+            <a:schemeClr val="accent1"/>
+          </a:effectRef>
+          <a:fontRef idx="minor">
+            <a:schemeClr val="tx1"/>
+          </a:fontRef>
+        </p:style>
+      </p:cxnSp>
+      <p:cxnSp>
+        <p:nvCxnSpPr>
+          <p:cNvPr id="24" name="Connector 23"/>
+          <p:cNvCxnSpPr/>
+          <p:nvPr/>
+        </p:nvCxnSpPr>
+        <p:spPr>
+          <a:xfrm flipV="1">
+            <a:off x="4754880.0" y="2326233.6"/>
+            <a:ext cx="9144.0" cy="5943.600000000093"/>
+          </a:xfrm>
+          <a:prstGeom prst="line">
+            <a:avLst/>
+          </a:prstGeom>
+          <a:ln w="25400">
+            <a:solidFill>
+              <a:srgbClr val="00C8FF"/>
+            </a:solidFill>
+          </a:ln>
+        </p:spPr>
+        <p:style>
+          <a:lnRef idx="2">
+            <a:schemeClr val="accent1"/>
+          </a:lnRef>
+          <a:fillRef idx="0">
+            <a:schemeClr val="accent1"/>
+          </a:fillRef>
+          <a:effectRef idx="1">
+            <a:schemeClr val="accent1"/>
+          </a:effectRef>
+          <a:fontRef idx="minor">
+            <a:schemeClr val="tx1"/>
+          </a:fontRef>
+        </p:style>
+      </p:cxnSp>
+      <p:cxnSp>
+        <p:nvCxnSpPr>
+          <p:cNvPr id="25" name="Connector 24"/>
+          <p:cNvCxnSpPr/>
+          <p:nvPr/>
+        </p:nvCxnSpPr>
+        <p:spPr>
+          <a:xfrm flipV="1">
+            <a:off x="4764024.0" y="2320290.0"/>
+            <a:ext cx="9144.0" cy="5943.600000000093"/>
+          </a:xfrm>
+          <a:prstGeom prst="line">
+            <a:avLst/>
+          </a:prstGeom>
+          <a:ln w="25400">
+            <a:solidFill>
+              <a:srgbClr val="00C8FF"/>
+            </a:solidFill>
+          </a:ln>
+        </p:spPr>
+        <p:style>
+          <a:lnRef idx="2">
+            <a:schemeClr val="accent1"/>
+          </a:lnRef>
+          <a:fillRef idx="0">
+            <a:schemeClr val="accent1"/>
+          </a:fillRef>
+          <a:effectRef idx="1">
+            <a:schemeClr val="accent1"/>
+          </a:effectRef>
+          <a:fontRef idx="minor">
+            <a:schemeClr val="tx1"/>
+          </a:fontRef>
+        </p:style>
+      </p:cxnSp>
+      <p:cxnSp>
+        <p:nvCxnSpPr>
+          <p:cNvPr id="26" name="Connector 25"/>
+          <p:cNvCxnSpPr/>
+          <p:nvPr/>
+        </p:nvCxnSpPr>
+        <p:spPr>
+          <a:xfrm flipV="1">
+            <a:off x="4773168.0" y="2314803.6"/>
+            <a:ext cx="9144.0" cy="5486.399999999907"/>
+          </a:xfrm>
+          <a:prstGeom prst="line">
+            <a:avLst/>
+          </a:prstGeom>
+          <a:ln w="25400">
+            <a:solidFill>
+              <a:srgbClr val="00C8FF"/>
+            </a:solidFill>
+          </a:ln>
+        </p:spPr>
+        <p:style>
+          <a:lnRef idx="2">
+            <a:schemeClr val="accent1"/>
+          </a:lnRef>
+          <a:fillRef idx="0">
+            <a:schemeClr val="accent1"/>
+          </a:fillRef>
+          <a:effectRef idx="1">
+            <a:schemeClr val="accent1"/>
+          </a:effectRef>
+          <a:fontRef idx="minor">
+            <a:schemeClr val="tx1"/>
+          </a:fontRef>
+        </p:style>
+      </p:cxnSp>
+      <p:cxnSp>
+        <p:nvCxnSpPr>
+          <p:cNvPr id="27" name="Connector 26"/>
+          <p:cNvCxnSpPr/>
+          <p:nvPr/>
+        </p:nvCxnSpPr>
+        <p:spPr>
+          <a:xfrm flipV="1">
+            <a:off x="4782312.0" y="2308860.0"/>
+            <a:ext cx="9144.0" cy="5943.600000000093"/>
+          </a:xfrm>
+          <a:prstGeom prst="line">
+            <a:avLst/>
+          </a:prstGeom>
+          <a:ln w="25400">
+            <a:solidFill>
+              <a:srgbClr val="00C8FF"/>
+            </a:solidFill>
+          </a:ln>
+        </p:spPr>
+        <p:style>
+          <a:lnRef idx="2">
+            <a:schemeClr val="accent1"/>
+          </a:lnRef>
+          <a:fillRef idx="0">
+            <a:schemeClr val="accent1"/>
+          </a:fillRef>
+          <a:effectRef idx="1">
+            <a:schemeClr val="accent1"/>
+          </a:effectRef>
+          <a:fontRef idx="minor">
+            <a:schemeClr val="tx1"/>
+          </a:fontRef>
+        </p:style>
+      </p:cxnSp>
+      <p:sp>
+        <p:nvSpPr>
+          <p:cNvPr id="28" name="Oval 27"/>
+          <p:cNvSpPr/>
+          <p:nvPr/>
+        </p:nvSpPr>
+        <p:spPr>
+          <a:xfrm>
+            <a:off x="4876800" y="2213610"/>
+            <a:ext cx="76200" cy="76200"/>
+          </a:xfrm>
+          <a:prstGeom prst="ellipse">
+            <a:avLst/>
+          </a:prstGeom>
+          <a:noFill/>
+          <a:ln>
+            <a:solidFill>
+              <a:srgbClr val="FFFFFF"/>
+            </a:solidFill>
+          </a:ln>
+        </p:spPr>
+        <p:style>
+          <a:lnRef idx="1">
+            <a:schemeClr val="accent1"/>
+          </a:lnRef>
+          <a:fillRef idx="3">
+            <a:schemeClr val="accent1"/>
+          </a:fillRef>
+          <a:effectRef idx="2">
+            <a:schemeClr val="accent1"/>
+          </a:effectRef>
+          <a:fontRef idx="minor">
+            <a:schemeClr val="lt1"/>
+          </a:fontRef>
+        </p:style>
+        <p:txBody>
+          <a:bodyPr rtlCol="0" anchor="ctr"/>
+          <a:lstStyle/>
+          <a:p>
+            <a:pPr algn="ctr"/>
+          </a:p>
+        </p:txBody>
+      </p:sp>
     </p:spTree>
   </p:cSld>
   <p:clrMapOvr>

--- a/output/3.pptx
+++ b/output/3.pptx
@@ -3174,8 +3174,8 @@
         </p:nvCxnSpPr>
         <p:spPr>
           <a:xfrm flipV="1">
-            <a:off x="4572000.0" y="2519172.0"/>
-            <a:ext cx="9144.0" cy="52578.0"/>
+            <a:off x="4937760.0" y="2434590.0"/>
+            <a:ext cx="91440.0" cy="45720.0"/>
           </a:xfrm>
           <a:prstGeom prst="line">
             <a:avLst/>
@@ -3209,8 +3209,8 @@
         </p:nvCxnSpPr>
         <p:spPr>
           <a:xfrm flipV="1">
-            <a:off x="4581144.0" y="2497683.6"/>
-            <a:ext cx="9144.0" cy="21488.399999999907"/>
+            <a:off x="5029200.0" y="2388870.0"/>
+            <a:ext cx="91440.0" cy="45720.0"/>
           </a:xfrm>
           <a:prstGeom prst="line">
             <a:avLst/>
@@ -3244,8 +3244,8 @@
         </p:nvCxnSpPr>
         <p:spPr>
           <a:xfrm flipV="1">
-            <a:off x="4590288.0" y="2481224.4"/>
-            <a:ext cx="9144.0" cy="16459.200000000186"/>
+            <a:off x="5120640.0" y="2320290.0"/>
+            <a:ext cx="91440.0" cy="68580.0"/>
           </a:xfrm>
           <a:prstGeom prst="line">
             <a:avLst/>
@@ -3279,8 +3279,8 @@
         </p:nvCxnSpPr>
         <p:spPr>
           <a:xfrm flipV="1">
-            <a:off x="4599432.0" y="2467051.2"/>
-            <a:ext cx="9144.0" cy="14173.19999999972"/>
+            <a:off x="5212080.0" y="2228850.0"/>
+            <a:ext cx="91440.0" cy="91440.0"/>
           </a:xfrm>
           <a:prstGeom prst="line">
             <a:avLst/>
@@ -3314,8 +3314,8 @@
         </p:nvCxnSpPr>
         <p:spPr>
           <a:xfrm flipV="1">
-            <a:off x="4608576.0" y="2454706.8"/>
-            <a:ext cx="9144.0" cy="12344.400000000373"/>
+            <a:off x="5303520.0" y="2123694.0"/>
+            <a:ext cx="91440.0" cy="105156.0"/>
           </a:xfrm>
           <a:prstGeom prst="line">
             <a:avLst/>
@@ -3349,8 +3349,8 @@
         </p:nvCxnSpPr>
         <p:spPr>
           <a:xfrm flipV="1">
-            <a:off x="4617720.0" y="2443276.8"/>
-            <a:ext cx="9144.0" cy="11430.0"/>
+            <a:off x="5394960.0" y="2000250.0"/>
+            <a:ext cx="91440.0" cy="123444.0"/>
           </a:xfrm>
           <a:prstGeom prst="line">
             <a:avLst/>
@@ -3384,8 +3384,8 @@
         </p:nvCxnSpPr>
         <p:spPr>
           <a:xfrm flipV="1">
-            <a:off x="4626864.0" y="2432761.2"/>
-            <a:ext cx="9144.0" cy="10515.599999999627"/>
+            <a:off x="5486400.0" y="1931670.0"/>
+            <a:ext cx="45720.0" cy="68580.0"/>
           </a:xfrm>
           <a:prstGeom prst="line">
             <a:avLst/>
@@ -3419,8 +3419,8 @@
         </p:nvCxnSpPr>
         <p:spPr>
           <a:xfrm flipV="1">
-            <a:off x="4636008.0" y="2422702.8"/>
-            <a:ext cx="9144.0" cy="10058.400000000373"/>
+            <a:off x="5532120.0" y="1853946.0"/>
+            <a:ext cx="45720.0" cy="77724.0"/>
           </a:xfrm>
           <a:prstGeom prst="line">
             <a:avLst/>
@@ -3454,8 +3454,8 @@
         </p:nvCxnSpPr>
         <p:spPr>
           <a:xfrm flipV="1">
-            <a:off x="4645152.0" y="2413101.6"/>
-            <a:ext cx="9144.0" cy="9601.19999999972"/>
+            <a:off x="5577840.0" y="1771650.0"/>
+            <a:ext cx="45720.0" cy="82296.0"/>
           </a:xfrm>
           <a:prstGeom prst="line">
             <a:avLst/>
@@ -3489,8 +3489,8 @@
         </p:nvCxnSpPr>
         <p:spPr>
           <a:xfrm flipV="1">
-            <a:off x="4654296.0" y="2404414.8"/>
-            <a:ext cx="9144.0" cy="8686.80000000028"/>
+            <a:off x="5623560.0" y="1703070.0"/>
+            <a:ext cx="45720.0" cy="68580.0"/>
           </a:xfrm>
           <a:prstGeom prst="line">
             <a:avLst/>
@@ -3524,8 +3524,8 @@
         </p:nvCxnSpPr>
         <p:spPr>
           <a:xfrm flipV="1">
-            <a:off x="4663440.0" y="2396185.2"/>
-            <a:ext cx="9144.0" cy="8229.599999999627"/>
+            <a:off x="5669280.0" y="1657350.0"/>
+            <a:ext cx="45720.0" cy="45720.0"/>
           </a:xfrm>
           <a:prstGeom prst="line">
             <a:avLst/>
@@ -3559,8 +3559,8 @@
         </p:nvCxnSpPr>
         <p:spPr>
           <a:xfrm flipV="1">
-            <a:off x="4672584.0" y="2387955.6"/>
-            <a:ext cx="9144.0" cy="8229.600000000093"/>
+            <a:off x="5715000.0" y="1588770.0"/>
+            <a:ext cx="45720.0" cy="68580.0"/>
           </a:xfrm>
           <a:prstGeom prst="line">
             <a:avLst/>
@@ -3594,8 +3594,8 @@
         </p:nvCxnSpPr>
         <p:spPr>
           <a:xfrm flipV="1">
-            <a:off x="4681728.0" y="2380183.2"/>
-            <a:ext cx="9144.0" cy="7772.399999999907"/>
+            <a:off x="5760720.0" y="1520190.0"/>
+            <a:ext cx="45720.0" cy="68580.0"/>
           </a:xfrm>
           <a:prstGeom prst="line">
             <a:avLst/>
@@ -3629,8 +3629,8 @@
         </p:nvCxnSpPr>
         <p:spPr>
           <a:xfrm flipV="1">
-            <a:off x="4690872.0" y="2372868.0"/>
-            <a:ext cx="9144.0" cy="7315.200000000186"/>
+            <a:off x="5806440.0" y="1437894.0"/>
+            <a:ext cx="45720.0" cy="82296.0"/>
           </a:xfrm>
           <a:prstGeom prst="line">
             <a:avLst/>
@@ -3664,8 +3664,8 @@
         </p:nvCxnSpPr>
         <p:spPr>
           <a:xfrm flipV="1">
-            <a:off x="4700016.0" y="2365552.8"/>
-            <a:ext cx="9144.0" cy="7315.200000000186"/>
+            <a:off x="5852160.0" y="1360170.0"/>
+            <a:ext cx="45720.0" cy="77724.0"/>
           </a:xfrm>
           <a:prstGeom prst="line">
             <a:avLst/>
@@ -3699,8 +3699,8 @@
         </p:nvCxnSpPr>
         <p:spPr>
           <a:xfrm flipV="1">
-            <a:off x="4709160.0" y="2358237.6"/>
-            <a:ext cx="9144.0" cy="7315.199999999721"/>
+            <a:off x="5897880.0" y="1291590.0"/>
+            <a:ext cx="45720.0" cy="68580.0"/>
           </a:xfrm>
           <a:prstGeom prst="line">
             <a:avLst/>
@@ -3734,8 +3734,8 @@
         </p:nvCxnSpPr>
         <p:spPr>
           <a:xfrm flipV="1">
-            <a:off x="4718304.0" y="2351379.6"/>
-            <a:ext cx="9144.0" cy="6858.0"/>
+            <a:off x="5943600.0" y="1223010.0"/>
+            <a:ext cx="45720.0" cy="68580.0"/>
           </a:xfrm>
           <a:prstGeom prst="line">
             <a:avLst/>
@@ -3769,8 +3769,8 @@
         </p:nvCxnSpPr>
         <p:spPr>
           <a:xfrm flipV="1">
-            <a:off x="4727448.0" y="2344978.8"/>
-            <a:ext cx="9144.0" cy="6400.800000000279"/>
+            <a:off x="5989320.0" y="1154430.0"/>
+            <a:ext cx="45720.0" cy="68580.0"/>
           </a:xfrm>
           <a:prstGeom prst="line">
             <a:avLst/>
@@ -3804,8 +3804,8 @@
         </p:nvCxnSpPr>
         <p:spPr>
           <a:xfrm flipV="1">
-            <a:off x="4736592.0" y="2338578.0"/>
-            <a:ext cx="9144.0" cy="6400.799999999814"/>
+            <a:off x="6035040.0" y="1085850.0"/>
+            <a:ext cx="45720.0" cy="68580.0"/>
           </a:xfrm>
           <a:prstGeom prst="line">
             <a:avLst/>
@@ -3839,8 +3839,8 @@
         </p:nvCxnSpPr>
         <p:spPr>
           <a:xfrm flipV="1">
-            <a:off x="4745736.0" y="2332177.2"/>
-            <a:ext cx="9144.0" cy="6400.799999999814"/>
+            <a:off x="6080760.0" y="1017270.0"/>
+            <a:ext cx="45720.0" cy="68580.0"/>
           </a:xfrm>
           <a:prstGeom prst="line">
             <a:avLst/>
@@ -3874,8 +3874,8 @@
         </p:nvCxnSpPr>
         <p:spPr>
           <a:xfrm flipV="1">
-            <a:off x="4754880.0" y="2326233.6"/>
-            <a:ext cx="9144.0" cy="5943.600000000093"/>
+            <a:off x="6126480.0" y="948690.0"/>
+            <a:ext cx="45720.0" cy="68580.0"/>
           </a:xfrm>
           <a:prstGeom prst="line">
             <a:avLst/>
@@ -3901,126 +3901,23 @@
           </a:fontRef>
         </p:style>
       </p:cxnSp>
-      <p:cxnSp>
-        <p:nvCxnSpPr>
-          <p:cNvPr id="25" name="Connector 24"/>
-          <p:cNvCxnSpPr/>
-          <p:nvPr/>
-        </p:nvCxnSpPr>
-        <p:spPr>
-          <a:xfrm flipV="1">
-            <a:off x="4764024.0" y="2320290.0"/>
-            <a:ext cx="9144.0" cy="5943.600000000093"/>
-          </a:xfrm>
-          <a:prstGeom prst="line">
-            <a:avLst/>
-          </a:prstGeom>
-          <a:ln w="25400">
-            <a:solidFill>
-              <a:srgbClr val="00C8FF"/>
-            </a:solidFill>
-          </a:ln>
-        </p:spPr>
-        <p:style>
-          <a:lnRef idx="2">
-            <a:schemeClr val="accent1"/>
-          </a:lnRef>
-          <a:fillRef idx="0">
-            <a:schemeClr val="accent1"/>
-          </a:fillRef>
-          <a:effectRef idx="1">
-            <a:schemeClr val="accent1"/>
-          </a:effectRef>
-          <a:fontRef idx="minor">
-            <a:schemeClr val="tx1"/>
-          </a:fontRef>
-        </p:style>
-      </p:cxnSp>
-      <p:cxnSp>
-        <p:nvCxnSpPr>
-          <p:cNvPr id="26" name="Connector 25"/>
-          <p:cNvCxnSpPr/>
-          <p:nvPr/>
-        </p:nvCxnSpPr>
-        <p:spPr>
-          <a:xfrm flipV="1">
-            <a:off x="4773168.0" y="2314803.6"/>
-            <a:ext cx="9144.0" cy="5486.399999999907"/>
-          </a:xfrm>
-          <a:prstGeom prst="line">
-            <a:avLst/>
-          </a:prstGeom>
-          <a:ln w="25400">
-            <a:solidFill>
-              <a:srgbClr val="00C8FF"/>
-            </a:solidFill>
-          </a:ln>
-        </p:spPr>
-        <p:style>
-          <a:lnRef idx="2">
-            <a:schemeClr val="accent1"/>
-          </a:lnRef>
-          <a:fillRef idx="0">
-            <a:schemeClr val="accent1"/>
-          </a:fillRef>
-          <a:effectRef idx="1">
-            <a:schemeClr val="accent1"/>
-          </a:effectRef>
-          <a:fontRef idx="minor">
-            <a:schemeClr val="tx1"/>
-          </a:fontRef>
-        </p:style>
-      </p:cxnSp>
-      <p:cxnSp>
-        <p:nvCxnSpPr>
-          <p:cNvPr id="27" name="Connector 26"/>
-          <p:cNvCxnSpPr/>
-          <p:nvPr/>
-        </p:nvCxnSpPr>
-        <p:spPr>
-          <a:xfrm flipV="1">
-            <a:off x="4782312.0" y="2308860.0"/>
-            <a:ext cx="9144.0" cy="5943.600000000093"/>
-          </a:xfrm>
-          <a:prstGeom prst="line">
-            <a:avLst/>
-          </a:prstGeom>
-          <a:ln w="25400">
-            <a:solidFill>
-              <a:srgbClr val="00C8FF"/>
-            </a:solidFill>
-          </a:ln>
-        </p:spPr>
-        <p:style>
-          <a:lnRef idx="2">
-            <a:schemeClr val="accent1"/>
-          </a:lnRef>
-          <a:fillRef idx="0">
-            <a:schemeClr val="accent1"/>
-          </a:fillRef>
-          <a:effectRef idx="1">
-            <a:schemeClr val="accent1"/>
-          </a:effectRef>
-          <a:fontRef idx="minor">
-            <a:schemeClr val="tx1"/>
-          </a:fontRef>
-        </p:style>
-      </p:cxnSp>
-      <p:sp>
-        <p:nvSpPr>
-          <p:cNvPr id="28" name="Oval 27"/>
+      <p:sp>
+        <p:nvSpPr>
+          <p:cNvPr id="25" name="Oval 24"/>
           <p:cNvSpPr/>
           <p:nvPr/>
         </p:nvSpPr>
         <p:spPr>
           <a:xfrm>
-            <a:off x="4876800" y="2213610"/>
+            <a:off x="5676900" y="1619250"/>
             <a:ext cx="76200" cy="76200"/>
           </a:xfrm>
           <a:prstGeom prst="ellipse">
             <a:avLst/>
           </a:prstGeom>
-          <a:noFill/>
+          <a:solidFill>
+            <a:srgbClr val="FFFFFF"/>
+          </a:solidFill>
           <a:ln>
             <a:solidFill>
               <a:srgbClr val="FFFFFF"/>
@@ -4046,6 +3943,114 @@
           <a:lstStyle/>
           <a:p>
             <a:pPr algn="ctr"/>
+          </a:p>
+        </p:txBody>
+      </p:sp>
+      <p:sp>
+        <p:nvSpPr>
+          <p:cNvPr id="26" name="TextBox 25"/>
+          <p:cNvSpPr txBox="1"/>
+          <p:nvPr/>
+        </p:nvSpPr>
+        <p:spPr>
+          <a:xfrm>
+            <a:off x="5852160" y="834390"/>
+            <a:ext cx="635000" cy="254000"/>
+          </a:xfrm>
+          <a:prstGeom prst="rect">
+            <a:avLst/>
+          </a:prstGeom>
+          <a:noFill/>
+        </p:spPr>
+        <p:txBody>
+          <a:bodyPr wrap="none">
+            <a:spAutoFit/>
+          </a:bodyPr>
+          <a:lstStyle/>
+          <a:p>
+            <a:pPr>
+              <a:defRPr sz="1200">
+                <a:solidFill>
+                  <a:srgbClr val="FFFFFF"/>
+                </a:solidFill>
+                <a:latin typeface="Inter"/>
+              </a:defRPr>
+            </a:pPr>
+            <a:r>
+              <a:t>y=f(x)</a:t>
+            </a:r>
+          </a:p>
+        </p:txBody>
+      </p:sp>
+      <p:sp>
+        <p:nvSpPr>
+          <p:cNvPr id="27" name="TextBox 26"/>
+          <p:cNvSpPr txBox="1"/>
+          <p:nvPr/>
+        </p:nvSpPr>
+        <p:spPr>
+          <a:xfrm>
+            <a:off x="4343400" y="1657350"/>
+            <a:ext cx="635000" cy="254000"/>
+          </a:xfrm>
+          <a:prstGeom prst="rect">
+            <a:avLst/>
+          </a:prstGeom>
+          <a:noFill/>
+        </p:spPr>
+        <p:txBody>
+          <a:bodyPr wrap="none">
+            <a:spAutoFit/>
+          </a:bodyPr>
+          <a:lstStyle/>
+          <a:p>
+            <a:pPr>
+              <a:defRPr sz="1200">
+                <a:solidFill>
+                  <a:srgbClr val="FFFFFF"/>
+                </a:solidFill>
+                <a:latin typeface="Inter"/>
+              </a:defRPr>
+            </a:pPr>
+            <a:r>
+              <a:t>f(a)</a:t>
+            </a:r>
+          </a:p>
+        </p:txBody>
+      </p:sp>
+      <p:sp>
+        <p:nvSpPr>
+          <p:cNvPr id="28" name="TextBox 27"/>
+          <p:cNvSpPr txBox="1"/>
+          <p:nvPr/>
+        </p:nvSpPr>
+        <p:spPr>
+          <a:xfrm>
+            <a:off x="5715000" y="2731770"/>
+            <a:ext cx="635000" cy="254000"/>
+          </a:xfrm>
+          <a:prstGeom prst="rect">
+            <a:avLst/>
+          </a:prstGeom>
+          <a:noFill/>
+        </p:spPr>
+        <p:txBody>
+          <a:bodyPr wrap="none">
+            <a:spAutoFit/>
+          </a:bodyPr>
+          <a:lstStyle/>
+          <a:p>
+            <a:pPr>
+              <a:defRPr sz="1200">
+                <a:solidFill>
+                  <a:srgbClr val="FFFFFF"/>
+                </a:solidFill>
+                <a:latin typeface="Inter"/>
+              </a:defRPr>
+            </a:pPr>
+            <a:r>
+              <a:t>a</a:t>
+            </a:r>
           </a:p>
         </p:txBody>
       </p:sp>

--- a/output/3.pptx
+++ b/output/3.pptx
@@ -3174,8 +3174,8 @@
         </p:nvCxnSpPr>
         <p:spPr>
           <a:xfrm flipV="1">
-            <a:off x="4937760.0" y="2434590.0"/>
-            <a:ext cx="91440.0" cy="45720.0"/>
+            <a:off x="4937760.0" y="2459316.1224489794"/>
+            <a:ext cx="34523.2653061226" cy="20993.87755102059"/>
           </a:xfrm>
           <a:prstGeom prst="line">
             <a:avLst/>
@@ -3209,8 +3209,8 @@
         </p:nvCxnSpPr>
         <p:spPr>
           <a:xfrm flipV="1">
-            <a:off x="5029200.0" y="2388870.0"/>
-            <a:ext cx="91440.0" cy="45720.0"/>
+            <a:off x="4972283.265306123" y="2438322.2448979593"/>
+            <a:ext cx="34523.2653061226" cy="20993.877551020123"/>
           </a:xfrm>
           <a:prstGeom prst="line">
             <a:avLst/>
@@ -3244,8 +3244,8 @@
         </p:nvCxnSpPr>
         <p:spPr>
           <a:xfrm flipV="1">
-            <a:off x="5120640.0" y="2320290.0"/>
-            <a:ext cx="91440.0" cy="68580.0"/>
+            <a:off x="5006806.530612245" y="2416395.306122449"/>
+            <a:ext cx="34523.2653061226" cy="21926.93877551006"/>
           </a:xfrm>
           <a:prstGeom prst="line">
             <a:avLst/>
@@ -3279,8 +3279,8 @@
         </p:nvCxnSpPr>
         <p:spPr>
           <a:xfrm flipV="1">
-            <a:off x="5212080.0" y="2228850.0"/>
-            <a:ext cx="91440.0" cy="91440.0"/>
+            <a:off x="5041329.795918368" y="2394468.3673469387"/>
+            <a:ext cx="34523.26530612167" cy="21926.938775510527"/>
           </a:xfrm>
           <a:prstGeom prst="line">
             <a:avLst/>
@@ -3314,8 +3314,8 @@
         </p:nvCxnSpPr>
         <p:spPr>
           <a:xfrm flipV="1">
-            <a:off x="5303520.0" y="2123694.0"/>
-            <a:ext cx="91440.0" cy="105156.0"/>
+            <a:off x="5075853.0612244895" y="2372541.4285714286"/>
+            <a:ext cx="34523.2653061226" cy="21926.93877551006"/>
           </a:xfrm>
           <a:prstGeom prst="line">
             <a:avLst/>
@@ -3349,8 +3349,8 @@
         </p:nvCxnSpPr>
         <p:spPr>
           <a:xfrm flipV="1">
-            <a:off x="5394960.0" y="2000250.0"/>
-            <a:ext cx="91440.0" cy="123444.0"/>
+            <a:off x="5110376.326530612" y="2350614.4897959186"/>
+            <a:ext cx="34523.2653061226" cy="21926.93877551006"/>
           </a:xfrm>
           <a:prstGeom prst="line">
             <a:avLst/>
@@ -3384,8 +3384,8 @@
         </p:nvCxnSpPr>
         <p:spPr>
           <a:xfrm flipV="1">
-            <a:off x="5486400.0" y="1931670.0"/>
-            <a:ext cx="45720.0" cy="68580.0"/>
+            <a:off x="5144899.591836735" y="2336618.5714285714"/>
+            <a:ext cx="34523.2653061226" cy="13995.918367347214"/>
           </a:xfrm>
           <a:prstGeom prst="line">
             <a:avLst/>
@@ -3419,8 +3419,8 @@
         </p:nvCxnSpPr>
         <p:spPr>
           <a:xfrm flipV="1">
-            <a:off x="5532120.0" y="1853946.0"/>
-            <a:ext cx="45720.0" cy="77724.0"/>
+            <a:off x="5179422.857142857" y="2322622.6530612246"/>
+            <a:ext cx="34523.2653061226" cy="13995.918367346749"/>
           </a:xfrm>
           <a:prstGeom prst="line">
             <a:avLst/>
@@ -3454,8 +3454,8 @@
         </p:nvCxnSpPr>
         <p:spPr>
           <a:xfrm flipV="1">
-            <a:off x="5577840.0" y="1771650.0"/>
-            <a:ext cx="45720.0" cy="82296.0"/>
+            <a:off x="5213946.12244898" y="2308626.7346938774"/>
+            <a:ext cx="34523.26530612167" cy="13995.918367347214"/>
           </a:xfrm>
           <a:prstGeom prst="line">
             <a:avLst/>
@@ -3489,8 +3489,8 @@
         </p:nvCxnSpPr>
         <p:spPr>
           <a:xfrm flipV="1">
-            <a:off x="5623560.0" y="1703070.0"/>
-            <a:ext cx="45720.0" cy="68580.0"/>
+            <a:off x="5248469.387755102" y="2294630.8163265307"/>
+            <a:ext cx="34523.2653061226" cy="13995.918367346749"/>
           </a:xfrm>
           <a:prstGeom prst="line">
             <a:avLst/>
@@ -3524,8 +3524,8 @@
         </p:nvCxnSpPr>
         <p:spPr>
           <a:xfrm flipV="1">
-            <a:off x="5669280.0" y="1657350.0"/>
-            <a:ext cx="45720.0" cy="45720.0"/>
+            <a:off x="5282992.653061224" y="2271826.8"/>
+            <a:ext cx="34523.2653061226" cy="22804.016326530837"/>
           </a:xfrm>
           <a:prstGeom prst="line">
             <a:avLst/>
@@ -3559,8 +3559,8 @@
         </p:nvCxnSpPr>
         <p:spPr>
           <a:xfrm flipV="1">
-            <a:off x="5715000.0" y="1588770.0"/>
-            <a:ext cx="45720.0" cy="68580.0"/>
+            <a:off x="5317515.918367347" y="2249058.24"/>
+            <a:ext cx="34523.2653061226" cy="22768.55999999959"/>
           </a:xfrm>
           <a:prstGeom prst="line">
             <a:avLst/>
@@ -3594,8 +3594,8 @@
         </p:nvCxnSpPr>
         <p:spPr>
           <a:xfrm flipV="1">
-            <a:off x="5760720.0" y="1520190.0"/>
-            <a:ext cx="45720.0" cy="68580.0"/>
+            <a:off x="5352039.183673469" y="2226289.68"/>
+            <a:ext cx="34523.2653061226" cy="22768.560000000056"/>
           </a:xfrm>
           <a:prstGeom prst="line">
             <a:avLst/>
@@ -3629,8 +3629,8 @@
         </p:nvCxnSpPr>
         <p:spPr>
           <a:xfrm flipV="1">
-            <a:off x="5806440.0" y="1437894.0"/>
-            <a:ext cx="45720.0" cy="82296.0"/>
+            <a:off x="5386562.448979592" y="2203521.12"/>
+            <a:ext cx="34523.2653061226" cy="22768.560000000056"/>
           </a:xfrm>
           <a:prstGeom prst="line">
             <a:avLst/>
@@ -3664,8 +3664,8 @@
         </p:nvCxnSpPr>
         <p:spPr>
           <a:xfrm flipV="1">
-            <a:off x="5852160.0" y="1360170.0"/>
-            <a:ext cx="45720.0" cy="77724.0"/>
+            <a:off x="5421085.714285715" y="2180752.56"/>
+            <a:ext cx="34523.2653061226" cy="22768.560000000056"/>
           </a:xfrm>
           <a:prstGeom prst="line">
             <a:avLst/>
@@ -3699,8 +3699,8 @@
         </p:nvCxnSpPr>
         <p:spPr>
           <a:xfrm flipV="1">
-            <a:off x="5897880.0" y="1291590.0"/>
-            <a:ext cx="45720.0" cy="68580.0"/>
+            <a:off x="5455608.979591837" y="2157984.0"/>
+            <a:ext cx="34523.26530612167" cy="22768.560000000056"/>
           </a:xfrm>
           <a:prstGeom prst="line">
             <a:avLst/>
@@ -3734,8 +3734,8 @@
         </p:nvCxnSpPr>
         <p:spPr>
           <a:xfrm flipV="1">
-            <a:off x="5943600.0" y="1223010.0"/>
-            <a:ext cx="45720.0" cy="68580.0"/>
+            <a:off x="5490132.244897959" y="2121133.68"/>
+            <a:ext cx="34523.2653061226" cy="36850.31999999983"/>
           </a:xfrm>
           <a:prstGeom prst="line">
             <a:avLst/>
@@ -3769,8 +3769,8 @@
         </p:nvCxnSpPr>
         <p:spPr>
           <a:xfrm flipV="1">
-            <a:off x="5989320.0" y="1154430.0"/>
-            <a:ext cx="45720.0" cy="68580.0"/>
+            <a:off x="5524655.510204081" y="2084283.3599999999"/>
+            <a:ext cx="34523.2653061226" cy="36850.3200000003"/>
           </a:xfrm>
           <a:prstGeom prst="line">
             <a:avLst/>
@@ -3804,8 +3804,8 @@
         </p:nvCxnSpPr>
         <p:spPr>
           <a:xfrm flipV="1">
-            <a:off x="6035040.0" y="1085850.0"/>
-            <a:ext cx="45720.0" cy="68580.0"/>
+            <a:off x="5559178.775510204" y="2047433.04"/>
+            <a:ext cx="34523.2653061226" cy="36850.31999999983"/>
           </a:xfrm>
           <a:prstGeom prst="line">
             <a:avLst/>
@@ -3839,8 +3839,8 @@
         </p:nvCxnSpPr>
         <p:spPr>
           <a:xfrm flipV="1">
-            <a:off x="6080760.0" y="1017270.0"/>
-            <a:ext cx="45720.0" cy="68580.0"/>
+            <a:off x="5593702.040816327" y="2010582.72"/>
+            <a:ext cx="34523.26530612167" cy="36850.320000000065"/>
           </a:xfrm>
           <a:prstGeom prst="line">
             <a:avLst/>
@@ -3874,8 +3874,8 @@
         </p:nvCxnSpPr>
         <p:spPr>
           <a:xfrm flipV="1">
-            <a:off x="6126480.0" y="948690.0"/>
-            <a:ext cx="45720.0" cy="68580.0"/>
+            <a:off x="5628225.306122448" y="1973732.4"/>
+            <a:ext cx="34523.2653061226" cy="36850.320000000065"/>
           </a:xfrm>
           <a:prstGeom prst="line">
             <a:avLst/>
@@ -3901,15 +3901,995 @@
           </a:fontRef>
         </p:style>
       </p:cxnSp>
-      <p:sp>
-        <p:nvSpPr>
-          <p:cNvPr id="25" name="Oval 24"/>
+      <p:cxnSp>
+        <p:nvCxnSpPr>
+          <p:cNvPr id="25" name="Connector 24"/>
+          <p:cNvCxnSpPr/>
+          <p:nvPr/>
+        </p:nvCxnSpPr>
+        <p:spPr>
+          <a:xfrm flipV="1">
+            <a:off x="5662748.571428571" y="1936882.08"/>
+            <a:ext cx="34523.2653061226" cy="36850.31999999983"/>
+          </a:xfrm>
+          <a:prstGeom prst="line">
+            <a:avLst/>
+          </a:prstGeom>
+          <a:ln w="25400">
+            <a:solidFill>
+              <a:srgbClr val="00C8FF"/>
+            </a:solidFill>
+          </a:ln>
+        </p:spPr>
+        <p:style>
+          <a:lnRef idx="2">
+            <a:schemeClr val="accent1"/>
+          </a:lnRef>
+          <a:fillRef idx="0">
+            <a:schemeClr val="accent1"/>
+          </a:fillRef>
+          <a:effectRef idx="1">
+            <a:schemeClr val="accent1"/>
+          </a:effectRef>
+          <a:fontRef idx="minor">
+            <a:schemeClr val="tx1"/>
+          </a:fontRef>
+        </p:style>
+      </p:cxnSp>
+      <p:cxnSp>
+        <p:nvCxnSpPr>
+          <p:cNvPr id="26" name="Connector 25"/>
+          <p:cNvCxnSpPr/>
+          <p:nvPr/>
+        </p:nvCxnSpPr>
+        <p:spPr>
+          <a:xfrm flipV="1">
+            <a:off x="5697271.8367346935" y="1900031.76"/>
+            <a:ext cx="34523.2653061226" cy="36850.320000000065"/>
+          </a:xfrm>
+          <a:prstGeom prst="line">
+            <a:avLst/>
+          </a:prstGeom>
+          <a:ln w="25400">
+            <a:solidFill>
+              <a:srgbClr val="00C8FF"/>
+            </a:solidFill>
+          </a:ln>
+        </p:spPr>
+        <p:style>
+          <a:lnRef idx="2">
+            <a:schemeClr val="accent1"/>
+          </a:lnRef>
+          <a:fillRef idx="0">
+            <a:schemeClr val="accent1"/>
+          </a:fillRef>
+          <a:effectRef idx="1">
+            <a:schemeClr val="accent1"/>
+          </a:effectRef>
+          <a:fontRef idx="minor">
+            <a:schemeClr val="tx1"/>
+          </a:fontRef>
+        </p:style>
+      </p:cxnSp>
+      <p:cxnSp>
+        <p:nvCxnSpPr>
+          <p:cNvPr id="27" name="Connector 26"/>
+          <p:cNvCxnSpPr/>
+          <p:nvPr/>
+        </p:nvCxnSpPr>
+        <p:spPr>
+          <a:xfrm flipV="1">
+            <a:off x="5731795.102040816" y="1859249.52"/>
+            <a:ext cx="34523.2653061226" cy="40782.23999999999"/>
+          </a:xfrm>
+          <a:prstGeom prst="line">
+            <a:avLst/>
+          </a:prstGeom>
+          <a:ln w="25400">
+            <a:solidFill>
+              <a:srgbClr val="00C8FF"/>
+            </a:solidFill>
+          </a:ln>
+        </p:spPr>
+        <p:style>
+          <a:lnRef idx="2">
+            <a:schemeClr val="accent1"/>
+          </a:lnRef>
+          <a:fillRef idx="0">
+            <a:schemeClr val="accent1"/>
+          </a:fillRef>
+          <a:effectRef idx="1">
+            <a:schemeClr val="accent1"/>
+          </a:effectRef>
+          <a:fontRef idx="minor">
+            <a:schemeClr val="tx1"/>
+          </a:fontRef>
+        </p:style>
+      </p:cxnSp>
+      <p:cxnSp>
+        <p:nvCxnSpPr>
+          <p:cNvPr id="28" name="Connector 27"/>
+          <p:cNvCxnSpPr/>
+          <p:nvPr/>
+        </p:nvCxnSpPr>
+        <p:spPr>
+          <a:xfrm flipV="1">
+            <a:off x="5766318.367346939" y="1818467.28"/>
+            <a:ext cx="34523.2653061226" cy="40782.23999999999"/>
+          </a:xfrm>
+          <a:prstGeom prst="line">
+            <a:avLst/>
+          </a:prstGeom>
+          <a:ln w="25400">
+            <a:solidFill>
+              <a:srgbClr val="00C8FF"/>
+            </a:solidFill>
+          </a:ln>
+        </p:spPr>
+        <p:style>
+          <a:lnRef idx="2">
+            <a:schemeClr val="accent1"/>
+          </a:lnRef>
+          <a:fillRef idx="0">
+            <a:schemeClr val="accent1"/>
+          </a:fillRef>
+          <a:effectRef idx="1">
+            <a:schemeClr val="accent1"/>
+          </a:effectRef>
+          <a:fontRef idx="minor">
+            <a:schemeClr val="tx1"/>
+          </a:fontRef>
+        </p:style>
+      </p:cxnSp>
+      <p:cxnSp>
+        <p:nvCxnSpPr>
+          <p:cNvPr id="29" name="Connector 28"/>
+          <p:cNvCxnSpPr/>
+          <p:nvPr/>
+        </p:nvCxnSpPr>
+        <p:spPr>
+          <a:xfrm flipV="1">
+            <a:off x="5800841.632653061" y="1777685.04"/>
+            <a:ext cx="34523.2653061226" cy="40782.23999999999"/>
+          </a:xfrm>
+          <a:prstGeom prst="line">
+            <a:avLst/>
+          </a:prstGeom>
+          <a:ln w="25400">
+            <a:solidFill>
+              <a:srgbClr val="00C8FF"/>
+            </a:solidFill>
+          </a:ln>
+        </p:spPr>
+        <p:style>
+          <a:lnRef idx="2">
+            <a:schemeClr val="accent1"/>
+          </a:lnRef>
+          <a:fillRef idx="0">
+            <a:schemeClr val="accent1"/>
+          </a:fillRef>
+          <a:effectRef idx="1">
+            <a:schemeClr val="accent1"/>
+          </a:effectRef>
+          <a:fontRef idx="minor">
+            <a:schemeClr val="tx1"/>
+          </a:fontRef>
+        </p:style>
+      </p:cxnSp>
+      <p:cxnSp>
+        <p:nvCxnSpPr>
+          <p:cNvPr id="30" name="Connector 29"/>
+          <p:cNvCxnSpPr/>
+          <p:nvPr/>
+        </p:nvCxnSpPr>
+        <p:spPr>
+          <a:xfrm flipV="1">
+            <a:off x="5835364.897959184" y="1736902.7999999998"/>
+            <a:ext cx="34523.2653061226" cy="40782.24000000022"/>
+          </a:xfrm>
+          <a:prstGeom prst="line">
+            <a:avLst/>
+          </a:prstGeom>
+          <a:ln w="25400">
+            <a:solidFill>
+              <a:srgbClr val="00C8FF"/>
+            </a:solidFill>
+          </a:ln>
+        </p:spPr>
+        <p:style>
+          <a:lnRef idx="2">
+            <a:schemeClr val="accent1"/>
+          </a:lnRef>
+          <a:fillRef idx="0">
+            <a:schemeClr val="accent1"/>
+          </a:fillRef>
+          <a:effectRef idx="1">
+            <a:schemeClr val="accent1"/>
+          </a:effectRef>
+          <a:fontRef idx="minor">
+            <a:schemeClr val="tx1"/>
+          </a:fontRef>
+        </p:style>
+      </p:cxnSp>
+      <p:cxnSp>
+        <p:nvCxnSpPr>
+          <p:cNvPr id="31" name="Connector 30"/>
+          <p:cNvCxnSpPr/>
+          <p:nvPr/>
+        </p:nvCxnSpPr>
+        <p:spPr>
+          <a:xfrm flipV="1">
+            <a:off x="5869888.1632653065" y="1696120.56"/>
+            <a:ext cx="34523.2653061226" cy="40782.23999999976"/>
+          </a:xfrm>
+          <a:prstGeom prst="line">
+            <a:avLst/>
+          </a:prstGeom>
+          <a:ln w="25400">
+            <a:solidFill>
+              <a:srgbClr val="00C8FF"/>
+            </a:solidFill>
+          </a:ln>
+        </p:spPr>
+        <p:style>
+          <a:lnRef idx="2">
+            <a:schemeClr val="accent1"/>
+          </a:lnRef>
+          <a:fillRef idx="0">
+            <a:schemeClr val="accent1"/>
+          </a:fillRef>
+          <a:effectRef idx="1">
+            <a:schemeClr val="accent1"/>
+          </a:effectRef>
+          <a:fontRef idx="minor">
+            <a:schemeClr val="tx1"/>
+          </a:fontRef>
+        </p:style>
+      </p:cxnSp>
+      <p:cxnSp>
+        <p:nvCxnSpPr>
+          <p:cNvPr id="32" name="Connector 31"/>
+          <p:cNvCxnSpPr/>
+          <p:nvPr/>
+        </p:nvCxnSpPr>
+        <p:spPr>
+          <a:xfrm flipV="1">
+            <a:off x="5904411.428571429" y="1655338.32"/>
+            <a:ext cx="34523.26530612167" cy="40782.23999999999"/>
+          </a:xfrm>
+          <a:prstGeom prst="line">
+            <a:avLst/>
+          </a:prstGeom>
+          <a:ln w="25400">
+            <a:solidFill>
+              <a:srgbClr val="00C8FF"/>
+            </a:solidFill>
+          </a:ln>
+        </p:spPr>
+        <p:style>
+          <a:lnRef idx="2">
+            <a:schemeClr val="accent1"/>
+          </a:lnRef>
+          <a:fillRef idx="0">
+            <a:schemeClr val="accent1"/>
+          </a:fillRef>
+          <a:effectRef idx="1">
+            <a:schemeClr val="accent1"/>
+          </a:effectRef>
+          <a:fontRef idx="minor">
+            <a:schemeClr val="tx1"/>
+          </a:fontRef>
+        </p:style>
+      </p:cxnSp>
+      <p:cxnSp>
+        <p:nvCxnSpPr>
+          <p:cNvPr id="33" name="Connector 32"/>
+          <p:cNvCxnSpPr/>
+          <p:nvPr/>
+        </p:nvCxnSpPr>
+        <p:spPr>
+          <a:xfrm flipV="1">
+            <a:off x="5938934.693877551" y="1633575.6"/>
+            <a:ext cx="34523.2653061226" cy="21762.719999999972"/>
+          </a:xfrm>
+          <a:prstGeom prst="line">
+            <a:avLst/>
+          </a:prstGeom>
+          <a:ln w="25400">
+            <a:solidFill>
+              <a:srgbClr val="00C8FF"/>
+            </a:solidFill>
+          </a:ln>
+        </p:spPr>
+        <p:style>
+          <a:lnRef idx="2">
+            <a:schemeClr val="accent1"/>
+          </a:lnRef>
+          <a:fillRef idx="0">
+            <a:schemeClr val="accent1"/>
+          </a:fillRef>
+          <a:effectRef idx="1">
+            <a:schemeClr val="accent1"/>
+          </a:effectRef>
+          <a:fontRef idx="minor">
+            <a:schemeClr val="tx1"/>
+          </a:fontRef>
+        </p:style>
+      </p:cxnSp>
+      <p:cxnSp>
+        <p:nvCxnSpPr>
+          <p:cNvPr id="34" name="Connector 33"/>
+          <p:cNvCxnSpPr/>
+          <p:nvPr/>
+        </p:nvCxnSpPr>
+        <p:spPr>
+          <a:xfrm flipV="1">
+            <a:off x="5973457.959183673" y="1611812.88"/>
+            <a:ext cx="34523.2653061226" cy="21762.720000000205"/>
+          </a:xfrm>
+          <a:prstGeom prst="line">
+            <a:avLst/>
+          </a:prstGeom>
+          <a:ln w="25400">
+            <a:solidFill>
+              <a:srgbClr val="00C8FF"/>
+            </a:solidFill>
+          </a:ln>
+        </p:spPr>
+        <p:style>
+          <a:lnRef idx="2">
+            <a:schemeClr val="accent1"/>
+          </a:lnRef>
+          <a:fillRef idx="0">
+            <a:schemeClr val="accent1"/>
+          </a:fillRef>
+          <a:effectRef idx="1">
+            <a:schemeClr val="accent1"/>
+          </a:effectRef>
+          <a:fontRef idx="minor">
+            <a:schemeClr val="tx1"/>
+          </a:fontRef>
+        </p:style>
+      </p:cxnSp>
+      <p:cxnSp>
+        <p:nvCxnSpPr>
+          <p:cNvPr id="35" name="Connector 34"/>
+          <p:cNvCxnSpPr/>
+          <p:nvPr/>
+        </p:nvCxnSpPr>
+        <p:spPr>
+          <a:xfrm flipV="1">
+            <a:off x="6007981.224489796" y="1590050.16"/>
+            <a:ext cx="34523.2653061226" cy="21762.719999999972"/>
+          </a:xfrm>
+          <a:prstGeom prst="line">
+            <a:avLst/>
+          </a:prstGeom>
+          <a:ln w="25400">
+            <a:solidFill>
+              <a:srgbClr val="00C8FF"/>
+            </a:solidFill>
+          </a:ln>
+        </p:spPr>
+        <p:style>
+          <a:lnRef idx="2">
+            <a:schemeClr val="accent1"/>
+          </a:lnRef>
+          <a:fillRef idx="0">
+            <a:schemeClr val="accent1"/>
+          </a:fillRef>
+          <a:effectRef idx="1">
+            <a:schemeClr val="accent1"/>
+          </a:effectRef>
+          <a:fontRef idx="minor">
+            <a:schemeClr val="tx1"/>
+          </a:fontRef>
+        </p:style>
+      </p:cxnSp>
+      <p:cxnSp>
+        <p:nvCxnSpPr>
+          <p:cNvPr id="36" name="Connector 35"/>
+          <p:cNvCxnSpPr/>
+          <p:nvPr/>
+        </p:nvCxnSpPr>
+        <p:spPr>
+          <a:xfrm flipV="1">
+            <a:off x="6042504.489795919" y="1568287.44"/>
+            <a:ext cx="34523.2653061226" cy="21762.719999999972"/>
+          </a:xfrm>
+          <a:prstGeom prst="line">
+            <a:avLst/>
+          </a:prstGeom>
+          <a:ln w="25400">
+            <a:solidFill>
+              <a:srgbClr val="00C8FF"/>
+            </a:solidFill>
+          </a:ln>
+        </p:spPr>
+        <p:style>
+          <a:lnRef idx="2">
+            <a:schemeClr val="accent1"/>
+          </a:lnRef>
+          <a:fillRef idx="0">
+            <a:schemeClr val="accent1"/>
+          </a:fillRef>
+          <a:effectRef idx="1">
+            <a:schemeClr val="accent1"/>
+          </a:effectRef>
+          <a:fontRef idx="minor">
+            <a:schemeClr val="tx1"/>
+          </a:fontRef>
+        </p:style>
+      </p:cxnSp>
+      <p:cxnSp>
+        <p:nvCxnSpPr>
+          <p:cNvPr id="37" name="Connector 36"/>
+          <p:cNvCxnSpPr/>
+          <p:nvPr/>
+        </p:nvCxnSpPr>
+        <p:spPr>
+          <a:xfrm flipV="1">
+            <a:off x="6077027.755102041" y="1520921.52"/>
+            <a:ext cx="34523.26530612167" cy="47365.919999999925"/>
+          </a:xfrm>
+          <a:prstGeom prst="line">
+            <a:avLst/>
+          </a:prstGeom>
+          <a:ln w="25400">
+            <a:solidFill>
+              <a:srgbClr val="00C8FF"/>
+            </a:solidFill>
+          </a:ln>
+        </p:spPr>
+        <p:style>
+          <a:lnRef idx="2">
+            <a:schemeClr val="accent1"/>
+          </a:lnRef>
+          <a:fillRef idx="0">
+            <a:schemeClr val="accent1"/>
+          </a:fillRef>
+          <a:effectRef idx="1">
+            <a:schemeClr val="accent1"/>
+          </a:effectRef>
+          <a:fontRef idx="minor">
+            <a:schemeClr val="tx1"/>
+          </a:fontRef>
+        </p:style>
+      </p:cxnSp>
+      <p:cxnSp>
+        <p:nvCxnSpPr>
+          <p:cNvPr id="38" name="Connector 37"/>
+          <p:cNvCxnSpPr/>
+          <p:nvPr/>
+        </p:nvCxnSpPr>
+        <p:spPr>
+          <a:xfrm flipV="1">
+            <a:off x="6111551.020408163" y="1473555.5999999999"/>
+            <a:ext cx="34523.2653061226" cy="47365.92000000016"/>
+          </a:xfrm>
+          <a:prstGeom prst="line">
+            <a:avLst/>
+          </a:prstGeom>
+          <a:ln w="25400">
+            <a:solidFill>
+              <a:srgbClr val="00C8FF"/>
+            </a:solidFill>
+          </a:ln>
+        </p:spPr>
+        <p:style>
+          <a:lnRef idx="2">
+            <a:schemeClr val="accent1"/>
+          </a:lnRef>
+          <a:fillRef idx="0">
+            <a:schemeClr val="accent1"/>
+          </a:fillRef>
+          <a:effectRef idx="1">
+            <a:schemeClr val="accent1"/>
+          </a:effectRef>
+          <a:fontRef idx="minor">
+            <a:schemeClr val="tx1"/>
+          </a:fontRef>
+        </p:style>
+      </p:cxnSp>
+      <p:cxnSp>
+        <p:nvCxnSpPr>
+          <p:cNvPr id="39" name="Connector 38"/>
+          <p:cNvCxnSpPr/>
+          <p:nvPr/>
+        </p:nvCxnSpPr>
+        <p:spPr>
+          <a:xfrm flipV="1">
+            <a:off x="6146074.285714285" y="1426189.6800000002"/>
+            <a:ext cx="34523.2653061226" cy="47365.91999999969"/>
+          </a:xfrm>
+          <a:prstGeom prst="line">
+            <a:avLst/>
+          </a:prstGeom>
+          <a:ln w="25400">
+            <a:solidFill>
+              <a:srgbClr val="00C8FF"/>
+            </a:solidFill>
+          </a:ln>
+        </p:spPr>
+        <p:style>
+          <a:lnRef idx="2">
+            <a:schemeClr val="accent1"/>
+          </a:lnRef>
+          <a:fillRef idx="0">
+            <a:schemeClr val="accent1"/>
+          </a:fillRef>
+          <a:effectRef idx="1">
+            <a:schemeClr val="accent1"/>
+          </a:effectRef>
+          <a:fontRef idx="minor">
+            <a:schemeClr val="tx1"/>
+          </a:fontRef>
+        </p:style>
+      </p:cxnSp>
+      <p:cxnSp>
+        <p:nvCxnSpPr>
+          <p:cNvPr id="40" name="Connector 39"/>
+          <p:cNvCxnSpPr/>
+          <p:nvPr/>
+        </p:nvCxnSpPr>
+        <p:spPr>
+          <a:xfrm flipV="1">
+            <a:off x="6180597.551020408" y="1364742.0"/>
+            <a:ext cx="34523.2653061226" cy="61447.68000000017"/>
+          </a:xfrm>
+          <a:prstGeom prst="line">
+            <a:avLst/>
+          </a:prstGeom>
+          <a:ln w="25400">
+            <a:solidFill>
+              <a:srgbClr val="00C8FF"/>
+            </a:solidFill>
+          </a:ln>
+        </p:spPr>
+        <p:style>
+          <a:lnRef idx="2">
+            <a:schemeClr val="accent1"/>
+          </a:lnRef>
+          <a:fillRef idx="0">
+            <a:schemeClr val="accent1"/>
+          </a:fillRef>
+          <a:effectRef idx="1">
+            <a:schemeClr val="accent1"/>
+          </a:effectRef>
+          <a:fontRef idx="minor">
+            <a:schemeClr val="tx1"/>
+          </a:fontRef>
+        </p:style>
+      </p:cxnSp>
+      <p:cxnSp>
+        <p:nvCxnSpPr>
+          <p:cNvPr id="41" name="Connector 40"/>
+          <p:cNvCxnSpPr/>
+          <p:nvPr/>
+        </p:nvCxnSpPr>
+        <p:spPr>
+          <a:xfrm flipV="1">
+            <a:off x="6215120.816326531" y="1300734.0"/>
+            <a:ext cx="34523.2653061226" cy="64008.0"/>
+          </a:xfrm>
+          <a:prstGeom prst="line">
+            <a:avLst/>
+          </a:prstGeom>
+          <a:ln w="25400">
+            <a:solidFill>
+              <a:srgbClr val="00C8FF"/>
+            </a:solidFill>
+          </a:ln>
+        </p:spPr>
+        <p:style>
+          <a:lnRef idx="2">
+            <a:schemeClr val="accent1"/>
+          </a:lnRef>
+          <a:fillRef idx="0">
+            <a:schemeClr val="accent1"/>
+          </a:fillRef>
+          <a:effectRef idx="1">
+            <a:schemeClr val="accent1"/>
+          </a:effectRef>
+          <a:fontRef idx="minor">
+            <a:schemeClr val="tx1"/>
+          </a:fontRef>
+        </p:style>
+      </p:cxnSp>
+      <p:cxnSp>
+        <p:nvCxnSpPr>
+          <p:cNvPr id="42" name="Connector 41"/>
+          <p:cNvCxnSpPr/>
+          <p:nvPr/>
+        </p:nvCxnSpPr>
+        <p:spPr>
+          <a:xfrm flipV="1">
+            <a:off x="6249644.081632653" y="1236726.0"/>
+            <a:ext cx="34523.2653061226" cy="64008.0"/>
+          </a:xfrm>
+          <a:prstGeom prst="line">
+            <a:avLst/>
+          </a:prstGeom>
+          <a:ln w="25400">
+            <a:solidFill>
+              <a:srgbClr val="00C8FF"/>
+            </a:solidFill>
+          </a:ln>
+        </p:spPr>
+        <p:style>
+          <a:lnRef idx="2">
+            <a:schemeClr val="accent1"/>
+          </a:lnRef>
+          <a:fillRef idx="0">
+            <a:schemeClr val="accent1"/>
+          </a:fillRef>
+          <a:effectRef idx="1">
+            <a:schemeClr val="accent1"/>
+          </a:effectRef>
+          <a:fontRef idx="minor">
+            <a:schemeClr val="tx1"/>
+          </a:fontRef>
+        </p:style>
+      </p:cxnSp>
+      <p:cxnSp>
+        <p:nvCxnSpPr>
+          <p:cNvPr id="43" name="Connector 42"/>
+          <p:cNvCxnSpPr/>
+          <p:nvPr/>
+        </p:nvCxnSpPr>
+        <p:spPr>
+          <a:xfrm flipV="1">
+            <a:off x="6284167.346938776" y="1172718.0"/>
+            <a:ext cx="34523.2653061226" cy="64008.0"/>
+          </a:xfrm>
+          <a:prstGeom prst="line">
+            <a:avLst/>
+          </a:prstGeom>
+          <a:ln w="25400">
+            <a:solidFill>
+              <a:srgbClr val="00C8FF"/>
+            </a:solidFill>
+          </a:ln>
+        </p:spPr>
+        <p:style>
+          <a:lnRef idx="2">
+            <a:schemeClr val="accent1"/>
+          </a:lnRef>
+          <a:fillRef idx="0">
+            <a:schemeClr val="accent1"/>
+          </a:fillRef>
+          <a:effectRef idx="1">
+            <a:schemeClr val="accent1"/>
+          </a:effectRef>
+          <a:fontRef idx="minor">
+            <a:schemeClr val="tx1"/>
+          </a:fontRef>
+        </p:style>
+      </p:cxnSp>
+      <p:cxnSp>
+        <p:nvCxnSpPr>
+          <p:cNvPr id="44" name="Connector 43"/>
+          <p:cNvCxnSpPr/>
+          <p:nvPr/>
+        </p:nvCxnSpPr>
+        <p:spPr>
+          <a:xfrm flipV="1">
+            <a:off x="6318690.612244898" y="1108710.0"/>
+            <a:ext cx="34523.2653061226" cy="64008.0"/>
+          </a:xfrm>
+          <a:prstGeom prst="line">
+            <a:avLst/>
+          </a:prstGeom>
+          <a:ln w="25400">
+            <a:solidFill>
+              <a:srgbClr val="00C8FF"/>
+            </a:solidFill>
+          </a:ln>
+        </p:spPr>
+        <p:style>
+          <a:lnRef idx="2">
+            <a:schemeClr val="accent1"/>
+          </a:lnRef>
+          <a:fillRef idx="0">
+            <a:schemeClr val="accent1"/>
+          </a:fillRef>
+          <a:effectRef idx="1">
+            <a:schemeClr val="accent1"/>
+          </a:effectRef>
+          <a:fontRef idx="minor">
+            <a:schemeClr val="tx1"/>
+          </a:fontRef>
+        </p:style>
+      </p:cxnSp>
+      <p:cxnSp>
+        <p:nvCxnSpPr>
+          <p:cNvPr id="45" name="Connector 44"/>
+          <p:cNvCxnSpPr/>
+          <p:nvPr/>
+        </p:nvCxnSpPr>
+        <p:spPr>
+          <a:xfrm flipV="1">
+            <a:off x="6353213.877551021" y="1044702.0"/>
+            <a:ext cx="34523.26530612167" cy="64008.0"/>
+          </a:xfrm>
+          <a:prstGeom prst="line">
+            <a:avLst/>
+          </a:prstGeom>
+          <a:ln w="25400">
+            <a:solidFill>
+              <a:srgbClr val="00C8FF"/>
+            </a:solidFill>
+          </a:ln>
+        </p:spPr>
+        <p:style>
+          <a:lnRef idx="2">
+            <a:schemeClr val="accent1"/>
+          </a:lnRef>
+          <a:fillRef idx="0">
+            <a:schemeClr val="accent1"/>
+          </a:fillRef>
+          <a:effectRef idx="1">
+            <a:schemeClr val="accent1"/>
+          </a:effectRef>
+          <a:fontRef idx="minor">
+            <a:schemeClr val="tx1"/>
+          </a:fontRef>
+        </p:style>
+      </p:cxnSp>
+      <p:cxnSp>
+        <p:nvCxnSpPr>
+          <p:cNvPr id="46" name="Connector 45"/>
+          <p:cNvCxnSpPr/>
+          <p:nvPr/>
+        </p:nvCxnSpPr>
+        <p:spPr>
+          <a:xfrm flipV="1">
+            <a:off x="6387737.142857143" y="980694.0"/>
+            <a:ext cx="34523.2653061226" cy="64008.0"/>
+          </a:xfrm>
+          <a:prstGeom prst="line">
+            <a:avLst/>
+          </a:prstGeom>
+          <a:ln w="25400">
+            <a:solidFill>
+              <a:srgbClr val="00C8FF"/>
+            </a:solidFill>
+          </a:ln>
+        </p:spPr>
+        <p:style>
+          <a:lnRef idx="2">
+            <a:schemeClr val="accent1"/>
+          </a:lnRef>
+          <a:fillRef idx="0">
+            <a:schemeClr val="accent1"/>
+          </a:fillRef>
+          <a:effectRef idx="1">
+            <a:schemeClr val="accent1"/>
+          </a:effectRef>
+          <a:fontRef idx="minor">
+            <a:schemeClr val="tx1"/>
+          </a:fontRef>
+        </p:style>
+      </p:cxnSp>
+      <p:cxnSp>
+        <p:nvCxnSpPr>
+          <p:cNvPr id="47" name="Connector 46"/>
+          <p:cNvCxnSpPr/>
+          <p:nvPr/>
+        </p:nvCxnSpPr>
+        <p:spPr>
+          <a:xfrm flipV="1">
+            <a:off x="6422260.408163265" y="902970.0"/>
+            <a:ext cx="34523.2653061226" cy="77724.0"/>
+          </a:xfrm>
+          <a:prstGeom prst="line">
+            <a:avLst/>
+          </a:prstGeom>
+          <a:ln w="25400">
+            <a:solidFill>
+              <a:srgbClr val="00C8FF"/>
+            </a:solidFill>
+          </a:ln>
+        </p:spPr>
+        <p:style>
+          <a:lnRef idx="2">
+            <a:schemeClr val="accent1"/>
+          </a:lnRef>
+          <a:fillRef idx="0">
+            <a:schemeClr val="accent1"/>
+          </a:fillRef>
+          <a:effectRef idx="1">
+            <a:schemeClr val="accent1"/>
+          </a:effectRef>
+          <a:fontRef idx="minor">
+            <a:schemeClr val="tx1"/>
+          </a:fontRef>
+        </p:style>
+      </p:cxnSp>
+      <p:cxnSp>
+        <p:nvCxnSpPr>
+          <p:cNvPr id="48" name="Connector 47"/>
+          <p:cNvCxnSpPr/>
+          <p:nvPr/>
+        </p:nvCxnSpPr>
+        <p:spPr>
+          <a:xfrm flipV="1">
+            <a:off x="6456783.673469388" y="825246.0"/>
+            <a:ext cx="34523.26530612167" cy="77724.0"/>
+          </a:xfrm>
+          <a:prstGeom prst="line">
+            <a:avLst/>
+          </a:prstGeom>
+          <a:ln w="25400">
+            <a:solidFill>
+              <a:srgbClr val="00C8FF"/>
+            </a:solidFill>
+          </a:ln>
+        </p:spPr>
+        <p:style>
+          <a:lnRef idx="2">
+            <a:schemeClr val="accent1"/>
+          </a:lnRef>
+          <a:fillRef idx="0">
+            <a:schemeClr val="accent1"/>
+          </a:fillRef>
+          <a:effectRef idx="1">
+            <a:schemeClr val="accent1"/>
+          </a:effectRef>
+          <a:fontRef idx="minor">
+            <a:schemeClr val="tx1"/>
+          </a:fontRef>
+        </p:style>
+      </p:cxnSp>
+      <p:cxnSp>
+        <p:nvCxnSpPr>
+          <p:cNvPr id="49" name="Connector 48"/>
+          <p:cNvCxnSpPr/>
+          <p:nvPr/>
+        </p:nvCxnSpPr>
+        <p:spPr>
+          <a:xfrm flipV="1">
+            <a:off x="6491306.93877551" y="747522.0"/>
+            <a:ext cx="34523.2653061226" cy="77724.0"/>
+          </a:xfrm>
+          <a:prstGeom prst="line">
+            <a:avLst/>
+          </a:prstGeom>
+          <a:ln w="25400">
+            <a:solidFill>
+              <a:srgbClr val="00C8FF"/>
+            </a:solidFill>
+          </a:ln>
+        </p:spPr>
+        <p:style>
+          <a:lnRef idx="2">
+            <a:schemeClr val="accent1"/>
+          </a:lnRef>
+          <a:fillRef idx="0">
+            <a:schemeClr val="accent1"/>
+          </a:fillRef>
+          <a:effectRef idx="1">
+            <a:schemeClr val="accent1"/>
+          </a:effectRef>
+          <a:fontRef idx="minor">
+            <a:schemeClr val="tx1"/>
+          </a:fontRef>
+        </p:style>
+      </p:cxnSp>
+      <p:cxnSp>
+        <p:nvCxnSpPr>
+          <p:cNvPr id="50" name="Connector 49"/>
+          <p:cNvCxnSpPr/>
+          <p:nvPr/>
+        </p:nvCxnSpPr>
+        <p:spPr>
+          <a:xfrm flipV="1">
+            <a:off x="6525830.204081632" y="669798.0"/>
+            <a:ext cx="34523.2653061226" cy="77724.0"/>
+          </a:xfrm>
+          <a:prstGeom prst="line">
+            <a:avLst/>
+          </a:prstGeom>
+          <a:ln w="25400">
+            <a:solidFill>
+              <a:srgbClr val="00C8FF"/>
+            </a:solidFill>
+          </a:ln>
+        </p:spPr>
+        <p:style>
+          <a:lnRef idx="2">
+            <a:schemeClr val="accent1"/>
+          </a:lnRef>
+          <a:fillRef idx="0">
+            <a:schemeClr val="accent1"/>
+          </a:fillRef>
+          <a:effectRef idx="1">
+            <a:schemeClr val="accent1"/>
+          </a:effectRef>
+          <a:fontRef idx="minor">
+            <a:schemeClr val="tx1"/>
+          </a:fontRef>
+        </p:style>
+      </p:cxnSp>
+      <p:cxnSp>
+        <p:nvCxnSpPr>
+          <p:cNvPr id="51" name="Connector 50"/>
+          <p:cNvCxnSpPr/>
+          <p:nvPr/>
+        </p:nvCxnSpPr>
+        <p:spPr>
+          <a:xfrm flipV="1">
+            <a:off x="6560353.469387755" y="592074.0"/>
+            <a:ext cx="34523.2653061226" cy="77724.0"/>
+          </a:xfrm>
+          <a:prstGeom prst="line">
+            <a:avLst/>
+          </a:prstGeom>
+          <a:ln w="25400">
+            <a:solidFill>
+              <a:srgbClr val="00C8FF"/>
+            </a:solidFill>
+          </a:ln>
+        </p:spPr>
+        <p:style>
+          <a:lnRef idx="2">
+            <a:schemeClr val="accent1"/>
+          </a:lnRef>
+          <a:fillRef idx="0">
+            <a:schemeClr val="accent1"/>
+          </a:fillRef>
+          <a:effectRef idx="1">
+            <a:schemeClr val="accent1"/>
+          </a:effectRef>
+          <a:fontRef idx="minor">
+            <a:schemeClr val="tx1"/>
+          </a:fontRef>
+        </p:style>
+      </p:cxnSp>
+      <p:cxnSp>
+        <p:nvCxnSpPr>
+          <p:cNvPr id="52" name="Connector 51"/>
+          <p:cNvCxnSpPr/>
+          <p:nvPr/>
+        </p:nvCxnSpPr>
+        <p:spPr>
+          <a:xfrm flipV="1">
+            <a:off x="6594876.734693877" y="514350.0"/>
+            <a:ext cx="34523.2653061226" cy="77724.0"/>
+          </a:xfrm>
+          <a:prstGeom prst="line">
+            <a:avLst/>
+          </a:prstGeom>
+          <a:ln w="25400">
+            <a:solidFill>
+              <a:srgbClr val="00C8FF"/>
+            </a:solidFill>
+          </a:ln>
+        </p:spPr>
+        <p:style>
+          <a:lnRef idx="2">
+            <a:schemeClr val="accent1"/>
+          </a:lnRef>
+          <a:fillRef idx="0">
+            <a:schemeClr val="accent1"/>
+          </a:fillRef>
+          <a:effectRef idx="1">
+            <a:schemeClr val="accent1"/>
+          </a:effectRef>
+          <a:fontRef idx="minor">
+            <a:schemeClr val="tx1"/>
+          </a:fontRef>
+        </p:style>
+      </p:cxnSp>
+      <p:sp>
+        <p:nvSpPr>
+          <p:cNvPr id="53" name="Oval 52"/>
           <p:cNvSpPr/>
           <p:nvPr/>
         </p:nvSpPr>
         <p:spPr>
           <a:xfrm>
-            <a:off x="5676900" y="1619250"/>
+            <a:off x="5996940" y="1573530"/>
             <a:ext cx="76200" cy="76200"/>
           </a:xfrm>
           <a:prstGeom prst="ellipse">
@@ -3948,13 +4928,13 @@
       </p:sp>
       <p:sp>
         <p:nvSpPr>
-          <p:cNvPr id="26" name="TextBox 25"/>
+          <p:cNvPr id="54" name="TextBox 53"/>
           <p:cNvSpPr txBox="1"/>
           <p:nvPr/>
         </p:nvSpPr>
         <p:spPr>
           <a:xfrm>
-            <a:off x="5852160" y="834390"/>
+            <a:off x="6400800" y="651510"/>
             <a:ext cx="635000" cy="254000"/>
           </a:xfrm>
           <a:prstGeom prst="rect">
@@ -3978,78 +4958,6 @@
             </a:pPr>
             <a:r>
               <a:t>y=f(x)</a:t>
-            </a:r>
-          </a:p>
-        </p:txBody>
-      </p:sp>
-      <p:sp>
-        <p:nvSpPr>
-          <p:cNvPr id="27" name="TextBox 26"/>
-          <p:cNvSpPr txBox="1"/>
-          <p:nvPr/>
-        </p:nvSpPr>
-        <p:spPr>
-          <a:xfrm>
-            <a:off x="4343400" y="1657350"/>
-            <a:ext cx="635000" cy="254000"/>
-          </a:xfrm>
-          <a:prstGeom prst="rect">
-            <a:avLst/>
-          </a:prstGeom>
-          <a:noFill/>
-        </p:spPr>
-        <p:txBody>
-          <a:bodyPr wrap="none">
-            <a:spAutoFit/>
-          </a:bodyPr>
-          <a:lstStyle/>
-          <a:p>
-            <a:pPr>
-              <a:defRPr sz="1200">
-                <a:solidFill>
-                  <a:srgbClr val="FFFFFF"/>
-                </a:solidFill>
-                <a:latin typeface="Inter"/>
-              </a:defRPr>
-            </a:pPr>
-            <a:r>
-              <a:t>f(a)</a:t>
-            </a:r>
-          </a:p>
-        </p:txBody>
-      </p:sp>
-      <p:sp>
-        <p:nvSpPr>
-          <p:cNvPr id="28" name="TextBox 27"/>
-          <p:cNvSpPr txBox="1"/>
-          <p:nvPr/>
-        </p:nvSpPr>
-        <p:spPr>
-          <a:xfrm>
-            <a:off x="5715000" y="2731770"/>
-            <a:ext cx="635000" cy="254000"/>
-          </a:xfrm>
-          <a:prstGeom prst="rect">
-            <a:avLst/>
-          </a:prstGeom>
-          <a:noFill/>
-        </p:spPr>
-        <p:txBody>
-          <a:bodyPr wrap="none">
-            <a:spAutoFit/>
-          </a:bodyPr>
-          <a:lstStyle/>
-          <a:p>
-            <a:pPr>
-              <a:defRPr sz="1200">
-                <a:solidFill>
-                  <a:srgbClr val="FFFFFF"/>
-                </a:solidFill>
-                <a:latin typeface="Inter"/>
-              </a:defRPr>
-            </a:pPr>
-            <a:r>
-              <a:t>a</a:t>
             </a:r>
           </a:p>
         </p:txBody>

--- a/output/3.pptx
+++ b/output/3.pptx
@@ -3174,8 +3174,8 @@
         </p:nvCxnSpPr>
         <p:spPr>
           <a:xfrm flipV="1">
-            <a:off x="4937760.0" y="2459316.1224489794"/>
-            <a:ext cx="34523.2653061226" cy="20993.87755102059"/>
+            <a:off x="5029200.0" y="2313432.0"/>
+            <a:ext cx="55321.200000000186" cy="29718.0"/>
           </a:xfrm>
           <a:prstGeom prst="line">
             <a:avLst/>
@@ -3209,8 +3209,8 @@
         </p:nvCxnSpPr>
         <p:spPr>
           <a:xfrm flipV="1">
-            <a:off x="4972283.265306123" y="2438322.2448979593"/>
-            <a:ext cx="34523.2653061226" cy="20993.877551020123"/>
+            <a:off x="5084521.2" y="2281428.0"/>
+            <a:ext cx="54864.0" cy="32004.0"/>
           </a:xfrm>
           <a:prstGeom prst="line">
             <a:avLst/>
@@ -3244,8 +3244,8 @@
         </p:nvCxnSpPr>
         <p:spPr>
           <a:xfrm flipV="1">
-            <a:off x="5006806.530612245" y="2416395.306122449"/>
-            <a:ext cx="34523.2653061226" cy="21926.93877551006"/>
+            <a:off x="5139385.2" y="2247138.0"/>
+            <a:ext cx="55321.200000000186" cy="34290.0"/>
           </a:xfrm>
           <a:prstGeom prst="line">
             <a:avLst/>
@@ -3279,8 +3279,8 @@
         </p:nvCxnSpPr>
         <p:spPr>
           <a:xfrm flipV="1">
-            <a:off x="5041329.795918368" y="2394468.3673469387"/>
-            <a:ext cx="34523.26530612167" cy="21926.938775510527"/>
+            <a:off x="5194706.4" y="2211019.2"/>
+            <a:ext cx="55321.199999999255" cy="36118.799999999814"/>
           </a:xfrm>
           <a:prstGeom prst="line">
             <a:avLst/>
@@ -3314,8 +3314,8 @@
         </p:nvCxnSpPr>
         <p:spPr>
           <a:xfrm flipV="1">
-            <a:off x="5075853.0612244895" y="2372541.4285714286"/>
-            <a:ext cx="34523.2653061226" cy="21926.93877551006"/>
+            <a:off x="5250027.6" y="2172614.4"/>
+            <a:ext cx="54864.0" cy="38404.80000000028"/>
           </a:xfrm>
           <a:prstGeom prst="line">
             <a:avLst/>
@@ -3349,8 +3349,8 @@
         </p:nvCxnSpPr>
         <p:spPr>
           <a:xfrm flipV="1">
-            <a:off x="5110376.326530612" y="2350614.4897959186"/>
-            <a:ext cx="34523.2653061226" cy="21926.93877551006"/>
+            <a:off x="5304891.6" y="2131923.6"/>
+            <a:ext cx="55321.200000000186" cy="40690.799999999814"/>
           </a:xfrm>
           <a:prstGeom prst="line">
             <a:avLst/>
@@ -3384,8 +3384,8 @@
         </p:nvCxnSpPr>
         <p:spPr>
           <a:xfrm flipV="1">
-            <a:off x="5144899.591836735" y="2336618.5714285714"/>
-            <a:ext cx="34523.2653061226" cy="13995.918367347214"/>
+            <a:off x="5360212.8" y="2088946.8"/>
+            <a:ext cx="55321.200000000186" cy="42976.80000000005"/>
           </a:xfrm>
           <a:prstGeom prst="line">
             <a:avLst/>
@@ -3419,8 +3419,8 @@
         </p:nvCxnSpPr>
         <p:spPr>
           <a:xfrm flipV="1">
-            <a:off x="5179422.857142857" y="2322622.6530612246"/>
-            <a:ext cx="34523.2653061226" cy="13995.918367346749"/>
+            <a:off x="5415534.0" y="2043684.0"/>
+            <a:ext cx="55321.200000000186" cy="45262.80000000005"/>
           </a:xfrm>
           <a:prstGeom prst="line">
             <a:avLst/>
@@ -3454,8 +3454,8 @@
         </p:nvCxnSpPr>
         <p:spPr>
           <a:xfrm flipV="1">
-            <a:off x="5213946.12244898" y="2308626.7346938774"/>
-            <a:ext cx="34523.26530612167" cy="13995.918367347214"/>
+            <a:off x="5470855.2" y="1996135.2000000002"/>
+            <a:ext cx="54864.0" cy="47548.799999999814"/>
           </a:xfrm>
           <a:prstGeom prst="line">
             <a:avLst/>
@@ -3489,8 +3489,8 @@
         </p:nvCxnSpPr>
         <p:spPr>
           <a:xfrm flipV="1">
-            <a:off x="5248469.387755102" y="2294630.8163265307"/>
-            <a:ext cx="34523.2653061226" cy="13995.918367346749"/>
+            <a:off x="5525719.2" y="1946300.4"/>
+            <a:ext cx="55321.200000000186" cy="49834.80000000028"/>
           </a:xfrm>
           <a:prstGeom prst="line">
             <a:avLst/>
@@ -3524,8 +3524,8 @@
         </p:nvCxnSpPr>
         <p:spPr>
           <a:xfrm flipV="1">
-            <a:off x="5282992.653061224" y="2271826.8"/>
-            <a:ext cx="34523.2653061226" cy="22804.016326530837"/>
+            <a:off x="5581040.4" y="1894179.6"/>
+            <a:ext cx="55321.199999999255" cy="52120.799999999814"/>
           </a:xfrm>
           <a:prstGeom prst="line">
             <a:avLst/>
@@ -3559,8 +3559,8 @@
         </p:nvCxnSpPr>
         <p:spPr>
           <a:xfrm flipV="1">
-            <a:off x="5317515.918367347" y="2249058.24"/>
-            <a:ext cx="34523.2653061226" cy="22768.55999999959"/>
+            <a:off x="5636361.6" y="1840230.0"/>
+            <a:ext cx="54864.0" cy="53949.60000000009"/>
           </a:xfrm>
           <a:prstGeom prst="line">
             <a:avLst/>
@@ -3594,8 +3594,8 @@
         </p:nvCxnSpPr>
         <p:spPr>
           <a:xfrm flipV="1">
-            <a:off x="5352039.183673469" y="2226289.68"/>
-            <a:ext cx="34523.2653061226" cy="22768.560000000056"/>
+            <a:off x="5691225.6" y="1783537.2"/>
+            <a:ext cx="55321.200000000186" cy="56692.80000000005"/>
           </a:xfrm>
           <a:prstGeom prst="line">
             <a:avLst/>
@@ -3629,8 +3629,8 @@
         </p:nvCxnSpPr>
         <p:spPr>
           <a:xfrm flipV="1">
-            <a:off x="5386562.448979592" y="2203521.12"/>
-            <a:ext cx="34523.2653061226" cy="22768.560000000056"/>
+            <a:off x="5746546.8" y="1724558.4"/>
+            <a:ext cx="55321.200000000186" cy="58978.80000000005"/>
           </a:xfrm>
           <a:prstGeom prst="line">
             <a:avLst/>
@@ -3664,8 +3664,8 @@
         </p:nvCxnSpPr>
         <p:spPr>
           <a:xfrm flipV="1">
-            <a:off x="5421085.714285715" y="2180752.56"/>
-            <a:ext cx="34523.2653061226" cy="22768.560000000056"/>
+            <a:off x="5801868.0" y="1663750.8"/>
+            <a:ext cx="54864.0" cy="60807.59999999986"/>
           </a:xfrm>
           <a:prstGeom prst="line">
             <a:avLst/>
@@ -3699,8 +3699,8 @@
         </p:nvCxnSpPr>
         <p:spPr>
           <a:xfrm flipV="1">
-            <a:off x="5455608.979591837" y="2157984.0"/>
-            <a:ext cx="34523.26530612167" cy="22768.560000000056"/>
+            <a:off x="5856732.0" y="1600200.0"/>
+            <a:ext cx="55321.200000000186" cy="63550.80000000005"/>
           </a:xfrm>
           <a:prstGeom prst="line">
             <a:avLst/>
@@ -3734,8 +3734,8 @@
         </p:nvCxnSpPr>
         <p:spPr>
           <a:xfrm flipV="1">
-            <a:off x="5490132.244897959" y="2121133.68"/>
-            <a:ext cx="34523.2653061226" cy="36850.31999999983"/>
+            <a:off x="5912053.2" y="1534820.4000000001"/>
+            <a:ext cx="55321.200000000186" cy="65379.59999999986"/>
           </a:xfrm>
           <a:prstGeom prst="line">
             <a:avLst/>
@@ -3769,8 +3769,8 @@
         </p:nvCxnSpPr>
         <p:spPr>
           <a:xfrm flipV="1">
-            <a:off x="5524655.510204081" y="2084283.3599999999"/>
-            <a:ext cx="34523.2653061226" cy="36850.3200000003"/>
+            <a:off x="5967374.4" y="1467154.8"/>
+            <a:ext cx="54864.0" cy="67665.6000000001"/>
           </a:xfrm>
           <a:prstGeom prst="line">
             <a:avLst/>
@@ -3804,8 +3804,8 @@
         </p:nvCxnSpPr>
         <p:spPr>
           <a:xfrm flipV="1">
-            <a:off x="5559178.775510204" y="2047433.04"/>
-            <a:ext cx="34523.2653061226" cy="36850.31999999983"/>
+            <a:off x="6022238.4" y="1397203.2"/>
+            <a:ext cx="55321.199999999255" cy="69951.6000000001"/>
           </a:xfrm>
           <a:prstGeom prst="line">
             <a:avLst/>
@@ -3839,8 +3839,8 @@
         </p:nvCxnSpPr>
         <p:spPr>
           <a:xfrm flipV="1">
-            <a:off x="5593702.040816327" y="2010582.72"/>
-            <a:ext cx="34523.26530612167" cy="36850.320000000065"/>
+            <a:off x="6077559.6" y="1324965.6"/>
+            <a:ext cx="55321.200000000186" cy="72237.59999999986"/>
           </a:xfrm>
           <a:prstGeom prst="line">
             <a:avLst/>
@@ -3874,8 +3874,8 @@
         </p:nvCxnSpPr>
         <p:spPr>
           <a:xfrm flipV="1">
-            <a:off x="5628225.306122448" y="1973732.4"/>
-            <a:ext cx="34523.2653061226" cy="36850.320000000065"/>
+            <a:off x="6132880.8" y="1250442.0"/>
+            <a:ext cx="54864.0" cy="74523.6000000001"/>
           </a:xfrm>
           <a:prstGeom prst="line">
             <a:avLst/>
@@ -3909,8 +3909,8 @@
         </p:nvCxnSpPr>
         <p:spPr>
           <a:xfrm flipV="1">
-            <a:off x="5662748.571428571" y="1936882.08"/>
-            <a:ext cx="34523.2653061226" cy="36850.31999999983"/>
+            <a:off x="6187744.8" y="1173632.4000000001"/>
+            <a:ext cx="55321.200000000186" cy="76809.59999999986"/>
           </a:xfrm>
           <a:prstGeom prst="line">
             <a:avLst/>
@@ -3944,8 +3944,8 @@
         </p:nvCxnSpPr>
         <p:spPr>
           <a:xfrm flipV="1">
-            <a:off x="5697271.8367346935" y="1900031.76"/>
-            <a:ext cx="34523.2653061226" cy="36850.320000000065"/>
+            <a:off x="6243066.0" y="1094994.0"/>
+            <a:ext cx="55321.200000000186" cy="78638.40000000014"/>
           </a:xfrm>
           <a:prstGeom prst="line">
             <a:avLst/>
@@ -3979,8 +3979,8 @@
         </p:nvCxnSpPr>
         <p:spPr>
           <a:xfrm flipV="1">
-            <a:off x="5731795.102040816" y="1859249.52"/>
-            <a:ext cx="34523.2653061226" cy="40782.23999999999"/>
+            <a:off x="6298387.2" y="1014069.6000000001"/>
+            <a:ext cx="55321.200000000186" cy="80924.3999999999"/>
           </a:xfrm>
           <a:prstGeom prst="line">
             <a:avLst/>
@@ -4014,8 +4014,8 @@
         </p:nvCxnSpPr>
         <p:spPr>
           <a:xfrm flipV="1">
-            <a:off x="5766318.367346939" y="1818467.28"/>
-            <a:ext cx="34523.2653061226" cy="40782.23999999999"/>
+            <a:off x="6353708.4" y="930859.2"/>
+            <a:ext cx="54864.0" cy="83210.40000000014"/>
           </a:xfrm>
           <a:prstGeom prst="line">
             <a:avLst/>
@@ -4049,8 +4049,8 @@
         </p:nvCxnSpPr>
         <p:spPr>
           <a:xfrm flipV="1">
-            <a:off x="5800841.632653061" y="1777685.04"/>
-            <a:ext cx="34523.2653061226" cy="40782.23999999999"/>
+            <a:off x="6408572.4" y="845362.8"/>
+            <a:ext cx="55321.199999999255" cy="85496.3999999999"/>
           </a:xfrm>
           <a:prstGeom prst="line">
             <a:avLst/>
@@ -4084,8 +4084,8 @@
         </p:nvCxnSpPr>
         <p:spPr>
           <a:xfrm flipV="1">
-            <a:off x="5835364.897959184" y="1736902.7999999998"/>
-            <a:ext cx="34523.2653061226" cy="40782.24000000022"/>
+            <a:off x="6463893.6" y="757580.3999999999"/>
+            <a:ext cx="55321.200000000186" cy="87782.40000000014"/>
           </a:xfrm>
           <a:prstGeom prst="line">
             <a:avLst/>
@@ -4119,8 +4119,8 @@
         </p:nvCxnSpPr>
         <p:spPr>
           <a:xfrm flipV="1">
-            <a:off x="5869888.1632653065" y="1696120.56"/>
-            <a:ext cx="34523.2653061226" cy="40782.23999999976"/>
+            <a:off x="6519214.8" y="667969.2000000002"/>
+            <a:ext cx="54864.0" cy="89611.19999999972"/>
           </a:xfrm>
           <a:prstGeom prst="line">
             <a:avLst/>
@@ -4154,8 +4154,8 @@
         </p:nvCxnSpPr>
         <p:spPr>
           <a:xfrm flipV="1">
-            <a:off x="5904411.428571429" y="1655338.32"/>
-            <a:ext cx="34523.26530612167" cy="40782.23999999999"/>
+            <a:off x="6574078.8" y="576072.0"/>
+            <a:ext cx="55321.200000000186" cy="91897.20000000019"/>
           </a:xfrm>
           <a:prstGeom prst="line">
             <a:avLst/>
@@ -4181,715 +4181,15 @@
           </a:fontRef>
         </p:style>
       </p:cxnSp>
-      <p:cxnSp>
-        <p:nvCxnSpPr>
-          <p:cNvPr id="33" name="Connector 32"/>
-          <p:cNvCxnSpPr/>
-          <p:nvPr/>
-        </p:nvCxnSpPr>
-        <p:spPr>
-          <a:xfrm flipV="1">
-            <a:off x="5938934.693877551" y="1633575.6"/>
-            <a:ext cx="34523.2653061226" cy="21762.719999999972"/>
-          </a:xfrm>
-          <a:prstGeom prst="line">
-            <a:avLst/>
-          </a:prstGeom>
-          <a:ln w="25400">
-            <a:solidFill>
-              <a:srgbClr val="00C8FF"/>
-            </a:solidFill>
-          </a:ln>
-        </p:spPr>
-        <p:style>
-          <a:lnRef idx="2">
-            <a:schemeClr val="accent1"/>
-          </a:lnRef>
-          <a:fillRef idx="0">
-            <a:schemeClr val="accent1"/>
-          </a:fillRef>
-          <a:effectRef idx="1">
-            <a:schemeClr val="accent1"/>
-          </a:effectRef>
-          <a:fontRef idx="minor">
-            <a:schemeClr val="tx1"/>
-          </a:fontRef>
-        </p:style>
-      </p:cxnSp>
-      <p:cxnSp>
-        <p:nvCxnSpPr>
-          <p:cNvPr id="34" name="Connector 33"/>
-          <p:cNvCxnSpPr/>
-          <p:nvPr/>
-        </p:nvCxnSpPr>
-        <p:spPr>
-          <a:xfrm flipV="1">
-            <a:off x="5973457.959183673" y="1611812.88"/>
-            <a:ext cx="34523.2653061226" cy="21762.720000000205"/>
-          </a:xfrm>
-          <a:prstGeom prst="line">
-            <a:avLst/>
-          </a:prstGeom>
-          <a:ln w="25400">
-            <a:solidFill>
-              <a:srgbClr val="00C8FF"/>
-            </a:solidFill>
-          </a:ln>
-        </p:spPr>
-        <p:style>
-          <a:lnRef idx="2">
-            <a:schemeClr val="accent1"/>
-          </a:lnRef>
-          <a:fillRef idx="0">
-            <a:schemeClr val="accent1"/>
-          </a:fillRef>
-          <a:effectRef idx="1">
-            <a:schemeClr val="accent1"/>
-          </a:effectRef>
-          <a:fontRef idx="minor">
-            <a:schemeClr val="tx1"/>
-          </a:fontRef>
-        </p:style>
-      </p:cxnSp>
-      <p:cxnSp>
-        <p:nvCxnSpPr>
-          <p:cNvPr id="35" name="Connector 34"/>
-          <p:cNvCxnSpPr/>
-          <p:nvPr/>
-        </p:nvCxnSpPr>
-        <p:spPr>
-          <a:xfrm flipV="1">
-            <a:off x="6007981.224489796" y="1590050.16"/>
-            <a:ext cx="34523.2653061226" cy="21762.719999999972"/>
-          </a:xfrm>
-          <a:prstGeom prst="line">
-            <a:avLst/>
-          </a:prstGeom>
-          <a:ln w="25400">
-            <a:solidFill>
-              <a:srgbClr val="00C8FF"/>
-            </a:solidFill>
-          </a:ln>
-        </p:spPr>
-        <p:style>
-          <a:lnRef idx="2">
-            <a:schemeClr val="accent1"/>
-          </a:lnRef>
-          <a:fillRef idx="0">
-            <a:schemeClr val="accent1"/>
-          </a:fillRef>
-          <a:effectRef idx="1">
-            <a:schemeClr val="accent1"/>
-          </a:effectRef>
-          <a:fontRef idx="minor">
-            <a:schemeClr val="tx1"/>
-          </a:fontRef>
-        </p:style>
-      </p:cxnSp>
-      <p:cxnSp>
-        <p:nvCxnSpPr>
-          <p:cNvPr id="36" name="Connector 35"/>
-          <p:cNvCxnSpPr/>
-          <p:nvPr/>
-        </p:nvCxnSpPr>
-        <p:spPr>
-          <a:xfrm flipV="1">
-            <a:off x="6042504.489795919" y="1568287.44"/>
-            <a:ext cx="34523.2653061226" cy="21762.719999999972"/>
-          </a:xfrm>
-          <a:prstGeom prst="line">
-            <a:avLst/>
-          </a:prstGeom>
-          <a:ln w="25400">
-            <a:solidFill>
-              <a:srgbClr val="00C8FF"/>
-            </a:solidFill>
-          </a:ln>
-        </p:spPr>
-        <p:style>
-          <a:lnRef idx="2">
-            <a:schemeClr val="accent1"/>
-          </a:lnRef>
-          <a:fillRef idx="0">
-            <a:schemeClr val="accent1"/>
-          </a:fillRef>
-          <a:effectRef idx="1">
-            <a:schemeClr val="accent1"/>
-          </a:effectRef>
-          <a:fontRef idx="minor">
-            <a:schemeClr val="tx1"/>
-          </a:fontRef>
-        </p:style>
-      </p:cxnSp>
-      <p:cxnSp>
-        <p:nvCxnSpPr>
-          <p:cNvPr id="37" name="Connector 36"/>
-          <p:cNvCxnSpPr/>
-          <p:nvPr/>
-        </p:nvCxnSpPr>
-        <p:spPr>
-          <a:xfrm flipV="1">
-            <a:off x="6077027.755102041" y="1520921.52"/>
-            <a:ext cx="34523.26530612167" cy="47365.919999999925"/>
-          </a:xfrm>
-          <a:prstGeom prst="line">
-            <a:avLst/>
-          </a:prstGeom>
-          <a:ln w="25400">
-            <a:solidFill>
-              <a:srgbClr val="00C8FF"/>
-            </a:solidFill>
-          </a:ln>
-        </p:spPr>
-        <p:style>
-          <a:lnRef idx="2">
-            <a:schemeClr val="accent1"/>
-          </a:lnRef>
-          <a:fillRef idx="0">
-            <a:schemeClr val="accent1"/>
-          </a:fillRef>
-          <a:effectRef idx="1">
-            <a:schemeClr val="accent1"/>
-          </a:effectRef>
-          <a:fontRef idx="minor">
-            <a:schemeClr val="tx1"/>
-          </a:fontRef>
-        </p:style>
-      </p:cxnSp>
-      <p:cxnSp>
-        <p:nvCxnSpPr>
-          <p:cNvPr id="38" name="Connector 37"/>
-          <p:cNvCxnSpPr/>
-          <p:nvPr/>
-        </p:nvCxnSpPr>
-        <p:spPr>
-          <a:xfrm flipV="1">
-            <a:off x="6111551.020408163" y="1473555.5999999999"/>
-            <a:ext cx="34523.2653061226" cy="47365.92000000016"/>
-          </a:xfrm>
-          <a:prstGeom prst="line">
-            <a:avLst/>
-          </a:prstGeom>
-          <a:ln w="25400">
-            <a:solidFill>
-              <a:srgbClr val="00C8FF"/>
-            </a:solidFill>
-          </a:ln>
-        </p:spPr>
-        <p:style>
-          <a:lnRef idx="2">
-            <a:schemeClr val="accent1"/>
-          </a:lnRef>
-          <a:fillRef idx="0">
-            <a:schemeClr val="accent1"/>
-          </a:fillRef>
-          <a:effectRef idx="1">
-            <a:schemeClr val="accent1"/>
-          </a:effectRef>
-          <a:fontRef idx="minor">
-            <a:schemeClr val="tx1"/>
-          </a:fontRef>
-        </p:style>
-      </p:cxnSp>
-      <p:cxnSp>
-        <p:nvCxnSpPr>
-          <p:cNvPr id="39" name="Connector 38"/>
-          <p:cNvCxnSpPr/>
-          <p:nvPr/>
-        </p:nvCxnSpPr>
-        <p:spPr>
-          <a:xfrm flipV="1">
-            <a:off x="6146074.285714285" y="1426189.6800000002"/>
-            <a:ext cx="34523.2653061226" cy="47365.91999999969"/>
-          </a:xfrm>
-          <a:prstGeom prst="line">
-            <a:avLst/>
-          </a:prstGeom>
-          <a:ln w="25400">
-            <a:solidFill>
-              <a:srgbClr val="00C8FF"/>
-            </a:solidFill>
-          </a:ln>
-        </p:spPr>
-        <p:style>
-          <a:lnRef idx="2">
-            <a:schemeClr val="accent1"/>
-          </a:lnRef>
-          <a:fillRef idx="0">
-            <a:schemeClr val="accent1"/>
-          </a:fillRef>
-          <a:effectRef idx="1">
-            <a:schemeClr val="accent1"/>
-          </a:effectRef>
-          <a:fontRef idx="minor">
-            <a:schemeClr val="tx1"/>
-          </a:fontRef>
-        </p:style>
-      </p:cxnSp>
-      <p:cxnSp>
-        <p:nvCxnSpPr>
-          <p:cNvPr id="40" name="Connector 39"/>
-          <p:cNvCxnSpPr/>
-          <p:nvPr/>
-        </p:nvCxnSpPr>
-        <p:spPr>
-          <a:xfrm flipV="1">
-            <a:off x="6180597.551020408" y="1364742.0"/>
-            <a:ext cx="34523.2653061226" cy="61447.68000000017"/>
-          </a:xfrm>
-          <a:prstGeom prst="line">
-            <a:avLst/>
-          </a:prstGeom>
-          <a:ln w="25400">
-            <a:solidFill>
-              <a:srgbClr val="00C8FF"/>
-            </a:solidFill>
-          </a:ln>
-        </p:spPr>
-        <p:style>
-          <a:lnRef idx="2">
-            <a:schemeClr val="accent1"/>
-          </a:lnRef>
-          <a:fillRef idx="0">
-            <a:schemeClr val="accent1"/>
-          </a:fillRef>
-          <a:effectRef idx="1">
-            <a:schemeClr val="accent1"/>
-          </a:effectRef>
-          <a:fontRef idx="minor">
-            <a:schemeClr val="tx1"/>
-          </a:fontRef>
-        </p:style>
-      </p:cxnSp>
-      <p:cxnSp>
-        <p:nvCxnSpPr>
-          <p:cNvPr id="41" name="Connector 40"/>
-          <p:cNvCxnSpPr/>
-          <p:nvPr/>
-        </p:nvCxnSpPr>
-        <p:spPr>
-          <a:xfrm flipV="1">
-            <a:off x="6215120.816326531" y="1300734.0"/>
-            <a:ext cx="34523.2653061226" cy="64008.0"/>
-          </a:xfrm>
-          <a:prstGeom prst="line">
-            <a:avLst/>
-          </a:prstGeom>
-          <a:ln w="25400">
-            <a:solidFill>
-              <a:srgbClr val="00C8FF"/>
-            </a:solidFill>
-          </a:ln>
-        </p:spPr>
-        <p:style>
-          <a:lnRef idx="2">
-            <a:schemeClr val="accent1"/>
-          </a:lnRef>
-          <a:fillRef idx="0">
-            <a:schemeClr val="accent1"/>
-          </a:fillRef>
-          <a:effectRef idx="1">
-            <a:schemeClr val="accent1"/>
-          </a:effectRef>
-          <a:fontRef idx="minor">
-            <a:schemeClr val="tx1"/>
-          </a:fontRef>
-        </p:style>
-      </p:cxnSp>
-      <p:cxnSp>
-        <p:nvCxnSpPr>
-          <p:cNvPr id="42" name="Connector 41"/>
-          <p:cNvCxnSpPr/>
-          <p:nvPr/>
-        </p:nvCxnSpPr>
-        <p:spPr>
-          <a:xfrm flipV="1">
-            <a:off x="6249644.081632653" y="1236726.0"/>
-            <a:ext cx="34523.2653061226" cy="64008.0"/>
-          </a:xfrm>
-          <a:prstGeom prst="line">
-            <a:avLst/>
-          </a:prstGeom>
-          <a:ln w="25400">
-            <a:solidFill>
-              <a:srgbClr val="00C8FF"/>
-            </a:solidFill>
-          </a:ln>
-        </p:spPr>
-        <p:style>
-          <a:lnRef idx="2">
-            <a:schemeClr val="accent1"/>
-          </a:lnRef>
-          <a:fillRef idx="0">
-            <a:schemeClr val="accent1"/>
-          </a:fillRef>
-          <a:effectRef idx="1">
-            <a:schemeClr val="accent1"/>
-          </a:effectRef>
-          <a:fontRef idx="minor">
-            <a:schemeClr val="tx1"/>
-          </a:fontRef>
-        </p:style>
-      </p:cxnSp>
-      <p:cxnSp>
-        <p:nvCxnSpPr>
-          <p:cNvPr id="43" name="Connector 42"/>
-          <p:cNvCxnSpPr/>
-          <p:nvPr/>
-        </p:nvCxnSpPr>
-        <p:spPr>
-          <a:xfrm flipV="1">
-            <a:off x="6284167.346938776" y="1172718.0"/>
-            <a:ext cx="34523.2653061226" cy="64008.0"/>
-          </a:xfrm>
-          <a:prstGeom prst="line">
-            <a:avLst/>
-          </a:prstGeom>
-          <a:ln w="25400">
-            <a:solidFill>
-              <a:srgbClr val="00C8FF"/>
-            </a:solidFill>
-          </a:ln>
-        </p:spPr>
-        <p:style>
-          <a:lnRef idx="2">
-            <a:schemeClr val="accent1"/>
-          </a:lnRef>
-          <a:fillRef idx="0">
-            <a:schemeClr val="accent1"/>
-          </a:fillRef>
-          <a:effectRef idx="1">
-            <a:schemeClr val="accent1"/>
-          </a:effectRef>
-          <a:fontRef idx="minor">
-            <a:schemeClr val="tx1"/>
-          </a:fontRef>
-        </p:style>
-      </p:cxnSp>
-      <p:cxnSp>
-        <p:nvCxnSpPr>
-          <p:cNvPr id="44" name="Connector 43"/>
-          <p:cNvCxnSpPr/>
-          <p:nvPr/>
-        </p:nvCxnSpPr>
-        <p:spPr>
-          <a:xfrm flipV="1">
-            <a:off x="6318690.612244898" y="1108710.0"/>
-            <a:ext cx="34523.2653061226" cy="64008.0"/>
-          </a:xfrm>
-          <a:prstGeom prst="line">
-            <a:avLst/>
-          </a:prstGeom>
-          <a:ln w="25400">
-            <a:solidFill>
-              <a:srgbClr val="00C8FF"/>
-            </a:solidFill>
-          </a:ln>
-        </p:spPr>
-        <p:style>
-          <a:lnRef idx="2">
-            <a:schemeClr val="accent1"/>
-          </a:lnRef>
-          <a:fillRef idx="0">
-            <a:schemeClr val="accent1"/>
-          </a:fillRef>
-          <a:effectRef idx="1">
-            <a:schemeClr val="accent1"/>
-          </a:effectRef>
-          <a:fontRef idx="minor">
-            <a:schemeClr val="tx1"/>
-          </a:fontRef>
-        </p:style>
-      </p:cxnSp>
-      <p:cxnSp>
-        <p:nvCxnSpPr>
-          <p:cNvPr id="45" name="Connector 44"/>
-          <p:cNvCxnSpPr/>
-          <p:nvPr/>
-        </p:nvCxnSpPr>
-        <p:spPr>
-          <a:xfrm flipV="1">
-            <a:off x="6353213.877551021" y="1044702.0"/>
-            <a:ext cx="34523.26530612167" cy="64008.0"/>
-          </a:xfrm>
-          <a:prstGeom prst="line">
-            <a:avLst/>
-          </a:prstGeom>
-          <a:ln w="25400">
-            <a:solidFill>
-              <a:srgbClr val="00C8FF"/>
-            </a:solidFill>
-          </a:ln>
-        </p:spPr>
-        <p:style>
-          <a:lnRef idx="2">
-            <a:schemeClr val="accent1"/>
-          </a:lnRef>
-          <a:fillRef idx="0">
-            <a:schemeClr val="accent1"/>
-          </a:fillRef>
-          <a:effectRef idx="1">
-            <a:schemeClr val="accent1"/>
-          </a:effectRef>
-          <a:fontRef idx="minor">
-            <a:schemeClr val="tx1"/>
-          </a:fontRef>
-        </p:style>
-      </p:cxnSp>
-      <p:cxnSp>
-        <p:nvCxnSpPr>
-          <p:cNvPr id="46" name="Connector 45"/>
-          <p:cNvCxnSpPr/>
-          <p:nvPr/>
-        </p:nvCxnSpPr>
-        <p:spPr>
-          <a:xfrm flipV="1">
-            <a:off x="6387737.142857143" y="980694.0"/>
-            <a:ext cx="34523.2653061226" cy="64008.0"/>
-          </a:xfrm>
-          <a:prstGeom prst="line">
-            <a:avLst/>
-          </a:prstGeom>
-          <a:ln w="25400">
-            <a:solidFill>
-              <a:srgbClr val="00C8FF"/>
-            </a:solidFill>
-          </a:ln>
-        </p:spPr>
-        <p:style>
-          <a:lnRef idx="2">
-            <a:schemeClr val="accent1"/>
-          </a:lnRef>
-          <a:fillRef idx="0">
-            <a:schemeClr val="accent1"/>
-          </a:fillRef>
-          <a:effectRef idx="1">
-            <a:schemeClr val="accent1"/>
-          </a:effectRef>
-          <a:fontRef idx="minor">
-            <a:schemeClr val="tx1"/>
-          </a:fontRef>
-        </p:style>
-      </p:cxnSp>
-      <p:cxnSp>
-        <p:nvCxnSpPr>
-          <p:cNvPr id="47" name="Connector 46"/>
-          <p:cNvCxnSpPr/>
-          <p:nvPr/>
-        </p:nvCxnSpPr>
-        <p:spPr>
-          <a:xfrm flipV="1">
-            <a:off x="6422260.408163265" y="902970.0"/>
-            <a:ext cx="34523.2653061226" cy="77724.0"/>
-          </a:xfrm>
-          <a:prstGeom prst="line">
-            <a:avLst/>
-          </a:prstGeom>
-          <a:ln w="25400">
-            <a:solidFill>
-              <a:srgbClr val="00C8FF"/>
-            </a:solidFill>
-          </a:ln>
-        </p:spPr>
-        <p:style>
-          <a:lnRef idx="2">
-            <a:schemeClr val="accent1"/>
-          </a:lnRef>
-          <a:fillRef idx="0">
-            <a:schemeClr val="accent1"/>
-          </a:fillRef>
-          <a:effectRef idx="1">
-            <a:schemeClr val="accent1"/>
-          </a:effectRef>
-          <a:fontRef idx="minor">
-            <a:schemeClr val="tx1"/>
-          </a:fontRef>
-        </p:style>
-      </p:cxnSp>
-      <p:cxnSp>
-        <p:nvCxnSpPr>
-          <p:cNvPr id="48" name="Connector 47"/>
-          <p:cNvCxnSpPr/>
-          <p:nvPr/>
-        </p:nvCxnSpPr>
-        <p:spPr>
-          <a:xfrm flipV="1">
-            <a:off x="6456783.673469388" y="825246.0"/>
-            <a:ext cx="34523.26530612167" cy="77724.0"/>
-          </a:xfrm>
-          <a:prstGeom prst="line">
-            <a:avLst/>
-          </a:prstGeom>
-          <a:ln w="25400">
-            <a:solidFill>
-              <a:srgbClr val="00C8FF"/>
-            </a:solidFill>
-          </a:ln>
-        </p:spPr>
-        <p:style>
-          <a:lnRef idx="2">
-            <a:schemeClr val="accent1"/>
-          </a:lnRef>
-          <a:fillRef idx="0">
-            <a:schemeClr val="accent1"/>
-          </a:fillRef>
-          <a:effectRef idx="1">
-            <a:schemeClr val="accent1"/>
-          </a:effectRef>
-          <a:fontRef idx="minor">
-            <a:schemeClr val="tx1"/>
-          </a:fontRef>
-        </p:style>
-      </p:cxnSp>
-      <p:cxnSp>
-        <p:nvCxnSpPr>
-          <p:cNvPr id="49" name="Connector 48"/>
-          <p:cNvCxnSpPr/>
-          <p:nvPr/>
-        </p:nvCxnSpPr>
-        <p:spPr>
-          <a:xfrm flipV="1">
-            <a:off x="6491306.93877551" y="747522.0"/>
-            <a:ext cx="34523.2653061226" cy="77724.0"/>
-          </a:xfrm>
-          <a:prstGeom prst="line">
-            <a:avLst/>
-          </a:prstGeom>
-          <a:ln w="25400">
-            <a:solidFill>
-              <a:srgbClr val="00C8FF"/>
-            </a:solidFill>
-          </a:ln>
-        </p:spPr>
-        <p:style>
-          <a:lnRef idx="2">
-            <a:schemeClr val="accent1"/>
-          </a:lnRef>
-          <a:fillRef idx="0">
-            <a:schemeClr val="accent1"/>
-          </a:fillRef>
-          <a:effectRef idx="1">
-            <a:schemeClr val="accent1"/>
-          </a:effectRef>
-          <a:fontRef idx="minor">
-            <a:schemeClr val="tx1"/>
-          </a:fontRef>
-        </p:style>
-      </p:cxnSp>
-      <p:cxnSp>
-        <p:nvCxnSpPr>
-          <p:cNvPr id="50" name="Connector 49"/>
-          <p:cNvCxnSpPr/>
-          <p:nvPr/>
-        </p:nvCxnSpPr>
-        <p:spPr>
-          <a:xfrm flipV="1">
-            <a:off x="6525830.204081632" y="669798.0"/>
-            <a:ext cx="34523.2653061226" cy="77724.0"/>
-          </a:xfrm>
-          <a:prstGeom prst="line">
-            <a:avLst/>
-          </a:prstGeom>
-          <a:ln w="25400">
-            <a:solidFill>
-              <a:srgbClr val="00C8FF"/>
-            </a:solidFill>
-          </a:ln>
-        </p:spPr>
-        <p:style>
-          <a:lnRef idx="2">
-            <a:schemeClr val="accent1"/>
-          </a:lnRef>
-          <a:fillRef idx="0">
-            <a:schemeClr val="accent1"/>
-          </a:fillRef>
-          <a:effectRef idx="1">
-            <a:schemeClr val="accent1"/>
-          </a:effectRef>
-          <a:fontRef idx="minor">
-            <a:schemeClr val="tx1"/>
-          </a:fontRef>
-        </p:style>
-      </p:cxnSp>
-      <p:cxnSp>
-        <p:nvCxnSpPr>
-          <p:cNvPr id="51" name="Connector 50"/>
-          <p:cNvCxnSpPr/>
-          <p:nvPr/>
-        </p:nvCxnSpPr>
-        <p:spPr>
-          <a:xfrm flipV="1">
-            <a:off x="6560353.469387755" y="592074.0"/>
-            <a:ext cx="34523.2653061226" cy="77724.0"/>
-          </a:xfrm>
-          <a:prstGeom prst="line">
-            <a:avLst/>
-          </a:prstGeom>
-          <a:ln w="25400">
-            <a:solidFill>
-              <a:srgbClr val="00C8FF"/>
-            </a:solidFill>
-          </a:ln>
-        </p:spPr>
-        <p:style>
-          <a:lnRef idx="2">
-            <a:schemeClr val="accent1"/>
-          </a:lnRef>
-          <a:fillRef idx="0">
-            <a:schemeClr val="accent1"/>
-          </a:fillRef>
-          <a:effectRef idx="1">
-            <a:schemeClr val="accent1"/>
-          </a:effectRef>
-          <a:fontRef idx="minor">
-            <a:schemeClr val="tx1"/>
-          </a:fontRef>
-        </p:style>
-      </p:cxnSp>
-      <p:cxnSp>
-        <p:nvCxnSpPr>
-          <p:cNvPr id="52" name="Connector 51"/>
-          <p:cNvCxnSpPr/>
-          <p:nvPr/>
-        </p:nvCxnSpPr>
-        <p:spPr>
-          <a:xfrm flipV="1">
-            <a:off x="6594876.734693877" y="514350.0"/>
-            <a:ext cx="34523.2653061226" cy="77724.0"/>
-          </a:xfrm>
-          <a:prstGeom prst="line">
-            <a:avLst/>
-          </a:prstGeom>
-          <a:ln w="25400">
-            <a:solidFill>
-              <a:srgbClr val="00C8FF"/>
-            </a:solidFill>
-          </a:ln>
-        </p:spPr>
-        <p:style>
-          <a:lnRef idx="2">
-            <a:schemeClr val="accent1"/>
-          </a:lnRef>
-          <a:fillRef idx="0">
-            <a:schemeClr val="accent1"/>
-          </a:fillRef>
-          <a:effectRef idx="1">
-            <a:schemeClr val="accent1"/>
-          </a:effectRef>
-          <a:fontRef idx="minor">
-            <a:schemeClr val="tx1"/>
-          </a:fontRef>
-        </p:style>
-      </p:cxnSp>
-      <p:sp>
-        <p:nvSpPr>
-          <p:cNvPr id="53" name="Oval 52"/>
+      <p:sp>
+        <p:nvSpPr>
+          <p:cNvPr id="33" name="Oval 32"/>
           <p:cNvSpPr/>
           <p:nvPr/>
         </p:nvSpPr>
         <p:spPr>
           <a:xfrm>
-            <a:off x="5996940" y="1573530"/>
+            <a:off x="6134100" y="1333500"/>
             <a:ext cx="76200" cy="76200"/>
           </a:xfrm>
           <a:prstGeom prst="ellipse">
@@ -4923,42 +4223,6 @@
           <a:lstStyle/>
           <a:p>
             <a:pPr algn="ctr"/>
-          </a:p>
-        </p:txBody>
-      </p:sp>
-      <p:sp>
-        <p:nvSpPr>
-          <p:cNvPr id="54" name="TextBox 53"/>
-          <p:cNvSpPr txBox="1"/>
-          <p:nvPr/>
-        </p:nvSpPr>
-        <p:spPr>
-          <a:xfrm>
-            <a:off x="6400800" y="651510"/>
-            <a:ext cx="635000" cy="254000"/>
-          </a:xfrm>
-          <a:prstGeom prst="rect">
-            <a:avLst/>
-          </a:prstGeom>
-          <a:noFill/>
-        </p:spPr>
-        <p:txBody>
-          <a:bodyPr wrap="none">
-            <a:spAutoFit/>
-          </a:bodyPr>
-          <a:lstStyle/>
-          <a:p>
-            <a:pPr>
-              <a:defRPr sz="1200">
-                <a:solidFill>
-                  <a:srgbClr val="FFFFFF"/>
-                </a:solidFill>
-                <a:latin typeface="Inter"/>
-              </a:defRPr>
-            </a:pPr>
-            <a:r>
-              <a:t>y=f(x)</a:t>
-            </a:r>
           </a:p>
         </p:txBody>
       </p:sp>

--- a/output/3.pptx
+++ b/output/3.pptx
@@ -3104,8 +3104,8 @@
         </p:nvCxnSpPr>
         <p:spPr>
           <a:xfrm>
-            <a:off x="2286000.0" y="2571750.0"/>
-            <a:ext cx="4572000.0" cy="0.0"/>
+            <a:off x="4343400.0" y="2571750.0"/>
+            <a:ext cx="2057400.0" cy="0.0"/>
           </a:xfrm>
           <a:prstGeom prst="line">
             <a:avLst/>
@@ -3139,8 +3139,8 @@
         </p:nvCxnSpPr>
         <p:spPr>
           <a:xfrm flipV="1">
-            <a:off x="4572000.0" y="285750.0"/>
-            <a:ext cx="0.0" cy="4572000.0"/>
+            <a:off x="4572000.0" y="514350.0"/>
+            <a:ext cx="0.0" cy="2286000.0"/>
           </a:xfrm>
           <a:prstGeom prst="line">
             <a:avLst/>
@@ -3166,41 +3166,1255 @@
           </a:fontRef>
         </p:style>
       </p:cxnSp>
-      <p:cxnSp>
-        <p:nvCxnSpPr>
-          <p:cNvPr id="4" name="Connector 3"/>
-          <p:cNvCxnSpPr/>
+      <p:sp>
+        <p:nvSpPr>
+          <p:cNvPr id="4" name="Freeform 3"/>
+          <p:cNvSpPr/>
           <p:nvPr/>
-        </p:nvCxnSpPr>
+        </p:nvSpPr>
         <p:spPr>
-          <a:xfrm flipV="1">
-            <a:off x="5029200.0" y="2313432.0"/>
-            <a:ext cx="55321.200000000186" cy="29718.0"/>
+          <a:xfrm>
+            <a:off x="4937760" y="628650"/>
+            <a:ext cx="1600200" cy="1668780"/>
           </a:xfrm>
-          <a:prstGeom prst="line">
+          <a:custGeom>
             <a:avLst/>
-          </a:prstGeom>
-          <a:ln w="25400">
+            <a:gdLst/>
+            <a:ahLst/>
+            <a:cxnLst/>
+            <a:rect l="l" t="t" r="r" b="b"/>
+            <a:pathLst>
+              <a:path w="1600200" h="1668780">
+                <a:moveTo>
+                  <a:pt x="0" y="1668780"/>
+                </a:moveTo>
+                <a:lnTo>
+                  <a:pt x="5352" y="1663428"/>
+                </a:lnTo>
+                <a:close/>
+                <a:lnTo>
+                  <a:pt x="10704" y="1658076"/>
+                </a:lnTo>
+                <a:close/>
+                <a:lnTo>
+                  <a:pt x="16056" y="1652724"/>
+                </a:lnTo>
+                <a:close/>
+                <a:lnTo>
+                  <a:pt x="21407" y="1647373"/>
+                </a:lnTo>
+                <a:close/>
+                <a:lnTo>
+                  <a:pt x="26759" y="1642021"/>
+                </a:lnTo>
+                <a:close/>
+                <a:lnTo>
+                  <a:pt x="32111" y="1636669"/>
+                </a:lnTo>
+                <a:close/>
+                <a:lnTo>
+                  <a:pt x="37463" y="1631317"/>
+                </a:lnTo>
+                <a:close/>
+                <a:lnTo>
+                  <a:pt x="42815" y="1625965"/>
+                </a:lnTo>
+                <a:close/>
+                <a:lnTo>
+                  <a:pt x="48167" y="1620613"/>
+                </a:lnTo>
+                <a:close/>
+                <a:lnTo>
+                  <a:pt x="53518" y="1615262"/>
+                </a:lnTo>
+                <a:close/>
+                <a:lnTo>
+                  <a:pt x="58870" y="1609910"/>
+                </a:lnTo>
+                <a:close/>
+                <a:lnTo>
+                  <a:pt x="64222" y="1604558"/>
+                </a:lnTo>
+                <a:close/>
+                <a:lnTo>
+                  <a:pt x="69574" y="1599206"/>
+                </a:lnTo>
+                <a:close/>
+                <a:lnTo>
+                  <a:pt x="74926" y="1593854"/>
+                </a:lnTo>
+                <a:close/>
+                <a:lnTo>
+                  <a:pt x="80278" y="1588502"/>
+                </a:lnTo>
+                <a:close/>
+                <a:lnTo>
+                  <a:pt x="85629" y="1583151"/>
+                </a:lnTo>
+                <a:close/>
+                <a:lnTo>
+                  <a:pt x="90981" y="1577799"/>
+                </a:lnTo>
+                <a:close/>
+                <a:lnTo>
+                  <a:pt x="96333" y="1572447"/>
+                </a:lnTo>
+                <a:close/>
+                <a:lnTo>
+                  <a:pt x="101685" y="1567095"/>
+                </a:lnTo>
+                <a:close/>
+                <a:lnTo>
+                  <a:pt x="107037" y="1561743"/>
+                </a:lnTo>
+                <a:close/>
+                <a:lnTo>
+                  <a:pt x="112389" y="1556391"/>
+                </a:lnTo>
+                <a:close/>
+                <a:lnTo>
+                  <a:pt x="117740" y="1551040"/>
+                </a:lnTo>
+                <a:close/>
+                <a:lnTo>
+                  <a:pt x="123092" y="1545688"/>
+                </a:lnTo>
+                <a:close/>
+                <a:lnTo>
+                  <a:pt x="128444" y="1540336"/>
+                </a:lnTo>
+                <a:close/>
+                <a:lnTo>
+                  <a:pt x="133796" y="1534984"/>
+                </a:lnTo>
+                <a:close/>
+                <a:lnTo>
+                  <a:pt x="139148" y="1529632"/>
+                </a:lnTo>
+                <a:close/>
+                <a:lnTo>
+                  <a:pt x="144500" y="1524280"/>
+                </a:lnTo>
+                <a:close/>
+                <a:lnTo>
+                  <a:pt x="149852" y="1518928"/>
+                </a:lnTo>
+                <a:close/>
+                <a:lnTo>
+                  <a:pt x="155203" y="1513577"/>
+                </a:lnTo>
+                <a:close/>
+                <a:lnTo>
+                  <a:pt x="160555" y="1508225"/>
+                </a:lnTo>
+                <a:close/>
+                <a:lnTo>
+                  <a:pt x="165907" y="1502872"/>
+                </a:lnTo>
+                <a:close/>
+                <a:lnTo>
+                  <a:pt x="171259" y="1497525"/>
+                </a:lnTo>
+                <a:close/>
+                <a:lnTo>
+                  <a:pt x="176611" y="1492151"/>
+                </a:lnTo>
+                <a:close/>
+                <a:lnTo>
+                  <a:pt x="181963" y="1486872"/>
+                </a:lnTo>
+                <a:close/>
+                <a:lnTo>
+                  <a:pt x="187314" y="1480589"/>
+                </a:lnTo>
+                <a:close/>
+                <a:lnTo>
+                  <a:pt x="192666" y="1473622"/>
+                </a:lnTo>
+                <a:close/>
+                <a:lnTo>
+                  <a:pt x="198018" y="1466777"/>
+                </a:lnTo>
+                <a:close/>
+                <a:lnTo>
+                  <a:pt x="203370" y="1460440"/>
+                </a:lnTo>
+                <a:close/>
+                <a:lnTo>
+                  <a:pt x="208722" y="1453712"/>
+                </a:lnTo>
+                <a:close/>
+                <a:lnTo>
+                  <a:pt x="214074" y="1446690"/>
+                </a:lnTo>
+                <a:close/>
+                <a:lnTo>
+                  <a:pt x="219425" y="1440216"/>
+                </a:lnTo>
+                <a:close/>
+                <a:lnTo>
+                  <a:pt x="224777" y="1433748"/>
+                </a:lnTo>
+                <a:close/>
+                <a:lnTo>
+                  <a:pt x="230129" y="1426728"/>
+                </a:lnTo>
+                <a:close/>
+                <a:lnTo>
+                  <a:pt x="235481" y="1419993"/>
+                </a:lnTo>
+                <a:close/>
+                <a:lnTo>
+                  <a:pt x="240833" y="1413655"/>
+                </a:lnTo>
+                <a:close/>
+                <a:lnTo>
+                  <a:pt x="246185" y="1406822"/>
+                </a:lnTo>
+                <a:close/>
+                <a:lnTo>
+                  <a:pt x="251536" y="1399851"/>
+                </a:lnTo>
+                <a:close/>
+                <a:lnTo>
+                  <a:pt x="256888" y="1393453"/>
+                </a:lnTo>
+                <a:close/>
+                <a:lnTo>
+                  <a:pt x="262240" y="1386890"/>
+                </a:lnTo>
+                <a:close/>
+                <a:lnTo>
+                  <a:pt x="267592" y="1379846"/>
+                </a:lnTo>
+                <a:close/>
+                <a:lnTo>
+                  <a:pt x="272944" y="1373220"/>
+                </a:lnTo>
+                <a:close/>
+                <a:lnTo>
+                  <a:pt x="278296" y="1366853"/>
+                </a:lnTo>
+                <a:close/>
+                <a:lnTo>
+                  <a:pt x="283647" y="1359927"/>
+                </a:lnTo>
+                <a:close/>
+                <a:lnTo>
+                  <a:pt x="288999" y="1353036"/>
+                </a:lnTo>
+                <a:close/>
+                <a:lnTo>
+                  <a:pt x="294351" y="1346685"/>
+                </a:lnTo>
+                <a:close/>
+                <a:lnTo>
+                  <a:pt x="299703" y="1340015"/>
+                </a:lnTo>
+                <a:close/>
+                <a:lnTo>
+                  <a:pt x="305055" y="1332977"/>
+                </a:lnTo>
+                <a:close/>
+                <a:lnTo>
+                  <a:pt x="310407" y="1326455"/>
+                </a:lnTo>
+                <a:close/>
+                <a:lnTo>
+                  <a:pt x="315759" y="1320029"/>
+                </a:lnTo>
+                <a:close/>
+                <a:lnTo>
+                  <a:pt x="321110" y="1313033"/>
+                </a:lnTo>
+                <a:close/>
+                <a:lnTo>
+                  <a:pt x="326462" y="1306242"/>
+                </a:lnTo>
+                <a:close/>
+                <a:lnTo>
+                  <a:pt x="331814" y="1299908"/>
+                </a:lnTo>
+                <a:close/>
+                <a:lnTo>
+                  <a:pt x="337166" y="1293128"/>
+                </a:lnTo>
+                <a:close/>
+                <a:lnTo>
+                  <a:pt x="342518" y="1286127"/>
+                </a:lnTo>
+                <a:close/>
+                <a:lnTo>
+                  <a:pt x="347870" y="1279693"/>
+                </a:lnTo>
+                <a:close/>
+                <a:lnTo>
+                  <a:pt x="353221" y="1273181"/>
+                </a:lnTo>
+                <a:close/>
+                <a:lnTo>
+                  <a:pt x="358573" y="1266146"/>
+                </a:lnTo>
+                <a:close/>
+                <a:lnTo>
+                  <a:pt x="363925" y="1259463"/>
+                </a:lnTo>
+                <a:close/>
+                <a:lnTo>
+                  <a:pt x="369277" y="1253116"/>
+                </a:lnTo>
+                <a:close/>
+                <a:lnTo>
+                  <a:pt x="374629" y="1246235"/>
+                </a:lnTo>
+                <a:close/>
+                <a:lnTo>
+                  <a:pt x="379981" y="1239300"/>
+                </a:lnTo>
+                <a:close/>
+                <a:lnTo>
+                  <a:pt x="385332" y="1232928"/>
+                </a:lnTo>
+                <a:close/>
+                <a:lnTo>
+                  <a:pt x="390684" y="1226314"/>
+                </a:lnTo>
+                <a:close/>
+                <a:lnTo>
+                  <a:pt x="396036" y="1219269"/>
+                </a:lnTo>
+                <a:close/>
+                <a:lnTo>
+                  <a:pt x="401388" y="1212695"/>
+                </a:lnTo>
+                <a:close/>
+                <a:lnTo>
+                  <a:pt x="406740" y="1206303"/>
+                </a:lnTo>
+                <a:close/>
+                <a:lnTo>
+                  <a:pt x="412092" y="1199340"/>
+                </a:lnTo>
+                <a:close/>
+                <a:lnTo>
+                  <a:pt x="417443" y="1192496"/>
+                </a:lnTo>
+                <a:close/>
+                <a:lnTo>
+                  <a:pt x="422795" y="1186156"/>
+                </a:lnTo>
+                <a:close/>
+                <a:lnTo>
+                  <a:pt x="428147" y="1179432"/>
+                </a:lnTo>
+                <a:close/>
+                <a:lnTo>
+                  <a:pt x="433499" y="1172409"/>
+                </a:lnTo>
+                <a:close/>
+                <a:lnTo>
+                  <a:pt x="438851" y="1165932"/>
+                </a:lnTo>
+                <a:close/>
+                <a:lnTo>
+                  <a:pt x="444203" y="1159466"/>
+                </a:lnTo>
+                <a:close/>
+                <a:lnTo>
+                  <a:pt x="449555" y="1152460"/>
+                </a:lnTo>
+                <a:close/>
+                <a:lnTo>
+                  <a:pt x="454906" y="1145646"/>
+                </a:lnTo>
+                <a:close/>
+                <a:lnTo>
+                  <a:pt x="460258" y="1139897"/>
+                </a:lnTo>
+                <a:close/>
+                <a:lnTo>
+                  <a:pt x="465610" y="1134596"/>
+                </a:lnTo>
+                <a:close/>
+                <a:lnTo>
+                  <a:pt x="470962" y="1129238"/>
+                </a:lnTo>
+                <a:close/>
+                <a:lnTo>
+                  <a:pt x="476314" y="1123886"/>
+                </a:lnTo>
+                <a:close/>
+                <a:lnTo>
+                  <a:pt x="481666" y="1118535"/>
+                </a:lnTo>
+                <a:close/>
+                <a:lnTo>
+                  <a:pt x="487017" y="1113183"/>
+                </a:lnTo>
+                <a:close/>
+                <a:lnTo>
+                  <a:pt x="492369" y="1107831"/>
+                </a:lnTo>
+                <a:close/>
+                <a:lnTo>
+                  <a:pt x="497721" y="1102479"/>
+                </a:lnTo>
+                <a:close/>
+                <a:lnTo>
+                  <a:pt x="503073" y="1097127"/>
+                </a:lnTo>
+                <a:close/>
+                <a:lnTo>
+                  <a:pt x="508425" y="1091775"/>
+                </a:lnTo>
+                <a:close/>
+                <a:lnTo>
+                  <a:pt x="513777" y="1086423"/>
+                </a:lnTo>
+                <a:close/>
+                <a:lnTo>
+                  <a:pt x="519128" y="1081072"/>
+                </a:lnTo>
+                <a:close/>
+                <a:lnTo>
+                  <a:pt x="524480" y="1075720"/>
+                </a:lnTo>
+                <a:close/>
+                <a:lnTo>
+                  <a:pt x="529832" y="1070368"/>
+                </a:lnTo>
+                <a:close/>
+                <a:lnTo>
+                  <a:pt x="535184" y="1065016"/>
+                </a:lnTo>
+                <a:close/>
+                <a:lnTo>
+                  <a:pt x="540536" y="1059664"/>
+                </a:lnTo>
+                <a:close/>
+                <a:lnTo>
+                  <a:pt x="545888" y="1054312"/>
+                </a:lnTo>
+                <a:close/>
+                <a:lnTo>
+                  <a:pt x="551239" y="1048961"/>
+                </a:lnTo>
+                <a:close/>
+                <a:lnTo>
+                  <a:pt x="556591" y="1043609"/>
+                </a:lnTo>
+                <a:close/>
+                <a:lnTo>
+                  <a:pt x="561943" y="1038257"/>
+                </a:lnTo>
+                <a:close/>
+                <a:lnTo>
+                  <a:pt x="567295" y="1032905"/>
+                </a:lnTo>
+                <a:close/>
+                <a:lnTo>
+                  <a:pt x="572647" y="1027553"/>
+                </a:lnTo>
+                <a:close/>
+                <a:lnTo>
+                  <a:pt x="577999" y="1022201"/>
+                </a:lnTo>
+                <a:close/>
+                <a:lnTo>
+                  <a:pt x="583351" y="1016849"/>
+                </a:lnTo>
+                <a:close/>
+                <a:lnTo>
+                  <a:pt x="588702" y="1011498"/>
+                </a:lnTo>
+                <a:close/>
+                <a:lnTo>
+                  <a:pt x="594054" y="1006146"/>
+                </a:lnTo>
+                <a:close/>
+                <a:lnTo>
+                  <a:pt x="599406" y="1000794"/>
+                </a:lnTo>
+                <a:close/>
+                <a:lnTo>
+                  <a:pt x="604758" y="995442"/>
+                </a:lnTo>
+                <a:close/>
+                <a:lnTo>
+                  <a:pt x="610110" y="990090"/>
+                </a:lnTo>
+                <a:close/>
+                <a:lnTo>
+                  <a:pt x="615462" y="984738"/>
+                </a:lnTo>
+                <a:close/>
+                <a:lnTo>
+                  <a:pt x="620813" y="979387"/>
+                </a:lnTo>
+                <a:close/>
+                <a:lnTo>
+                  <a:pt x="626165" y="974035"/>
+                </a:lnTo>
+                <a:close/>
+                <a:lnTo>
+                  <a:pt x="631517" y="968683"/>
+                </a:lnTo>
+                <a:close/>
+                <a:lnTo>
+                  <a:pt x="636869" y="963331"/>
+                </a:lnTo>
+                <a:close/>
+                <a:lnTo>
+                  <a:pt x="642221" y="957979"/>
+                </a:lnTo>
+                <a:close/>
+                <a:lnTo>
+                  <a:pt x="647573" y="952627"/>
+                </a:lnTo>
+                <a:close/>
+                <a:lnTo>
+                  <a:pt x="652924" y="947276"/>
+                </a:lnTo>
+                <a:close/>
+                <a:lnTo>
+                  <a:pt x="658276" y="941924"/>
+                </a:lnTo>
+                <a:close/>
+                <a:lnTo>
+                  <a:pt x="663628" y="936572"/>
+                </a:lnTo>
+                <a:close/>
+                <a:lnTo>
+                  <a:pt x="668980" y="931220"/>
+                </a:lnTo>
+                <a:close/>
+                <a:lnTo>
+                  <a:pt x="674332" y="925868"/>
+                </a:lnTo>
+                <a:close/>
+                <a:lnTo>
+                  <a:pt x="679684" y="920516"/>
+                </a:lnTo>
+                <a:close/>
+                <a:lnTo>
+                  <a:pt x="685035" y="915165"/>
+                </a:lnTo>
+                <a:close/>
+                <a:lnTo>
+                  <a:pt x="690387" y="909813"/>
+                </a:lnTo>
+                <a:close/>
+                <a:lnTo>
+                  <a:pt x="695739" y="904461"/>
+                </a:lnTo>
+                <a:close/>
+                <a:lnTo>
+                  <a:pt x="701091" y="899109"/>
+                </a:lnTo>
+                <a:close/>
+                <a:lnTo>
+                  <a:pt x="706443" y="893757"/>
+                </a:lnTo>
+                <a:close/>
+                <a:lnTo>
+                  <a:pt x="711795" y="888405"/>
+                </a:lnTo>
+                <a:close/>
+                <a:lnTo>
+                  <a:pt x="717146" y="883054"/>
+                </a:lnTo>
+                <a:close/>
+                <a:lnTo>
+                  <a:pt x="722498" y="877702"/>
+                </a:lnTo>
+                <a:close/>
+                <a:lnTo>
+                  <a:pt x="727850" y="872350"/>
+                </a:lnTo>
+                <a:close/>
+                <a:lnTo>
+                  <a:pt x="733202" y="866998"/>
+                </a:lnTo>
+                <a:close/>
+                <a:lnTo>
+                  <a:pt x="738554" y="861646"/>
+                </a:lnTo>
+                <a:close/>
+                <a:lnTo>
+                  <a:pt x="743906" y="856294"/>
+                </a:lnTo>
+                <a:close/>
+                <a:lnTo>
+                  <a:pt x="749258" y="850942"/>
+                </a:lnTo>
+                <a:close/>
+                <a:lnTo>
+                  <a:pt x="754609" y="845591"/>
+                </a:lnTo>
+                <a:close/>
+                <a:lnTo>
+                  <a:pt x="759961" y="840239"/>
+                </a:lnTo>
+                <a:close/>
+                <a:lnTo>
+                  <a:pt x="765313" y="834887"/>
+                </a:lnTo>
+                <a:close/>
+                <a:lnTo>
+                  <a:pt x="770665" y="829535"/>
+                </a:lnTo>
+                <a:close/>
+                <a:lnTo>
+                  <a:pt x="776017" y="824183"/>
+                </a:lnTo>
+                <a:close/>
+                <a:lnTo>
+                  <a:pt x="781369" y="818831"/>
+                </a:lnTo>
+                <a:close/>
+                <a:lnTo>
+                  <a:pt x="786720" y="813480"/>
+                </a:lnTo>
+                <a:close/>
+                <a:lnTo>
+                  <a:pt x="792072" y="808128"/>
+                </a:lnTo>
+                <a:close/>
+                <a:lnTo>
+                  <a:pt x="797424" y="802776"/>
+                </a:lnTo>
+                <a:close/>
+                <a:lnTo>
+                  <a:pt x="802776" y="797424"/>
+                </a:lnTo>
+                <a:close/>
+                <a:lnTo>
+                  <a:pt x="808128" y="792072"/>
+                </a:lnTo>
+                <a:close/>
+                <a:lnTo>
+                  <a:pt x="813480" y="786720"/>
+                </a:lnTo>
+                <a:close/>
+                <a:lnTo>
+                  <a:pt x="818831" y="781369"/>
+                </a:lnTo>
+                <a:close/>
+                <a:lnTo>
+                  <a:pt x="824183" y="776017"/>
+                </a:lnTo>
+                <a:close/>
+                <a:lnTo>
+                  <a:pt x="829535" y="770665"/>
+                </a:lnTo>
+                <a:close/>
+                <a:lnTo>
+                  <a:pt x="834887" y="765313"/>
+                </a:lnTo>
+                <a:close/>
+                <a:lnTo>
+                  <a:pt x="840239" y="759961"/>
+                </a:lnTo>
+                <a:close/>
+                <a:lnTo>
+                  <a:pt x="845591" y="754609"/>
+                </a:lnTo>
+                <a:close/>
+                <a:lnTo>
+                  <a:pt x="850942" y="749258"/>
+                </a:lnTo>
+                <a:close/>
+                <a:lnTo>
+                  <a:pt x="856294" y="743906"/>
+                </a:lnTo>
+                <a:close/>
+                <a:lnTo>
+                  <a:pt x="861646" y="738554"/>
+                </a:lnTo>
+                <a:close/>
+                <a:lnTo>
+                  <a:pt x="866998" y="733202"/>
+                </a:lnTo>
+                <a:close/>
+                <a:lnTo>
+                  <a:pt x="872350" y="727850"/>
+                </a:lnTo>
+                <a:close/>
+                <a:lnTo>
+                  <a:pt x="877702" y="722498"/>
+                </a:lnTo>
+                <a:close/>
+                <a:lnTo>
+                  <a:pt x="883054" y="717146"/>
+                </a:lnTo>
+                <a:close/>
+                <a:lnTo>
+                  <a:pt x="888405" y="711795"/>
+                </a:lnTo>
+                <a:close/>
+                <a:lnTo>
+                  <a:pt x="893757" y="706443"/>
+                </a:lnTo>
+                <a:close/>
+                <a:lnTo>
+                  <a:pt x="899109" y="701091"/>
+                </a:lnTo>
+                <a:close/>
+                <a:lnTo>
+                  <a:pt x="904461" y="695739"/>
+                </a:lnTo>
+                <a:close/>
+                <a:lnTo>
+                  <a:pt x="909813" y="690387"/>
+                </a:lnTo>
+                <a:close/>
+                <a:lnTo>
+                  <a:pt x="915165" y="685035"/>
+                </a:lnTo>
+                <a:close/>
+                <a:lnTo>
+                  <a:pt x="920516" y="679684"/>
+                </a:lnTo>
+                <a:close/>
+                <a:lnTo>
+                  <a:pt x="925868" y="674332"/>
+                </a:lnTo>
+                <a:close/>
+                <a:lnTo>
+                  <a:pt x="931220" y="668980"/>
+                </a:lnTo>
+                <a:close/>
+                <a:lnTo>
+                  <a:pt x="936572" y="663628"/>
+                </a:lnTo>
+                <a:close/>
+                <a:lnTo>
+                  <a:pt x="941924" y="658276"/>
+                </a:lnTo>
+                <a:close/>
+                <a:lnTo>
+                  <a:pt x="947276" y="652924"/>
+                </a:lnTo>
+                <a:close/>
+                <a:lnTo>
+                  <a:pt x="952627" y="647573"/>
+                </a:lnTo>
+                <a:close/>
+                <a:lnTo>
+                  <a:pt x="957979" y="642221"/>
+                </a:lnTo>
+                <a:close/>
+                <a:lnTo>
+                  <a:pt x="963331" y="636869"/>
+                </a:lnTo>
+                <a:close/>
+                <a:lnTo>
+                  <a:pt x="968683" y="631517"/>
+                </a:lnTo>
+                <a:close/>
+                <a:lnTo>
+                  <a:pt x="974035" y="626165"/>
+                </a:lnTo>
+                <a:close/>
+                <a:lnTo>
+                  <a:pt x="979387" y="620813"/>
+                </a:lnTo>
+                <a:close/>
+                <a:lnTo>
+                  <a:pt x="984738" y="615462"/>
+                </a:lnTo>
+                <a:close/>
+                <a:lnTo>
+                  <a:pt x="990090" y="610110"/>
+                </a:lnTo>
+                <a:close/>
+                <a:lnTo>
+                  <a:pt x="995442" y="604758"/>
+                </a:lnTo>
+                <a:close/>
+                <a:lnTo>
+                  <a:pt x="1000794" y="599406"/>
+                </a:lnTo>
+                <a:close/>
+                <a:lnTo>
+                  <a:pt x="1006146" y="594054"/>
+                </a:lnTo>
+                <a:close/>
+                <a:lnTo>
+                  <a:pt x="1011498" y="588702"/>
+                </a:lnTo>
+                <a:close/>
+                <a:lnTo>
+                  <a:pt x="1016849" y="583351"/>
+                </a:lnTo>
+                <a:close/>
+                <a:lnTo>
+                  <a:pt x="1022201" y="577999"/>
+                </a:lnTo>
+                <a:close/>
+                <a:lnTo>
+                  <a:pt x="1027553" y="572647"/>
+                </a:lnTo>
+                <a:close/>
+                <a:lnTo>
+                  <a:pt x="1032905" y="567295"/>
+                </a:lnTo>
+                <a:close/>
+                <a:lnTo>
+                  <a:pt x="1038257" y="561943"/>
+                </a:lnTo>
+                <a:close/>
+                <a:lnTo>
+                  <a:pt x="1043609" y="556591"/>
+                </a:lnTo>
+                <a:close/>
+                <a:lnTo>
+                  <a:pt x="1048961" y="551239"/>
+                </a:lnTo>
+                <a:close/>
+                <a:lnTo>
+                  <a:pt x="1054312" y="545888"/>
+                </a:lnTo>
+                <a:close/>
+                <a:lnTo>
+                  <a:pt x="1059664" y="540536"/>
+                </a:lnTo>
+                <a:close/>
+                <a:lnTo>
+                  <a:pt x="1065016" y="535184"/>
+                </a:lnTo>
+                <a:close/>
+                <a:lnTo>
+                  <a:pt x="1070368" y="529832"/>
+                </a:lnTo>
+                <a:close/>
+                <a:lnTo>
+                  <a:pt x="1075720" y="524480"/>
+                </a:lnTo>
+                <a:close/>
+                <a:lnTo>
+                  <a:pt x="1081072" y="519128"/>
+                </a:lnTo>
+                <a:close/>
+                <a:lnTo>
+                  <a:pt x="1086423" y="513777"/>
+                </a:lnTo>
+                <a:close/>
+                <a:lnTo>
+                  <a:pt x="1091775" y="508425"/>
+                </a:lnTo>
+                <a:close/>
+                <a:lnTo>
+                  <a:pt x="1097127" y="503073"/>
+                </a:lnTo>
+                <a:close/>
+                <a:lnTo>
+                  <a:pt x="1102479" y="497721"/>
+                </a:lnTo>
+                <a:close/>
+                <a:lnTo>
+                  <a:pt x="1107831" y="492369"/>
+                </a:lnTo>
+                <a:close/>
+                <a:lnTo>
+                  <a:pt x="1113183" y="487017"/>
+                </a:lnTo>
+                <a:close/>
+                <a:lnTo>
+                  <a:pt x="1118534" y="481666"/>
+                </a:lnTo>
+                <a:close/>
+                <a:lnTo>
+                  <a:pt x="1123886" y="476314"/>
+                </a:lnTo>
+                <a:close/>
+                <a:lnTo>
+                  <a:pt x="1129238" y="470962"/>
+                </a:lnTo>
+                <a:close/>
+                <a:lnTo>
+                  <a:pt x="1134590" y="465610"/>
+                </a:lnTo>
+                <a:close/>
+                <a:lnTo>
+                  <a:pt x="1139942" y="460258"/>
+                </a:lnTo>
+                <a:close/>
+                <a:lnTo>
+                  <a:pt x="1145294" y="454906"/>
+                </a:lnTo>
+                <a:close/>
+                <a:lnTo>
+                  <a:pt x="1150645" y="449555"/>
+                </a:lnTo>
+                <a:close/>
+                <a:lnTo>
+                  <a:pt x="1155997" y="444203"/>
+                </a:lnTo>
+                <a:close/>
+                <a:lnTo>
+                  <a:pt x="1161349" y="438851"/>
+                </a:lnTo>
+                <a:close/>
+                <a:lnTo>
+                  <a:pt x="1166701" y="433499"/>
+                </a:lnTo>
+                <a:close/>
+                <a:lnTo>
+                  <a:pt x="1172053" y="428147"/>
+                </a:lnTo>
+                <a:close/>
+                <a:lnTo>
+                  <a:pt x="1177405" y="422795"/>
+                </a:lnTo>
+                <a:close/>
+                <a:lnTo>
+                  <a:pt x="1182757" y="417443"/>
+                </a:lnTo>
+                <a:close/>
+                <a:lnTo>
+                  <a:pt x="1188108" y="412092"/>
+                </a:lnTo>
+                <a:close/>
+                <a:lnTo>
+                  <a:pt x="1193460" y="406740"/>
+                </a:lnTo>
+                <a:close/>
+                <a:lnTo>
+                  <a:pt x="1198812" y="401388"/>
+                </a:lnTo>
+                <a:close/>
+                <a:lnTo>
+                  <a:pt x="1204164" y="396036"/>
+                </a:lnTo>
+                <a:close/>
+                <a:lnTo>
+                  <a:pt x="1209516" y="390684"/>
+                </a:lnTo>
+                <a:close/>
+                <a:lnTo>
+                  <a:pt x="1214868" y="385332"/>
+                </a:lnTo>
+                <a:close/>
+                <a:lnTo>
+                  <a:pt x="1220219" y="379981"/>
+                </a:lnTo>
+                <a:close/>
+                <a:lnTo>
+                  <a:pt x="1225571" y="374629"/>
+                </a:lnTo>
+                <a:close/>
+                <a:lnTo>
+                  <a:pt x="1230923" y="369277"/>
+                </a:lnTo>
+                <a:close/>
+                <a:lnTo>
+                  <a:pt x="1236275" y="363925"/>
+                </a:lnTo>
+                <a:close/>
+                <a:lnTo>
+                  <a:pt x="1241627" y="358573"/>
+                </a:lnTo>
+                <a:close/>
+                <a:lnTo>
+                  <a:pt x="1246979" y="353221"/>
+                </a:lnTo>
+                <a:close/>
+                <a:lnTo>
+                  <a:pt x="1252330" y="347870"/>
+                </a:lnTo>
+                <a:close/>
+                <a:lnTo>
+                  <a:pt x="1257682" y="342518"/>
+                </a:lnTo>
+                <a:close/>
+                <a:lnTo>
+                  <a:pt x="1263034" y="337166"/>
+                </a:lnTo>
+                <a:close/>
+                <a:lnTo>
+                  <a:pt x="1268386" y="331814"/>
+                </a:lnTo>
+                <a:close/>
+                <a:lnTo>
+                  <a:pt x="1273738" y="326462"/>
+                </a:lnTo>
+                <a:close/>
+                <a:lnTo>
+                  <a:pt x="1279090" y="321110"/>
+                </a:lnTo>
+                <a:close/>
+                <a:lnTo>
+                  <a:pt x="1284441" y="315759"/>
+                </a:lnTo>
+                <a:close/>
+                <a:lnTo>
+                  <a:pt x="1289793" y="310407"/>
+                </a:lnTo>
+                <a:close/>
+                <a:lnTo>
+                  <a:pt x="1295145" y="305055"/>
+                </a:lnTo>
+                <a:close/>
+                <a:lnTo>
+                  <a:pt x="1300497" y="299703"/>
+                </a:lnTo>
+                <a:close/>
+                <a:lnTo>
+                  <a:pt x="1305849" y="294351"/>
+                </a:lnTo>
+                <a:close/>
+                <a:lnTo>
+                  <a:pt x="1311201" y="288999"/>
+                </a:lnTo>
+                <a:close/>
+                <a:lnTo>
+                  <a:pt x="1316553" y="283647"/>
+                </a:lnTo>
+                <a:close/>
+                <a:lnTo>
+                  <a:pt x="1321904" y="278296"/>
+                </a:lnTo>
+                <a:close/>
+                <a:lnTo>
+                  <a:pt x="1327256" y="272944"/>
+                </a:lnTo>
+                <a:close/>
+                <a:lnTo>
+                  <a:pt x="1332608" y="267592"/>
+                </a:lnTo>
+                <a:close/>
+                <a:lnTo>
+                  <a:pt x="1337960" y="262240"/>
+                </a:lnTo>
+                <a:close/>
+                <a:lnTo>
+                  <a:pt x="1343312" y="256888"/>
+                </a:lnTo>
+                <a:close/>
+                <a:lnTo>
+                  <a:pt x="1348664" y="251536"/>
+                </a:lnTo>
+                <a:close/>
+                <a:lnTo>
+                  <a:pt x="1354015" y="246185"/>
+                </a:lnTo>
+                <a:close/>
+                <a:lnTo>
+                  <a:pt x="1359367" y="240833"/>
+                </a:lnTo>
+                <a:close/>
+                <a:lnTo>
+                  <a:pt x="1364719" y="235481"/>
+                </a:lnTo>
+                <a:close/>
+                <a:lnTo>
+                  <a:pt x="1370071" y="230129"/>
+                </a:lnTo>
+                <a:close/>
+                <a:lnTo>
+                  <a:pt x="1375423" y="224777"/>
+                </a:lnTo>
+                <a:close/>
+                <a:lnTo>
+                  <a:pt x="1380775" y="219425"/>
+                </a:lnTo>
+                <a:close/>
+                <a:lnTo>
+                  <a:pt x="1386126" y="214074"/>
+                </a:lnTo>
+                <a:close/>
+                <a:lnTo>
+                  <a:pt x="1391478" y="208722"/>
+                </a:lnTo>
+                <a:close/>
+                <a:lnTo>
+                  <a:pt x="1396830" y="203370"/>
+                </a:lnTo>
+                <a:close/>
+                <a:lnTo>
+                  <a:pt x="1402182" y="198018"/>
+                </a:lnTo>
+                <a:close/>
+                <a:lnTo>
+                  <a:pt x="1407534" y="192666"/>
+                </a:lnTo>
+                <a:close/>
+                <a:lnTo>
+                  <a:pt x="1412886" y="187314"/>
+                </a:lnTo>
+                <a:close/>
+                <a:lnTo>
+                  <a:pt x="1418237" y="181963"/>
+                </a:lnTo>
+                <a:close/>
+                <a:lnTo>
+                  <a:pt x="1423589" y="176611"/>
+                </a:lnTo>
+                <a:close/>
+                <a:lnTo>
+                  <a:pt x="1428941" y="171259"/>
+                </a:lnTo>
+                <a:close/>
+                <a:lnTo>
+                  <a:pt x="1434293" y="165907"/>
+                </a:lnTo>
+                <a:close/>
+                <a:lnTo>
+                  <a:pt x="1439645" y="160555"/>
+                </a:lnTo>
+                <a:close/>
+                <a:lnTo>
+                  <a:pt x="1444997" y="155203"/>
+                </a:lnTo>
+                <a:close/>
+                <a:lnTo>
+                  <a:pt x="1450348" y="149852"/>
+                </a:lnTo>
+                <a:close/>
+                <a:lnTo>
+                  <a:pt x="1455700" y="144500"/>
+                </a:lnTo>
+                <a:close/>
+                <a:lnTo>
+                  <a:pt x="1461052" y="139148"/>
+                </a:lnTo>
+                <a:close/>
+                <a:lnTo>
+                  <a:pt x="1466404" y="133796"/>
+                </a:lnTo>
+                <a:close/>
+                <a:lnTo>
+                  <a:pt x="1471756" y="128444"/>
+                </a:lnTo>
+                <a:close/>
+                <a:lnTo>
+                  <a:pt x="1477108" y="123092"/>
+                </a:lnTo>
+                <a:close/>
+                <a:lnTo>
+                  <a:pt x="1482460" y="117740"/>
+                </a:lnTo>
+                <a:close/>
+                <a:lnTo>
+                  <a:pt x="1487811" y="112389"/>
+                </a:lnTo>
+                <a:close/>
+                <a:lnTo>
+                  <a:pt x="1493163" y="107037"/>
+                </a:lnTo>
+                <a:close/>
+                <a:lnTo>
+                  <a:pt x="1498515" y="101685"/>
+                </a:lnTo>
+                <a:close/>
+                <a:lnTo>
+                  <a:pt x="1503867" y="96333"/>
+                </a:lnTo>
+                <a:close/>
+                <a:lnTo>
+                  <a:pt x="1509219" y="90981"/>
+                </a:lnTo>
+                <a:close/>
+                <a:lnTo>
+                  <a:pt x="1514571" y="85629"/>
+                </a:lnTo>
+                <a:close/>
+                <a:lnTo>
+                  <a:pt x="1519922" y="80278"/>
+                </a:lnTo>
+                <a:close/>
+                <a:lnTo>
+                  <a:pt x="1525274" y="74926"/>
+                </a:lnTo>
+                <a:close/>
+                <a:lnTo>
+                  <a:pt x="1530626" y="69574"/>
+                </a:lnTo>
+                <a:close/>
+                <a:lnTo>
+                  <a:pt x="1535978" y="64222"/>
+                </a:lnTo>
+                <a:close/>
+                <a:lnTo>
+                  <a:pt x="1541330" y="58870"/>
+                </a:lnTo>
+                <a:close/>
+                <a:lnTo>
+                  <a:pt x="1546682" y="53518"/>
+                </a:lnTo>
+                <a:close/>
+                <a:lnTo>
+                  <a:pt x="1552033" y="48167"/>
+                </a:lnTo>
+                <a:close/>
+                <a:lnTo>
+                  <a:pt x="1557385" y="42815"/>
+                </a:lnTo>
+                <a:close/>
+                <a:lnTo>
+                  <a:pt x="1562737" y="37463"/>
+                </a:lnTo>
+                <a:close/>
+                <a:lnTo>
+                  <a:pt x="1568089" y="32111"/>
+                </a:lnTo>
+                <a:close/>
+                <a:lnTo>
+                  <a:pt x="1573441" y="26759"/>
+                </a:lnTo>
+                <a:close/>
+                <a:lnTo>
+                  <a:pt x="1578793" y="21407"/>
+                </a:lnTo>
+                <a:close/>
+                <a:lnTo>
+                  <a:pt x="1584144" y="16056"/>
+                </a:lnTo>
+                <a:close/>
+                <a:lnTo>
+                  <a:pt x="1589496" y="10704"/>
+                </a:lnTo>
+                <a:close/>
+                <a:lnTo>
+                  <a:pt x="1594848" y="5352"/>
+                </a:lnTo>
+                <a:close/>
+                <a:lnTo>
+                  <a:pt x="1600200" y="0"/>
+                </a:lnTo>
+                <a:close/>
+              </a:path>
+            </a:pathLst>
+          </a:custGeom>
+          <a:ln w="31750">
             <a:solidFill>
-              <a:srgbClr val="00C8FF"/>
+              <a:srgbClr val="00E5FF"/>
             </a:solidFill>
           </a:ln>
         </p:spPr>
         <p:style>
-          <a:lnRef idx="2">
+          <a:lnRef idx="1">
             <a:schemeClr val="accent1"/>
           </a:lnRef>
-          <a:fillRef idx="0">
+          <a:fillRef idx="3">
             <a:schemeClr val="accent1"/>
           </a:fillRef>
-          <a:effectRef idx="1">
+          <a:effectRef idx="2">
             <a:schemeClr val="accent1"/>
           </a:effectRef>
           <a:fontRef idx="minor">
-            <a:schemeClr val="tx1"/>
+            <a:schemeClr val="lt1"/>
           </a:fontRef>
         </p:style>
-      </p:cxnSp>
+        <p:txBody>
+          <a:bodyPr rtlCol="0" anchor="ctr"/>
+          <a:lstStyle/>
+          <a:p>
+            <a:pPr algn="ctr"/>
+          </a:p>
+        </p:txBody>
+      </p:sp>
       <p:cxnSp>
         <p:nvCxnSpPr>
           <p:cNvPr id="5" name="Connector 4"/>
@@ -3209,16 +4423,17 @@
         </p:nvCxnSpPr>
         <p:spPr>
           <a:xfrm flipV="1">
-            <a:off x="5084521.2" y="2281428.0"/>
-            <a:ext cx="54864.0" cy="32004.0"/>
+            <a:off x="5943600.0" y="834390.0"/>
+            <a:ext cx="0.0" cy="1737360.0"/>
           </a:xfrm>
           <a:prstGeom prst="line">
             <a:avLst/>
           </a:prstGeom>
-          <a:ln w="25400">
+          <a:ln w="12700">
             <a:solidFill>
-              <a:srgbClr val="00C8FF"/>
+              <a:srgbClr val="787878"/>
             </a:solidFill>
+            <a:prstDash val="sysDash"/>
           </a:ln>
         </p:spPr>
         <p:style>
@@ -3243,17 +4458,18 @@
           <p:nvPr/>
         </p:nvCxnSpPr>
         <p:spPr>
-          <a:xfrm flipV="1">
-            <a:off x="5139385.2" y="2247138.0"/>
-            <a:ext cx="55321.200000000186" cy="34290.0"/>
+          <a:xfrm>
+            <a:off x="4572000.0" y="834390.0"/>
+            <a:ext cx="1371600.0" cy="0.0"/>
           </a:xfrm>
           <a:prstGeom prst="line">
             <a:avLst/>
           </a:prstGeom>
-          <a:ln w="25400">
+          <a:ln w="12700">
             <a:solidFill>
-              <a:srgbClr val="00C8FF"/>
+              <a:srgbClr val="787878"/>
             </a:solidFill>
+            <a:prstDash val="sysDash"/>
           </a:ln>
         </p:spPr>
         <p:style>
@@ -3271,41 +4487,51 @@
           </a:fontRef>
         </p:style>
       </p:cxnSp>
-      <p:cxnSp>
-        <p:nvCxnSpPr>
-          <p:cNvPr id="7" name="Connector 6"/>
-          <p:cNvCxnSpPr/>
+      <p:sp>
+        <p:nvSpPr>
+          <p:cNvPr id="7" name="Oval 6"/>
+          <p:cNvSpPr/>
           <p:nvPr/>
-        </p:nvCxnSpPr>
+        </p:nvSpPr>
         <p:spPr>
-          <a:xfrm flipV="1">
-            <a:off x="5194706.4" y="2211019.2"/>
-            <a:ext cx="55321.199999999255" cy="36118.799999999814"/>
+          <a:xfrm>
+            <a:off x="5892800" y="783590"/>
+            <a:ext cx="101600" cy="101600"/>
           </a:xfrm>
-          <a:prstGeom prst="line">
+          <a:prstGeom prst="ellipse">
             <a:avLst/>
           </a:prstGeom>
-          <a:ln w="25400">
+          <a:solidFill>
+            <a:srgbClr val="FFFFFF"/>
+          </a:solidFill>
+          <a:ln w="12700">
             <a:solidFill>
-              <a:srgbClr val="00C8FF"/>
+              <a:srgbClr val="FFFFFF"/>
             </a:solidFill>
           </a:ln>
         </p:spPr>
         <p:style>
-          <a:lnRef idx="2">
+          <a:lnRef idx="1">
             <a:schemeClr val="accent1"/>
           </a:lnRef>
-          <a:fillRef idx="0">
+          <a:fillRef idx="3">
             <a:schemeClr val="accent1"/>
           </a:fillRef>
-          <a:effectRef idx="1">
+          <a:effectRef idx="2">
             <a:schemeClr val="accent1"/>
           </a:effectRef>
           <a:fontRef idx="minor">
-            <a:schemeClr val="tx1"/>
+            <a:schemeClr val="lt1"/>
           </a:fontRef>
         </p:style>
-      </p:cxnSp>
+        <p:txBody>
+          <a:bodyPr rtlCol="0" anchor="ctr"/>
+          <a:lstStyle/>
+          <a:p>
+            <a:pPr algn="ctr"/>
+          </a:p>
+        </p:txBody>
+      </p:sp>
       <p:cxnSp>
         <p:nvCxnSpPr>
           <p:cNvPr id="8" name="Connector 7"/>
@@ -3313,16 +4539,16 @@
           <p:nvPr/>
         </p:nvCxnSpPr>
         <p:spPr>
-          <a:xfrm flipV="1">
-            <a:off x="5250027.6" y="2172614.4"/>
-            <a:ext cx="54864.0" cy="38404.80000000028"/>
+          <a:xfrm>
+            <a:off x="5486400.0" y="2571750.0"/>
+            <a:ext cx="411480.0" cy="0.0"/>
           </a:xfrm>
           <a:prstGeom prst="line">
             <a:avLst/>
           </a:prstGeom>
-          <a:ln w="25400">
+          <a:ln w="15240">
             <a:solidFill>
-              <a:srgbClr val="00C8FF"/>
+              <a:srgbClr val="B4B4B4"/>
             </a:solidFill>
           </a:ln>
         </p:spPr>
@@ -3348,16 +4574,16 @@
           <p:nvPr/>
         </p:nvCxnSpPr>
         <p:spPr>
-          <a:xfrm flipV="1">
-            <a:off x="5304891.6" y="2131923.6"/>
-            <a:ext cx="55321.200000000186" cy="40690.799999999814"/>
+          <a:xfrm flipH="1">
+            <a:off x="5989320.0" y="2571750.0"/>
+            <a:ext cx="365760.0" cy="0.0"/>
           </a:xfrm>
           <a:prstGeom prst="line">
             <a:avLst/>
           </a:prstGeom>
-          <a:ln w="25400">
+          <a:ln w="15240">
             <a:solidFill>
-              <a:srgbClr val="00C8FF"/>
+              <a:srgbClr val="B4B4B4"/>
             </a:solidFill>
           </a:ln>
         </p:spPr>
@@ -3376,831 +4602,430 @@
           </a:fontRef>
         </p:style>
       </p:cxnSp>
-      <p:cxnSp>
-        <p:nvCxnSpPr>
-          <p:cNvPr id="10" name="Connector 9"/>
-          <p:cNvCxnSpPr/>
-          <p:nvPr/>
-        </p:nvCxnSpPr>
-        <p:spPr>
-          <a:xfrm flipV="1">
-            <a:off x="5360212.8" y="2088946.8"/>
-            <a:ext cx="55321.200000000186" cy="42976.80000000005"/>
-          </a:xfrm>
-          <a:prstGeom prst="line">
-            <a:avLst/>
-          </a:prstGeom>
-          <a:ln w="25400">
-            <a:solidFill>
-              <a:srgbClr val="00C8FF"/>
-            </a:solidFill>
-          </a:ln>
-        </p:spPr>
-        <p:style>
-          <a:lnRef idx="2">
-            <a:schemeClr val="accent1"/>
-          </a:lnRef>
-          <a:fillRef idx="0">
-            <a:schemeClr val="accent1"/>
-          </a:fillRef>
-          <a:effectRef idx="1">
-            <a:schemeClr val="accent1"/>
-          </a:effectRef>
-          <a:fontRef idx="minor">
-            <a:schemeClr val="tx1"/>
-          </a:fontRef>
-        </p:style>
-      </p:cxnSp>
-      <p:cxnSp>
-        <p:nvCxnSpPr>
-          <p:cNvPr id="11" name="Connector 10"/>
-          <p:cNvCxnSpPr/>
-          <p:nvPr/>
-        </p:nvCxnSpPr>
-        <p:spPr>
-          <a:xfrm flipV="1">
-            <a:off x="5415534.0" y="2043684.0"/>
-            <a:ext cx="55321.200000000186" cy="45262.80000000005"/>
-          </a:xfrm>
-          <a:prstGeom prst="line">
-            <a:avLst/>
-          </a:prstGeom>
-          <a:ln w="25400">
-            <a:solidFill>
-              <a:srgbClr val="00C8FF"/>
-            </a:solidFill>
-          </a:ln>
-        </p:spPr>
-        <p:style>
-          <a:lnRef idx="2">
-            <a:schemeClr val="accent1"/>
-          </a:lnRef>
-          <a:fillRef idx="0">
-            <a:schemeClr val="accent1"/>
-          </a:fillRef>
-          <a:effectRef idx="1">
-            <a:schemeClr val="accent1"/>
-          </a:effectRef>
-          <a:fontRef idx="minor">
-            <a:schemeClr val="tx1"/>
-          </a:fontRef>
-        </p:style>
-      </p:cxnSp>
-      <p:cxnSp>
-        <p:nvCxnSpPr>
-          <p:cNvPr id="12" name="Connector 11"/>
-          <p:cNvCxnSpPr/>
-          <p:nvPr/>
-        </p:nvCxnSpPr>
-        <p:spPr>
-          <a:xfrm flipV="1">
-            <a:off x="5470855.2" y="1996135.2000000002"/>
-            <a:ext cx="54864.0" cy="47548.799999999814"/>
-          </a:xfrm>
-          <a:prstGeom prst="line">
-            <a:avLst/>
-          </a:prstGeom>
-          <a:ln w="25400">
-            <a:solidFill>
-              <a:srgbClr val="00C8FF"/>
-            </a:solidFill>
-          </a:ln>
-        </p:spPr>
-        <p:style>
-          <a:lnRef idx="2">
-            <a:schemeClr val="accent1"/>
-          </a:lnRef>
-          <a:fillRef idx="0">
-            <a:schemeClr val="accent1"/>
-          </a:fillRef>
-          <a:effectRef idx="1">
-            <a:schemeClr val="accent1"/>
-          </a:effectRef>
-          <a:fontRef idx="minor">
-            <a:schemeClr val="tx1"/>
-          </a:fontRef>
-        </p:style>
-      </p:cxnSp>
-      <p:cxnSp>
-        <p:nvCxnSpPr>
-          <p:cNvPr id="13" name="Connector 12"/>
-          <p:cNvCxnSpPr/>
-          <p:nvPr/>
-        </p:nvCxnSpPr>
-        <p:spPr>
-          <a:xfrm flipV="1">
-            <a:off x="5525719.2" y="1946300.4"/>
-            <a:ext cx="55321.200000000186" cy="49834.80000000028"/>
-          </a:xfrm>
-          <a:prstGeom prst="line">
-            <a:avLst/>
-          </a:prstGeom>
-          <a:ln w="25400">
-            <a:solidFill>
-              <a:srgbClr val="00C8FF"/>
-            </a:solidFill>
-          </a:ln>
-        </p:spPr>
-        <p:style>
-          <a:lnRef idx="2">
-            <a:schemeClr val="accent1"/>
-          </a:lnRef>
-          <a:fillRef idx="0">
-            <a:schemeClr val="accent1"/>
-          </a:fillRef>
-          <a:effectRef idx="1">
-            <a:schemeClr val="accent1"/>
-          </a:effectRef>
-          <a:fontRef idx="minor">
-            <a:schemeClr val="tx1"/>
-          </a:fontRef>
-        </p:style>
-      </p:cxnSp>
-      <p:cxnSp>
-        <p:nvCxnSpPr>
-          <p:cNvPr id="14" name="Connector 13"/>
-          <p:cNvCxnSpPr/>
-          <p:nvPr/>
-        </p:nvCxnSpPr>
-        <p:spPr>
-          <a:xfrm flipV="1">
-            <a:off x="5581040.4" y="1894179.6"/>
-            <a:ext cx="55321.199999999255" cy="52120.799999999814"/>
-          </a:xfrm>
-          <a:prstGeom prst="line">
-            <a:avLst/>
-          </a:prstGeom>
-          <a:ln w="25400">
-            <a:solidFill>
-              <a:srgbClr val="00C8FF"/>
-            </a:solidFill>
-          </a:ln>
-        </p:spPr>
-        <p:style>
-          <a:lnRef idx="2">
-            <a:schemeClr val="accent1"/>
-          </a:lnRef>
-          <a:fillRef idx="0">
-            <a:schemeClr val="accent1"/>
-          </a:fillRef>
-          <a:effectRef idx="1">
-            <a:schemeClr val="accent1"/>
-          </a:effectRef>
-          <a:fontRef idx="minor">
-            <a:schemeClr val="tx1"/>
-          </a:fontRef>
-        </p:style>
-      </p:cxnSp>
-      <p:cxnSp>
-        <p:nvCxnSpPr>
-          <p:cNvPr id="15" name="Connector 14"/>
-          <p:cNvCxnSpPr/>
-          <p:nvPr/>
-        </p:nvCxnSpPr>
-        <p:spPr>
-          <a:xfrm flipV="1">
-            <a:off x="5636361.6" y="1840230.0"/>
-            <a:ext cx="54864.0" cy="53949.60000000009"/>
-          </a:xfrm>
-          <a:prstGeom prst="line">
-            <a:avLst/>
-          </a:prstGeom>
-          <a:ln w="25400">
-            <a:solidFill>
-              <a:srgbClr val="00C8FF"/>
-            </a:solidFill>
-          </a:ln>
-        </p:spPr>
-        <p:style>
-          <a:lnRef idx="2">
-            <a:schemeClr val="accent1"/>
-          </a:lnRef>
-          <a:fillRef idx="0">
-            <a:schemeClr val="accent1"/>
-          </a:fillRef>
-          <a:effectRef idx="1">
-            <a:schemeClr val="accent1"/>
-          </a:effectRef>
-          <a:fontRef idx="minor">
-            <a:schemeClr val="tx1"/>
-          </a:fontRef>
-        </p:style>
-      </p:cxnSp>
-      <p:cxnSp>
-        <p:nvCxnSpPr>
-          <p:cNvPr id="16" name="Connector 15"/>
-          <p:cNvCxnSpPr/>
-          <p:nvPr/>
-        </p:nvCxnSpPr>
-        <p:spPr>
-          <a:xfrm flipV="1">
-            <a:off x="5691225.6" y="1783537.2"/>
-            <a:ext cx="55321.200000000186" cy="56692.80000000005"/>
-          </a:xfrm>
-          <a:prstGeom prst="line">
-            <a:avLst/>
-          </a:prstGeom>
-          <a:ln w="25400">
-            <a:solidFill>
-              <a:srgbClr val="00C8FF"/>
-            </a:solidFill>
-          </a:ln>
-        </p:spPr>
-        <p:style>
-          <a:lnRef idx="2">
-            <a:schemeClr val="accent1"/>
-          </a:lnRef>
-          <a:fillRef idx="0">
-            <a:schemeClr val="accent1"/>
-          </a:fillRef>
-          <a:effectRef idx="1">
-            <a:schemeClr val="accent1"/>
-          </a:effectRef>
-          <a:fontRef idx="minor">
-            <a:schemeClr val="tx1"/>
-          </a:fontRef>
-        </p:style>
-      </p:cxnSp>
-      <p:cxnSp>
-        <p:nvCxnSpPr>
-          <p:cNvPr id="17" name="Connector 16"/>
-          <p:cNvCxnSpPr/>
-          <p:nvPr/>
-        </p:nvCxnSpPr>
-        <p:spPr>
-          <a:xfrm flipV="1">
-            <a:off x="5746546.8" y="1724558.4"/>
-            <a:ext cx="55321.200000000186" cy="58978.80000000005"/>
-          </a:xfrm>
-          <a:prstGeom prst="line">
-            <a:avLst/>
-          </a:prstGeom>
-          <a:ln w="25400">
-            <a:solidFill>
-              <a:srgbClr val="00C8FF"/>
-            </a:solidFill>
-          </a:ln>
-        </p:spPr>
-        <p:style>
-          <a:lnRef idx="2">
-            <a:schemeClr val="accent1"/>
-          </a:lnRef>
-          <a:fillRef idx="0">
-            <a:schemeClr val="accent1"/>
-          </a:fillRef>
-          <a:effectRef idx="1">
-            <a:schemeClr val="accent1"/>
-          </a:effectRef>
-          <a:fontRef idx="minor">
-            <a:schemeClr val="tx1"/>
-          </a:fontRef>
-        </p:style>
-      </p:cxnSp>
-      <p:cxnSp>
-        <p:nvCxnSpPr>
-          <p:cNvPr id="18" name="Connector 17"/>
-          <p:cNvCxnSpPr/>
-          <p:nvPr/>
-        </p:nvCxnSpPr>
-        <p:spPr>
-          <a:xfrm flipV="1">
-            <a:off x="5801868.0" y="1663750.8"/>
-            <a:ext cx="54864.0" cy="60807.59999999986"/>
-          </a:xfrm>
-          <a:prstGeom prst="line">
-            <a:avLst/>
-          </a:prstGeom>
-          <a:ln w="25400">
-            <a:solidFill>
-              <a:srgbClr val="00C8FF"/>
-            </a:solidFill>
-          </a:ln>
-        </p:spPr>
-        <p:style>
-          <a:lnRef idx="2">
-            <a:schemeClr val="accent1"/>
-          </a:lnRef>
-          <a:fillRef idx="0">
-            <a:schemeClr val="accent1"/>
-          </a:fillRef>
-          <a:effectRef idx="1">
-            <a:schemeClr val="accent1"/>
-          </a:effectRef>
-          <a:fontRef idx="minor">
-            <a:schemeClr val="tx1"/>
-          </a:fontRef>
-        </p:style>
-      </p:cxnSp>
-      <p:cxnSp>
-        <p:nvCxnSpPr>
-          <p:cNvPr id="19" name="Connector 18"/>
-          <p:cNvCxnSpPr/>
-          <p:nvPr/>
-        </p:nvCxnSpPr>
-        <p:spPr>
-          <a:xfrm flipV="1">
-            <a:off x="5856732.0" y="1600200.0"/>
-            <a:ext cx="55321.200000000186" cy="63550.80000000005"/>
-          </a:xfrm>
-          <a:prstGeom prst="line">
-            <a:avLst/>
-          </a:prstGeom>
-          <a:ln w="25400">
-            <a:solidFill>
-              <a:srgbClr val="00C8FF"/>
-            </a:solidFill>
-          </a:ln>
-        </p:spPr>
-        <p:style>
-          <a:lnRef idx="2">
-            <a:schemeClr val="accent1"/>
-          </a:lnRef>
-          <a:fillRef idx="0">
-            <a:schemeClr val="accent1"/>
-          </a:fillRef>
-          <a:effectRef idx="1">
-            <a:schemeClr val="accent1"/>
-          </a:effectRef>
-          <a:fontRef idx="minor">
-            <a:schemeClr val="tx1"/>
-          </a:fontRef>
-        </p:style>
-      </p:cxnSp>
-      <p:cxnSp>
-        <p:nvCxnSpPr>
-          <p:cNvPr id="20" name="Connector 19"/>
-          <p:cNvCxnSpPr/>
-          <p:nvPr/>
-        </p:nvCxnSpPr>
-        <p:spPr>
-          <a:xfrm flipV="1">
-            <a:off x="5912053.2" y="1534820.4000000001"/>
-            <a:ext cx="55321.200000000186" cy="65379.59999999986"/>
-          </a:xfrm>
-          <a:prstGeom prst="line">
-            <a:avLst/>
-          </a:prstGeom>
-          <a:ln w="25400">
-            <a:solidFill>
-              <a:srgbClr val="00C8FF"/>
-            </a:solidFill>
-          </a:ln>
-        </p:spPr>
-        <p:style>
-          <a:lnRef idx="2">
-            <a:schemeClr val="accent1"/>
-          </a:lnRef>
-          <a:fillRef idx="0">
-            <a:schemeClr val="accent1"/>
-          </a:fillRef>
-          <a:effectRef idx="1">
-            <a:schemeClr val="accent1"/>
-          </a:effectRef>
-          <a:fontRef idx="minor">
-            <a:schemeClr val="tx1"/>
-          </a:fontRef>
-        </p:style>
-      </p:cxnSp>
-      <p:cxnSp>
-        <p:nvCxnSpPr>
-          <p:cNvPr id="21" name="Connector 20"/>
-          <p:cNvCxnSpPr/>
-          <p:nvPr/>
-        </p:nvCxnSpPr>
-        <p:spPr>
-          <a:xfrm flipV="1">
-            <a:off x="5967374.4" y="1467154.8"/>
-            <a:ext cx="54864.0" cy="67665.6000000001"/>
-          </a:xfrm>
-          <a:prstGeom prst="line">
-            <a:avLst/>
-          </a:prstGeom>
-          <a:ln w="25400">
-            <a:solidFill>
-              <a:srgbClr val="00C8FF"/>
-            </a:solidFill>
-          </a:ln>
-        </p:spPr>
-        <p:style>
-          <a:lnRef idx="2">
-            <a:schemeClr val="accent1"/>
-          </a:lnRef>
-          <a:fillRef idx="0">
-            <a:schemeClr val="accent1"/>
-          </a:fillRef>
-          <a:effectRef idx="1">
-            <a:schemeClr val="accent1"/>
-          </a:effectRef>
-          <a:fontRef idx="minor">
-            <a:schemeClr val="tx1"/>
-          </a:fontRef>
-        </p:style>
-      </p:cxnSp>
-      <p:cxnSp>
-        <p:nvCxnSpPr>
-          <p:cNvPr id="22" name="Connector 21"/>
-          <p:cNvCxnSpPr/>
-          <p:nvPr/>
-        </p:nvCxnSpPr>
-        <p:spPr>
-          <a:xfrm flipV="1">
-            <a:off x="6022238.4" y="1397203.2"/>
-            <a:ext cx="55321.199999999255" cy="69951.6000000001"/>
-          </a:xfrm>
-          <a:prstGeom prst="line">
-            <a:avLst/>
-          </a:prstGeom>
-          <a:ln w="25400">
-            <a:solidFill>
-              <a:srgbClr val="00C8FF"/>
-            </a:solidFill>
-          </a:ln>
-        </p:spPr>
-        <p:style>
-          <a:lnRef idx="2">
-            <a:schemeClr val="accent1"/>
-          </a:lnRef>
-          <a:fillRef idx="0">
-            <a:schemeClr val="accent1"/>
-          </a:fillRef>
-          <a:effectRef idx="1">
-            <a:schemeClr val="accent1"/>
-          </a:effectRef>
-          <a:fontRef idx="minor">
-            <a:schemeClr val="tx1"/>
-          </a:fontRef>
-        </p:style>
-      </p:cxnSp>
-      <p:cxnSp>
-        <p:nvCxnSpPr>
-          <p:cNvPr id="23" name="Connector 22"/>
-          <p:cNvCxnSpPr/>
-          <p:nvPr/>
-        </p:nvCxnSpPr>
-        <p:spPr>
-          <a:xfrm flipV="1">
-            <a:off x="6077559.6" y="1324965.6"/>
-            <a:ext cx="55321.200000000186" cy="72237.59999999986"/>
-          </a:xfrm>
-          <a:prstGeom prst="line">
-            <a:avLst/>
-          </a:prstGeom>
-          <a:ln w="25400">
-            <a:solidFill>
-              <a:srgbClr val="00C8FF"/>
-            </a:solidFill>
-          </a:ln>
-        </p:spPr>
-        <p:style>
-          <a:lnRef idx="2">
-            <a:schemeClr val="accent1"/>
-          </a:lnRef>
-          <a:fillRef idx="0">
-            <a:schemeClr val="accent1"/>
-          </a:fillRef>
-          <a:effectRef idx="1">
-            <a:schemeClr val="accent1"/>
-          </a:effectRef>
-          <a:fontRef idx="minor">
-            <a:schemeClr val="tx1"/>
-          </a:fontRef>
-        </p:style>
-      </p:cxnSp>
-      <p:cxnSp>
-        <p:nvCxnSpPr>
-          <p:cNvPr id="24" name="Connector 23"/>
-          <p:cNvCxnSpPr/>
-          <p:nvPr/>
-        </p:nvCxnSpPr>
-        <p:spPr>
-          <a:xfrm flipV="1">
-            <a:off x="6132880.8" y="1250442.0"/>
-            <a:ext cx="54864.0" cy="74523.6000000001"/>
-          </a:xfrm>
-          <a:prstGeom prst="line">
-            <a:avLst/>
-          </a:prstGeom>
-          <a:ln w="25400">
-            <a:solidFill>
-              <a:srgbClr val="00C8FF"/>
-            </a:solidFill>
-          </a:ln>
-        </p:spPr>
-        <p:style>
-          <a:lnRef idx="2">
-            <a:schemeClr val="accent1"/>
-          </a:lnRef>
-          <a:fillRef idx="0">
-            <a:schemeClr val="accent1"/>
-          </a:fillRef>
-          <a:effectRef idx="1">
-            <a:schemeClr val="accent1"/>
-          </a:effectRef>
-          <a:fontRef idx="minor">
-            <a:schemeClr val="tx1"/>
-          </a:fontRef>
-        </p:style>
-      </p:cxnSp>
-      <p:cxnSp>
-        <p:nvCxnSpPr>
-          <p:cNvPr id="25" name="Connector 24"/>
-          <p:cNvCxnSpPr/>
-          <p:nvPr/>
-        </p:nvCxnSpPr>
-        <p:spPr>
-          <a:xfrm flipV="1">
-            <a:off x="6187744.8" y="1173632.4000000001"/>
-            <a:ext cx="55321.200000000186" cy="76809.59999999986"/>
-          </a:xfrm>
-          <a:prstGeom prst="line">
-            <a:avLst/>
-          </a:prstGeom>
-          <a:ln w="25400">
-            <a:solidFill>
-              <a:srgbClr val="00C8FF"/>
-            </a:solidFill>
-          </a:ln>
-        </p:spPr>
-        <p:style>
-          <a:lnRef idx="2">
-            <a:schemeClr val="accent1"/>
-          </a:lnRef>
-          <a:fillRef idx="0">
-            <a:schemeClr val="accent1"/>
-          </a:fillRef>
-          <a:effectRef idx="1">
-            <a:schemeClr val="accent1"/>
-          </a:effectRef>
-          <a:fontRef idx="minor">
-            <a:schemeClr val="tx1"/>
-          </a:fontRef>
-        </p:style>
-      </p:cxnSp>
-      <p:cxnSp>
-        <p:nvCxnSpPr>
-          <p:cNvPr id="26" name="Connector 25"/>
-          <p:cNvCxnSpPr/>
-          <p:nvPr/>
-        </p:nvCxnSpPr>
-        <p:spPr>
-          <a:xfrm flipV="1">
-            <a:off x="6243066.0" y="1094994.0"/>
-            <a:ext cx="55321.200000000186" cy="78638.40000000014"/>
-          </a:xfrm>
-          <a:prstGeom prst="line">
-            <a:avLst/>
-          </a:prstGeom>
-          <a:ln w="25400">
-            <a:solidFill>
-              <a:srgbClr val="00C8FF"/>
-            </a:solidFill>
-          </a:ln>
-        </p:spPr>
-        <p:style>
-          <a:lnRef idx="2">
-            <a:schemeClr val="accent1"/>
-          </a:lnRef>
-          <a:fillRef idx="0">
-            <a:schemeClr val="accent1"/>
-          </a:fillRef>
-          <a:effectRef idx="1">
-            <a:schemeClr val="accent1"/>
-          </a:effectRef>
-          <a:fontRef idx="minor">
-            <a:schemeClr val="tx1"/>
-          </a:fontRef>
-        </p:style>
-      </p:cxnSp>
-      <p:cxnSp>
-        <p:nvCxnSpPr>
-          <p:cNvPr id="27" name="Connector 26"/>
-          <p:cNvCxnSpPr/>
-          <p:nvPr/>
-        </p:nvCxnSpPr>
-        <p:spPr>
-          <a:xfrm flipV="1">
-            <a:off x="6298387.2" y="1014069.6000000001"/>
-            <a:ext cx="55321.200000000186" cy="80924.3999999999"/>
-          </a:xfrm>
-          <a:prstGeom prst="line">
-            <a:avLst/>
-          </a:prstGeom>
-          <a:ln w="25400">
-            <a:solidFill>
-              <a:srgbClr val="00C8FF"/>
-            </a:solidFill>
-          </a:ln>
-        </p:spPr>
-        <p:style>
-          <a:lnRef idx="2">
-            <a:schemeClr val="accent1"/>
-          </a:lnRef>
-          <a:fillRef idx="0">
-            <a:schemeClr val="accent1"/>
-          </a:fillRef>
-          <a:effectRef idx="1">
-            <a:schemeClr val="accent1"/>
-          </a:effectRef>
-          <a:fontRef idx="minor">
-            <a:schemeClr val="tx1"/>
-          </a:fontRef>
-        </p:style>
-      </p:cxnSp>
-      <p:cxnSp>
-        <p:nvCxnSpPr>
-          <p:cNvPr id="28" name="Connector 27"/>
-          <p:cNvCxnSpPr/>
-          <p:nvPr/>
-        </p:nvCxnSpPr>
-        <p:spPr>
-          <a:xfrm flipV="1">
-            <a:off x="6353708.4" y="930859.2"/>
-            <a:ext cx="54864.0" cy="83210.40000000014"/>
-          </a:xfrm>
-          <a:prstGeom prst="line">
-            <a:avLst/>
-          </a:prstGeom>
-          <a:ln w="25400">
-            <a:solidFill>
-              <a:srgbClr val="00C8FF"/>
-            </a:solidFill>
-          </a:ln>
-        </p:spPr>
-        <p:style>
-          <a:lnRef idx="2">
-            <a:schemeClr val="accent1"/>
-          </a:lnRef>
-          <a:fillRef idx="0">
-            <a:schemeClr val="accent1"/>
-          </a:fillRef>
-          <a:effectRef idx="1">
-            <a:schemeClr val="accent1"/>
-          </a:effectRef>
-          <a:fontRef idx="minor">
-            <a:schemeClr val="tx1"/>
-          </a:fontRef>
-        </p:style>
-      </p:cxnSp>
-      <p:cxnSp>
-        <p:nvCxnSpPr>
-          <p:cNvPr id="29" name="Connector 28"/>
-          <p:cNvCxnSpPr/>
-          <p:nvPr/>
-        </p:nvCxnSpPr>
-        <p:spPr>
-          <a:xfrm flipV="1">
-            <a:off x="6408572.4" y="845362.8"/>
-            <a:ext cx="55321.199999999255" cy="85496.3999999999"/>
-          </a:xfrm>
-          <a:prstGeom prst="line">
-            <a:avLst/>
-          </a:prstGeom>
-          <a:ln w="25400">
-            <a:solidFill>
-              <a:srgbClr val="00C8FF"/>
-            </a:solidFill>
-          </a:ln>
-        </p:spPr>
-        <p:style>
-          <a:lnRef idx="2">
-            <a:schemeClr val="accent1"/>
-          </a:lnRef>
-          <a:fillRef idx="0">
-            <a:schemeClr val="accent1"/>
-          </a:fillRef>
-          <a:effectRef idx="1">
-            <a:schemeClr val="accent1"/>
-          </a:effectRef>
-          <a:fontRef idx="minor">
-            <a:schemeClr val="tx1"/>
-          </a:fontRef>
-        </p:style>
-      </p:cxnSp>
-      <p:cxnSp>
-        <p:nvCxnSpPr>
-          <p:cNvPr id="30" name="Connector 29"/>
-          <p:cNvCxnSpPr/>
-          <p:nvPr/>
-        </p:nvCxnSpPr>
-        <p:spPr>
-          <a:xfrm flipV="1">
-            <a:off x="6463893.6" y="757580.3999999999"/>
-            <a:ext cx="55321.200000000186" cy="87782.40000000014"/>
-          </a:xfrm>
-          <a:prstGeom prst="line">
-            <a:avLst/>
-          </a:prstGeom>
-          <a:ln w="25400">
-            <a:solidFill>
-              <a:srgbClr val="00C8FF"/>
-            </a:solidFill>
-          </a:ln>
-        </p:spPr>
-        <p:style>
-          <a:lnRef idx="2">
-            <a:schemeClr val="accent1"/>
-          </a:lnRef>
-          <a:fillRef idx="0">
-            <a:schemeClr val="accent1"/>
-          </a:fillRef>
-          <a:effectRef idx="1">
-            <a:schemeClr val="accent1"/>
-          </a:effectRef>
-          <a:fontRef idx="minor">
-            <a:schemeClr val="tx1"/>
-          </a:fontRef>
-        </p:style>
-      </p:cxnSp>
-      <p:cxnSp>
-        <p:nvCxnSpPr>
-          <p:cNvPr id="31" name="Connector 30"/>
-          <p:cNvCxnSpPr/>
-          <p:nvPr/>
-        </p:nvCxnSpPr>
-        <p:spPr>
-          <a:xfrm flipV="1">
-            <a:off x="6519214.8" y="667969.2000000002"/>
-            <a:ext cx="54864.0" cy="89611.19999999972"/>
-          </a:xfrm>
-          <a:prstGeom prst="line">
-            <a:avLst/>
-          </a:prstGeom>
-          <a:ln w="25400">
-            <a:solidFill>
-              <a:srgbClr val="00C8FF"/>
-            </a:solidFill>
-          </a:ln>
-        </p:spPr>
-        <p:style>
-          <a:lnRef idx="2">
-            <a:schemeClr val="accent1"/>
-          </a:lnRef>
-          <a:fillRef idx="0">
-            <a:schemeClr val="accent1"/>
-          </a:fillRef>
-          <a:effectRef idx="1">
-            <a:schemeClr val="accent1"/>
-          </a:effectRef>
-          <a:fontRef idx="minor">
-            <a:schemeClr val="tx1"/>
-          </a:fontRef>
-        </p:style>
-      </p:cxnSp>
-      <p:cxnSp>
-        <p:nvCxnSpPr>
-          <p:cNvPr id="32" name="Connector 31"/>
-          <p:cNvCxnSpPr/>
-          <p:nvPr/>
-        </p:nvCxnSpPr>
-        <p:spPr>
-          <a:xfrm flipV="1">
-            <a:off x="6574078.8" y="576072.0"/>
-            <a:ext cx="55321.200000000186" cy="91897.20000000019"/>
-          </a:xfrm>
-          <a:prstGeom prst="line">
-            <a:avLst/>
-          </a:prstGeom>
-          <a:ln w="25400">
-            <a:solidFill>
-              <a:srgbClr val="00C8FF"/>
-            </a:solidFill>
-          </a:ln>
-        </p:spPr>
-        <p:style>
-          <a:lnRef idx="2">
-            <a:schemeClr val="accent1"/>
-          </a:lnRef>
-          <a:fillRef idx="0">
-            <a:schemeClr val="accent1"/>
-          </a:fillRef>
-          <a:effectRef idx="1">
-            <a:schemeClr val="accent1"/>
-          </a:effectRef>
-          <a:fontRef idx="minor">
-            <a:schemeClr val="tx1"/>
-          </a:fontRef>
-        </p:style>
-      </p:cxnSp>
-      <p:sp>
-        <p:nvSpPr>
-          <p:cNvPr id="33" name="Oval 32"/>
+      <p:sp>
+        <p:nvSpPr>
+          <p:cNvPr id="10" name="Freeform 9"/>
           <p:cNvSpPr/>
           <p:nvPr/>
         </p:nvSpPr>
         <p:spPr>
           <a:xfrm>
-            <a:off x="6134100" y="1333500"/>
-            <a:ext cx="76200" cy="76200"/>
+            <a:off x="5394960" y="1227582"/>
+            <a:ext cx="544068" cy="544068"/>
           </a:xfrm>
-          <a:prstGeom prst="ellipse">
+          <a:custGeom>
             <a:avLst/>
-          </a:prstGeom>
-          <a:solidFill>
-            <a:srgbClr val="FFFFFF"/>
-          </a:solidFill>
-          <a:ln>
+            <a:gdLst/>
+            <a:ahLst/>
+            <a:cxnLst/>
+            <a:rect l="l" t="t" r="r" b="b"/>
+            <a:pathLst>
+              <a:path w="544068" h="544068">
+                <a:moveTo>
+                  <a:pt x="0" y="544068"/>
+                </a:moveTo>
+                <a:lnTo>
+                  <a:pt x="5496" y="538572"/>
+                </a:lnTo>
+                <a:close/>
+                <a:lnTo>
+                  <a:pt x="10991" y="533077"/>
+                </a:lnTo>
+                <a:close/>
+                <a:lnTo>
+                  <a:pt x="16487" y="527581"/>
+                </a:lnTo>
+                <a:close/>
+                <a:lnTo>
+                  <a:pt x="21983" y="522085"/>
+                </a:lnTo>
+                <a:close/>
+                <a:lnTo>
+                  <a:pt x="27478" y="516590"/>
+                </a:lnTo>
+                <a:close/>
+                <a:lnTo>
+                  <a:pt x="32974" y="511094"/>
+                </a:lnTo>
+                <a:close/>
+                <a:lnTo>
+                  <a:pt x="38469" y="505599"/>
+                </a:lnTo>
+                <a:close/>
+                <a:lnTo>
+                  <a:pt x="43965" y="500103"/>
+                </a:lnTo>
+                <a:close/>
+                <a:lnTo>
+                  <a:pt x="49461" y="494607"/>
+                </a:lnTo>
+                <a:close/>
+                <a:lnTo>
+                  <a:pt x="54956" y="489112"/>
+                </a:lnTo>
+                <a:close/>
+                <a:lnTo>
+                  <a:pt x="60452" y="483616"/>
+                </a:lnTo>
+                <a:close/>
+                <a:lnTo>
+                  <a:pt x="65948" y="478120"/>
+                </a:lnTo>
+                <a:close/>
+                <a:lnTo>
+                  <a:pt x="71443" y="472625"/>
+                </a:lnTo>
+                <a:close/>
+                <a:lnTo>
+                  <a:pt x="76939" y="467129"/>
+                </a:lnTo>
+                <a:close/>
+                <a:lnTo>
+                  <a:pt x="82435" y="461633"/>
+                </a:lnTo>
+                <a:close/>
+                <a:lnTo>
+                  <a:pt x="87930" y="456138"/>
+                </a:lnTo>
+                <a:close/>
+                <a:lnTo>
+                  <a:pt x="93426" y="450642"/>
+                </a:lnTo>
+                <a:close/>
+                <a:lnTo>
+                  <a:pt x="98921" y="445147"/>
+                </a:lnTo>
+                <a:close/>
+                <a:lnTo>
+                  <a:pt x="104417" y="439651"/>
+                </a:lnTo>
+                <a:close/>
+                <a:lnTo>
+                  <a:pt x="109913" y="434155"/>
+                </a:lnTo>
+                <a:close/>
+                <a:lnTo>
+                  <a:pt x="115408" y="428660"/>
+                </a:lnTo>
+                <a:close/>
+                <a:lnTo>
+                  <a:pt x="120904" y="423164"/>
+                </a:lnTo>
+                <a:close/>
+                <a:lnTo>
+                  <a:pt x="126400" y="417668"/>
+                </a:lnTo>
+                <a:close/>
+                <a:lnTo>
+                  <a:pt x="131895" y="412173"/>
+                </a:lnTo>
+                <a:close/>
+                <a:lnTo>
+                  <a:pt x="137391" y="406677"/>
+                </a:lnTo>
+                <a:close/>
+                <a:lnTo>
+                  <a:pt x="142887" y="401181"/>
+                </a:lnTo>
+                <a:close/>
+                <a:lnTo>
+                  <a:pt x="148382" y="395686"/>
+                </a:lnTo>
+                <a:close/>
+                <a:lnTo>
+                  <a:pt x="153878" y="390190"/>
+                </a:lnTo>
+                <a:close/>
+                <a:lnTo>
+                  <a:pt x="159373" y="384695"/>
+                </a:lnTo>
+                <a:close/>
+                <a:lnTo>
+                  <a:pt x="164869" y="379199"/>
+                </a:lnTo>
+                <a:close/>
+                <a:lnTo>
+                  <a:pt x="170365" y="373703"/>
+                </a:lnTo>
+                <a:close/>
+                <a:lnTo>
+                  <a:pt x="175860" y="368208"/>
+                </a:lnTo>
+                <a:close/>
+                <a:lnTo>
+                  <a:pt x="181356" y="362712"/>
+                </a:lnTo>
+                <a:close/>
+                <a:lnTo>
+                  <a:pt x="186852" y="357216"/>
+                </a:lnTo>
+                <a:close/>
+                <a:lnTo>
+                  <a:pt x="192347" y="351721"/>
+                </a:lnTo>
+                <a:close/>
+                <a:lnTo>
+                  <a:pt x="197843" y="346225"/>
+                </a:lnTo>
+                <a:close/>
+                <a:lnTo>
+                  <a:pt x="203339" y="340729"/>
+                </a:lnTo>
+                <a:close/>
+                <a:lnTo>
+                  <a:pt x="208834" y="335234"/>
+                </a:lnTo>
+                <a:close/>
+                <a:lnTo>
+                  <a:pt x="214330" y="329738"/>
+                </a:lnTo>
+                <a:close/>
+                <a:lnTo>
+                  <a:pt x="219825" y="324243"/>
+                </a:lnTo>
+                <a:close/>
+                <a:lnTo>
+                  <a:pt x="225321" y="318747"/>
+                </a:lnTo>
+                <a:close/>
+                <a:lnTo>
+                  <a:pt x="230817" y="313251"/>
+                </a:lnTo>
+                <a:close/>
+                <a:lnTo>
+                  <a:pt x="236312" y="307756"/>
+                </a:lnTo>
+                <a:close/>
+                <a:lnTo>
+                  <a:pt x="241808" y="302260"/>
+                </a:lnTo>
+                <a:close/>
+                <a:lnTo>
+                  <a:pt x="247304" y="296764"/>
+                </a:lnTo>
+                <a:close/>
+                <a:lnTo>
+                  <a:pt x="252799" y="291269"/>
+                </a:lnTo>
+                <a:close/>
+                <a:lnTo>
+                  <a:pt x="258295" y="285773"/>
+                </a:lnTo>
+                <a:close/>
+                <a:lnTo>
+                  <a:pt x="263791" y="280277"/>
+                </a:lnTo>
+                <a:close/>
+                <a:lnTo>
+                  <a:pt x="269286" y="274782"/>
+                </a:lnTo>
+                <a:close/>
+                <a:lnTo>
+                  <a:pt x="274782" y="269286"/>
+                </a:lnTo>
+                <a:close/>
+                <a:lnTo>
+                  <a:pt x="280277" y="263791"/>
+                </a:lnTo>
+                <a:close/>
+                <a:lnTo>
+                  <a:pt x="285773" y="258295"/>
+                </a:lnTo>
+                <a:close/>
+                <a:lnTo>
+                  <a:pt x="291269" y="252799"/>
+                </a:lnTo>
+                <a:close/>
+                <a:lnTo>
+                  <a:pt x="296764" y="247304"/>
+                </a:lnTo>
+                <a:close/>
+                <a:lnTo>
+                  <a:pt x="302260" y="241808"/>
+                </a:lnTo>
+                <a:close/>
+                <a:lnTo>
+                  <a:pt x="307756" y="236312"/>
+                </a:lnTo>
+                <a:close/>
+                <a:lnTo>
+                  <a:pt x="313251" y="230817"/>
+                </a:lnTo>
+                <a:close/>
+                <a:lnTo>
+                  <a:pt x="318747" y="225321"/>
+                </a:lnTo>
+                <a:close/>
+                <a:lnTo>
+                  <a:pt x="324243" y="219825"/>
+                </a:lnTo>
+                <a:close/>
+                <a:lnTo>
+                  <a:pt x="329738" y="214330"/>
+                </a:lnTo>
+                <a:close/>
+                <a:lnTo>
+                  <a:pt x="335234" y="208834"/>
+                </a:lnTo>
+                <a:close/>
+                <a:lnTo>
+                  <a:pt x="340729" y="203339"/>
+                </a:lnTo>
+                <a:close/>
+                <a:lnTo>
+                  <a:pt x="346225" y="197843"/>
+                </a:lnTo>
+                <a:close/>
+                <a:lnTo>
+                  <a:pt x="351721" y="192347"/>
+                </a:lnTo>
+                <a:close/>
+                <a:lnTo>
+                  <a:pt x="357216" y="186852"/>
+                </a:lnTo>
+                <a:close/>
+                <a:lnTo>
+                  <a:pt x="362712" y="181356"/>
+                </a:lnTo>
+                <a:close/>
+                <a:lnTo>
+                  <a:pt x="368208" y="175860"/>
+                </a:lnTo>
+                <a:close/>
+                <a:lnTo>
+                  <a:pt x="373703" y="170365"/>
+                </a:lnTo>
+                <a:close/>
+                <a:lnTo>
+                  <a:pt x="379199" y="164869"/>
+                </a:lnTo>
+                <a:close/>
+                <a:lnTo>
+                  <a:pt x="384695" y="159373"/>
+                </a:lnTo>
+                <a:close/>
+                <a:lnTo>
+                  <a:pt x="390190" y="153878"/>
+                </a:lnTo>
+                <a:close/>
+                <a:lnTo>
+                  <a:pt x="395686" y="148382"/>
+                </a:lnTo>
+                <a:close/>
+                <a:lnTo>
+                  <a:pt x="401181" y="142887"/>
+                </a:lnTo>
+                <a:close/>
+                <a:lnTo>
+                  <a:pt x="406677" y="137391"/>
+                </a:lnTo>
+                <a:close/>
+                <a:lnTo>
+                  <a:pt x="412173" y="131895"/>
+                </a:lnTo>
+                <a:close/>
+                <a:lnTo>
+                  <a:pt x="417668" y="126400"/>
+                </a:lnTo>
+                <a:close/>
+                <a:lnTo>
+                  <a:pt x="423164" y="120904"/>
+                </a:lnTo>
+                <a:close/>
+                <a:lnTo>
+                  <a:pt x="428660" y="115408"/>
+                </a:lnTo>
+                <a:close/>
+                <a:lnTo>
+                  <a:pt x="434155" y="109913"/>
+                </a:lnTo>
+                <a:close/>
+                <a:lnTo>
+                  <a:pt x="439651" y="104417"/>
+                </a:lnTo>
+                <a:close/>
+                <a:lnTo>
+                  <a:pt x="445147" y="98921"/>
+                </a:lnTo>
+                <a:close/>
+                <a:lnTo>
+                  <a:pt x="450642" y="93426"/>
+                </a:lnTo>
+                <a:close/>
+                <a:lnTo>
+                  <a:pt x="456138" y="87930"/>
+                </a:lnTo>
+                <a:close/>
+                <a:lnTo>
+                  <a:pt x="461633" y="82435"/>
+                </a:lnTo>
+                <a:close/>
+                <a:lnTo>
+                  <a:pt x="467129" y="76939"/>
+                </a:lnTo>
+                <a:close/>
+                <a:lnTo>
+                  <a:pt x="472625" y="71443"/>
+                </a:lnTo>
+                <a:close/>
+                <a:lnTo>
+                  <a:pt x="478120" y="65948"/>
+                </a:lnTo>
+                <a:close/>
+                <a:lnTo>
+                  <a:pt x="483616" y="60452"/>
+                </a:lnTo>
+                <a:close/>
+                <a:lnTo>
+                  <a:pt x="489112" y="54956"/>
+                </a:lnTo>
+                <a:close/>
+                <a:lnTo>
+                  <a:pt x="494607" y="49461"/>
+                </a:lnTo>
+                <a:close/>
+                <a:lnTo>
+                  <a:pt x="500103" y="43965"/>
+                </a:lnTo>
+                <a:close/>
+                <a:lnTo>
+                  <a:pt x="505599" y="38469"/>
+                </a:lnTo>
+                <a:close/>
+                <a:lnTo>
+                  <a:pt x="511094" y="32974"/>
+                </a:lnTo>
+                <a:close/>
+                <a:lnTo>
+                  <a:pt x="516590" y="27478"/>
+                </a:lnTo>
+                <a:close/>
+                <a:lnTo>
+                  <a:pt x="522085" y="21983"/>
+                </a:lnTo>
+                <a:close/>
+                <a:lnTo>
+                  <a:pt x="527581" y="16487"/>
+                </a:lnTo>
+                <a:close/>
+                <a:lnTo>
+                  <a:pt x="533077" y="10991"/>
+                </a:lnTo>
+                <a:close/>
+                <a:lnTo>
+                  <a:pt x="538572" y="5496"/>
+                </a:lnTo>
+                <a:close/>
+                <a:lnTo>
+                  <a:pt x="544068" y="0"/>
+                </a:lnTo>
+                <a:close/>
+              </a:path>
+            </a:pathLst>
+          </a:custGeom>
+          <a:ln w="19050">
             <a:solidFill>
-              <a:srgbClr val="FFFFFF"/>
+              <a:srgbClr val="B4B4B4"/>
             </a:solidFill>
           </a:ln>
         </p:spPr>
@@ -4223,6 +5048,635 @@
           <a:lstStyle/>
           <a:p>
             <a:pPr algn="ctr"/>
+          </a:p>
+        </p:txBody>
+      </p:sp>
+      <p:sp>
+        <p:nvSpPr>
+          <p:cNvPr id="11" name="Freeform 10"/>
+          <p:cNvSpPr/>
+          <p:nvPr/>
+        </p:nvSpPr>
+        <p:spPr>
+          <a:xfrm>
+            <a:off x="5948172" y="1040130"/>
+            <a:ext cx="178308" cy="178308"/>
+          </a:xfrm>
+          <a:custGeom>
+            <a:avLst/>
+            <a:gdLst/>
+            <a:ahLst/>
+            <a:cxnLst/>
+            <a:rect l="l" t="t" r="r" b="b"/>
+            <a:pathLst>
+              <a:path w="178308" h="178308">
+                <a:moveTo>
+                  <a:pt x="178308" y="0"/>
+                </a:moveTo>
+                <a:lnTo>
+                  <a:pt x="176507" y="1801"/>
+                </a:lnTo>
+                <a:close/>
+                <a:lnTo>
+                  <a:pt x="174706" y="3602"/>
+                </a:lnTo>
+                <a:close/>
+                <a:lnTo>
+                  <a:pt x="172905" y="5403"/>
+                </a:lnTo>
+                <a:close/>
+                <a:lnTo>
+                  <a:pt x="171104" y="7204"/>
+                </a:lnTo>
+                <a:close/>
+                <a:lnTo>
+                  <a:pt x="169303" y="9005"/>
+                </a:lnTo>
+                <a:close/>
+                <a:lnTo>
+                  <a:pt x="167501" y="10807"/>
+                </a:lnTo>
+                <a:close/>
+                <a:lnTo>
+                  <a:pt x="165700" y="12608"/>
+                </a:lnTo>
+                <a:close/>
+                <a:lnTo>
+                  <a:pt x="163899" y="14409"/>
+                </a:lnTo>
+                <a:close/>
+                <a:lnTo>
+                  <a:pt x="162098" y="16210"/>
+                </a:lnTo>
+                <a:close/>
+                <a:lnTo>
+                  <a:pt x="160297" y="18011"/>
+                </a:lnTo>
+                <a:close/>
+                <a:lnTo>
+                  <a:pt x="158496" y="19812"/>
+                </a:lnTo>
+                <a:close/>
+                <a:lnTo>
+                  <a:pt x="156695" y="21613"/>
+                </a:lnTo>
+                <a:close/>
+                <a:lnTo>
+                  <a:pt x="154894" y="23414"/>
+                </a:lnTo>
+                <a:close/>
+                <a:lnTo>
+                  <a:pt x="153093" y="25215"/>
+                </a:lnTo>
+                <a:close/>
+                <a:lnTo>
+                  <a:pt x="151292" y="27016"/>
+                </a:lnTo>
+                <a:close/>
+                <a:lnTo>
+                  <a:pt x="149491" y="28817"/>
+                </a:lnTo>
+                <a:close/>
+                <a:lnTo>
+                  <a:pt x="147689" y="30619"/>
+                </a:lnTo>
+                <a:close/>
+                <a:lnTo>
+                  <a:pt x="145888" y="32420"/>
+                </a:lnTo>
+                <a:close/>
+                <a:lnTo>
+                  <a:pt x="144087" y="34221"/>
+                </a:lnTo>
+                <a:close/>
+                <a:lnTo>
+                  <a:pt x="142286" y="36022"/>
+                </a:lnTo>
+                <a:close/>
+                <a:lnTo>
+                  <a:pt x="140485" y="37823"/>
+                </a:lnTo>
+                <a:close/>
+                <a:lnTo>
+                  <a:pt x="138684" y="39624"/>
+                </a:lnTo>
+                <a:close/>
+                <a:lnTo>
+                  <a:pt x="136883" y="41425"/>
+                </a:lnTo>
+                <a:close/>
+                <a:lnTo>
+                  <a:pt x="135082" y="43226"/>
+                </a:lnTo>
+                <a:close/>
+                <a:lnTo>
+                  <a:pt x="133281" y="45027"/>
+                </a:lnTo>
+                <a:close/>
+                <a:lnTo>
+                  <a:pt x="131480" y="46828"/>
+                </a:lnTo>
+                <a:close/>
+                <a:lnTo>
+                  <a:pt x="129679" y="48629"/>
+                </a:lnTo>
+                <a:close/>
+                <a:lnTo>
+                  <a:pt x="127877" y="50431"/>
+                </a:lnTo>
+                <a:close/>
+                <a:lnTo>
+                  <a:pt x="126076" y="52232"/>
+                </a:lnTo>
+                <a:close/>
+                <a:lnTo>
+                  <a:pt x="124275" y="54033"/>
+                </a:lnTo>
+                <a:close/>
+                <a:lnTo>
+                  <a:pt x="122474" y="55834"/>
+                </a:lnTo>
+                <a:close/>
+                <a:lnTo>
+                  <a:pt x="120673" y="57635"/>
+                </a:lnTo>
+                <a:close/>
+                <a:lnTo>
+                  <a:pt x="118872" y="59436"/>
+                </a:lnTo>
+                <a:close/>
+                <a:lnTo>
+                  <a:pt x="117071" y="61237"/>
+                </a:lnTo>
+                <a:close/>
+                <a:lnTo>
+                  <a:pt x="115270" y="63038"/>
+                </a:lnTo>
+                <a:close/>
+                <a:lnTo>
+                  <a:pt x="113469" y="64839"/>
+                </a:lnTo>
+                <a:close/>
+                <a:lnTo>
+                  <a:pt x="111668" y="66640"/>
+                </a:lnTo>
+                <a:close/>
+                <a:lnTo>
+                  <a:pt x="109867" y="68441"/>
+                </a:lnTo>
+                <a:close/>
+                <a:lnTo>
+                  <a:pt x="108065" y="70243"/>
+                </a:lnTo>
+                <a:close/>
+                <a:lnTo>
+                  <a:pt x="106264" y="72044"/>
+                </a:lnTo>
+                <a:close/>
+                <a:lnTo>
+                  <a:pt x="104463" y="73845"/>
+                </a:lnTo>
+                <a:close/>
+                <a:lnTo>
+                  <a:pt x="102662" y="75646"/>
+                </a:lnTo>
+                <a:close/>
+                <a:lnTo>
+                  <a:pt x="100861" y="77447"/>
+                </a:lnTo>
+                <a:close/>
+                <a:lnTo>
+                  <a:pt x="99060" y="79248"/>
+                </a:lnTo>
+                <a:close/>
+                <a:lnTo>
+                  <a:pt x="97259" y="81049"/>
+                </a:lnTo>
+                <a:close/>
+                <a:lnTo>
+                  <a:pt x="95458" y="82850"/>
+                </a:lnTo>
+                <a:close/>
+                <a:lnTo>
+                  <a:pt x="93657" y="84651"/>
+                </a:lnTo>
+                <a:close/>
+                <a:lnTo>
+                  <a:pt x="91856" y="86452"/>
+                </a:lnTo>
+                <a:close/>
+                <a:lnTo>
+                  <a:pt x="90055" y="88253"/>
+                </a:lnTo>
+                <a:close/>
+                <a:lnTo>
+                  <a:pt x="88253" y="90055"/>
+                </a:lnTo>
+                <a:close/>
+                <a:lnTo>
+                  <a:pt x="86452" y="91856"/>
+                </a:lnTo>
+                <a:close/>
+                <a:lnTo>
+                  <a:pt x="84651" y="93657"/>
+                </a:lnTo>
+                <a:close/>
+                <a:lnTo>
+                  <a:pt x="82850" y="95458"/>
+                </a:lnTo>
+                <a:close/>
+                <a:lnTo>
+                  <a:pt x="81049" y="97259"/>
+                </a:lnTo>
+                <a:close/>
+                <a:lnTo>
+                  <a:pt x="79248" y="99060"/>
+                </a:lnTo>
+                <a:close/>
+                <a:lnTo>
+                  <a:pt x="77447" y="100861"/>
+                </a:lnTo>
+                <a:close/>
+                <a:lnTo>
+                  <a:pt x="75646" y="102662"/>
+                </a:lnTo>
+                <a:close/>
+                <a:lnTo>
+                  <a:pt x="73845" y="104463"/>
+                </a:lnTo>
+                <a:close/>
+                <a:lnTo>
+                  <a:pt x="72044" y="106264"/>
+                </a:lnTo>
+                <a:close/>
+                <a:lnTo>
+                  <a:pt x="70243" y="108065"/>
+                </a:lnTo>
+                <a:close/>
+                <a:lnTo>
+                  <a:pt x="68441" y="109867"/>
+                </a:lnTo>
+                <a:close/>
+                <a:lnTo>
+                  <a:pt x="66640" y="111668"/>
+                </a:lnTo>
+                <a:close/>
+                <a:lnTo>
+                  <a:pt x="64839" y="113469"/>
+                </a:lnTo>
+                <a:close/>
+                <a:lnTo>
+                  <a:pt x="63038" y="115270"/>
+                </a:lnTo>
+                <a:close/>
+                <a:lnTo>
+                  <a:pt x="61237" y="117071"/>
+                </a:lnTo>
+                <a:close/>
+                <a:lnTo>
+                  <a:pt x="59436" y="118872"/>
+                </a:lnTo>
+                <a:close/>
+                <a:lnTo>
+                  <a:pt x="57635" y="120673"/>
+                </a:lnTo>
+                <a:close/>
+                <a:lnTo>
+                  <a:pt x="55834" y="122474"/>
+                </a:lnTo>
+                <a:close/>
+                <a:lnTo>
+                  <a:pt x="54033" y="124275"/>
+                </a:lnTo>
+                <a:close/>
+                <a:lnTo>
+                  <a:pt x="52232" y="126076"/>
+                </a:lnTo>
+                <a:close/>
+                <a:lnTo>
+                  <a:pt x="50431" y="127877"/>
+                </a:lnTo>
+                <a:close/>
+                <a:lnTo>
+                  <a:pt x="48629" y="129679"/>
+                </a:lnTo>
+                <a:close/>
+                <a:lnTo>
+                  <a:pt x="46828" y="131480"/>
+                </a:lnTo>
+                <a:close/>
+                <a:lnTo>
+                  <a:pt x="45027" y="133281"/>
+                </a:lnTo>
+                <a:close/>
+                <a:lnTo>
+                  <a:pt x="43226" y="135082"/>
+                </a:lnTo>
+                <a:close/>
+                <a:lnTo>
+                  <a:pt x="41425" y="136883"/>
+                </a:lnTo>
+                <a:close/>
+                <a:lnTo>
+                  <a:pt x="39624" y="138684"/>
+                </a:lnTo>
+                <a:close/>
+                <a:lnTo>
+                  <a:pt x="37823" y="140485"/>
+                </a:lnTo>
+                <a:close/>
+                <a:lnTo>
+                  <a:pt x="36022" y="142286"/>
+                </a:lnTo>
+                <a:close/>
+                <a:lnTo>
+                  <a:pt x="34221" y="144087"/>
+                </a:lnTo>
+                <a:close/>
+                <a:lnTo>
+                  <a:pt x="32420" y="145888"/>
+                </a:lnTo>
+                <a:close/>
+                <a:lnTo>
+                  <a:pt x="30619" y="147689"/>
+                </a:lnTo>
+                <a:close/>
+                <a:lnTo>
+                  <a:pt x="28817" y="149491"/>
+                </a:lnTo>
+                <a:close/>
+                <a:lnTo>
+                  <a:pt x="27016" y="151292"/>
+                </a:lnTo>
+                <a:close/>
+                <a:lnTo>
+                  <a:pt x="25215" y="153093"/>
+                </a:lnTo>
+                <a:close/>
+                <a:lnTo>
+                  <a:pt x="23414" y="154894"/>
+                </a:lnTo>
+                <a:close/>
+                <a:lnTo>
+                  <a:pt x="21613" y="156695"/>
+                </a:lnTo>
+                <a:close/>
+                <a:lnTo>
+                  <a:pt x="19812" y="158496"/>
+                </a:lnTo>
+                <a:close/>
+                <a:lnTo>
+                  <a:pt x="18011" y="160297"/>
+                </a:lnTo>
+                <a:close/>
+                <a:lnTo>
+                  <a:pt x="16210" y="162098"/>
+                </a:lnTo>
+                <a:close/>
+                <a:lnTo>
+                  <a:pt x="14409" y="163899"/>
+                </a:lnTo>
+                <a:close/>
+                <a:lnTo>
+                  <a:pt x="12608" y="165700"/>
+                </a:lnTo>
+                <a:close/>
+                <a:lnTo>
+                  <a:pt x="10807" y="167501"/>
+                </a:lnTo>
+                <a:close/>
+                <a:lnTo>
+                  <a:pt x="9005" y="169303"/>
+                </a:lnTo>
+                <a:close/>
+                <a:lnTo>
+                  <a:pt x="7204" y="171104"/>
+                </a:lnTo>
+                <a:close/>
+                <a:lnTo>
+                  <a:pt x="5403" y="172905"/>
+                </a:lnTo>
+                <a:close/>
+                <a:lnTo>
+                  <a:pt x="3602" y="174706"/>
+                </a:lnTo>
+                <a:close/>
+                <a:lnTo>
+                  <a:pt x="1801" y="176507"/>
+                </a:lnTo>
+                <a:close/>
+                <a:lnTo>
+                  <a:pt x="0" y="178308"/>
+                </a:lnTo>
+                <a:close/>
+              </a:path>
+            </a:pathLst>
+          </a:custGeom>
+          <a:ln w="19050">
+            <a:solidFill>
+              <a:srgbClr val="B4B4B4"/>
+            </a:solidFill>
+          </a:ln>
+        </p:spPr>
+        <p:style>
+          <a:lnRef idx="1">
+            <a:schemeClr val="accent1"/>
+          </a:lnRef>
+          <a:fillRef idx="3">
+            <a:schemeClr val="accent1"/>
+          </a:fillRef>
+          <a:effectRef idx="2">
+            <a:schemeClr val="accent1"/>
+          </a:effectRef>
+          <a:fontRef idx="minor">
+            <a:schemeClr val="lt1"/>
+          </a:fontRef>
+        </p:style>
+        <p:txBody>
+          <a:bodyPr rtlCol="0" anchor="ctr"/>
+          <a:lstStyle/>
+          <a:p>
+            <a:pPr algn="ctr"/>
+          </a:p>
+        </p:txBody>
+      </p:sp>
+      <p:sp>
+        <p:nvSpPr>
+          <p:cNvPr id="12" name="TextBox 11"/>
+          <p:cNvSpPr txBox="1"/>
+          <p:nvPr/>
+        </p:nvSpPr>
+        <p:spPr>
+          <a:xfrm>
+            <a:off x="4089400" y="516890"/>
+            <a:ext cx="1524000" cy="508000"/>
+          </a:xfrm>
+          <a:prstGeom prst="rect">
+            <a:avLst/>
+          </a:prstGeom>
+          <a:noFill/>
+        </p:spPr>
+        <p:txBody>
+          <a:bodyPr wrap="none">
+            <a:spAutoFit/>
+          </a:bodyPr>
+          <a:lstStyle/>
+          <a:p>
+            <a:pPr>
+              <a:defRPr sz="1400" b="1">
+                <a:solidFill>
+                  <a:srgbClr val="FFFFFF"/>
+                </a:solidFill>
+                <a:latin typeface="Inter"/>
+              </a:defRPr>
+            </a:pPr>
+            <a:r>
+              <a:t>f(a)</a:t>
+            </a:r>
+          </a:p>
+        </p:txBody>
+      </p:sp>
+      <p:sp>
+        <p:nvSpPr>
+          <p:cNvPr id="13" name="TextBox 12"/>
+          <p:cNvSpPr txBox="1"/>
+          <p:nvPr/>
+        </p:nvSpPr>
+        <p:spPr>
+          <a:xfrm>
+            <a:off x="5689600" y="2391410"/>
+            <a:ext cx="1524000" cy="508000"/>
+          </a:xfrm>
+          <a:prstGeom prst="rect">
+            <a:avLst/>
+          </a:prstGeom>
+          <a:noFill/>
+        </p:spPr>
+        <p:txBody>
+          <a:bodyPr wrap="none">
+            <a:spAutoFit/>
+          </a:bodyPr>
+          <a:lstStyle/>
+          <a:p>
+            <a:pPr>
+              <a:defRPr sz="1400" b="1">
+                <a:solidFill>
+                  <a:srgbClr val="FFFFFF"/>
+                </a:solidFill>
+                <a:latin typeface="Inter"/>
+              </a:defRPr>
+            </a:pPr>
+            <a:r>
+              <a:t>a</a:t>
+            </a:r>
+          </a:p>
+        </p:txBody>
+      </p:sp>
+      <p:sp>
+        <p:nvSpPr>
+          <p:cNvPr id="14" name="TextBox 13"/>
+          <p:cNvSpPr txBox="1"/>
+          <p:nvPr/>
+        </p:nvSpPr>
+        <p:spPr>
+          <a:xfrm>
+            <a:off x="4249420" y="2345690"/>
+            <a:ext cx="1524000" cy="508000"/>
+          </a:xfrm>
+          <a:prstGeom prst="rect">
+            <a:avLst/>
+          </a:prstGeom>
+          <a:noFill/>
+        </p:spPr>
+        <p:txBody>
+          <a:bodyPr wrap="none">
+            <a:spAutoFit/>
+          </a:bodyPr>
+          <a:lstStyle/>
+          <a:p>
+            <a:pPr>
+              <a:defRPr sz="1400" b="1">
+                <a:solidFill>
+                  <a:srgbClr val="FFFFFF"/>
+                </a:solidFill>
+                <a:latin typeface="Inter"/>
+              </a:defRPr>
+            </a:pPr>
+            <a:r>
+              <a:t>O</a:t>
+            </a:r>
+          </a:p>
+        </p:txBody>
+      </p:sp>
+      <p:sp>
+        <p:nvSpPr>
+          <p:cNvPr id="15" name="TextBox 14"/>
+          <p:cNvSpPr txBox="1"/>
+          <p:nvPr/>
+        </p:nvSpPr>
+        <p:spPr>
+          <a:xfrm>
+            <a:off x="6101080" y="2345690"/>
+            <a:ext cx="1524000" cy="508000"/>
+          </a:xfrm>
+          <a:prstGeom prst="rect">
+            <a:avLst/>
+          </a:prstGeom>
+          <a:noFill/>
+        </p:spPr>
+        <p:txBody>
+          <a:bodyPr wrap="none">
+            <a:spAutoFit/>
+          </a:bodyPr>
+          <a:lstStyle/>
+          <a:p>
+            <a:pPr>
+              <a:defRPr sz="1400" b="1">
+                <a:solidFill>
+                  <a:srgbClr val="FFFFFF"/>
+                </a:solidFill>
+                <a:latin typeface="Inter"/>
+              </a:defRPr>
+            </a:pPr>
+            <a:r>
+              <a:t>x</a:t>
+            </a:r>
+          </a:p>
+        </p:txBody>
+      </p:sp>
+      <p:sp>
+        <p:nvSpPr>
+          <p:cNvPr id="16" name="TextBox 15"/>
+          <p:cNvSpPr txBox="1"/>
+          <p:nvPr/>
+        </p:nvSpPr>
+        <p:spPr>
+          <a:xfrm>
+            <a:off x="4226560" y="242569"/>
+            <a:ext cx="1524000" cy="508000"/>
+          </a:xfrm>
+          <a:prstGeom prst="rect">
+            <a:avLst/>
+          </a:prstGeom>
+          <a:noFill/>
+        </p:spPr>
+        <p:txBody>
+          <a:bodyPr wrap="none">
+            <a:spAutoFit/>
+          </a:bodyPr>
+          <a:lstStyle/>
+          <a:p>
+            <a:pPr>
+              <a:defRPr sz="1400" b="1">
+                <a:solidFill>
+                  <a:srgbClr val="FFFFFF"/>
+                </a:solidFill>
+                <a:latin typeface="Inter"/>
+              </a:defRPr>
+            </a:pPr>
+            <a:r>
+              <a:t>y</a:t>
+            </a:r>
           </a:p>
         </p:txBody>
       </p:sp>

--- a/output/3.pptx
+++ b/output/3.pptx
@@ -3084,7 +3084,7 @@
     <p:bg>
       <p:bgPr>
         <a:solidFill>
-          <a:srgbClr val="1E1E23"/>
+          <a:srgbClr val="000000"/>
         </a:solidFill>
         <a:effectLst/>
       </p:bgPr>
@@ -3104,8 +3104,8 @@
         </p:nvCxnSpPr>
         <p:spPr>
           <a:xfrm>
-            <a:off x="4343400.0" y="2571750.0"/>
-            <a:ext cx="2057400.0" cy="0.0"/>
+            <a:off x="4114800.0" y="2571750.0"/>
+            <a:ext cx="3657600.0" cy="0.0"/>
           </a:xfrm>
           <a:prstGeom prst="line">
             <a:avLst/>
@@ -3139,8 +3139,8 @@
         </p:nvCxnSpPr>
         <p:spPr>
           <a:xfrm flipV="1">
-            <a:off x="4572000.0" y="514350.0"/>
-            <a:ext cx="0.0" cy="2286000.0"/>
+            <a:off x="4572000.0" y="-1314450.0"/>
+            <a:ext cx="0.0" cy="4343400.0"/>
           </a:xfrm>
           <a:prstGeom prst="line">
             <a:avLst/>
@@ -3174,8 +3174,8 @@
         </p:nvSpPr>
         <p:spPr>
           <a:xfrm>
-            <a:off x="4937760" y="628650"/>
-            <a:ext cx="1600200" cy="1668780"/>
+            <a:off x="4937760" y="-4857750"/>
+            <a:ext cx="2011680" cy="7110142"/>
           </a:xfrm>
           <a:custGeom>
             <a:avLst/>
@@ -3184,1204 +3184,1204 @@
             <a:cxnLst/>
             <a:rect l="l" t="t" r="r" b="b"/>
             <a:pathLst>
-              <a:path w="1600200" h="1668780">
+              <a:path w="2011680" h="7110142">
                 <a:moveTo>
-                  <a:pt x="0" y="1668780"/>
+                  <a:pt x="0" y="7109460"/>
                 </a:moveTo>
                 <a:lnTo>
-                  <a:pt x="5352" y="1663428"/>
-                </a:lnTo>
-                <a:close/>
-                <a:lnTo>
-                  <a:pt x="10704" y="1658076"/>
-                </a:lnTo>
-                <a:close/>
-                <a:lnTo>
-                  <a:pt x="16056" y="1652724"/>
-                </a:lnTo>
-                <a:close/>
-                <a:lnTo>
-                  <a:pt x="21407" y="1647373"/>
-                </a:lnTo>
-                <a:close/>
-                <a:lnTo>
-                  <a:pt x="26759" y="1642021"/>
-                </a:lnTo>
-                <a:close/>
-                <a:lnTo>
-                  <a:pt x="32111" y="1636669"/>
-                </a:lnTo>
-                <a:close/>
-                <a:lnTo>
-                  <a:pt x="37463" y="1631317"/>
-                </a:lnTo>
-                <a:close/>
-                <a:lnTo>
-                  <a:pt x="42815" y="1625965"/>
-                </a:lnTo>
-                <a:close/>
-                <a:lnTo>
-                  <a:pt x="48167" y="1620613"/>
-                </a:lnTo>
-                <a:close/>
-                <a:lnTo>
-                  <a:pt x="53518" y="1615262"/>
-                </a:lnTo>
-                <a:close/>
-                <a:lnTo>
-                  <a:pt x="58870" y="1609910"/>
-                </a:lnTo>
-                <a:close/>
-                <a:lnTo>
-                  <a:pt x="64222" y="1604558"/>
-                </a:lnTo>
-                <a:close/>
-                <a:lnTo>
-                  <a:pt x="69574" y="1599206"/>
-                </a:lnTo>
-                <a:close/>
-                <a:lnTo>
-                  <a:pt x="74926" y="1593854"/>
-                </a:lnTo>
-                <a:close/>
-                <a:lnTo>
-                  <a:pt x="80278" y="1588502"/>
-                </a:lnTo>
-                <a:close/>
-                <a:lnTo>
-                  <a:pt x="85629" y="1583151"/>
-                </a:lnTo>
-                <a:close/>
-                <a:lnTo>
-                  <a:pt x="90981" y="1577799"/>
-                </a:lnTo>
-                <a:close/>
-                <a:lnTo>
-                  <a:pt x="96333" y="1572447"/>
-                </a:lnTo>
-                <a:close/>
-                <a:lnTo>
-                  <a:pt x="101685" y="1567095"/>
-                </a:lnTo>
-                <a:close/>
-                <a:lnTo>
-                  <a:pt x="107037" y="1561743"/>
-                </a:lnTo>
-                <a:close/>
-                <a:lnTo>
-                  <a:pt x="112389" y="1556391"/>
-                </a:lnTo>
-                <a:close/>
-                <a:lnTo>
-                  <a:pt x="117740" y="1551040"/>
-                </a:lnTo>
-                <a:close/>
-                <a:lnTo>
-                  <a:pt x="123092" y="1545688"/>
-                </a:lnTo>
-                <a:close/>
-                <a:lnTo>
-                  <a:pt x="128444" y="1540336"/>
-                </a:lnTo>
-                <a:close/>
-                <a:lnTo>
-                  <a:pt x="133796" y="1534984"/>
-                </a:lnTo>
-                <a:close/>
-                <a:lnTo>
-                  <a:pt x="139148" y="1529632"/>
-                </a:lnTo>
-                <a:close/>
-                <a:lnTo>
-                  <a:pt x="144500" y="1524280"/>
-                </a:lnTo>
-                <a:close/>
-                <a:lnTo>
-                  <a:pt x="149852" y="1518928"/>
-                </a:lnTo>
-                <a:close/>
-                <a:lnTo>
-                  <a:pt x="155203" y="1513577"/>
-                </a:lnTo>
-                <a:close/>
-                <a:lnTo>
-                  <a:pt x="160555" y="1508225"/>
-                </a:lnTo>
-                <a:close/>
-                <a:lnTo>
-                  <a:pt x="165907" y="1502872"/>
-                </a:lnTo>
-                <a:close/>
-                <a:lnTo>
-                  <a:pt x="171259" y="1497525"/>
-                </a:lnTo>
-                <a:close/>
-                <a:lnTo>
-                  <a:pt x="176611" y="1492151"/>
-                </a:lnTo>
-                <a:close/>
-                <a:lnTo>
-                  <a:pt x="181963" y="1486872"/>
-                </a:lnTo>
-                <a:close/>
-                <a:lnTo>
-                  <a:pt x="187314" y="1480589"/>
-                </a:lnTo>
-                <a:close/>
-                <a:lnTo>
-                  <a:pt x="192666" y="1473622"/>
-                </a:lnTo>
-                <a:close/>
-                <a:lnTo>
-                  <a:pt x="198018" y="1466777"/>
-                </a:lnTo>
-                <a:close/>
-                <a:lnTo>
-                  <a:pt x="203370" y="1460440"/>
-                </a:lnTo>
-                <a:close/>
-                <a:lnTo>
-                  <a:pt x="208722" y="1453712"/>
-                </a:lnTo>
-                <a:close/>
-                <a:lnTo>
-                  <a:pt x="214074" y="1446690"/>
-                </a:lnTo>
-                <a:close/>
-                <a:lnTo>
-                  <a:pt x="219425" y="1440216"/>
-                </a:lnTo>
-                <a:close/>
-                <a:lnTo>
-                  <a:pt x="224777" y="1433748"/>
-                </a:lnTo>
-                <a:close/>
-                <a:lnTo>
-                  <a:pt x="230129" y="1426728"/>
-                </a:lnTo>
-                <a:close/>
-                <a:lnTo>
-                  <a:pt x="235481" y="1419993"/>
-                </a:lnTo>
-                <a:close/>
-                <a:lnTo>
-                  <a:pt x="240833" y="1413655"/>
-                </a:lnTo>
-                <a:close/>
-                <a:lnTo>
-                  <a:pt x="246185" y="1406822"/>
-                </a:lnTo>
-                <a:close/>
-                <a:lnTo>
-                  <a:pt x="251536" y="1399851"/>
-                </a:lnTo>
-                <a:close/>
-                <a:lnTo>
-                  <a:pt x="256888" y="1393453"/>
-                </a:lnTo>
-                <a:close/>
-                <a:lnTo>
-                  <a:pt x="262240" y="1386890"/>
-                </a:lnTo>
-                <a:close/>
-                <a:lnTo>
-                  <a:pt x="267592" y="1379846"/>
-                </a:lnTo>
-                <a:close/>
-                <a:lnTo>
-                  <a:pt x="272944" y="1373220"/>
-                </a:lnTo>
-                <a:close/>
-                <a:lnTo>
-                  <a:pt x="278296" y="1366853"/>
-                </a:lnTo>
-                <a:close/>
-                <a:lnTo>
-                  <a:pt x="283647" y="1359927"/>
-                </a:lnTo>
-                <a:close/>
-                <a:lnTo>
-                  <a:pt x="288999" y="1353036"/>
-                </a:lnTo>
-                <a:close/>
-                <a:lnTo>
-                  <a:pt x="294351" y="1346685"/>
-                </a:lnTo>
-                <a:close/>
-                <a:lnTo>
-                  <a:pt x="299703" y="1340015"/>
-                </a:lnTo>
-                <a:close/>
-                <a:lnTo>
-                  <a:pt x="305055" y="1332977"/>
-                </a:lnTo>
-                <a:close/>
-                <a:lnTo>
-                  <a:pt x="310407" y="1326455"/>
-                </a:lnTo>
-                <a:close/>
-                <a:lnTo>
-                  <a:pt x="315759" y="1320029"/>
-                </a:lnTo>
-                <a:close/>
-                <a:lnTo>
-                  <a:pt x="321110" y="1313033"/>
-                </a:lnTo>
-                <a:close/>
-                <a:lnTo>
-                  <a:pt x="326462" y="1306242"/>
-                </a:lnTo>
-                <a:close/>
-                <a:lnTo>
-                  <a:pt x="331814" y="1299908"/>
-                </a:lnTo>
-                <a:close/>
-                <a:lnTo>
-                  <a:pt x="337166" y="1293128"/>
-                </a:lnTo>
-                <a:close/>
-                <a:lnTo>
-                  <a:pt x="342518" y="1286127"/>
-                </a:lnTo>
-                <a:close/>
-                <a:lnTo>
-                  <a:pt x="347870" y="1279693"/>
-                </a:lnTo>
-                <a:close/>
-                <a:lnTo>
-                  <a:pt x="353221" y="1273181"/>
-                </a:lnTo>
-                <a:close/>
-                <a:lnTo>
-                  <a:pt x="358573" y="1266146"/>
-                </a:lnTo>
-                <a:close/>
-                <a:lnTo>
-                  <a:pt x="363925" y="1259463"/>
-                </a:lnTo>
-                <a:close/>
-                <a:lnTo>
-                  <a:pt x="369277" y="1253116"/>
-                </a:lnTo>
-                <a:close/>
-                <a:lnTo>
-                  <a:pt x="374629" y="1246235"/>
-                </a:lnTo>
-                <a:close/>
-                <a:lnTo>
-                  <a:pt x="379981" y="1239300"/>
-                </a:lnTo>
-                <a:close/>
-                <a:lnTo>
-                  <a:pt x="385332" y="1232928"/>
-                </a:lnTo>
-                <a:close/>
-                <a:lnTo>
-                  <a:pt x="390684" y="1226314"/>
-                </a:lnTo>
-                <a:close/>
-                <a:lnTo>
-                  <a:pt x="396036" y="1219269"/>
-                </a:lnTo>
-                <a:close/>
-                <a:lnTo>
-                  <a:pt x="401388" y="1212695"/>
-                </a:lnTo>
-                <a:close/>
-                <a:lnTo>
-                  <a:pt x="406740" y="1206303"/>
-                </a:lnTo>
-                <a:close/>
-                <a:lnTo>
-                  <a:pt x="412092" y="1199340"/>
-                </a:lnTo>
-                <a:close/>
-                <a:lnTo>
-                  <a:pt x="417443" y="1192496"/>
-                </a:lnTo>
-                <a:close/>
-                <a:lnTo>
-                  <a:pt x="422795" y="1186156"/>
-                </a:lnTo>
-                <a:close/>
-                <a:lnTo>
-                  <a:pt x="428147" y="1179432"/>
-                </a:lnTo>
-                <a:close/>
-                <a:lnTo>
-                  <a:pt x="433499" y="1172409"/>
-                </a:lnTo>
-                <a:close/>
-                <a:lnTo>
-                  <a:pt x="438851" y="1165932"/>
-                </a:lnTo>
-                <a:close/>
-                <a:lnTo>
-                  <a:pt x="444203" y="1159466"/>
-                </a:lnTo>
-                <a:close/>
-                <a:lnTo>
-                  <a:pt x="449555" y="1152460"/>
-                </a:lnTo>
-                <a:close/>
-                <a:lnTo>
-                  <a:pt x="454906" y="1145646"/>
-                </a:lnTo>
-                <a:close/>
-                <a:lnTo>
-                  <a:pt x="460258" y="1139897"/>
-                </a:lnTo>
-                <a:close/>
-                <a:lnTo>
-                  <a:pt x="465610" y="1134596"/>
-                </a:lnTo>
-                <a:close/>
-                <a:lnTo>
-                  <a:pt x="470962" y="1129238"/>
-                </a:lnTo>
-                <a:close/>
-                <a:lnTo>
-                  <a:pt x="476314" y="1123886"/>
-                </a:lnTo>
-                <a:close/>
-                <a:lnTo>
-                  <a:pt x="481666" y="1118535"/>
-                </a:lnTo>
-                <a:close/>
-                <a:lnTo>
-                  <a:pt x="487017" y="1113183"/>
-                </a:lnTo>
-                <a:close/>
-                <a:lnTo>
-                  <a:pt x="492369" y="1107831"/>
-                </a:lnTo>
-                <a:close/>
-                <a:lnTo>
-                  <a:pt x="497721" y="1102479"/>
-                </a:lnTo>
-                <a:close/>
-                <a:lnTo>
-                  <a:pt x="503073" y="1097127"/>
-                </a:lnTo>
-                <a:close/>
-                <a:lnTo>
-                  <a:pt x="508425" y="1091775"/>
-                </a:lnTo>
-                <a:close/>
-                <a:lnTo>
-                  <a:pt x="513777" y="1086423"/>
-                </a:lnTo>
-                <a:close/>
-                <a:lnTo>
-                  <a:pt x="519128" y="1081072"/>
-                </a:lnTo>
-                <a:close/>
-                <a:lnTo>
-                  <a:pt x="524480" y="1075720"/>
-                </a:lnTo>
-                <a:close/>
-                <a:lnTo>
-                  <a:pt x="529832" y="1070368"/>
-                </a:lnTo>
-                <a:close/>
-                <a:lnTo>
-                  <a:pt x="535184" y="1065016"/>
-                </a:lnTo>
-                <a:close/>
-                <a:lnTo>
-                  <a:pt x="540536" y="1059664"/>
-                </a:lnTo>
-                <a:close/>
-                <a:lnTo>
-                  <a:pt x="545888" y="1054312"/>
-                </a:lnTo>
-                <a:close/>
-                <a:lnTo>
-                  <a:pt x="551239" y="1048961"/>
-                </a:lnTo>
-                <a:close/>
-                <a:lnTo>
-                  <a:pt x="556591" y="1043609"/>
-                </a:lnTo>
-                <a:close/>
-                <a:lnTo>
-                  <a:pt x="561943" y="1038257"/>
-                </a:lnTo>
-                <a:close/>
-                <a:lnTo>
-                  <a:pt x="567295" y="1032905"/>
-                </a:lnTo>
-                <a:close/>
-                <a:lnTo>
-                  <a:pt x="572647" y="1027553"/>
-                </a:lnTo>
-                <a:close/>
-                <a:lnTo>
-                  <a:pt x="577999" y="1022201"/>
-                </a:lnTo>
-                <a:close/>
-                <a:lnTo>
-                  <a:pt x="583351" y="1016849"/>
-                </a:lnTo>
-                <a:close/>
-                <a:lnTo>
-                  <a:pt x="588702" y="1011498"/>
-                </a:lnTo>
-                <a:close/>
-                <a:lnTo>
-                  <a:pt x="594054" y="1006146"/>
-                </a:lnTo>
-                <a:close/>
-                <a:lnTo>
-                  <a:pt x="599406" y="1000794"/>
-                </a:lnTo>
-                <a:close/>
-                <a:lnTo>
-                  <a:pt x="604758" y="995442"/>
-                </a:lnTo>
-                <a:close/>
-                <a:lnTo>
-                  <a:pt x="610110" y="990090"/>
-                </a:lnTo>
-                <a:close/>
-                <a:lnTo>
-                  <a:pt x="615462" y="984738"/>
-                </a:lnTo>
-                <a:close/>
-                <a:lnTo>
-                  <a:pt x="620813" y="979387"/>
-                </a:lnTo>
-                <a:close/>
-                <a:lnTo>
-                  <a:pt x="626165" y="974035"/>
-                </a:lnTo>
-                <a:close/>
-                <a:lnTo>
-                  <a:pt x="631517" y="968683"/>
-                </a:lnTo>
-                <a:close/>
-                <a:lnTo>
-                  <a:pt x="636869" y="963331"/>
-                </a:lnTo>
-                <a:close/>
-                <a:lnTo>
-                  <a:pt x="642221" y="957979"/>
-                </a:lnTo>
-                <a:close/>
-                <a:lnTo>
-                  <a:pt x="647573" y="952627"/>
-                </a:lnTo>
-                <a:close/>
-                <a:lnTo>
-                  <a:pt x="652924" y="947276"/>
-                </a:lnTo>
-                <a:close/>
-                <a:lnTo>
-                  <a:pt x="658276" y="941924"/>
-                </a:lnTo>
-                <a:close/>
-                <a:lnTo>
-                  <a:pt x="663628" y="936572"/>
-                </a:lnTo>
-                <a:close/>
-                <a:lnTo>
-                  <a:pt x="668980" y="931220"/>
-                </a:lnTo>
-                <a:close/>
-                <a:lnTo>
-                  <a:pt x="674332" y="925868"/>
-                </a:lnTo>
-                <a:close/>
-                <a:lnTo>
-                  <a:pt x="679684" y="920516"/>
-                </a:lnTo>
-                <a:close/>
-                <a:lnTo>
-                  <a:pt x="685035" y="915165"/>
-                </a:lnTo>
-                <a:close/>
-                <a:lnTo>
-                  <a:pt x="690387" y="909813"/>
-                </a:lnTo>
-                <a:close/>
-                <a:lnTo>
-                  <a:pt x="695739" y="904461"/>
-                </a:lnTo>
-                <a:close/>
-                <a:lnTo>
-                  <a:pt x="701091" y="899109"/>
-                </a:lnTo>
-                <a:close/>
-                <a:lnTo>
-                  <a:pt x="706443" y="893757"/>
-                </a:lnTo>
-                <a:close/>
-                <a:lnTo>
-                  <a:pt x="711795" y="888405"/>
-                </a:lnTo>
-                <a:close/>
-                <a:lnTo>
-                  <a:pt x="717146" y="883054"/>
-                </a:lnTo>
-                <a:close/>
-                <a:lnTo>
-                  <a:pt x="722498" y="877702"/>
-                </a:lnTo>
-                <a:close/>
-                <a:lnTo>
-                  <a:pt x="727850" y="872350"/>
-                </a:lnTo>
-                <a:close/>
-                <a:lnTo>
-                  <a:pt x="733202" y="866998"/>
-                </a:lnTo>
-                <a:close/>
-                <a:lnTo>
-                  <a:pt x="738554" y="861646"/>
-                </a:lnTo>
-                <a:close/>
-                <a:lnTo>
-                  <a:pt x="743906" y="856294"/>
-                </a:lnTo>
-                <a:close/>
-                <a:lnTo>
-                  <a:pt x="749258" y="850942"/>
-                </a:lnTo>
-                <a:close/>
-                <a:lnTo>
-                  <a:pt x="754609" y="845591"/>
-                </a:lnTo>
-                <a:close/>
-                <a:lnTo>
-                  <a:pt x="759961" y="840239"/>
-                </a:lnTo>
-                <a:close/>
-                <a:lnTo>
-                  <a:pt x="765313" y="834887"/>
-                </a:lnTo>
-                <a:close/>
-                <a:lnTo>
-                  <a:pt x="770665" y="829535"/>
-                </a:lnTo>
-                <a:close/>
-                <a:lnTo>
-                  <a:pt x="776017" y="824183"/>
-                </a:lnTo>
-                <a:close/>
-                <a:lnTo>
-                  <a:pt x="781369" y="818831"/>
-                </a:lnTo>
-                <a:close/>
-                <a:lnTo>
-                  <a:pt x="786720" y="813480"/>
-                </a:lnTo>
-                <a:close/>
-                <a:lnTo>
-                  <a:pt x="792072" y="808128"/>
-                </a:lnTo>
-                <a:close/>
-                <a:lnTo>
-                  <a:pt x="797424" y="802776"/>
-                </a:lnTo>
-                <a:close/>
-                <a:lnTo>
-                  <a:pt x="802776" y="797424"/>
-                </a:lnTo>
-                <a:close/>
-                <a:lnTo>
-                  <a:pt x="808128" y="792072"/>
-                </a:lnTo>
-                <a:close/>
-                <a:lnTo>
-                  <a:pt x="813480" y="786720"/>
-                </a:lnTo>
-                <a:close/>
-                <a:lnTo>
-                  <a:pt x="818831" y="781369"/>
-                </a:lnTo>
-                <a:close/>
-                <a:lnTo>
-                  <a:pt x="824183" y="776017"/>
-                </a:lnTo>
-                <a:close/>
-                <a:lnTo>
-                  <a:pt x="829535" y="770665"/>
-                </a:lnTo>
-                <a:close/>
-                <a:lnTo>
-                  <a:pt x="834887" y="765313"/>
-                </a:lnTo>
-                <a:close/>
-                <a:lnTo>
-                  <a:pt x="840239" y="759961"/>
-                </a:lnTo>
-                <a:close/>
-                <a:lnTo>
-                  <a:pt x="845591" y="754609"/>
-                </a:lnTo>
-                <a:close/>
-                <a:lnTo>
-                  <a:pt x="850942" y="749258"/>
-                </a:lnTo>
-                <a:close/>
-                <a:lnTo>
-                  <a:pt x="856294" y="743906"/>
-                </a:lnTo>
-                <a:close/>
-                <a:lnTo>
-                  <a:pt x="861646" y="738554"/>
-                </a:lnTo>
-                <a:close/>
-                <a:lnTo>
-                  <a:pt x="866998" y="733202"/>
-                </a:lnTo>
-                <a:close/>
-                <a:lnTo>
-                  <a:pt x="872350" y="727850"/>
-                </a:lnTo>
-                <a:close/>
-                <a:lnTo>
-                  <a:pt x="877702" y="722498"/>
-                </a:lnTo>
-                <a:close/>
-                <a:lnTo>
-                  <a:pt x="883054" y="717146"/>
-                </a:lnTo>
-                <a:close/>
-                <a:lnTo>
-                  <a:pt x="888405" y="711795"/>
-                </a:lnTo>
-                <a:close/>
-                <a:lnTo>
-                  <a:pt x="893757" y="706443"/>
-                </a:lnTo>
-                <a:close/>
-                <a:lnTo>
-                  <a:pt x="899109" y="701091"/>
-                </a:lnTo>
-                <a:close/>
-                <a:lnTo>
-                  <a:pt x="904461" y="695739"/>
-                </a:lnTo>
-                <a:close/>
-                <a:lnTo>
-                  <a:pt x="909813" y="690387"/>
-                </a:lnTo>
-                <a:close/>
-                <a:lnTo>
-                  <a:pt x="915165" y="685035"/>
-                </a:lnTo>
-                <a:close/>
-                <a:lnTo>
-                  <a:pt x="920516" y="679684"/>
-                </a:lnTo>
-                <a:close/>
-                <a:lnTo>
-                  <a:pt x="925868" y="674332"/>
-                </a:lnTo>
-                <a:close/>
-                <a:lnTo>
-                  <a:pt x="931220" y="668980"/>
-                </a:lnTo>
-                <a:close/>
-                <a:lnTo>
-                  <a:pt x="936572" y="663628"/>
-                </a:lnTo>
-                <a:close/>
-                <a:lnTo>
-                  <a:pt x="941924" y="658276"/>
-                </a:lnTo>
-                <a:close/>
-                <a:lnTo>
-                  <a:pt x="947276" y="652924"/>
-                </a:lnTo>
-                <a:close/>
-                <a:lnTo>
-                  <a:pt x="952627" y="647573"/>
-                </a:lnTo>
-                <a:close/>
-                <a:lnTo>
-                  <a:pt x="957979" y="642221"/>
-                </a:lnTo>
-                <a:close/>
-                <a:lnTo>
-                  <a:pt x="963331" y="636869"/>
-                </a:lnTo>
-                <a:close/>
-                <a:lnTo>
-                  <a:pt x="968683" y="631517"/>
-                </a:lnTo>
-                <a:close/>
-                <a:lnTo>
-                  <a:pt x="974035" y="626165"/>
-                </a:lnTo>
-                <a:close/>
-                <a:lnTo>
-                  <a:pt x="979387" y="620813"/>
-                </a:lnTo>
-                <a:close/>
-                <a:lnTo>
-                  <a:pt x="984738" y="615462"/>
-                </a:lnTo>
-                <a:close/>
-                <a:lnTo>
-                  <a:pt x="990090" y="610110"/>
-                </a:lnTo>
-                <a:close/>
-                <a:lnTo>
-                  <a:pt x="995442" y="604758"/>
-                </a:lnTo>
-                <a:close/>
-                <a:lnTo>
-                  <a:pt x="1000794" y="599406"/>
-                </a:lnTo>
-                <a:close/>
-                <a:lnTo>
-                  <a:pt x="1006146" y="594054"/>
-                </a:lnTo>
-                <a:close/>
-                <a:lnTo>
-                  <a:pt x="1011498" y="588702"/>
-                </a:lnTo>
-                <a:close/>
-                <a:lnTo>
-                  <a:pt x="1016849" y="583351"/>
-                </a:lnTo>
-                <a:close/>
-                <a:lnTo>
-                  <a:pt x="1022201" y="577999"/>
-                </a:lnTo>
-                <a:close/>
-                <a:lnTo>
-                  <a:pt x="1027553" y="572647"/>
-                </a:lnTo>
-                <a:close/>
-                <a:lnTo>
-                  <a:pt x="1032905" y="567295"/>
-                </a:lnTo>
-                <a:close/>
-                <a:lnTo>
-                  <a:pt x="1038257" y="561943"/>
-                </a:lnTo>
-                <a:close/>
-                <a:lnTo>
-                  <a:pt x="1043609" y="556591"/>
-                </a:lnTo>
-                <a:close/>
-                <a:lnTo>
-                  <a:pt x="1048961" y="551239"/>
-                </a:lnTo>
-                <a:close/>
-                <a:lnTo>
-                  <a:pt x="1054312" y="545888"/>
-                </a:lnTo>
-                <a:close/>
-                <a:lnTo>
-                  <a:pt x="1059664" y="540536"/>
-                </a:lnTo>
-                <a:close/>
-                <a:lnTo>
-                  <a:pt x="1065016" y="535184"/>
-                </a:lnTo>
-                <a:close/>
-                <a:lnTo>
-                  <a:pt x="1070368" y="529832"/>
-                </a:lnTo>
-                <a:close/>
-                <a:lnTo>
-                  <a:pt x="1075720" y="524480"/>
-                </a:lnTo>
-                <a:close/>
-                <a:lnTo>
-                  <a:pt x="1081072" y="519128"/>
-                </a:lnTo>
-                <a:close/>
-                <a:lnTo>
-                  <a:pt x="1086423" y="513777"/>
-                </a:lnTo>
-                <a:close/>
-                <a:lnTo>
-                  <a:pt x="1091775" y="508425"/>
-                </a:lnTo>
-                <a:close/>
-                <a:lnTo>
-                  <a:pt x="1097127" y="503073"/>
-                </a:lnTo>
-                <a:close/>
-                <a:lnTo>
-                  <a:pt x="1102479" y="497721"/>
-                </a:lnTo>
-                <a:close/>
-                <a:lnTo>
-                  <a:pt x="1107831" y="492369"/>
-                </a:lnTo>
-                <a:close/>
-                <a:lnTo>
-                  <a:pt x="1113183" y="487017"/>
-                </a:lnTo>
-                <a:close/>
-                <a:lnTo>
-                  <a:pt x="1118534" y="481666"/>
-                </a:lnTo>
-                <a:close/>
-                <a:lnTo>
-                  <a:pt x="1123886" y="476314"/>
-                </a:lnTo>
-                <a:close/>
-                <a:lnTo>
-                  <a:pt x="1129238" y="470962"/>
-                </a:lnTo>
-                <a:close/>
-                <a:lnTo>
-                  <a:pt x="1134590" y="465610"/>
-                </a:lnTo>
-                <a:close/>
-                <a:lnTo>
-                  <a:pt x="1139942" y="460258"/>
-                </a:lnTo>
-                <a:close/>
-                <a:lnTo>
-                  <a:pt x="1145294" y="454906"/>
-                </a:lnTo>
-                <a:close/>
-                <a:lnTo>
-                  <a:pt x="1150645" y="449555"/>
-                </a:lnTo>
-                <a:close/>
-                <a:lnTo>
-                  <a:pt x="1155997" y="444203"/>
-                </a:lnTo>
-                <a:close/>
-                <a:lnTo>
-                  <a:pt x="1161349" y="438851"/>
-                </a:lnTo>
-                <a:close/>
-                <a:lnTo>
-                  <a:pt x="1166701" y="433499"/>
-                </a:lnTo>
-                <a:close/>
-                <a:lnTo>
-                  <a:pt x="1172053" y="428147"/>
-                </a:lnTo>
-                <a:close/>
-                <a:lnTo>
-                  <a:pt x="1177405" y="422795"/>
-                </a:lnTo>
-                <a:close/>
-                <a:lnTo>
-                  <a:pt x="1182757" y="417443"/>
-                </a:lnTo>
-                <a:close/>
-                <a:lnTo>
-                  <a:pt x="1188108" y="412092"/>
-                </a:lnTo>
-                <a:close/>
-                <a:lnTo>
-                  <a:pt x="1193460" y="406740"/>
-                </a:lnTo>
-                <a:close/>
-                <a:lnTo>
-                  <a:pt x="1198812" y="401388"/>
-                </a:lnTo>
-                <a:close/>
-                <a:lnTo>
-                  <a:pt x="1204164" y="396036"/>
-                </a:lnTo>
-                <a:close/>
-                <a:lnTo>
-                  <a:pt x="1209516" y="390684"/>
-                </a:lnTo>
-                <a:close/>
-                <a:lnTo>
-                  <a:pt x="1214868" y="385332"/>
-                </a:lnTo>
-                <a:close/>
-                <a:lnTo>
-                  <a:pt x="1220219" y="379981"/>
-                </a:lnTo>
-                <a:close/>
-                <a:lnTo>
-                  <a:pt x="1225571" y="374629"/>
-                </a:lnTo>
-                <a:close/>
-                <a:lnTo>
-                  <a:pt x="1230923" y="369277"/>
-                </a:lnTo>
-                <a:close/>
-                <a:lnTo>
-                  <a:pt x="1236275" y="363925"/>
-                </a:lnTo>
-                <a:close/>
-                <a:lnTo>
-                  <a:pt x="1241627" y="358573"/>
-                </a:lnTo>
-                <a:close/>
-                <a:lnTo>
-                  <a:pt x="1246979" y="353221"/>
-                </a:lnTo>
-                <a:close/>
-                <a:lnTo>
-                  <a:pt x="1252330" y="347870"/>
-                </a:lnTo>
-                <a:close/>
-                <a:lnTo>
-                  <a:pt x="1257682" y="342518"/>
-                </a:lnTo>
-                <a:close/>
-                <a:lnTo>
-                  <a:pt x="1263034" y="337166"/>
-                </a:lnTo>
-                <a:close/>
-                <a:lnTo>
-                  <a:pt x="1268386" y="331814"/>
-                </a:lnTo>
-                <a:close/>
-                <a:lnTo>
-                  <a:pt x="1273738" y="326462"/>
-                </a:lnTo>
-                <a:close/>
-                <a:lnTo>
-                  <a:pt x="1279090" y="321110"/>
-                </a:lnTo>
-                <a:close/>
-                <a:lnTo>
-                  <a:pt x="1284441" y="315759"/>
-                </a:lnTo>
-                <a:close/>
-                <a:lnTo>
-                  <a:pt x="1289793" y="310407"/>
-                </a:lnTo>
-                <a:close/>
-                <a:lnTo>
-                  <a:pt x="1295145" y="305055"/>
-                </a:lnTo>
-                <a:close/>
-                <a:lnTo>
-                  <a:pt x="1300497" y="299703"/>
-                </a:lnTo>
-                <a:close/>
-                <a:lnTo>
-                  <a:pt x="1305849" y="294351"/>
-                </a:lnTo>
-                <a:close/>
-                <a:lnTo>
-                  <a:pt x="1311201" y="288999"/>
-                </a:lnTo>
-                <a:close/>
-                <a:lnTo>
-                  <a:pt x="1316553" y="283647"/>
-                </a:lnTo>
-                <a:close/>
-                <a:lnTo>
-                  <a:pt x="1321904" y="278296"/>
-                </a:lnTo>
-                <a:close/>
-                <a:lnTo>
-                  <a:pt x="1327256" y="272944"/>
-                </a:lnTo>
-                <a:close/>
-                <a:lnTo>
-                  <a:pt x="1332608" y="267592"/>
-                </a:lnTo>
-                <a:close/>
-                <a:lnTo>
-                  <a:pt x="1337960" y="262240"/>
-                </a:lnTo>
-                <a:close/>
-                <a:lnTo>
-                  <a:pt x="1343312" y="256888"/>
-                </a:lnTo>
-                <a:close/>
-                <a:lnTo>
-                  <a:pt x="1348664" y="251536"/>
-                </a:lnTo>
-                <a:close/>
-                <a:lnTo>
-                  <a:pt x="1354015" y="246185"/>
-                </a:lnTo>
-                <a:close/>
-                <a:lnTo>
-                  <a:pt x="1359367" y="240833"/>
-                </a:lnTo>
-                <a:close/>
-                <a:lnTo>
-                  <a:pt x="1364719" y="235481"/>
-                </a:lnTo>
-                <a:close/>
-                <a:lnTo>
-                  <a:pt x="1370071" y="230129"/>
-                </a:lnTo>
-                <a:close/>
-                <a:lnTo>
-                  <a:pt x="1375423" y="224777"/>
-                </a:lnTo>
-                <a:close/>
-                <a:lnTo>
-                  <a:pt x="1380775" y="219425"/>
-                </a:lnTo>
-                <a:close/>
-                <a:lnTo>
-                  <a:pt x="1386126" y="214074"/>
-                </a:lnTo>
-                <a:close/>
-                <a:lnTo>
-                  <a:pt x="1391478" y="208722"/>
-                </a:lnTo>
-                <a:close/>
-                <a:lnTo>
-                  <a:pt x="1396830" y="203370"/>
-                </a:lnTo>
-                <a:close/>
-                <a:lnTo>
-                  <a:pt x="1402182" y="198018"/>
-                </a:lnTo>
-                <a:close/>
-                <a:lnTo>
-                  <a:pt x="1407534" y="192666"/>
-                </a:lnTo>
-                <a:close/>
-                <a:lnTo>
-                  <a:pt x="1412886" y="187314"/>
-                </a:lnTo>
-                <a:close/>
-                <a:lnTo>
-                  <a:pt x="1418237" y="181963"/>
-                </a:lnTo>
-                <a:close/>
-                <a:lnTo>
-                  <a:pt x="1423589" y="176611"/>
-                </a:lnTo>
-                <a:close/>
-                <a:lnTo>
-                  <a:pt x="1428941" y="171259"/>
-                </a:lnTo>
-                <a:close/>
-                <a:lnTo>
-                  <a:pt x="1434293" y="165907"/>
-                </a:lnTo>
-                <a:close/>
-                <a:lnTo>
-                  <a:pt x="1439645" y="160555"/>
-                </a:lnTo>
-                <a:close/>
-                <a:lnTo>
-                  <a:pt x="1444997" y="155203"/>
-                </a:lnTo>
-                <a:close/>
-                <a:lnTo>
-                  <a:pt x="1450348" y="149852"/>
-                </a:lnTo>
-                <a:close/>
-                <a:lnTo>
-                  <a:pt x="1455700" y="144500"/>
-                </a:lnTo>
-                <a:close/>
-                <a:lnTo>
-                  <a:pt x="1461052" y="139148"/>
-                </a:lnTo>
-                <a:close/>
-                <a:lnTo>
-                  <a:pt x="1466404" y="133796"/>
-                </a:lnTo>
-                <a:close/>
-                <a:lnTo>
-                  <a:pt x="1471756" y="128444"/>
-                </a:lnTo>
-                <a:close/>
-                <a:lnTo>
-                  <a:pt x="1477108" y="123092"/>
-                </a:lnTo>
-                <a:close/>
-                <a:lnTo>
-                  <a:pt x="1482460" y="117740"/>
-                </a:lnTo>
-                <a:close/>
-                <a:lnTo>
-                  <a:pt x="1487811" y="112389"/>
-                </a:lnTo>
-                <a:close/>
-                <a:lnTo>
-                  <a:pt x="1493163" y="107037"/>
-                </a:lnTo>
-                <a:close/>
-                <a:lnTo>
-                  <a:pt x="1498515" y="101685"/>
-                </a:lnTo>
-                <a:close/>
-                <a:lnTo>
-                  <a:pt x="1503867" y="96333"/>
-                </a:lnTo>
-                <a:close/>
-                <a:lnTo>
-                  <a:pt x="1509219" y="90981"/>
-                </a:lnTo>
-                <a:close/>
-                <a:lnTo>
-                  <a:pt x="1514571" y="85629"/>
-                </a:lnTo>
-                <a:close/>
-                <a:lnTo>
-                  <a:pt x="1519922" y="80278"/>
-                </a:lnTo>
-                <a:close/>
-                <a:lnTo>
-                  <a:pt x="1525274" y="74926"/>
-                </a:lnTo>
-                <a:close/>
-                <a:lnTo>
-                  <a:pt x="1530626" y="69574"/>
-                </a:lnTo>
-                <a:close/>
-                <a:lnTo>
-                  <a:pt x="1535978" y="64222"/>
-                </a:lnTo>
-                <a:close/>
-                <a:lnTo>
-                  <a:pt x="1541330" y="58870"/>
-                </a:lnTo>
-                <a:close/>
-                <a:lnTo>
-                  <a:pt x="1546682" y="53518"/>
-                </a:lnTo>
-                <a:close/>
-                <a:lnTo>
-                  <a:pt x="1552033" y="48167"/>
-                </a:lnTo>
-                <a:close/>
-                <a:lnTo>
-                  <a:pt x="1557385" y="42815"/>
-                </a:lnTo>
-                <a:close/>
-                <a:lnTo>
-                  <a:pt x="1562737" y="37463"/>
-                </a:lnTo>
-                <a:close/>
-                <a:lnTo>
-                  <a:pt x="1568089" y="32111"/>
-                </a:lnTo>
-                <a:close/>
-                <a:lnTo>
-                  <a:pt x="1573441" y="26759"/>
-                </a:lnTo>
-                <a:close/>
-                <a:lnTo>
-                  <a:pt x="1578793" y="21407"/>
-                </a:lnTo>
-                <a:close/>
-                <a:lnTo>
-                  <a:pt x="1584144" y="16056"/>
-                </a:lnTo>
-                <a:close/>
-                <a:lnTo>
-                  <a:pt x="1589496" y="10704"/>
-                </a:lnTo>
-                <a:close/>
-                <a:lnTo>
-                  <a:pt x="1594848" y="5352"/>
-                </a:lnTo>
-                <a:close/>
-                <a:lnTo>
-                  <a:pt x="1600200" y="0"/>
+                  <a:pt x="6728" y="7110142"/>
+                </a:lnTo>
+                <a:close/>
+                <a:lnTo>
+                  <a:pt x="13456" y="7107519"/>
+                </a:lnTo>
+                <a:close/>
+                <a:lnTo>
+                  <a:pt x="20184" y="7103891"/>
+                </a:lnTo>
+                <a:close/>
+                <a:lnTo>
+                  <a:pt x="26912" y="7100570"/>
+                </a:lnTo>
+                <a:close/>
+                <a:lnTo>
+                  <a:pt x="33640" y="7097222"/>
+                </a:lnTo>
+                <a:close/>
+                <a:lnTo>
+                  <a:pt x="40368" y="7093843"/>
+                </a:lnTo>
+                <a:close/>
+                <a:lnTo>
+                  <a:pt x="47096" y="7090485"/>
+                </a:lnTo>
+                <a:close/>
+                <a:lnTo>
+                  <a:pt x="53824" y="7087121"/>
+                </a:lnTo>
+                <a:close/>
+                <a:lnTo>
+                  <a:pt x="60552" y="7083746"/>
+                </a:lnTo>
+                <a:close/>
+                <a:lnTo>
+                  <a:pt x="67280" y="7080417"/>
+                </a:lnTo>
+                <a:close/>
+                <a:lnTo>
+                  <a:pt x="74008" y="7077006"/>
+                </a:lnTo>
+                <a:close/>
+                <a:lnTo>
+                  <a:pt x="80736" y="7073570"/>
+                </a:lnTo>
+                <a:close/>
+                <a:lnTo>
+                  <a:pt x="87464" y="7070775"/>
+                </a:lnTo>
+                <a:close/>
+                <a:lnTo>
+                  <a:pt x="94192" y="7065723"/>
+                </a:lnTo>
+                <a:close/>
+                <a:lnTo>
+                  <a:pt x="100920" y="7058891"/>
+                </a:lnTo>
+                <a:close/>
+                <a:lnTo>
+                  <a:pt x="107648" y="7055292"/>
+                </a:lnTo>
+                <a:close/>
+                <a:lnTo>
+                  <a:pt x="114376" y="7052893"/>
+                </a:lnTo>
+                <a:close/>
+                <a:lnTo>
+                  <a:pt x="121104" y="7047849"/>
+                </a:lnTo>
+                <a:close/>
+                <a:lnTo>
+                  <a:pt x="127833" y="7041015"/>
+                </a:lnTo>
+                <a:close/>
+                <a:lnTo>
+                  <a:pt x="134561" y="7037835"/>
+                </a:lnTo>
+                <a:close/>
+                <a:lnTo>
+                  <a:pt x="141289" y="7032225"/>
+                </a:lnTo>
+                <a:close/>
+                <a:lnTo>
+                  <a:pt x="148017" y="7026088"/>
+                </a:lnTo>
+                <a:close/>
+                <a:lnTo>
+                  <a:pt x="154745" y="7023076"/>
+                </a:lnTo>
+                <a:close/>
+                <a:lnTo>
+                  <a:pt x="161473" y="7016451"/>
+                </a:lnTo>
+                <a:close/>
+                <a:lnTo>
+                  <a:pt x="168201" y="7011390"/>
+                </a:lnTo>
+                <a:close/>
+                <a:lnTo>
+                  <a:pt x="174929" y="7008036"/>
+                </a:lnTo>
+                <a:close/>
+                <a:lnTo>
+                  <a:pt x="181657" y="7001169"/>
+                </a:lnTo>
+                <a:close/>
+                <a:lnTo>
+                  <a:pt x="188385" y="6993620"/>
+                </a:lnTo>
+                <a:close/>
+                <a:lnTo>
+                  <a:pt x="195113" y="6988966"/>
+                </a:lnTo>
+                <a:close/>
+                <a:lnTo>
+                  <a:pt x="201841" y="6985522"/>
+                </a:lnTo>
+                <a:close/>
+                <a:lnTo>
+                  <a:pt x="208569" y="6978766"/>
+                </a:lnTo>
+                <a:close/>
+                <a:lnTo>
+                  <a:pt x="215297" y="6971902"/>
+                </a:lnTo>
+                <a:close/>
+                <a:lnTo>
+                  <a:pt x="222025" y="6964915"/>
+                </a:lnTo>
+                <a:close/>
+                <a:lnTo>
+                  <a:pt x="228753" y="6958480"/>
+                </a:lnTo>
+                <a:close/>
+                <a:lnTo>
+                  <a:pt x="235481" y="6955296"/>
+                </a:lnTo>
+                <a:close/>
+                <a:lnTo>
+                  <a:pt x="242209" y="6950015"/>
+                </a:lnTo>
+                <a:close/>
+                <a:lnTo>
+                  <a:pt x="248937" y="6942706"/>
+                </a:lnTo>
+                <a:close/>
+                <a:lnTo>
+                  <a:pt x="255665" y="6936082"/>
+                </a:lnTo>
+                <a:close/>
+                <a:lnTo>
+                  <a:pt x="262393" y="6929385"/>
+                </a:lnTo>
+                <a:close/>
+                <a:lnTo>
+                  <a:pt x="269121" y="6922626"/>
+                </a:lnTo>
+                <a:close/>
+                <a:lnTo>
+                  <a:pt x="275849" y="6915909"/>
+                </a:lnTo>
+                <a:close/>
+                <a:lnTo>
+                  <a:pt x="282577" y="6909179"/>
+                </a:lnTo>
+                <a:close/>
+                <a:lnTo>
+                  <a:pt x="289305" y="6902450"/>
+                </a:lnTo>
+                <a:close/>
+                <a:lnTo>
+                  <a:pt x="296033" y="6895723"/>
+                </a:lnTo>
+                <a:close/>
+                <a:lnTo>
+                  <a:pt x="302761" y="6888995"/>
+                </a:lnTo>
+                <a:close/>
+                <a:lnTo>
+                  <a:pt x="309489" y="6882266"/>
+                </a:lnTo>
+                <a:close/>
+                <a:lnTo>
+                  <a:pt x="316217" y="6875541"/>
+                </a:lnTo>
+                <a:close/>
+                <a:lnTo>
+                  <a:pt x="322945" y="6868805"/>
+                </a:lnTo>
+                <a:close/>
+                <a:lnTo>
+                  <a:pt x="329673" y="6862086"/>
+                </a:lnTo>
+                <a:close/>
+                <a:lnTo>
+                  <a:pt x="336401" y="6855383"/>
+                </a:lnTo>
+                <a:close/>
+                <a:lnTo>
+                  <a:pt x="343129" y="6848503"/>
+                </a:lnTo>
+                <a:close/>
+                <a:lnTo>
+                  <a:pt x="349857" y="6842150"/>
+                </a:lnTo>
+                <a:close/>
+                <a:lnTo>
+                  <a:pt x="356585" y="6835180"/>
+                </a:lnTo>
+                <a:close/>
+                <a:lnTo>
+                  <a:pt x="363313" y="6824973"/>
+                </a:lnTo>
+                <a:close/>
+                <a:lnTo>
+                  <a:pt x="370041" y="6816553"/>
+                </a:lnTo>
+                <a:close/>
+                <a:lnTo>
+                  <a:pt x="376769" y="6810714"/>
+                </a:lnTo>
+                <a:close/>
+                <a:lnTo>
+                  <a:pt x="383498" y="6803854"/>
+                </a:lnTo>
+                <a:close/>
+                <a:lnTo>
+                  <a:pt x="390226" y="6793755"/>
+                </a:lnTo>
+                <a:close/>
+                <a:lnTo>
+                  <a:pt x="396954" y="6785062"/>
+                </a:lnTo>
+                <a:close/>
+                <a:lnTo>
+                  <a:pt x="403682" y="6779163"/>
+                </a:lnTo>
+                <a:close/>
+                <a:lnTo>
+                  <a:pt x="410410" y="6772525"/>
+                </a:lnTo>
+                <a:close/>
+                <a:lnTo>
+                  <a:pt x="417138" y="6762387"/>
+                </a:lnTo>
+                <a:close/>
+                <a:lnTo>
+                  <a:pt x="423866" y="6754060"/>
+                </a:lnTo>
+                <a:close/>
+                <a:lnTo>
+                  <a:pt x="430594" y="6747189"/>
+                </a:lnTo>
+                <a:close/>
+                <a:lnTo>
+                  <a:pt x="437322" y="6736758"/>
+                </a:lnTo>
+                <a:close/>
+                <a:lnTo>
+                  <a:pt x="444050" y="6729316"/>
+                </a:lnTo>
+                <a:close/>
+                <a:lnTo>
+                  <a:pt x="450778" y="6721918"/>
+                </a:lnTo>
+                <a:close/>
+                <a:lnTo>
+                  <a:pt x="457506" y="6711183"/>
+                </a:lnTo>
+                <a:close/>
+                <a:lnTo>
+                  <a:pt x="464234" y="6700651"/>
+                </a:lnTo>
+                <a:close/>
+                <a:lnTo>
+                  <a:pt x="470962" y="6693410"/>
+                </a:lnTo>
+                <a:close/>
+                <a:lnTo>
+                  <a:pt x="477690" y="6685944"/>
+                </a:lnTo>
+                <a:close/>
+                <a:lnTo>
+                  <a:pt x="484418" y="6675455"/>
+                </a:lnTo>
+                <a:close/>
+                <a:lnTo>
+                  <a:pt x="491146" y="6665400"/>
+                </a:lnTo>
+                <a:close/>
+                <a:lnTo>
+                  <a:pt x="497874" y="6654864"/>
+                </a:lnTo>
+                <a:close/>
+                <a:lnTo>
+                  <a:pt x="504602" y="6645840"/>
+                </a:lnTo>
+                <a:close/>
+                <a:lnTo>
+                  <a:pt x="511330" y="6639380"/>
+                </a:lnTo>
+                <a:close/>
+                <a:lnTo>
+                  <a:pt x="518058" y="6629895"/>
+                </a:lnTo>
+                <a:close/>
+                <a:lnTo>
+                  <a:pt x="524786" y="6619328"/>
+                </a:lnTo>
+                <a:close/>
+                <a:lnTo>
+                  <a:pt x="531514" y="6609390"/>
+                </a:lnTo>
+                <a:close/>
+                <a:lnTo>
+                  <a:pt x="538242" y="6599286"/>
+                </a:lnTo>
+                <a:close/>
+                <a:lnTo>
+                  <a:pt x="544970" y="6589177"/>
+                </a:lnTo>
+                <a:close/>
+                <a:lnTo>
+                  <a:pt x="551698" y="6579095"/>
+                </a:lnTo>
+                <a:close/>
+                <a:lnTo>
+                  <a:pt x="558426" y="6569000"/>
+                </a:lnTo>
+                <a:close/>
+                <a:lnTo>
+                  <a:pt x="565154" y="6558909"/>
+                </a:lnTo>
+                <a:close/>
+                <a:lnTo>
+                  <a:pt x="571882" y="6548816"/>
+                </a:lnTo>
+                <a:close/>
+                <a:lnTo>
+                  <a:pt x="578610" y="6538726"/>
+                </a:lnTo>
+                <a:close/>
+                <a:lnTo>
+                  <a:pt x="585338" y="6528632"/>
+                </a:lnTo>
+                <a:close/>
+                <a:lnTo>
+                  <a:pt x="592066" y="6518532"/>
+                </a:lnTo>
+                <a:close/>
+                <a:lnTo>
+                  <a:pt x="598794" y="6508480"/>
+                </a:lnTo>
+                <a:close/>
+                <a:lnTo>
+                  <a:pt x="605522" y="6498300"/>
+                </a:lnTo>
+                <a:close/>
+                <a:lnTo>
+                  <a:pt x="612250" y="6488234"/>
+                </a:lnTo>
+                <a:close/>
+                <a:lnTo>
+                  <a:pt x="618978" y="6478641"/>
+                </a:lnTo>
+                <a:close/>
+                <a:lnTo>
+                  <a:pt x="625706" y="6466214"/>
+                </a:lnTo>
+                <a:close/>
+                <a:lnTo>
+                  <a:pt x="632435" y="6453022"/>
+                </a:lnTo>
+                <a:close/>
+                <a:lnTo>
+                  <a:pt x="639163" y="6443165"/>
+                </a:lnTo>
+                <a:close/>
+                <a:lnTo>
+                  <a:pt x="645891" y="6433858"/>
+                </a:lnTo>
+                <a:close/>
+                <a:lnTo>
+                  <a:pt x="652619" y="6421405"/>
+                </a:lnTo>
+                <a:close/>
+                <a:lnTo>
+                  <a:pt x="659347" y="6408327"/>
+                </a:lnTo>
+                <a:close/>
+                <a:lnTo>
+                  <a:pt x="666075" y="6398597"/>
+                </a:lnTo>
+                <a:close/>
+                <a:lnTo>
+                  <a:pt x="672803" y="6385596"/>
+                </a:lnTo>
+                <a:close/>
+                <a:lnTo>
+                  <a:pt x="679531" y="6373336"/>
+                </a:lnTo>
+                <a:close/>
+                <a:lnTo>
+                  <a:pt x="686259" y="6363461"/>
+                </a:lnTo>
+                <a:close/>
+                <a:lnTo>
+                  <a:pt x="692987" y="6350183"/>
+                </a:lnTo>
+                <a:close/>
+                <a:lnTo>
+                  <a:pt x="699715" y="6335796"/>
+                </a:lnTo>
+                <a:close/>
+                <a:lnTo>
+                  <a:pt x="706443" y="6323995"/>
+                </a:lnTo>
+                <a:close/>
+                <a:lnTo>
+                  <a:pt x="713171" y="6314035"/>
+                </a:lnTo>
+                <a:close/>
+                <a:lnTo>
+                  <a:pt x="719899" y="6300860"/>
+                </a:lnTo>
+                <a:close/>
+                <a:lnTo>
+                  <a:pt x="726627" y="6287017"/>
+                </a:lnTo>
+                <a:close/>
+                <a:lnTo>
+                  <a:pt x="733355" y="6273715"/>
+                </a:lnTo>
+                <a:close/>
+                <a:lnTo>
+                  <a:pt x="740083" y="6260235"/>
+                </a:lnTo>
+                <a:close/>
+                <a:lnTo>
+                  <a:pt x="746811" y="6246759"/>
+                </a:lnTo>
+                <a:close/>
+                <a:lnTo>
+                  <a:pt x="753539" y="6233348"/>
+                </a:lnTo>
+                <a:close/>
+                <a:lnTo>
+                  <a:pt x="760267" y="6219827"/>
+                </a:lnTo>
+                <a:close/>
+                <a:lnTo>
+                  <a:pt x="766995" y="6206332"/>
+                </a:lnTo>
+                <a:close/>
+                <a:lnTo>
+                  <a:pt x="773723" y="6193433"/>
+                </a:lnTo>
+                <a:close/>
+                <a:lnTo>
+                  <a:pt x="780451" y="6178028"/>
+                </a:lnTo>
+                <a:close/>
+                <a:lnTo>
+                  <a:pt x="787179" y="6161228"/>
+                </a:lnTo>
+                <a:close/>
+                <a:lnTo>
+                  <a:pt x="793907" y="6147736"/>
+                </a:lnTo>
+                <a:close/>
+                <a:lnTo>
+                  <a:pt x="800635" y="6135187"/>
+                </a:lnTo>
+                <a:close/>
+                <a:lnTo>
+                  <a:pt x="807363" y="6119779"/>
+                </a:lnTo>
+                <a:close/>
+                <a:lnTo>
+                  <a:pt x="814091" y="6103014"/>
+                </a:lnTo>
+                <a:close/>
+                <a:lnTo>
+                  <a:pt x="820819" y="6089845"/>
+                </a:lnTo>
+                <a:close/>
+                <a:lnTo>
+                  <a:pt x="827547" y="6073886"/>
+                </a:lnTo>
+                <a:close/>
+                <a:lnTo>
+                  <a:pt x="834275" y="6057848"/>
+                </a:lnTo>
+                <a:close/>
+                <a:lnTo>
+                  <a:pt x="841003" y="6044708"/>
+                </a:lnTo>
+                <a:close/>
+                <a:lnTo>
+                  <a:pt x="847731" y="6028285"/>
+                </a:lnTo>
+                <a:close/>
+                <a:lnTo>
+                  <a:pt x="854459" y="6011016"/>
+                </a:lnTo>
+                <a:close/>
+                <a:lnTo>
+                  <a:pt x="861187" y="5994365"/>
+                </a:lnTo>
+                <a:close/>
+                <a:lnTo>
+                  <a:pt x="867915" y="5977522"/>
+                </a:lnTo>
+                <a:close/>
+                <a:lnTo>
+                  <a:pt x="874643" y="5960679"/>
+                </a:lnTo>
+                <a:close/>
+                <a:lnTo>
+                  <a:pt x="881372" y="5943905"/>
+                </a:lnTo>
+                <a:close/>
+                <a:lnTo>
+                  <a:pt x="888100" y="5927025"/>
+                </a:lnTo>
+                <a:close/>
+                <a:lnTo>
+                  <a:pt x="894828" y="5910153"/>
+                </a:lnTo>
+                <a:close/>
+                <a:lnTo>
+                  <a:pt x="901556" y="5893896"/>
+                </a:lnTo>
+                <a:close/>
+                <a:lnTo>
+                  <a:pt x="908284" y="5875232"/>
+                </a:lnTo>
+                <a:close/>
+                <a:lnTo>
+                  <a:pt x="915012" y="5855014"/>
+                </a:lnTo>
+                <a:close/>
+                <a:lnTo>
+                  <a:pt x="921740" y="5838080"/>
+                </a:lnTo>
+                <a:close/>
+                <a:lnTo>
+                  <a:pt x="928468" y="5822193"/>
+                </a:lnTo>
+                <a:close/>
+                <a:lnTo>
+                  <a:pt x="935196" y="5803530"/>
+                </a:lnTo>
+                <a:close/>
+                <a:lnTo>
+                  <a:pt x="941924" y="5783331"/>
+                </a:lnTo>
+                <a:close/>
+                <a:lnTo>
+                  <a:pt x="948652" y="5766758"/>
+                </a:lnTo>
+                <a:close/>
+                <a:lnTo>
+                  <a:pt x="955380" y="5747552"/>
+                </a:lnTo>
+                <a:close/>
+                <a:lnTo>
+                  <a:pt x="962108" y="5728041"/>
+                </a:lnTo>
+                <a:close/>
+                <a:lnTo>
+                  <a:pt x="968836" y="5711555"/>
+                </a:lnTo>
+                <a:close/>
+                <a:lnTo>
+                  <a:pt x="975564" y="5691860"/>
+                </a:lnTo>
+                <a:close/>
+                <a:lnTo>
+                  <a:pt x="982292" y="5671203"/>
+                </a:lnTo>
+                <a:close/>
+                <a:lnTo>
+                  <a:pt x="989020" y="5651188"/>
+                </a:lnTo>
+                <a:close/>
+                <a:lnTo>
+                  <a:pt x="995748" y="5630985"/>
+                </a:lnTo>
+                <a:close/>
+                <a:lnTo>
+                  <a:pt x="1002476" y="5610774"/>
+                </a:lnTo>
+                <a:close/>
+                <a:lnTo>
+                  <a:pt x="1009204" y="5590639"/>
+                </a:lnTo>
+                <a:close/>
+                <a:lnTo>
+                  <a:pt x="1015932" y="5570397"/>
+                </a:lnTo>
+                <a:close/>
+                <a:lnTo>
+                  <a:pt x="1022660" y="5550140"/>
+                </a:lnTo>
+                <a:close/>
+                <a:lnTo>
+                  <a:pt x="1029388" y="5530581"/>
+                </a:lnTo>
+                <a:close/>
+                <a:lnTo>
+                  <a:pt x="1036116" y="5508498"/>
+                </a:lnTo>
+                <a:close/>
+                <a:lnTo>
+                  <a:pt x="1042844" y="5485032"/>
+                </a:lnTo>
+                <a:close/>
+                <a:lnTo>
+                  <a:pt x="1049572" y="5465159"/>
+                </a:lnTo>
+                <a:close/>
+                <a:lnTo>
+                  <a:pt x="1056300" y="5442383"/>
+                </a:lnTo>
+                <a:close/>
+                <a:lnTo>
+                  <a:pt x="1063028" y="5419709"/>
+                </a:lnTo>
+                <a:close/>
+                <a:lnTo>
+                  <a:pt x="1069756" y="5399821"/>
+                </a:lnTo>
+                <a:close/>
+                <a:lnTo>
+                  <a:pt x="1076484" y="5376596"/>
+                </a:lnTo>
+                <a:close/>
+                <a:lnTo>
+                  <a:pt x="1083212" y="5352620"/>
+                </a:lnTo>
+                <a:close/>
+                <a:lnTo>
+                  <a:pt x="1089940" y="5329239"/>
+                </a:lnTo>
+                <a:close/>
+                <a:lnTo>
+                  <a:pt x="1096668" y="5305665"/>
+                </a:lnTo>
+                <a:close/>
+                <a:lnTo>
+                  <a:pt x="1103396" y="5282109"/>
+                </a:lnTo>
+                <a:close/>
+                <a:lnTo>
+                  <a:pt x="1110124" y="5258559"/>
+                </a:lnTo>
+                <a:close/>
+                <a:lnTo>
+                  <a:pt x="1116852" y="5235026"/>
+                </a:lnTo>
+                <a:close/>
+                <a:lnTo>
+                  <a:pt x="1123580" y="5211490"/>
+                </a:lnTo>
+                <a:close/>
+                <a:lnTo>
+                  <a:pt x="1130308" y="5187781"/>
+                </a:lnTo>
+                <a:close/>
+                <a:lnTo>
+                  <a:pt x="1137037" y="5164735"/>
+                </a:lnTo>
+                <a:close/>
+                <a:lnTo>
+                  <a:pt x="1143765" y="5140533"/>
+                </a:lnTo>
+                <a:close/>
+                <a:lnTo>
+                  <a:pt x="1150493" y="5113293"/>
+                </a:lnTo>
+                <a:close/>
+                <a:lnTo>
+                  <a:pt x="1157221" y="5089112"/>
+                </a:lnTo>
+                <a:close/>
+                <a:lnTo>
+                  <a:pt x="1163949" y="5064774"/>
+                </a:lnTo>
+                <a:close/>
+                <a:lnTo>
+                  <a:pt x="1170677" y="5037345"/>
+                </a:lnTo>
+                <a:close/>
+                <a:lnTo>
+                  <a:pt x="1177405" y="5010390"/>
+                </a:lnTo>
+                <a:close/>
+                <a:lnTo>
+                  <a:pt x="1184133" y="4983567"/>
+                </a:lnTo>
+                <a:close/>
+                <a:lnTo>
+                  <a:pt x="1190861" y="4956636"/>
+                </a:lnTo>
+                <a:close/>
+                <a:lnTo>
+                  <a:pt x="1197589" y="4929722"/>
+                </a:lnTo>
+                <a:close/>
+                <a:lnTo>
+                  <a:pt x="1204317" y="4902682"/>
+                </a:lnTo>
+                <a:close/>
+                <a:lnTo>
+                  <a:pt x="1211045" y="4876308"/>
+                </a:lnTo>
+                <a:close/>
+                <a:lnTo>
+                  <a:pt x="1217773" y="4848337"/>
+                </a:lnTo>
+                <a:close/>
+                <a:lnTo>
+                  <a:pt x="1224501" y="4817797"/>
+                </a:lnTo>
+                <a:close/>
+                <a:lnTo>
+                  <a:pt x="1231229" y="4790134"/>
+                </a:lnTo>
+                <a:close/>
+                <a:lnTo>
+                  <a:pt x="1237957" y="4764102"/>
+                </a:lnTo>
+                <a:close/>
+                <a:lnTo>
+                  <a:pt x="1244685" y="4736410"/>
+                </a:lnTo>
+                <a:close/>
+                <a:lnTo>
+                  <a:pt x="1251413" y="4706029"/>
+                </a:lnTo>
+                <a:close/>
+                <a:lnTo>
+                  <a:pt x="1258141" y="4675584"/>
+                </a:lnTo>
+                <a:close/>
+                <a:lnTo>
+                  <a:pt x="1264869" y="4645400"/>
+                </a:lnTo>
+                <a:close/>
+                <a:lnTo>
+                  <a:pt x="1271597" y="4615107"/>
+                </a:lnTo>
+                <a:close/>
+                <a:lnTo>
+                  <a:pt x="1278325" y="4584857"/>
+                </a:lnTo>
+                <a:close/>
+                <a:lnTo>
+                  <a:pt x="1285053" y="4554420"/>
+                </a:lnTo>
+                <a:close/>
+                <a:lnTo>
+                  <a:pt x="1291781" y="4524558"/>
+                </a:lnTo>
+                <a:close/>
+                <a:lnTo>
+                  <a:pt x="1298509" y="4493980"/>
+                </a:lnTo>
+                <a:close/>
+                <a:lnTo>
+                  <a:pt x="1305237" y="4460080"/>
+                </a:lnTo>
+                <a:close/>
+                <a:lnTo>
+                  <a:pt x="1311965" y="4428759"/>
+                </a:lnTo>
+                <a:close/>
+                <a:lnTo>
+                  <a:pt x="1318693" y="4398056"/>
+                </a:lnTo>
+                <a:close/>
+                <a:lnTo>
+                  <a:pt x="1325421" y="4364026"/>
+                </a:lnTo>
+                <a:close/>
+                <a:lnTo>
+                  <a:pt x="1332149" y="4330253"/>
+                </a:lnTo>
+                <a:close/>
+                <a:lnTo>
+                  <a:pt x="1338877" y="4296741"/>
+                </a:lnTo>
+                <a:close/>
+                <a:lnTo>
+                  <a:pt x="1345605" y="4263051"/>
+                </a:lnTo>
+                <a:close/>
+                <a:lnTo>
+                  <a:pt x="1352333" y="4229414"/>
+                </a:lnTo>
+                <a:close/>
+                <a:lnTo>
+                  <a:pt x="1359061" y="4195820"/>
+                </a:lnTo>
+                <a:close/>
+                <a:lnTo>
+                  <a:pt x="1365789" y="4162038"/>
+                </a:lnTo>
+                <a:close/>
+                <a:lnTo>
+                  <a:pt x="1372517" y="4128595"/>
+                </a:lnTo>
+                <a:close/>
+                <a:lnTo>
+                  <a:pt x="1379245" y="4095230"/>
+                </a:lnTo>
+                <a:close/>
+                <a:lnTo>
+                  <a:pt x="1385974" y="4058444"/>
+                </a:lnTo>
+                <a:close/>
+                <a:lnTo>
+                  <a:pt x="1392702" y="4022770"/>
+                </a:lnTo>
+                <a:close/>
+                <a:lnTo>
+                  <a:pt x="1399430" y="3989293"/>
+                </a:lnTo>
+                <a:close/>
+                <a:lnTo>
+                  <a:pt x="1406158" y="3952391"/>
+                </a:lnTo>
+                <a:close/>
+                <a:lnTo>
+                  <a:pt x="1412886" y="3915036"/>
+                </a:lnTo>
+                <a:close/>
+                <a:lnTo>
+                  <a:pt x="1419614" y="3878186"/>
+                </a:lnTo>
+                <a:close/>
+                <a:lnTo>
+                  <a:pt x="1426342" y="3841153"/>
+                </a:lnTo>
+                <a:close/>
+                <a:lnTo>
+                  <a:pt x="1433070" y="3804176"/>
+                </a:lnTo>
+                <a:close/>
+                <a:lnTo>
+                  <a:pt x="1439798" y="3767032"/>
+                </a:lnTo>
+                <a:close/>
+                <a:lnTo>
+                  <a:pt x="1446526" y="3730323"/>
+                </a:lnTo>
+                <a:close/>
+                <a:lnTo>
+                  <a:pt x="1453254" y="3693313"/>
+                </a:lnTo>
+                <a:close/>
+                <a:lnTo>
+                  <a:pt x="1459982" y="3652991"/>
+                </a:lnTo>
+                <a:close/>
+                <a:lnTo>
+                  <a:pt x="1466710" y="3613989"/>
+                </a:lnTo>
+                <a:close/>
+                <a:lnTo>
+                  <a:pt x="1473438" y="3577725"/>
+                </a:lnTo>
+                <a:close/>
+                <a:lnTo>
+                  <a:pt x="1480166" y="3540788"/>
+                </a:lnTo>
+                <a:close/>
+                <a:lnTo>
+                  <a:pt x="1486894" y="3501167"/>
+                </a:lnTo>
+                <a:close/>
+                <a:lnTo>
+                  <a:pt x="1493622" y="3459958"/>
+                </a:lnTo>
+                <a:close/>
+                <a:lnTo>
+                  <a:pt x="1500350" y="3420298"/>
+                </a:lnTo>
+                <a:close/>
+                <a:lnTo>
+                  <a:pt x="1507078" y="3383555"/>
+                </a:lnTo>
+                <a:close/>
+                <a:lnTo>
+                  <a:pt x="1513806" y="3344281"/>
+                </a:lnTo>
+                <a:close/>
+                <a:lnTo>
+                  <a:pt x="1520534" y="3303367"/>
+                </a:lnTo>
+                <a:close/>
+                <a:lnTo>
+                  <a:pt x="1527262" y="3263128"/>
+                </a:lnTo>
+                <a:close/>
+                <a:lnTo>
+                  <a:pt x="1533990" y="3222774"/>
+                </a:lnTo>
+                <a:close/>
+                <a:lnTo>
+                  <a:pt x="1540718" y="3182370"/>
+                </a:lnTo>
+                <a:close/>
+                <a:lnTo>
+                  <a:pt x="1547446" y="3142037"/>
+                </a:lnTo>
+                <a:close/>
+                <a:lnTo>
+                  <a:pt x="1554174" y="3101657"/>
+                </a:lnTo>
+                <a:close/>
+                <a:lnTo>
+                  <a:pt x="1560902" y="3061158"/>
+                </a:lnTo>
+                <a:close/>
+                <a:lnTo>
+                  <a:pt x="1567630" y="3021326"/>
+                </a:lnTo>
+                <a:close/>
+                <a:lnTo>
+                  <a:pt x="1574358" y="2979920"/>
+                </a:lnTo>
+                <a:close/>
+                <a:lnTo>
+                  <a:pt x="1581086" y="2935923"/>
+                </a:lnTo>
+                <a:close/>
+                <a:lnTo>
+                  <a:pt x="1587814" y="2894750"/>
+                </a:lnTo>
+                <a:close/>
+                <a:lnTo>
+                  <a:pt x="1594542" y="2855395"/>
+                </a:lnTo>
+                <a:close/>
+                <a:lnTo>
+                  <a:pt x="1601270" y="2814059"/>
+                </a:lnTo>
+                <a:close/>
+                <a:lnTo>
+                  <a:pt x="1607998" y="2770014"/>
+                </a:lnTo>
+                <a:close/>
+                <a:lnTo>
+                  <a:pt x="1614726" y="2729153"/>
+                </a:lnTo>
+                <a:close/>
+                <a:lnTo>
+                  <a:pt x="1621454" y="2687937"/>
+                </a:lnTo>
+                <a:close/>
+                <a:lnTo>
+                  <a:pt x="1628182" y="2643515"/>
+                </a:lnTo>
+                <a:close/>
+                <a:lnTo>
+                  <a:pt x="1634911" y="2599422"/>
+                </a:lnTo>
+                <a:close/>
+                <a:lnTo>
+                  <a:pt x="1641639" y="2558637"/>
+                </a:lnTo>
+                <a:close/>
+                <a:lnTo>
+                  <a:pt x="1648367" y="2517433"/>
+                </a:lnTo>
+                <a:close/>
+                <a:lnTo>
+                  <a:pt x="1655095" y="2473251"/>
+                </a:lnTo>
+                <a:close/>
+                <a:lnTo>
+                  <a:pt x="1661823" y="2429454"/>
+                </a:lnTo>
+                <a:close/>
+                <a:lnTo>
+                  <a:pt x="1668551" y="2385822"/>
+                </a:lnTo>
+                <a:close/>
+                <a:lnTo>
+                  <a:pt x="1675279" y="2342049"/>
+                </a:lnTo>
+                <a:close/>
+                <a:lnTo>
+                  <a:pt x="1682007" y="2298323"/>
+                </a:lnTo>
+                <a:close/>
+                <a:lnTo>
+                  <a:pt x="1688735" y="2254597"/>
+                </a:lnTo>
+                <a:close/>
+                <a:lnTo>
+                  <a:pt x="1695463" y="2210851"/>
+                </a:lnTo>
+                <a:close/>
+                <a:lnTo>
+                  <a:pt x="1702191" y="2167139"/>
+                </a:lnTo>
+                <a:close/>
+                <a:lnTo>
+                  <a:pt x="1708919" y="2123416"/>
+                </a:lnTo>
+                <a:close/>
+                <a:lnTo>
+                  <a:pt x="1715647" y="2079521"/>
+                </a:lnTo>
+                <a:close/>
+                <a:lnTo>
+                  <a:pt x="1722375" y="2036315"/>
+                </a:lnTo>
+                <a:close/>
+                <a:lnTo>
+                  <a:pt x="1729103" y="1991849"/>
+                </a:lnTo>
+                <a:close/>
+                <a:lnTo>
+                  <a:pt x="1735831" y="1944402"/>
+                </a:lnTo>
+                <a:close/>
+                <a:lnTo>
+                  <a:pt x="1742559" y="1900271"/>
+                </a:lnTo>
+                <a:close/>
+                <a:lnTo>
+                  <a:pt x="1749287" y="1855221"/>
+                </a:lnTo>
+                <a:close/>
+                <a:lnTo>
+                  <a:pt x="1756015" y="1808045"/>
+                </a:lnTo>
+                <a:close/>
+                <a:lnTo>
+                  <a:pt x="1762743" y="1764604"/>
+                </a:lnTo>
+                <a:close/>
+                <a:lnTo>
+                  <a:pt x="1769471" y="1718354"/>
+                </a:lnTo>
+                <a:close/>
+                <a:lnTo>
+                  <a:pt x="1776199" y="1672056"/>
+                </a:lnTo>
+                <a:close/>
+                <a:lnTo>
+                  <a:pt x="1782927" y="1628645"/>
+                </a:lnTo>
+                <a:close/>
+                <a:lnTo>
+                  <a:pt x="1789655" y="1582030"/>
+                </a:lnTo>
+                <a:close/>
+                <a:lnTo>
+                  <a:pt x="1796383" y="1533940"/>
+                </a:lnTo>
+                <a:close/>
+                <a:lnTo>
+                  <a:pt x="1803111" y="1488155"/>
+                </a:lnTo>
+                <a:close/>
+                <a:lnTo>
+                  <a:pt x="1809839" y="1444655"/>
+                </a:lnTo>
+                <a:close/>
+                <a:lnTo>
+                  <a:pt x="1816567" y="1398121"/>
+                </a:lnTo>
+                <a:close/>
+                <a:lnTo>
+                  <a:pt x="1823295" y="1350568"/>
+                </a:lnTo>
+                <a:close/>
+                <a:lnTo>
+                  <a:pt x="1830023" y="1303622"/>
+                </a:lnTo>
+                <a:close/>
+                <a:lnTo>
+                  <a:pt x="1836751" y="1256513"/>
+                </a:lnTo>
+                <a:close/>
+                <a:lnTo>
+                  <a:pt x="1843479" y="1209401"/>
+                </a:lnTo>
+                <a:close/>
+                <a:lnTo>
+                  <a:pt x="1850207" y="1162317"/>
+                </a:lnTo>
+                <a:close/>
+                <a:lnTo>
+                  <a:pt x="1856935" y="1115215"/>
+                </a:lnTo>
+                <a:close/>
+                <a:lnTo>
+                  <a:pt x="1863663" y="1068113"/>
+                </a:lnTo>
+                <a:close/>
+                <a:lnTo>
+                  <a:pt x="1870391" y="1021059"/>
+                </a:lnTo>
+                <a:close/>
+                <a:lnTo>
+                  <a:pt x="1877119" y="973852"/>
+                </a:lnTo>
+                <a:close/>
+                <a:lnTo>
+                  <a:pt x="1883847" y="926848"/>
+                </a:lnTo>
+                <a:close/>
+                <a:lnTo>
+                  <a:pt x="1890576" y="880177"/>
+                </a:lnTo>
+                <a:close/>
+                <a:lnTo>
+                  <a:pt x="1897304" y="830389"/>
+                </a:lnTo>
+                <a:close/>
+                <a:lnTo>
+                  <a:pt x="1904032" y="780564"/>
+                </a:lnTo>
+                <a:close/>
+                <a:lnTo>
+                  <a:pt x="1910760" y="733852"/>
+                </a:lnTo>
+                <a:close/>
+                <a:lnTo>
+                  <a:pt x="1917488" y="686721"/>
+                </a:lnTo>
+                <a:close/>
+                <a:lnTo>
+                  <a:pt x="1924216" y="640097"/>
+                </a:lnTo>
+                <a:close/>
+                <a:lnTo>
+                  <a:pt x="1930944" y="591923"/>
+                </a:lnTo>
+                <a:close/>
+                <a:lnTo>
+                  <a:pt x="1937672" y="541166"/>
+                </a:lnTo>
+                <a:close/>
+                <a:lnTo>
+                  <a:pt x="1944400" y="493996"/>
+                </a:lnTo>
+                <a:close/>
+                <a:lnTo>
+                  <a:pt x="1951128" y="445122"/>
+                </a:lnTo>
+                <a:close/>
+                <a:lnTo>
+                  <a:pt x="1957856" y="394879"/>
+                </a:lnTo>
+                <a:close/>
+                <a:lnTo>
+                  <a:pt x="1964584" y="348159"/>
+                </a:lnTo>
+                <a:close/>
+                <a:lnTo>
+                  <a:pt x="1971312" y="298133"/>
+                </a:lnTo>
+                <a:close/>
+                <a:lnTo>
+                  <a:pt x="1978040" y="248925"/>
+                </a:lnTo>
+                <a:close/>
+                <a:lnTo>
+                  <a:pt x="1984768" y="202002"/>
+                </a:lnTo>
+                <a:close/>
+                <a:lnTo>
+                  <a:pt x="1991496" y="151604"/>
+                </a:lnTo>
+                <a:close/>
+                <a:lnTo>
+                  <a:pt x="1998224" y="100756"/>
+                </a:lnTo>
+                <a:close/>
+                <a:lnTo>
+                  <a:pt x="2004952" y="50570"/>
+                </a:lnTo>
+                <a:close/>
+                <a:lnTo>
+                  <a:pt x="2011680" y="0"/>
                 </a:lnTo>
                 <a:close/>
               </a:path>
@@ -4389,7 +4389,7 @@
           </a:custGeom>
           <a:ln w="31750">
             <a:solidFill>
-              <a:srgbClr val="00E5FF"/>
+              <a:srgbClr val="FFFFFF"/>
             </a:solidFill>
           </a:ln>
         </p:spPr>
@@ -4423,8 +4423,8 @@
         </p:nvCxnSpPr>
         <p:spPr>
           <a:xfrm flipV="1">
-            <a:off x="5943600.0" y="834390.0"/>
-            <a:ext cx="0.0" cy="1737360.0"/>
+            <a:off x="6400800.0" y="514350.0"/>
+            <a:ext cx="0.0" cy="2057400.0"/>
           </a:xfrm>
           <a:prstGeom prst="line">
             <a:avLst/>
@@ -4459,8 +4459,8 @@
         </p:nvCxnSpPr>
         <p:spPr>
           <a:xfrm>
-            <a:off x="4572000.0" y="834390.0"/>
-            <a:ext cx="1371600.0" cy="0.0"/>
+            <a:off x="4572000.0" y="514350.0"/>
+            <a:ext cx="1828800.0" cy="0.0"/>
           </a:xfrm>
           <a:prstGeom prst="line">
             <a:avLst/>
@@ -4495,7 +4495,7 @@
         </p:nvSpPr>
         <p:spPr>
           <a:xfrm>
-            <a:off x="5892800" y="783590"/>
+            <a:off x="6350000" y="463550"/>
             <a:ext cx="101600" cy="101600"/>
           </a:xfrm>
           <a:prstGeom prst="ellipse">
@@ -4540,8 +4540,8 @@
         </p:nvCxnSpPr>
         <p:spPr>
           <a:xfrm>
-            <a:off x="5486400.0" y="2571750.0"/>
-            <a:ext cx="411480.0" cy="0.0"/>
+            <a:off x="5715000.0" y="2571750.0"/>
+            <a:ext cx="594360.0" cy="0.0"/>
           </a:xfrm>
           <a:prstGeom prst="line">
             <a:avLst/>
@@ -4575,8 +4575,8 @@
         </p:nvCxnSpPr>
         <p:spPr>
           <a:xfrm flipH="1">
-            <a:off x="5989320.0" y="2571750.0"/>
-            <a:ext cx="365760.0" cy="0.0"/>
+            <a:off x="6492240.0" y="2571750.0"/>
+            <a:ext cx="594360.0" cy="0.0"/>
           </a:xfrm>
           <a:prstGeom prst="line">
             <a:avLst/>
@@ -4610,8 +4610,8 @@
         </p:nvSpPr>
         <p:spPr>
           <a:xfrm>
-            <a:off x="5394960" y="1227582"/>
-            <a:ext cx="544068" cy="544068"/>
+            <a:off x="5715000" y="-966978"/>
+            <a:ext cx="640080" cy="2295144"/>
           </a:xfrm>
           <a:custGeom>
             <a:avLst/>
@@ -4620,404 +4620,404 @@
             <a:cxnLst/>
             <a:rect l="l" t="t" r="r" b="b"/>
             <a:pathLst>
-              <a:path w="544068" h="544068">
+              <a:path w="640080" h="2295144">
                 <a:moveTo>
-                  <a:pt x="0" y="544068"/>
+                  <a:pt x="0" y="2295144"/>
                 </a:moveTo>
                 <a:lnTo>
-                  <a:pt x="5496" y="538572"/>
-                </a:lnTo>
-                <a:close/>
-                <a:lnTo>
-                  <a:pt x="10991" y="533077"/>
-                </a:lnTo>
-                <a:close/>
-                <a:lnTo>
-                  <a:pt x="16487" y="527581"/>
-                </a:lnTo>
-                <a:close/>
-                <a:lnTo>
-                  <a:pt x="21983" y="522085"/>
-                </a:lnTo>
-                <a:close/>
-                <a:lnTo>
-                  <a:pt x="27478" y="516590"/>
-                </a:lnTo>
-                <a:close/>
-                <a:lnTo>
-                  <a:pt x="32974" y="511094"/>
-                </a:lnTo>
-                <a:close/>
-                <a:lnTo>
-                  <a:pt x="38469" y="505599"/>
-                </a:lnTo>
-                <a:close/>
-                <a:lnTo>
-                  <a:pt x="43965" y="500103"/>
-                </a:lnTo>
-                <a:close/>
-                <a:lnTo>
-                  <a:pt x="49461" y="494607"/>
-                </a:lnTo>
-                <a:close/>
-                <a:lnTo>
-                  <a:pt x="54956" y="489112"/>
-                </a:lnTo>
-                <a:close/>
-                <a:lnTo>
-                  <a:pt x="60452" y="483616"/>
-                </a:lnTo>
-                <a:close/>
-                <a:lnTo>
-                  <a:pt x="65948" y="478120"/>
-                </a:lnTo>
-                <a:close/>
-                <a:lnTo>
-                  <a:pt x="71443" y="472625"/>
-                </a:lnTo>
-                <a:close/>
-                <a:lnTo>
-                  <a:pt x="76939" y="467129"/>
-                </a:lnTo>
-                <a:close/>
-                <a:lnTo>
-                  <a:pt x="82435" y="461633"/>
-                </a:lnTo>
-                <a:close/>
-                <a:lnTo>
-                  <a:pt x="87930" y="456138"/>
-                </a:lnTo>
-                <a:close/>
-                <a:lnTo>
-                  <a:pt x="93426" y="450642"/>
-                </a:lnTo>
-                <a:close/>
-                <a:lnTo>
-                  <a:pt x="98921" y="445147"/>
-                </a:lnTo>
-                <a:close/>
-                <a:lnTo>
-                  <a:pt x="104417" y="439651"/>
-                </a:lnTo>
-                <a:close/>
-                <a:lnTo>
-                  <a:pt x="109913" y="434155"/>
-                </a:lnTo>
-                <a:close/>
-                <a:lnTo>
-                  <a:pt x="115408" y="428660"/>
-                </a:lnTo>
-                <a:close/>
-                <a:lnTo>
-                  <a:pt x="120904" y="423164"/>
-                </a:lnTo>
-                <a:close/>
-                <a:lnTo>
-                  <a:pt x="126400" y="417668"/>
-                </a:lnTo>
-                <a:close/>
-                <a:lnTo>
-                  <a:pt x="131895" y="412173"/>
-                </a:lnTo>
-                <a:close/>
-                <a:lnTo>
-                  <a:pt x="137391" y="406677"/>
-                </a:lnTo>
-                <a:close/>
-                <a:lnTo>
-                  <a:pt x="142887" y="401181"/>
-                </a:lnTo>
-                <a:close/>
-                <a:lnTo>
-                  <a:pt x="148382" y="395686"/>
-                </a:lnTo>
-                <a:close/>
-                <a:lnTo>
-                  <a:pt x="153878" y="390190"/>
-                </a:lnTo>
-                <a:close/>
-                <a:lnTo>
-                  <a:pt x="159373" y="384695"/>
-                </a:lnTo>
-                <a:close/>
-                <a:lnTo>
-                  <a:pt x="164869" y="379199"/>
-                </a:lnTo>
-                <a:close/>
-                <a:lnTo>
-                  <a:pt x="170365" y="373703"/>
-                </a:lnTo>
-                <a:close/>
-                <a:lnTo>
-                  <a:pt x="175860" y="368208"/>
-                </a:lnTo>
-                <a:close/>
-                <a:lnTo>
-                  <a:pt x="181356" y="362712"/>
-                </a:lnTo>
-                <a:close/>
-                <a:lnTo>
-                  <a:pt x="186852" y="357216"/>
-                </a:lnTo>
-                <a:close/>
-                <a:lnTo>
-                  <a:pt x="192347" y="351721"/>
-                </a:lnTo>
-                <a:close/>
-                <a:lnTo>
-                  <a:pt x="197843" y="346225"/>
-                </a:lnTo>
-                <a:close/>
-                <a:lnTo>
-                  <a:pt x="203339" y="340729"/>
-                </a:lnTo>
-                <a:close/>
-                <a:lnTo>
-                  <a:pt x="208834" y="335234"/>
-                </a:lnTo>
-                <a:close/>
-                <a:lnTo>
-                  <a:pt x="214330" y="329738"/>
-                </a:lnTo>
-                <a:close/>
-                <a:lnTo>
-                  <a:pt x="219825" y="324243"/>
-                </a:lnTo>
-                <a:close/>
-                <a:lnTo>
-                  <a:pt x="225321" y="318747"/>
-                </a:lnTo>
-                <a:close/>
-                <a:lnTo>
-                  <a:pt x="230817" y="313251"/>
-                </a:lnTo>
-                <a:close/>
-                <a:lnTo>
-                  <a:pt x="236312" y="307756"/>
-                </a:lnTo>
-                <a:close/>
-                <a:lnTo>
-                  <a:pt x="241808" y="302260"/>
-                </a:lnTo>
-                <a:close/>
-                <a:lnTo>
-                  <a:pt x="247304" y="296764"/>
-                </a:lnTo>
-                <a:close/>
-                <a:lnTo>
-                  <a:pt x="252799" y="291269"/>
-                </a:lnTo>
-                <a:close/>
-                <a:lnTo>
-                  <a:pt x="258295" y="285773"/>
-                </a:lnTo>
-                <a:close/>
-                <a:lnTo>
-                  <a:pt x="263791" y="280277"/>
-                </a:lnTo>
-                <a:close/>
-                <a:lnTo>
-                  <a:pt x="269286" y="274782"/>
-                </a:lnTo>
-                <a:close/>
-                <a:lnTo>
-                  <a:pt x="274782" y="269286"/>
-                </a:lnTo>
-                <a:close/>
-                <a:lnTo>
-                  <a:pt x="280277" y="263791"/>
-                </a:lnTo>
-                <a:close/>
-                <a:lnTo>
-                  <a:pt x="285773" y="258295"/>
-                </a:lnTo>
-                <a:close/>
-                <a:lnTo>
-                  <a:pt x="291269" y="252799"/>
-                </a:lnTo>
-                <a:close/>
-                <a:lnTo>
-                  <a:pt x="296764" y="247304"/>
-                </a:lnTo>
-                <a:close/>
-                <a:lnTo>
-                  <a:pt x="302260" y="241808"/>
-                </a:lnTo>
-                <a:close/>
-                <a:lnTo>
-                  <a:pt x="307756" y="236312"/>
-                </a:lnTo>
-                <a:close/>
-                <a:lnTo>
-                  <a:pt x="313251" y="230817"/>
-                </a:lnTo>
-                <a:close/>
-                <a:lnTo>
-                  <a:pt x="318747" y="225321"/>
-                </a:lnTo>
-                <a:close/>
-                <a:lnTo>
-                  <a:pt x="324243" y="219825"/>
-                </a:lnTo>
-                <a:close/>
-                <a:lnTo>
-                  <a:pt x="329738" y="214330"/>
-                </a:lnTo>
-                <a:close/>
-                <a:lnTo>
-                  <a:pt x="335234" y="208834"/>
-                </a:lnTo>
-                <a:close/>
-                <a:lnTo>
-                  <a:pt x="340729" y="203339"/>
-                </a:lnTo>
-                <a:close/>
-                <a:lnTo>
-                  <a:pt x="346225" y="197843"/>
-                </a:lnTo>
-                <a:close/>
-                <a:lnTo>
-                  <a:pt x="351721" y="192347"/>
-                </a:lnTo>
-                <a:close/>
-                <a:lnTo>
-                  <a:pt x="357216" y="186852"/>
-                </a:lnTo>
-                <a:close/>
-                <a:lnTo>
-                  <a:pt x="362712" y="181356"/>
-                </a:lnTo>
-                <a:close/>
-                <a:lnTo>
-                  <a:pt x="368208" y="175860"/>
-                </a:lnTo>
-                <a:close/>
-                <a:lnTo>
-                  <a:pt x="373703" y="170365"/>
-                </a:lnTo>
-                <a:close/>
-                <a:lnTo>
-                  <a:pt x="379199" y="164869"/>
-                </a:lnTo>
-                <a:close/>
-                <a:lnTo>
-                  <a:pt x="384695" y="159373"/>
-                </a:lnTo>
-                <a:close/>
-                <a:lnTo>
-                  <a:pt x="390190" y="153878"/>
-                </a:lnTo>
-                <a:close/>
-                <a:lnTo>
-                  <a:pt x="395686" y="148382"/>
-                </a:lnTo>
-                <a:close/>
-                <a:lnTo>
-                  <a:pt x="401181" y="142887"/>
-                </a:lnTo>
-                <a:close/>
-                <a:lnTo>
-                  <a:pt x="406677" y="137391"/>
-                </a:lnTo>
-                <a:close/>
-                <a:lnTo>
-                  <a:pt x="412173" y="131895"/>
-                </a:lnTo>
-                <a:close/>
-                <a:lnTo>
-                  <a:pt x="417668" y="126400"/>
-                </a:lnTo>
-                <a:close/>
-                <a:lnTo>
-                  <a:pt x="423164" y="120904"/>
-                </a:lnTo>
-                <a:close/>
-                <a:lnTo>
-                  <a:pt x="428660" y="115408"/>
-                </a:lnTo>
-                <a:close/>
-                <a:lnTo>
-                  <a:pt x="434155" y="109913"/>
-                </a:lnTo>
-                <a:close/>
-                <a:lnTo>
-                  <a:pt x="439651" y="104417"/>
-                </a:lnTo>
-                <a:close/>
-                <a:lnTo>
-                  <a:pt x="445147" y="98921"/>
-                </a:lnTo>
-                <a:close/>
-                <a:lnTo>
-                  <a:pt x="450642" y="93426"/>
-                </a:lnTo>
-                <a:close/>
-                <a:lnTo>
-                  <a:pt x="456138" y="87930"/>
-                </a:lnTo>
-                <a:close/>
-                <a:lnTo>
-                  <a:pt x="461633" y="82435"/>
-                </a:lnTo>
-                <a:close/>
-                <a:lnTo>
-                  <a:pt x="467129" y="76939"/>
-                </a:lnTo>
-                <a:close/>
-                <a:lnTo>
-                  <a:pt x="472625" y="71443"/>
-                </a:lnTo>
-                <a:close/>
-                <a:lnTo>
-                  <a:pt x="478120" y="65948"/>
-                </a:lnTo>
-                <a:close/>
-                <a:lnTo>
-                  <a:pt x="483616" y="60452"/>
-                </a:lnTo>
-                <a:close/>
-                <a:lnTo>
-                  <a:pt x="489112" y="54956"/>
-                </a:lnTo>
-                <a:close/>
-                <a:lnTo>
-                  <a:pt x="494607" y="49461"/>
-                </a:lnTo>
-                <a:close/>
-                <a:lnTo>
-                  <a:pt x="500103" y="43965"/>
-                </a:lnTo>
-                <a:close/>
-                <a:lnTo>
-                  <a:pt x="505599" y="38469"/>
-                </a:lnTo>
-                <a:close/>
-                <a:lnTo>
-                  <a:pt x="511094" y="32974"/>
-                </a:lnTo>
-                <a:close/>
-                <a:lnTo>
-                  <a:pt x="516590" y="27478"/>
-                </a:lnTo>
-                <a:close/>
-                <a:lnTo>
-                  <a:pt x="522085" y="21983"/>
-                </a:lnTo>
-                <a:close/>
-                <a:lnTo>
-                  <a:pt x="527581" y="16487"/>
-                </a:lnTo>
-                <a:close/>
-                <a:lnTo>
-                  <a:pt x="533077" y="10991"/>
-                </a:lnTo>
-                <a:close/>
-                <a:lnTo>
-                  <a:pt x="538572" y="5496"/>
-                </a:lnTo>
-                <a:close/>
-                <a:lnTo>
-                  <a:pt x="544068" y="0"/>
+                  <a:pt x="6465" y="2280460"/>
+                </a:lnTo>
+                <a:close/>
+                <a:lnTo>
+                  <a:pt x="12931" y="2266230"/>
+                </a:lnTo>
+                <a:close/>
+                <a:lnTo>
+                  <a:pt x="19396" y="2252276"/>
+                </a:lnTo>
+                <a:close/>
+                <a:lnTo>
+                  <a:pt x="25862" y="2238419"/>
+                </a:lnTo>
+                <a:close/>
+                <a:lnTo>
+                  <a:pt x="32327" y="2224478"/>
+                </a:lnTo>
+                <a:close/>
+                <a:lnTo>
+                  <a:pt x="38793" y="2210274"/>
+                </a:lnTo>
+                <a:close/>
+                <a:lnTo>
+                  <a:pt x="45258" y="2195628"/>
+                </a:lnTo>
+                <a:close/>
+                <a:lnTo>
+                  <a:pt x="51724" y="2180421"/>
+                </a:lnTo>
+                <a:close/>
+                <a:lnTo>
+                  <a:pt x="58189" y="2164836"/>
+                </a:lnTo>
+                <a:close/>
+                <a:lnTo>
+                  <a:pt x="64655" y="2149151"/>
+                </a:lnTo>
+                <a:close/>
+                <a:lnTo>
+                  <a:pt x="71120" y="2133636"/>
+                </a:lnTo>
+                <a:close/>
+                <a:lnTo>
+                  <a:pt x="77585" y="2118322"/>
+                </a:lnTo>
+                <a:close/>
+                <a:lnTo>
+                  <a:pt x="84051" y="2102925"/>
+                </a:lnTo>
+                <a:close/>
+                <a:lnTo>
+                  <a:pt x="90516" y="2087137"/>
+                </a:lnTo>
+                <a:close/>
+                <a:lnTo>
+                  <a:pt x="96982" y="2070720"/>
+                </a:lnTo>
+                <a:close/>
+                <a:lnTo>
+                  <a:pt x="103447" y="2053844"/>
+                </a:lnTo>
+                <a:close/>
+                <a:lnTo>
+                  <a:pt x="109913" y="2036840"/>
+                </a:lnTo>
+                <a:close/>
+                <a:lnTo>
+                  <a:pt x="116378" y="2020033"/>
+                </a:lnTo>
+                <a:close/>
+                <a:lnTo>
+                  <a:pt x="122844" y="2003487"/>
+                </a:lnTo>
+                <a:close/>
+                <a:lnTo>
+                  <a:pt x="129309" y="1986849"/>
+                </a:lnTo>
+                <a:close/>
+                <a:lnTo>
+                  <a:pt x="135775" y="1969729"/>
+                </a:lnTo>
+                <a:close/>
+                <a:lnTo>
+                  <a:pt x="142240" y="1951816"/>
+                </a:lnTo>
+                <a:close/>
+                <a:lnTo>
+                  <a:pt x="148705" y="1933430"/>
+                </a:lnTo>
+                <a:close/>
+                <a:lnTo>
+                  <a:pt x="155171" y="1915180"/>
+                </a:lnTo>
+                <a:close/>
+                <a:lnTo>
+                  <a:pt x="161636" y="1897677"/>
+                </a:lnTo>
+                <a:close/>
+                <a:lnTo>
+                  <a:pt x="168102" y="1881078"/>
+                </a:lnTo>
+                <a:close/>
+                <a:lnTo>
+                  <a:pt x="174567" y="1864665"/>
+                </a:lnTo>
+                <a:close/>
+                <a:lnTo>
+                  <a:pt x="181033" y="1847618"/>
+                </a:lnTo>
+                <a:close/>
+                <a:lnTo>
+                  <a:pt x="187498" y="1829216"/>
+                </a:lnTo>
+                <a:close/>
+                <a:lnTo>
+                  <a:pt x="193964" y="1809708"/>
+                </a:lnTo>
+                <a:close/>
+                <a:lnTo>
+                  <a:pt x="200429" y="1789887"/>
+                </a:lnTo>
+                <a:close/>
+                <a:lnTo>
+                  <a:pt x="206895" y="1770554"/>
+                </a:lnTo>
+                <a:close/>
+                <a:lnTo>
+                  <a:pt x="213360" y="1752153"/>
+                </a:lnTo>
+                <a:close/>
+                <a:lnTo>
+                  <a:pt x="219825" y="1734281"/>
+                </a:lnTo>
+                <a:close/>
+                <a:lnTo>
+                  <a:pt x="226291" y="1716410"/>
+                </a:lnTo>
+                <a:close/>
+                <a:lnTo>
+                  <a:pt x="232756" y="1698042"/>
+                </a:lnTo>
+                <a:close/>
+                <a:lnTo>
+                  <a:pt x="239222" y="1679005"/>
+                </a:lnTo>
+                <a:close/>
+                <a:lnTo>
+                  <a:pt x="245687" y="1659357"/>
+                </a:lnTo>
+                <a:close/>
+                <a:lnTo>
+                  <a:pt x="252153" y="1639160"/>
+                </a:lnTo>
+                <a:close/>
+                <a:lnTo>
+                  <a:pt x="258618" y="1618523"/>
+                </a:lnTo>
+                <a:close/>
+                <a:lnTo>
+                  <a:pt x="265084" y="1597702"/>
+                </a:lnTo>
+                <a:close/>
+                <a:lnTo>
+                  <a:pt x="271549" y="1576978"/>
+                </a:lnTo>
+                <a:close/>
+                <a:lnTo>
+                  <a:pt x="278015" y="1556607"/>
+                </a:lnTo>
+                <a:close/>
+                <a:lnTo>
+                  <a:pt x="284480" y="1536400"/>
+                </a:lnTo>
+                <a:close/>
+                <a:lnTo>
+                  <a:pt x="290945" y="1515804"/>
+                </a:lnTo>
+                <a:close/>
+                <a:lnTo>
+                  <a:pt x="297411" y="1494251"/>
+                </a:lnTo>
+                <a:close/>
+                <a:lnTo>
+                  <a:pt x="303876" y="1471419"/>
+                </a:lnTo>
+                <a:close/>
+                <a:lnTo>
+                  <a:pt x="310342" y="1447853"/>
+                </a:lnTo>
+                <a:close/>
+                <a:lnTo>
+                  <a:pt x="316807" y="1424294"/>
+                </a:lnTo>
+                <a:close/>
+                <a:lnTo>
+                  <a:pt x="323273" y="1401455"/>
+                </a:lnTo>
+                <a:close/>
+                <a:lnTo>
+                  <a:pt x="329738" y="1379440"/>
+                </a:lnTo>
+                <a:close/>
+                <a:lnTo>
+                  <a:pt x="336204" y="1357739"/>
+                </a:lnTo>
+                <a:close/>
+                <a:lnTo>
+                  <a:pt x="342669" y="1335818"/>
+                </a:lnTo>
+                <a:close/>
+                <a:lnTo>
+                  <a:pt x="349135" y="1313244"/>
+                </a:lnTo>
+                <a:close/>
+                <a:lnTo>
+                  <a:pt x="355600" y="1290048"/>
+                </a:lnTo>
+                <a:close/>
+                <a:lnTo>
+                  <a:pt x="362065" y="1266392"/>
+                </a:lnTo>
+                <a:close/>
+                <a:lnTo>
+                  <a:pt x="368531" y="1242430"/>
+                </a:lnTo>
+                <a:close/>
+                <a:lnTo>
+                  <a:pt x="374996" y="1218206"/>
+                </a:lnTo>
+                <a:close/>
+                <a:lnTo>
+                  <a:pt x="381462" y="1193623"/>
+                </a:lnTo>
+                <a:close/>
+                <a:lnTo>
+                  <a:pt x="387927" y="1168576"/>
+                </a:lnTo>
+                <a:close/>
+                <a:lnTo>
+                  <a:pt x="394393" y="1143002"/>
+                </a:lnTo>
+                <a:close/>
+                <a:lnTo>
+                  <a:pt x="400858" y="1117080"/>
+                </a:lnTo>
+                <a:close/>
+                <a:lnTo>
+                  <a:pt x="407324" y="1091069"/>
+                </a:lnTo>
+                <a:close/>
+                <a:lnTo>
+                  <a:pt x="413789" y="1065222"/>
+                </a:lnTo>
+                <a:close/>
+                <a:lnTo>
+                  <a:pt x="420255" y="1039575"/>
+                </a:lnTo>
+                <a:close/>
+                <a:lnTo>
+                  <a:pt x="426720" y="1013842"/>
+                </a:lnTo>
+                <a:close/>
+                <a:lnTo>
+                  <a:pt x="433185" y="987712"/>
+                </a:lnTo>
+                <a:close/>
+                <a:lnTo>
+                  <a:pt x="439651" y="960935"/>
+                </a:lnTo>
+                <a:close/>
+                <a:lnTo>
+                  <a:pt x="446116" y="933694"/>
+                </a:lnTo>
+                <a:close/>
+                <a:lnTo>
+                  <a:pt x="452582" y="906354"/>
+                </a:lnTo>
+                <a:close/>
+                <a:lnTo>
+                  <a:pt x="459047" y="879278"/>
+                </a:lnTo>
+                <a:close/>
+                <a:lnTo>
+                  <a:pt x="465513" y="852523"/>
+                </a:lnTo>
+                <a:close/>
+                <a:lnTo>
+                  <a:pt x="471978" y="825615"/>
+                </a:lnTo>
+                <a:close/>
+                <a:lnTo>
+                  <a:pt x="478444" y="798023"/>
+                </a:lnTo>
+                <a:close/>
+                <a:lnTo>
+                  <a:pt x="484909" y="769290"/>
+                </a:lnTo>
+                <a:close/>
+                <a:lnTo>
+                  <a:pt x="491375" y="739599"/>
+                </a:lnTo>
+                <a:close/>
+                <a:lnTo>
+                  <a:pt x="497840" y="709460"/>
+                </a:lnTo>
+                <a:close/>
+                <a:lnTo>
+                  <a:pt x="504305" y="679386"/>
+                </a:lnTo>
+                <a:close/>
+                <a:lnTo>
+                  <a:pt x="510771" y="649657"/>
+                </a:lnTo>
+                <a:close/>
+                <a:lnTo>
+                  <a:pt x="517236" y="620053"/>
+                </a:lnTo>
+                <a:close/>
+                <a:lnTo>
+                  <a:pt x="523702" y="590291"/>
+                </a:lnTo>
+                <a:close/>
+                <a:lnTo>
+                  <a:pt x="530167" y="560101"/>
+                </a:lnTo>
+                <a:close/>
+                <a:lnTo>
+                  <a:pt x="536633" y="529380"/>
+                </a:lnTo>
+                <a:close/>
+                <a:lnTo>
+                  <a:pt x="543098" y="498127"/>
+                </a:lnTo>
+                <a:close/>
+                <a:lnTo>
+                  <a:pt x="549564" y="466343"/>
+                </a:lnTo>
+                <a:close/>
+                <a:lnTo>
+                  <a:pt x="556029" y="434099"/>
+                </a:lnTo>
+                <a:close/>
+                <a:lnTo>
+                  <a:pt x="562495" y="401645"/>
+                </a:lnTo>
+                <a:close/>
+                <a:lnTo>
+                  <a:pt x="568960" y="369259"/>
+                </a:lnTo>
+                <a:close/>
+                <a:lnTo>
+                  <a:pt x="575425" y="337193"/>
+                </a:lnTo>
+                <a:close/>
+                <a:lnTo>
+                  <a:pt x="581891" y="305275"/>
+                </a:lnTo>
+                <a:close/>
+                <a:lnTo>
+                  <a:pt x="588356" y="273014"/>
+                </a:lnTo>
+                <a:close/>
+                <a:lnTo>
+                  <a:pt x="594822" y="239913"/>
+                </a:lnTo>
+                <a:close/>
+                <a:lnTo>
+                  <a:pt x="601287" y="205672"/>
+                </a:lnTo>
+                <a:close/>
+                <a:lnTo>
+                  <a:pt x="607753" y="170634"/>
+                </a:lnTo>
+                <a:close/>
+                <a:lnTo>
+                  <a:pt x="614218" y="135270"/>
+                </a:lnTo>
+                <a:close/>
+                <a:lnTo>
+                  <a:pt x="620684" y="100052"/>
+                </a:lnTo>
+                <a:close/>
+                <a:lnTo>
+                  <a:pt x="627149" y="65454"/>
+                </a:lnTo>
+                <a:close/>
+                <a:lnTo>
+                  <a:pt x="633615" y="31946"/>
+                </a:lnTo>
+                <a:close/>
+                <a:lnTo>
+                  <a:pt x="640080" y="0"/>
                 </a:lnTo>
                 <a:close/>
               </a:path>
@@ -5059,8 +5059,8 @@
         </p:nvSpPr>
         <p:spPr>
           <a:xfrm>
-            <a:off x="5948172" y="1040130"/>
-            <a:ext cx="178308" cy="178308"/>
+            <a:off x="6446520" y="-4190238"/>
+            <a:ext cx="411480" cy="2706624"/>
           </a:xfrm>
           <a:custGeom>
             <a:avLst/>
@@ -5069,404 +5069,404 @@
             <a:cxnLst/>
             <a:rect l="l" t="t" r="r" b="b"/>
             <a:pathLst>
-              <a:path w="178308" h="178308">
+              <a:path w="411480" h="2706624">
                 <a:moveTo>
-                  <a:pt x="178308" y="0"/>
+                  <a:pt x="411480" y="0"/>
                 </a:moveTo>
                 <a:lnTo>
-                  <a:pt x="176507" y="1801"/>
-                </a:lnTo>
-                <a:close/>
-                <a:lnTo>
-                  <a:pt x="174706" y="3602"/>
-                </a:lnTo>
-                <a:close/>
-                <a:lnTo>
-                  <a:pt x="172905" y="5403"/>
-                </a:lnTo>
-                <a:close/>
-                <a:lnTo>
-                  <a:pt x="171104" y="7204"/>
-                </a:lnTo>
-                <a:close/>
-                <a:lnTo>
-                  <a:pt x="169303" y="9005"/>
-                </a:lnTo>
-                <a:close/>
-                <a:lnTo>
-                  <a:pt x="167501" y="10807"/>
-                </a:lnTo>
-                <a:close/>
-                <a:lnTo>
-                  <a:pt x="165700" y="12608"/>
-                </a:lnTo>
-                <a:close/>
-                <a:lnTo>
-                  <a:pt x="163899" y="14409"/>
-                </a:lnTo>
-                <a:close/>
-                <a:lnTo>
-                  <a:pt x="162098" y="16210"/>
-                </a:lnTo>
-                <a:close/>
-                <a:lnTo>
-                  <a:pt x="160297" y="18011"/>
-                </a:lnTo>
-                <a:close/>
-                <a:lnTo>
-                  <a:pt x="158496" y="19812"/>
-                </a:lnTo>
-                <a:close/>
-                <a:lnTo>
-                  <a:pt x="156695" y="21613"/>
-                </a:lnTo>
-                <a:close/>
-                <a:lnTo>
-                  <a:pt x="154894" y="23414"/>
-                </a:lnTo>
-                <a:close/>
-                <a:lnTo>
-                  <a:pt x="153093" y="25215"/>
-                </a:lnTo>
-                <a:close/>
-                <a:lnTo>
-                  <a:pt x="151292" y="27016"/>
-                </a:lnTo>
-                <a:close/>
-                <a:lnTo>
-                  <a:pt x="149491" y="28817"/>
-                </a:lnTo>
-                <a:close/>
-                <a:lnTo>
-                  <a:pt x="147689" y="30619"/>
-                </a:lnTo>
-                <a:close/>
-                <a:lnTo>
-                  <a:pt x="145888" y="32420"/>
-                </a:lnTo>
-                <a:close/>
-                <a:lnTo>
-                  <a:pt x="144087" y="34221"/>
-                </a:lnTo>
-                <a:close/>
-                <a:lnTo>
-                  <a:pt x="142286" y="36022"/>
-                </a:lnTo>
-                <a:close/>
-                <a:lnTo>
-                  <a:pt x="140485" y="37823"/>
-                </a:lnTo>
-                <a:close/>
-                <a:lnTo>
-                  <a:pt x="138684" y="39624"/>
-                </a:lnTo>
-                <a:close/>
-                <a:lnTo>
-                  <a:pt x="136883" y="41425"/>
-                </a:lnTo>
-                <a:close/>
-                <a:lnTo>
-                  <a:pt x="135082" y="43226"/>
-                </a:lnTo>
-                <a:close/>
-                <a:lnTo>
-                  <a:pt x="133281" y="45027"/>
-                </a:lnTo>
-                <a:close/>
-                <a:lnTo>
-                  <a:pt x="131480" y="46828"/>
-                </a:lnTo>
-                <a:close/>
-                <a:lnTo>
-                  <a:pt x="129679" y="48629"/>
-                </a:lnTo>
-                <a:close/>
-                <a:lnTo>
-                  <a:pt x="127877" y="50431"/>
-                </a:lnTo>
-                <a:close/>
-                <a:lnTo>
-                  <a:pt x="126076" y="52232"/>
-                </a:lnTo>
-                <a:close/>
-                <a:lnTo>
-                  <a:pt x="124275" y="54033"/>
-                </a:lnTo>
-                <a:close/>
-                <a:lnTo>
-                  <a:pt x="122474" y="55834"/>
-                </a:lnTo>
-                <a:close/>
-                <a:lnTo>
-                  <a:pt x="120673" y="57635"/>
-                </a:lnTo>
-                <a:close/>
-                <a:lnTo>
-                  <a:pt x="118872" y="59436"/>
-                </a:lnTo>
-                <a:close/>
-                <a:lnTo>
-                  <a:pt x="117071" y="61237"/>
-                </a:lnTo>
-                <a:close/>
-                <a:lnTo>
-                  <a:pt x="115270" y="63038"/>
-                </a:lnTo>
-                <a:close/>
-                <a:lnTo>
-                  <a:pt x="113469" y="64839"/>
-                </a:lnTo>
-                <a:close/>
-                <a:lnTo>
-                  <a:pt x="111668" y="66640"/>
-                </a:lnTo>
-                <a:close/>
-                <a:lnTo>
-                  <a:pt x="109867" y="68441"/>
-                </a:lnTo>
-                <a:close/>
-                <a:lnTo>
-                  <a:pt x="108065" y="70243"/>
-                </a:lnTo>
-                <a:close/>
-                <a:lnTo>
-                  <a:pt x="106264" y="72044"/>
-                </a:lnTo>
-                <a:close/>
-                <a:lnTo>
-                  <a:pt x="104463" y="73845"/>
-                </a:lnTo>
-                <a:close/>
-                <a:lnTo>
-                  <a:pt x="102662" y="75646"/>
-                </a:lnTo>
-                <a:close/>
-                <a:lnTo>
-                  <a:pt x="100861" y="77447"/>
-                </a:lnTo>
-                <a:close/>
-                <a:lnTo>
-                  <a:pt x="99060" y="79248"/>
-                </a:lnTo>
-                <a:close/>
-                <a:lnTo>
-                  <a:pt x="97259" y="81049"/>
-                </a:lnTo>
-                <a:close/>
-                <a:lnTo>
-                  <a:pt x="95458" y="82850"/>
-                </a:lnTo>
-                <a:close/>
-                <a:lnTo>
-                  <a:pt x="93657" y="84651"/>
-                </a:lnTo>
-                <a:close/>
-                <a:lnTo>
-                  <a:pt x="91856" y="86452"/>
-                </a:lnTo>
-                <a:close/>
-                <a:lnTo>
-                  <a:pt x="90055" y="88253"/>
-                </a:lnTo>
-                <a:close/>
-                <a:lnTo>
-                  <a:pt x="88253" y="90055"/>
-                </a:lnTo>
-                <a:close/>
-                <a:lnTo>
-                  <a:pt x="86452" y="91856"/>
-                </a:lnTo>
-                <a:close/>
-                <a:lnTo>
-                  <a:pt x="84651" y="93657"/>
-                </a:lnTo>
-                <a:close/>
-                <a:lnTo>
-                  <a:pt x="82850" y="95458"/>
-                </a:lnTo>
-                <a:close/>
-                <a:lnTo>
-                  <a:pt x="81049" y="97259"/>
-                </a:lnTo>
-                <a:close/>
-                <a:lnTo>
-                  <a:pt x="79248" y="99060"/>
-                </a:lnTo>
-                <a:close/>
-                <a:lnTo>
-                  <a:pt x="77447" y="100861"/>
-                </a:lnTo>
-                <a:close/>
-                <a:lnTo>
-                  <a:pt x="75646" y="102662"/>
-                </a:lnTo>
-                <a:close/>
-                <a:lnTo>
-                  <a:pt x="73845" y="104463"/>
-                </a:lnTo>
-                <a:close/>
-                <a:lnTo>
-                  <a:pt x="72044" y="106264"/>
-                </a:lnTo>
-                <a:close/>
-                <a:lnTo>
-                  <a:pt x="70243" y="108065"/>
-                </a:lnTo>
-                <a:close/>
-                <a:lnTo>
-                  <a:pt x="68441" y="109867"/>
-                </a:lnTo>
-                <a:close/>
-                <a:lnTo>
-                  <a:pt x="66640" y="111668"/>
-                </a:lnTo>
-                <a:close/>
-                <a:lnTo>
-                  <a:pt x="64839" y="113469"/>
-                </a:lnTo>
-                <a:close/>
-                <a:lnTo>
-                  <a:pt x="63038" y="115270"/>
-                </a:lnTo>
-                <a:close/>
-                <a:lnTo>
-                  <a:pt x="61237" y="117071"/>
-                </a:lnTo>
-                <a:close/>
-                <a:lnTo>
-                  <a:pt x="59436" y="118872"/>
-                </a:lnTo>
-                <a:close/>
-                <a:lnTo>
-                  <a:pt x="57635" y="120673"/>
-                </a:lnTo>
-                <a:close/>
-                <a:lnTo>
-                  <a:pt x="55834" y="122474"/>
-                </a:lnTo>
-                <a:close/>
-                <a:lnTo>
-                  <a:pt x="54033" y="124275"/>
-                </a:lnTo>
-                <a:close/>
-                <a:lnTo>
-                  <a:pt x="52232" y="126076"/>
-                </a:lnTo>
-                <a:close/>
-                <a:lnTo>
-                  <a:pt x="50431" y="127877"/>
-                </a:lnTo>
-                <a:close/>
-                <a:lnTo>
-                  <a:pt x="48629" y="129679"/>
-                </a:lnTo>
-                <a:close/>
-                <a:lnTo>
-                  <a:pt x="46828" y="131480"/>
-                </a:lnTo>
-                <a:close/>
-                <a:lnTo>
-                  <a:pt x="45027" y="133281"/>
-                </a:lnTo>
-                <a:close/>
-                <a:lnTo>
-                  <a:pt x="43226" y="135082"/>
-                </a:lnTo>
-                <a:close/>
-                <a:lnTo>
-                  <a:pt x="41425" y="136883"/>
-                </a:lnTo>
-                <a:close/>
-                <a:lnTo>
-                  <a:pt x="39624" y="138684"/>
-                </a:lnTo>
-                <a:close/>
-                <a:lnTo>
-                  <a:pt x="37823" y="140485"/>
-                </a:lnTo>
-                <a:close/>
-                <a:lnTo>
-                  <a:pt x="36022" y="142286"/>
-                </a:lnTo>
-                <a:close/>
-                <a:lnTo>
-                  <a:pt x="34221" y="144087"/>
-                </a:lnTo>
-                <a:close/>
-                <a:lnTo>
-                  <a:pt x="32420" y="145888"/>
-                </a:lnTo>
-                <a:close/>
-                <a:lnTo>
-                  <a:pt x="30619" y="147689"/>
-                </a:lnTo>
-                <a:close/>
-                <a:lnTo>
-                  <a:pt x="28817" y="149491"/>
-                </a:lnTo>
-                <a:close/>
-                <a:lnTo>
-                  <a:pt x="27016" y="151292"/>
-                </a:lnTo>
-                <a:close/>
-                <a:lnTo>
-                  <a:pt x="25215" y="153093"/>
-                </a:lnTo>
-                <a:close/>
-                <a:lnTo>
-                  <a:pt x="23414" y="154894"/>
-                </a:lnTo>
-                <a:close/>
-                <a:lnTo>
-                  <a:pt x="21613" y="156695"/>
-                </a:lnTo>
-                <a:close/>
-                <a:lnTo>
-                  <a:pt x="19812" y="158496"/>
-                </a:lnTo>
-                <a:close/>
-                <a:lnTo>
-                  <a:pt x="18011" y="160297"/>
-                </a:lnTo>
-                <a:close/>
-                <a:lnTo>
-                  <a:pt x="16210" y="162098"/>
-                </a:lnTo>
-                <a:close/>
-                <a:lnTo>
-                  <a:pt x="14409" y="163899"/>
-                </a:lnTo>
-                <a:close/>
-                <a:lnTo>
-                  <a:pt x="12608" y="165700"/>
-                </a:lnTo>
-                <a:close/>
-                <a:lnTo>
-                  <a:pt x="10807" y="167501"/>
-                </a:lnTo>
-                <a:close/>
-                <a:lnTo>
-                  <a:pt x="9005" y="169303"/>
-                </a:lnTo>
-                <a:close/>
-                <a:lnTo>
-                  <a:pt x="7204" y="171104"/>
-                </a:lnTo>
-                <a:close/>
-                <a:lnTo>
-                  <a:pt x="5403" y="172905"/>
-                </a:lnTo>
-                <a:close/>
-                <a:lnTo>
-                  <a:pt x="3602" y="174706"/>
-                </a:lnTo>
-                <a:close/>
-                <a:lnTo>
-                  <a:pt x="1801" y="176507"/>
-                </a:lnTo>
-                <a:close/>
-                <a:lnTo>
-                  <a:pt x="0" y="178308"/>
+                  <a:pt x="407324" y="15054"/>
+                </a:lnTo>
+                <a:close/>
+                <a:lnTo>
+                  <a:pt x="403167" y="34248"/>
+                </a:lnTo>
+                <a:close/>
+                <a:lnTo>
+                  <a:pt x="399011" y="57165"/>
+                </a:lnTo>
+                <a:close/>
+                <a:lnTo>
+                  <a:pt x="394855" y="83389"/>
+                </a:lnTo>
+                <a:close/>
+                <a:lnTo>
+                  <a:pt x="390698" y="112504"/>
+                </a:lnTo>
+                <a:close/>
+                <a:lnTo>
+                  <a:pt x="386542" y="144095"/>
+                </a:lnTo>
+                <a:close/>
+                <a:lnTo>
+                  <a:pt x="382385" y="177744"/>
+                </a:lnTo>
+                <a:close/>
+                <a:lnTo>
+                  <a:pt x="378229" y="213037"/>
+                </a:lnTo>
+                <a:close/>
+                <a:lnTo>
+                  <a:pt x="374073" y="249556"/>
+                </a:lnTo>
+                <a:close/>
+                <a:lnTo>
+                  <a:pt x="369916" y="286887"/>
+                </a:lnTo>
+                <a:close/>
+                <a:lnTo>
+                  <a:pt x="365760" y="324612"/>
+                </a:lnTo>
+                <a:close/>
+                <a:lnTo>
+                  <a:pt x="361604" y="362293"/>
+                </a:lnTo>
+                <a:close/>
+                <a:lnTo>
+                  <a:pt x="357447" y="399394"/>
+                </a:lnTo>
+                <a:close/>
+                <a:lnTo>
+                  <a:pt x="353291" y="435359"/>
+                </a:lnTo>
+                <a:close/>
+                <a:lnTo>
+                  <a:pt x="349135" y="469629"/>
+                </a:lnTo>
+                <a:close/>
+                <a:lnTo>
+                  <a:pt x="344978" y="501646"/>
+                </a:lnTo>
+                <a:close/>
+                <a:lnTo>
+                  <a:pt x="340822" y="530875"/>
+                </a:lnTo>
+                <a:close/>
+                <a:lnTo>
+                  <a:pt x="336665" y="557289"/>
+                </a:lnTo>
+                <a:close/>
+                <a:lnTo>
+                  <a:pt x="332509" y="581370"/>
+                </a:lnTo>
+                <a:close/>
+                <a:lnTo>
+                  <a:pt x="328353" y="603621"/>
+                </a:lnTo>
+                <a:close/>
+                <a:lnTo>
+                  <a:pt x="324196" y="624547"/>
+                </a:lnTo>
+                <a:close/>
+                <a:lnTo>
+                  <a:pt x="320040" y="644652"/>
+                </a:lnTo>
+                <a:close/>
+                <a:lnTo>
+                  <a:pt x="315884" y="664497"/>
+                </a:lnTo>
+                <a:close/>
+                <a:lnTo>
+                  <a:pt x="311727" y="684875"/>
+                </a:lnTo>
+                <a:close/>
+                <a:lnTo>
+                  <a:pt x="307571" y="706636"/>
+                </a:lnTo>
+                <a:close/>
+                <a:lnTo>
+                  <a:pt x="303415" y="730630"/>
+                </a:lnTo>
+                <a:close/>
+                <a:lnTo>
+                  <a:pt x="299258" y="757707"/>
+                </a:lnTo>
+                <a:close/>
+                <a:lnTo>
+                  <a:pt x="295102" y="788664"/>
+                </a:lnTo>
+                <a:close/>
+                <a:lnTo>
+                  <a:pt x="290945" y="823044"/>
+                </a:lnTo>
+                <a:close/>
+                <a:lnTo>
+                  <a:pt x="286789" y="859142"/>
+                </a:lnTo>
+                <a:close/>
+                <a:lnTo>
+                  <a:pt x="282633" y="895194"/>
+                </a:lnTo>
+                <a:close/>
+                <a:lnTo>
+                  <a:pt x="278476" y="929441"/>
+                </a:lnTo>
+                <a:close/>
+                <a:lnTo>
+                  <a:pt x="274320" y="960120"/>
+                </a:lnTo>
+                <a:close/>
+                <a:lnTo>
+                  <a:pt x="270164" y="986055"/>
+                </a:lnTo>
+                <a:close/>
+                <a:lnTo>
+                  <a:pt x="266007" y="1008405"/>
+                </a:lnTo>
+                <a:close/>
+                <a:lnTo>
+                  <a:pt x="261851" y="1028912"/>
+                </a:lnTo>
+                <a:close/>
+                <a:lnTo>
+                  <a:pt x="257695" y="1049322"/>
+                </a:lnTo>
+                <a:close/>
+                <a:lnTo>
+                  <a:pt x="253538" y="1071375"/>
+                </a:lnTo>
+                <a:close/>
+                <a:lnTo>
+                  <a:pt x="249382" y="1096765"/>
+                </a:lnTo>
+                <a:close/>
+                <a:lnTo>
+                  <a:pt x="245225" y="1125983"/>
+                </a:lnTo>
+                <a:close/>
+                <a:lnTo>
+                  <a:pt x="241069" y="1158319"/>
+                </a:lnTo>
+                <a:close/>
+                <a:lnTo>
+                  <a:pt x="236913" y="1193015"/>
+                </a:lnTo>
+                <a:close/>
+                <a:lnTo>
+                  <a:pt x="232756" y="1229310"/>
+                </a:lnTo>
+                <a:close/>
+                <a:lnTo>
+                  <a:pt x="228600" y="1266444"/>
+                </a:lnTo>
+                <a:close/>
+                <a:lnTo>
+                  <a:pt x="224444" y="1303642"/>
+                </a:lnTo>
+                <a:close/>
+                <a:lnTo>
+                  <a:pt x="220287" y="1340073"/>
+                </a:lnTo>
+                <a:close/>
+                <a:lnTo>
+                  <a:pt x="216131" y="1374890"/>
+                </a:lnTo>
+                <a:close/>
+                <a:lnTo>
+                  <a:pt x="211975" y="1407248"/>
+                </a:lnTo>
+                <a:close/>
+                <a:lnTo>
+                  <a:pt x="207818" y="1436301"/>
+                </a:lnTo>
+                <a:close/>
+                <a:lnTo>
+                  <a:pt x="203662" y="1461259"/>
+                </a:lnTo>
+                <a:close/>
+                <a:lnTo>
+                  <a:pt x="199505" y="1482617"/>
+                </a:lnTo>
+                <a:close/>
+                <a:lnTo>
+                  <a:pt x="195349" y="1502154"/>
+                </a:lnTo>
+                <a:close/>
+                <a:lnTo>
+                  <a:pt x="191193" y="1521706"/>
+                </a:lnTo>
+                <a:close/>
+                <a:lnTo>
+                  <a:pt x="187036" y="1543108"/>
+                </a:lnTo>
+                <a:close/>
+                <a:lnTo>
+                  <a:pt x="182880" y="1568196"/>
+                </a:lnTo>
+                <a:close/>
+                <a:lnTo>
+                  <a:pt x="178724" y="1598159"/>
+                </a:lnTo>
+                <a:close/>
+                <a:lnTo>
+                  <a:pt x="174567" y="1631599"/>
+                </a:lnTo>
+                <a:close/>
+                <a:lnTo>
+                  <a:pt x="170411" y="1666472"/>
+                </a:lnTo>
+                <a:close/>
+                <a:lnTo>
+                  <a:pt x="166255" y="1700732"/>
+                </a:lnTo>
+                <a:close/>
+                <a:lnTo>
+                  <a:pt x="162098" y="1732337"/>
+                </a:lnTo>
+                <a:close/>
+                <a:lnTo>
+                  <a:pt x="157942" y="1759326"/>
+                </a:lnTo>
+                <a:close/>
+                <a:lnTo>
+                  <a:pt x="153785" y="1781705"/>
+                </a:lnTo>
+                <a:close/>
+                <a:lnTo>
+                  <a:pt x="149629" y="1801444"/>
+                </a:lnTo>
+                <a:close/>
+                <a:lnTo>
+                  <a:pt x="145473" y="1820599"/>
+                </a:lnTo>
+                <a:close/>
+                <a:lnTo>
+                  <a:pt x="141316" y="1841224"/>
+                </a:lnTo>
+                <a:close/>
+                <a:lnTo>
+                  <a:pt x="137160" y="1865376"/>
+                </a:lnTo>
+                <a:close/>
+                <a:lnTo>
+                  <a:pt x="133004" y="1894424"/>
+                </a:lnTo>
+                <a:close/>
+                <a:lnTo>
+                  <a:pt x="128847" y="1926999"/>
+                </a:lnTo>
+                <a:close/>
+                <a:lnTo>
+                  <a:pt x="124691" y="1961046"/>
+                </a:lnTo>
+                <a:close/>
+                <a:lnTo>
+                  <a:pt x="120535" y="1994508"/>
+                </a:lnTo>
+                <a:close/>
+                <a:lnTo>
+                  <a:pt x="116378" y="2025332"/>
+                </a:lnTo>
+                <a:close/>
+                <a:lnTo>
+                  <a:pt x="112222" y="2051547"/>
+                </a:lnTo>
+                <a:close/>
+                <a:lnTo>
+                  <a:pt x="108065" y="2073147"/>
+                </a:lnTo>
+                <a:close/>
+                <a:lnTo>
+                  <a:pt x="103909" y="2092090"/>
+                </a:lnTo>
+                <a:close/>
+                <a:lnTo>
+                  <a:pt x="99753" y="2110420"/>
+                </a:lnTo>
+                <a:close/>
+                <a:lnTo>
+                  <a:pt x="95596" y="2130180"/>
+                </a:lnTo>
+                <a:close/>
+                <a:lnTo>
+                  <a:pt x="91440" y="2153412"/>
+                </a:lnTo>
+                <a:close/>
+                <a:lnTo>
+                  <a:pt x="87284" y="2181487"/>
+                </a:lnTo>
+                <a:close/>
+                <a:lnTo>
+                  <a:pt x="83127" y="2213083"/>
+                </a:lnTo>
+                <a:close/>
+                <a:lnTo>
+                  <a:pt x="78971" y="2246204"/>
+                </a:lnTo>
+                <a:close/>
+                <a:lnTo>
+                  <a:pt x="74815" y="2278853"/>
+                </a:lnTo>
+                <a:close/>
+                <a:lnTo>
+                  <a:pt x="70658" y="2309034"/>
+                </a:lnTo>
+                <a:close/>
+                <a:lnTo>
+                  <a:pt x="66502" y="2334832"/>
+                </a:lnTo>
+                <a:close/>
+                <a:lnTo>
+                  <a:pt x="62345" y="2356157"/>
+                </a:lnTo>
+                <a:close/>
+                <a:lnTo>
+                  <a:pt x="58189" y="2374749"/>
+                </a:lnTo>
+                <a:close/>
+                <a:lnTo>
+                  <a:pt x="54033" y="2392425"/>
+                </a:lnTo>
+                <a:close/>
+                <a:lnTo>
+                  <a:pt x="49876" y="2411004"/>
+                </a:lnTo>
+                <a:close/>
+                <a:lnTo>
+                  <a:pt x="45720" y="2432304"/>
+                </a:lnTo>
+                <a:close/>
+                <a:lnTo>
+                  <a:pt x="41564" y="2457648"/>
+                </a:lnTo>
+                <a:close/>
+                <a:lnTo>
+                  <a:pt x="37407" y="2486375"/>
+                </a:lnTo>
+                <a:close/>
+                <a:lnTo>
+                  <a:pt x="33251" y="2517332"/>
+                </a:lnTo>
+                <a:close/>
+                <a:lnTo>
+                  <a:pt x="29095" y="2549363"/>
+                </a:lnTo>
+                <a:close/>
+                <a:lnTo>
+                  <a:pt x="24938" y="2581313"/>
+                </a:lnTo>
+                <a:close/>
+                <a:lnTo>
+                  <a:pt x="20782" y="2612026"/>
+                </a:lnTo>
+                <a:close/>
+                <a:lnTo>
+                  <a:pt x="16625" y="2640348"/>
+                </a:lnTo>
+                <a:close/>
+                <a:lnTo>
+                  <a:pt x="12469" y="2665124"/>
+                </a:lnTo>
+                <a:close/>
+                <a:lnTo>
+                  <a:pt x="8313" y="2685199"/>
+                </a:lnTo>
+                <a:close/>
+                <a:lnTo>
+                  <a:pt x="4156" y="2699417"/>
+                </a:lnTo>
+                <a:close/>
+                <a:lnTo>
+                  <a:pt x="0" y="2706624"/>
                 </a:lnTo>
                 <a:close/>
               </a:path>
@@ -5508,7 +5508,7 @@
         </p:nvSpPr>
         <p:spPr>
           <a:xfrm>
-            <a:off x="4089400" y="516890"/>
+            <a:off x="3906520" y="242569"/>
             <a:ext cx="1524000" cy="508000"/>
           </a:xfrm>
           <a:prstGeom prst="rect">
@@ -5544,7 +5544,7 @@
         </p:nvSpPr>
         <p:spPr>
           <a:xfrm>
-            <a:off x="5689600" y="2391410"/>
+            <a:off x="6146800" y="2437130"/>
             <a:ext cx="1524000" cy="508000"/>
           </a:xfrm>
           <a:prstGeom prst="rect">
@@ -5568,114 +5568,6 @@
             </a:pPr>
             <a:r>
               <a:t>a</a:t>
-            </a:r>
-          </a:p>
-        </p:txBody>
-      </p:sp>
-      <p:sp>
-        <p:nvSpPr>
-          <p:cNvPr id="14" name="TextBox 13"/>
-          <p:cNvSpPr txBox="1"/>
-          <p:nvPr/>
-        </p:nvSpPr>
-        <p:spPr>
-          <a:xfrm>
-            <a:off x="4249420" y="2345690"/>
-            <a:ext cx="1524000" cy="508000"/>
-          </a:xfrm>
-          <a:prstGeom prst="rect">
-            <a:avLst/>
-          </a:prstGeom>
-          <a:noFill/>
-        </p:spPr>
-        <p:txBody>
-          <a:bodyPr wrap="none">
-            <a:spAutoFit/>
-          </a:bodyPr>
-          <a:lstStyle/>
-          <a:p>
-            <a:pPr>
-              <a:defRPr sz="1400" b="1">
-                <a:solidFill>
-                  <a:srgbClr val="FFFFFF"/>
-                </a:solidFill>
-                <a:latin typeface="Inter"/>
-              </a:defRPr>
-            </a:pPr>
-            <a:r>
-              <a:t>O</a:t>
-            </a:r>
-          </a:p>
-        </p:txBody>
-      </p:sp>
-      <p:sp>
-        <p:nvSpPr>
-          <p:cNvPr id="15" name="TextBox 14"/>
-          <p:cNvSpPr txBox="1"/>
-          <p:nvPr/>
-        </p:nvSpPr>
-        <p:spPr>
-          <a:xfrm>
-            <a:off x="6101080" y="2345690"/>
-            <a:ext cx="1524000" cy="508000"/>
-          </a:xfrm>
-          <a:prstGeom prst="rect">
-            <a:avLst/>
-          </a:prstGeom>
-          <a:noFill/>
-        </p:spPr>
-        <p:txBody>
-          <a:bodyPr wrap="none">
-            <a:spAutoFit/>
-          </a:bodyPr>
-          <a:lstStyle/>
-          <a:p>
-            <a:pPr>
-              <a:defRPr sz="1400" b="1">
-                <a:solidFill>
-                  <a:srgbClr val="FFFFFF"/>
-                </a:solidFill>
-                <a:latin typeface="Inter"/>
-              </a:defRPr>
-            </a:pPr>
-            <a:r>
-              <a:t>x</a:t>
-            </a:r>
-          </a:p>
-        </p:txBody>
-      </p:sp>
-      <p:sp>
-        <p:nvSpPr>
-          <p:cNvPr id="16" name="TextBox 15"/>
-          <p:cNvSpPr txBox="1"/>
-          <p:nvPr/>
-        </p:nvSpPr>
-        <p:spPr>
-          <a:xfrm>
-            <a:off x="4226560" y="242569"/>
-            <a:ext cx="1524000" cy="508000"/>
-          </a:xfrm>
-          <a:prstGeom prst="rect">
-            <a:avLst/>
-          </a:prstGeom>
-          <a:noFill/>
-        </p:spPr>
-        <p:txBody>
-          <a:bodyPr wrap="none">
-            <a:spAutoFit/>
-          </a:bodyPr>
-          <a:lstStyle/>
-          <a:p>
-            <a:pPr>
-              <a:defRPr sz="1400" b="1">
-                <a:solidFill>
-                  <a:srgbClr val="FFFFFF"/>
-                </a:solidFill>
-                <a:latin typeface="Inter"/>
-              </a:defRPr>
-            </a:pPr>
-            <a:r>
-              <a:t>y</a:t>
             </a:r>
           </a:p>
         </p:txBody>

--- a/output/3.pptx
+++ b/output/3.pptx
@@ -3104,8 +3104,8 @@
         </p:nvCxnSpPr>
         <p:spPr>
           <a:xfrm>
-            <a:off x="4114800.0" y="2571750.0"/>
-            <a:ext cx="3657600.0" cy="0.0"/>
+            <a:off x="3886200.0" y="2571750.0"/>
+            <a:ext cx="2743200.0" cy="0.0"/>
           </a:xfrm>
           <a:prstGeom prst="line">
             <a:avLst/>
@@ -3139,8 +3139,8 @@
         </p:nvCxnSpPr>
         <p:spPr>
           <a:xfrm flipV="1">
-            <a:off x="4572000.0" y="-1314450.0"/>
-            <a:ext cx="0.0" cy="4343400.0"/>
+            <a:off x="4572000.0" y="-171450.0"/>
+            <a:ext cx="0.0" cy="3200400.0"/>
           </a:xfrm>
           <a:prstGeom prst="line">
             <a:avLst/>
@@ -3174,8 +3174,8 @@
         </p:nvSpPr>
         <p:spPr>
           <a:xfrm>
-            <a:off x="4937760" y="-4857750"/>
-            <a:ext cx="2011680" cy="7110142"/>
+            <a:off x="4800600" y="241859"/>
+            <a:ext cx="1234440" cy="1826971"/>
           </a:xfrm>
           <a:custGeom>
             <a:avLst/>
@@ -3184,1212 +3184,1212 @@
             <a:cxnLst/>
             <a:rect l="l" t="t" r="r" b="b"/>
             <a:pathLst>
-              <a:path w="2011680" h="7110142">
+              <a:path w="1234440" h="1826971">
                 <a:moveTo>
-                  <a:pt x="0" y="7109460"/>
+                  <a:pt x="0" y="1826971"/>
                 </a:moveTo>
                 <a:lnTo>
-                  <a:pt x="6728" y="7110142"/>
-                </a:lnTo>
-                <a:close/>
-                <a:lnTo>
-                  <a:pt x="13456" y="7107519"/>
-                </a:lnTo>
-                <a:close/>
-                <a:lnTo>
-                  <a:pt x="20184" y="7103891"/>
-                </a:lnTo>
-                <a:close/>
-                <a:lnTo>
-                  <a:pt x="26912" y="7100570"/>
-                </a:lnTo>
-                <a:close/>
-                <a:lnTo>
-                  <a:pt x="33640" y="7097222"/>
-                </a:lnTo>
-                <a:close/>
-                <a:lnTo>
-                  <a:pt x="40368" y="7093843"/>
-                </a:lnTo>
-                <a:close/>
-                <a:lnTo>
-                  <a:pt x="47096" y="7090485"/>
-                </a:lnTo>
-                <a:close/>
-                <a:lnTo>
-                  <a:pt x="53824" y="7087121"/>
-                </a:lnTo>
-                <a:close/>
-                <a:lnTo>
-                  <a:pt x="60552" y="7083746"/>
-                </a:lnTo>
-                <a:close/>
-                <a:lnTo>
-                  <a:pt x="67280" y="7080417"/>
-                </a:lnTo>
-                <a:close/>
-                <a:lnTo>
-                  <a:pt x="74008" y="7077006"/>
-                </a:lnTo>
-                <a:close/>
-                <a:lnTo>
-                  <a:pt x="80736" y="7073570"/>
-                </a:lnTo>
-                <a:close/>
-                <a:lnTo>
-                  <a:pt x="87464" y="7070775"/>
-                </a:lnTo>
-                <a:close/>
-                <a:lnTo>
-                  <a:pt x="94192" y="7065723"/>
-                </a:lnTo>
-                <a:close/>
-                <a:lnTo>
-                  <a:pt x="100920" y="7058891"/>
-                </a:lnTo>
-                <a:close/>
-                <a:lnTo>
-                  <a:pt x="107648" y="7055292"/>
-                </a:lnTo>
-                <a:close/>
-                <a:lnTo>
-                  <a:pt x="114376" y="7052893"/>
-                </a:lnTo>
-                <a:close/>
-                <a:lnTo>
-                  <a:pt x="121104" y="7047849"/>
-                </a:lnTo>
-                <a:close/>
-                <a:lnTo>
-                  <a:pt x="127833" y="7041015"/>
-                </a:lnTo>
-                <a:close/>
-                <a:lnTo>
-                  <a:pt x="134561" y="7037835"/>
-                </a:lnTo>
-                <a:close/>
-                <a:lnTo>
-                  <a:pt x="141289" y="7032225"/>
-                </a:lnTo>
-                <a:close/>
-                <a:lnTo>
-                  <a:pt x="148017" y="7026088"/>
-                </a:lnTo>
-                <a:close/>
-                <a:lnTo>
-                  <a:pt x="154745" y="7023076"/>
-                </a:lnTo>
-                <a:close/>
-                <a:lnTo>
-                  <a:pt x="161473" y="7016451"/>
-                </a:lnTo>
-                <a:close/>
-                <a:lnTo>
-                  <a:pt x="168201" y="7011390"/>
-                </a:lnTo>
-                <a:close/>
-                <a:lnTo>
-                  <a:pt x="174929" y="7008036"/>
-                </a:lnTo>
-                <a:close/>
-                <a:lnTo>
-                  <a:pt x="181657" y="7001169"/>
-                </a:lnTo>
-                <a:close/>
-                <a:lnTo>
-                  <a:pt x="188385" y="6993620"/>
-                </a:lnTo>
-                <a:close/>
-                <a:lnTo>
-                  <a:pt x="195113" y="6988966"/>
-                </a:lnTo>
-                <a:close/>
-                <a:lnTo>
-                  <a:pt x="201841" y="6985522"/>
-                </a:lnTo>
-                <a:close/>
-                <a:lnTo>
-                  <a:pt x="208569" y="6978766"/>
-                </a:lnTo>
-                <a:close/>
-                <a:lnTo>
-                  <a:pt x="215297" y="6971902"/>
-                </a:lnTo>
-                <a:close/>
-                <a:lnTo>
-                  <a:pt x="222025" y="6964915"/>
-                </a:lnTo>
-                <a:close/>
-                <a:lnTo>
-                  <a:pt x="228753" y="6958480"/>
-                </a:lnTo>
-                <a:close/>
-                <a:lnTo>
-                  <a:pt x="235481" y="6955296"/>
-                </a:lnTo>
-                <a:close/>
-                <a:lnTo>
-                  <a:pt x="242209" y="6950015"/>
-                </a:lnTo>
-                <a:close/>
-                <a:lnTo>
-                  <a:pt x="248937" y="6942706"/>
-                </a:lnTo>
-                <a:close/>
-                <a:lnTo>
-                  <a:pt x="255665" y="6936082"/>
-                </a:lnTo>
-                <a:close/>
-                <a:lnTo>
-                  <a:pt x="262393" y="6929385"/>
-                </a:lnTo>
-                <a:close/>
-                <a:lnTo>
-                  <a:pt x="269121" y="6922626"/>
-                </a:lnTo>
-                <a:close/>
-                <a:lnTo>
-                  <a:pt x="275849" y="6915909"/>
-                </a:lnTo>
-                <a:close/>
-                <a:lnTo>
-                  <a:pt x="282577" y="6909179"/>
-                </a:lnTo>
-                <a:close/>
-                <a:lnTo>
-                  <a:pt x="289305" y="6902450"/>
-                </a:lnTo>
-                <a:close/>
-                <a:lnTo>
-                  <a:pt x="296033" y="6895723"/>
-                </a:lnTo>
-                <a:close/>
-                <a:lnTo>
-                  <a:pt x="302761" y="6888995"/>
-                </a:lnTo>
-                <a:close/>
-                <a:lnTo>
-                  <a:pt x="309489" y="6882266"/>
-                </a:lnTo>
-                <a:close/>
-                <a:lnTo>
-                  <a:pt x="316217" y="6875541"/>
-                </a:lnTo>
-                <a:close/>
-                <a:lnTo>
-                  <a:pt x="322945" y="6868805"/>
-                </a:lnTo>
-                <a:close/>
-                <a:lnTo>
-                  <a:pt x="329673" y="6862086"/>
-                </a:lnTo>
-                <a:close/>
-                <a:lnTo>
-                  <a:pt x="336401" y="6855383"/>
-                </a:lnTo>
-                <a:close/>
-                <a:lnTo>
-                  <a:pt x="343129" y="6848503"/>
-                </a:lnTo>
-                <a:close/>
-                <a:lnTo>
-                  <a:pt x="349857" y="6842150"/>
-                </a:lnTo>
-                <a:close/>
-                <a:lnTo>
-                  <a:pt x="356585" y="6835180"/>
-                </a:lnTo>
-                <a:close/>
-                <a:lnTo>
-                  <a:pt x="363313" y="6824973"/>
-                </a:lnTo>
-                <a:close/>
-                <a:lnTo>
-                  <a:pt x="370041" y="6816553"/>
-                </a:lnTo>
-                <a:close/>
-                <a:lnTo>
-                  <a:pt x="376769" y="6810714"/>
-                </a:lnTo>
-                <a:close/>
-                <a:lnTo>
-                  <a:pt x="383498" y="6803854"/>
-                </a:lnTo>
-                <a:close/>
-                <a:lnTo>
-                  <a:pt x="390226" y="6793755"/>
-                </a:lnTo>
-                <a:close/>
-                <a:lnTo>
-                  <a:pt x="396954" y="6785062"/>
-                </a:lnTo>
-                <a:close/>
-                <a:lnTo>
-                  <a:pt x="403682" y="6779163"/>
-                </a:lnTo>
-                <a:close/>
-                <a:lnTo>
-                  <a:pt x="410410" y="6772525"/>
-                </a:lnTo>
-                <a:close/>
-                <a:lnTo>
-                  <a:pt x="417138" y="6762387"/>
-                </a:lnTo>
-                <a:close/>
-                <a:lnTo>
-                  <a:pt x="423866" y="6754060"/>
-                </a:lnTo>
-                <a:close/>
-                <a:lnTo>
-                  <a:pt x="430594" y="6747189"/>
-                </a:lnTo>
-                <a:close/>
-                <a:lnTo>
-                  <a:pt x="437322" y="6736758"/>
-                </a:lnTo>
-                <a:close/>
-                <a:lnTo>
-                  <a:pt x="444050" y="6729316"/>
-                </a:lnTo>
-                <a:close/>
-                <a:lnTo>
-                  <a:pt x="450778" y="6721918"/>
-                </a:lnTo>
-                <a:close/>
-                <a:lnTo>
-                  <a:pt x="457506" y="6711183"/>
-                </a:lnTo>
-                <a:close/>
-                <a:lnTo>
-                  <a:pt x="464234" y="6700651"/>
-                </a:lnTo>
-                <a:close/>
-                <a:lnTo>
-                  <a:pt x="470962" y="6693410"/>
-                </a:lnTo>
-                <a:close/>
-                <a:lnTo>
-                  <a:pt x="477690" y="6685944"/>
-                </a:lnTo>
-                <a:close/>
-                <a:lnTo>
-                  <a:pt x="484418" y="6675455"/>
-                </a:lnTo>
-                <a:close/>
-                <a:lnTo>
-                  <a:pt x="491146" y="6665400"/>
-                </a:lnTo>
-                <a:close/>
-                <a:lnTo>
-                  <a:pt x="497874" y="6654864"/>
-                </a:lnTo>
-                <a:close/>
-                <a:lnTo>
-                  <a:pt x="504602" y="6645840"/>
-                </a:lnTo>
-                <a:close/>
-                <a:lnTo>
-                  <a:pt x="511330" y="6639380"/>
-                </a:lnTo>
-                <a:close/>
-                <a:lnTo>
-                  <a:pt x="518058" y="6629895"/>
-                </a:lnTo>
-                <a:close/>
-                <a:lnTo>
-                  <a:pt x="524786" y="6619328"/>
-                </a:lnTo>
-                <a:close/>
-                <a:lnTo>
-                  <a:pt x="531514" y="6609390"/>
-                </a:lnTo>
-                <a:close/>
-                <a:lnTo>
-                  <a:pt x="538242" y="6599286"/>
-                </a:lnTo>
-                <a:close/>
-                <a:lnTo>
-                  <a:pt x="544970" y="6589177"/>
-                </a:lnTo>
-                <a:close/>
-                <a:lnTo>
-                  <a:pt x="551698" y="6579095"/>
-                </a:lnTo>
-                <a:close/>
-                <a:lnTo>
-                  <a:pt x="558426" y="6569000"/>
-                </a:lnTo>
-                <a:close/>
-                <a:lnTo>
-                  <a:pt x="565154" y="6558909"/>
-                </a:lnTo>
-                <a:close/>
-                <a:lnTo>
-                  <a:pt x="571882" y="6548816"/>
-                </a:lnTo>
-                <a:close/>
-                <a:lnTo>
-                  <a:pt x="578610" y="6538726"/>
-                </a:lnTo>
-                <a:close/>
-                <a:lnTo>
-                  <a:pt x="585338" y="6528632"/>
-                </a:lnTo>
-                <a:close/>
-                <a:lnTo>
-                  <a:pt x="592066" y="6518532"/>
-                </a:lnTo>
-                <a:close/>
-                <a:lnTo>
-                  <a:pt x="598794" y="6508480"/>
-                </a:lnTo>
-                <a:close/>
-                <a:lnTo>
-                  <a:pt x="605522" y="6498300"/>
-                </a:lnTo>
-                <a:close/>
-                <a:lnTo>
-                  <a:pt x="612250" y="6488234"/>
-                </a:lnTo>
-                <a:close/>
-                <a:lnTo>
-                  <a:pt x="618978" y="6478641"/>
-                </a:lnTo>
-                <a:close/>
-                <a:lnTo>
-                  <a:pt x="625706" y="6466214"/>
-                </a:lnTo>
-                <a:close/>
-                <a:lnTo>
-                  <a:pt x="632435" y="6453022"/>
-                </a:lnTo>
-                <a:close/>
-                <a:lnTo>
-                  <a:pt x="639163" y="6443165"/>
-                </a:lnTo>
-                <a:close/>
-                <a:lnTo>
-                  <a:pt x="645891" y="6433858"/>
-                </a:lnTo>
-                <a:close/>
-                <a:lnTo>
-                  <a:pt x="652619" y="6421405"/>
-                </a:lnTo>
-                <a:close/>
-                <a:lnTo>
-                  <a:pt x="659347" y="6408327"/>
-                </a:lnTo>
-                <a:close/>
-                <a:lnTo>
-                  <a:pt x="666075" y="6398597"/>
-                </a:lnTo>
-                <a:close/>
-                <a:lnTo>
-                  <a:pt x="672803" y="6385596"/>
-                </a:lnTo>
-                <a:close/>
-                <a:lnTo>
-                  <a:pt x="679531" y="6373336"/>
-                </a:lnTo>
-                <a:close/>
-                <a:lnTo>
-                  <a:pt x="686259" y="6363461"/>
-                </a:lnTo>
-                <a:close/>
-                <a:lnTo>
-                  <a:pt x="692987" y="6350183"/>
-                </a:lnTo>
-                <a:close/>
-                <a:lnTo>
-                  <a:pt x="699715" y="6335796"/>
-                </a:lnTo>
-                <a:close/>
-                <a:lnTo>
-                  <a:pt x="706443" y="6323995"/>
-                </a:lnTo>
-                <a:close/>
-                <a:lnTo>
-                  <a:pt x="713171" y="6314035"/>
-                </a:lnTo>
-                <a:close/>
-                <a:lnTo>
-                  <a:pt x="719899" y="6300860"/>
-                </a:lnTo>
-                <a:close/>
-                <a:lnTo>
-                  <a:pt x="726627" y="6287017"/>
-                </a:lnTo>
-                <a:close/>
-                <a:lnTo>
-                  <a:pt x="733355" y="6273715"/>
-                </a:lnTo>
-                <a:close/>
-                <a:lnTo>
-                  <a:pt x="740083" y="6260235"/>
-                </a:lnTo>
-                <a:close/>
-                <a:lnTo>
-                  <a:pt x="746811" y="6246759"/>
-                </a:lnTo>
-                <a:close/>
-                <a:lnTo>
-                  <a:pt x="753539" y="6233348"/>
-                </a:lnTo>
-                <a:close/>
-                <a:lnTo>
-                  <a:pt x="760267" y="6219827"/>
-                </a:lnTo>
-                <a:close/>
-                <a:lnTo>
-                  <a:pt x="766995" y="6206332"/>
-                </a:lnTo>
-                <a:close/>
-                <a:lnTo>
-                  <a:pt x="773723" y="6193433"/>
-                </a:lnTo>
-                <a:close/>
-                <a:lnTo>
-                  <a:pt x="780451" y="6178028"/>
-                </a:lnTo>
-                <a:close/>
-                <a:lnTo>
-                  <a:pt x="787179" y="6161228"/>
-                </a:lnTo>
-                <a:close/>
-                <a:lnTo>
-                  <a:pt x="793907" y="6147736"/>
-                </a:lnTo>
-                <a:close/>
-                <a:lnTo>
-                  <a:pt x="800635" y="6135187"/>
-                </a:lnTo>
-                <a:close/>
-                <a:lnTo>
-                  <a:pt x="807363" y="6119779"/>
-                </a:lnTo>
-                <a:close/>
-                <a:lnTo>
-                  <a:pt x="814091" y="6103014"/>
-                </a:lnTo>
-                <a:close/>
-                <a:lnTo>
-                  <a:pt x="820819" y="6089845"/>
-                </a:lnTo>
-                <a:close/>
-                <a:lnTo>
-                  <a:pt x="827547" y="6073886"/>
-                </a:lnTo>
-                <a:close/>
-                <a:lnTo>
-                  <a:pt x="834275" y="6057848"/>
-                </a:lnTo>
-                <a:close/>
-                <a:lnTo>
-                  <a:pt x="841003" y="6044708"/>
-                </a:lnTo>
-                <a:close/>
-                <a:lnTo>
-                  <a:pt x="847731" y="6028285"/>
-                </a:lnTo>
-                <a:close/>
-                <a:lnTo>
-                  <a:pt x="854459" y="6011016"/>
-                </a:lnTo>
-                <a:close/>
-                <a:lnTo>
-                  <a:pt x="861187" y="5994365"/>
-                </a:lnTo>
-                <a:close/>
-                <a:lnTo>
-                  <a:pt x="867915" y="5977522"/>
-                </a:lnTo>
-                <a:close/>
-                <a:lnTo>
-                  <a:pt x="874643" y="5960679"/>
-                </a:lnTo>
-                <a:close/>
-                <a:lnTo>
-                  <a:pt x="881372" y="5943905"/>
-                </a:lnTo>
-                <a:close/>
-                <a:lnTo>
-                  <a:pt x="888100" y="5927025"/>
-                </a:lnTo>
-                <a:close/>
-                <a:lnTo>
-                  <a:pt x="894828" y="5910153"/>
-                </a:lnTo>
-                <a:close/>
-                <a:lnTo>
-                  <a:pt x="901556" y="5893896"/>
-                </a:lnTo>
-                <a:close/>
-                <a:lnTo>
-                  <a:pt x="908284" y="5875232"/>
-                </a:lnTo>
-                <a:close/>
-                <a:lnTo>
-                  <a:pt x="915012" y="5855014"/>
-                </a:lnTo>
-                <a:close/>
-                <a:lnTo>
-                  <a:pt x="921740" y="5838080"/>
-                </a:lnTo>
-                <a:close/>
-                <a:lnTo>
-                  <a:pt x="928468" y="5822193"/>
-                </a:lnTo>
-                <a:close/>
-                <a:lnTo>
-                  <a:pt x="935196" y="5803530"/>
-                </a:lnTo>
-                <a:close/>
-                <a:lnTo>
-                  <a:pt x="941924" y="5783331"/>
-                </a:lnTo>
-                <a:close/>
-                <a:lnTo>
-                  <a:pt x="948652" y="5766758"/>
-                </a:lnTo>
-                <a:close/>
-                <a:lnTo>
-                  <a:pt x="955380" y="5747552"/>
-                </a:lnTo>
-                <a:close/>
-                <a:lnTo>
-                  <a:pt x="962108" y="5728041"/>
-                </a:lnTo>
-                <a:close/>
-                <a:lnTo>
-                  <a:pt x="968836" y="5711555"/>
-                </a:lnTo>
-                <a:close/>
-                <a:lnTo>
-                  <a:pt x="975564" y="5691860"/>
-                </a:lnTo>
-                <a:close/>
-                <a:lnTo>
-                  <a:pt x="982292" y="5671203"/>
-                </a:lnTo>
-                <a:close/>
-                <a:lnTo>
-                  <a:pt x="989020" y="5651188"/>
-                </a:lnTo>
-                <a:close/>
-                <a:lnTo>
-                  <a:pt x="995748" y="5630985"/>
-                </a:lnTo>
-                <a:close/>
-                <a:lnTo>
-                  <a:pt x="1002476" y="5610774"/>
-                </a:lnTo>
-                <a:close/>
-                <a:lnTo>
-                  <a:pt x="1009204" y="5590639"/>
-                </a:lnTo>
-                <a:close/>
-                <a:lnTo>
-                  <a:pt x="1015932" y="5570397"/>
-                </a:lnTo>
-                <a:close/>
-                <a:lnTo>
-                  <a:pt x="1022660" y="5550140"/>
-                </a:lnTo>
-                <a:close/>
-                <a:lnTo>
-                  <a:pt x="1029388" y="5530581"/>
-                </a:lnTo>
-                <a:close/>
-                <a:lnTo>
-                  <a:pt x="1036116" y="5508498"/>
-                </a:lnTo>
-                <a:close/>
-                <a:lnTo>
-                  <a:pt x="1042844" y="5485032"/>
-                </a:lnTo>
-                <a:close/>
-                <a:lnTo>
-                  <a:pt x="1049572" y="5465159"/>
-                </a:lnTo>
-                <a:close/>
-                <a:lnTo>
-                  <a:pt x="1056300" y="5442383"/>
-                </a:lnTo>
-                <a:close/>
-                <a:lnTo>
-                  <a:pt x="1063028" y="5419709"/>
-                </a:lnTo>
-                <a:close/>
-                <a:lnTo>
-                  <a:pt x="1069756" y="5399821"/>
-                </a:lnTo>
-                <a:close/>
-                <a:lnTo>
-                  <a:pt x="1076484" y="5376596"/>
-                </a:lnTo>
-                <a:close/>
-                <a:lnTo>
-                  <a:pt x="1083212" y="5352620"/>
-                </a:lnTo>
-                <a:close/>
-                <a:lnTo>
-                  <a:pt x="1089940" y="5329239"/>
-                </a:lnTo>
-                <a:close/>
-                <a:lnTo>
-                  <a:pt x="1096668" y="5305665"/>
-                </a:lnTo>
-                <a:close/>
-                <a:lnTo>
-                  <a:pt x="1103396" y="5282109"/>
-                </a:lnTo>
-                <a:close/>
-                <a:lnTo>
-                  <a:pt x="1110124" y="5258559"/>
-                </a:lnTo>
-                <a:close/>
-                <a:lnTo>
-                  <a:pt x="1116852" y="5235026"/>
-                </a:lnTo>
-                <a:close/>
-                <a:lnTo>
-                  <a:pt x="1123580" y="5211490"/>
-                </a:lnTo>
-                <a:close/>
-                <a:lnTo>
-                  <a:pt x="1130308" y="5187781"/>
-                </a:lnTo>
-                <a:close/>
-                <a:lnTo>
-                  <a:pt x="1137037" y="5164735"/>
-                </a:lnTo>
-                <a:close/>
-                <a:lnTo>
-                  <a:pt x="1143765" y="5140533"/>
-                </a:lnTo>
-                <a:close/>
-                <a:lnTo>
-                  <a:pt x="1150493" y="5113293"/>
-                </a:lnTo>
-                <a:close/>
-                <a:lnTo>
-                  <a:pt x="1157221" y="5089112"/>
-                </a:lnTo>
-                <a:close/>
-                <a:lnTo>
-                  <a:pt x="1163949" y="5064774"/>
-                </a:lnTo>
-                <a:close/>
-                <a:lnTo>
-                  <a:pt x="1170677" y="5037345"/>
-                </a:lnTo>
-                <a:close/>
-                <a:lnTo>
-                  <a:pt x="1177405" y="5010390"/>
-                </a:lnTo>
-                <a:close/>
-                <a:lnTo>
-                  <a:pt x="1184133" y="4983567"/>
-                </a:lnTo>
-                <a:close/>
-                <a:lnTo>
-                  <a:pt x="1190861" y="4956636"/>
-                </a:lnTo>
-                <a:close/>
-                <a:lnTo>
-                  <a:pt x="1197589" y="4929722"/>
-                </a:lnTo>
-                <a:close/>
-                <a:lnTo>
-                  <a:pt x="1204317" y="4902682"/>
-                </a:lnTo>
-                <a:close/>
-                <a:lnTo>
-                  <a:pt x="1211045" y="4876308"/>
-                </a:lnTo>
-                <a:close/>
-                <a:lnTo>
-                  <a:pt x="1217773" y="4848337"/>
-                </a:lnTo>
-                <a:close/>
-                <a:lnTo>
-                  <a:pt x="1224501" y="4817797"/>
-                </a:lnTo>
-                <a:close/>
-                <a:lnTo>
-                  <a:pt x="1231229" y="4790134"/>
-                </a:lnTo>
-                <a:close/>
-                <a:lnTo>
-                  <a:pt x="1237957" y="4764102"/>
-                </a:lnTo>
-                <a:close/>
-                <a:lnTo>
-                  <a:pt x="1244685" y="4736410"/>
-                </a:lnTo>
-                <a:close/>
-                <a:lnTo>
-                  <a:pt x="1251413" y="4706029"/>
-                </a:lnTo>
-                <a:close/>
-                <a:lnTo>
-                  <a:pt x="1258141" y="4675584"/>
-                </a:lnTo>
-                <a:close/>
-                <a:lnTo>
-                  <a:pt x="1264869" y="4645400"/>
-                </a:lnTo>
-                <a:close/>
-                <a:lnTo>
-                  <a:pt x="1271597" y="4615107"/>
-                </a:lnTo>
-                <a:close/>
-                <a:lnTo>
-                  <a:pt x="1278325" y="4584857"/>
-                </a:lnTo>
-                <a:close/>
-                <a:lnTo>
-                  <a:pt x="1285053" y="4554420"/>
-                </a:lnTo>
-                <a:close/>
-                <a:lnTo>
-                  <a:pt x="1291781" y="4524558"/>
-                </a:lnTo>
-                <a:close/>
-                <a:lnTo>
-                  <a:pt x="1298509" y="4493980"/>
-                </a:lnTo>
-                <a:close/>
-                <a:lnTo>
-                  <a:pt x="1305237" y="4460080"/>
-                </a:lnTo>
-                <a:close/>
-                <a:lnTo>
-                  <a:pt x="1311965" y="4428759"/>
-                </a:lnTo>
-                <a:close/>
-                <a:lnTo>
-                  <a:pt x="1318693" y="4398056"/>
-                </a:lnTo>
-                <a:close/>
-                <a:lnTo>
-                  <a:pt x="1325421" y="4364026"/>
-                </a:lnTo>
-                <a:close/>
-                <a:lnTo>
-                  <a:pt x="1332149" y="4330253"/>
-                </a:lnTo>
-                <a:close/>
-                <a:lnTo>
-                  <a:pt x="1338877" y="4296741"/>
-                </a:lnTo>
-                <a:close/>
-                <a:lnTo>
-                  <a:pt x="1345605" y="4263051"/>
-                </a:lnTo>
-                <a:close/>
-                <a:lnTo>
-                  <a:pt x="1352333" y="4229414"/>
-                </a:lnTo>
-                <a:close/>
-                <a:lnTo>
-                  <a:pt x="1359061" y="4195820"/>
-                </a:lnTo>
-                <a:close/>
-                <a:lnTo>
-                  <a:pt x="1365789" y="4162038"/>
-                </a:lnTo>
-                <a:close/>
-                <a:lnTo>
-                  <a:pt x="1372517" y="4128595"/>
-                </a:lnTo>
-                <a:close/>
-                <a:lnTo>
-                  <a:pt x="1379245" y="4095230"/>
-                </a:lnTo>
-                <a:close/>
-                <a:lnTo>
-                  <a:pt x="1385974" y="4058444"/>
-                </a:lnTo>
-                <a:close/>
-                <a:lnTo>
-                  <a:pt x="1392702" y="4022770"/>
-                </a:lnTo>
-                <a:close/>
-                <a:lnTo>
-                  <a:pt x="1399430" y="3989293"/>
-                </a:lnTo>
-                <a:close/>
-                <a:lnTo>
-                  <a:pt x="1406158" y="3952391"/>
-                </a:lnTo>
-                <a:close/>
-                <a:lnTo>
-                  <a:pt x="1412886" y="3915036"/>
-                </a:lnTo>
-                <a:close/>
-                <a:lnTo>
-                  <a:pt x="1419614" y="3878186"/>
-                </a:lnTo>
-                <a:close/>
-                <a:lnTo>
-                  <a:pt x="1426342" y="3841153"/>
-                </a:lnTo>
-                <a:close/>
-                <a:lnTo>
-                  <a:pt x="1433070" y="3804176"/>
-                </a:lnTo>
-                <a:close/>
-                <a:lnTo>
-                  <a:pt x="1439798" y="3767032"/>
-                </a:lnTo>
-                <a:close/>
-                <a:lnTo>
-                  <a:pt x="1446526" y="3730323"/>
-                </a:lnTo>
-                <a:close/>
-                <a:lnTo>
-                  <a:pt x="1453254" y="3693313"/>
-                </a:lnTo>
-                <a:close/>
-                <a:lnTo>
-                  <a:pt x="1459982" y="3652991"/>
-                </a:lnTo>
-                <a:close/>
-                <a:lnTo>
-                  <a:pt x="1466710" y="3613989"/>
-                </a:lnTo>
-                <a:close/>
-                <a:lnTo>
-                  <a:pt x="1473438" y="3577725"/>
-                </a:lnTo>
-                <a:close/>
-                <a:lnTo>
-                  <a:pt x="1480166" y="3540788"/>
-                </a:lnTo>
-                <a:close/>
-                <a:lnTo>
-                  <a:pt x="1486894" y="3501167"/>
-                </a:lnTo>
-                <a:close/>
-                <a:lnTo>
-                  <a:pt x="1493622" y="3459958"/>
-                </a:lnTo>
-                <a:close/>
-                <a:lnTo>
-                  <a:pt x="1500350" y="3420298"/>
-                </a:lnTo>
-                <a:close/>
-                <a:lnTo>
-                  <a:pt x="1507078" y="3383555"/>
-                </a:lnTo>
-                <a:close/>
-                <a:lnTo>
-                  <a:pt x="1513806" y="3344281"/>
-                </a:lnTo>
-                <a:close/>
-                <a:lnTo>
-                  <a:pt x="1520534" y="3303367"/>
-                </a:lnTo>
-                <a:close/>
-                <a:lnTo>
-                  <a:pt x="1527262" y="3263128"/>
-                </a:lnTo>
-                <a:close/>
-                <a:lnTo>
-                  <a:pt x="1533990" y="3222774"/>
-                </a:lnTo>
-                <a:close/>
-                <a:lnTo>
-                  <a:pt x="1540718" y="3182370"/>
-                </a:lnTo>
-                <a:close/>
-                <a:lnTo>
-                  <a:pt x="1547446" y="3142037"/>
-                </a:lnTo>
-                <a:close/>
-                <a:lnTo>
-                  <a:pt x="1554174" y="3101657"/>
-                </a:lnTo>
-                <a:close/>
-                <a:lnTo>
-                  <a:pt x="1560902" y="3061158"/>
-                </a:lnTo>
-                <a:close/>
-                <a:lnTo>
-                  <a:pt x="1567630" y="3021326"/>
-                </a:lnTo>
-                <a:close/>
-                <a:lnTo>
-                  <a:pt x="1574358" y="2979920"/>
-                </a:lnTo>
-                <a:close/>
-                <a:lnTo>
-                  <a:pt x="1581086" y="2935923"/>
-                </a:lnTo>
-                <a:close/>
-                <a:lnTo>
-                  <a:pt x="1587814" y="2894750"/>
-                </a:lnTo>
-                <a:close/>
-                <a:lnTo>
-                  <a:pt x="1594542" y="2855395"/>
-                </a:lnTo>
-                <a:close/>
-                <a:lnTo>
-                  <a:pt x="1601270" y="2814059"/>
-                </a:lnTo>
-                <a:close/>
-                <a:lnTo>
-                  <a:pt x="1607998" y="2770014"/>
-                </a:lnTo>
-                <a:close/>
-                <a:lnTo>
-                  <a:pt x="1614726" y="2729153"/>
-                </a:lnTo>
-                <a:close/>
-                <a:lnTo>
-                  <a:pt x="1621454" y="2687937"/>
-                </a:lnTo>
-                <a:close/>
-                <a:lnTo>
-                  <a:pt x="1628182" y="2643515"/>
-                </a:lnTo>
-                <a:close/>
-                <a:lnTo>
-                  <a:pt x="1634911" y="2599422"/>
-                </a:lnTo>
-                <a:close/>
-                <a:lnTo>
-                  <a:pt x="1641639" y="2558637"/>
-                </a:lnTo>
-                <a:close/>
-                <a:lnTo>
-                  <a:pt x="1648367" y="2517433"/>
-                </a:lnTo>
-                <a:close/>
-                <a:lnTo>
-                  <a:pt x="1655095" y="2473251"/>
-                </a:lnTo>
-                <a:close/>
-                <a:lnTo>
-                  <a:pt x="1661823" y="2429454"/>
-                </a:lnTo>
-                <a:close/>
-                <a:lnTo>
-                  <a:pt x="1668551" y="2385822"/>
-                </a:lnTo>
-                <a:close/>
-                <a:lnTo>
-                  <a:pt x="1675279" y="2342049"/>
-                </a:lnTo>
-                <a:close/>
-                <a:lnTo>
-                  <a:pt x="1682007" y="2298323"/>
-                </a:lnTo>
-                <a:close/>
-                <a:lnTo>
-                  <a:pt x="1688735" y="2254597"/>
-                </a:lnTo>
-                <a:close/>
-                <a:lnTo>
-                  <a:pt x="1695463" y="2210851"/>
-                </a:lnTo>
-                <a:close/>
-                <a:lnTo>
-                  <a:pt x="1702191" y="2167139"/>
-                </a:lnTo>
-                <a:close/>
-                <a:lnTo>
-                  <a:pt x="1708919" y="2123416"/>
-                </a:lnTo>
-                <a:close/>
-                <a:lnTo>
-                  <a:pt x="1715647" y="2079521"/>
-                </a:lnTo>
-                <a:close/>
-                <a:lnTo>
-                  <a:pt x="1722375" y="2036315"/>
-                </a:lnTo>
-                <a:close/>
-                <a:lnTo>
-                  <a:pt x="1729103" y="1991849"/>
-                </a:lnTo>
-                <a:close/>
-                <a:lnTo>
-                  <a:pt x="1735831" y="1944402"/>
-                </a:lnTo>
-                <a:close/>
-                <a:lnTo>
-                  <a:pt x="1742559" y="1900271"/>
-                </a:lnTo>
-                <a:close/>
-                <a:lnTo>
-                  <a:pt x="1749287" y="1855221"/>
-                </a:lnTo>
-                <a:close/>
-                <a:lnTo>
-                  <a:pt x="1756015" y="1808045"/>
-                </a:lnTo>
-                <a:close/>
-                <a:lnTo>
-                  <a:pt x="1762743" y="1764604"/>
-                </a:lnTo>
-                <a:close/>
-                <a:lnTo>
-                  <a:pt x="1769471" y="1718354"/>
-                </a:lnTo>
-                <a:close/>
-                <a:lnTo>
-                  <a:pt x="1776199" y="1672056"/>
-                </a:lnTo>
-                <a:close/>
-                <a:lnTo>
-                  <a:pt x="1782927" y="1628645"/>
-                </a:lnTo>
-                <a:close/>
-                <a:lnTo>
-                  <a:pt x="1789655" y="1582030"/>
-                </a:lnTo>
-                <a:close/>
-                <a:lnTo>
-                  <a:pt x="1796383" y="1533940"/>
-                </a:lnTo>
-                <a:close/>
-                <a:lnTo>
-                  <a:pt x="1803111" y="1488155"/>
-                </a:lnTo>
-                <a:close/>
-                <a:lnTo>
-                  <a:pt x="1809839" y="1444655"/>
-                </a:lnTo>
-                <a:close/>
-                <a:lnTo>
-                  <a:pt x="1816567" y="1398121"/>
-                </a:lnTo>
-                <a:close/>
-                <a:lnTo>
-                  <a:pt x="1823295" y="1350568"/>
-                </a:lnTo>
-                <a:close/>
-                <a:lnTo>
-                  <a:pt x="1830023" y="1303622"/>
-                </a:lnTo>
-                <a:close/>
-                <a:lnTo>
-                  <a:pt x="1836751" y="1256513"/>
-                </a:lnTo>
-                <a:close/>
-                <a:lnTo>
-                  <a:pt x="1843479" y="1209401"/>
-                </a:lnTo>
-                <a:close/>
-                <a:lnTo>
-                  <a:pt x="1850207" y="1162317"/>
-                </a:lnTo>
-                <a:close/>
-                <a:lnTo>
-                  <a:pt x="1856935" y="1115215"/>
-                </a:lnTo>
-                <a:close/>
-                <a:lnTo>
-                  <a:pt x="1863663" y="1068113"/>
-                </a:lnTo>
-                <a:close/>
-                <a:lnTo>
-                  <a:pt x="1870391" y="1021059"/>
-                </a:lnTo>
-                <a:close/>
-                <a:lnTo>
-                  <a:pt x="1877119" y="973852"/>
-                </a:lnTo>
-                <a:close/>
-                <a:lnTo>
-                  <a:pt x="1883847" y="926848"/>
-                </a:lnTo>
-                <a:close/>
-                <a:lnTo>
-                  <a:pt x="1890576" y="880177"/>
-                </a:lnTo>
-                <a:close/>
-                <a:lnTo>
-                  <a:pt x="1897304" y="830389"/>
-                </a:lnTo>
-                <a:close/>
-                <a:lnTo>
-                  <a:pt x="1904032" y="780564"/>
-                </a:lnTo>
-                <a:close/>
-                <a:lnTo>
-                  <a:pt x="1910760" y="733852"/>
-                </a:lnTo>
-                <a:close/>
-                <a:lnTo>
-                  <a:pt x="1917488" y="686721"/>
-                </a:lnTo>
-                <a:close/>
-                <a:lnTo>
-                  <a:pt x="1924216" y="640097"/>
-                </a:lnTo>
-                <a:close/>
-                <a:lnTo>
-                  <a:pt x="1930944" y="591923"/>
-                </a:lnTo>
-                <a:close/>
-                <a:lnTo>
-                  <a:pt x="1937672" y="541166"/>
-                </a:lnTo>
-                <a:close/>
-                <a:lnTo>
-                  <a:pt x="1944400" y="493996"/>
-                </a:lnTo>
-                <a:close/>
-                <a:lnTo>
-                  <a:pt x="1951128" y="445122"/>
-                </a:lnTo>
-                <a:close/>
-                <a:lnTo>
-                  <a:pt x="1957856" y="394879"/>
-                </a:lnTo>
-                <a:close/>
-                <a:lnTo>
-                  <a:pt x="1964584" y="348159"/>
-                </a:lnTo>
-                <a:close/>
-                <a:lnTo>
-                  <a:pt x="1971312" y="298133"/>
-                </a:lnTo>
-                <a:close/>
-                <a:lnTo>
-                  <a:pt x="1978040" y="248925"/>
-                </a:lnTo>
-                <a:close/>
-                <a:lnTo>
-                  <a:pt x="1984768" y="202002"/>
-                </a:lnTo>
-                <a:close/>
-                <a:lnTo>
-                  <a:pt x="1991496" y="151604"/>
-                </a:lnTo>
-                <a:close/>
-                <a:lnTo>
-                  <a:pt x="1998224" y="100756"/>
-                </a:lnTo>
-                <a:close/>
-                <a:lnTo>
-                  <a:pt x="2004952" y="50570"/>
-                </a:lnTo>
-                <a:close/>
-                <a:lnTo>
-                  <a:pt x="2011680" y="0"/>
+                  <a:pt x="4129" y="1825305"/>
+                </a:lnTo>
+                <a:close/>
+                <a:lnTo>
+                  <a:pt x="8257" y="1823609"/>
+                </a:lnTo>
+                <a:close/>
+                <a:lnTo>
+                  <a:pt x="12386" y="1821883"/>
+                </a:lnTo>
+                <a:close/>
+                <a:lnTo>
+                  <a:pt x="16514" y="1820127"/>
+                </a:lnTo>
+                <a:close/>
+                <a:lnTo>
+                  <a:pt x="20643" y="1818341"/>
+                </a:lnTo>
+                <a:close/>
+                <a:lnTo>
+                  <a:pt x="24771" y="1816526"/>
+                </a:lnTo>
+                <a:close/>
+                <a:lnTo>
+                  <a:pt x="28900" y="1814680"/>
+                </a:lnTo>
+                <a:close/>
+                <a:lnTo>
+                  <a:pt x="33028" y="1812805"/>
+                </a:lnTo>
+                <a:close/>
+                <a:lnTo>
+                  <a:pt x="37157" y="1810900"/>
+                </a:lnTo>
+                <a:close/>
+                <a:lnTo>
+                  <a:pt x="41286" y="1808965"/>
+                </a:lnTo>
+                <a:close/>
+                <a:lnTo>
+                  <a:pt x="45414" y="1807001"/>
+                </a:lnTo>
+                <a:close/>
+                <a:lnTo>
+                  <a:pt x="49543" y="1805006"/>
+                </a:lnTo>
+                <a:close/>
+                <a:lnTo>
+                  <a:pt x="53671" y="1802982"/>
+                </a:lnTo>
+                <a:close/>
+                <a:lnTo>
+                  <a:pt x="57800" y="1800928"/>
+                </a:lnTo>
+                <a:close/>
+                <a:lnTo>
+                  <a:pt x="61928" y="1798844"/>
+                </a:lnTo>
+                <a:close/>
+                <a:lnTo>
+                  <a:pt x="66057" y="1796731"/>
+                </a:lnTo>
+                <a:close/>
+                <a:lnTo>
+                  <a:pt x="70186" y="1794587"/>
+                </a:lnTo>
+                <a:close/>
+                <a:lnTo>
+                  <a:pt x="74314" y="1792414"/>
+                </a:lnTo>
+                <a:close/>
+                <a:lnTo>
+                  <a:pt x="78443" y="1790211"/>
+                </a:lnTo>
+                <a:close/>
+                <a:lnTo>
+                  <a:pt x="82571" y="1787977"/>
+                </a:lnTo>
+                <a:close/>
+                <a:lnTo>
+                  <a:pt x="86700" y="1785715"/>
+                </a:lnTo>
+                <a:close/>
+                <a:lnTo>
+                  <a:pt x="90828" y="1783422"/>
+                </a:lnTo>
+                <a:close/>
+                <a:lnTo>
+                  <a:pt x="94957" y="1781100"/>
+                </a:lnTo>
+                <a:close/>
+                <a:lnTo>
+                  <a:pt x="99085" y="1778747"/>
+                </a:lnTo>
+                <a:close/>
+                <a:lnTo>
+                  <a:pt x="103214" y="1776365"/>
+                </a:lnTo>
+                <a:close/>
+                <a:lnTo>
+                  <a:pt x="107343" y="1773953"/>
+                </a:lnTo>
+                <a:close/>
+                <a:lnTo>
+                  <a:pt x="111471" y="1771511"/>
+                </a:lnTo>
+                <a:close/>
+                <a:lnTo>
+                  <a:pt x="115600" y="1769040"/>
+                </a:lnTo>
+                <a:close/>
+                <a:lnTo>
+                  <a:pt x="119728" y="1766538"/>
+                </a:lnTo>
+                <a:close/>
+                <a:lnTo>
+                  <a:pt x="123857" y="1764007"/>
+                </a:lnTo>
+                <a:close/>
+                <a:lnTo>
+                  <a:pt x="127985" y="1761446"/>
+                </a:lnTo>
+                <a:close/>
+                <a:lnTo>
+                  <a:pt x="132114" y="1758855"/>
+                </a:lnTo>
+                <a:close/>
+                <a:lnTo>
+                  <a:pt x="136243" y="1756234"/>
+                </a:lnTo>
+                <a:close/>
+                <a:lnTo>
+                  <a:pt x="140371" y="1753584"/>
+                </a:lnTo>
+                <a:close/>
+                <a:lnTo>
+                  <a:pt x="144500" y="1750903"/>
+                </a:lnTo>
+                <a:close/>
+                <a:lnTo>
+                  <a:pt x="148628" y="1748193"/>
+                </a:lnTo>
+                <a:close/>
+                <a:lnTo>
+                  <a:pt x="152757" y="1745453"/>
+                </a:lnTo>
+                <a:close/>
+                <a:lnTo>
+                  <a:pt x="156885" y="1742683"/>
+                </a:lnTo>
+                <a:close/>
+                <a:lnTo>
+                  <a:pt x="161014" y="1739883"/>
+                </a:lnTo>
+                <a:close/>
+                <a:lnTo>
+                  <a:pt x="165142" y="1737054"/>
+                </a:lnTo>
+                <a:close/>
+                <a:lnTo>
+                  <a:pt x="169271" y="1734195"/>
+                </a:lnTo>
+                <a:close/>
+                <a:lnTo>
+                  <a:pt x="173400" y="1731305"/>
+                </a:lnTo>
+                <a:close/>
+                <a:lnTo>
+                  <a:pt x="177528" y="1728386"/>
+                </a:lnTo>
+                <a:close/>
+                <a:lnTo>
+                  <a:pt x="181657" y="1725438"/>
+                </a:lnTo>
+                <a:close/>
+                <a:lnTo>
+                  <a:pt x="185785" y="1722459"/>
+                </a:lnTo>
+                <a:close/>
+                <a:lnTo>
+                  <a:pt x="189914" y="1719451"/>
+                </a:lnTo>
+                <a:close/>
+                <a:lnTo>
+                  <a:pt x="194042" y="1716412"/>
+                </a:lnTo>
+                <a:close/>
+                <a:lnTo>
+                  <a:pt x="198171" y="1713344"/>
+                </a:lnTo>
+                <a:close/>
+                <a:lnTo>
+                  <a:pt x="202300" y="1710246"/>
+                </a:lnTo>
+                <a:close/>
+                <a:lnTo>
+                  <a:pt x="206428" y="1707118"/>
+                </a:lnTo>
+                <a:close/>
+                <a:lnTo>
+                  <a:pt x="210557" y="1703961"/>
+                </a:lnTo>
+                <a:close/>
+                <a:lnTo>
+                  <a:pt x="214685" y="1700773"/>
+                </a:lnTo>
+                <a:close/>
+                <a:lnTo>
+                  <a:pt x="218814" y="1697556"/>
+                </a:lnTo>
+                <a:close/>
+                <a:lnTo>
+                  <a:pt x="222942" y="1694309"/>
+                </a:lnTo>
+                <a:close/>
+                <a:lnTo>
+                  <a:pt x="227071" y="1691032"/>
+                </a:lnTo>
+                <a:close/>
+                <a:lnTo>
+                  <a:pt x="231199" y="1687726"/>
+                </a:lnTo>
+                <a:close/>
+                <a:lnTo>
+                  <a:pt x="235328" y="1684389"/>
+                </a:lnTo>
+                <a:close/>
+                <a:lnTo>
+                  <a:pt x="239457" y="1681023"/>
+                </a:lnTo>
+                <a:close/>
+                <a:lnTo>
+                  <a:pt x="243585" y="1677626"/>
+                </a:lnTo>
+                <a:close/>
+                <a:lnTo>
+                  <a:pt x="247714" y="1674200"/>
+                </a:lnTo>
+                <a:close/>
+                <a:lnTo>
+                  <a:pt x="251842" y="1670745"/>
+                </a:lnTo>
+                <a:close/>
+                <a:lnTo>
+                  <a:pt x="255971" y="1667259"/>
+                </a:lnTo>
+                <a:close/>
+                <a:lnTo>
+                  <a:pt x="260099" y="1663743"/>
+                </a:lnTo>
+                <a:close/>
+                <a:lnTo>
+                  <a:pt x="264228" y="1660198"/>
+                </a:lnTo>
+                <a:close/>
+                <a:lnTo>
+                  <a:pt x="268357" y="1656623"/>
+                </a:lnTo>
+                <a:close/>
+                <a:lnTo>
+                  <a:pt x="272485" y="1653018"/>
+                </a:lnTo>
+                <a:close/>
+                <a:lnTo>
+                  <a:pt x="276614" y="1649383"/>
+                </a:lnTo>
+                <a:close/>
+                <a:lnTo>
+                  <a:pt x="280742" y="1645719"/>
+                </a:lnTo>
+                <a:close/>
+                <a:lnTo>
+                  <a:pt x="284871" y="1642024"/>
+                </a:lnTo>
+                <a:close/>
+                <a:lnTo>
+                  <a:pt x="288999" y="1638300"/>
+                </a:lnTo>
+                <a:close/>
+                <a:lnTo>
+                  <a:pt x="293128" y="1634546"/>
+                </a:lnTo>
+                <a:close/>
+                <a:lnTo>
+                  <a:pt x="297256" y="1630762"/>
+                </a:lnTo>
+                <a:close/>
+                <a:lnTo>
+                  <a:pt x="301385" y="1626948"/>
+                </a:lnTo>
+                <a:close/>
+                <a:lnTo>
+                  <a:pt x="305514" y="1623105"/>
+                </a:lnTo>
+                <a:close/>
+                <a:lnTo>
+                  <a:pt x="309642" y="1619231"/>
+                </a:lnTo>
+                <a:close/>
+                <a:lnTo>
+                  <a:pt x="313771" y="1615328"/>
+                </a:lnTo>
+                <a:close/>
+                <a:lnTo>
+                  <a:pt x="317899" y="1611395"/>
+                </a:lnTo>
+                <a:close/>
+                <a:lnTo>
+                  <a:pt x="322028" y="1607432"/>
+                </a:lnTo>
+                <a:close/>
+                <a:lnTo>
+                  <a:pt x="326156" y="1603439"/>
+                </a:lnTo>
+                <a:close/>
+                <a:lnTo>
+                  <a:pt x="330285" y="1599417"/>
+                </a:lnTo>
+                <a:close/>
+                <a:lnTo>
+                  <a:pt x="334414" y="1595364"/>
+                </a:lnTo>
+                <a:close/>
+                <a:lnTo>
+                  <a:pt x="338542" y="1591282"/>
+                </a:lnTo>
+                <a:close/>
+                <a:lnTo>
+                  <a:pt x="342671" y="1587170"/>
+                </a:lnTo>
+                <a:close/>
+                <a:lnTo>
+                  <a:pt x="346799" y="1583029"/>
+                </a:lnTo>
+                <a:close/>
+                <a:lnTo>
+                  <a:pt x="350928" y="1578857"/>
+                </a:lnTo>
+                <a:close/>
+                <a:lnTo>
+                  <a:pt x="355056" y="1574655"/>
+                </a:lnTo>
+                <a:close/>
+                <a:lnTo>
+                  <a:pt x="359185" y="1570424"/>
+                </a:lnTo>
+                <a:close/>
+                <a:lnTo>
+                  <a:pt x="363313" y="1566163"/>
+                </a:lnTo>
+                <a:close/>
+                <a:lnTo>
+                  <a:pt x="367442" y="1561872"/>
+                </a:lnTo>
+                <a:close/>
+                <a:lnTo>
+                  <a:pt x="371571" y="1557551"/>
+                </a:lnTo>
+                <a:close/>
+                <a:lnTo>
+                  <a:pt x="375699" y="1553201"/>
+                </a:lnTo>
+                <a:close/>
+                <a:lnTo>
+                  <a:pt x="379828" y="1548820"/>
+                </a:lnTo>
+                <a:close/>
+                <a:lnTo>
+                  <a:pt x="383956" y="1544410"/>
+                </a:lnTo>
+                <a:close/>
+                <a:lnTo>
+                  <a:pt x="388085" y="1539970"/>
+                </a:lnTo>
+                <a:close/>
+                <a:lnTo>
+                  <a:pt x="392213" y="1535500"/>
+                </a:lnTo>
+                <a:close/>
+                <a:lnTo>
+                  <a:pt x="396342" y="1531000"/>
+                </a:lnTo>
+                <a:close/>
+                <a:lnTo>
+                  <a:pt x="400471" y="1526471"/>
+                </a:lnTo>
+                <a:close/>
+                <a:lnTo>
+                  <a:pt x="404599" y="1521911"/>
+                </a:lnTo>
+                <a:close/>
+                <a:lnTo>
+                  <a:pt x="408728" y="1517322"/>
+                </a:lnTo>
+                <a:close/>
+                <a:lnTo>
+                  <a:pt x="412856" y="1512703"/>
+                </a:lnTo>
+                <a:close/>
+                <a:lnTo>
+                  <a:pt x="416985" y="1508054"/>
+                </a:lnTo>
+                <a:close/>
+                <a:lnTo>
+                  <a:pt x="421113" y="1503376"/>
+                </a:lnTo>
+                <a:close/>
+                <a:lnTo>
+                  <a:pt x="425242" y="1498667"/>
+                </a:lnTo>
+                <a:close/>
+                <a:lnTo>
+                  <a:pt x="429370" y="1493929"/>
+                </a:lnTo>
+                <a:close/>
+                <a:lnTo>
+                  <a:pt x="433499" y="1489161"/>
+                </a:lnTo>
+                <a:close/>
+                <a:lnTo>
+                  <a:pt x="437628" y="1484363"/>
+                </a:lnTo>
+                <a:close/>
+                <a:lnTo>
+                  <a:pt x="441756" y="1479535"/>
+                </a:lnTo>
+                <a:close/>
+                <a:lnTo>
+                  <a:pt x="445885" y="1474677"/>
+                </a:lnTo>
+                <a:close/>
+                <a:lnTo>
+                  <a:pt x="450013" y="1469790"/>
+                </a:lnTo>
+                <a:close/>
+                <a:lnTo>
+                  <a:pt x="454142" y="1464873"/>
+                </a:lnTo>
+                <a:close/>
+                <a:lnTo>
+                  <a:pt x="458270" y="1459926"/>
+                </a:lnTo>
+                <a:close/>
+                <a:lnTo>
+                  <a:pt x="462399" y="1454949"/>
+                </a:lnTo>
+                <a:close/>
+                <a:lnTo>
+                  <a:pt x="466527" y="1449942"/>
+                </a:lnTo>
+                <a:close/>
+                <a:lnTo>
+                  <a:pt x="470656" y="1444905"/>
+                </a:lnTo>
+                <a:close/>
+                <a:lnTo>
+                  <a:pt x="474785" y="1439839"/>
+                </a:lnTo>
+                <a:close/>
+                <a:lnTo>
+                  <a:pt x="478913" y="1434743"/>
+                </a:lnTo>
+                <a:close/>
+                <a:lnTo>
+                  <a:pt x="483042" y="1429617"/>
+                </a:lnTo>
+                <a:close/>
+                <a:lnTo>
+                  <a:pt x="487170" y="1424461"/>
+                </a:lnTo>
+                <a:close/>
+                <a:lnTo>
+                  <a:pt x="491299" y="1419275"/>
+                </a:lnTo>
+                <a:close/>
+                <a:lnTo>
+                  <a:pt x="495427" y="1414060"/>
+                </a:lnTo>
+                <a:close/>
+                <a:lnTo>
+                  <a:pt x="499556" y="1408814"/>
+                </a:lnTo>
+                <a:close/>
+                <a:lnTo>
+                  <a:pt x="503685" y="1403539"/>
+                </a:lnTo>
+                <a:close/>
+                <a:lnTo>
+                  <a:pt x="507813" y="1398234"/>
+                </a:lnTo>
+                <a:close/>
+                <a:lnTo>
+                  <a:pt x="511942" y="1392899"/>
+                </a:lnTo>
+                <a:close/>
+                <a:lnTo>
+                  <a:pt x="516070" y="1387535"/>
+                </a:lnTo>
+                <a:close/>
+                <a:lnTo>
+                  <a:pt x="520199" y="1382140"/>
+                </a:lnTo>
+                <a:close/>
+                <a:lnTo>
+                  <a:pt x="524327" y="1376716"/>
+                </a:lnTo>
+                <a:close/>
+                <a:lnTo>
+                  <a:pt x="528456" y="1371262"/>
+                </a:lnTo>
+                <a:close/>
+                <a:lnTo>
+                  <a:pt x="532584" y="1365778"/>
+                </a:lnTo>
+                <a:close/>
+                <a:lnTo>
+                  <a:pt x="536713" y="1360264"/>
+                </a:lnTo>
+                <a:close/>
+                <a:lnTo>
+                  <a:pt x="540842" y="1354720"/>
+                </a:lnTo>
+                <a:close/>
+                <a:lnTo>
+                  <a:pt x="544970" y="1349147"/>
+                </a:lnTo>
+                <a:close/>
+                <a:lnTo>
+                  <a:pt x="549099" y="1343544"/>
+                </a:lnTo>
+                <a:close/>
+                <a:lnTo>
+                  <a:pt x="553227" y="1337911"/>
+                </a:lnTo>
+                <a:close/>
+                <a:lnTo>
+                  <a:pt x="557356" y="1332248"/>
+                </a:lnTo>
+                <a:close/>
+                <a:lnTo>
+                  <a:pt x="561484" y="1326555"/>
+                </a:lnTo>
+                <a:close/>
+                <a:lnTo>
+                  <a:pt x="565613" y="1320833"/>
+                </a:lnTo>
+                <a:close/>
+                <a:lnTo>
+                  <a:pt x="569742" y="1315080"/>
+                </a:lnTo>
+                <a:close/>
+                <a:lnTo>
+                  <a:pt x="573870" y="1309298"/>
+                </a:lnTo>
+                <a:close/>
+                <a:lnTo>
+                  <a:pt x="577999" y="1303486"/>
+                </a:lnTo>
+                <a:close/>
+                <a:lnTo>
+                  <a:pt x="582127" y="1297644"/>
+                </a:lnTo>
+                <a:close/>
+                <a:lnTo>
+                  <a:pt x="586256" y="1291772"/>
+                </a:lnTo>
+                <a:close/>
+                <a:lnTo>
+                  <a:pt x="590384" y="1285871"/>
+                </a:lnTo>
+                <a:close/>
+                <a:lnTo>
+                  <a:pt x="594513" y="1279940"/>
+                </a:lnTo>
+                <a:close/>
+                <a:lnTo>
+                  <a:pt x="598641" y="1273978"/>
+                </a:lnTo>
+                <a:close/>
+                <a:lnTo>
+                  <a:pt x="602770" y="1267987"/>
+                </a:lnTo>
+                <a:close/>
+                <a:lnTo>
+                  <a:pt x="606899" y="1261967"/>
+                </a:lnTo>
+                <a:close/>
+                <a:lnTo>
+                  <a:pt x="611027" y="1255916"/>
+                </a:lnTo>
+                <a:close/>
+                <a:lnTo>
+                  <a:pt x="615156" y="1249836"/>
+                </a:lnTo>
+                <a:close/>
+                <a:lnTo>
+                  <a:pt x="619284" y="1243725"/>
+                </a:lnTo>
+                <a:close/>
+                <a:lnTo>
+                  <a:pt x="623413" y="1237585"/>
+                </a:lnTo>
+                <a:close/>
+                <a:lnTo>
+                  <a:pt x="627541" y="1231415"/>
+                </a:lnTo>
+                <a:close/>
+                <a:lnTo>
+                  <a:pt x="631670" y="1225216"/>
+                </a:lnTo>
+                <a:close/>
+                <a:lnTo>
+                  <a:pt x="635799" y="1218986"/>
+                </a:lnTo>
+                <a:close/>
+                <a:lnTo>
+                  <a:pt x="639927" y="1212727"/>
+                </a:lnTo>
+                <a:close/>
+                <a:lnTo>
+                  <a:pt x="644056" y="1206437"/>
+                </a:lnTo>
+                <a:close/>
+                <a:lnTo>
+                  <a:pt x="648184" y="1200118"/>
+                </a:lnTo>
+                <a:close/>
+                <a:lnTo>
+                  <a:pt x="652313" y="1193769"/>
+                </a:lnTo>
+                <a:close/>
+                <a:lnTo>
+                  <a:pt x="656441" y="1187391"/>
+                </a:lnTo>
+                <a:close/>
+                <a:lnTo>
+                  <a:pt x="660570" y="1180982"/>
+                </a:lnTo>
+                <a:close/>
+                <a:lnTo>
+                  <a:pt x="664698" y="1174544"/>
+                </a:lnTo>
+                <a:close/>
+                <a:lnTo>
+                  <a:pt x="668827" y="1168076"/>
+                </a:lnTo>
+                <a:close/>
+                <a:lnTo>
+                  <a:pt x="672956" y="1161578"/>
+                </a:lnTo>
+                <a:close/>
+                <a:lnTo>
+                  <a:pt x="677084" y="1155050"/>
+                </a:lnTo>
+                <a:close/>
+                <a:lnTo>
+                  <a:pt x="681213" y="1148492"/>
+                </a:lnTo>
+                <a:close/>
+                <a:lnTo>
+                  <a:pt x="685341" y="1141905"/>
+                </a:lnTo>
+                <a:close/>
+                <a:lnTo>
+                  <a:pt x="689470" y="1135287"/>
+                </a:lnTo>
+                <a:close/>
+                <a:lnTo>
+                  <a:pt x="693598" y="1128640"/>
+                </a:lnTo>
+                <a:close/>
+                <a:lnTo>
+                  <a:pt x="697727" y="1121963"/>
+                </a:lnTo>
+                <a:close/>
+                <a:lnTo>
+                  <a:pt x="701856" y="1115257"/>
+                </a:lnTo>
+                <a:close/>
+                <a:lnTo>
+                  <a:pt x="705984" y="1108520"/>
+                </a:lnTo>
+                <a:close/>
+                <a:lnTo>
+                  <a:pt x="710113" y="1101754"/>
+                </a:lnTo>
+                <a:close/>
+                <a:lnTo>
+                  <a:pt x="714241" y="1094957"/>
+                </a:lnTo>
+                <a:close/>
+                <a:lnTo>
+                  <a:pt x="718370" y="1088131"/>
+                </a:lnTo>
+                <a:close/>
+                <a:lnTo>
+                  <a:pt x="722498" y="1081275"/>
+                </a:lnTo>
+                <a:close/>
+                <a:lnTo>
+                  <a:pt x="726627" y="1074390"/>
+                </a:lnTo>
+                <a:close/>
+                <a:lnTo>
+                  <a:pt x="730755" y="1067474"/>
+                </a:lnTo>
+                <a:close/>
+                <a:lnTo>
+                  <a:pt x="734884" y="1060529"/>
+                </a:lnTo>
+                <a:close/>
+                <a:lnTo>
+                  <a:pt x="739013" y="1053554"/>
+                </a:lnTo>
+                <a:close/>
+                <a:lnTo>
+                  <a:pt x="743141" y="1046549"/>
+                </a:lnTo>
+                <a:close/>
+                <a:lnTo>
+                  <a:pt x="747270" y="1039514"/>
+                </a:lnTo>
+                <a:close/>
+                <a:lnTo>
+                  <a:pt x="751398" y="1032449"/>
+                </a:lnTo>
+                <a:close/>
+                <a:lnTo>
+                  <a:pt x="755527" y="1025355"/>
+                </a:lnTo>
+                <a:close/>
+                <a:lnTo>
+                  <a:pt x="759655" y="1018230"/>
+                </a:lnTo>
+                <a:close/>
+                <a:lnTo>
+                  <a:pt x="763784" y="1011076"/>
+                </a:lnTo>
+                <a:close/>
+                <a:lnTo>
+                  <a:pt x="767913" y="1003892"/>
+                </a:lnTo>
+                <a:close/>
+                <a:lnTo>
+                  <a:pt x="772041" y="996678"/>
+                </a:lnTo>
+                <a:close/>
+                <a:lnTo>
+                  <a:pt x="776170" y="989435"/>
+                </a:lnTo>
+                <a:close/>
+                <a:lnTo>
+                  <a:pt x="780298" y="982161"/>
+                </a:lnTo>
+                <a:close/>
+                <a:lnTo>
+                  <a:pt x="784427" y="974858"/>
+                </a:lnTo>
+                <a:close/>
+                <a:lnTo>
+                  <a:pt x="788555" y="967525"/>
+                </a:lnTo>
+                <a:close/>
+                <a:lnTo>
+                  <a:pt x="792684" y="960162"/>
+                </a:lnTo>
+                <a:close/>
+                <a:lnTo>
+                  <a:pt x="796812" y="952769"/>
+                </a:lnTo>
+                <a:close/>
+                <a:lnTo>
+                  <a:pt x="800941" y="945347"/>
+                </a:lnTo>
+                <a:close/>
+                <a:lnTo>
+                  <a:pt x="805070" y="937894"/>
+                </a:lnTo>
+                <a:close/>
+                <a:lnTo>
+                  <a:pt x="809198" y="930412"/>
+                </a:lnTo>
+                <a:close/>
+                <a:lnTo>
+                  <a:pt x="813327" y="922900"/>
+                </a:lnTo>
+                <a:close/>
+                <a:lnTo>
+                  <a:pt x="817455" y="915358"/>
+                </a:lnTo>
+                <a:close/>
+                <a:lnTo>
+                  <a:pt x="821584" y="907786"/>
+                </a:lnTo>
+                <a:close/>
+                <a:lnTo>
+                  <a:pt x="825712" y="900185"/>
+                </a:lnTo>
+                <a:close/>
+                <a:lnTo>
+                  <a:pt x="829841" y="892553"/>
+                </a:lnTo>
+                <a:close/>
+                <a:lnTo>
+                  <a:pt x="833969" y="884892"/>
+                </a:lnTo>
+                <a:close/>
+                <a:lnTo>
+                  <a:pt x="838098" y="877201"/>
+                </a:lnTo>
+                <a:close/>
+                <a:lnTo>
+                  <a:pt x="842227" y="869480"/>
+                </a:lnTo>
+                <a:close/>
+                <a:lnTo>
+                  <a:pt x="846355" y="861730"/>
+                </a:lnTo>
+                <a:close/>
+                <a:lnTo>
+                  <a:pt x="850484" y="853949"/>
+                </a:lnTo>
+                <a:close/>
+                <a:lnTo>
+                  <a:pt x="854612" y="846139"/>
+                </a:lnTo>
+                <a:close/>
+                <a:lnTo>
+                  <a:pt x="858741" y="838299"/>
+                </a:lnTo>
+                <a:close/>
+                <a:lnTo>
+                  <a:pt x="862869" y="830429"/>
+                </a:lnTo>
+                <a:close/>
+                <a:lnTo>
+                  <a:pt x="866998" y="822529"/>
+                </a:lnTo>
+                <a:close/>
+                <a:lnTo>
+                  <a:pt x="871127" y="814600"/>
+                </a:lnTo>
+                <a:close/>
+                <a:lnTo>
+                  <a:pt x="875255" y="806640"/>
+                </a:lnTo>
+                <a:close/>
+                <a:lnTo>
+                  <a:pt x="879384" y="798651"/>
+                </a:lnTo>
+                <a:close/>
+                <a:lnTo>
+                  <a:pt x="883512" y="790632"/>
+                </a:lnTo>
+                <a:close/>
+                <a:lnTo>
+                  <a:pt x="887641" y="782583"/>
+                </a:lnTo>
+                <a:close/>
+                <a:lnTo>
+                  <a:pt x="891769" y="774504"/>
+                </a:lnTo>
+                <a:close/>
+                <a:lnTo>
+                  <a:pt x="895898" y="766396"/>
+                </a:lnTo>
+                <a:close/>
+                <a:lnTo>
+                  <a:pt x="900026" y="758257"/>
+                </a:lnTo>
+                <a:close/>
+                <a:lnTo>
+                  <a:pt x="904155" y="750089"/>
+                </a:lnTo>
+                <a:close/>
+                <a:lnTo>
+                  <a:pt x="908284" y="741891"/>
+                </a:lnTo>
+                <a:close/>
+                <a:lnTo>
+                  <a:pt x="912412" y="733663"/>
+                </a:lnTo>
+                <a:close/>
+                <a:lnTo>
+                  <a:pt x="916541" y="725406"/>
+                </a:lnTo>
+                <a:close/>
+                <a:lnTo>
+                  <a:pt x="920669" y="717118"/>
+                </a:lnTo>
+                <a:close/>
+                <a:lnTo>
+                  <a:pt x="924798" y="708801"/>
+                </a:lnTo>
+                <a:close/>
+                <a:lnTo>
+                  <a:pt x="928926" y="700454"/>
+                </a:lnTo>
+                <a:close/>
+                <a:lnTo>
+                  <a:pt x="933055" y="692077"/>
+                </a:lnTo>
+                <a:close/>
+                <a:lnTo>
+                  <a:pt x="937184" y="683670"/>
+                </a:lnTo>
+                <a:close/>
+                <a:lnTo>
+                  <a:pt x="941312" y="675233"/>
+                </a:lnTo>
+                <a:close/>
+                <a:lnTo>
+                  <a:pt x="945441" y="666767"/>
+                </a:lnTo>
+                <a:close/>
+                <a:lnTo>
+                  <a:pt x="949569" y="658270"/>
+                </a:lnTo>
+                <a:close/>
+                <a:lnTo>
+                  <a:pt x="953698" y="649744"/>
+                </a:lnTo>
+                <a:close/>
+                <a:lnTo>
+                  <a:pt x="957826" y="641188"/>
+                </a:lnTo>
+                <a:close/>
+                <a:lnTo>
+                  <a:pt x="961955" y="632603"/>
+                </a:lnTo>
+                <a:close/>
+                <a:lnTo>
+                  <a:pt x="966083" y="623987"/>
+                </a:lnTo>
+                <a:close/>
+                <a:lnTo>
+                  <a:pt x="970212" y="615342"/>
+                </a:lnTo>
+                <a:close/>
+                <a:lnTo>
+                  <a:pt x="974341" y="606666"/>
+                </a:lnTo>
+                <a:close/>
+                <a:lnTo>
+                  <a:pt x="978469" y="597961"/>
+                </a:lnTo>
+                <a:close/>
+                <a:lnTo>
+                  <a:pt x="982598" y="589226"/>
+                </a:lnTo>
+                <a:close/>
+                <a:lnTo>
+                  <a:pt x="986726" y="580462"/>
+                </a:lnTo>
+                <a:close/>
+                <a:lnTo>
+                  <a:pt x="990855" y="571667"/>
+                </a:lnTo>
+                <a:close/>
+                <a:lnTo>
+                  <a:pt x="994983" y="562843"/>
+                </a:lnTo>
+                <a:close/>
+                <a:lnTo>
+                  <a:pt x="999112" y="553989"/>
+                </a:lnTo>
+                <a:close/>
+                <a:lnTo>
+                  <a:pt x="1003241" y="545105"/>
+                </a:lnTo>
+                <a:close/>
+                <a:lnTo>
+                  <a:pt x="1007369" y="536191"/>
+                </a:lnTo>
+                <a:close/>
+                <a:lnTo>
+                  <a:pt x="1011498" y="527247"/>
+                </a:lnTo>
+                <a:close/>
+                <a:lnTo>
+                  <a:pt x="1015626" y="518274"/>
+                </a:lnTo>
+                <a:close/>
+                <a:lnTo>
+                  <a:pt x="1019755" y="509270"/>
+                </a:lnTo>
+                <a:close/>
+                <a:lnTo>
+                  <a:pt x="1023883" y="500237"/>
+                </a:lnTo>
+                <a:close/>
+                <a:lnTo>
+                  <a:pt x="1028012" y="491174"/>
+                </a:lnTo>
+                <a:close/>
+                <a:lnTo>
+                  <a:pt x="1032140" y="482082"/>
+                </a:lnTo>
+                <a:close/>
+                <a:lnTo>
+                  <a:pt x="1036269" y="472959"/>
+                </a:lnTo>
+                <a:close/>
+                <a:lnTo>
+                  <a:pt x="1040398" y="463807"/>
+                </a:lnTo>
+                <a:close/>
+                <a:lnTo>
+                  <a:pt x="1044526" y="454624"/>
+                </a:lnTo>
+                <a:close/>
+                <a:lnTo>
+                  <a:pt x="1048655" y="445412"/>
+                </a:lnTo>
+                <a:close/>
+                <a:lnTo>
+                  <a:pt x="1052783" y="436170"/>
+                </a:lnTo>
+                <a:close/>
+                <a:lnTo>
+                  <a:pt x="1056912" y="426899"/>
+                </a:lnTo>
+                <a:close/>
+                <a:lnTo>
+                  <a:pt x="1061040" y="417597"/>
+                </a:lnTo>
+                <a:close/>
+                <a:lnTo>
+                  <a:pt x="1065169" y="408266"/>
+                </a:lnTo>
+                <a:close/>
+                <a:lnTo>
+                  <a:pt x="1069298" y="398904"/>
+                </a:lnTo>
+                <a:close/>
+                <a:lnTo>
+                  <a:pt x="1073426" y="389513"/>
+                </a:lnTo>
+                <a:close/>
+                <a:lnTo>
+                  <a:pt x="1077555" y="380093"/>
+                </a:lnTo>
+                <a:close/>
+                <a:lnTo>
+                  <a:pt x="1081683" y="370642"/>
+                </a:lnTo>
+                <a:close/>
+                <a:lnTo>
+                  <a:pt x="1085812" y="361161"/>
+                </a:lnTo>
+                <a:close/>
+                <a:lnTo>
+                  <a:pt x="1089940" y="351651"/>
+                </a:lnTo>
+                <a:close/>
+                <a:lnTo>
+                  <a:pt x="1094069" y="342111"/>
+                </a:lnTo>
+                <a:close/>
+                <a:lnTo>
+                  <a:pt x="1098197" y="332541"/>
+                </a:lnTo>
+                <a:close/>
+                <a:lnTo>
+                  <a:pt x="1102326" y="322941"/>
+                </a:lnTo>
+                <a:close/>
+                <a:lnTo>
+                  <a:pt x="1106455" y="313312"/>
+                </a:lnTo>
+                <a:close/>
+                <a:lnTo>
+                  <a:pt x="1110583" y="303652"/>
+                </a:lnTo>
+                <a:close/>
+                <a:lnTo>
+                  <a:pt x="1114712" y="293963"/>
+                </a:lnTo>
+                <a:close/>
+                <a:lnTo>
+                  <a:pt x="1118840" y="284244"/>
+                </a:lnTo>
+                <a:close/>
+                <a:lnTo>
+                  <a:pt x="1122969" y="274495"/>
+                </a:lnTo>
+                <a:close/>
+                <a:lnTo>
+                  <a:pt x="1127097" y="264716"/>
+                </a:lnTo>
+                <a:close/>
+                <a:lnTo>
+                  <a:pt x="1131226" y="254907"/>
+                </a:lnTo>
+                <a:close/>
+                <a:lnTo>
+                  <a:pt x="1135355" y="245069"/>
+                </a:lnTo>
+                <a:close/>
+                <a:lnTo>
+                  <a:pt x="1139483" y="235201"/>
+                </a:lnTo>
+                <a:close/>
+                <a:lnTo>
+                  <a:pt x="1143612" y="225303"/>
+                </a:lnTo>
+                <a:close/>
+                <a:lnTo>
+                  <a:pt x="1147740" y="215375"/>
+                </a:lnTo>
+                <a:close/>
+                <a:lnTo>
+                  <a:pt x="1151869" y="205417"/>
+                </a:lnTo>
+                <a:close/>
+                <a:lnTo>
+                  <a:pt x="1155997" y="195430"/>
+                </a:lnTo>
+                <a:close/>
+                <a:lnTo>
+                  <a:pt x="1160126" y="185412"/>
+                </a:lnTo>
+                <a:close/>
+                <a:lnTo>
+                  <a:pt x="1164254" y="175365"/>
+                </a:lnTo>
+                <a:close/>
+                <a:lnTo>
+                  <a:pt x="1168383" y="165288"/>
+                </a:lnTo>
+                <a:close/>
+                <a:lnTo>
+                  <a:pt x="1172512" y="155181"/>
+                </a:lnTo>
+                <a:close/>
+                <a:lnTo>
+                  <a:pt x="1176640" y="145045"/>
+                </a:lnTo>
+                <a:close/>
+                <a:lnTo>
+                  <a:pt x="1180769" y="134878"/>
+                </a:lnTo>
+                <a:close/>
+                <a:lnTo>
+                  <a:pt x="1184897" y="124682"/>
+                </a:lnTo>
+                <a:close/>
+                <a:lnTo>
+                  <a:pt x="1189026" y="114456"/>
+                </a:lnTo>
+                <a:close/>
+                <a:lnTo>
+                  <a:pt x="1193154" y="104200"/>
+                </a:lnTo>
+                <a:close/>
+                <a:lnTo>
+                  <a:pt x="1197283" y="93914"/>
+                </a:lnTo>
+                <a:close/>
+                <a:lnTo>
+                  <a:pt x="1201412" y="83598"/>
+                </a:lnTo>
+                <a:close/>
+                <a:lnTo>
+                  <a:pt x="1205540" y="73253"/>
+                </a:lnTo>
+                <a:close/>
+                <a:lnTo>
+                  <a:pt x="1209669" y="62878"/>
+                </a:lnTo>
+                <a:close/>
+                <a:lnTo>
+                  <a:pt x="1213797" y="52473"/>
+                </a:lnTo>
+                <a:close/>
+                <a:lnTo>
+                  <a:pt x="1217926" y="42038"/>
+                </a:lnTo>
+                <a:close/>
+                <a:lnTo>
+                  <a:pt x="1222054" y="31573"/>
+                </a:lnTo>
+                <a:close/>
+                <a:lnTo>
+                  <a:pt x="1226183" y="21078"/>
+                </a:lnTo>
+                <a:close/>
+                <a:lnTo>
+                  <a:pt x="1230311" y="10554"/>
+                </a:lnTo>
+                <a:close/>
+                <a:lnTo>
+                  <a:pt x="1234440" y="0"/>
                 </a:lnTo>
                 <a:close/>
               </a:path>
             </a:pathLst>
           </a:custGeom>
-          <a:ln w="31750">
+          <a:ln w="38100">
             <a:solidFill>
-              <a:srgbClr val="FFFFFF"/>
+              <a:srgbClr val="000000"/>
             </a:solidFill>
           </a:ln>
         </p:spPr>
@@ -4423,8 +4423,8 @@
         </p:nvCxnSpPr>
         <p:spPr>
           <a:xfrm flipV="1">
-            <a:off x="6400800.0" y="514350.0"/>
-            <a:ext cx="0.0" cy="2057400.0"/>
+            <a:off x="5577840.0" y="1229410.8"/>
+            <a:ext cx="0.0" cy="1342339.2"/>
           </a:xfrm>
           <a:prstGeom prst="line">
             <a:avLst/>
@@ -4459,8 +4459,8 @@
         </p:nvCxnSpPr>
         <p:spPr>
           <a:xfrm>
-            <a:off x="4572000.0" y="514350.0"/>
-            <a:ext cx="1828800.0" cy="0.0"/>
+            <a:off x="4572000.0" y="1229410.8"/>
+            <a:ext cx="1005840.0" cy="0.0"/>
           </a:xfrm>
           <a:prstGeom prst="line">
             <a:avLst/>
@@ -4495,8 +4495,8 @@
         </p:nvSpPr>
         <p:spPr>
           <a:xfrm>
-            <a:off x="6350000" y="463550"/>
-            <a:ext cx="101600" cy="101600"/>
+            <a:off x="5501640" y="1153210"/>
+            <a:ext cx="152400" cy="152400"/>
           </a:xfrm>
           <a:prstGeom prst="ellipse">
             <a:avLst/>
@@ -4532,23 +4532,921 @@
           </a:p>
         </p:txBody>
       </p:sp>
+      <p:sp>
+        <p:nvSpPr>
+          <p:cNvPr id="8" name="Freeform 7"/>
+          <p:cNvSpPr/>
+          <p:nvPr/>
+        </p:nvSpPr>
+        <p:spPr>
+          <a:xfrm>
+            <a:off x="5349240" y="1308049"/>
+            <a:ext cx="182880" cy="277978"/>
+          </a:xfrm>
+          <a:custGeom>
+            <a:avLst/>
+            <a:gdLst/>
+            <a:ahLst/>
+            <a:cxnLst/>
+            <a:rect l="l" t="t" r="r" b="b"/>
+            <a:pathLst>
+              <a:path w="182880" h="277978">
+                <a:moveTo>
+                  <a:pt x="0" y="277978"/>
+                </a:moveTo>
+                <a:lnTo>
+                  <a:pt x="1847" y="275463"/>
+                </a:lnTo>
+                <a:close/>
+                <a:lnTo>
+                  <a:pt x="3695" y="272941"/>
+                </a:lnTo>
+                <a:close/>
+                <a:lnTo>
+                  <a:pt x="5542" y="270414"/>
+                </a:lnTo>
+                <a:close/>
+                <a:lnTo>
+                  <a:pt x="7389" y="267881"/>
+                </a:lnTo>
+                <a:close/>
+                <a:lnTo>
+                  <a:pt x="9236" y="265342"/>
+                </a:lnTo>
+                <a:close/>
+                <a:lnTo>
+                  <a:pt x="11084" y="262797"/>
+                </a:lnTo>
+                <a:close/>
+                <a:lnTo>
+                  <a:pt x="12931" y="260245"/>
+                </a:lnTo>
+                <a:close/>
+                <a:lnTo>
+                  <a:pt x="14778" y="257688"/>
+                </a:lnTo>
+                <a:close/>
+                <a:lnTo>
+                  <a:pt x="16625" y="255125"/>
+                </a:lnTo>
+                <a:close/>
+                <a:lnTo>
+                  <a:pt x="18473" y="252556"/>
+                </a:lnTo>
+                <a:close/>
+                <a:lnTo>
+                  <a:pt x="20320" y="249981"/>
+                </a:lnTo>
+                <a:close/>
+                <a:lnTo>
+                  <a:pt x="22167" y="247400"/>
+                </a:lnTo>
+                <a:close/>
+                <a:lnTo>
+                  <a:pt x="24015" y="244813"/>
+                </a:lnTo>
+                <a:close/>
+                <a:lnTo>
+                  <a:pt x="25862" y="242221"/>
+                </a:lnTo>
+                <a:close/>
+                <a:lnTo>
+                  <a:pt x="27709" y="239622"/>
+                </a:lnTo>
+                <a:close/>
+                <a:lnTo>
+                  <a:pt x="29556" y="237017"/>
+                </a:lnTo>
+                <a:close/>
+                <a:lnTo>
+                  <a:pt x="31404" y="234406"/>
+                </a:lnTo>
+                <a:close/>
+                <a:lnTo>
+                  <a:pt x="33251" y="231789"/>
+                </a:lnTo>
+                <a:close/>
+                <a:lnTo>
+                  <a:pt x="35098" y="229167"/>
+                </a:lnTo>
+                <a:close/>
+                <a:lnTo>
+                  <a:pt x="36945" y="226538"/>
+                </a:lnTo>
+                <a:close/>
+                <a:lnTo>
+                  <a:pt x="38793" y="223903"/>
+                </a:lnTo>
+                <a:close/>
+                <a:lnTo>
+                  <a:pt x="40640" y="221262"/>
+                </a:lnTo>
+                <a:close/>
+                <a:lnTo>
+                  <a:pt x="42487" y="218616"/>
+                </a:lnTo>
+                <a:close/>
+                <a:lnTo>
+                  <a:pt x="44335" y="215963"/>
+                </a:lnTo>
+                <a:close/>
+                <a:lnTo>
+                  <a:pt x="46182" y="213305"/>
+                </a:lnTo>
+                <a:close/>
+                <a:lnTo>
+                  <a:pt x="48029" y="210640"/>
+                </a:lnTo>
+                <a:close/>
+                <a:lnTo>
+                  <a:pt x="49876" y="207970"/>
+                </a:lnTo>
+                <a:close/>
+                <a:lnTo>
+                  <a:pt x="51724" y="205293"/>
+                </a:lnTo>
+                <a:close/>
+                <a:lnTo>
+                  <a:pt x="53571" y="202611"/>
+                </a:lnTo>
+                <a:close/>
+                <a:lnTo>
+                  <a:pt x="55418" y="199922"/>
+                </a:lnTo>
+                <a:close/>
+                <a:lnTo>
+                  <a:pt x="57265" y="197228"/>
+                </a:lnTo>
+                <a:close/>
+                <a:lnTo>
+                  <a:pt x="59113" y="194527"/>
+                </a:lnTo>
+                <a:close/>
+                <a:lnTo>
+                  <a:pt x="60960" y="191821"/>
+                </a:lnTo>
+                <a:close/>
+                <a:lnTo>
+                  <a:pt x="62807" y="189109"/>
+                </a:lnTo>
+                <a:close/>
+                <a:lnTo>
+                  <a:pt x="64655" y="186390"/>
+                </a:lnTo>
+                <a:close/>
+                <a:lnTo>
+                  <a:pt x="66502" y="183666"/>
+                </a:lnTo>
+                <a:close/>
+                <a:lnTo>
+                  <a:pt x="68349" y="180936"/>
+                </a:lnTo>
+                <a:close/>
+                <a:lnTo>
+                  <a:pt x="70196" y="178200"/>
+                </a:lnTo>
+                <a:close/>
+                <a:lnTo>
+                  <a:pt x="72044" y="175458"/>
+                </a:lnTo>
+                <a:close/>
+                <a:lnTo>
+                  <a:pt x="73891" y="172709"/>
+                </a:lnTo>
+                <a:close/>
+                <a:lnTo>
+                  <a:pt x="75738" y="169955"/>
+                </a:lnTo>
+                <a:close/>
+                <a:lnTo>
+                  <a:pt x="77585" y="167195"/>
+                </a:lnTo>
+                <a:close/>
+                <a:lnTo>
+                  <a:pt x="79433" y="164429"/>
+                </a:lnTo>
+                <a:close/>
+                <a:lnTo>
+                  <a:pt x="81280" y="161657"/>
+                </a:lnTo>
+                <a:close/>
+                <a:lnTo>
+                  <a:pt x="83127" y="158879"/>
+                </a:lnTo>
+                <a:close/>
+                <a:lnTo>
+                  <a:pt x="84975" y="156095"/>
+                </a:lnTo>
+                <a:close/>
+                <a:lnTo>
+                  <a:pt x="86822" y="153305"/>
+                </a:lnTo>
+                <a:close/>
+                <a:lnTo>
+                  <a:pt x="88669" y="150509"/>
+                </a:lnTo>
+                <a:close/>
+                <a:lnTo>
+                  <a:pt x="90516" y="147707"/>
+                </a:lnTo>
+                <a:close/>
+                <a:lnTo>
+                  <a:pt x="92364" y="144900"/>
+                </a:lnTo>
+                <a:close/>
+                <a:lnTo>
+                  <a:pt x="94211" y="142086"/>
+                </a:lnTo>
+                <a:close/>
+                <a:lnTo>
+                  <a:pt x="96058" y="139266"/>
+                </a:lnTo>
+                <a:close/>
+                <a:lnTo>
+                  <a:pt x="97905" y="136440"/>
+                </a:lnTo>
+                <a:close/>
+                <a:lnTo>
+                  <a:pt x="99753" y="133608"/>
+                </a:lnTo>
+                <a:close/>
+                <a:lnTo>
+                  <a:pt x="101600" y="130771"/>
+                </a:lnTo>
+                <a:close/>
+                <a:lnTo>
+                  <a:pt x="103447" y="127927"/>
+                </a:lnTo>
+                <a:close/>
+                <a:lnTo>
+                  <a:pt x="105295" y="125077"/>
+                </a:lnTo>
+                <a:close/>
+                <a:lnTo>
+                  <a:pt x="107142" y="122222"/>
+                </a:lnTo>
+                <a:close/>
+                <a:lnTo>
+                  <a:pt x="108989" y="119360"/>
+                </a:lnTo>
+                <a:close/>
+                <a:lnTo>
+                  <a:pt x="110836" y="116493"/>
+                </a:lnTo>
+                <a:close/>
+                <a:lnTo>
+                  <a:pt x="112684" y="113619"/>
+                </a:lnTo>
+                <a:close/>
+                <a:lnTo>
+                  <a:pt x="114531" y="110740"/>
+                </a:lnTo>
+                <a:close/>
+                <a:lnTo>
+                  <a:pt x="116378" y="107854"/>
+                </a:lnTo>
+                <a:close/>
+                <a:lnTo>
+                  <a:pt x="118225" y="104963"/>
+                </a:lnTo>
+                <a:close/>
+                <a:lnTo>
+                  <a:pt x="120073" y="102065"/>
+                </a:lnTo>
+                <a:close/>
+                <a:lnTo>
+                  <a:pt x="121920" y="99162"/>
+                </a:lnTo>
+                <a:close/>
+                <a:lnTo>
+                  <a:pt x="123767" y="96252"/>
+                </a:lnTo>
+                <a:close/>
+                <a:lnTo>
+                  <a:pt x="125615" y="93337"/>
+                </a:lnTo>
+                <a:close/>
+                <a:lnTo>
+                  <a:pt x="127462" y="90416"/>
+                </a:lnTo>
+                <a:close/>
+                <a:lnTo>
+                  <a:pt x="129309" y="87489"/>
+                </a:lnTo>
+                <a:close/>
+                <a:lnTo>
+                  <a:pt x="131156" y="84555"/>
+                </a:lnTo>
+                <a:close/>
+                <a:lnTo>
+                  <a:pt x="133004" y="81616"/>
+                </a:lnTo>
+                <a:close/>
+                <a:lnTo>
+                  <a:pt x="134851" y="78671"/>
+                </a:lnTo>
+                <a:close/>
+                <a:lnTo>
+                  <a:pt x="136698" y="75720"/>
+                </a:lnTo>
+                <a:close/>
+                <a:lnTo>
+                  <a:pt x="138545" y="72763"/>
+                </a:lnTo>
+                <a:close/>
+                <a:lnTo>
+                  <a:pt x="140393" y="69799"/>
+                </a:lnTo>
+                <a:close/>
+                <a:lnTo>
+                  <a:pt x="142240" y="66830"/>
+                </a:lnTo>
+                <a:close/>
+                <a:lnTo>
+                  <a:pt x="144087" y="63855"/>
+                </a:lnTo>
+                <a:close/>
+                <a:lnTo>
+                  <a:pt x="145935" y="60874"/>
+                </a:lnTo>
+                <a:close/>
+                <a:lnTo>
+                  <a:pt x="147782" y="57887"/>
+                </a:lnTo>
+                <a:close/>
+                <a:lnTo>
+                  <a:pt x="149629" y="54894"/>
+                </a:lnTo>
+                <a:close/>
+                <a:lnTo>
+                  <a:pt x="151476" y="51896"/>
+                </a:lnTo>
+                <a:close/>
+                <a:lnTo>
+                  <a:pt x="153324" y="48891"/>
+                </a:lnTo>
+                <a:close/>
+                <a:lnTo>
+                  <a:pt x="155171" y="45880"/>
+                </a:lnTo>
+                <a:close/>
+                <a:lnTo>
+                  <a:pt x="157018" y="42863"/>
+                </a:lnTo>
+                <a:close/>
+                <a:lnTo>
+                  <a:pt x="158865" y="39840"/>
+                </a:lnTo>
+                <a:close/>
+                <a:lnTo>
+                  <a:pt x="160713" y="36811"/>
+                </a:lnTo>
+                <a:close/>
+                <a:lnTo>
+                  <a:pt x="162560" y="33777"/>
+                </a:lnTo>
+                <a:close/>
+                <a:lnTo>
+                  <a:pt x="164407" y="30736"/>
+                </a:lnTo>
+                <a:close/>
+                <a:lnTo>
+                  <a:pt x="166255" y="27689"/>
+                </a:lnTo>
+                <a:close/>
+                <a:lnTo>
+                  <a:pt x="168102" y="24636"/>
+                </a:lnTo>
+                <a:close/>
+                <a:lnTo>
+                  <a:pt x="169949" y="21578"/>
+                </a:lnTo>
+                <a:close/>
+                <a:lnTo>
+                  <a:pt x="171796" y="18513"/>
+                </a:lnTo>
+                <a:close/>
+                <a:lnTo>
+                  <a:pt x="173644" y="15443"/>
+                </a:lnTo>
+                <a:close/>
+                <a:lnTo>
+                  <a:pt x="175491" y="12366"/>
+                </a:lnTo>
+                <a:close/>
+                <a:lnTo>
+                  <a:pt x="177338" y="9284"/>
+                </a:lnTo>
+                <a:close/>
+                <a:lnTo>
+                  <a:pt x="179185" y="6195"/>
+                </a:lnTo>
+                <a:close/>
+                <a:lnTo>
+                  <a:pt x="181033" y="3101"/>
+                </a:lnTo>
+                <a:close/>
+                <a:lnTo>
+                  <a:pt x="182880" y="0"/>
+                </a:lnTo>
+                <a:close/>
+              </a:path>
+            </a:pathLst>
+          </a:custGeom>
+          <a:ln w="19050">
+            <a:solidFill>
+              <a:srgbClr val="FFFFFF"/>
+            </a:solidFill>
+          </a:ln>
+        </p:spPr>
+        <p:style>
+          <a:lnRef idx="1">
+            <a:schemeClr val="accent1"/>
+          </a:lnRef>
+          <a:fillRef idx="3">
+            <a:schemeClr val="accent1"/>
+          </a:fillRef>
+          <a:effectRef idx="2">
+            <a:schemeClr val="accent1"/>
+          </a:effectRef>
+          <a:fontRef idx="minor">
+            <a:schemeClr val="lt1"/>
+          </a:fontRef>
+        </p:style>
+        <p:txBody>
+          <a:bodyPr rtlCol="0" anchor="ctr"/>
+          <a:lstStyle/>
+          <a:p>
+            <a:pPr algn="ctr"/>
+          </a:p>
+        </p:txBody>
+      </p:sp>
+      <p:sp>
+        <p:nvSpPr>
+          <p:cNvPr id="9" name="Freeform 8"/>
+          <p:cNvSpPr/>
+          <p:nvPr/>
+        </p:nvSpPr>
+        <p:spPr>
+          <a:xfrm>
+            <a:off x="5623560" y="680771"/>
+            <a:ext cx="228600" cy="466344"/>
+          </a:xfrm>
+          <a:custGeom>
+            <a:avLst/>
+            <a:gdLst/>
+            <a:ahLst/>
+            <a:cxnLst/>
+            <a:rect l="l" t="t" r="r" b="b"/>
+            <a:pathLst>
+              <a:path w="228600" h="466344">
+                <a:moveTo>
+                  <a:pt x="228600" y="0"/>
+                </a:moveTo>
+                <a:lnTo>
+                  <a:pt x="226291" y="5167"/>
+                </a:lnTo>
+                <a:close/>
+                <a:lnTo>
+                  <a:pt x="223982" y="10326"/>
+                </a:lnTo>
+                <a:close/>
+                <a:lnTo>
+                  <a:pt x="221673" y="15475"/>
+                </a:lnTo>
+                <a:close/>
+                <a:lnTo>
+                  <a:pt x="219364" y="20615"/>
+                </a:lnTo>
+                <a:close/>
+                <a:lnTo>
+                  <a:pt x="217055" y="25745"/>
+                </a:lnTo>
+                <a:close/>
+                <a:lnTo>
+                  <a:pt x="214745" y="30866"/>
+                </a:lnTo>
+                <a:close/>
+                <a:lnTo>
+                  <a:pt x="212436" y="35978"/>
+                </a:lnTo>
+                <a:close/>
+                <a:lnTo>
+                  <a:pt x="210127" y="41080"/>
+                </a:lnTo>
+                <a:close/>
+                <a:lnTo>
+                  <a:pt x="207818" y="46173"/>
+                </a:lnTo>
+                <a:close/>
+                <a:lnTo>
+                  <a:pt x="205509" y="51257"/>
+                </a:lnTo>
+                <a:close/>
+                <a:lnTo>
+                  <a:pt x="203200" y="56331"/>
+                </a:lnTo>
+                <a:close/>
+                <a:lnTo>
+                  <a:pt x="200891" y="61396"/>
+                </a:lnTo>
+                <a:close/>
+                <a:lnTo>
+                  <a:pt x="198582" y="66452"/>
+                </a:lnTo>
+                <a:close/>
+                <a:lnTo>
+                  <a:pt x="196273" y="71499"/>
+                </a:lnTo>
+                <a:close/>
+                <a:lnTo>
+                  <a:pt x="193964" y="76536"/>
+                </a:lnTo>
+                <a:close/>
+                <a:lnTo>
+                  <a:pt x="191655" y="81563"/>
+                </a:lnTo>
+                <a:close/>
+                <a:lnTo>
+                  <a:pt x="189345" y="86582"/>
+                </a:lnTo>
+                <a:close/>
+                <a:lnTo>
+                  <a:pt x="187036" y="91591"/>
+                </a:lnTo>
+                <a:close/>
+                <a:lnTo>
+                  <a:pt x="184727" y="96591"/>
+                </a:lnTo>
+                <a:close/>
+                <a:lnTo>
+                  <a:pt x="182418" y="101581"/>
+                </a:lnTo>
+                <a:close/>
+                <a:lnTo>
+                  <a:pt x="180109" y="106562"/>
+                </a:lnTo>
+                <a:close/>
+                <a:lnTo>
+                  <a:pt x="177800" y="111534"/>
+                </a:lnTo>
+                <a:close/>
+                <a:lnTo>
+                  <a:pt x="175491" y="116496"/>
+                </a:lnTo>
+                <a:close/>
+                <a:lnTo>
+                  <a:pt x="173182" y="121450"/>
+                </a:lnTo>
+                <a:close/>
+                <a:lnTo>
+                  <a:pt x="170873" y="126393"/>
+                </a:lnTo>
+                <a:close/>
+                <a:lnTo>
+                  <a:pt x="168564" y="131328"/>
+                </a:lnTo>
+                <a:close/>
+                <a:lnTo>
+                  <a:pt x="166255" y="136253"/>
+                </a:lnTo>
+                <a:close/>
+                <a:lnTo>
+                  <a:pt x="163945" y="141169"/>
+                </a:lnTo>
+                <a:close/>
+                <a:lnTo>
+                  <a:pt x="161636" y="146075"/>
+                </a:lnTo>
+                <a:close/>
+                <a:lnTo>
+                  <a:pt x="159327" y="150972"/>
+                </a:lnTo>
+                <a:close/>
+                <a:lnTo>
+                  <a:pt x="157018" y="155860"/>
+                </a:lnTo>
+                <a:close/>
+                <a:lnTo>
+                  <a:pt x="154709" y="160739"/>
+                </a:lnTo>
+                <a:close/>
+                <a:lnTo>
+                  <a:pt x="152400" y="165608"/>
+                </a:lnTo>
+                <a:close/>
+                <a:lnTo>
+                  <a:pt x="150091" y="170468"/>
+                </a:lnTo>
+                <a:close/>
+                <a:lnTo>
+                  <a:pt x="147782" y="175318"/>
+                </a:lnTo>
+                <a:close/>
+                <a:lnTo>
+                  <a:pt x="145473" y="180159"/>
+                </a:lnTo>
+                <a:close/>
+                <a:lnTo>
+                  <a:pt x="143164" y="184991"/>
+                </a:lnTo>
+                <a:close/>
+                <a:lnTo>
+                  <a:pt x="140855" y="189814"/>
+                </a:lnTo>
+                <a:close/>
+                <a:lnTo>
+                  <a:pt x="138545" y="194627"/>
+                </a:lnTo>
+                <a:close/>
+                <a:lnTo>
+                  <a:pt x="136236" y="199431"/>
+                </a:lnTo>
+                <a:close/>
+                <a:lnTo>
+                  <a:pt x="133927" y="204225"/>
+                </a:lnTo>
+                <a:close/>
+                <a:lnTo>
+                  <a:pt x="131618" y="209010"/>
+                </a:lnTo>
+                <a:close/>
+                <a:lnTo>
+                  <a:pt x="129309" y="213786"/>
+                </a:lnTo>
+                <a:close/>
+                <a:lnTo>
+                  <a:pt x="127000" y="218553"/>
+                </a:lnTo>
+                <a:close/>
+                <a:lnTo>
+                  <a:pt x="124691" y="223310"/>
+                </a:lnTo>
+                <a:close/>
+                <a:lnTo>
+                  <a:pt x="122382" y="228058"/>
+                </a:lnTo>
+                <a:close/>
+                <a:lnTo>
+                  <a:pt x="120073" y="232796"/>
+                </a:lnTo>
+                <a:close/>
+                <a:lnTo>
+                  <a:pt x="117764" y="237525"/>
+                </a:lnTo>
+                <a:close/>
+                <a:lnTo>
+                  <a:pt x="115455" y="242245"/>
+                </a:lnTo>
+                <a:close/>
+                <a:lnTo>
+                  <a:pt x="113145" y="246956"/>
+                </a:lnTo>
+                <a:close/>
+                <a:lnTo>
+                  <a:pt x="110836" y="251657"/>
+                </a:lnTo>
+                <a:close/>
+                <a:lnTo>
+                  <a:pt x="108527" y="256349"/>
+                </a:lnTo>
+                <a:close/>
+                <a:lnTo>
+                  <a:pt x="106218" y="261032"/>
+                </a:lnTo>
+                <a:close/>
+                <a:lnTo>
+                  <a:pt x="103909" y="265705"/>
+                </a:lnTo>
+                <a:close/>
+                <a:lnTo>
+                  <a:pt x="101600" y="270369"/>
+                </a:lnTo>
+                <a:close/>
+                <a:lnTo>
+                  <a:pt x="99291" y="275023"/>
+                </a:lnTo>
+                <a:close/>
+                <a:lnTo>
+                  <a:pt x="96982" y="279668"/>
+                </a:lnTo>
+                <a:close/>
+                <a:lnTo>
+                  <a:pt x="94673" y="284304"/>
+                </a:lnTo>
+                <a:close/>
+                <a:lnTo>
+                  <a:pt x="92364" y="288931"/>
+                </a:lnTo>
+                <a:close/>
+                <a:lnTo>
+                  <a:pt x="90055" y="293548"/>
+                </a:lnTo>
+                <a:close/>
+                <a:lnTo>
+                  <a:pt x="87745" y="298156"/>
+                </a:lnTo>
+                <a:close/>
+                <a:lnTo>
+                  <a:pt x="85436" y="302755"/>
+                </a:lnTo>
+                <a:close/>
+                <a:lnTo>
+                  <a:pt x="83127" y="307344"/>
+                </a:lnTo>
+                <a:close/>
+                <a:lnTo>
+                  <a:pt x="80818" y="311924"/>
+                </a:lnTo>
+                <a:close/>
+                <a:lnTo>
+                  <a:pt x="78509" y="316495"/>
+                </a:lnTo>
+                <a:close/>
+                <a:lnTo>
+                  <a:pt x="76200" y="321056"/>
+                </a:lnTo>
+                <a:close/>
+                <a:lnTo>
+                  <a:pt x="73891" y="325608"/>
+                </a:lnTo>
+                <a:close/>
+                <a:lnTo>
+                  <a:pt x="71582" y="330150"/>
+                </a:lnTo>
+                <a:close/>
+                <a:lnTo>
+                  <a:pt x="69273" y="334684"/>
+                </a:lnTo>
+                <a:close/>
+                <a:lnTo>
+                  <a:pt x="66964" y="339208"/>
+                </a:lnTo>
+                <a:close/>
+                <a:lnTo>
+                  <a:pt x="64655" y="343722"/>
+                </a:lnTo>
+                <a:close/>
+                <a:lnTo>
+                  <a:pt x="62345" y="348228"/>
+                </a:lnTo>
+                <a:close/>
+                <a:lnTo>
+                  <a:pt x="60036" y="352723"/>
+                </a:lnTo>
+                <a:close/>
+                <a:lnTo>
+                  <a:pt x="57727" y="357210"/>
+                </a:lnTo>
+                <a:close/>
+                <a:lnTo>
+                  <a:pt x="55418" y="361687"/>
+                </a:lnTo>
+                <a:close/>
+                <a:lnTo>
+                  <a:pt x="53109" y="366155"/>
+                </a:lnTo>
+                <a:close/>
+                <a:lnTo>
+                  <a:pt x="50800" y="370614"/>
+                </a:lnTo>
+                <a:close/>
+                <a:lnTo>
+                  <a:pt x="48491" y="375063"/>
+                </a:lnTo>
+                <a:close/>
+                <a:lnTo>
+                  <a:pt x="46182" y="379503"/>
+                </a:lnTo>
+                <a:close/>
+                <a:lnTo>
+                  <a:pt x="43873" y="383934"/>
+                </a:lnTo>
+                <a:close/>
+                <a:lnTo>
+                  <a:pt x="41564" y="388355"/>
+                </a:lnTo>
+                <a:close/>
+                <a:lnTo>
+                  <a:pt x="39255" y="392767"/>
+                </a:lnTo>
+                <a:close/>
+                <a:lnTo>
+                  <a:pt x="36945" y="397170"/>
+                </a:lnTo>
+                <a:close/>
+                <a:lnTo>
+                  <a:pt x="34636" y="401563"/>
+                </a:lnTo>
+                <a:close/>
+                <a:lnTo>
+                  <a:pt x="32327" y="405947"/>
+                </a:lnTo>
+                <a:close/>
+                <a:lnTo>
+                  <a:pt x="30018" y="410322"/>
+                </a:lnTo>
+                <a:close/>
+                <a:lnTo>
+                  <a:pt x="27709" y="414687"/>
+                </a:lnTo>
+                <a:close/>
+                <a:lnTo>
+                  <a:pt x="25400" y="419043"/>
+                </a:lnTo>
+                <a:close/>
+                <a:lnTo>
+                  <a:pt x="23091" y="423390"/>
+                </a:lnTo>
+                <a:close/>
+                <a:lnTo>
+                  <a:pt x="20782" y="427727"/>
+                </a:lnTo>
+                <a:close/>
+                <a:lnTo>
+                  <a:pt x="18473" y="432055"/>
+                </a:lnTo>
+                <a:close/>
+                <a:lnTo>
+                  <a:pt x="16164" y="436374"/>
+                </a:lnTo>
+                <a:close/>
+                <a:lnTo>
+                  <a:pt x="13855" y="440684"/>
+                </a:lnTo>
+                <a:close/>
+                <a:lnTo>
+                  <a:pt x="11545" y="444984"/>
+                </a:lnTo>
+                <a:close/>
+                <a:lnTo>
+                  <a:pt x="9236" y="449274"/>
+                </a:lnTo>
+                <a:close/>
+                <a:lnTo>
+                  <a:pt x="6927" y="453556"/>
+                </a:lnTo>
+                <a:close/>
+                <a:lnTo>
+                  <a:pt x="4618" y="457828"/>
+                </a:lnTo>
+                <a:close/>
+                <a:lnTo>
+                  <a:pt x="2309" y="462090"/>
+                </a:lnTo>
+                <a:close/>
+                <a:lnTo>
+                  <a:pt x="0" y="466344"/>
+                </a:lnTo>
+                <a:close/>
+              </a:path>
+            </a:pathLst>
+          </a:custGeom>
+          <a:ln w="19050">
+            <a:solidFill>
+              <a:srgbClr val="FFFFFF"/>
+            </a:solidFill>
+          </a:ln>
+        </p:spPr>
+        <p:style>
+          <a:lnRef idx="1">
+            <a:schemeClr val="accent1"/>
+          </a:lnRef>
+          <a:fillRef idx="3">
+            <a:schemeClr val="accent1"/>
+          </a:fillRef>
+          <a:effectRef idx="2">
+            <a:schemeClr val="accent1"/>
+          </a:effectRef>
+          <a:fontRef idx="minor">
+            <a:schemeClr val="lt1"/>
+          </a:fontRef>
+        </p:style>
+        <p:txBody>
+          <a:bodyPr rtlCol="0" anchor="ctr"/>
+          <a:lstStyle/>
+          <a:p>
+            <a:pPr algn="ctr"/>
+          </a:p>
+        </p:txBody>
+      </p:sp>
       <p:cxnSp>
         <p:nvCxnSpPr>
-          <p:cNvPr id="8" name="Connector 7"/>
+          <p:cNvPr id="10" name="Connector 9"/>
           <p:cNvCxnSpPr/>
           <p:nvPr/>
         </p:nvCxnSpPr>
         <p:spPr>
           <a:xfrm>
-            <a:off x="5715000.0" y="2571750.0"/>
-            <a:ext cx="594360.0" cy="0.0"/>
+            <a:off x="5120640.0" y="2434590.0"/>
+            <a:ext cx="365760.0" cy="0.0"/>
           </a:xfrm>
           <a:prstGeom prst="line">
             <a:avLst/>
           </a:prstGeom>
           <a:ln w="15240">
             <a:solidFill>
-              <a:srgbClr val="B4B4B4"/>
+              <a:srgbClr val="FFFFFF"/>
             </a:solidFill>
           </a:ln>
         </p:spPr>
@@ -4569,21 +5467,21 @@
       </p:cxnSp>
       <p:cxnSp>
         <p:nvCxnSpPr>
-          <p:cNvPr id="9" name="Connector 8"/>
+          <p:cNvPr id="11" name="Connector 10"/>
           <p:cNvCxnSpPr/>
           <p:nvPr/>
         </p:nvCxnSpPr>
         <p:spPr>
           <a:xfrm flipH="1">
-            <a:off x="6492240.0" y="2571750.0"/>
-            <a:ext cx="594360.0" cy="0.0"/>
+            <a:off x="5669280.0" y="2434590.0"/>
+            <a:ext cx="365760.0" cy="0.0"/>
           </a:xfrm>
           <a:prstGeom prst="line">
             <a:avLst/>
           </a:prstGeom>
           <a:ln w="15240">
             <a:solidFill>
-              <a:srgbClr val="B4B4B4"/>
+              <a:srgbClr val="FFFFFF"/>
             </a:solidFill>
           </a:ln>
         </p:spPr>
@@ -4604,911 +5502,13 @@
       </p:cxnSp>
       <p:sp>
         <p:nvSpPr>
-          <p:cNvPr id="10" name="Freeform 9"/>
-          <p:cNvSpPr/>
-          <p:nvPr/>
-        </p:nvSpPr>
-        <p:spPr>
-          <a:xfrm>
-            <a:off x="5715000" y="-966978"/>
-            <a:ext cx="640080" cy="2295144"/>
-          </a:xfrm>
-          <a:custGeom>
-            <a:avLst/>
-            <a:gdLst/>
-            <a:ahLst/>
-            <a:cxnLst/>
-            <a:rect l="l" t="t" r="r" b="b"/>
-            <a:pathLst>
-              <a:path w="640080" h="2295144">
-                <a:moveTo>
-                  <a:pt x="0" y="2295144"/>
-                </a:moveTo>
-                <a:lnTo>
-                  <a:pt x="6465" y="2280460"/>
-                </a:lnTo>
-                <a:close/>
-                <a:lnTo>
-                  <a:pt x="12931" y="2266230"/>
-                </a:lnTo>
-                <a:close/>
-                <a:lnTo>
-                  <a:pt x="19396" y="2252276"/>
-                </a:lnTo>
-                <a:close/>
-                <a:lnTo>
-                  <a:pt x="25862" y="2238419"/>
-                </a:lnTo>
-                <a:close/>
-                <a:lnTo>
-                  <a:pt x="32327" y="2224478"/>
-                </a:lnTo>
-                <a:close/>
-                <a:lnTo>
-                  <a:pt x="38793" y="2210274"/>
-                </a:lnTo>
-                <a:close/>
-                <a:lnTo>
-                  <a:pt x="45258" y="2195628"/>
-                </a:lnTo>
-                <a:close/>
-                <a:lnTo>
-                  <a:pt x="51724" y="2180421"/>
-                </a:lnTo>
-                <a:close/>
-                <a:lnTo>
-                  <a:pt x="58189" y="2164836"/>
-                </a:lnTo>
-                <a:close/>
-                <a:lnTo>
-                  <a:pt x="64655" y="2149151"/>
-                </a:lnTo>
-                <a:close/>
-                <a:lnTo>
-                  <a:pt x="71120" y="2133636"/>
-                </a:lnTo>
-                <a:close/>
-                <a:lnTo>
-                  <a:pt x="77585" y="2118322"/>
-                </a:lnTo>
-                <a:close/>
-                <a:lnTo>
-                  <a:pt x="84051" y="2102925"/>
-                </a:lnTo>
-                <a:close/>
-                <a:lnTo>
-                  <a:pt x="90516" y="2087137"/>
-                </a:lnTo>
-                <a:close/>
-                <a:lnTo>
-                  <a:pt x="96982" y="2070720"/>
-                </a:lnTo>
-                <a:close/>
-                <a:lnTo>
-                  <a:pt x="103447" y="2053844"/>
-                </a:lnTo>
-                <a:close/>
-                <a:lnTo>
-                  <a:pt x="109913" y="2036840"/>
-                </a:lnTo>
-                <a:close/>
-                <a:lnTo>
-                  <a:pt x="116378" y="2020033"/>
-                </a:lnTo>
-                <a:close/>
-                <a:lnTo>
-                  <a:pt x="122844" y="2003487"/>
-                </a:lnTo>
-                <a:close/>
-                <a:lnTo>
-                  <a:pt x="129309" y="1986849"/>
-                </a:lnTo>
-                <a:close/>
-                <a:lnTo>
-                  <a:pt x="135775" y="1969729"/>
-                </a:lnTo>
-                <a:close/>
-                <a:lnTo>
-                  <a:pt x="142240" y="1951816"/>
-                </a:lnTo>
-                <a:close/>
-                <a:lnTo>
-                  <a:pt x="148705" y="1933430"/>
-                </a:lnTo>
-                <a:close/>
-                <a:lnTo>
-                  <a:pt x="155171" y="1915180"/>
-                </a:lnTo>
-                <a:close/>
-                <a:lnTo>
-                  <a:pt x="161636" y="1897677"/>
-                </a:lnTo>
-                <a:close/>
-                <a:lnTo>
-                  <a:pt x="168102" y="1881078"/>
-                </a:lnTo>
-                <a:close/>
-                <a:lnTo>
-                  <a:pt x="174567" y="1864665"/>
-                </a:lnTo>
-                <a:close/>
-                <a:lnTo>
-                  <a:pt x="181033" y="1847618"/>
-                </a:lnTo>
-                <a:close/>
-                <a:lnTo>
-                  <a:pt x="187498" y="1829216"/>
-                </a:lnTo>
-                <a:close/>
-                <a:lnTo>
-                  <a:pt x="193964" y="1809708"/>
-                </a:lnTo>
-                <a:close/>
-                <a:lnTo>
-                  <a:pt x="200429" y="1789887"/>
-                </a:lnTo>
-                <a:close/>
-                <a:lnTo>
-                  <a:pt x="206895" y="1770554"/>
-                </a:lnTo>
-                <a:close/>
-                <a:lnTo>
-                  <a:pt x="213360" y="1752153"/>
-                </a:lnTo>
-                <a:close/>
-                <a:lnTo>
-                  <a:pt x="219825" y="1734281"/>
-                </a:lnTo>
-                <a:close/>
-                <a:lnTo>
-                  <a:pt x="226291" y="1716410"/>
-                </a:lnTo>
-                <a:close/>
-                <a:lnTo>
-                  <a:pt x="232756" y="1698042"/>
-                </a:lnTo>
-                <a:close/>
-                <a:lnTo>
-                  <a:pt x="239222" y="1679005"/>
-                </a:lnTo>
-                <a:close/>
-                <a:lnTo>
-                  <a:pt x="245687" y="1659357"/>
-                </a:lnTo>
-                <a:close/>
-                <a:lnTo>
-                  <a:pt x="252153" y="1639160"/>
-                </a:lnTo>
-                <a:close/>
-                <a:lnTo>
-                  <a:pt x="258618" y="1618523"/>
-                </a:lnTo>
-                <a:close/>
-                <a:lnTo>
-                  <a:pt x="265084" y="1597702"/>
-                </a:lnTo>
-                <a:close/>
-                <a:lnTo>
-                  <a:pt x="271549" y="1576978"/>
-                </a:lnTo>
-                <a:close/>
-                <a:lnTo>
-                  <a:pt x="278015" y="1556607"/>
-                </a:lnTo>
-                <a:close/>
-                <a:lnTo>
-                  <a:pt x="284480" y="1536400"/>
-                </a:lnTo>
-                <a:close/>
-                <a:lnTo>
-                  <a:pt x="290945" y="1515804"/>
-                </a:lnTo>
-                <a:close/>
-                <a:lnTo>
-                  <a:pt x="297411" y="1494251"/>
-                </a:lnTo>
-                <a:close/>
-                <a:lnTo>
-                  <a:pt x="303876" y="1471419"/>
-                </a:lnTo>
-                <a:close/>
-                <a:lnTo>
-                  <a:pt x="310342" y="1447853"/>
-                </a:lnTo>
-                <a:close/>
-                <a:lnTo>
-                  <a:pt x="316807" y="1424294"/>
-                </a:lnTo>
-                <a:close/>
-                <a:lnTo>
-                  <a:pt x="323273" y="1401455"/>
-                </a:lnTo>
-                <a:close/>
-                <a:lnTo>
-                  <a:pt x="329738" y="1379440"/>
-                </a:lnTo>
-                <a:close/>
-                <a:lnTo>
-                  <a:pt x="336204" y="1357739"/>
-                </a:lnTo>
-                <a:close/>
-                <a:lnTo>
-                  <a:pt x="342669" y="1335818"/>
-                </a:lnTo>
-                <a:close/>
-                <a:lnTo>
-                  <a:pt x="349135" y="1313244"/>
-                </a:lnTo>
-                <a:close/>
-                <a:lnTo>
-                  <a:pt x="355600" y="1290048"/>
-                </a:lnTo>
-                <a:close/>
-                <a:lnTo>
-                  <a:pt x="362065" y="1266392"/>
-                </a:lnTo>
-                <a:close/>
-                <a:lnTo>
-                  <a:pt x="368531" y="1242430"/>
-                </a:lnTo>
-                <a:close/>
-                <a:lnTo>
-                  <a:pt x="374996" y="1218206"/>
-                </a:lnTo>
-                <a:close/>
-                <a:lnTo>
-                  <a:pt x="381462" y="1193623"/>
-                </a:lnTo>
-                <a:close/>
-                <a:lnTo>
-                  <a:pt x="387927" y="1168576"/>
-                </a:lnTo>
-                <a:close/>
-                <a:lnTo>
-                  <a:pt x="394393" y="1143002"/>
-                </a:lnTo>
-                <a:close/>
-                <a:lnTo>
-                  <a:pt x="400858" y="1117080"/>
-                </a:lnTo>
-                <a:close/>
-                <a:lnTo>
-                  <a:pt x="407324" y="1091069"/>
-                </a:lnTo>
-                <a:close/>
-                <a:lnTo>
-                  <a:pt x="413789" y="1065222"/>
-                </a:lnTo>
-                <a:close/>
-                <a:lnTo>
-                  <a:pt x="420255" y="1039575"/>
-                </a:lnTo>
-                <a:close/>
-                <a:lnTo>
-                  <a:pt x="426720" y="1013842"/>
-                </a:lnTo>
-                <a:close/>
-                <a:lnTo>
-                  <a:pt x="433185" y="987712"/>
-                </a:lnTo>
-                <a:close/>
-                <a:lnTo>
-                  <a:pt x="439651" y="960935"/>
-                </a:lnTo>
-                <a:close/>
-                <a:lnTo>
-                  <a:pt x="446116" y="933694"/>
-                </a:lnTo>
-                <a:close/>
-                <a:lnTo>
-                  <a:pt x="452582" y="906354"/>
-                </a:lnTo>
-                <a:close/>
-                <a:lnTo>
-                  <a:pt x="459047" y="879278"/>
-                </a:lnTo>
-                <a:close/>
-                <a:lnTo>
-                  <a:pt x="465513" y="852523"/>
-                </a:lnTo>
-                <a:close/>
-                <a:lnTo>
-                  <a:pt x="471978" y="825615"/>
-                </a:lnTo>
-                <a:close/>
-                <a:lnTo>
-                  <a:pt x="478444" y="798023"/>
-                </a:lnTo>
-                <a:close/>
-                <a:lnTo>
-                  <a:pt x="484909" y="769290"/>
-                </a:lnTo>
-                <a:close/>
-                <a:lnTo>
-                  <a:pt x="491375" y="739599"/>
-                </a:lnTo>
-                <a:close/>
-                <a:lnTo>
-                  <a:pt x="497840" y="709460"/>
-                </a:lnTo>
-                <a:close/>
-                <a:lnTo>
-                  <a:pt x="504305" y="679386"/>
-                </a:lnTo>
-                <a:close/>
-                <a:lnTo>
-                  <a:pt x="510771" y="649657"/>
-                </a:lnTo>
-                <a:close/>
-                <a:lnTo>
-                  <a:pt x="517236" y="620053"/>
-                </a:lnTo>
-                <a:close/>
-                <a:lnTo>
-                  <a:pt x="523702" y="590291"/>
-                </a:lnTo>
-                <a:close/>
-                <a:lnTo>
-                  <a:pt x="530167" y="560101"/>
-                </a:lnTo>
-                <a:close/>
-                <a:lnTo>
-                  <a:pt x="536633" y="529380"/>
-                </a:lnTo>
-                <a:close/>
-                <a:lnTo>
-                  <a:pt x="543098" y="498127"/>
-                </a:lnTo>
-                <a:close/>
-                <a:lnTo>
-                  <a:pt x="549564" y="466343"/>
-                </a:lnTo>
-                <a:close/>
-                <a:lnTo>
-                  <a:pt x="556029" y="434099"/>
-                </a:lnTo>
-                <a:close/>
-                <a:lnTo>
-                  <a:pt x="562495" y="401645"/>
-                </a:lnTo>
-                <a:close/>
-                <a:lnTo>
-                  <a:pt x="568960" y="369259"/>
-                </a:lnTo>
-                <a:close/>
-                <a:lnTo>
-                  <a:pt x="575425" y="337193"/>
-                </a:lnTo>
-                <a:close/>
-                <a:lnTo>
-                  <a:pt x="581891" y="305275"/>
-                </a:lnTo>
-                <a:close/>
-                <a:lnTo>
-                  <a:pt x="588356" y="273014"/>
-                </a:lnTo>
-                <a:close/>
-                <a:lnTo>
-                  <a:pt x="594822" y="239913"/>
-                </a:lnTo>
-                <a:close/>
-                <a:lnTo>
-                  <a:pt x="601287" y="205672"/>
-                </a:lnTo>
-                <a:close/>
-                <a:lnTo>
-                  <a:pt x="607753" y="170634"/>
-                </a:lnTo>
-                <a:close/>
-                <a:lnTo>
-                  <a:pt x="614218" y="135270"/>
-                </a:lnTo>
-                <a:close/>
-                <a:lnTo>
-                  <a:pt x="620684" y="100052"/>
-                </a:lnTo>
-                <a:close/>
-                <a:lnTo>
-                  <a:pt x="627149" y="65454"/>
-                </a:lnTo>
-                <a:close/>
-                <a:lnTo>
-                  <a:pt x="633615" y="31946"/>
-                </a:lnTo>
-                <a:close/>
-                <a:lnTo>
-                  <a:pt x="640080" y="0"/>
-                </a:lnTo>
-                <a:close/>
-              </a:path>
-            </a:pathLst>
-          </a:custGeom>
-          <a:ln w="19050">
-            <a:solidFill>
-              <a:srgbClr val="B4B4B4"/>
-            </a:solidFill>
-          </a:ln>
-        </p:spPr>
-        <p:style>
-          <a:lnRef idx="1">
-            <a:schemeClr val="accent1"/>
-          </a:lnRef>
-          <a:fillRef idx="3">
-            <a:schemeClr val="accent1"/>
-          </a:fillRef>
-          <a:effectRef idx="2">
-            <a:schemeClr val="accent1"/>
-          </a:effectRef>
-          <a:fontRef idx="minor">
-            <a:schemeClr val="lt1"/>
-          </a:fontRef>
-        </p:style>
-        <p:txBody>
-          <a:bodyPr rtlCol="0" anchor="ctr"/>
-          <a:lstStyle/>
-          <a:p>
-            <a:pPr algn="ctr"/>
-          </a:p>
-        </p:txBody>
-      </p:sp>
-      <p:sp>
-        <p:nvSpPr>
-          <p:cNvPr id="11" name="Freeform 10"/>
-          <p:cNvSpPr/>
-          <p:nvPr/>
-        </p:nvSpPr>
-        <p:spPr>
-          <a:xfrm>
-            <a:off x="6446520" y="-4190238"/>
-            <a:ext cx="411480" cy="2706624"/>
-          </a:xfrm>
-          <a:custGeom>
-            <a:avLst/>
-            <a:gdLst/>
-            <a:ahLst/>
-            <a:cxnLst/>
-            <a:rect l="l" t="t" r="r" b="b"/>
-            <a:pathLst>
-              <a:path w="411480" h="2706624">
-                <a:moveTo>
-                  <a:pt x="411480" y="0"/>
-                </a:moveTo>
-                <a:lnTo>
-                  <a:pt x="407324" y="15054"/>
-                </a:lnTo>
-                <a:close/>
-                <a:lnTo>
-                  <a:pt x="403167" y="34248"/>
-                </a:lnTo>
-                <a:close/>
-                <a:lnTo>
-                  <a:pt x="399011" y="57165"/>
-                </a:lnTo>
-                <a:close/>
-                <a:lnTo>
-                  <a:pt x="394855" y="83389"/>
-                </a:lnTo>
-                <a:close/>
-                <a:lnTo>
-                  <a:pt x="390698" y="112504"/>
-                </a:lnTo>
-                <a:close/>
-                <a:lnTo>
-                  <a:pt x="386542" y="144095"/>
-                </a:lnTo>
-                <a:close/>
-                <a:lnTo>
-                  <a:pt x="382385" y="177744"/>
-                </a:lnTo>
-                <a:close/>
-                <a:lnTo>
-                  <a:pt x="378229" y="213037"/>
-                </a:lnTo>
-                <a:close/>
-                <a:lnTo>
-                  <a:pt x="374073" y="249556"/>
-                </a:lnTo>
-                <a:close/>
-                <a:lnTo>
-                  <a:pt x="369916" y="286887"/>
-                </a:lnTo>
-                <a:close/>
-                <a:lnTo>
-                  <a:pt x="365760" y="324612"/>
-                </a:lnTo>
-                <a:close/>
-                <a:lnTo>
-                  <a:pt x="361604" y="362293"/>
-                </a:lnTo>
-                <a:close/>
-                <a:lnTo>
-                  <a:pt x="357447" y="399394"/>
-                </a:lnTo>
-                <a:close/>
-                <a:lnTo>
-                  <a:pt x="353291" y="435359"/>
-                </a:lnTo>
-                <a:close/>
-                <a:lnTo>
-                  <a:pt x="349135" y="469629"/>
-                </a:lnTo>
-                <a:close/>
-                <a:lnTo>
-                  <a:pt x="344978" y="501646"/>
-                </a:lnTo>
-                <a:close/>
-                <a:lnTo>
-                  <a:pt x="340822" y="530875"/>
-                </a:lnTo>
-                <a:close/>
-                <a:lnTo>
-                  <a:pt x="336665" y="557289"/>
-                </a:lnTo>
-                <a:close/>
-                <a:lnTo>
-                  <a:pt x="332509" y="581370"/>
-                </a:lnTo>
-                <a:close/>
-                <a:lnTo>
-                  <a:pt x="328353" y="603621"/>
-                </a:lnTo>
-                <a:close/>
-                <a:lnTo>
-                  <a:pt x="324196" y="624547"/>
-                </a:lnTo>
-                <a:close/>
-                <a:lnTo>
-                  <a:pt x="320040" y="644652"/>
-                </a:lnTo>
-                <a:close/>
-                <a:lnTo>
-                  <a:pt x="315884" y="664497"/>
-                </a:lnTo>
-                <a:close/>
-                <a:lnTo>
-                  <a:pt x="311727" y="684875"/>
-                </a:lnTo>
-                <a:close/>
-                <a:lnTo>
-                  <a:pt x="307571" y="706636"/>
-                </a:lnTo>
-                <a:close/>
-                <a:lnTo>
-                  <a:pt x="303415" y="730630"/>
-                </a:lnTo>
-                <a:close/>
-                <a:lnTo>
-                  <a:pt x="299258" y="757707"/>
-                </a:lnTo>
-                <a:close/>
-                <a:lnTo>
-                  <a:pt x="295102" y="788664"/>
-                </a:lnTo>
-                <a:close/>
-                <a:lnTo>
-                  <a:pt x="290945" y="823044"/>
-                </a:lnTo>
-                <a:close/>
-                <a:lnTo>
-                  <a:pt x="286789" y="859142"/>
-                </a:lnTo>
-                <a:close/>
-                <a:lnTo>
-                  <a:pt x="282633" y="895194"/>
-                </a:lnTo>
-                <a:close/>
-                <a:lnTo>
-                  <a:pt x="278476" y="929441"/>
-                </a:lnTo>
-                <a:close/>
-                <a:lnTo>
-                  <a:pt x="274320" y="960120"/>
-                </a:lnTo>
-                <a:close/>
-                <a:lnTo>
-                  <a:pt x="270164" y="986055"/>
-                </a:lnTo>
-                <a:close/>
-                <a:lnTo>
-                  <a:pt x="266007" y="1008405"/>
-                </a:lnTo>
-                <a:close/>
-                <a:lnTo>
-                  <a:pt x="261851" y="1028912"/>
-                </a:lnTo>
-                <a:close/>
-                <a:lnTo>
-                  <a:pt x="257695" y="1049322"/>
-                </a:lnTo>
-                <a:close/>
-                <a:lnTo>
-                  <a:pt x="253538" y="1071375"/>
-                </a:lnTo>
-                <a:close/>
-                <a:lnTo>
-                  <a:pt x="249382" y="1096765"/>
-                </a:lnTo>
-                <a:close/>
-                <a:lnTo>
-                  <a:pt x="245225" y="1125983"/>
-                </a:lnTo>
-                <a:close/>
-                <a:lnTo>
-                  <a:pt x="241069" y="1158319"/>
-                </a:lnTo>
-                <a:close/>
-                <a:lnTo>
-                  <a:pt x="236913" y="1193015"/>
-                </a:lnTo>
-                <a:close/>
-                <a:lnTo>
-                  <a:pt x="232756" y="1229310"/>
-                </a:lnTo>
-                <a:close/>
-                <a:lnTo>
-                  <a:pt x="228600" y="1266444"/>
-                </a:lnTo>
-                <a:close/>
-                <a:lnTo>
-                  <a:pt x="224444" y="1303642"/>
-                </a:lnTo>
-                <a:close/>
-                <a:lnTo>
-                  <a:pt x="220287" y="1340073"/>
-                </a:lnTo>
-                <a:close/>
-                <a:lnTo>
-                  <a:pt x="216131" y="1374890"/>
-                </a:lnTo>
-                <a:close/>
-                <a:lnTo>
-                  <a:pt x="211975" y="1407248"/>
-                </a:lnTo>
-                <a:close/>
-                <a:lnTo>
-                  <a:pt x="207818" y="1436301"/>
-                </a:lnTo>
-                <a:close/>
-                <a:lnTo>
-                  <a:pt x="203662" y="1461259"/>
-                </a:lnTo>
-                <a:close/>
-                <a:lnTo>
-                  <a:pt x="199505" y="1482617"/>
-                </a:lnTo>
-                <a:close/>
-                <a:lnTo>
-                  <a:pt x="195349" y="1502154"/>
-                </a:lnTo>
-                <a:close/>
-                <a:lnTo>
-                  <a:pt x="191193" y="1521706"/>
-                </a:lnTo>
-                <a:close/>
-                <a:lnTo>
-                  <a:pt x="187036" y="1543108"/>
-                </a:lnTo>
-                <a:close/>
-                <a:lnTo>
-                  <a:pt x="182880" y="1568196"/>
-                </a:lnTo>
-                <a:close/>
-                <a:lnTo>
-                  <a:pt x="178724" y="1598159"/>
-                </a:lnTo>
-                <a:close/>
-                <a:lnTo>
-                  <a:pt x="174567" y="1631599"/>
-                </a:lnTo>
-                <a:close/>
-                <a:lnTo>
-                  <a:pt x="170411" y="1666472"/>
-                </a:lnTo>
-                <a:close/>
-                <a:lnTo>
-                  <a:pt x="166255" y="1700732"/>
-                </a:lnTo>
-                <a:close/>
-                <a:lnTo>
-                  <a:pt x="162098" y="1732337"/>
-                </a:lnTo>
-                <a:close/>
-                <a:lnTo>
-                  <a:pt x="157942" y="1759326"/>
-                </a:lnTo>
-                <a:close/>
-                <a:lnTo>
-                  <a:pt x="153785" y="1781705"/>
-                </a:lnTo>
-                <a:close/>
-                <a:lnTo>
-                  <a:pt x="149629" y="1801444"/>
-                </a:lnTo>
-                <a:close/>
-                <a:lnTo>
-                  <a:pt x="145473" y="1820599"/>
-                </a:lnTo>
-                <a:close/>
-                <a:lnTo>
-                  <a:pt x="141316" y="1841224"/>
-                </a:lnTo>
-                <a:close/>
-                <a:lnTo>
-                  <a:pt x="137160" y="1865376"/>
-                </a:lnTo>
-                <a:close/>
-                <a:lnTo>
-                  <a:pt x="133004" y="1894424"/>
-                </a:lnTo>
-                <a:close/>
-                <a:lnTo>
-                  <a:pt x="128847" y="1926999"/>
-                </a:lnTo>
-                <a:close/>
-                <a:lnTo>
-                  <a:pt x="124691" y="1961046"/>
-                </a:lnTo>
-                <a:close/>
-                <a:lnTo>
-                  <a:pt x="120535" y="1994508"/>
-                </a:lnTo>
-                <a:close/>
-                <a:lnTo>
-                  <a:pt x="116378" y="2025332"/>
-                </a:lnTo>
-                <a:close/>
-                <a:lnTo>
-                  <a:pt x="112222" y="2051547"/>
-                </a:lnTo>
-                <a:close/>
-                <a:lnTo>
-                  <a:pt x="108065" y="2073147"/>
-                </a:lnTo>
-                <a:close/>
-                <a:lnTo>
-                  <a:pt x="103909" y="2092090"/>
-                </a:lnTo>
-                <a:close/>
-                <a:lnTo>
-                  <a:pt x="99753" y="2110420"/>
-                </a:lnTo>
-                <a:close/>
-                <a:lnTo>
-                  <a:pt x="95596" y="2130180"/>
-                </a:lnTo>
-                <a:close/>
-                <a:lnTo>
-                  <a:pt x="91440" y="2153412"/>
-                </a:lnTo>
-                <a:close/>
-                <a:lnTo>
-                  <a:pt x="87284" y="2181487"/>
-                </a:lnTo>
-                <a:close/>
-                <a:lnTo>
-                  <a:pt x="83127" y="2213083"/>
-                </a:lnTo>
-                <a:close/>
-                <a:lnTo>
-                  <a:pt x="78971" y="2246204"/>
-                </a:lnTo>
-                <a:close/>
-                <a:lnTo>
-                  <a:pt x="74815" y="2278853"/>
-                </a:lnTo>
-                <a:close/>
-                <a:lnTo>
-                  <a:pt x="70658" y="2309034"/>
-                </a:lnTo>
-                <a:close/>
-                <a:lnTo>
-                  <a:pt x="66502" y="2334832"/>
-                </a:lnTo>
-                <a:close/>
-                <a:lnTo>
-                  <a:pt x="62345" y="2356157"/>
-                </a:lnTo>
-                <a:close/>
-                <a:lnTo>
-                  <a:pt x="58189" y="2374749"/>
-                </a:lnTo>
-                <a:close/>
-                <a:lnTo>
-                  <a:pt x="54033" y="2392425"/>
-                </a:lnTo>
-                <a:close/>
-                <a:lnTo>
-                  <a:pt x="49876" y="2411004"/>
-                </a:lnTo>
-                <a:close/>
-                <a:lnTo>
-                  <a:pt x="45720" y="2432304"/>
-                </a:lnTo>
-                <a:close/>
-                <a:lnTo>
-                  <a:pt x="41564" y="2457648"/>
-                </a:lnTo>
-                <a:close/>
-                <a:lnTo>
-                  <a:pt x="37407" y="2486375"/>
-                </a:lnTo>
-                <a:close/>
-                <a:lnTo>
-                  <a:pt x="33251" y="2517332"/>
-                </a:lnTo>
-                <a:close/>
-                <a:lnTo>
-                  <a:pt x="29095" y="2549363"/>
-                </a:lnTo>
-                <a:close/>
-                <a:lnTo>
-                  <a:pt x="24938" y="2581313"/>
-                </a:lnTo>
-                <a:close/>
-                <a:lnTo>
-                  <a:pt x="20782" y="2612026"/>
-                </a:lnTo>
-                <a:close/>
-                <a:lnTo>
-                  <a:pt x="16625" y="2640348"/>
-                </a:lnTo>
-                <a:close/>
-                <a:lnTo>
-                  <a:pt x="12469" y="2665124"/>
-                </a:lnTo>
-                <a:close/>
-                <a:lnTo>
-                  <a:pt x="8313" y="2685199"/>
-                </a:lnTo>
-                <a:close/>
-                <a:lnTo>
-                  <a:pt x="4156" y="2699417"/>
-                </a:lnTo>
-                <a:close/>
-                <a:lnTo>
-                  <a:pt x="0" y="2706624"/>
-                </a:lnTo>
-                <a:close/>
-              </a:path>
-            </a:pathLst>
-          </a:custGeom>
-          <a:ln w="19050">
-            <a:solidFill>
-              <a:srgbClr val="B4B4B4"/>
-            </a:solidFill>
-          </a:ln>
-        </p:spPr>
-        <p:style>
-          <a:lnRef idx="1">
-            <a:schemeClr val="accent1"/>
-          </a:lnRef>
-          <a:fillRef idx="3">
-            <a:schemeClr val="accent1"/>
-          </a:fillRef>
-          <a:effectRef idx="2">
-            <a:schemeClr val="accent1"/>
-          </a:effectRef>
-          <a:fontRef idx="minor">
-            <a:schemeClr val="lt1"/>
-          </a:fontRef>
-        </p:style>
-        <p:txBody>
-          <a:bodyPr rtlCol="0" anchor="ctr"/>
-          <a:lstStyle/>
-          <a:p>
-            <a:pPr algn="ctr"/>
-          </a:p>
-        </p:txBody>
-      </p:sp>
-      <p:sp>
-        <p:nvSpPr>
           <p:cNvPr id="12" name="TextBox 11"/>
           <p:cNvSpPr txBox="1"/>
           <p:nvPr/>
         </p:nvSpPr>
         <p:spPr>
           <a:xfrm>
-            <a:off x="3906520" y="242569"/>
+            <a:off x="5323840" y="2437130"/>
             <a:ext cx="1524000" cy="508000"/>
           </a:xfrm>
           <a:prstGeom prst="rect">
@@ -5523,7 +5523,7 @@
           <a:lstStyle/>
           <a:p>
             <a:pPr>
-              <a:defRPr sz="1400" b="1">
+              <a:defRPr sz="1800" b="1">
                 <a:solidFill>
                   <a:srgbClr val="FFFFFF"/>
                 </a:solidFill>
@@ -5531,7 +5531,7 @@
               </a:defRPr>
             </a:pPr>
             <a:r>
-              <a:t>f(a)</a:t>
+              <a:t>a</a:t>
             </a:r>
           </a:p>
         </p:txBody>
@@ -5544,7 +5544,7 @@
         </p:nvSpPr>
         <p:spPr>
           <a:xfrm>
-            <a:off x="6146800" y="2437130"/>
+            <a:off x="3997960" y="911910"/>
             <a:ext cx="1524000" cy="508000"/>
           </a:xfrm>
           <a:prstGeom prst="rect">
@@ -5559,7 +5559,7 @@
           <a:lstStyle/>
           <a:p>
             <a:pPr>
-              <a:defRPr sz="1400" b="1">
+              <a:defRPr sz="1800" b="1">
                 <a:solidFill>
                   <a:srgbClr val="FFFFFF"/>
                 </a:solidFill>
@@ -5567,7 +5567,7 @@
               </a:defRPr>
             </a:pPr>
             <a:r>
-              <a:t>a</a:t>
+              <a:t>f(a)</a:t>
             </a:r>
           </a:p>
         </p:txBody>

--- a/output/3.pptx
+++ b/output/3.pptx
@@ -3104,8 +3104,8 @@
         </p:nvCxnSpPr>
         <p:spPr>
           <a:xfrm>
-            <a:off x="3886200.0" y="2571750.0"/>
-            <a:ext cx="2743200.0" cy="0.0"/>
+            <a:off x="4114800.0" y="2571750.0"/>
+            <a:ext cx="2971800.0" cy="0.0"/>
           </a:xfrm>
           <a:prstGeom prst="line">
             <a:avLst/>
@@ -3139,8 +3139,8 @@
         </p:nvCxnSpPr>
         <p:spPr>
           <a:xfrm flipV="1">
-            <a:off x="4572000.0" y="-171450.0"/>
-            <a:ext cx="0.0" cy="3200400.0"/>
+            <a:off x="4572000.0" y="-1543050.0"/>
+            <a:ext cx="0.0" cy="4572000.0"/>
           </a:xfrm>
           <a:prstGeom prst="line">
             <a:avLst/>
@@ -3174,8 +3174,8 @@
         </p:nvSpPr>
         <p:spPr>
           <a:xfrm>
-            <a:off x="4800600" y="241859"/>
-            <a:ext cx="1234440" cy="1826971"/>
+            <a:off x="4800600" y="-613700"/>
+            <a:ext cx="1417320" cy="2460331"/>
           </a:xfrm>
           <a:custGeom>
             <a:avLst/>
@@ -3184,1204 +3184,2404 @@
             <a:cxnLst/>
             <a:rect l="l" t="t" r="r" b="b"/>
             <a:pathLst>
-              <a:path w="1234440" h="1826971">
+              <a:path w="1417320" h="2460331">
                 <a:moveTo>
-                  <a:pt x="0" y="1826971"/>
+                  <a:pt x="0" y="2460331"/>
                 </a:moveTo>
                 <a:lnTo>
-                  <a:pt x="4129" y="1825305"/>
-                </a:lnTo>
-                <a:close/>
-                <a:lnTo>
-                  <a:pt x="8257" y="1823609"/>
-                </a:lnTo>
-                <a:close/>
-                <a:lnTo>
-                  <a:pt x="12386" y="1821883"/>
-                </a:lnTo>
-                <a:close/>
-                <a:lnTo>
-                  <a:pt x="16514" y="1820127"/>
-                </a:lnTo>
-                <a:close/>
-                <a:lnTo>
-                  <a:pt x="20643" y="1818341"/>
-                </a:lnTo>
-                <a:close/>
-                <a:lnTo>
-                  <a:pt x="24771" y="1816526"/>
-                </a:lnTo>
-                <a:close/>
-                <a:lnTo>
-                  <a:pt x="28900" y="1814680"/>
-                </a:lnTo>
-                <a:close/>
-                <a:lnTo>
-                  <a:pt x="33028" y="1812805"/>
-                </a:lnTo>
-                <a:close/>
-                <a:lnTo>
-                  <a:pt x="37157" y="1810900"/>
-                </a:lnTo>
-                <a:close/>
-                <a:lnTo>
-                  <a:pt x="41286" y="1808965"/>
-                </a:lnTo>
-                <a:close/>
-                <a:lnTo>
-                  <a:pt x="45414" y="1807001"/>
-                </a:lnTo>
-                <a:close/>
-                <a:lnTo>
-                  <a:pt x="49543" y="1805006"/>
-                </a:lnTo>
-                <a:close/>
-                <a:lnTo>
-                  <a:pt x="53671" y="1802982"/>
-                </a:lnTo>
-                <a:close/>
-                <a:lnTo>
-                  <a:pt x="57800" y="1800928"/>
-                </a:lnTo>
-                <a:close/>
-                <a:lnTo>
-                  <a:pt x="61928" y="1798844"/>
-                </a:lnTo>
-                <a:close/>
-                <a:lnTo>
-                  <a:pt x="66057" y="1796731"/>
-                </a:lnTo>
-                <a:close/>
-                <a:lnTo>
-                  <a:pt x="70186" y="1794587"/>
-                </a:lnTo>
-                <a:close/>
-                <a:lnTo>
-                  <a:pt x="74314" y="1792414"/>
-                </a:lnTo>
-                <a:close/>
-                <a:lnTo>
-                  <a:pt x="78443" y="1790211"/>
-                </a:lnTo>
-                <a:close/>
-                <a:lnTo>
-                  <a:pt x="82571" y="1787977"/>
-                </a:lnTo>
-                <a:close/>
-                <a:lnTo>
-                  <a:pt x="86700" y="1785715"/>
-                </a:lnTo>
-                <a:close/>
-                <a:lnTo>
-                  <a:pt x="90828" y="1783422"/>
-                </a:lnTo>
-                <a:close/>
-                <a:lnTo>
-                  <a:pt x="94957" y="1781100"/>
-                </a:lnTo>
-                <a:close/>
-                <a:lnTo>
-                  <a:pt x="99085" y="1778747"/>
-                </a:lnTo>
-                <a:close/>
-                <a:lnTo>
-                  <a:pt x="103214" y="1776365"/>
-                </a:lnTo>
-                <a:close/>
-                <a:lnTo>
-                  <a:pt x="107343" y="1773953"/>
-                </a:lnTo>
-                <a:close/>
-                <a:lnTo>
-                  <a:pt x="111471" y="1771511"/>
-                </a:lnTo>
-                <a:close/>
-                <a:lnTo>
-                  <a:pt x="115600" y="1769040"/>
-                </a:lnTo>
-                <a:close/>
-                <a:lnTo>
-                  <a:pt x="119728" y="1766538"/>
-                </a:lnTo>
-                <a:close/>
-                <a:lnTo>
-                  <a:pt x="123857" y="1764007"/>
-                </a:lnTo>
-                <a:close/>
-                <a:lnTo>
-                  <a:pt x="127985" y="1761446"/>
-                </a:lnTo>
-                <a:close/>
-                <a:lnTo>
-                  <a:pt x="132114" y="1758855"/>
-                </a:lnTo>
-                <a:close/>
-                <a:lnTo>
-                  <a:pt x="136243" y="1756234"/>
-                </a:lnTo>
-                <a:close/>
-                <a:lnTo>
-                  <a:pt x="140371" y="1753584"/>
-                </a:lnTo>
-                <a:close/>
-                <a:lnTo>
-                  <a:pt x="144500" y="1750903"/>
-                </a:lnTo>
-                <a:close/>
-                <a:lnTo>
-                  <a:pt x="148628" y="1748193"/>
-                </a:lnTo>
-                <a:close/>
-                <a:lnTo>
-                  <a:pt x="152757" y="1745453"/>
-                </a:lnTo>
-                <a:close/>
-                <a:lnTo>
-                  <a:pt x="156885" y="1742683"/>
-                </a:lnTo>
-                <a:close/>
-                <a:lnTo>
-                  <a:pt x="161014" y="1739883"/>
-                </a:lnTo>
-                <a:close/>
-                <a:lnTo>
-                  <a:pt x="165142" y="1737054"/>
-                </a:lnTo>
-                <a:close/>
-                <a:lnTo>
-                  <a:pt x="169271" y="1734195"/>
-                </a:lnTo>
-                <a:close/>
-                <a:lnTo>
-                  <a:pt x="173400" y="1731305"/>
-                </a:lnTo>
-                <a:close/>
-                <a:lnTo>
-                  <a:pt x="177528" y="1728386"/>
-                </a:lnTo>
-                <a:close/>
-                <a:lnTo>
-                  <a:pt x="181657" y="1725438"/>
-                </a:lnTo>
-                <a:close/>
-                <a:lnTo>
-                  <a:pt x="185785" y="1722459"/>
-                </a:lnTo>
-                <a:close/>
-                <a:lnTo>
-                  <a:pt x="189914" y="1719451"/>
-                </a:lnTo>
-                <a:close/>
-                <a:lnTo>
-                  <a:pt x="194042" y="1716412"/>
-                </a:lnTo>
-                <a:close/>
-                <a:lnTo>
-                  <a:pt x="198171" y="1713344"/>
-                </a:lnTo>
-                <a:close/>
-                <a:lnTo>
-                  <a:pt x="202300" y="1710246"/>
-                </a:lnTo>
-                <a:close/>
-                <a:lnTo>
-                  <a:pt x="206428" y="1707118"/>
-                </a:lnTo>
-                <a:close/>
-                <a:lnTo>
-                  <a:pt x="210557" y="1703961"/>
-                </a:lnTo>
-                <a:close/>
-                <a:lnTo>
-                  <a:pt x="214685" y="1700773"/>
-                </a:lnTo>
-                <a:close/>
-                <a:lnTo>
-                  <a:pt x="218814" y="1697556"/>
-                </a:lnTo>
-                <a:close/>
-                <a:lnTo>
-                  <a:pt x="222942" y="1694309"/>
-                </a:lnTo>
-                <a:close/>
-                <a:lnTo>
-                  <a:pt x="227071" y="1691032"/>
-                </a:lnTo>
-                <a:close/>
-                <a:lnTo>
-                  <a:pt x="231199" y="1687726"/>
-                </a:lnTo>
-                <a:close/>
-                <a:lnTo>
-                  <a:pt x="235328" y="1684389"/>
-                </a:lnTo>
-                <a:close/>
-                <a:lnTo>
-                  <a:pt x="239457" y="1681023"/>
-                </a:lnTo>
-                <a:close/>
-                <a:lnTo>
-                  <a:pt x="243585" y="1677626"/>
-                </a:lnTo>
-                <a:close/>
-                <a:lnTo>
-                  <a:pt x="247714" y="1674200"/>
-                </a:lnTo>
-                <a:close/>
-                <a:lnTo>
-                  <a:pt x="251842" y="1670745"/>
-                </a:lnTo>
-                <a:close/>
-                <a:lnTo>
-                  <a:pt x="255971" y="1667259"/>
-                </a:lnTo>
-                <a:close/>
-                <a:lnTo>
-                  <a:pt x="260099" y="1663743"/>
-                </a:lnTo>
-                <a:close/>
-                <a:lnTo>
-                  <a:pt x="264228" y="1660198"/>
-                </a:lnTo>
-                <a:close/>
-                <a:lnTo>
-                  <a:pt x="268357" y="1656623"/>
-                </a:lnTo>
-                <a:close/>
-                <a:lnTo>
-                  <a:pt x="272485" y="1653018"/>
-                </a:lnTo>
-                <a:close/>
-                <a:lnTo>
-                  <a:pt x="276614" y="1649383"/>
-                </a:lnTo>
-                <a:close/>
-                <a:lnTo>
-                  <a:pt x="280742" y="1645719"/>
-                </a:lnTo>
-                <a:close/>
-                <a:lnTo>
-                  <a:pt x="284871" y="1642024"/>
-                </a:lnTo>
-                <a:close/>
-                <a:lnTo>
-                  <a:pt x="288999" y="1638300"/>
-                </a:lnTo>
-                <a:close/>
-                <a:lnTo>
-                  <a:pt x="293128" y="1634546"/>
-                </a:lnTo>
-                <a:close/>
-                <a:lnTo>
-                  <a:pt x="297256" y="1630762"/>
-                </a:lnTo>
-                <a:close/>
-                <a:lnTo>
-                  <a:pt x="301385" y="1626948"/>
-                </a:lnTo>
-                <a:close/>
-                <a:lnTo>
-                  <a:pt x="305514" y="1623105"/>
-                </a:lnTo>
-                <a:close/>
-                <a:lnTo>
-                  <a:pt x="309642" y="1619231"/>
-                </a:lnTo>
-                <a:close/>
-                <a:lnTo>
-                  <a:pt x="313771" y="1615328"/>
-                </a:lnTo>
-                <a:close/>
-                <a:lnTo>
-                  <a:pt x="317899" y="1611395"/>
-                </a:lnTo>
-                <a:close/>
-                <a:lnTo>
-                  <a:pt x="322028" y="1607432"/>
-                </a:lnTo>
-                <a:close/>
-                <a:lnTo>
-                  <a:pt x="326156" y="1603439"/>
-                </a:lnTo>
-                <a:close/>
-                <a:lnTo>
-                  <a:pt x="330285" y="1599417"/>
-                </a:lnTo>
-                <a:close/>
-                <a:lnTo>
-                  <a:pt x="334414" y="1595364"/>
-                </a:lnTo>
-                <a:close/>
-                <a:lnTo>
-                  <a:pt x="338542" y="1591282"/>
-                </a:lnTo>
-                <a:close/>
-                <a:lnTo>
-                  <a:pt x="342671" y="1587170"/>
-                </a:lnTo>
-                <a:close/>
-                <a:lnTo>
-                  <a:pt x="346799" y="1583029"/>
-                </a:lnTo>
-                <a:close/>
-                <a:lnTo>
-                  <a:pt x="350928" y="1578857"/>
-                </a:lnTo>
-                <a:close/>
-                <a:lnTo>
-                  <a:pt x="355056" y="1574655"/>
-                </a:lnTo>
-                <a:close/>
-                <a:lnTo>
-                  <a:pt x="359185" y="1570424"/>
-                </a:lnTo>
-                <a:close/>
-                <a:lnTo>
-                  <a:pt x="363313" y="1566163"/>
-                </a:lnTo>
-                <a:close/>
-                <a:lnTo>
-                  <a:pt x="367442" y="1561872"/>
-                </a:lnTo>
-                <a:close/>
-                <a:lnTo>
-                  <a:pt x="371571" y="1557551"/>
-                </a:lnTo>
-                <a:close/>
-                <a:lnTo>
-                  <a:pt x="375699" y="1553201"/>
-                </a:lnTo>
-                <a:close/>
-                <a:lnTo>
-                  <a:pt x="379828" y="1548820"/>
-                </a:lnTo>
-                <a:close/>
-                <a:lnTo>
-                  <a:pt x="383956" y="1544410"/>
-                </a:lnTo>
-                <a:close/>
-                <a:lnTo>
-                  <a:pt x="388085" y="1539970"/>
-                </a:lnTo>
-                <a:close/>
-                <a:lnTo>
-                  <a:pt x="392213" y="1535500"/>
-                </a:lnTo>
-                <a:close/>
-                <a:lnTo>
-                  <a:pt x="396342" y="1531000"/>
-                </a:lnTo>
-                <a:close/>
-                <a:lnTo>
-                  <a:pt x="400471" y="1526471"/>
-                </a:lnTo>
-                <a:close/>
-                <a:lnTo>
-                  <a:pt x="404599" y="1521911"/>
-                </a:lnTo>
-                <a:close/>
-                <a:lnTo>
-                  <a:pt x="408728" y="1517322"/>
-                </a:lnTo>
-                <a:close/>
-                <a:lnTo>
-                  <a:pt x="412856" y="1512703"/>
-                </a:lnTo>
-                <a:close/>
-                <a:lnTo>
-                  <a:pt x="416985" y="1508054"/>
-                </a:lnTo>
-                <a:close/>
-                <a:lnTo>
-                  <a:pt x="421113" y="1503376"/>
-                </a:lnTo>
-                <a:close/>
-                <a:lnTo>
-                  <a:pt x="425242" y="1498667"/>
-                </a:lnTo>
-                <a:close/>
-                <a:lnTo>
-                  <a:pt x="429370" y="1493929"/>
-                </a:lnTo>
-                <a:close/>
-                <a:lnTo>
-                  <a:pt x="433499" y="1489161"/>
-                </a:lnTo>
-                <a:close/>
-                <a:lnTo>
-                  <a:pt x="437628" y="1484363"/>
-                </a:lnTo>
-                <a:close/>
-                <a:lnTo>
-                  <a:pt x="441756" y="1479535"/>
-                </a:lnTo>
-                <a:close/>
-                <a:lnTo>
-                  <a:pt x="445885" y="1474677"/>
-                </a:lnTo>
-                <a:close/>
-                <a:lnTo>
-                  <a:pt x="450013" y="1469790"/>
-                </a:lnTo>
-                <a:close/>
-                <a:lnTo>
-                  <a:pt x="454142" y="1464873"/>
-                </a:lnTo>
-                <a:close/>
-                <a:lnTo>
-                  <a:pt x="458270" y="1459926"/>
-                </a:lnTo>
-                <a:close/>
-                <a:lnTo>
-                  <a:pt x="462399" y="1454949"/>
-                </a:lnTo>
-                <a:close/>
-                <a:lnTo>
-                  <a:pt x="466527" y="1449942"/>
-                </a:lnTo>
-                <a:close/>
-                <a:lnTo>
-                  <a:pt x="470656" y="1444905"/>
-                </a:lnTo>
-                <a:close/>
-                <a:lnTo>
-                  <a:pt x="474785" y="1439839"/>
-                </a:lnTo>
-                <a:close/>
-                <a:lnTo>
-                  <a:pt x="478913" y="1434743"/>
-                </a:lnTo>
-                <a:close/>
-                <a:lnTo>
-                  <a:pt x="483042" y="1429617"/>
-                </a:lnTo>
-                <a:close/>
-                <a:lnTo>
-                  <a:pt x="487170" y="1424461"/>
-                </a:lnTo>
-                <a:close/>
-                <a:lnTo>
-                  <a:pt x="491299" y="1419275"/>
-                </a:lnTo>
-                <a:close/>
-                <a:lnTo>
-                  <a:pt x="495427" y="1414060"/>
-                </a:lnTo>
-                <a:close/>
-                <a:lnTo>
-                  <a:pt x="499556" y="1408814"/>
-                </a:lnTo>
-                <a:close/>
-                <a:lnTo>
-                  <a:pt x="503685" y="1403539"/>
-                </a:lnTo>
-                <a:close/>
-                <a:lnTo>
-                  <a:pt x="507813" y="1398234"/>
-                </a:lnTo>
-                <a:close/>
-                <a:lnTo>
-                  <a:pt x="511942" y="1392899"/>
-                </a:lnTo>
-                <a:close/>
-                <a:lnTo>
-                  <a:pt x="516070" y="1387535"/>
-                </a:lnTo>
-                <a:close/>
-                <a:lnTo>
-                  <a:pt x="520199" y="1382140"/>
-                </a:lnTo>
-                <a:close/>
-                <a:lnTo>
-                  <a:pt x="524327" y="1376716"/>
-                </a:lnTo>
-                <a:close/>
-                <a:lnTo>
-                  <a:pt x="528456" y="1371262"/>
-                </a:lnTo>
-                <a:close/>
-                <a:lnTo>
-                  <a:pt x="532584" y="1365778"/>
-                </a:lnTo>
-                <a:close/>
-                <a:lnTo>
-                  <a:pt x="536713" y="1360264"/>
-                </a:lnTo>
-                <a:close/>
-                <a:lnTo>
-                  <a:pt x="540842" y="1354720"/>
-                </a:lnTo>
-                <a:close/>
-                <a:lnTo>
-                  <a:pt x="544970" y="1349147"/>
-                </a:lnTo>
-                <a:close/>
-                <a:lnTo>
-                  <a:pt x="549099" y="1343544"/>
-                </a:lnTo>
-                <a:close/>
-                <a:lnTo>
-                  <a:pt x="553227" y="1337911"/>
-                </a:lnTo>
-                <a:close/>
-                <a:lnTo>
-                  <a:pt x="557356" y="1332248"/>
-                </a:lnTo>
-                <a:close/>
-                <a:lnTo>
-                  <a:pt x="561484" y="1326555"/>
-                </a:lnTo>
-                <a:close/>
-                <a:lnTo>
-                  <a:pt x="565613" y="1320833"/>
-                </a:lnTo>
-                <a:close/>
-                <a:lnTo>
-                  <a:pt x="569742" y="1315080"/>
-                </a:lnTo>
-                <a:close/>
-                <a:lnTo>
-                  <a:pt x="573870" y="1309298"/>
-                </a:lnTo>
-                <a:close/>
-                <a:lnTo>
-                  <a:pt x="577999" y="1303486"/>
-                </a:lnTo>
-                <a:close/>
-                <a:lnTo>
-                  <a:pt x="582127" y="1297644"/>
-                </a:lnTo>
-                <a:close/>
-                <a:lnTo>
-                  <a:pt x="586256" y="1291772"/>
-                </a:lnTo>
-                <a:close/>
-                <a:lnTo>
-                  <a:pt x="590384" y="1285871"/>
-                </a:lnTo>
-                <a:close/>
-                <a:lnTo>
-                  <a:pt x="594513" y="1279940"/>
-                </a:lnTo>
-                <a:close/>
-                <a:lnTo>
-                  <a:pt x="598641" y="1273978"/>
-                </a:lnTo>
-                <a:close/>
-                <a:lnTo>
-                  <a:pt x="602770" y="1267987"/>
-                </a:lnTo>
-                <a:close/>
-                <a:lnTo>
-                  <a:pt x="606899" y="1261967"/>
-                </a:lnTo>
-                <a:close/>
-                <a:lnTo>
-                  <a:pt x="611027" y="1255916"/>
-                </a:lnTo>
-                <a:close/>
-                <a:lnTo>
-                  <a:pt x="615156" y="1249836"/>
-                </a:lnTo>
-                <a:close/>
-                <a:lnTo>
-                  <a:pt x="619284" y="1243725"/>
-                </a:lnTo>
-                <a:close/>
-                <a:lnTo>
-                  <a:pt x="623413" y="1237585"/>
-                </a:lnTo>
-                <a:close/>
-                <a:lnTo>
-                  <a:pt x="627541" y="1231415"/>
-                </a:lnTo>
-                <a:close/>
-                <a:lnTo>
-                  <a:pt x="631670" y="1225216"/>
-                </a:lnTo>
-                <a:close/>
-                <a:lnTo>
-                  <a:pt x="635799" y="1218986"/>
-                </a:lnTo>
-                <a:close/>
-                <a:lnTo>
-                  <a:pt x="639927" y="1212727"/>
-                </a:lnTo>
-                <a:close/>
-                <a:lnTo>
-                  <a:pt x="644056" y="1206437"/>
-                </a:lnTo>
-                <a:close/>
-                <a:lnTo>
-                  <a:pt x="648184" y="1200118"/>
-                </a:lnTo>
-                <a:close/>
-                <a:lnTo>
-                  <a:pt x="652313" y="1193769"/>
-                </a:lnTo>
-                <a:close/>
-                <a:lnTo>
-                  <a:pt x="656441" y="1187391"/>
-                </a:lnTo>
-                <a:close/>
-                <a:lnTo>
-                  <a:pt x="660570" y="1180982"/>
-                </a:lnTo>
-                <a:close/>
-                <a:lnTo>
-                  <a:pt x="664698" y="1174544"/>
-                </a:lnTo>
-                <a:close/>
-                <a:lnTo>
-                  <a:pt x="668827" y="1168076"/>
-                </a:lnTo>
-                <a:close/>
-                <a:lnTo>
-                  <a:pt x="672956" y="1161578"/>
-                </a:lnTo>
-                <a:close/>
-                <a:lnTo>
-                  <a:pt x="677084" y="1155050"/>
-                </a:lnTo>
-                <a:close/>
-                <a:lnTo>
-                  <a:pt x="681213" y="1148492"/>
-                </a:lnTo>
-                <a:close/>
-                <a:lnTo>
-                  <a:pt x="685341" y="1141905"/>
-                </a:lnTo>
-                <a:close/>
-                <a:lnTo>
-                  <a:pt x="689470" y="1135287"/>
-                </a:lnTo>
-                <a:close/>
-                <a:lnTo>
-                  <a:pt x="693598" y="1128640"/>
-                </a:lnTo>
-                <a:close/>
-                <a:lnTo>
-                  <a:pt x="697727" y="1121963"/>
-                </a:lnTo>
-                <a:close/>
-                <a:lnTo>
-                  <a:pt x="701856" y="1115257"/>
-                </a:lnTo>
-                <a:close/>
-                <a:lnTo>
-                  <a:pt x="705984" y="1108520"/>
-                </a:lnTo>
-                <a:close/>
-                <a:lnTo>
-                  <a:pt x="710113" y="1101754"/>
-                </a:lnTo>
-                <a:close/>
-                <a:lnTo>
-                  <a:pt x="714241" y="1094957"/>
-                </a:lnTo>
-                <a:close/>
-                <a:lnTo>
-                  <a:pt x="718370" y="1088131"/>
-                </a:lnTo>
-                <a:close/>
-                <a:lnTo>
-                  <a:pt x="722498" y="1081275"/>
-                </a:lnTo>
-                <a:close/>
-                <a:lnTo>
-                  <a:pt x="726627" y="1074390"/>
-                </a:lnTo>
-                <a:close/>
-                <a:lnTo>
-                  <a:pt x="730755" y="1067474"/>
-                </a:lnTo>
-                <a:close/>
-                <a:lnTo>
-                  <a:pt x="734884" y="1060529"/>
-                </a:lnTo>
-                <a:close/>
-                <a:lnTo>
-                  <a:pt x="739013" y="1053554"/>
-                </a:lnTo>
-                <a:close/>
-                <a:lnTo>
-                  <a:pt x="743141" y="1046549"/>
-                </a:lnTo>
-                <a:close/>
-                <a:lnTo>
-                  <a:pt x="747270" y="1039514"/>
-                </a:lnTo>
-                <a:close/>
-                <a:lnTo>
-                  <a:pt x="751398" y="1032449"/>
-                </a:lnTo>
-                <a:close/>
-                <a:lnTo>
-                  <a:pt x="755527" y="1025355"/>
-                </a:lnTo>
-                <a:close/>
-                <a:lnTo>
-                  <a:pt x="759655" y="1018230"/>
-                </a:lnTo>
-                <a:close/>
-                <a:lnTo>
-                  <a:pt x="763784" y="1011076"/>
-                </a:lnTo>
-                <a:close/>
-                <a:lnTo>
-                  <a:pt x="767913" y="1003892"/>
-                </a:lnTo>
-                <a:close/>
-                <a:lnTo>
-                  <a:pt x="772041" y="996678"/>
-                </a:lnTo>
-                <a:close/>
-                <a:lnTo>
-                  <a:pt x="776170" y="989435"/>
-                </a:lnTo>
-                <a:close/>
-                <a:lnTo>
-                  <a:pt x="780298" y="982161"/>
-                </a:lnTo>
-                <a:close/>
-                <a:lnTo>
-                  <a:pt x="784427" y="974858"/>
-                </a:lnTo>
-                <a:close/>
-                <a:lnTo>
-                  <a:pt x="788555" y="967525"/>
-                </a:lnTo>
-                <a:close/>
-                <a:lnTo>
-                  <a:pt x="792684" y="960162"/>
-                </a:lnTo>
-                <a:close/>
-                <a:lnTo>
-                  <a:pt x="796812" y="952769"/>
-                </a:lnTo>
-                <a:close/>
-                <a:lnTo>
-                  <a:pt x="800941" y="945347"/>
-                </a:lnTo>
-                <a:close/>
-                <a:lnTo>
-                  <a:pt x="805070" y="937894"/>
-                </a:lnTo>
-                <a:close/>
-                <a:lnTo>
-                  <a:pt x="809198" y="930412"/>
-                </a:lnTo>
-                <a:close/>
-                <a:lnTo>
-                  <a:pt x="813327" y="922900"/>
-                </a:lnTo>
-                <a:close/>
-                <a:lnTo>
-                  <a:pt x="817455" y="915358"/>
-                </a:lnTo>
-                <a:close/>
-                <a:lnTo>
-                  <a:pt x="821584" y="907786"/>
-                </a:lnTo>
-                <a:close/>
-                <a:lnTo>
-                  <a:pt x="825712" y="900185"/>
-                </a:lnTo>
-                <a:close/>
-                <a:lnTo>
-                  <a:pt x="829841" y="892553"/>
-                </a:lnTo>
-                <a:close/>
-                <a:lnTo>
-                  <a:pt x="833969" y="884892"/>
-                </a:lnTo>
-                <a:close/>
-                <a:lnTo>
-                  <a:pt x="838098" y="877201"/>
-                </a:lnTo>
-                <a:close/>
-                <a:lnTo>
-                  <a:pt x="842227" y="869480"/>
-                </a:lnTo>
-                <a:close/>
-                <a:lnTo>
-                  <a:pt x="846355" y="861730"/>
-                </a:lnTo>
-                <a:close/>
-                <a:lnTo>
-                  <a:pt x="850484" y="853949"/>
-                </a:lnTo>
-                <a:close/>
-                <a:lnTo>
-                  <a:pt x="854612" y="846139"/>
-                </a:lnTo>
-                <a:close/>
-                <a:lnTo>
-                  <a:pt x="858741" y="838299"/>
-                </a:lnTo>
-                <a:close/>
-                <a:lnTo>
-                  <a:pt x="862869" y="830429"/>
-                </a:lnTo>
-                <a:close/>
-                <a:lnTo>
-                  <a:pt x="866998" y="822529"/>
-                </a:lnTo>
-                <a:close/>
-                <a:lnTo>
-                  <a:pt x="871127" y="814600"/>
-                </a:lnTo>
-                <a:close/>
-                <a:lnTo>
-                  <a:pt x="875255" y="806640"/>
-                </a:lnTo>
-                <a:close/>
-                <a:lnTo>
-                  <a:pt x="879384" y="798651"/>
-                </a:lnTo>
-                <a:close/>
-                <a:lnTo>
-                  <a:pt x="883512" y="790632"/>
-                </a:lnTo>
-                <a:close/>
-                <a:lnTo>
-                  <a:pt x="887641" y="782583"/>
-                </a:lnTo>
-                <a:close/>
-                <a:lnTo>
-                  <a:pt x="891769" y="774504"/>
-                </a:lnTo>
-                <a:close/>
-                <a:lnTo>
-                  <a:pt x="895898" y="766396"/>
-                </a:lnTo>
-                <a:close/>
-                <a:lnTo>
-                  <a:pt x="900026" y="758257"/>
-                </a:lnTo>
-                <a:close/>
-                <a:lnTo>
-                  <a:pt x="904155" y="750089"/>
-                </a:lnTo>
-                <a:close/>
-                <a:lnTo>
-                  <a:pt x="908284" y="741891"/>
-                </a:lnTo>
-                <a:close/>
-                <a:lnTo>
-                  <a:pt x="912412" y="733663"/>
-                </a:lnTo>
-                <a:close/>
-                <a:lnTo>
-                  <a:pt x="916541" y="725406"/>
-                </a:lnTo>
-                <a:close/>
-                <a:lnTo>
-                  <a:pt x="920669" y="717118"/>
-                </a:lnTo>
-                <a:close/>
-                <a:lnTo>
-                  <a:pt x="924798" y="708801"/>
-                </a:lnTo>
-                <a:close/>
-                <a:lnTo>
-                  <a:pt x="928926" y="700454"/>
-                </a:lnTo>
-                <a:close/>
-                <a:lnTo>
-                  <a:pt x="933055" y="692077"/>
-                </a:lnTo>
-                <a:close/>
-                <a:lnTo>
-                  <a:pt x="937184" y="683670"/>
-                </a:lnTo>
-                <a:close/>
-                <a:lnTo>
-                  <a:pt x="941312" y="675233"/>
-                </a:lnTo>
-                <a:close/>
-                <a:lnTo>
-                  <a:pt x="945441" y="666767"/>
-                </a:lnTo>
-                <a:close/>
-                <a:lnTo>
-                  <a:pt x="949569" y="658270"/>
-                </a:lnTo>
-                <a:close/>
-                <a:lnTo>
-                  <a:pt x="953698" y="649744"/>
-                </a:lnTo>
-                <a:close/>
-                <a:lnTo>
-                  <a:pt x="957826" y="641188"/>
-                </a:lnTo>
-                <a:close/>
-                <a:lnTo>
-                  <a:pt x="961955" y="632603"/>
-                </a:lnTo>
-                <a:close/>
-                <a:lnTo>
-                  <a:pt x="966083" y="623987"/>
-                </a:lnTo>
-                <a:close/>
-                <a:lnTo>
-                  <a:pt x="970212" y="615342"/>
-                </a:lnTo>
-                <a:close/>
-                <a:lnTo>
-                  <a:pt x="974341" y="606666"/>
-                </a:lnTo>
-                <a:close/>
-                <a:lnTo>
-                  <a:pt x="978469" y="597961"/>
-                </a:lnTo>
-                <a:close/>
-                <a:lnTo>
-                  <a:pt x="982598" y="589226"/>
-                </a:lnTo>
-                <a:close/>
-                <a:lnTo>
-                  <a:pt x="986726" y="580462"/>
-                </a:lnTo>
-                <a:close/>
-                <a:lnTo>
-                  <a:pt x="990855" y="571667"/>
-                </a:lnTo>
-                <a:close/>
-                <a:lnTo>
-                  <a:pt x="994983" y="562843"/>
-                </a:lnTo>
-                <a:close/>
-                <a:lnTo>
-                  <a:pt x="999112" y="553989"/>
-                </a:lnTo>
-                <a:close/>
-                <a:lnTo>
-                  <a:pt x="1003241" y="545105"/>
-                </a:lnTo>
-                <a:close/>
-                <a:lnTo>
-                  <a:pt x="1007369" y="536191"/>
-                </a:lnTo>
-                <a:close/>
-                <a:lnTo>
-                  <a:pt x="1011498" y="527247"/>
-                </a:lnTo>
-                <a:close/>
-                <a:lnTo>
-                  <a:pt x="1015626" y="518274"/>
-                </a:lnTo>
-                <a:close/>
-                <a:lnTo>
-                  <a:pt x="1019755" y="509270"/>
-                </a:lnTo>
-                <a:close/>
-                <a:lnTo>
-                  <a:pt x="1023883" y="500237"/>
-                </a:lnTo>
-                <a:close/>
-                <a:lnTo>
-                  <a:pt x="1028012" y="491174"/>
-                </a:lnTo>
-                <a:close/>
-                <a:lnTo>
-                  <a:pt x="1032140" y="482082"/>
-                </a:lnTo>
-                <a:close/>
-                <a:lnTo>
-                  <a:pt x="1036269" y="472959"/>
-                </a:lnTo>
-                <a:close/>
-                <a:lnTo>
-                  <a:pt x="1040398" y="463807"/>
-                </a:lnTo>
-                <a:close/>
-                <a:lnTo>
-                  <a:pt x="1044526" y="454624"/>
-                </a:lnTo>
-                <a:close/>
-                <a:lnTo>
-                  <a:pt x="1048655" y="445412"/>
-                </a:lnTo>
-                <a:close/>
-                <a:lnTo>
-                  <a:pt x="1052783" y="436170"/>
-                </a:lnTo>
-                <a:close/>
-                <a:lnTo>
-                  <a:pt x="1056912" y="426899"/>
-                </a:lnTo>
-                <a:close/>
-                <a:lnTo>
-                  <a:pt x="1061040" y="417597"/>
-                </a:lnTo>
-                <a:close/>
-                <a:lnTo>
-                  <a:pt x="1065169" y="408266"/>
-                </a:lnTo>
-                <a:close/>
-                <a:lnTo>
-                  <a:pt x="1069298" y="398904"/>
-                </a:lnTo>
-                <a:close/>
-                <a:lnTo>
-                  <a:pt x="1073426" y="389513"/>
-                </a:lnTo>
-                <a:close/>
-                <a:lnTo>
-                  <a:pt x="1077555" y="380093"/>
-                </a:lnTo>
-                <a:close/>
-                <a:lnTo>
-                  <a:pt x="1081683" y="370642"/>
-                </a:lnTo>
-                <a:close/>
-                <a:lnTo>
-                  <a:pt x="1085812" y="361161"/>
-                </a:lnTo>
-                <a:close/>
-                <a:lnTo>
-                  <a:pt x="1089940" y="351651"/>
-                </a:lnTo>
-                <a:close/>
-                <a:lnTo>
-                  <a:pt x="1094069" y="342111"/>
-                </a:lnTo>
-                <a:close/>
-                <a:lnTo>
-                  <a:pt x="1098197" y="332541"/>
-                </a:lnTo>
-                <a:close/>
-                <a:lnTo>
-                  <a:pt x="1102326" y="322941"/>
-                </a:lnTo>
-                <a:close/>
-                <a:lnTo>
-                  <a:pt x="1106455" y="313312"/>
-                </a:lnTo>
-                <a:close/>
-                <a:lnTo>
-                  <a:pt x="1110583" y="303652"/>
-                </a:lnTo>
-                <a:close/>
-                <a:lnTo>
-                  <a:pt x="1114712" y="293963"/>
-                </a:lnTo>
-                <a:close/>
-                <a:lnTo>
-                  <a:pt x="1118840" y="284244"/>
-                </a:lnTo>
-                <a:close/>
-                <a:lnTo>
-                  <a:pt x="1122969" y="274495"/>
-                </a:lnTo>
-                <a:close/>
-                <a:lnTo>
-                  <a:pt x="1127097" y="264716"/>
-                </a:lnTo>
-                <a:close/>
-                <a:lnTo>
-                  <a:pt x="1131226" y="254907"/>
-                </a:lnTo>
-                <a:close/>
-                <a:lnTo>
-                  <a:pt x="1135355" y="245069"/>
-                </a:lnTo>
-                <a:close/>
-                <a:lnTo>
-                  <a:pt x="1139483" y="235201"/>
-                </a:lnTo>
-                <a:close/>
-                <a:lnTo>
-                  <a:pt x="1143612" y="225303"/>
-                </a:lnTo>
-                <a:close/>
-                <a:lnTo>
-                  <a:pt x="1147740" y="215375"/>
-                </a:lnTo>
-                <a:close/>
-                <a:lnTo>
-                  <a:pt x="1151869" y="205417"/>
-                </a:lnTo>
-                <a:close/>
-                <a:lnTo>
-                  <a:pt x="1155997" y="195430"/>
-                </a:lnTo>
-                <a:close/>
-                <a:lnTo>
-                  <a:pt x="1160126" y="185412"/>
-                </a:lnTo>
-                <a:close/>
-                <a:lnTo>
-                  <a:pt x="1164254" y="175365"/>
-                </a:lnTo>
-                <a:close/>
-                <a:lnTo>
-                  <a:pt x="1168383" y="165288"/>
-                </a:lnTo>
-                <a:close/>
-                <a:lnTo>
-                  <a:pt x="1172512" y="155181"/>
-                </a:lnTo>
-                <a:close/>
-                <a:lnTo>
-                  <a:pt x="1176640" y="145045"/>
-                </a:lnTo>
-                <a:close/>
-                <a:lnTo>
-                  <a:pt x="1180769" y="134878"/>
-                </a:lnTo>
-                <a:close/>
-                <a:lnTo>
-                  <a:pt x="1184897" y="124682"/>
-                </a:lnTo>
-                <a:close/>
-                <a:lnTo>
-                  <a:pt x="1189026" y="114456"/>
-                </a:lnTo>
-                <a:close/>
-                <a:lnTo>
-                  <a:pt x="1193154" y="104200"/>
-                </a:lnTo>
-                <a:close/>
-                <a:lnTo>
-                  <a:pt x="1197283" y="93914"/>
-                </a:lnTo>
-                <a:close/>
-                <a:lnTo>
-                  <a:pt x="1201412" y="83598"/>
-                </a:lnTo>
-                <a:close/>
-                <a:lnTo>
-                  <a:pt x="1205540" y="73253"/>
-                </a:lnTo>
-                <a:close/>
-                <a:lnTo>
-                  <a:pt x="1209669" y="62878"/>
-                </a:lnTo>
-                <a:close/>
-                <a:lnTo>
-                  <a:pt x="1213797" y="52473"/>
-                </a:lnTo>
-                <a:close/>
-                <a:lnTo>
-                  <a:pt x="1217926" y="42038"/>
-                </a:lnTo>
-                <a:close/>
-                <a:lnTo>
-                  <a:pt x="1222054" y="31573"/>
-                </a:lnTo>
-                <a:close/>
-                <a:lnTo>
-                  <a:pt x="1226183" y="21078"/>
-                </a:lnTo>
-                <a:close/>
-                <a:lnTo>
-                  <a:pt x="1230311" y="10554"/>
-                </a:lnTo>
-                <a:close/>
-                <a:lnTo>
-                  <a:pt x="1234440" y="0"/>
+                  <a:pt x="2366" y="2458493"/>
+                </a:lnTo>
+                <a:close/>
+                <a:lnTo>
+                  <a:pt x="4732" y="2456650"/>
+                </a:lnTo>
+                <a:close/>
+                <a:lnTo>
+                  <a:pt x="7098" y="2454802"/>
+                </a:lnTo>
+                <a:close/>
+                <a:lnTo>
+                  <a:pt x="9465" y="2452948"/>
+                </a:lnTo>
+                <a:close/>
+                <a:lnTo>
+                  <a:pt x="11831" y="2451090"/>
+                </a:lnTo>
+                <a:close/>
+                <a:lnTo>
+                  <a:pt x="14197" y="2449227"/>
+                </a:lnTo>
+                <a:close/>
+                <a:lnTo>
+                  <a:pt x="16563" y="2447359"/>
+                </a:lnTo>
+                <a:close/>
+                <a:lnTo>
+                  <a:pt x="18929" y="2445486"/>
+                </a:lnTo>
+                <a:close/>
+                <a:lnTo>
+                  <a:pt x="21295" y="2443608"/>
+                </a:lnTo>
+                <a:close/>
+                <a:lnTo>
+                  <a:pt x="23661" y="2441724"/>
+                </a:lnTo>
+                <a:close/>
+                <a:lnTo>
+                  <a:pt x="26028" y="2439837"/>
+                </a:lnTo>
+                <a:close/>
+                <a:lnTo>
+                  <a:pt x="28394" y="2437944"/>
+                </a:lnTo>
+                <a:close/>
+                <a:lnTo>
+                  <a:pt x="30760" y="2436046"/>
+                </a:lnTo>
+                <a:close/>
+                <a:lnTo>
+                  <a:pt x="33126" y="2434144"/>
+                </a:lnTo>
+                <a:close/>
+                <a:lnTo>
+                  <a:pt x="35492" y="2432237"/>
+                </a:lnTo>
+                <a:close/>
+                <a:lnTo>
+                  <a:pt x="37858" y="2430324"/>
+                </a:lnTo>
+                <a:close/>
+                <a:lnTo>
+                  <a:pt x="40224" y="2428408"/>
+                </a:lnTo>
+                <a:close/>
+                <a:lnTo>
+                  <a:pt x="42591" y="2426486"/>
+                </a:lnTo>
+                <a:close/>
+                <a:lnTo>
+                  <a:pt x="44957" y="2424560"/>
+                </a:lnTo>
+                <a:close/>
+                <a:lnTo>
+                  <a:pt x="47323" y="2422629"/>
+                </a:lnTo>
+                <a:close/>
+                <a:lnTo>
+                  <a:pt x="49689" y="2420694"/>
+                </a:lnTo>
+                <a:close/>
+                <a:lnTo>
+                  <a:pt x="52055" y="2418753"/>
+                </a:lnTo>
+                <a:close/>
+                <a:lnTo>
+                  <a:pt x="54421" y="2416807"/>
+                </a:lnTo>
+                <a:close/>
+                <a:lnTo>
+                  <a:pt x="56787" y="2414857"/>
+                </a:lnTo>
+                <a:close/>
+                <a:lnTo>
+                  <a:pt x="59154" y="2412901"/>
+                </a:lnTo>
+                <a:close/>
+                <a:lnTo>
+                  <a:pt x="61520" y="2410940"/>
+                </a:lnTo>
+                <a:close/>
+                <a:lnTo>
+                  <a:pt x="63886" y="2408973"/>
+                </a:lnTo>
+                <a:close/>
+                <a:lnTo>
+                  <a:pt x="66252" y="2407001"/>
+                </a:lnTo>
+                <a:close/>
+                <a:lnTo>
+                  <a:pt x="68618" y="2405023"/>
+                </a:lnTo>
+                <a:close/>
+                <a:lnTo>
+                  <a:pt x="70984" y="2403040"/>
+                </a:lnTo>
+                <a:close/>
+                <a:lnTo>
+                  <a:pt x="73350" y="2401051"/>
+                </a:lnTo>
+                <a:close/>
+                <a:lnTo>
+                  <a:pt x="75717" y="2399056"/>
+                </a:lnTo>
+                <a:close/>
+                <a:lnTo>
+                  <a:pt x="78083" y="2397056"/>
+                </a:lnTo>
+                <a:close/>
+                <a:lnTo>
+                  <a:pt x="80449" y="2395050"/>
+                </a:lnTo>
+                <a:close/>
+                <a:lnTo>
+                  <a:pt x="82815" y="2393040"/>
+                </a:lnTo>
+                <a:close/>
+                <a:lnTo>
+                  <a:pt x="85181" y="2391024"/>
+                </a:lnTo>
+                <a:close/>
+                <a:lnTo>
+                  <a:pt x="87547" y="2389004"/>
+                </a:lnTo>
+                <a:close/>
+                <a:lnTo>
+                  <a:pt x="89913" y="2386979"/>
+                </a:lnTo>
+                <a:close/>
+                <a:lnTo>
+                  <a:pt x="92280" y="2384949"/>
+                </a:lnTo>
+                <a:close/>
+                <a:lnTo>
+                  <a:pt x="94646" y="2382915"/>
+                </a:lnTo>
+                <a:close/>
+                <a:lnTo>
+                  <a:pt x="97012" y="2380876"/>
+                </a:lnTo>
+                <a:close/>
+                <a:lnTo>
+                  <a:pt x="99378" y="2378833"/>
+                </a:lnTo>
+                <a:close/>
+                <a:lnTo>
+                  <a:pt x="101744" y="2376784"/>
+                </a:lnTo>
+                <a:close/>
+                <a:lnTo>
+                  <a:pt x="104110" y="2374731"/>
+                </a:lnTo>
+                <a:close/>
+                <a:lnTo>
+                  <a:pt x="106476" y="2372672"/>
+                </a:lnTo>
+                <a:close/>
+                <a:lnTo>
+                  <a:pt x="108843" y="2370608"/>
+                </a:lnTo>
+                <a:close/>
+                <a:lnTo>
+                  <a:pt x="111209" y="2368539"/>
+                </a:lnTo>
+                <a:close/>
+                <a:lnTo>
+                  <a:pt x="113575" y="2366464"/>
+                </a:lnTo>
+                <a:close/>
+                <a:lnTo>
+                  <a:pt x="115941" y="2364384"/>
+                </a:lnTo>
+                <a:close/>
+                <a:lnTo>
+                  <a:pt x="118307" y="2362298"/>
+                </a:lnTo>
+                <a:close/>
+                <a:lnTo>
+                  <a:pt x="120673" y="2360207"/>
+                </a:lnTo>
+                <a:close/>
+                <a:lnTo>
+                  <a:pt x="123039" y="2358110"/>
+                </a:lnTo>
+                <a:close/>
+                <a:lnTo>
+                  <a:pt x="125406" y="2356007"/>
+                </a:lnTo>
+                <a:close/>
+                <a:lnTo>
+                  <a:pt x="127772" y="2353899"/>
+                </a:lnTo>
+                <a:close/>
+                <a:lnTo>
+                  <a:pt x="130138" y="2351786"/>
+                </a:lnTo>
+                <a:close/>
+                <a:lnTo>
+                  <a:pt x="132504" y="2349667"/>
+                </a:lnTo>
+                <a:close/>
+                <a:lnTo>
+                  <a:pt x="134870" y="2347543"/>
+                </a:lnTo>
+                <a:close/>
+                <a:lnTo>
+                  <a:pt x="137236" y="2345413"/>
+                </a:lnTo>
+                <a:close/>
+                <a:lnTo>
+                  <a:pt x="139602" y="2343279"/>
+                </a:lnTo>
+                <a:close/>
+                <a:lnTo>
+                  <a:pt x="141969" y="2341138"/>
+                </a:lnTo>
+                <a:close/>
+                <a:lnTo>
+                  <a:pt x="144335" y="2338993"/>
+                </a:lnTo>
+                <a:close/>
+                <a:lnTo>
+                  <a:pt x="146701" y="2336842"/>
+                </a:lnTo>
+                <a:close/>
+                <a:lnTo>
+                  <a:pt x="149067" y="2334686"/>
+                </a:lnTo>
+                <a:close/>
+                <a:lnTo>
+                  <a:pt x="151433" y="2332524"/>
+                </a:lnTo>
+                <a:close/>
+                <a:lnTo>
+                  <a:pt x="153799" y="2330357"/>
+                </a:lnTo>
+                <a:close/>
+                <a:lnTo>
+                  <a:pt x="156165" y="2328185"/>
+                </a:lnTo>
+                <a:close/>
+                <a:lnTo>
+                  <a:pt x="158532" y="2326007"/>
+                </a:lnTo>
+                <a:close/>
+                <a:lnTo>
+                  <a:pt x="160898" y="2323823"/>
+                </a:lnTo>
+                <a:close/>
+                <a:lnTo>
+                  <a:pt x="163264" y="2321634"/>
+                </a:lnTo>
+                <a:close/>
+                <a:lnTo>
+                  <a:pt x="165630" y="2319440"/>
+                </a:lnTo>
+                <a:close/>
+                <a:lnTo>
+                  <a:pt x="167996" y="2317240"/>
+                </a:lnTo>
+                <a:close/>
+                <a:lnTo>
+                  <a:pt x="170362" y="2315035"/>
+                </a:lnTo>
+                <a:close/>
+                <a:lnTo>
+                  <a:pt x="172728" y="2312825"/>
+                </a:lnTo>
+                <a:close/>
+                <a:lnTo>
+                  <a:pt x="175095" y="2310610"/>
+                </a:lnTo>
+                <a:close/>
+                <a:lnTo>
+                  <a:pt x="177461" y="2308389"/>
+                </a:lnTo>
+                <a:close/>
+                <a:lnTo>
+                  <a:pt x="179827" y="2306163"/>
+                </a:lnTo>
+                <a:close/>
+                <a:lnTo>
+                  <a:pt x="182193" y="2303931"/>
+                </a:lnTo>
+                <a:close/>
+                <a:lnTo>
+                  <a:pt x="184559" y="2301695"/>
+                </a:lnTo>
+                <a:close/>
+                <a:lnTo>
+                  <a:pt x="186925" y="2299453"/>
+                </a:lnTo>
+                <a:close/>
+                <a:lnTo>
+                  <a:pt x="189291" y="2297206"/>
+                </a:lnTo>
+                <a:close/>
+                <a:lnTo>
+                  <a:pt x="191658" y="2294954"/>
+                </a:lnTo>
+                <a:close/>
+                <a:lnTo>
+                  <a:pt x="194024" y="2292696"/>
+                </a:lnTo>
+                <a:close/>
+                <a:lnTo>
+                  <a:pt x="196390" y="2290432"/>
+                </a:lnTo>
+                <a:close/>
+                <a:lnTo>
+                  <a:pt x="198756" y="2288163"/>
+                </a:lnTo>
+                <a:close/>
+                <a:lnTo>
+                  <a:pt x="201122" y="2285887"/>
+                </a:lnTo>
+                <a:close/>
+                <a:lnTo>
+                  <a:pt x="203488" y="2283605"/>
+                </a:lnTo>
+                <a:close/>
+                <a:lnTo>
+                  <a:pt x="205854" y="2281318"/>
+                </a:lnTo>
+                <a:close/>
+                <a:lnTo>
+                  <a:pt x="208221" y="2279023"/>
+                </a:lnTo>
+                <a:close/>
+                <a:lnTo>
+                  <a:pt x="210587" y="2276723"/>
+                </a:lnTo>
+                <a:close/>
+                <a:lnTo>
+                  <a:pt x="212953" y="2274417"/>
+                </a:lnTo>
+                <a:close/>
+                <a:lnTo>
+                  <a:pt x="215319" y="2272105"/>
+                </a:lnTo>
+                <a:close/>
+                <a:lnTo>
+                  <a:pt x="217685" y="2269787"/>
+                </a:lnTo>
+                <a:close/>
+                <a:lnTo>
+                  <a:pt x="220051" y="2267463"/>
+                </a:lnTo>
+                <a:close/>
+                <a:lnTo>
+                  <a:pt x="222417" y="2265135"/>
+                </a:lnTo>
+                <a:close/>
+                <a:lnTo>
+                  <a:pt x="224784" y="2262801"/>
+                </a:lnTo>
+                <a:close/>
+                <a:lnTo>
+                  <a:pt x="227150" y="2260462"/>
+                </a:lnTo>
+                <a:close/>
+                <a:lnTo>
+                  <a:pt x="229516" y="2258118"/>
+                </a:lnTo>
+                <a:close/>
+                <a:lnTo>
+                  <a:pt x="231882" y="2255769"/>
+                </a:lnTo>
+                <a:close/>
+                <a:lnTo>
+                  <a:pt x="234248" y="2253415"/>
+                </a:lnTo>
+                <a:close/>
+                <a:lnTo>
+                  <a:pt x="236614" y="2251056"/>
+                </a:lnTo>
+                <a:close/>
+                <a:lnTo>
+                  <a:pt x="238981" y="2248692"/>
+                </a:lnTo>
+                <a:close/>
+                <a:lnTo>
+                  <a:pt x="241347" y="2246321"/>
+                </a:lnTo>
+                <a:close/>
+                <a:lnTo>
+                  <a:pt x="243713" y="2243945"/>
+                </a:lnTo>
+                <a:close/>
+                <a:lnTo>
+                  <a:pt x="246079" y="2241563"/>
+                </a:lnTo>
+                <a:close/>
+                <a:lnTo>
+                  <a:pt x="248445" y="2239174"/>
+                </a:lnTo>
+                <a:close/>
+                <a:lnTo>
+                  <a:pt x="250811" y="2236778"/>
+                </a:lnTo>
+                <a:close/>
+                <a:lnTo>
+                  <a:pt x="253177" y="2234375"/>
+                </a:lnTo>
+                <a:close/>
+                <a:lnTo>
+                  <a:pt x="255544" y="2231966"/>
+                </a:lnTo>
+                <a:close/>
+                <a:lnTo>
+                  <a:pt x="257910" y="2229550"/>
+                </a:lnTo>
+                <a:close/>
+                <a:lnTo>
+                  <a:pt x="260276" y="2227128"/>
+                </a:lnTo>
+                <a:close/>
+                <a:lnTo>
+                  <a:pt x="262642" y="2224698"/>
+                </a:lnTo>
+                <a:close/>
+                <a:lnTo>
+                  <a:pt x="265008" y="2222263"/>
+                </a:lnTo>
+                <a:close/>
+                <a:lnTo>
+                  <a:pt x="267374" y="2219821"/>
+                </a:lnTo>
+                <a:close/>
+                <a:lnTo>
+                  <a:pt x="269740" y="2217374"/>
+                </a:lnTo>
+                <a:close/>
+                <a:lnTo>
+                  <a:pt x="272107" y="2214920"/>
+                </a:lnTo>
+                <a:close/>
+                <a:lnTo>
+                  <a:pt x="274473" y="2212461"/>
+                </a:lnTo>
+                <a:close/>
+                <a:lnTo>
+                  <a:pt x="276839" y="2209996"/>
+                </a:lnTo>
+                <a:close/>
+                <a:lnTo>
+                  <a:pt x="279205" y="2207525"/>
+                </a:lnTo>
+                <a:close/>
+                <a:lnTo>
+                  <a:pt x="281571" y="2205049"/>
+                </a:lnTo>
+                <a:close/>
+                <a:lnTo>
+                  <a:pt x="283937" y="2202567"/>
+                </a:lnTo>
+                <a:close/>
+                <a:lnTo>
+                  <a:pt x="286303" y="2200079"/>
+                </a:lnTo>
+                <a:close/>
+                <a:lnTo>
+                  <a:pt x="288670" y="2197586"/>
+                </a:lnTo>
+                <a:close/>
+                <a:lnTo>
+                  <a:pt x="291036" y="2195087"/>
+                </a:lnTo>
+                <a:close/>
+                <a:lnTo>
+                  <a:pt x="293402" y="2192582"/>
+                </a:lnTo>
+                <a:close/>
+                <a:lnTo>
+                  <a:pt x="295768" y="2190072"/>
+                </a:lnTo>
+                <a:close/>
+                <a:lnTo>
+                  <a:pt x="298134" y="2187556"/>
+                </a:lnTo>
+                <a:close/>
+                <a:lnTo>
+                  <a:pt x="300500" y="2185034"/>
+                </a:lnTo>
+                <a:close/>
+                <a:lnTo>
+                  <a:pt x="302866" y="2182506"/>
+                </a:lnTo>
+                <a:close/>
+                <a:lnTo>
+                  <a:pt x="305233" y="2179973"/>
+                </a:lnTo>
+                <a:close/>
+                <a:lnTo>
+                  <a:pt x="307599" y="2177433"/>
+                </a:lnTo>
+                <a:close/>
+                <a:lnTo>
+                  <a:pt x="309965" y="2174887"/>
+                </a:lnTo>
+                <a:close/>
+                <a:lnTo>
+                  <a:pt x="312331" y="2172335"/>
+                </a:lnTo>
+                <a:close/>
+                <a:lnTo>
+                  <a:pt x="314697" y="2169776"/>
+                </a:lnTo>
+                <a:close/>
+                <a:lnTo>
+                  <a:pt x="317063" y="2167211"/>
+                </a:lnTo>
+                <a:close/>
+                <a:lnTo>
+                  <a:pt x="319429" y="2164639"/>
+                </a:lnTo>
+                <a:close/>
+                <a:lnTo>
+                  <a:pt x="321796" y="2162060"/>
+                </a:lnTo>
+                <a:close/>
+                <a:lnTo>
+                  <a:pt x="324162" y="2159474"/>
+                </a:lnTo>
+                <a:close/>
+                <a:lnTo>
+                  <a:pt x="326528" y="2156882"/>
+                </a:lnTo>
+                <a:close/>
+                <a:lnTo>
+                  <a:pt x="328894" y="2154284"/>
+                </a:lnTo>
+                <a:close/>
+                <a:lnTo>
+                  <a:pt x="331260" y="2151680"/>
+                </a:lnTo>
+                <a:close/>
+                <a:lnTo>
+                  <a:pt x="333626" y="2149069"/>
+                </a:lnTo>
+                <a:close/>
+                <a:lnTo>
+                  <a:pt x="335992" y="2146453"/>
+                </a:lnTo>
+                <a:close/>
+                <a:lnTo>
+                  <a:pt x="338359" y="2143830"/>
+                </a:lnTo>
+                <a:close/>
+                <a:lnTo>
+                  <a:pt x="340725" y="2141203"/>
+                </a:lnTo>
+                <a:close/>
+                <a:lnTo>
+                  <a:pt x="343091" y="2138569"/>
+                </a:lnTo>
+                <a:close/>
+                <a:lnTo>
+                  <a:pt x="345457" y="2135931"/>
+                </a:lnTo>
+                <a:close/>
+                <a:lnTo>
+                  <a:pt x="347823" y="2133287"/>
+                </a:lnTo>
+                <a:close/>
+                <a:lnTo>
+                  <a:pt x="350189" y="2130637"/>
+                </a:lnTo>
+                <a:close/>
+                <a:lnTo>
+                  <a:pt x="352555" y="2127982"/>
+                </a:lnTo>
+                <a:close/>
+                <a:lnTo>
+                  <a:pt x="354922" y="2125320"/>
+                </a:lnTo>
+                <a:close/>
+                <a:lnTo>
+                  <a:pt x="357288" y="2122652"/>
+                </a:lnTo>
+                <a:close/>
+                <a:lnTo>
+                  <a:pt x="359654" y="2119977"/>
+                </a:lnTo>
+                <a:close/>
+                <a:lnTo>
+                  <a:pt x="362020" y="2117295"/>
+                </a:lnTo>
+                <a:close/>
+                <a:lnTo>
+                  <a:pt x="364386" y="2114606"/>
+                </a:lnTo>
+                <a:close/>
+                <a:lnTo>
+                  <a:pt x="366752" y="2111910"/>
+                </a:lnTo>
+                <a:close/>
+                <a:lnTo>
+                  <a:pt x="369118" y="2109207"/>
+                </a:lnTo>
+                <a:close/>
+                <a:lnTo>
+                  <a:pt x="371485" y="2106496"/>
+                </a:lnTo>
+                <a:close/>
+                <a:lnTo>
+                  <a:pt x="373851" y="2103778"/>
+                </a:lnTo>
+                <a:close/>
+                <a:lnTo>
+                  <a:pt x="376217" y="2101054"/>
+                </a:lnTo>
+                <a:close/>
+                <a:lnTo>
+                  <a:pt x="378583" y="2098322"/>
+                </a:lnTo>
+                <a:close/>
+                <a:lnTo>
+                  <a:pt x="380949" y="2095584"/>
+                </a:lnTo>
+                <a:close/>
+                <a:lnTo>
+                  <a:pt x="383315" y="2092839"/>
+                </a:lnTo>
+                <a:close/>
+                <a:lnTo>
+                  <a:pt x="385681" y="2090087"/>
+                </a:lnTo>
+                <a:close/>
+                <a:lnTo>
+                  <a:pt x="388048" y="2087329"/>
+                </a:lnTo>
+                <a:close/>
+                <a:lnTo>
+                  <a:pt x="390414" y="2084565"/>
+                </a:lnTo>
+                <a:close/>
+                <a:lnTo>
+                  <a:pt x="392780" y="2081795"/>
+                </a:lnTo>
+                <a:close/>
+                <a:lnTo>
+                  <a:pt x="395146" y="2079019"/>
+                </a:lnTo>
+                <a:close/>
+                <a:lnTo>
+                  <a:pt x="397512" y="2076236"/>
+                </a:lnTo>
+                <a:close/>
+                <a:lnTo>
+                  <a:pt x="399878" y="2073448"/>
+                </a:lnTo>
+                <a:close/>
+                <a:lnTo>
+                  <a:pt x="402244" y="2070653"/>
+                </a:lnTo>
+                <a:close/>
+                <a:lnTo>
+                  <a:pt x="404611" y="2067852"/>
+                </a:lnTo>
+                <a:close/>
+                <a:lnTo>
+                  <a:pt x="406977" y="2065045"/>
+                </a:lnTo>
+                <a:close/>
+                <a:lnTo>
+                  <a:pt x="409343" y="2062232"/>
+                </a:lnTo>
+                <a:close/>
+                <a:lnTo>
+                  <a:pt x="411709" y="2059413"/>
+                </a:lnTo>
+                <a:close/>
+                <a:lnTo>
+                  <a:pt x="414075" y="2056588"/>
+                </a:lnTo>
+                <a:close/>
+                <a:lnTo>
+                  <a:pt x="416441" y="2053757"/>
+                </a:lnTo>
+                <a:close/>
+                <a:lnTo>
+                  <a:pt x="418807" y="2050919"/>
+                </a:lnTo>
+                <a:close/>
+                <a:lnTo>
+                  <a:pt x="421174" y="2048075"/>
+                </a:lnTo>
+                <a:close/>
+                <a:lnTo>
+                  <a:pt x="423540" y="2045223"/>
+                </a:lnTo>
+                <a:close/>
+                <a:lnTo>
+                  <a:pt x="425906" y="2042365"/>
+                </a:lnTo>
+                <a:close/>
+                <a:lnTo>
+                  <a:pt x="428272" y="2039500"/>
+                </a:lnTo>
+                <a:close/>
+                <a:lnTo>
+                  <a:pt x="430638" y="2036627"/>
+                </a:lnTo>
+                <a:close/>
+                <a:lnTo>
+                  <a:pt x="433004" y="2033747"/>
+                </a:lnTo>
+                <a:close/>
+                <a:lnTo>
+                  <a:pt x="435370" y="2030859"/>
+                </a:lnTo>
+                <a:close/>
+                <a:lnTo>
+                  <a:pt x="437737" y="2027963"/>
+                </a:lnTo>
+                <a:close/>
+                <a:lnTo>
+                  <a:pt x="440103" y="2025059"/>
+                </a:lnTo>
+                <a:close/>
+                <a:lnTo>
+                  <a:pt x="442469" y="2022148"/>
+                </a:lnTo>
+                <a:close/>
+                <a:lnTo>
+                  <a:pt x="444835" y="2019230"/>
+                </a:lnTo>
+                <a:close/>
+                <a:lnTo>
+                  <a:pt x="447201" y="2016304"/>
+                </a:lnTo>
+                <a:close/>
+                <a:lnTo>
+                  <a:pt x="449567" y="2013371"/>
+                </a:lnTo>
+                <a:close/>
+                <a:lnTo>
+                  <a:pt x="451933" y="2010431"/>
+                </a:lnTo>
+                <a:close/>
+                <a:lnTo>
+                  <a:pt x="454300" y="2007484"/>
+                </a:lnTo>
+                <a:close/>
+                <a:lnTo>
+                  <a:pt x="456666" y="2004530"/>
+                </a:lnTo>
+                <a:close/>
+                <a:lnTo>
+                  <a:pt x="459032" y="2001570"/>
+                </a:lnTo>
+                <a:close/>
+                <a:lnTo>
+                  <a:pt x="461398" y="1998602"/>
+                </a:lnTo>
+                <a:close/>
+                <a:lnTo>
+                  <a:pt x="463764" y="1995628"/>
+                </a:lnTo>
+                <a:close/>
+                <a:lnTo>
+                  <a:pt x="466130" y="1992648"/>
+                </a:lnTo>
+                <a:close/>
+                <a:lnTo>
+                  <a:pt x="468496" y="1989661"/>
+                </a:lnTo>
+                <a:close/>
+                <a:lnTo>
+                  <a:pt x="470863" y="1986667"/>
+                </a:lnTo>
+                <a:close/>
+                <a:lnTo>
+                  <a:pt x="473229" y="1983666"/>
+                </a:lnTo>
+                <a:close/>
+                <a:lnTo>
+                  <a:pt x="475595" y="1980660"/>
+                </a:lnTo>
+                <a:close/>
+                <a:lnTo>
+                  <a:pt x="477961" y="1977646"/>
+                </a:lnTo>
+                <a:close/>
+                <a:lnTo>
+                  <a:pt x="480327" y="1974626"/>
+                </a:lnTo>
+                <a:close/>
+                <a:lnTo>
+                  <a:pt x="482693" y="1971599"/>
+                </a:lnTo>
+                <a:close/>
+                <a:lnTo>
+                  <a:pt x="485059" y="1968566"/>
+                </a:lnTo>
+                <a:close/>
+                <a:lnTo>
+                  <a:pt x="487426" y="1965526"/>
+                </a:lnTo>
+                <a:close/>
+                <a:lnTo>
+                  <a:pt x="489792" y="1962478"/>
+                </a:lnTo>
+                <a:close/>
+                <a:lnTo>
+                  <a:pt x="492158" y="1959424"/>
+                </a:lnTo>
+                <a:close/>
+                <a:lnTo>
+                  <a:pt x="494524" y="1956362"/>
+                </a:lnTo>
+                <a:close/>
+                <a:lnTo>
+                  <a:pt x="496890" y="1953292"/>
+                </a:lnTo>
+                <a:close/>
+                <a:lnTo>
+                  <a:pt x="499256" y="1950214"/>
+                </a:lnTo>
+                <a:close/>
+                <a:lnTo>
+                  <a:pt x="501622" y="1947128"/>
+                </a:lnTo>
+                <a:close/>
+                <a:lnTo>
+                  <a:pt x="503989" y="1944034"/>
+                </a:lnTo>
+                <a:close/>
+                <a:lnTo>
+                  <a:pt x="506355" y="1940931"/>
+                </a:lnTo>
+                <a:close/>
+                <a:lnTo>
+                  <a:pt x="508721" y="1937821"/>
+                </a:lnTo>
+                <a:close/>
+                <a:lnTo>
+                  <a:pt x="511087" y="1934702"/>
+                </a:lnTo>
+                <a:close/>
+                <a:lnTo>
+                  <a:pt x="513453" y="1931575"/>
+                </a:lnTo>
+                <a:close/>
+                <a:lnTo>
+                  <a:pt x="515819" y="1928441"/>
+                </a:lnTo>
+                <a:close/>
+                <a:lnTo>
+                  <a:pt x="518185" y="1925299"/>
+                </a:lnTo>
+                <a:close/>
+                <a:lnTo>
+                  <a:pt x="520552" y="1922150"/>
+                </a:lnTo>
+                <a:close/>
+                <a:lnTo>
+                  <a:pt x="522918" y="1918993"/>
+                </a:lnTo>
+                <a:close/>
+                <a:lnTo>
+                  <a:pt x="525284" y="1915830"/>
+                </a:lnTo>
+                <a:close/>
+                <a:lnTo>
+                  <a:pt x="527650" y="1912659"/>
+                </a:lnTo>
+                <a:close/>
+                <a:lnTo>
+                  <a:pt x="530016" y="1909482"/>
+                </a:lnTo>
+                <a:close/>
+                <a:lnTo>
+                  <a:pt x="532382" y="1906297"/>
+                </a:lnTo>
+                <a:close/>
+                <a:lnTo>
+                  <a:pt x="534748" y="1903105"/>
+                </a:lnTo>
+                <a:close/>
+                <a:lnTo>
+                  <a:pt x="537115" y="1899906"/>
+                </a:lnTo>
+                <a:close/>
+                <a:lnTo>
+                  <a:pt x="539481" y="1896699"/>
+                </a:lnTo>
+                <a:close/>
+                <a:lnTo>
+                  <a:pt x="541847" y="1893485"/>
+                </a:lnTo>
+                <a:close/>
+                <a:lnTo>
+                  <a:pt x="544213" y="1890263"/>
+                </a:lnTo>
+                <a:close/>
+                <a:lnTo>
+                  <a:pt x="546579" y="1887033"/>
+                </a:lnTo>
+                <a:close/>
+                <a:lnTo>
+                  <a:pt x="548945" y="1883795"/>
+                </a:lnTo>
+                <a:close/>
+                <a:lnTo>
+                  <a:pt x="551311" y="1880549"/>
+                </a:lnTo>
+                <a:close/>
+                <a:lnTo>
+                  <a:pt x="553678" y="1877295"/>
+                </a:lnTo>
+                <a:close/>
+                <a:lnTo>
+                  <a:pt x="556044" y="1874033"/>
+                </a:lnTo>
+                <a:close/>
+                <a:lnTo>
+                  <a:pt x="558410" y="1870763"/>
+                </a:lnTo>
+                <a:close/>
+                <a:lnTo>
+                  <a:pt x="560776" y="1867485"/>
+                </a:lnTo>
+                <a:close/>
+                <a:lnTo>
+                  <a:pt x="563142" y="1864199"/>
+                </a:lnTo>
+                <a:close/>
+                <a:lnTo>
+                  <a:pt x="565508" y="1860905"/>
+                </a:lnTo>
+                <a:close/>
+                <a:lnTo>
+                  <a:pt x="567874" y="1857603"/>
+                </a:lnTo>
+                <a:close/>
+                <a:lnTo>
+                  <a:pt x="570241" y="1854294"/>
+                </a:lnTo>
+                <a:close/>
+                <a:lnTo>
+                  <a:pt x="572607" y="1850976"/>
+                </a:lnTo>
+                <a:close/>
+                <a:lnTo>
+                  <a:pt x="574973" y="1847651"/>
+                </a:lnTo>
+                <a:close/>
+                <a:lnTo>
+                  <a:pt x="577339" y="1844318"/>
+                </a:lnTo>
+                <a:close/>
+                <a:lnTo>
+                  <a:pt x="579705" y="1840977"/>
+                </a:lnTo>
+                <a:close/>
+                <a:lnTo>
+                  <a:pt x="582071" y="1837629"/>
+                </a:lnTo>
+                <a:close/>
+                <a:lnTo>
+                  <a:pt x="584437" y="1834272"/>
+                </a:lnTo>
+                <a:close/>
+                <a:lnTo>
+                  <a:pt x="586804" y="1830908"/>
+                </a:lnTo>
+                <a:close/>
+                <a:lnTo>
+                  <a:pt x="589170" y="1827537"/>
+                </a:lnTo>
+                <a:close/>
+                <a:lnTo>
+                  <a:pt x="591536" y="1824157"/>
+                </a:lnTo>
+                <a:close/>
+                <a:lnTo>
+                  <a:pt x="593902" y="1820770"/>
+                </a:lnTo>
+                <a:close/>
+                <a:lnTo>
+                  <a:pt x="596268" y="1817375"/>
+                </a:lnTo>
+                <a:close/>
+                <a:lnTo>
+                  <a:pt x="598634" y="1813973"/>
+                </a:lnTo>
+                <a:close/>
+                <a:lnTo>
+                  <a:pt x="601000" y="1810562"/>
+                </a:lnTo>
+                <a:close/>
+                <a:lnTo>
+                  <a:pt x="603367" y="1807144"/>
+                </a:lnTo>
+                <a:close/>
+                <a:lnTo>
+                  <a:pt x="605733" y="1803718"/>
+                </a:lnTo>
+                <a:close/>
+                <a:lnTo>
+                  <a:pt x="608099" y="1800283"/>
+                </a:lnTo>
+                <a:close/>
+                <a:lnTo>
+                  <a:pt x="610465" y="1796841"/>
+                </a:lnTo>
+                <a:close/>
+                <a:lnTo>
+                  <a:pt x="612831" y="1793390"/>
+                </a:lnTo>
+                <a:close/>
+                <a:lnTo>
+                  <a:pt x="615197" y="1789931"/>
+                </a:lnTo>
+                <a:close/>
+                <a:lnTo>
+                  <a:pt x="617563" y="1786463"/>
+                </a:lnTo>
+                <a:close/>
+                <a:lnTo>
+                  <a:pt x="619930" y="1782986"/>
+                </a:lnTo>
+                <a:close/>
+                <a:lnTo>
+                  <a:pt x="622296" y="1779502"/>
+                </a:lnTo>
+                <a:close/>
+                <a:lnTo>
+                  <a:pt x="624662" y="1776008"/>
+                </a:lnTo>
+                <a:close/>
+                <a:lnTo>
+                  <a:pt x="627028" y="1772507"/>
+                </a:lnTo>
+                <a:close/>
+                <a:lnTo>
+                  <a:pt x="629394" y="1768996"/>
+                </a:lnTo>
+                <a:close/>
+                <a:lnTo>
+                  <a:pt x="631760" y="1765478"/>
+                </a:lnTo>
+                <a:close/>
+                <a:lnTo>
+                  <a:pt x="634126" y="1761952"/>
+                </a:lnTo>
+                <a:close/>
+                <a:lnTo>
+                  <a:pt x="636493" y="1758417"/>
+                </a:lnTo>
+                <a:close/>
+                <a:lnTo>
+                  <a:pt x="638859" y="1754874"/>
+                </a:lnTo>
+                <a:close/>
+                <a:lnTo>
+                  <a:pt x="641225" y="1751323"/>
+                </a:lnTo>
+                <a:close/>
+                <a:lnTo>
+                  <a:pt x="643591" y="1747764"/>
+                </a:lnTo>
+                <a:close/>
+                <a:lnTo>
+                  <a:pt x="645957" y="1744197"/>
+                </a:lnTo>
+                <a:close/>
+                <a:lnTo>
+                  <a:pt x="648323" y="1740622"/>
+                </a:lnTo>
+                <a:close/>
+                <a:lnTo>
+                  <a:pt x="650689" y="1737037"/>
+                </a:lnTo>
+                <a:close/>
+                <a:lnTo>
+                  <a:pt x="653056" y="1733445"/>
+                </a:lnTo>
+                <a:close/>
+                <a:lnTo>
+                  <a:pt x="655422" y="1729843"/>
+                </a:lnTo>
+                <a:close/>
+                <a:lnTo>
+                  <a:pt x="657788" y="1726233"/>
+                </a:lnTo>
+                <a:close/>
+                <a:lnTo>
+                  <a:pt x="660154" y="1722614"/>
+                </a:lnTo>
+                <a:close/>
+                <a:lnTo>
+                  <a:pt x="662520" y="1718986"/>
+                </a:lnTo>
+                <a:close/>
+                <a:lnTo>
+                  <a:pt x="664886" y="1715348"/>
+                </a:lnTo>
+                <a:close/>
+                <a:lnTo>
+                  <a:pt x="667252" y="1711701"/>
+                </a:lnTo>
+                <a:close/>
+                <a:lnTo>
+                  <a:pt x="669619" y="1708046"/>
+                </a:lnTo>
+                <a:close/>
+                <a:lnTo>
+                  <a:pt x="671985" y="1704381"/>
+                </a:lnTo>
+                <a:close/>
+                <a:lnTo>
+                  <a:pt x="674351" y="1700708"/>
+                </a:lnTo>
+                <a:close/>
+                <a:lnTo>
+                  <a:pt x="676717" y="1697026"/>
+                </a:lnTo>
+                <a:close/>
+                <a:lnTo>
+                  <a:pt x="679083" y="1693336"/>
+                </a:lnTo>
+                <a:close/>
+                <a:lnTo>
+                  <a:pt x="681449" y="1689638"/>
+                </a:lnTo>
+                <a:close/>
+                <a:lnTo>
+                  <a:pt x="683815" y="1685931"/>
+                </a:lnTo>
+                <a:close/>
+                <a:lnTo>
+                  <a:pt x="686182" y="1682217"/>
+                </a:lnTo>
+                <a:close/>
+                <a:lnTo>
+                  <a:pt x="688548" y="1678495"/>
+                </a:lnTo>
+                <a:close/>
+                <a:lnTo>
+                  <a:pt x="690914" y="1674765"/>
+                </a:lnTo>
+                <a:close/>
+                <a:lnTo>
+                  <a:pt x="693280" y="1671026"/>
+                </a:lnTo>
+                <a:close/>
+                <a:lnTo>
+                  <a:pt x="695646" y="1667280"/>
+                </a:lnTo>
+                <a:close/>
+                <a:lnTo>
+                  <a:pt x="698012" y="1663525"/>
+                </a:lnTo>
+                <a:close/>
+                <a:lnTo>
+                  <a:pt x="700378" y="1659761"/>
+                </a:lnTo>
+                <a:close/>
+                <a:lnTo>
+                  <a:pt x="702745" y="1655988"/>
+                </a:lnTo>
+                <a:close/>
+                <a:lnTo>
+                  <a:pt x="705111" y="1652206"/>
+                </a:lnTo>
+                <a:close/>
+                <a:lnTo>
+                  <a:pt x="707477" y="1648414"/>
+                </a:lnTo>
+                <a:close/>
+                <a:lnTo>
+                  <a:pt x="709843" y="1644613"/>
+                </a:lnTo>
+                <a:close/>
+                <a:lnTo>
+                  <a:pt x="712209" y="1640802"/>
+                </a:lnTo>
+                <a:close/>
+                <a:lnTo>
+                  <a:pt x="714575" y="1636982"/>
+                </a:lnTo>
+                <a:close/>
+                <a:lnTo>
+                  <a:pt x="716942" y="1633152"/>
+                </a:lnTo>
+                <a:close/>
+                <a:lnTo>
+                  <a:pt x="719308" y="1629313"/>
+                </a:lnTo>
+                <a:close/>
+                <a:lnTo>
+                  <a:pt x="721674" y="1625464"/>
+                </a:lnTo>
+                <a:close/>
+                <a:lnTo>
+                  <a:pt x="724040" y="1621605"/>
+                </a:lnTo>
+                <a:close/>
+                <a:lnTo>
+                  <a:pt x="726406" y="1617737"/>
+                </a:lnTo>
+                <a:close/>
+                <a:lnTo>
+                  <a:pt x="728772" y="1613859"/>
+                </a:lnTo>
+                <a:close/>
+                <a:lnTo>
+                  <a:pt x="731138" y="1609972"/>
+                </a:lnTo>
+                <a:close/>
+                <a:lnTo>
+                  <a:pt x="733505" y="1606076"/>
+                </a:lnTo>
+                <a:close/>
+                <a:lnTo>
+                  <a:pt x="735871" y="1602170"/>
+                </a:lnTo>
+                <a:close/>
+                <a:lnTo>
+                  <a:pt x="738237" y="1598255"/>
+                </a:lnTo>
+                <a:close/>
+                <a:lnTo>
+                  <a:pt x="740603" y="1594330"/>
+                </a:lnTo>
+                <a:close/>
+                <a:lnTo>
+                  <a:pt x="742969" y="1590397"/>
+                </a:lnTo>
+                <a:close/>
+                <a:lnTo>
+                  <a:pt x="745335" y="1586455"/>
+                </a:lnTo>
+                <a:close/>
+                <a:lnTo>
+                  <a:pt x="747701" y="1582504"/>
+                </a:lnTo>
+                <a:close/>
+                <a:lnTo>
+                  <a:pt x="750068" y="1578544"/>
+                </a:lnTo>
+                <a:close/>
+                <a:lnTo>
+                  <a:pt x="752434" y="1574576"/>
+                </a:lnTo>
+                <a:close/>
+                <a:lnTo>
+                  <a:pt x="754800" y="1570599"/>
+                </a:lnTo>
+                <a:close/>
+                <a:lnTo>
+                  <a:pt x="757166" y="1566614"/>
+                </a:lnTo>
+                <a:close/>
+                <a:lnTo>
+                  <a:pt x="759532" y="1562621"/>
+                </a:lnTo>
+                <a:close/>
+                <a:lnTo>
+                  <a:pt x="761898" y="1558618"/>
+                </a:lnTo>
+                <a:close/>
+                <a:lnTo>
+                  <a:pt x="764264" y="1554607"/>
+                </a:lnTo>
+                <a:close/>
+                <a:lnTo>
+                  <a:pt x="766631" y="1550587"/>
+                </a:lnTo>
+                <a:close/>
+                <a:lnTo>
+                  <a:pt x="768997" y="1546557"/>
+                </a:lnTo>
+                <a:close/>
+                <a:lnTo>
+                  <a:pt x="771363" y="1542518"/>
+                </a:lnTo>
+                <a:close/>
+                <a:lnTo>
+                  <a:pt x="773729" y="1538469"/>
+                </a:lnTo>
+                <a:close/>
+                <a:lnTo>
+                  <a:pt x="776095" y="1534411"/>
+                </a:lnTo>
+                <a:close/>
+                <a:lnTo>
+                  <a:pt x="778461" y="1530342"/>
+                </a:lnTo>
+                <a:close/>
+                <a:lnTo>
+                  <a:pt x="780827" y="1526263"/>
+                </a:lnTo>
+                <a:close/>
+                <a:lnTo>
+                  <a:pt x="783194" y="1522175"/>
+                </a:lnTo>
+                <a:close/>
+                <a:lnTo>
+                  <a:pt x="785560" y="1518076"/>
+                </a:lnTo>
+                <a:close/>
+                <a:lnTo>
+                  <a:pt x="787926" y="1513967"/>
+                </a:lnTo>
+                <a:close/>
+                <a:lnTo>
+                  <a:pt x="790292" y="1509848"/>
+                </a:lnTo>
+                <a:close/>
+                <a:lnTo>
+                  <a:pt x="792658" y="1505719"/>
+                </a:lnTo>
+                <a:close/>
+                <a:lnTo>
+                  <a:pt x="795024" y="1501580"/>
+                </a:lnTo>
+                <a:close/>
+                <a:lnTo>
+                  <a:pt x="797390" y="1497431"/>
+                </a:lnTo>
+                <a:close/>
+                <a:lnTo>
+                  <a:pt x="799757" y="1493272"/>
+                </a:lnTo>
+                <a:close/>
+                <a:lnTo>
+                  <a:pt x="802123" y="1489103"/>
+                </a:lnTo>
+                <a:close/>
+                <a:lnTo>
+                  <a:pt x="804489" y="1484924"/>
+                </a:lnTo>
+                <a:close/>
+                <a:lnTo>
+                  <a:pt x="806855" y="1480735"/>
+                </a:lnTo>
+                <a:close/>
+                <a:lnTo>
+                  <a:pt x="809221" y="1476537"/>
+                </a:lnTo>
+                <a:close/>
+                <a:lnTo>
+                  <a:pt x="811587" y="1472329"/>
+                </a:lnTo>
+                <a:close/>
+                <a:lnTo>
+                  <a:pt x="813953" y="1468112"/>
+                </a:lnTo>
+                <a:close/>
+                <a:lnTo>
+                  <a:pt x="816320" y="1463886"/>
+                </a:lnTo>
+                <a:close/>
+                <a:lnTo>
+                  <a:pt x="818686" y="1459650"/>
+                </a:lnTo>
+                <a:close/>
+                <a:lnTo>
+                  <a:pt x="821052" y="1455406"/>
+                </a:lnTo>
+                <a:close/>
+                <a:lnTo>
+                  <a:pt x="823418" y="1451152"/>
+                </a:lnTo>
+                <a:close/>
+                <a:lnTo>
+                  <a:pt x="825784" y="1446890"/>
+                </a:lnTo>
+                <a:close/>
+                <a:lnTo>
+                  <a:pt x="828150" y="1442619"/>
+                </a:lnTo>
+                <a:close/>
+                <a:lnTo>
+                  <a:pt x="830516" y="1438338"/>
+                </a:lnTo>
+                <a:close/>
+                <a:lnTo>
+                  <a:pt x="832883" y="1434048"/>
+                </a:lnTo>
+                <a:close/>
+                <a:lnTo>
+                  <a:pt x="835249" y="1429749"/>
+                </a:lnTo>
+                <a:close/>
+                <a:lnTo>
+                  <a:pt x="837615" y="1425440"/>
+                </a:lnTo>
+                <a:close/>
+                <a:lnTo>
+                  <a:pt x="839981" y="1421120"/>
+                </a:lnTo>
+                <a:close/>
+                <a:lnTo>
+                  <a:pt x="842347" y="1416790"/>
+                </a:lnTo>
+                <a:close/>
+                <a:lnTo>
+                  <a:pt x="844713" y="1412450"/>
+                </a:lnTo>
+                <a:close/>
+                <a:lnTo>
+                  <a:pt x="847079" y="1408100"/>
+                </a:lnTo>
+                <a:close/>
+                <a:lnTo>
+                  <a:pt x="849446" y="1403738"/>
+                </a:lnTo>
+                <a:close/>
+                <a:lnTo>
+                  <a:pt x="851812" y="1399366"/>
+                </a:lnTo>
+                <a:close/>
+                <a:lnTo>
+                  <a:pt x="854178" y="1394984"/>
+                </a:lnTo>
+                <a:close/>
+                <a:lnTo>
+                  <a:pt x="856544" y="1390591"/>
+                </a:lnTo>
+                <a:close/>
+                <a:lnTo>
+                  <a:pt x="858910" y="1386187"/>
+                </a:lnTo>
+                <a:close/>
+                <a:lnTo>
+                  <a:pt x="861276" y="1381774"/>
+                </a:lnTo>
+                <a:close/>
+                <a:lnTo>
+                  <a:pt x="863642" y="1377350"/>
+                </a:lnTo>
+                <a:close/>
+                <a:lnTo>
+                  <a:pt x="866009" y="1372916"/>
+                </a:lnTo>
+                <a:close/>
+                <a:lnTo>
+                  <a:pt x="868375" y="1368471"/>
+                </a:lnTo>
+                <a:close/>
+                <a:lnTo>
+                  <a:pt x="870741" y="1364017"/>
+                </a:lnTo>
+                <a:close/>
+                <a:lnTo>
+                  <a:pt x="873107" y="1359553"/>
+                </a:lnTo>
+                <a:close/>
+                <a:lnTo>
+                  <a:pt x="875473" y="1355078"/>
+                </a:lnTo>
+                <a:close/>
+                <a:lnTo>
+                  <a:pt x="877839" y="1350593"/>
+                </a:lnTo>
+                <a:close/>
+                <a:lnTo>
+                  <a:pt x="880205" y="1346098"/>
+                </a:lnTo>
+                <a:close/>
+                <a:lnTo>
+                  <a:pt x="882572" y="1341592"/>
+                </a:lnTo>
+                <a:close/>
+                <a:lnTo>
+                  <a:pt x="884938" y="1337076"/>
+                </a:lnTo>
+                <a:close/>
+                <a:lnTo>
+                  <a:pt x="887304" y="1332549"/>
+                </a:lnTo>
+                <a:close/>
+                <a:lnTo>
+                  <a:pt x="889670" y="1328011"/>
+                </a:lnTo>
+                <a:close/>
+                <a:lnTo>
+                  <a:pt x="892036" y="1323463"/>
+                </a:lnTo>
+                <a:close/>
+                <a:lnTo>
+                  <a:pt x="894402" y="1318903"/>
+                </a:lnTo>
+                <a:close/>
+                <a:lnTo>
+                  <a:pt x="896768" y="1314333"/>
+                </a:lnTo>
+                <a:close/>
+                <a:lnTo>
+                  <a:pt x="899135" y="1309751"/>
+                </a:lnTo>
+                <a:close/>
+                <a:lnTo>
+                  <a:pt x="901501" y="1305159"/>
+                </a:lnTo>
+                <a:close/>
+                <a:lnTo>
+                  <a:pt x="903867" y="1300555"/>
+                </a:lnTo>
+                <a:close/>
+                <a:lnTo>
+                  <a:pt x="906233" y="1295941"/>
+                </a:lnTo>
+                <a:close/>
+                <a:lnTo>
+                  <a:pt x="908599" y="1291316"/>
+                </a:lnTo>
+                <a:close/>
+                <a:lnTo>
+                  <a:pt x="910965" y="1286680"/>
+                </a:lnTo>
+                <a:close/>
+                <a:lnTo>
+                  <a:pt x="913331" y="1282034"/>
+                </a:lnTo>
+                <a:close/>
+                <a:lnTo>
+                  <a:pt x="915698" y="1277376"/>
+                </a:lnTo>
+                <a:close/>
+                <a:lnTo>
+                  <a:pt x="918064" y="1272708"/>
+                </a:lnTo>
+                <a:close/>
+                <a:lnTo>
+                  <a:pt x="920430" y="1268030"/>
+                </a:lnTo>
+                <a:close/>
+                <a:lnTo>
+                  <a:pt x="922796" y="1263340"/>
+                </a:lnTo>
+                <a:close/>
+                <a:lnTo>
+                  <a:pt x="925162" y="1258640"/>
+                </a:lnTo>
+                <a:close/>
+                <a:lnTo>
+                  <a:pt x="927528" y="1253929"/>
+                </a:lnTo>
+                <a:close/>
+                <a:lnTo>
+                  <a:pt x="929894" y="1249207"/>
+                </a:lnTo>
+                <a:close/>
+                <a:lnTo>
+                  <a:pt x="932261" y="1244475"/>
+                </a:lnTo>
+                <a:close/>
+                <a:lnTo>
+                  <a:pt x="934627" y="1239732"/>
+                </a:lnTo>
+                <a:close/>
+                <a:lnTo>
+                  <a:pt x="936993" y="1234978"/>
+                </a:lnTo>
+                <a:close/>
+                <a:lnTo>
+                  <a:pt x="939359" y="1230213"/>
+                </a:lnTo>
+                <a:close/>
+                <a:lnTo>
+                  <a:pt x="941725" y="1225438"/>
+                </a:lnTo>
+                <a:close/>
+                <a:lnTo>
+                  <a:pt x="944091" y="1220652"/>
+                </a:lnTo>
+                <a:close/>
+                <a:lnTo>
+                  <a:pt x="946457" y="1215856"/>
+                </a:lnTo>
+                <a:close/>
+                <a:lnTo>
+                  <a:pt x="948824" y="1211048"/>
+                </a:lnTo>
+                <a:close/>
+                <a:lnTo>
+                  <a:pt x="951190" y="1206229"/>
+                </a:lnTo>
+                <a:close/>
+                <a:lnTo>
+                  <a:pt x="953556" y="1201400"/>
+                </a:lnTo>
+                <a:close/>
+                <a:lnTo>
+                  <a:pt x="955922" y="1196559"/>
+                </a:lnTo>
+                <a:close/>
+                <a:lnTo>
+                  <a:pt x="958288" y="1191707"/>
+                </a:lnTo>
+                <a:close/>
+                <a:lnTo>
+                  <a:pt x="960654" y="1186844"/>
+                </a:lnTo>
+                <a:close/>
+                <a:lnTo>
+                  <a:pt x="963020" y="1181970"/>
+                </a:lnTo>
+                <a:close/>
+                <a:lnTo>
+                  <a:pt x="965387" y="1177084"/>
+                </a:lnTo>
+                <a:close/>
+                <a:lnTo>
+                  <a:pt x="967753" y="1172187"/>
+                </a:lnTo>
+                <a:close/>
+                <a:lnTo>
+                  <a:pt x="970119" y="1167278"/>
+                </a:lnTo>
+                <a:close/>
+                <a:lnTo>
+                  <a:pt x="972485" y="1162358"/>
+                </a:lnTo>
+                <a:close/>
+                <a:lnTo>
+                  <a:pt x="974851" y="1157426"/>
+                </a:lnTo>
+                <a:close/>
+                <a:lnTo>
+                  <a:pt x="977217" y="1152483"/>
+                </a:lnTo>
+                <a:close/>
+                <a:lnTo>
+                  <a:pt x="979583" y="1147528"/>
+                </a:lnTo>
+                <a:close/>
+                <a:lnTo>
+                  <a:pt x="981950" y="1142561"/>
+                </a:lnTo>
+                <a:close/>
+                <a:lnTo>
+                  <a:pt x="984316" y="1137582"/>
+                </a:lnTo>
+                <a:close/>
+                <a:lnTo>
+                  <a:pt x="986682" y="1132592"/>
+                </a:lnTo>
+                <a:close/>
+                <a:lnTo>
+                  <a:pt x="989048" y="1127589"/>
+                </a:lnTo>
+                <a:close/>
+                <a:lnTo>
+                  <a:pt x="991414" y="1122575"/>
+                </a:lnTo>
+                <a:close/>
+                <a:lnTo>
+                  <a:pt x="993780" y="1117549"/>
+                </a:lnTo>
+                <a:close/>
+                <a:lnTo>
+                  <a:pt x="996146" y="1112511"/>
+                </a:lnTo>
+                <a:close/>
+                <a:lnTo>
+                  <a:pt x="998513" y="1107461"/>
+                </a:lnTo>
+                <a:close/>
+                <a:lnTo>
+                  <a:pt x="1000879" y="1102400"/>
+                </a:lnTo>
+                <a:close/>
+                <a:lnTo>
+                  <a:pt x="1003245" y="1097326"/>
+                </a:lnTo>
+                <a:close/>
+                <a:lnTo>
+                  <a:pt x="1005611" y="1092241"/>
+                </a:lnTo>
+                <a:close/>
+                <a:lnTo>
+                  <a:pt x="1007977" y="1087144"/>
+                </a:lnTo>
+                <a:close/>
+                <a:lnTo>
+                  <a:pt x="1010343" y="1082035"/>
+                </a:lnTo>
+                <a:close/>
+                <a:lnTo>
+                  <a:pt x="1012709" y="1076915"/>
+                </a:lnTo>
+                <a:close/>
+                <a:lnTo>
+                  <a:pt x="1015076" y="1071782"/>
+                </a:lnTo>
+                <a:close/>
+                <a:lnTo>
+                  <a:pt x="1017442" y="1066638"/>
+                </a:lnTo>
+                <a:close/>
+                <a:lnTo>
+                  <a:pt x="1019808" y="1061483"/>
+                </a:lnTo>
+                <a:close/>
+                <a:lnTo>
+                  <a:pt x="1022174" y="1056316"/>
+                </a:lnTo>
+                <a:close/>
+                <a:lnTo>
+                  <a:pt x="1024540" y="1051137"/>
+                </a:lnTo>
+                <a:close/>
+                <a:lnTo>
+                  <a:pt x="1026906" y="1045947"/>
+                </a:lnTo>
+                <a:close/>
+                <a:lnTo>
+                  <a:pt x="1029272" y="1040745"/>
+                </a:lnTo>
+                <a:close/>
+                <a:lnTo>
+                  <a:pt x="1031639" y="1035532"/>
+                </a:lnTo>
+                <a:close/>
+                <a:lnTo>
+                  <a:pt x="1034005" y="1030308"/>
+                </a:lnTo>
+                <a:close/>
+                <a:lnTo>
+                  <a:pt x="1036371" y="1025071"/>
+                </a:lnTo>
+                <a:close/>
+                <a:lnTo>
+                  <a:pt x="1038737" y="1019823"/>
+                </a:lnTo>
+                <a:close/>
+                <a:lnTo>
+                  <a:pt x="1041103" y="1014562"/>
+                </a:lnTo>
+                <a:close/>
+                <a:lnTo>
+                  <a:pt x="1043469" y="1009289"/>
+                </a:lnTo>
+                <a:close/>
+                <a:lnTo>
+                  <a:pt x="1045835" y="1004004"/>
+                </a:lnTo>
+                <a:close/>
+                <a:lnTo>
+                  <a:pt x="1048202" y="998706"/>
+                </a:lnTo>
+                <a:close/>
+                <a:lnTo>
+                  <a:pt x="1050568" y="993395"/>
+                </a:lnTo>
+                <a:close/>
+                <a:lnTo>
+                  <a:pt x="1052934" y="988071"/>
+                </a:lnTo>
+                <a:close/>
+                <a:lnTo>
+                  <a:pt x="1055300" y="982735"/>
+                </a:lnTo>
+                <a:close/>
+                <a:lnTo>
+                  <a:pt x="1057666" y="977385"/>
+                </a:lnTo>
+                <a:close/>
+                <a:lnTo>
+                  <a:pt x="1060032" y="972022"/>
+                </a:lnTo>
+                <a:close/>
+                <a:lnTo>
+                  <a:pt x="1062398" y="966646"/>
+                </a:lnTo>
+                <a:close/>
+                <a:lnTo>
+                  <a:pt x="1064765" y="961258"/>
+                </a:lnTo>
+                <a:close/>
+                <a:lnTo>
+                  <a:pt x="1067131" y="955856"/>
+                </a:lnTo>
+                <a:close/>
+                <a:lnTo>
+                  <a:pt x="1069497" y="950442"/>
+                </a:lnTo>
+                <a:close/>
+                <a:lnTo>
+                  <a:pt x="1071863" y="945014"/>
+                </a:lnTo>
+                <a:close/>
+                <a:lnTo>
+                  <a:pt x="1074229" y="939574"/>
+                </a:lnTo>
+                <a:close/>
+                <a:lnTo>
+                  <a:pt x="1076595" y="934121"/>
+                </a:lnTo>
+                <a:close/>
+                <a:lnTo>
+                  <a:pt x="1078961" y="928656"/>
+                </a:lnTo>
+                <a:close/>
+                <a:lnTo>
+                  <a:pt x="1081328" y="923178"/>
+                </a:lnTo>
+                <a:close/>
+                <a:lnTo>
+                  <a:pt x="1083694" y="917687"/>
+                </a:lnTo>
+                <a:close/>
+                <a:lnTo>
+                  <a:pt x="1086060" y="912184"/>
+                </a:lnTo>
+                <a:close/>
+                <a:lnTo>
+                  <a:pt x="1088426" y="906668"/>
+                </a:lnTo>
+                <a:close/>
+                <a:lnTo>
+                  <a:pt x="1090792" y="901139"/>
+                </a:lnTo>
+                <a:close/>
+                <a:lnTo>
+                  <a:pt x="1093158" y="895598"/>
+                </a:lnTo>
+                <a:close/>
+                <a:lnTo>
+                  <a:pt x="1095524" y="890045"/>
+                </a:lnTo>
+                <a:close/>
+                <a:lnTo>
+                  <a:pt x="1097891" y="884479"/>
+                </a:lnTo>
+                <a:close/>
+                <a:lnTo>
+                  <a:pt x="1100257" y="878901"/>
+                </a:lnTo>
+                <a:close/>
+                <a:lnTo>
+                  <a:pt x="1102623" y="873311"/>
+                </a:lnTo>
+                <a:close/>
+                <a:lnTo>
+                  <a:pt x="1104989" y="867707"/>
+                </a:lnTo>
+                <a:close/>
+                <a:lnTo>
+                  <a:pt x="1107355" y="862091"/>
+                </a:lnTo>
+                <a:close/>
+                <a:lnTo>
+                  <a:pt x="1109721" y="856461"/>
+                </a:lnTo>
+                <a:close/>
+                <a:lnTo>
+                  <a:pt x="1112087" y="850818"/>
+                </a:lnTo>
+                <a:close/>
+                <a:lnTo>
+                  <a:pt x="1114454" y="845161"/>
+                </a:lnTo>
+                <a:close/>
+                <a:lnTo>
+                  <a:pt x="1116820" y="839491"/>
+                </a:lnTo>
+                <a:close/>
+                <a:lnTo>
+                  <a:pt x="1119186" y="833806"/>
+                </a:lnTo>
+                <a:close/>
+                <a:lnTo>
+                  <a:pt x="1121552" y="828107"/>
+                </a:lnTo>
+                <a:close/>
+                <a:lnTo>
+                  <a:pt x="1123918" y="822394"/>
+                </a:lnTo>
+                <a:close/>
+                <a:lnTo>
+                  <a:pt x="1126284" y="816667"/>
+                </a:lnTo>
+                <a:close/>
+                <a:lnTo>
+                  <a:pt x="1128650" y="810926"/>
+                </a:lnTo>
+                <a:close/>
+                <a:lnTo>
+                  <a:pt x="1131017" y="805171"/>
+                </a:lnTo>
+                <a:close/>
+                <a:lnTo>
+                  <a:pt x="1133383" y="799403"/>
+                </a:lnTo>
+                <a:close/>
+                <a:lnTo>
+                  <a:pt x="1135749" y="793622"/>
+                </a:lnTo>
+                <a:close/>
+                <a:lnTo>
+                  <a:pt x="1138115" y="787827"/>
+                </a:lnTo>
+                <a:close/>
+                <a:lnTo>
+                  <a:pt x="1140481" y="782019"/>
+                </a:lnTo>
+                <a:close/>
+                <a:lnTo>
+                  <a:pt x="1142847" y="776199"/>
+                </a:lnTo>
+                <a:close/>
+                <a:lnTo>
+                  <a:pt x="1145213" y="770366"/>
+                </a:lnTo>
+                <a:close/>
+                <a:lnTo>
+                  <a:pt x="1147580" y="764520"/>
+                </a:lnTo>
+                <a:close/>
+                <a:lnTo>
+                  <a:pt x="1149946" y="758661"/>
+                </a:lnTo>
+                <a:close/>
+                <a:lnTo>
+                  <a:pt x="1152312" y="752789"/>
+                </a:lnTo>
+                <a:close/>
+                <a:lnTo>
+                  <a:pt x="1154678" y="746904"/>
+                </a:lnTo>
+                <a:close/>
+                <a:lnTo>
+                  <a:pt x="1157044" y="741005"/>
+                </a:lnTo>
+                <a:close/>
+                <a:lnTo>
+                  <a:pt x="1159410" y="735092"/>
+                </a:lnTo>
+                <a:close/>
+                <a:lnTo>
+                  <a:pt x="1161776" y="729165"/>
+                </a:lnTo>
+                <a:close/>
+                <a:lnTo>
+                  <a:pt x="1164143" y="723223"/>
+                </a:lnTo>
+                <a:close/>
+                <a:lnTo>
+                  <a:pt x="1166509" y="717267"/>
+                </a:lnTo>
+                <a:close/>
+                <a:lnTo>
+                  <a:pt x="1168875" y="711297"/>
+                </a:lnTo>
+                <a:close/>
+                <a:lnTo>
+                  <a:pt x="1171241" y="705311"/>
+                </a:lnTo>
+                <a:close/>
+                <a:lnTo>
+                  <a:pt x="1173607" y="699312"/>
+                </a:lnTo>
+                <a:close/>
+                <a:lnTo>
+                  <a:pt x="1175973" y="693298"/>
+                </a:lnTo>
+                <a:close/>
+                <a:lnTo>
+                  <a:pt x="1178339" y="687269"/>
+                </a:lnTo>
+                <a:close/>
+                <a:lnTo>
+                  <a:pt x="1180706" y="681226"/>
+                </a:lnTo>
+                <a:close/>
+                <a:lnTo>
+                  <a:pt x="1183072" y="675170"/>
+                </a:lnTo>
+                <a:close/>
+                <a:lnTo>
+                  <a:pt x="1185438" y="669099"/>
+                </a:lnTo>
+                <a:close/>
+                <a:lnTo>
+                  <a:pt x="1187804" y="663014"/>
+                </a:lnTo>
+                <a:close/>
+                <a:lnTo>
+                  <a:pt x="1190170" y="656915"/>
+                </a:lnTo>
+                <a:close/>
+                <a:lnTo>
+                  <a:pt x="1192536" y="650802"/>
+                </a:lnTo>
+                <a:close/>
+                <a:lnTo>
+                  <a:pt x="1194903" y="644675"/>
+                </a:lnTo>
+                <a:close/>
+                <a:lnTo>
+                  <a:pt x="1197269" y="638534"/>
+                </a:lnTo>
+                <a:close/>
+                <a:lnTo>
+                  <a:pt x="1199635" y="632379"/>
+                </a:lnTo>
+                <a:close/>
+                <a:lnTo>
+                  <a:pt x="1202001" y="626209"/>
+                </a:lnTo>
+                <a:close/>
+                <a:lnTo>
+                  <a:pt x="1204367" y="620024"/>
+                </a:lnTo>
+                <a:close/>
+                <a:lnTo>
+                  <a:pt x="1206733" y="613825"/>
+                </a:lnTo>
+                <a:close/>
+                <a:lnTo>
+                  <a:pt x="1209099" y="607612"/>
+                </a:lnTo>
+                <a:close/>
+                <a:lnTo>
+                  <a:pt x="1211466" y="601383"/>
+                </a:lnTo>
+                <a:close/>
+                <a:lnTo>
+                  <a:pt x="1213832" y="595139"/>
+                </a:lnTo>
+                <a:close/>
+                <a:lnTo>
+                  <a:pt x="1216198" y="588881"/>
+                </a:lnTo>
+                <a:close/>
+                <a:lnTo>
+                  <a:pt x="1218564" y="582607"/>
+                </a:lnTo>
+                <a:close/>
+                <a:lnTo>
+                  <a:pt x="1220930" y="576319"/>
+                </a:lnTo>
+                <a:close/>
+                <a:lnTo>
+                  <a:pt x="1223296" y="570016"/>
+                </a:lnTo>
+                <a:close/>
+                <a:lnTo>
+                  <a:pt x="1225662" y="563699"/>
+                </a:lnTo>
+                <a:close/>
+                <a:lnTo>
+                  <a:pt x="1228029" y="557367"/>
+                </a:lnTo>
+                <a:close/>
+                <a:lnTo>
+                  <a:pt x="1230395" y="551020"/>
+                </a:lnTo>
+                <a:close/>
+                <a:lnTo>
+                  <a:pt x="1232761" y="544659"/>
+                </a:lnTo>
+                <a:close/>
+                <a:lnTo>
+                  <a:pt x="1235127" y="538284"/>
+                </a:lnTo>
+                <a:close/>
+                <a:lnTo>
+                  <a:pt x="1237493" y="531895"/>
+                </a:lnTo>
+                <a:close/>
+                <a:lnTo>
+                  <a:pt x="1239859" y="525491"/>
+                </a:lnTo>
+                <a:close/>
+                <a:lnTo>
+                  <a:pt x="1242225" y="519072"/>
+                </a:lnTo>
+                <a:close/>
+                <a:lnTo>
+                  <a:pt x="1244592" y="512639"/>
+                </a:lnTo>
+                <a:close/>
+                <a:lnTo>
+                  <a:pt x="1246958" y="506190"/>
+                </a:lnTo>
+                <a:close/>
+                <a:lnTo>
+                  <a:pt x="1249324" y="499726"/>
+                </a:lnTo>
+                <a:close/>
+                <a:lnTo>
+                  <a:pt x="1251690" y="493246"/>
+                </a:lnTo>
+                <a:close/>
+                <a:lnTo>
+                  <a:pt x="1254056" y="486751"/>
+                </a:lnTo>
+                <a:close/>
+                <a:lnTo>
+                  <a:pt x="1256422" y="480240"/>
+                </a:lnTo>
+                <a:close/>
+                <a:lnTo>
+                  <a:pt x="1258788" y="473712"/>
+                </a:lnTo>
+                <a:close/>
+                <a:lnTo>
+                  <a:pt x="1261155" y="467169"/>
+                </a:lnTo>
+                <a:close/>
+                <a:lnTo>
+                  <a:pt x="1263521" y="460609"/>
+                </a:lnTo>
+                <a:close/>
+                <a:lnTo>
+                  <a:pt x="1265887" y="454034"/>
+                </a:lnTo>
+                <a:close/>
+                <a:lnTo>
+                  <a:pt x="1268253" y="447443"/>
+                </a:lnTo>
+                <a:close/>
+                <a:lnTo>
+                  <a:pt x="1270619" y="440836"/>
+                </a:lnTo>
+                <a:close/>
+                <a:lnTo>
+                  <a:pt x="1272985" y="434214"/>
+                </a:lnTo>
+                <a:close/>
+                <a:lnTo>
+                  <a:pt x="1275351" y="427576"/>
+                </a:lnTo>
+                <a:close/>
+                <a:lnTo>
+                  <a:pt x="1277718" y="420924"/>
+                </a:lnTo>
+                <a:close/>
+                <a:lnTo>
+                  <a:pt x="1280084" y="414256"/>
+                </a:lnTo>
+                <a:close/>
+                <a:lnTo>
+                  <a:pt x="1282450" y="407574"/>
+                </a:lnTo>
+                <a:close/>
+                <a:lnTo>
+                  <a:pt x="1284816" y="400876"/>
+                </a:lnTo>
+                <a:close/>
+                <a:lnTo>
+                  <a:pt x="1287182" y="394164"/>
+                </a:lnTo>
+                <a:close/>
+                <a:lnTo>
+                  <a:pt x="1289548" y="387437"/>
+                </a:lnTo>
+                <a:close/>
+                <a:lnTo>
+                  <a:pt x="1291914" y="380694"/>
+                </a:lnTo>
+                <a:close/>
+                <a:lnTo>
+                  <a:pt x="1294281" y="373936"/>
+                </a:lnTo>
+                <a:close/>
+                <a:lnTo>
+                  <a:pt x="1296647" y="367164"/>
+                </a:lnTo>
+                <a:close/>
+                <a:lnTo>
+                  <a:pt x="1299013" y="360375"/>
+                </a:lnTo>
+                <a:close/>
+                <a:lnTo>
+                  <a:pt x="1301379" y="353572"/>
+                </a:lnTo>
+                <a:close/>
+                <a:lnTo>
+                  <a:pt x="1303745" y="346753"/>
+                </a:lnTo>
+                <a:close/>
+                <a:lnTo>
+                  <a:pt x="1306111" y="339918"/>
+                </a:lnTo>
+                <a:close/>
+                <a:lnTo>
+                  <a:pt x="1308477" y="333068"/>
+                </a:lnTo>
+                <a:close/>
+                <a:lnTo>
+                  <a:pt x="1310844" y="326201"/>
+                </a:lnTo>
+                <a:close/>
+                <a:lnTo>
+                  <a:pt x="1313210" y="319319"/>
+                </a:lnTo>
+                <a:close/>
+                <a:lnTo>
+                  <a:pt x="1315576" y="312421"/>
+                </a:lnTo>
+                <a:close/>
+                <a:lnTo>
+                  <a:pt x="1317942" y="305506"/>
+                </a:lnTo>
+                <a:close/>
+                <a:lnTo>
+                  <a:pt x="1320308" y="298574"/>
+                </a:lnTo>
+                <a:close/>
+                <a:lnTo>
+                  <a:pt x="1322674" y="291625"/>
+                </a:lnTo>
+                <a:close/>
+                <a:lnTo>
+                  <a:pt x="1325040" y="284660"/>
+                </a:lnTo>
+                <a:close/>
+                <a:lnTo>
+                  <a:pt x="1327407" y="277677"/>
+                </a:lnTo>
+                <a:close/>
+                <a:lnTo>
+                  <a:pt x="1329773" y="270678"/>
+                </a:lnTo>
+                <a:close/>
+                <a:lnTo>
+                  <a:pt x="1332139" y="263661"/>
+                </a:lnTo>
+                <a:close/>
+                <a:lnTo>
+                  <a:pt x="1334505" y="256628"/>
+                </a:lnTo>
+                <a:close/>
+                <a:lnTo>
+                  <a:pt x="1336871" y="249578"/>
+                </a:lnTo>
+                <a:close/>
+                <a:lnTo>
+                  <a:pt x="1339237" y="242511"/>
+                </a:lnTo>
+                <a:close/>
+                <a:lnTo>
+                  <a:pt x="1341603" y="235429"/>
+                </a:lnTo>
+                <a:close/>
+                <a:lnTo>
+                  <a:pt x="1343970" y="228330"/>
+                </a:lnTo>
+                <a:close/>
+                <a:lnTo>
+                  <a:pt x="1346336" y="221216"/>
+                </a:lnTo>
+                <a:close/>
+                <a:lnTo>
+                  <a:pt x="1348702" y="214085"/>
+                </a:lnTo>
+                <a:close/>
+                <a:lnTo>
+                  <a:pt x="1351068" y="206939"/>
+                </a:lnTo>
+                <a:close/>
+                <a:lnTo>
+                  <a:pt x="1353434" y="199778"/>
+                </a:lnTo>
+                <a:close/>
+                <a:lnTo>
+                  <a:pt x="1355800" y="192600"/>
+                </a:lnTo>
+                <a:close/>
+                <a:lnTo>
+                  <a:pt x="1358166" y="185406"/>
+                </a:lnTo>
+                <a:close/>
+                <a:lnTo>
+                  <a:pt x="1360533" y="178196"/>
+                </a:lnTo>
+                <a:close/>
+                <a:lnTo>
+                  <a:pt x="1362899" y="170969"/>
+                </a:lnTo>
+                <a:close/>
+                <a:lnTo>
+                  <a:pt x="1365265" y="163725"/>
+                </a:lnTo>
+                <a:close/>
+                <a:lnTo>
+                  <a:pt x="1367631" y="156465"/>
+                </a:lnTo>
+                <a:close/>
+                <a:lnTo>
+                  <a:pt x="1369997" y="149187"/>
+                </a:lnTo>
+                <a:close/>
+                <a:lnTo>
+                  <a:pt x="1372363" y="141892"/>
+                </a:lnTo>
+                <a:close/>
+                <a:lnTo>
+                  <a:pt x="1374729" y="134579"/>
+                </a:lnTo>
+                <a:close/>
+                <a:lnTo>
+                  <a:pt x="1377096" y="127249"/>
+                </a:lnTo>
+                <a:close/>
+                <a:lnTo>
+                  <a:pt x="1379462" y="119901"/>
+                </a:lnTo>
+                <a:close/>
+                <a:lnTo>
+                  <a:pt x="1381828" y="112536"/>
+                </a:lnTo>
+                <a:close/>
+                <a:lnTo>
+                  <a:pt x="1384194" y="105154"/>
+                </a:lnTo>
+                <a:close/>
+                <a:lnTo>
+                  <a:pt x="1386560" y="97754"/>
+                </a:lnTo>
+                <a:close/>
+                <a:lnTo>
+                  <a:pt x="1388926" y="90337"/>
+                </a:lnTo>
+                <a:close/>
+                <a:lnTo>
+                  <a:pt x="1391292" y="82903"/>
+                </a:lnTo>
+                <a:close/>
+                <a:lnTo>
+                  <a:pt x="1393659" y="75452"/>
+                </a:lnTo>
+                <a:close/>
+                <a:lnTo>
+                  <a:pt x="1396025" y="67983"/>
+                </a:lnTo>
+                <a:close/>
+                <a:lnTo>
+                  <a:pt x="1398391" y="60497"/>
+                </a:lnTo>
+                <a:close/>
+                <a:lnTo>
+                  <a:pt x="1400757" y="52995"/>
+                </a:lnTo>
+                <a:close/>
+                <a:lnTo>
+                  <a:pt x="1403123" y="45475"/>
+                </a:lnTo>
+                <a:close/>
+                <a:lnTo>
+                  <a:pt x="1405489" y="37938"/>
+                </a:lnTo>
+                <a:close/>
+                <a:lnTo>
+                  <a:pt x="1407855" y="30384"/>
+                </a:lnTo>
+                <a:close/>
+                <a:lnTo>
+                  <a:pt x="1410222" y="22813"/>
+                </a:lnTo>
+                <a:close/>
+                <a:lnTo>
+                  <a:pt x="1412588" y="15226"/>
+                </a:lnTo>
+                <a:close/>
+                <a:lnTo>
+                  <a:pt x="1414954" y="7622"/>
+                </a:lnTo>
+                <a:close/>
+                <a:lnTo>
+                  <a:pt x="1417320" y="0"/>
                 </a:lnTo>
                 <a:close/>
               </a:path>
@@ -4423,8 +5623,8 @@
         </p:nvCxnSpPr>
         <p:spPr>
           <a:xfrm flipV="1">
-            <a:off x="5577840.0" y="1229410.8"/>
-            <a:ext cx="0.0" cy="1342339.2"/>
+            <a:off x="5943600.0" y="162123.11999999965"/>
+            <a:ext cx="0.0" cy="2409626.8800000004"/>
           </a:xfrm>
           <a:prstGeom prst="line">
             <a:avLst/>
@@ -4459,8 +5659,8 @@
         </p:nvCxnSpPr>
         <p:spPr>
           <a:xfrm>
-            <a:off x="4572000.0" y="1229410.8"/>
-            <a:ext cx="1005840.0" cy="0.0"/>
+            <a:off x="4572000.0" y="162123.11999999965"/>
+            <a:ext cx="1371600.0" cy="0.0"/>
           </a:xfrm>
           <a:prstGeom prst="line">
             <a:avLst/>
@@ -4495,8 +5695,8 @@
         </p:nvSpPr>
         <p:spPr>
           <a:xfrm>
-            <a:off x="5501640" y="1153210"/>
-            <a:ext cx="152400" cy="152400"/>
+            <a:off x="5854700" y="73223"/>
+            <a:ext cx="177800" cy="177800"/>
           </a:xfrm>
           <a:prstGeom prst="ellipse">
             <a:avLst/>
@@ -4504,455 +5704,6 @@
           <a:solidFill>
             <a:srgbClr val="FFFFFF"/>
           </a:solidFill>
-          <a:ln w="12700">
-            <a:solidFill>
-              <a:srgbClr val="FFFFFF"/>
-            </a:solidFill>
-          </a:ln>
-        </p:spPr>
-        <p:style>
-          <a:lnRef idx="1">
-            <a:schemeClr val="accent1"/>
-          </a:lnRef>
-          <a:fillRef idx="3">
-            <a:schemeClr val="accent1"/>
-          </a:fillRef>
-          <a:effectRef idx="2">
-            <a:schemeClr val="accent1"/>
-          </a:effectRef>
-          <a:fontRef idx="minor">
-            <a:schemeClr val="lt1"/>
-          </a:fontRef>
-        </p:style>
-        <p:txBody>
-          <a:bodyPr rtlCol="0" anchor="ctr"/>
-          <a:lstStyle/>
-          <a:p>
-            <a:pPr algn="ctr"/>
-          </a:p>
-        </p:txBody>
-      </p:sp>
-      <p:sp>
-        <p:nvSpPr>
-          <p:cNvPr id="8" name="Freeform 7"/>
-          <p:cNvSpPr/>
-          <p:nvPr/>
-        </p:nvSpPr>
-        <p:spPr>
-          <a:xfrm>
-            <a:off x="5349240" y="1308049"/>
-            <a:ext cx="182880" cy="277978"/>
-          </a:xfrm>
-          <a:custGeom>
-            <a:avLst/>
-            <a:gdLst/>
-            <a:ahLst/>
-            <a:cxnLst/>
-            <a:rect l="l" t="t" r="r" b="b"/>
-            <a:pathLst>
-              <a:path w="182880" h="277978">
-                <a:moveTo>
-                  <a:pt x="0" y="277978"/>
-                </a:moveTo>
-                <a:lnTo>
-                  <a:pt x="1847" y="275463"/>
-                </a:lnTo>
-                <a:close/>
-                <a:lnTo>
-                  <a:pt x="3695" y="272941"/>
-                </a:lnTo>
-                <a:close/>
-                <a:lnTo>
-                  <a:pt x="5542" y="270414"/>
-                </a:lnTo>
-                <a:close/>
-                <a:lnTo>
-                  <a:pt x="7389" y="267881"/>
-                </a:lnTo>
-                <a:close/>
-                <a:lnTo>
-                  <a:pt x="9236" y="265342"/>
-                </a:lnTo>
-                <a:close/>
-                <a:lnTo>
-                  <a:pt x="11084" y="262797"/>
-                </a:lnTo>
-                <a:close/>
-                <a:lnTo>
-                  <a:pt x="12931" y="260245"/>
-                </a:lnTo>
-                <a:close/>
-                <a:lnTo>
-                  <a:pt x="14778" y="257688"/>
-                </a:lnTo>
-                <a:close/>
-                <a:lnTo>
-                  <a:pt x="16625" y="255125"/>
-                </a:lnTo>
-                <a:close/>
-                <a:lnTo>
-                  <a:pt x="18473" y="252556"/>
-                </a:lnTo>
-                <a:close/>
-                <a:lnTo>
-                  <a:pt x="20320" y="249981"/>
-                </a:lnTo>
-                <a:close/>
-                <a:lnTo>
-                  <a:pt x="22167" y="247400"/>
-                </a:lnTo>
-                <a:close/>
-                <a:lnTo>
-                  <a:pt x="24015" y="244813"/>
-                </a:lnTo>
-                <a:close/>
-                <a:lnTo>
-                  <a:pt x="25862" y="242221"/>
-                </a:lnTo>
-                <a:close/>
-                <a:lnTo>
-                  <a:pt x="27709" y="239622"/>
-                </a:lnTo>
-                <a:close/>
-                <a:lnTo>
-                  <a:pt x="29556" y="237017"/>
-                </a:lnTo>
-                <a:close/>
-                <a:lnTo>
-                  <a:pt x="31404" y="234406"/>
-                </a:lnTo>
-                <a:close/>
-                <a:lnTo>
-                  <a:pt x="33251" y="231789"/>
-                </a:lnTo>
-                <a:close/>
-                <a:lnTo>
-                  <a:pt x="35098" y="229167"/>
-                </a:lnTo>
-                <a:close/>
-                <a:lnTo>
-                  <a:pt x="36945" y="226538"/>
-                </a:lnTo>
-                <a:close/>
-                <a:lnTo>
-                  <a:pt x="38793" y="223903"/>
-                </a:lnTo>
-                <a:close/>
-                <a:lnTo>
-                  <a:pt x="40640" y="221262"/>
-                </a:lnTo>
-                <a:close/>
-                <a:lnTo>
-                  <a:pt x="42487" y="218616"/>
-                </a:lnTo>
-                <a:close/>
-                <a:lnTo>
-                  <a:pt x="44335" y="215963"/>
-                </a:lnTo>
-                <a:close/>
-                <a:lnTo>
-                  <a:pt x="46182" y="213305"/>
-                </a:lnTo>
-                <a:close/>
-                <a:lnTo>
-                  <a:pt x="48029" y="210640"/>
-                </a:lnTo>
-                <a:close/>
-                <a:lnTo>
-                  <a:pt x="49876" y="207970"/>
-                </a:lnTo>
-                <a:close/>
-                <a:lnTo>
-                  <a:pt x="51724" y="205293"/>
-                </a:lnTo>
-                <a:close/>
-                <a:lnTo>
-                  <a:pt x="53571" y="202611"/>
-                </a:lnTo>
-                <a:close/>
-                <a:lnTo>
-                  <a:pt x="55418" y="199922"/>
-                </a:lnTo>
-                <a:close/>
-                <a:lnTo>
-                  <a:pt x="57265" y="197228"/>
-                </a:lnTo>
-                <a:close/>
-                <a:lnTo>
-                  <a:pt x="59113" y="194527"/>
-                </a:lnTo>
-                <a:close/>
-                <a:lnTo>
-                  <a:pt x="60960" y="191821"/>
-                </a:lnTo>
-                <a:close/>
-                <a:lnTo>
-                  <a:pt x="62807" y="189109"/>
-                </a:lnTo>
-                <a:close/>
-                <a:lnTo>
-                  <a:pt x="64655" y="186390"/>
-                </a:lnTo>
-                <a:close/>
-                <a:lnTo>
-                  <a:pt x="66502" y="183666"/>
-                </a:lnTo>
-                <a:close/>
-                <a:lnTo>
-                  <a:pt x="68349" y="180936"/>
-                </a:lnTo>
-                <a:close/>
-                <a:lnTo>
-                  <a:pt x="70196" y="178200"/>
-                </a:lnTo>
-                <a:close/>
-                <a:lnTo>
-                  <a:pt x="72044" y="175458"/>
-                </a:lnTo>
-                <a:close/>
-                <a:lnTo>
-                  <a:pt x="73891" y="172709"/>
-                </a:lnTo>
-                <a:close/>
-                <a:lnTo>
-                  <a:pt x="75738" y="169955"/>
-                </a:lnTo>
-                <a:close/>
-                <a:lnTo>
-                  <a:pt x="77585" y="167195"/>
-                </a:lnTo>
-                <a:close/>
-                <a:lnTo>
-                  <a:pt x="79433" y="164429"/>
-                </a:lnTo>
-                <a:close/>
-                <a:lnTo>
-                  <a:pt x="81280" y="161657"/>
-                </a:lnTo>
-                <a:close/>
-                <a:lnTo>
-                  <a:pt x="83127" y="158879"/>
-                </a:lnTo>
-                <a:close/>
-                <a:lnTo>
-                  <a:pt x="84975" y="156095"/>
-                </a:lnTo>
-                <a:close/>
-                <a:lnTo>
-                  <a:pt x="86822" y="153305"/>
-                </a:lnTo>
-                <a:close/>
-                <a:lnTo>
-                  <a:pt x="88669" y="150509"/>
-                </a:lnTo>
-                <a:close/>
-                <a:lnTo>
-                  <a:pt x="90516" y="147707"/>
-                </a:lnTo>
-                <a:close/>
-                <a:lnTo>
-                  <a:pt x="92364" y="144900"/>
-                </a:lnTo>
-                <a:close/>
-                <a:lnTo>
-                  <a:pt x="94211" y="142086"/>
-                </a:lnTo>
-                <a:close/>
-                <a:lnTo>
-                  <a:pt x="96058" y="139266"/>
-                </a:lnTo>
-                <a:close/>
-                <a:lnTo>
-                  <a:pt x="97905" y="136440"/>
-                </a:lnTo>
-                <a:close/>
-                <a:lnTo>
-                  <a:pt x="99753" y="133608"/>
-                </a:lnTo>
-                <a:close/>
-                <a:lnTo>
-                  <a:pt x="101600" y="130771"/>
-                </a:lnTo>
-                <a:close/>
-                <a:lnTo>
-                  <a:pt x="103447" y="127927"/>
-                </a:lnTo>
-                <a:close/>
-                <a:lnTo>
-                  <a:pt x="105295" y="125077"/>
-                </a:lnTo>
-                <a:close/>
-                <a:lnTo>
-                  <a:pt x="107142" y="122222"/>
-                </a:lnTo>
-                <a:close/>
-                <a:lnTo>
-                  <a:pt x="108989" y="119360"/>
-                </a:lnTo>
-                <a:close/>
-                <a:lnTo>
-                  <a:pt x="110836" y="116493"/>
-                </a:lnTo>
-                <a:close/>
-                <a:lnTo>
-                  <a:pt x="112684" y="113619"/>
-                </a:lnTo>
-                <a:close/>
-                <a:lnTo>
-                  <a:pt x="114531" y="110740"/>
-                </a:lnTo>
-                <a:close/>
-                <a:lnTo>
-                  <a:pt x="116378" y="107854"/>
-                </a:lnTo>
-                <a:close/>
-                <a:lnTo>
-                  <a:pt x="118225" y="104963"/>
-                </a:lnTo>
-                <a:close/>
-                <a:lnTo>
-                  <a:pt x="120073" y="102065"/>
-                </a:lnTo>
-                <a:close/>
-                <a:lnTo>
-                  <a:pt x="121920" y="99162"/>
-                </a:lnTo>
-                <a:close/>
-                <a:lnTo>
-                  <a:pt x="123767" y="96252"/>
-                </a:lnTo>
-                <a:close/>
-                <a:lnTo>
-                  <a:pt x="125615" y="93337"/>
-                </a:lnTo>
-                <a:close/>
-                <a:lnTo>
-                  <a:pt x="127462" y="90416"/>
-                </a:lnTo>
-                <a:close/>
-                <a:lnTo>
-                  <a:pt x="129309" y="87489"/>
-                </a:lnTo>
-                <a:close/>
-                <a:lnTo>
-                  <a:pt x="131156" y="84555"/>
-                </a:lnTo>
-                <a:close/>
-                <a:lnTo>
-                  <a:pt x="133004" y="81616"/>
-                </a:lnTo>
-                <a:close/>
-                <a:lnTo>
-                  <a:pt x="134851" y="78671"/>
-                </a:lnTo>
-                <a:close/>
-                <a:lnTo>
-                  <a:pt x="136698" y="75720"/>
-                </a:lnTo>
-                <a:close/>
-                <a:lnTo>
-                  <a:pt x="138545" y="72763"/>
-                </a:lnTo>
-                <a:close/>
-                <a:lnTo>
-                  <a:pt x="140393" y="69799"/>
-                </a:lnTo>
-                <a:close/>
-                <a:lnTo>
-                  <a:pt x="142240" y="66830"/>
-                </a:lnTo>
-                <a:close/>
-                <a:lnTo>
-                  <a:pt x="144087" y="63855"/>
-                </a:lnTo>
-                <a:close/>
-                <a:lnTo>
-                  <a:pt x="145935" y="60874"/>
-                </a:lnTo>
-                <a:close/>
-                <a:lnTo>
-                  <a:pt x="147782" y="57887"/>
-                </a:lnTo>
-                <a:close/>
-                <a:lnTo>
-                  <a:pt x="149629" y="54894"/>
-                </a:lnTo>
-                <a:close/>
-                <a:lnTo>
-                  <a:pt x="151476" y="51896"/>
-                </a:lnTo>
-                <a:close/>
-                <a:lnTo>
-                  <a:pt x="153324" y="48891"/>
-                </a:lnTo>
-                <a:close/>
-                <a:lnTo>
-                  <a:pt x="155171" y="45880"/>
-                </a:lnTo>
-                <a:close/>
-                <a:lnTo>
-                  <a:pt x="157018" y="42863"/>
-                </a:lnTo>
-                <a:close/>
-                <a:lnTo>
-                  <a:pt x="158865" y="39840"/>
-                </a:lnTo>
-                <a:close/>
-                <a:lnTo>
-                  <a:pt x="160713" y="36811"/>
-                </a:lnTo>
-                <a:close/>
-                <a:lnTo>
-                  <a:pt x="162560" y="33777"/>
-                </a:lnTo>
-                <a:close/>
-                <a:lnTo>
-                  <a:pt x="164407" y="30736"/>
-                </a:lnTo>
-                <a:close/>
-                <a:lnTo>
-                  <a:pt x="166255" y="27689"/>
-                </a:lnTo>
-                <a:close/>
-                <a:lnTo>
-                  <a:pt x="168102" y="24636"/>
-                </a:lnTo>
-                <a:close/>
-                <a:lnTo>
-                  <a:pt x="169949" y="21578"/>
-                </a:lnTo>
-                <a:close/>
-                <a:lnTo>
-                  <a:pt x="171796" y="18513"/>
-                </a:lnTo>
-                <a:close/>
-                <a:lnTo>
-                  <a:pt x="173644" y="15443"/>
-                </a:lnTo>
-                <a:close/>
-                <a:lnTo>
-                  <a:pt x="175491" y="12366"/>
-                </a:lnTo>
-                <a:close/>
-                <a:lnTo>
-                  <a:pt x="177338" y="9284"/>
-                </a:lnTo>
-                <a:close/>
-                <a:lnTo>
-                  <a:pt x="179185" y="6195"/>
-                </a:lnTo>
-                <a:close/>
-                <a:lnTo>
-                  <a:pt x="181033" y="3101"/>
-                </a:lnTo>
-                <a:close/>
-                <a:lnTo>
-                  <a:pt x="182880" y="0"/>
-                </a:lnTo>
-                <a:close/>
-              </a:path>
-            </a:pathLst>
-          </a:custGeom>
           <a:ln w="19050">
             <a:solidFill>
               <a:srgbClr val="FFFFFF"/>
@@ -4981,455 +5732,76 @@
           </a:p>
         </p:txBody>
       </p:sp>
-      <p:sp>
-        <p:nvSpPr>
-          <p:cNvPr id="9" name="Freeform 8"/>
-          <p:cNvSpPr/>
+      <p:cxnSp>
+        <p:nvCxnSpPr>
+          <p:cNvPr id="8" name="Connector 7"/>
+          <p:cNvCxnSpPr/>
           <p:nvPr/>
-        </p:nvSpPr>
+        </p:nvCxnSpPr>
         <p:spPr>
           <a:xfrm>
-            <a:off x="5623560" y="680771"/>
-            <a:ext cx="228600" cy="466344"/>
+            <a:off x="5257800.0" y="2571750.0"/>
+            <a:ext cx="594360.0" cy="0.0"/>
           </a:xfrm>
-          <a:custGeom>
+          <a:prstGeom prst="line">
             <a:avLst/>
-            <a:gdLst/>
-            <a:ahLst/>
-            <a:cxnLst/>
-            <a:rect l="l" t="t" r="r" b="b"/>
-            <a:pathLst>
-              <a:path w="228600" h="466344">
-                <a:moveTo>
-                  <a:pt x="228600" y="0"/>
-                </a:moveTo>
-                <a:lnTo>
-                  <a:pt x="226291" y="5167"/>
-                </a:lnTo>
-                <a:close/>
-                <a:lnTo>
-                  <a:pt x="223982" y="10326"/>
-                </a:lnTo>
-                <a:close/>
-                <a:lnTo>
-                  <a:pt x="221673" y="15475"/>
-                </a:lnTo>
-                <a:close/>
-                <a:lnTo>
-                  <a:pt x="219364" y="20615"/>
-                </a:lnTo>
-                <a:close/>
-                <a:lnTo>
-                  <a:pt x="217055" y="25745"/>
-                </a:lnTo>
-                <a:close/>
-                <a:lnTo>
-                  <a:pt x="214745" y="30866"/>
-                </a:lnTo>
-                <a:close/>
-                <a:lnTo>
-                  <a:pt x="212436" y="35978"/>
-                </a:lnTo>
-                <a:close/>
-                <a:lnTo>
-                  <a:pt x="210127" y="41080"/>
-                </a:lnTo>
-                <a:close/>
-                <a:lnTo>
-                  <a:pt x="207818" y="46173"/>
-                </a:lnTo>
-                <a:close/>
-                <a:lnTo>
-                  <a:pt x="205509" y="51257"/>
-                </a:lnTo>
-                <a:close/>
-                <a:lnTo>
-                  <a:pt x="203200" y="56331"/>
-                </a:lnTo>
-                <a:close/>
-                <a:lnTo>
-                  <a:pt x="200891" y="61396"/>
-                </a:lnTo>
-                <a:close/>
-                <a:lnTo>
-                  <a:pt x="198582" y="66452"/>
-                </a:lnTo>
-                <a:close/>
-                <a:lnTo>
-                  <a:pt x="196273" y="71499"/>
-                </a:lnTo>
-                <a:close/>
-                <a:lnTo>
-                  <a:pt x="193964" y="76536"/>
-                </a:lnTo>
-                <a:close/>
-                <a:lnTo>
-                  <a:pt x="191655" y="81563"/>
-                </a:lnTo>
-                <a:close/>
-                <a:lnTo>
-                  <a:pt x="189345" y="86582"/>
-                </a:lnTo>
-                <a:close/>
-                <a:lnTo>
-                  <a:pt x="187036" y="91591"/>
-                </a:lnTo>
-                <a:close/>
-                <a:lnTo>
-                  <a:pt x="184727" y="96591"/>
-                </a:lnTo>
-                <a:close/>
-                <a:lnTo>
-                  <a:pt x="182418" y="101581"/>
-                </a:lnTo>
-                <a:close/>
-                <a:lnTo>
-                  <a:pt x="180109" y="106562"/>
-                </a:lnTo>
-                <a:close/>
-                <a:lnTo>
-                  <a:pt x="177800" y="111534"/>
-                </a:lnTo>
-                <a:close/>
-                <a:lnTo>
-                  <a:pt x="175491" y="116496"/>
-                </a:lnTo>
-                <a:close/>
-                <a:lnTo>
-                  <a:pt x="173182" y="121450"/>
-                </a:lnTo>
-                <a:close/>
-                <a:lnTo>
-                  <a:pt x="170873" y="126393"/>
-                </a:lnTo>
-                <a:close/>
-                <a:lnTo>
-                  <a:pt x="168564" y="131328"/>
-                </a:lnTo>
-                <a:close/>
-                <a:lnTo>
-                  <a:pt x="166255" y="136253"/>
-                </a:lnTo>
-                <a:close/>
-                <a:lnTo>
-                  <a:pt x="163945" y="141169"/>
-                </a:lnTo>
-                <a:close/>
-                <a:lnTo>
-                  <a:pt x="161636" y="146075"/>
-                </a:lnTo>
-                <a:close/>
-                <a:lnTo>
-                  <a:pt x="159327" y="150972"/>
-                </a:lnTo>
-                <a:close/>
-                <a:lnTo>
-                  <a:pt x="157018" y="155860"/>
-                </a:lnTo>
-                <a:close/>
-                <a:lnTo>
-                  <a:pt x="154709" y="160739"/>
-                </a:lnTo>
-                <a:close/>
-                <a:lnTo>
-                  <a:pt x="152400" y="165608"/>
-                </a:lnTo>
-                <a:close/>
-                <a:lnTo>
-                  <a:pt x="150091" y="170468"/>
-                </a:lnTo>
-                <a:close/>
-                <a:lnTo>
-                  <a:pt x="147782" y="175318"/>
-                </a:lnTo>
-                <a:close/>
-                <a:lnTo>
-                  <a:pt x="145473" y="180159"/>
-                </a:lnTo>
-                <a:close/>
-                <a:lnTo>
-                  <a:pt x="143164" y="184991"/>
-                </a:lnTo>
-                <a:close/>
-                <a:lnTo>
-                  <a:pt x="140855" y="189814"/>
-                </a:lnTo>
-                <a:close/>
-                <a:lnTo>
-                  <a:pt x="138545" y="194627"/>
-                </a:lnTo>
-                <a:close/>
-                <a:lnTo>
-                  <a:pt x="136236" y="199431"/>
-                </a:lnTo>
-                <a:close/>
-                <a:lnTo>
-                  <a:pt x="133927" y="204225"/>
-                </a:lnTo>
-                <a:close/>
-                <a:lnTo>
-                  <a:pt x="131618" y="209010"/>
-                </a:lnTo>
-                <a:close/>
-                <a:lnTo>
-                  <a:pt x="129309" y="213786"/>
-                </a:lnTo>
-                <a:close/>
-                <a:lnTo>
-                  <a:pt x="127000" y="218553"/>
-                </a:lnTo>
-                <a:close/>
-                <a:lnTo>
-                  <a:pt x="124691" y="223310"/>
-                </a:lnTo>
-                <a:close/>
-                <a:lnTo>
-                  <a:pt x="122382" y="228058"/>
-                </a:lnTo>
-                <a:close/>
-                <a:lnTo>
-                  <a:pt x="120073" y="232796"/>
-                </a:lnTo>
-                <a:close/>
-                <a:lnTo>
-                  <a:pt x="117764" y="237525"/>
-                </a:lnTo>
-                <a:close/>
-                <a:lnTo>
-                  <a:pt x="115455" y="242245"/>
-                </a:lnTo>
-                <a:close/>
-                <a:lnTo>
-                  <a:pt x="113145" y="246956"/>
-                </a:lnTo>
-                <a:close/>
-                <a:lnTo>
-                  <a:pt x="110836" y="251657"/>
-                </a:lnTo>
-                <a:close/>
-                <a:lnTo>
-                  <a:pt x="108527" y="256349"/>
-                </a:lnTo>
-                <a:close/>
-                <a:lnTo>
-                  <a:pt x="106218" y="261032"/>
-                </a:lnTo>
-                <a:close/>
-                <a:lnTo>
-                  <a:pt x="103909" y="265705"/>
-                </a:lnTo>
-                <a:close/>
-                <a:lnTo>
-                  <a:pt x="101600" y="270369"/>
-                </a:lnTo>
-                <a:close/>
-                <a:lnTo>
-                  <a:pt x="99291" y="275023"/>
-                </a:lnTo>
-                <a:close/>
-                <a:lnTo>
-                  <a:pt x="96982" y="279668"/>
-                </a:lnTo>
-                <a:close/>
-                <a:lnTo>
-                  <a:pt x="94673" y="284304"/>
-                </a:lnTo>
-                <a:close/>
-                <a:lnTo>
-                  <a:pt x="92364" y="288931"/>
-                </a:lnTo>
-                <a:close/>
-                <a:lnTo>
-                  <a:pt x="90055" y="293548"/>
-                </a:lnTo>
-                <a:close/>
-                <a:lnTo>
-                  <a:pt x="87745" y="298156"/>
-                </a:lnTo>
-                <a:close/>
-                <a:lnTo>
-                  <a:pt x="85436" y="302755"/>
-                </a:lnTo>
-                <a:close/>
-                <a:lnTo>
-                  <a:pt x="83127" y="307344"/>
-                </a:lnTo>
-                <a:close/>
-                <a:lnTo>
-                  <a:pt x="80818" y="311924"/>
-                </a:lnTo>
-                <a:close/>
-                <a:lnTo>
-                  <a:pt x="78509" y="316495"/>
-                </a:lnTo>
-                <a:close/>
-                <a:lnTo>
-                  <a:pt x="76200" y="321056"/>
-                </a:lnTo>
-                <a:close/>
-                <a:lnTo>
-                  <a:pt x="73891" y="325608"/>
-                </a:lnTo>
-                <a:close/>
-                <a:lnTo>
-                  <a:pt x="71582" y="330150"/>
-                </a:lnTo>
-                <a:close/>
-                <a:lnTo>
-                  <a:pt x="69273" y="334684"/>
-                </a:lnTo>
-                <a:close/>
-                <a:lnTo>
-                  <a:pt x="66964" y="339208"/>
-                </a:lnTo>
-                <a:close/>
-                <a:lnTo>
-                  <a:pt x="64655" y="343722"/>
-                </a:lnTo>
-                <a:close/>
-                <a:lnTo>
-                  <a:pt x="62345" y="348228"/>
-                </a:lnTo>
-                <a:close/>
-                <a:lnTo>
-                  <a:pt x="60036" y="352723"/>
-                </a:lnTo>
-                <a:close/>
-                <a:lnTo>
-                  <a:pt x="57727" y="357210"/>
-                </a:lnTo>
-                <a:close/>
-                <a:lnTo>
-                  <a:pt x="55418" y="361687"/>
-                </a:lnTo>
-                <a:close/>
-                <a:lnTo>
-                  <a:pt x="53109" y="366155"/>
-                </a:lnTo>
-                <a:close/>
-                <a:lnTo>
-                  <a:pt x="50800" y="370614"/>
-                </a:lnTo>
-                <a:close/>
-                <a:lnTo>
-                  <a:pt x="48491" y="375063"/>
-                </a:lnTo>
-                <a:close/>
-                <a:lnTo>
-                  <a:pt x="46182" y="379503"/>
-                </a:lnTo>
-                <a:close/>
-                <a:lnTo>
-                  <a:pt x="43873" y="383934"/>
-                </a:lnTo>
-                <a:close/>
-                <a:lnTo>
-                  <a:pt x="41564" y="388355"/>
-                </a:lnTo>
-                <a:close/>
-                <a:lnTo>
-                  <a:pt x="39255" y="392767"/>
-                </a:lnTo>
-                <a:close/>
-                <a:lnTo>
-                  <a:pt x="36945" y="397170"/>
-                </a:lnTo>
-                <a:close/>
-                <a:lnTo>
-                  <a:pt x="34636" y="401563"/>
-                </a:lnTo>
-                <a:close/>
-                <a:lnTo>
-                  <a:pt x="32327" y="405947"/>
-                </a:lnTo>
-                <a:close/>
-                <a:lnTo>
-                  <a:pt x="30018" y="410322"/>
-                </a:lnTo>
-                <a:close/>
-                <a:lnTo>
-                  <a:pt x="27709" y="414687"/>
-                </a:lnTo>
-                <a:close/>
-                <a:lnTo>
-                  <a:pt x="25400" y="419043"/>
-                </a:lnTo>
-                <a:close/>
-                <a:lnTo>
-                  <a:pt x="23091" y="423390"/>
-                </a:lnTo>
-                <a:close/>
-                <a:lnTo>
-                  <a:pt x="20782" y="427727"/>
-                </a:lnTo>
-                <a:close/>
-                <a:lnTo>
-                  <a:pt x="18473" y="432055"/>
-                </a:lnTo>
-                <a:close/>
-                <a:lnTo>
-                  <a:pt x="16164" y="436374"/>
-                </a:lnTo>
-                <a:close/>
-                <a:lnTo>
-                  <a:pt x="13855" y="440684"/>
-                </a:lnTo>
-                <a:close/>
-                <a:lnTo>
-                  <a:pt x="11545" y="444984"/>
-                </a:lnTo>
-                <a:close/>
-                <a:lnTo>
-                  <a:pt x="9236" y="449274"/>
-                </a:lnTo>
-                <a:close/>
-                <a:lnTo>
-                  <a:pt x="6927" y="453556"/>
-                </a:lnTo>
-                <a:close/>
-                <a:lnTo>
-                  <a:pt x="4618" y="457828"/>
-                </a:lnTo>
-                <a:close/>
-                <a:lnTo>
-                  <a:pt x="2309" y="462090"/>
-                </a:lnTo>
-                <a:close/>
-                <a:lnTo>
-                  <a:pt x="0" y="466344"/>
-                </a:lnTo>
-                <a:close/>
-              </a:path>
-            </a:pathLst>
-          </a:custGeom>
-          <a:ln w="19050">
+          </a:prstGeom>
+          <a:ln w="15240">
             <a:solidFill>
               <a:srgbClr val="FFFFFF"/>
             </a:solidFill>
           </a:ln>
         </p:spPr>
         <p:style>
-          <a:lnRef idx="1">
+          <a:lnRef idx="2">
             <a:schemeClr val="accent1"/>
           </a:lnRef>
-          <a:fillRef idx="3">
+          <a:fillRef idx="0">
             <a:schemeClr val="accent1"/>
           </a:fillRef>
-          <a:effectRef idx="2">
+          <a:effectRef idx="1">
             <a:schemeClr val="accent1"/>
           </a:effectRef>
           <a:fontRef idx="minor">
-            <a:schemeClr val="lt1"/>
+            <a:schemeClr val="tx1"/>
           </a:fontRef>
         </p:style>
-        <p:txBody>
-          <a:bodyPr rtlCol="0" anchor="ctr"/>
-          <a:lstStyle/>
-          <a:p>
-            <a:pPr algn="ctr"/>
-          </a:p>
-        </p:txBody>
-      </p:sp>
+      </p:cxnSp>
+      <p:cxnSp>
+        <p:nvCxnSpPr>
+          <p:cNvPr id="9" name="Connector 8"/>
+          <p:cNvCxnSpPr/>
+          <p:nvPr/>
+        </p:nvCxnSpPr>
+        <p:spPr>
+          <a:xfrm flipH="1">
+            <a:off x="6035040.0" y="2571750.0"/>
+            <a:ext cx="594360.0" cy="0.0"/>
+          </a:xfrm>
+          <a:prstGeom prst="line">
+            <a:avLst/>
+          </a:prstGeom>
+          <a:ln w="15240">
+            <a:solidFill>
+              <a:srgbClr val="FFFFFF"/>
+            </a:solidFill>
+          </a:ln>
+        </p:spPr>
+        <p:style>
+          <a:lnRef idx="2">
+            <a:schemeClr val="accent1"/>
+          </a:lnRef>
+          <a:fillRef idx="0">
+            <a:schemeClr val="accent1"/>
+          </a:fillRef>
+          <a:effectRef idx="1">
+            <a:schemeClr val="accent1"/>
+          </a:effectRef>
+          <a:fontRef idx="minor">
+            <a:schemeClr val="tx1"/>
+          </a:fontRef>
+        </p:style>
+      </p:cxnSp>
       <p:cxnSp>
         <p:nvCxnSpPr>
           <p:cNvPr id="10" name="Connector 9"/>
@@ -5437,9 +5809,9 @@
           <p:nvPr/>
         </p:nvCxnSpPr>
         <p:spPr>
-          <a:xfrm>
-            <a:off x="5120640.0" y="2434590.0"/>
-            <a:ext cx="365760.0" cy="0.0"/>
+          <a:xfrm flipV="1">
+            <a:off x="5623560.0" y="478048.32000000007"/>
+            <a:ext cx="182880.0" cy="360227.8799999999"/>
           </a:xfrm>
           <a:prstGeom prst="line">
             <a:avLst/>
@@ -5473,8 +5845,8 @@
         </p:nvCxnSpPr>
         <p:spPr>
           <a:xfrm flipH="1">
-            <a:off x="5669280.0" y="2434590.0"/>
-            <a:ext cx="365760.0" cy="0.0"/>
+            <a:off x="5989320.0" y="-469452.95999999996"/>
+            <a:ext cx="182880.0" cy="516407.3999999999"/>
           </a:xfrm>
           <a:prstGeom prst="line">
             <a:avLst/>
@@ -5508,7 +5880,7 @@
         </p:nvSpPr>
         <p:spPr>
           <a:xfrm>
-            <a:off x="5323840" y="2437130"/>
+            <a:off x="5735320" y="-1174750"/>
             <a:ext cx="1524000" cy="508000"/>
           </a:xfrm>
           <a:prstGeom prst="rect">
@@ -5523,15 +5895,15 @@
           <a:lstStyle/>
           <a:p>
             <a:pPr>
-              <a:defRPr sz="1800" b="1">
+              <a:defRPr sz="2200" b="1">
                 <a:solidFill>
                   <a:srgbClr val="FFFFFF"/>
                 </a:solidFill>
-                <a:latin typeface="Inter"/>
+                <a:latin typeface="Arial"/>
               </a:defRPr>
             </a:pPr>
             <a:r>
-              <a:t>a</a:t>
+              <a:t>y=f(x)</a:t>
             </a:r>
           </a:p>
         </p:txBody>
@@ -5544,7 +5916,7 @@
         </p:nvSpPr>
         <p:spPr>
           <a:xfrm>
-            <a:off x="3997960" y="911910"/>
+            <a:off x="5689600" y="2437130"/>
             <a:ext cx="1524000" cy="508000"/>
           </a:xfrm>
           <a:prstGeom prst="rect">
@@ -5559,15 +5931,87 @@
           <a:lstStyle/>
           <a:p>
             <a:pPr>
-              <a:defRPr sz="1800" b="1">
+              <a:defRPr sz="2200" b="1">
                 <a:solidFill>
                   <a:srgbClr val="FFFFFF"/>
                 </a:solidFill>
-                <a:latin typeface="Inter"/>
+                <a:latin typeface="Arial"/>
               </a:defRPr>
             </a:pPr>
             <a:r>
+              <a:t>a</a:t>
+            </a:r>
+          </a:p>
+        </p:txBody>
+      </p:sp>
+      <p:sp>
+        <p:nvSpPr>
+          <p:cNvPr id="14" name="TextBox 13"/>
+          <p:cNvSpPr txBox="1"/>
+          <p:nvPr/>
+        </p:nvSpPr>
+        <p:spPr>
+          <a:xfrm>
+            <a:off x="4043680" y="-155376"/>
+            <a:ext cx="1524000" cy="508000"/>
+          </a:xfrm>
+          <a:prstGeom prst="rect">
+            <a:avLst/>
+          </a:prstGeom>
+          <a:noFill/>
+        </p:spPr>
+        <p:txBody>
+          <a:bodyPr wrap="none">
+            <a:spAutoFit/>
+          </a:bodyPr>
+          <a:lstStyle/>
+          <a:p>
+            <a:pPr>
+              <a:defRPr sz="2200" b="1">
+                <a:solidFill>
+                  <a:srgbClr val="FFFFFF"/>
+                </a:solidFill>
+                <a:latin typeface="Arial"/>
+              </a:defRPr>
+            </a:pPr>
+            <a:r>
               <a:t>f(a)</a:t>
+            </a:r>
+          </a:p>
+        </p:txBody>
+      </p:sp>
+      <p:sp>
+        <p:nvSpPr>
+          <p:cNvPr id="15" name="TextBox 14"/>
+          <p:cNvSpPr txBox="1"/>
+          <p:nvPr/>
+        </p:nvSpPr>
+        <p:spPr>
+          <a:xfrm>
+            <a:off x="4180840" y="2391410"/>
+            <a:ext cx="1524000" cy="508000"/>
+          </a:xfrm>
+          <a:prstGeom prst="rect">
+            <a:avLst/>
+          </a:prstGeom>
+          <a:noFill/>
+        </p:spPr>
+        <p:txBody>
+          <a:bodyPr wrap="none">
+            <a:spAutoFit/>
+          </a:bodyPr>
+          <a:lstStyle/>
+          <a:p>
+            <a:pPr>
+              <a:defRPr sz="2200" b="1">
+                <a:solidFill>
+                  <a:srgbClr val="FFFFFF"/>
+                </a:solidFill>
+                <a:latin typeface="Arial"/>
+              </a:defRPr>
+            </a:pPr>
+            <a:r>
+              <a:t>O</a:t>
             </a:r>
           </a:p>
         </p:txBody>

--- a/output/3.pptx
+++ b/output/3.pptx
@@ -3105,7 +3105,7 @@
         <p:spPr>
           <a:xfrm>
             <a:off x="4114800.0" y="2571750.0"/>
-            <a:ext cx="2971800.0" cy="0.0"/>
+            <a:ext cx="3657600.0" cy="0.0"/>
           </a:xfrm>
           <a:prstGeom prst="line">
             <a:avLst/>
@@ -3174,8 +3174,8 @@
         </p:nvSpPr>
         <p:spPr>
           <a:xfrm>
-            <a:off x="4800600" y="-613700"/>
-            <a:ext cx="1417320" cy="2460331"/>
+            <a:off x="4937760" y="-1611173"/>
+            <a:ext cx="1805483" cy="3542386"/>
           </a:xfrm>
           <a:custGeom>
             <a:avLst/>
@@ -3184,2404 +3184,2404 @@
             <a:cxnLst/>
             <a:rect l="l" t="t" r="r" b="b"/>
             <a:pathLst>
-              <a:path w="1417320" h="2460331">
+              <a:path w="1805483" h="3542386">
                 <a:moveTo>
-                  <a:pt x="0" y="2460331"/>
+                  <a:pt x="0" y="3542386"/>
                 </a:moveTo>
                 <a:lnTo>
-                  <a:pt x="2366" y="2458493"/>
-                </a:lnTo>
-                <a:close/>
-                <a:lnTo>
-                  <a:pt x="4732" y="2456650"/>
-                </a:lnTo>
-                <a:close/>
-                <a:lnTo>
-                  <a:pt x="7098" y="2454802"/>
-                </a:lnTo>
-                <a:close/>
-                <a:lnTo>
-                  <a:pt x="9465" y="2452948"/>
-                </a:lnTo>
-                <a:close/>
-                <a:lnTo>
-                  <a:pt x="11831" y="2451090"/>
-                </a:lnTo>
-                <a:close/>
-                <a:lnTo>
-                  <a:pt x="14197" y="2449227"/>
-                </a:lnTo>
-                <a:close/>
-                <a:lnTo>
-                  <a:pt x="16563" y="2447359"/>
-                </a:lnTo>
-                <a:close/>
-                <a:lnTo>
-                  <a:pt x="18929" y="2445486"/>
-                </a:lnTo>
-                <a:close/>
-                <a:lnTo>
-                  <a:pt x="21295" y="2443608"/>
-                </a:lnTo>
-                <a:close/>
-                <a:lnTo>
-                  <a:pt x="23661" y="2441724"/>
-                </a:lnTo>
-                <a:close/>
-                <a:lnTo>
-                  <a:pt x="26028" y="2439837"/>
-                </a:lnTo>
-                <a:close/>
-                <a:lnTo>
-                  <a:pt x="28394" y="2437944"/>
-                </a:lnTo>
-                <a:close/>
-                <a:lnTo>
-                  <a:pt x="30760" y="2436046"/>
-                </a:lnTo>
-                <a:close/>
-                <a:lnTo>
-                  <a:pt x="33126" y="2434144"/>
-                </a:lnTo>
-                <a:close/>
-                <a:lnTo>
-                  <a:pt x="35492" y="2432237"/>
-                </a:lnTo>
-                <a:close/>
-                <a:lnTo>
-                  <a:pt x="37858" y="2430324"/>
-                </a:lnTo>
-                <a:close/>
-                <a:lnTo>
-                  <a:pt x="40224" y="2428408"/>
-                </a:lnTo>
-                <a:close/>
-                <a:lnTo>
-                  <a:pt x="42591" y="2426486"/>
-                </a:lnTo>
-                <a:close/>
-                <a:lnTo>
-                  <a:pt x="44957" y="2424560"/>
-                </a:lnTo>
-                <a:close/>
-                <a:lnTo>
-                  <a:pt x="47323" y="2422629"/>
-                </a:lnTo>
-                <a:close/>
-                <a:lnTo>
-                  <a:pt x="49689" y="2420694"/>
-                </a:lnTo>
-                <a:close/>
-                <a:lnTo>
-                  <a:pt x="52055" y="2418753"/>
-                </a:lnTo>
-                <a:close/>
-                <a:lnTo>
-                  <a:pt x="54421" y="2416807"/>
-                </a:lnTo>
-                <a:close/>
-                <a:lnTo>
-                  <a:pt x="56787" y="2414857"/>
-                </a:lnTo>
-                <a:close/>
-                <a:lnTo>
-                  <a:pt x="59154" y="2412901"/>
-                </a:lnTo>
-                <a:close/>
-                <a:lnTo>
-                  <a:pt x="61520" y="2410940"/>
-                </a:lnTo>
-                <a:close/>
-                <a:lnTo>
-                  <a:pt x="63886" y="2408973"/>
-                </a:lnTo>
-                <a:close/>
-                <a:lnTo>
-                  <a:pt x="66252" y="2407001"/>
-                </a:lnTo>
-                <a:close/>
-                <a:lnTo>
-                  <a:pt x="68618" y="2405023"/>
-                </a:lnTo>
-                <a:close/>
-                <a:lnTo>
-                  <a:pt x="70984" y="2403040"/>
-                </a:lnTo>
-                <a:close/>
-                <a:lnTo>
-                  <a:pt x="73350" y="2401051"/>
-                </a:lnTo>
-                <a:close/>
-                <a:lnTo>
-                  <a:pt x="75717" y="2399056"/>
-                </a:lnTo>
-                <a:close/>
-                <a:lnTo>
-                  <a:pt x="78083" y="2397056"/>
-                </a:lnTo>
-                <a:close/>
-                <a:lnTo>
-                  <a:pt x="80449" y="2395050"/>
-                </a:lnTo>
-                <a:close/>
-                <a:lnTo>
-                  <a:pt x="82815" y="2393040"/>
-                </a:lnTo>
-                <a:close/>
-                <a:lnTo>
-                  <a:pt x="85181" y="2391024"/>
-                </a:lnTo>
-                <a:close/>
-                <a:lnTo>
-                  <a:pt x="87547" y="2389004"/>
-                </a:lnTo>
-                <a:close/>
-                <a:lnTo>
-                  <a:pt x="89913" y="2386979"/>
-                </a:lnTo>
-                <a:close/>
-                <a:lnTo>
-                  <a:pt x="92280" y="2384949"/>
-                </a:lnTo>
-                <a:close/>
-                <a:lnTo>
-                  <a:pt x="94646" y="2382915"/>
-                </a:lnTo>
-                <a:close/>
-                <a:lnTo>
-                  <a:pt x="97012" y="2380876"/>
-                </a:lnTo>
-                <a:close/>
-                <a:lnTo>
-                  <a:pt x="99378" y="2378833"/>
-                </a:lnTo>
-                <a:close/>
-                <a:lnTo>
-                  <a:pt x="101744" y="2376784"/>
-                </a:lnTo>
-                <a:close/>
-                <a:lnTo>
-                  <a:pt x="104110" y="2374731"/>
-                </a:lnTo>
-                <a:close/>
-                <a:lnTo>
-                  <a:pt x="106476" y="2372672"/>
-                </a:lnTo>
-                <a:close/>
-                <a:lnTo>
-                  <a:pt x="108843" y="2370608"/>
-                </a:lnTo>
-                <a:close/>
-                <a:lnTo>
-                  <a:pt x="111209" y="2368539"/>
-                </a:lnTo>
-                <a:close/>
-                <a:lnTo>
-                  <a:pt x="113575" y="2366464"/>
-                </a:lnTo>
-                <a:close/>
-                <a:lnTo>
-                  <a:pt x="115941" y="2364384"/>
-                </a:lnTo>
-                <a:close/>
-                <a:lnTo>
-                  <a:pt x="118307" y="2362298"/>
-                </a:lnTo>
-                <a:close/>
-                <a:lnTo>
-                  <a:pt x="120673" y="2360207"/>
-                </a:lnTo>
-                <a:close/>
-                <a:lnTo>
-                  <a:pt x="123039" y="2358110"/>
-                </a:lnTo>
-                <a:close/>
-                <a:lnTo>
-                  <a:pt x="125406" y="2356007"/>
-                </a:lnTo>
-                <a:close/>
-                <a:lnTo>
-                  <a:pt x="127772" y="2353899"/>
-                </a:lnTo>
-                <a:close/>
-                <a:lnTo>
-                  <a:pt x="130138" y="2351786"/>
-                </a:lnTo>
-                <a:close/>
-                <a:lnTo>
-                  <a:pt x="132504" y="2349667"/>
-                </a:lnTo>
-                <a:close/>
-                <a:lnTo>
-                  <a:pt x="134870" y="2347543"/>
-                </a:lnTo>
-                <a:close/>
-                <a:lnTo>
-                  <a:pt x="137236" y="2345413"/>
-                </a:lnTo>
-                <a:close/>
-                <a:lnTo>
-                  <a:pt x="139602" y="2343279"/>
-                </a:lnTo>
-                <a:close/>
-                <a:lnTo>
-                  <a:pt x="141969" y="2341138"/>
-                </a:lnTo>
-                <a:close/>
-                <a:lnTo>
-                  <a:pt x="144335" y="2338993"/>
-                </a:lnTo>
-                <a:close/>
-                <a:lnTo>
-                  <a:pt x="146701" y="2336842"/>
-                </a:lnTo>
-                <a:close/>
-                <a:lnTo>
-                  <a:pt x="149067" y="2334686"/>
-                </a:lnTo>
-                <a:close/>
-                <a:lnTo>
-                  <a:pt x="151433" y="2332524"/>
-                </a:lnTo>
-                <a:close/>
-                <a:lnTo>
-                  <a:pt x="153799" y="2330357"/>
-                </a:lnTo>
-                <a:close/>
-                <a:lnTo>
-                  <a:pt x="156165" y="2328185"/>
-                </a:lnTo>
-                <a:close/>
-                <a:lnTo>
-                  <a:pt x="158532" y="2326007"/>
-                </a:lnTo>
-                <a:close/>
-                <a:lnTo>
-                  <a:pt x="160898" y="2323823"/>
-                </a:lnTo>
-                <a:close/>
-                <a:lnTo>
-                  <a:pt x="163264" y="2321634"/>
-                </a:lnTo>
-                <a:close/>
-                <a:lnTo>
-                  <a:pt x="165630" y="2319440"/>
-                </a:lnTo>
-                <a:close/>
-                <a:lnTo>
-                  <a:pt x="167996" y="2317240"/>
-                </a:lnTo>
-                <a:close/>
-                <a:lnTo>
-                  <a:pt x="170362" y="2315035"/>
-                </a:lnTo>
-                <a:close/>
-                <a:lnTo>
-                  <a:pt x="172728" y="2312825"/>
-                </a:lnTo>
-                <a:close/>
-                <a:lnTo>
-                  <a:pt x="175095" y="2310610"/>
-                </a:lnTo>
-                <a:close/>
-                <a:lnTo>
-                  <a:pt x="177461" y="2308389"/>
-                </a:lnTo>
-                <a:close/>
-                <a:lnTo>
-                  <a:pt x="179827" y="2306163"/>
-                </a:lnTo>
-                <a:close/>
-                <a:lnTo>
-                  <a:pt x="182193" y="2303931"/>
-                </a:lnTo>
-                <a:close/>
-                <a:lnTo>
-                  <a:pt x="184559" y="2301695"/>
-                </a:lnTo>
-                <a:close/>
-                <a:lnTo>
-                  <a:pt x="186925" y="2299453"/>
-                </a:lnTo>
-                <a:close/>
-                <a:lnTo>
-                  <a:pt x="189291" y="2297206"/>
-                </a:lnTo>
-                <a:close/>
-                <a:lnTo>
-                  <a:pt x="191658" y="2294954"/>
-                </a:lnTo>
-                <a:close/>
-                <a:lnTo>
-                  <a:pt x="194024" y="2292696"/>
-                </a:lnTo>
-                <a:close/>
-                <a:lnTo>
-                  <a:pt x="196390" y="2290432"/>
-                </a:lnTo>
-                <a:close/>
-                <a:lnTo>
-                  <a:pt x="198756" y="2288163"/>
-                </a:lnTo>
-                <a:close/>
-                <a:lnTo>
-                  <a:pt x="201122" y="2285887"/>
-                </a:lnTo>
-                <a:close/>
-                <a:lnTo>
-                  <a:pt x="203488" y="2283605"/>
-                </a:lnTo>
-                <a:close/>
-                <a:lnTo>
-                  <a:pt x="205854" y="2281318"/>
-                </a:lnTo>
-                <a:close/>
-                <a:lnTo>
-                  <a:pt x="208221" y="2279023"/>
-                </a:lnTo>
-                <a:close/>
-                <a:lnTo>
-                  <a:pt x="210587" y="2276723"/>
-                </a:lnTo>
-                <a:close/>
-                <a:lnTo>
-                  <a:pt x="212953" y="2274417"/>
-                </a:lnTo>
-                <a:close/>
-                <a:lnTo>
-                  <a:pt x="215319" y="2272105"/>
-                </a:lnTo>
-                <a:close/>
-                <a:lnTo>
-                  <a:pt x="217685" y="2269787"/>
-                </a:lnTo>
-                <a:close/>
-                <a:lnTo>
-                  <a:pt x="220051" y="2267463"/>
-                </a:lnTo>
-                <a:close/>
-                <a:lnTo>
-                  <a:pt x="222417" y="2265135"/>
-                </a:lnTo>
-                <a:close/>
-                <a:lnTo>
-                  <a:pt x="224784" y="2262801"/>
-                </a:lnTo>
-                <a:close/>
-                <a:lnTo>
-                  <a:pt x="227150" y="2260462"/>
-                </a:lnTo>
-                <a:close/>
-                <a:lnTo>
-                  <a:pt x="229516" y="2258118"/>
-                </a:lnTo>
-                <a:close/>
-                <a:lnTo>
-                  <a:pt x="231882" y="2255769"/>
-                </a:lnTo>
-                <a:close/>
-                <a:lnTo>
-                  <a:pt x="234248" y="2253415"/>
-                </a:lnTo>
-                <a:close/>
-                <a:lnTo>
-                  <a:pt x="236614" y="2251056"/>
-                </a:lnTo>
-                <a:close/>
-                <a:lnTo>
-                  <a:pt x="238981" y="2248692"/>
-                </a:lnTo>
-                <a:close/>
-                <a:lnTo>
-                  <a:pt x="241347" y="2246321"/>
-                </a:lnTo>
-                <a:close/>
-                <a:lnTo>
-                  <a:pt x="243713" y="2243945"/>
-                </a:lnTo>
-                <a:close/>
-                <a:lnTo>
-                  <a:pt x="246079" y="2241563"/>
-                </a:lnTo>
-                <a:close/>
-                <a:lnTo>
-                  <a:pt x="248445" y="2239174"/>
-                </a:lnTo>
-                <a:close/>
-                <a:lnTo>
-                  <a:pt x="250811" y="2236778"/>
-                </a:lnTo>
-                <a:close/>
-                <a:lnTo>
-                  <a:pt x="253177" y="2234375"/>
-                </a:lnTo>
-                <a:close/>
-                <a:lnTo>
-                  <a:pt x="255544" y="2231966"/>
-                </a:lnTo>
-                <a:close/>
-                <a:lnTo>
-                  <a:pt x="257910" y="2229550"/>
-                </a:lnTo>
-                <a:close/>
-                <a:lnTo>
-                  <a:pt x="260276" y="2227128"/>
-                </a:lnTo>
-                <a:close/>
-                <a:lnTo>
-                  <a:pt x="262642" y="2224698"/>
-                </a:lnTo>
-                <a:close/>
-                <a:lnTo>
-                  <a:pt x="265008" y="2222263"/>
-                </a:lnTo>
-                <a:close/>
-                <a:lnTo>
-                  <a:pt x="267374" y="2219821"/>
-                </a:lnTo>
-                <a:close/>
-                <a:lnTo>
-                  <a:pt x="269740" y="2217374"/>
-                </a:lnTo>
-                <a:close/>
-                <a:lnTo>
-                  <a:pt x="272107" y="2214920"/>
-                </a:lnTo>
-                <a:close/>
-                <a:lnTo>
-                  <a:pt x="274473" y="2212461"/>
-                </a:lnTo>
-                <a:close/>
-                <a:lnTo>
-                  <a:pt x="276839" y="2209996"/>
-                </a:lnTo>
-                <a:close/>
-                <a:lnTo>
-                  <a:pt x="279205" y="2207525"/>
-                </a:lnTo>
-                <a:close/>
-                <a:lnTo>
-                  <a:pt x="281571" y="2205049"/>
-                </a:lnTo>
-                <a:close/>
-                <a:lnTo>
-                  <a:pt x="283937" y="2202567"/>
-                </a:lnTo>
-                <a:close/>
-                <a:lnTo>
-                  <a:pt x="286303" y="2200079"/>
-                </a:lnTo>
-                <a:close/>
-                <a:lnTo>
-                  <a:pt x="288670" y="2197586"/>
-                </a:lnTo>
-                <a:close/>
-                <a:lnTo>
-                  <a:pt x="291036" y="2195087"/>
-                </a:lnTo>
-                <a:close/>
-                <a:lnTo>
-                  <a:pt x="293402" y="2192582"/>
-                </a:lnTo>
-                <a:close/>
-                <a:lnTo>
-                  <a:pt x="295768" y="2190072"/>
-                </a:lnTo>
-                <a:close/>
-                <a:lnTo>
-                  <a:pt x="298134" y="2187556"/>
-                </a:lnTo>
-                <a:close/>
-                <a:lnTo>
-                  <a:pt x="300500" y="2185034"/>
-                </a:lnTo>
-                <a:close/>
-                <a:lnTo>
-                  <a:pt x="302866" y="2182506"/>
-                </a:lnTo>
-                <a:close/>
-                <a:lnTo>
-                  <a:pt x="305233" y="2179973"/>
-                </a:lnTo>
-                <a:close/>
-                <a:lnTo>
-                  <a:pt x="307599" y="2177433"/>
-                </a:lnTo>
-                <a:close/>
-                <a:lnTo>
-                  <a:pt x="309965" y="2174887"/>
-                </a:lnTo>
-                <a:close/>
-                <a:lnTo>
-                  <a:pt x="312331" y="2172335"/>
-                </a:lnTo>
-                <a:close/>
-                <a:lnTo>
-                  <a:pt x="314697" y="2169776"/>
-                </a:lnTo>
-                <a:close/>
-                <a:lnTo>
-                  <a:pt x="317063" y="2167211"/>
-                </a:lnTo>
-                <a:close/>
-                <a:lnTo>
-                  <a:pt x="319429" y="2164639"/>
-                </a:lnTo>
-                <a:close/>
-                <a:lnTo>
-                  <a:pt x="321796" y="2162060"/>
-                </a:lnTo>
-                <a:close/>
-                <a:lnTo>
-                  <a:pt x="324162" y="2159474"/>
-                </a:lnTo>
-                <a:close/>
-                <a:lnTo>
-                  <a:pt x="326528" y="2156882"/>
-                </a:lnTo>
-                <a:close/>
-                <a:lnTo>
-                  <a:pt x="328894" y="2154284"/>
-                </a:lnTo>
-                <a:close/>
-                <a:lnTo>
-                  <a:pt x="331260" y="2151680"/>
-                </a:lnTo>
-                <a:close/>
-                <a:lnTo>
-                  <a:pt x="333626" y="2149069"/>
-                </a:lnTo>
-                <a:close/>
-                <a:lnTo>
-                  <a:pt x="335992" y="2146453"/>
-                </a:lnTo>
-                <a:close/>
-                <a:lnTo>
-                  <a:pt x="338359" y="2143830"/>
-                </a:lnTo>
-                <a:close/>
-                <a:lnTo>
-                  <a:pt x="340725" y="2141203"/>
-                </a:lnTo>
-                <a:close/>
-                <a:lnTo>
-                  <a:pt x="343091" y="2138569"/>
-                </a:lnTo>
-                <a:close/>
-                <a:lnTo>
-                  <a:pt x="345457" y="2135931"/>
-                </a:lnTo>
-                <a:close/>
-                <a:lnTo>
-                  <a:pt x="347823" y="2133287"/>
-                </a:lnTo>
-                <a:close/>
-                <a:lnTo>
-                  <a:pt x="350189" y="2130637"/>
-                </a:lnTo>
-                <a:close/>
-                <a:lnTo>
-                  <a:pt x="352555" y="2127982"/>
-                </a:lnTo>
-                <a:close/>
-                <a:lnTo>
-                  <a:pt x="354922" y="2125320"/>
-                </a:lnTo>
-                <a:close/>
-                <a:lnTo>
-                  <a:pt x="357288" y="2122652"/>
-                </a:lnTo>
-                <a:close/>
-                <a:lnTo>
-                  <a:pt x="359654" y="2119977"/>
-                </a:lnTo>
-                <a:close/>
-                <a:lnTo>
-                  <a:pt x="362020" y="2117295"/>
-                </a:lnTo>
-                <a:close/>
-                <a:lnTo>
-                  <a:pt x="364386" y="2114606"/>
-                </a:lnTo>
-                <a:close/>
-                <a:lnTo>
-                  <a:pt x="366752" y="2111910"/>
-                </a:lnTo>
-                <a:close/>
-                <a:lnTo>
-                  <a:pt x="369118" y="2109207"/>
-                </a:lnTo>
-                <a:close/>
-                <a:lnTo>
-                  <a:pt x="371485" y="2106496"/>
-                </a:lnTo>
-                <a:close/>
-                <a:lnTo>
-                  <a:pt x="373851" y="2103778"/>
-                </a:lnTo>
-                <a:close/>
-                <a:lnTo>
-                  <a:pt x="376217" y="2101054"/>
-                </a:lnTo>
-                <a:close/>
-                <a:lnTo>
-                  <a:pt x="378583" y="2098322"/>
-                </a:lnTo>
-                <a:close/>
-                <a:lnTo>
-                  <a:pt x="380949" y="2095584"/>
-                </a:lnTo>
-                <a:close/>
-                <a:lnTo>
-                  <a:pt x="383315" y="2092839"/>
-                </a:lnTo>
-                <a:close/>
-                <a:lnTo>
-                  <a:pt x="385681" y="2090087"/>
-                </a:lnTo>
-                <a:close/>
-                <a:lnTo>
-                  <a:pt x="388048" y="2087329"/>
-                </a:lnTo>
-                <a:close/>
-                <a:lnTo>
-                  <a:pt x="390414" y="2084565"/>
-                </a:lnTo>
-                <a:close/>
-                <a:lnTo>
-                  <a:pt x="392780" y="2081795"/>
-                </a:lnTo>
-                <a:close/>
-                <a:lnTo>
-                  <a:pt x="395146" y="2079019"/>
-                </a:lnTo>
-                <a:close/>
-                <a:lnTo>
-                  <a:pt x="397512" y="2076236"/>
-                </a:lnTo>
-                <a:close/>
-                <a:lnTo>
-                  <a:pt x="399878" y="2073448"/>
-                </a:lnTo>
-                <a:close/>
-                <a:lnTo>
-                  <a:pt x="402244" y="2070653"/>
-                </a:lnTo>
-                <a:close/>
-                <a:lnTo>
-                  <a:pt x="404611" y="2067852"/>
-                </a:lnTo>
-                <a:close/>
-                <a:lnTo>
-                  <a:pt x="406977" y="2065045"/>
-                </a:lnTo>
-                <a:close/>
-                <a:lnTo>
-                  <a:pt x="409343" y="2062232"/>
-                </a:lnTo>
-                <a:close/>
-                <a:lnTo>
-                  <a:pt x="411709" y="2059413"/>
-                </a:lnTo>
-                <a:close/>
-                <a:lnTo>
-                  <a:pt x="414075" y="2056588"/>
-                </a:lnTo>
-                <a:close/>
-                <a:lnTo>
-                  <a:pt x="416441" y="2053757"/>
-                </a:lnTo>
-                <a:close/>
-                <a:lnTo>
-                  <a:pt x="418807" y="2050919"/>
-                </a:lnTo>
-                <a:close/>
-                <a:lnTo>
-                  <a:pt x="421174" y="2048075"/>
-                </a:lnTo>
-                <a:close/>
-                <a:lnTo>
-                  <a:pt x="423540" y="2045223"/>
-                </a:lnTo>
-                <a:close/>
-                <a:lnTo>
-                  <a:pt x="425906" y="2042365"/>
-                </a:lnTo>
-                <a:close/>
-                <a:lnTo>
-                  <a:pt x="428272" y="2039500"/>
-                </a:lnTo>
-                <a:close/>
-                <a:lnTo>
-                  <a:pt x="430638" y="2036627"/>
-                </a:lnTo>
-                <a:close/>
-                <a:lnTo>
-                  <a:pt x="433004" y="2033747"/>
-                </a:lnTo>
-                <a:close/>
-                <a:lnTo>
-                  <a:pt x="435370" y="2030859"/>
-                </a:lnTo>
-                <a:close/>
-                <a:lnTo>
-                  <a:pt x="437737" y="2027963"/>
-                </a:lnTo>
-                <a:close/>
-                <a:lnTo>
-                  <a:pt x="440103" y="2025059"/>
-                </a:lnTo>
-                <a:close/>
-                <a:lnTo>
-                  <a:pt x="442469" y="2022148"/>
-                </a:lnTo>
-                <a:close/>
-                <a:lnTo>
-                  <a:pt x="444835" y="2019230"/>
-                </a:lnTo>
-                <a:close/>
-                <a:lnTo>
-                  <a:pt x="447201" y="2016304"/>
-                </a:lnTo>
-                <a:close/>
-                <a:lnTo>
-                  <a:pt x="449567" y="2013371"/>
-                </a:lnTo>
-                <a:close/>
-                <a:lnTo>
-                  <a:pt x="451933" y="2010431"/>
-                </a:lnTo>
-                <a:close/>
-                <a:lnTo>
-                  <a:pt x="454300" y="2007484"/>
-                </a:lnTo>
-                <a:close/>
-                <a:lnTo>
-                  <a:pt x="456666" y="2004530"/>
-                </a:lnTo>
-                <a:close/>
-                <a:lnTo>
-                  <a:pt x="459032" y="2001570"/>
-                </a:lnTo>
-                <a:close/>
-                <a:lnTo>
-                  <a:pt x="461398" y="1998602"/>
-                </a:lnTo>
-                <a:close/>
-                <a:lnTo>
-                  <a:pt x="463764" y="1995628"/>
-                </a:lnTo>
-                <a:close/>
-                <a:lnTo>
-                  <a:pt x="466130" y="1992648"/>
-                </a:lnTo>
-                <a:close/>
-                <a:lnTo>
-                  <a:pt x="468496" y="1989661"/>
-                </a:lnTo>
-                <a:close/>
-                <a:lnTo>
-                  <a:pt x="470863" y="1986667"/>
-                </a:lnTo>
-                <a:close/>
-                <a:lnTo>
-                  <a:pt x="473229" y="1983666"/>
-                </a:lnTo>
-                <a:close/>
-                <a:lnTo>
-                  <a:pt x="475595" y="1980660"/>
-                </a:lnTo>
-                <a:close/>
-                <a:lnTo>
-                  <a:pt x="477961" y="1977646"/>
-                </a:lnTo>
-                <a:close/>
-                <a:lnTo>
-                  <a:pt x="480327" y="1974626"/>
-                </a:lnTo>
-                <a:close/>
-                <a:lnTo>
-                  <a:pt x="482693" y="1971599"/>
-                </a:lnTo>
-                <a:close/>
-                <a:lnTo>
-                  <a:pt x="485059" y="1968566"/>
-                </a:lnTo>
-                <a:close/>
-                <a:lnTo>
-                  <a:pt x="487426" y="1965526"/>
-                </a:lnTo>
-                <a:close/>
-                <a:lnTo>
-                  <a:pt x="489792" y="1962478"/>
-                </a:lnTo>
-                <a:close/>
-                <a:lnTo>
-                  <a:pt x="492158" y="1959424"/>
-                </a:lnTo>
-                <a:close/>
-                <a:lnTo>
-                  <a:pt x="494524" y="1956362"/>
-                </a:lnTo>
-                <a:close/>
-                <a:lnTo>
-                  <a:pt x="496890" y="1953292"/>
-                </a:lnTo>
-                <a:close/>
-                <a:lnTo>
-                  <a:pt x="499256" y="1950214"/>
-                </a:lnTo>
-                <a:close/>
-                <a:lnTo>
-                  <a:pt x="501622" y="1947128"/>
-                </a:lnTo>
-                <a:close/>
-                <a:lnTo>
-                  <a:pt x="503989" y="1944034"/>
-                </a:lnTo>
-                <a:close/>
-                <a:lnTo>
-                  <a:pt x="506355" y="1940931"/>
-                </a:lnTo>
-                <a:close/>
-                <a:lnTo>
-                  <a:pt x="508721" y="1937821"/>
-                </a:lnTo>
-                <a:close/>
-                <a:lnTo>
-                  <a:pt x="511087" y="1934702"/>
-                </a:lnTo>
-                <a:close/>
-                <a:lnTo>
-                  <a:pt x="513453" y="1931575"/>
-                </a:lnTo>
-                <a:close/>
-                <a:lnTo>
-                  <a:pt x="515819" y="1928441"/>
-                </a:lnTo>
-                <a:close/>
-                <a:lnTo>
-                  <a:pt x="518185" y="1925299"/>
-                </a:lnTo>
-                <a:close/>
-                <a:lnTo>
-                  <a:pt x="520552" y="1922150"/>
-                </a:lnTo>
-                <a:close/>
-                <a:lnTo>
-                  <a:pt x="522918" y="1918993"/>
-                </a:lnTo>
-                <a:close/>
-                <a:lnTo>
-                  <a:pt x="525284" y="1915830"/>
-                </a:lnTo>
-                <a:close/>
-                <a:lnTo>
-                  <a:pt x="527650" y="1912659"/>
-                </a:lnTo>
-                <a:close/>
-                <a:lnTo>
-                  <a:pt x="530016" y="1909482"/>
-                </a:lnTo>
-                <a:close/>
-                <a:lnTo>
-                  <a:pt x="532382" y="1906297"/>
-                </a:lnTo>
-                <a:close/>
-                <a:lnTo>
-                  <a:pt x="534748" y="1903105"/>
-                </a:lnTo>
-                <a:close/>
-                <a:lnTo>
-                  <a:pt x="537115" y="1899906"/>
-                </a:lnTo>
-                <a:close/>
-                <a:lnTo>
-                  <a:pt x="539481" y="1896699"/>
-                </a:lnTo>
-                <a:close/>
-                <a:lnTo>
-                  <a:pt x="541847" y="1893485"/>
-                </a:lnTo>
-                <a:close/>
-                <a:lnTo>
-                  <a:pt x="544213" y="1890263"/>
-                </a:lnTo>
-                <a:close/>
-                <a:lnTo>
-                  <a:pt x="546579" y="1887033"/>
-                </a:lnTo>
-                <a:close/>
-                <a:lnTo>
-                  <a:pt x="548945" y="1883795"/>
-                </a:lnTo>
-                <a:close/>
-                <a:lnTo>
-                  <a:pt x="551311" y="1880549"/>
-                </a:lnTo>
-                <a:close/>
-                <a:lnTo>
-                  <a:pt x="553678" y="1877295"/>
-                </a:lnTo>
-                <a:close/>
-                <a:lnTo>
-                  <a:pt x="556044" y="1874033"/>
-                </a:lnTo>
-                <a:close/>
-                <a:lnTo>
-                  <a:pt x="558410" y="1870763"/>
-                </a:lnTo>
-                <a:close/>
-                <a:lnTo>
-                  <a:pt x="560776" y="1867485"/>
-                </a:lnTo>
-                <a:close/>
-                <a:lnTo>
-                  <a:pt x="563142" y="1864199"/>
-                </a:lnTo>
-                <a:close/>
-                <a:lnTo>
-                  <a:pt x="565508" y="1860905"/>
-                </a:lnTo>
-                <a:close/>
-                <a:lnTo>
-                  <a:pt x="567874" y="1857603"/>
-                </a:lnTo>
-                <a:close/>
-                <a:lnTo>
-                  <a:pt x="570241" y="1854294"/>
-                </a:lnTo>
-                <a:close/>
-                <a:lnTo>
-                  <a:pt x="572607" y="1850976"/>
-                </a:lnTo>
-                <a:close/>
-                <a:lnTo>
-                  <a:pt x="574973" y="1847651"/>
-                </a:lnTo>
-                <a:close/>
-                <a:lnTo>
-                  <a:pt x="577339" y="1844318"/>
-                </a:lnTo>
-                <a:close/>
-                <a:lnTo>
-                  <a:pt x="579705" y="1840977"/>
-                </a:lnTo>
-                <a:close/>
-                <a:lnTo>
-                  <a:pt x="582071" y="1837629"/>
-                </a:lnTo>
-                <a:close/>
-                <a:lnTo>
-                  <a:pt x="584437" y="1834272"/>
-                </a:lnTo>
-                <a:close/>
-                <a:lnTo>
-                  <a:pt x="586804" y="1830908"/>
-                </a:lnTo>
-                <a:close/>
-                <a:lnTo>
-                  <a:pt x="589170" y="1827537"/>
-                </a:lnTo>
-                <a:close/>
-                <a:lnTo>
-                  <a:pt x="591536" y="1824157"/>
-                </a:lnTo>
-                <a:close/>
-                <a:lnTo>
-                  <a:pt x="593902" y="1820770"/>
-                </a:lnTo>
-                <a:close/>
-                <a:lnTo>
-                  <a:pt x="596268" y="1817375"/>
-                </a:lnTo>
-                <a:close/>
-                <a:lnTo>
-                  <a:pt x="598634" y="1813973"/>
-                </a:lnTo>
-                <a:close/>
-                <a:lnTo>
-                  <a:pt x="601000" y="1810562"/>
-                </a:lnTo>
-                <a:close/>
-                <a:lnTo>
-                  <a:pt x="603367" y="1807144"/>
-                </a:lnTo>
-                <a:close/>
-                <a:lnTo>
-                  <a:pt x="605733" y="1803718"/>
-                </a:lnTo>
-                <a:close/>
-                <a:lnTo>
-                  <a:pt x="608099" y="1800283"/>
-                </a:lnTo>
-                <a:close/>
-                <a:lnTo>
-                  <a:pt x="610465" y="1796841"/>
-                </a:lnTo>
-                <a:close/>
-                <a:lnTo>
-                  <a:pt x="612831" y="1793390"/>
-                </a:lnTo>
-                <a:close/>
-                <a:lnTo>
-                  <a:pt x="615197" y="1789931"/>
-                </a:lnTo>
-                <a:close/>
-                <a:lnTo>
-                  <a:pt x="617563" y="1786463"/>
-                </a:lnTo>
-                <a:close/>
-                <a:lnTo>
-                  <a:pt x="619930" y="1782986"/>
-                </a:lnTo>
-                <a:close/>
-                <a:lnTo>
-                  <a:pt x="622296" y="1779502"/>
-                </a:lnTo>
-                <a:close/>
-                <a:lnTo>
-                  <a:pt x="624662" y="1776008"/>
-                </a:lnTo>
-                <a:close/>
-                <a:lnTo>
-                  <a:pt x="627028" y="1772507"/>
-                </a:lnTo>
-                <a:close/>
-                <a:lnTo>
-                  <a:pt x="629394" y="1768996"/>
-                </a:lnTo>
-                <a:close/>
-                <a:lnTo>
-                  <a:pt x="631760" y="1765478"/>
-                </a:lnTo>
-                <a:close/>
-                <a:lnTo>
-                  <a:pt x="634126" y="1761952"/>
-                </a:lnTo>
-                <a:close/>
-                <a:lnTo>
-                  <a:pt x="636493" y="1758417"/>
-                </a:lnTo>
-                <a:close/>
-                <a:lnTo>
-                  <a:pt x="638859" y="1754874"/>
-                </a:lnTo>
-                <a:close/>
-                <a:lnTo>
-                  <a:pt x="641225" y="1751323"/>
-                </a:lnTo>
-                <a:close/>
-                <a:lnTo>
-                  <a:pt x="643591" y="1747764"/>
-                </a:lnTo>
-                <a:close/>
-                <a:lnTo>
-                  <a:pt x="645957" y="1744197"/>
-                </a:lnTo>
-                <a:close/>
-                <a:lnTo>
-                  <a:pt x="648323" y="1740622"/>
-                </a:lnTo>
-                <a:close/>
-                <a:lnTo>
-                  <a:pt x="650689" y="1737037"/>
-                </a:lnTo>
-                <a:close/>
-                <a:lnTo>
-                  <a:pt x="653056" y="1733445"/>
-                </a:lnTo>
-                <a:close/>
-                <a:lnTo>
-                  <a:pt x="655422" y="1729843"/>
-                </a:lnTo>
-                <a:close/>
-                <a:lnTo>
-                  <a:pt x="657788" y="1726233"/>
-                </a:lnTo>
-                <a:close/>
-                <a:lnTo>
-                  <a:pt x="660154" y="1722614"/>
-                </a:lnTo>
-                <a:close/>
-                <a:lnTo>
-                  <a:pt x="662520" y="1718986"/>
-                </a:lnTo>
-                <a:close/>
-                <a:lnTo>
-                  <a:pt x="664886" y="1715348"/>
-                </a:lnTo>
-                <a:close/>
-                <a:lnTo>
-                  <a:pt x="667252" y="1711701"/>
-                </a:lnTo>
-                <a:close/>
-                <a:lnTo>
-                  <a:pt x="669619" y="1708046"/>
-                </a:lnTo>
-                <a:close/>
-                <a:lnTo>
-                  <a:pt x="671985" y="1704381"/>
-                </a:lnTo>
-                <a:close/>
-                <a:lnTo>
-                  <a:pt x="674351" y="1700708"/>
-                </a:lnTo>
-                <a:close/>
-                <a:lnTo>
-                  <a:pt x="676717" y="1697026"/>
-                </a:lnTo>
-                <a:close/>
-                <a:lnTo>
-                  <a:pt x="679083" y="1693336"/>
-                </a:lnTo>
-                <a:close/>
-                <a:lnTo>
-                  <a:pt x="681449" y="1689638"/>
-                </a:lnTo>
-                <a:close/>
-                <a:lnTo>
-                  <a:pt x="683815" y="1685931"/>
-                </a:lnTo>
-                <a:close/>
-                <a:lnTo>
-                  <a:pt x="686182" y="1682217"/>
-                </a:lnTo>
-                <a:close/>
-                <a:lnTo>
-                  <a:pt x="688548" y="1678495"/>
-                </a:lnTo>
-                <a:close/>
-                <a:lnTo>
-                  <a:pt x="690914" y="1674765"/>
-                </a:lnTo>
-                <a:close/>
-                <a:lnTo>
-                  <a:pt x="693280" y="1671026"/>
-                </a:lnTo>
-                <a:close/>
-                <a:lnTo>
-                  <a:pt x="695646" y="1667280"/>
-                </a:lnTo>
-                <a:close/>
-                <a:lnTo>
-                  <a:pt x="698012" y="1663525"/>
-                </a:lnTo>
-                <a:close/>
-                <a:lnTo>
-                  <a:pt x="700378" y="1659761"/>
-                </a:lnTo>
-                <a:close/>
-                <a:lnTo>
-                  <a:pt x="702745" y="1655988"/>
-                </a:lnTo>
-                <a:close/>
-                <a:lnTo>
-                  <a:pt x="705111" y="1652206"/>
-                </a:lnTo>
-                <a:close/>
-                <a:lnTo>
-                  <a:pt x="707477" y="1648414"/>
-                </a:lnTo>
-                <a:close/>
-                <a:lnTo>
-                  <a:pt x="709843" y="1644613"/>
-                </a:lnTo>
-                <a:close/>
-                <a:lnTo>
-                  <a:pt x="712209" y="1640802"/>
-                </a:lnTo>
-                <a:close/>
-                <a:lnTo>
-                  <a:pt x="714575" y="1636982"/>
-                </a:lnTo>
-                <a:close/>
-                <a:lnTo>
-                  <a:pt x="716942" y="1633152"/>
-                </a:lnTo>
-                <a:close/>
-                <a:lnTo>
-                  <a:pt x="719308" y="1629313"/>
-                </a:lnTo>
-                <a:close/>
-                <a:lnTo>
-                  <a:pt x="721674" y="1625464"/>
-                </a:lnTo>
-                <a:close/>
-                <a:lnTo>
-                  <a:pt x="724040" y="1621605"/>
-                </a:lnTo>
-                <a:close/>
-                <a:lnTo>
-                  <a:pt x="726406" y="1617737"/>
-                </a:lnTo>
-                <a:close/>
-                <a:lnTo>
-                  <a:pt x="728772" y="1613859"/>
-                </a:lnTo>
-                <a:close/>
-                <a:lnTo>
-                  <a:pt x="731138" y="1609972"/>
-                </a:lnTo>
-                <a:close/>
-                <a:lnTo>
-                  <a:pt x="733505" y="1606076"/>
-                </a:lnTo>
-                <a:close/>
-                <a:lnTo>
-                  <a:pt x="735871" y="1602170"/>
-                </a:lnTo>
-                <a:close/>
-                <a:lnTo>
-                  <a:pt x="738237" y="1598255"/>
-                </a:lnTo>
-                <a:close/>
-                <a:lnTo>
-                  <a:pt x="740603" y="1594330"/>
-                </a:lnTo>
-                <a:close/>
-                <a:lnTo>
-                  <a:pt x="742969" y="1590397"/>
-                </a:lnTo>
-                <a:close/>
-                <a:lnTo>
-                  <a:pt x="745335" y="1586455"/>
-                </a:lnTo>
-                <a:close/>
-                <a:lnTo>
-                  <a:pt x="747701" y="1582504"/>
-                </a:lnTo>
-                <a:close/>
-                <a:lnTo>
-                  <a:pt x="750068" y="1578544"/>
-                </a:lnTo>
-                <a:close/>
-                <a:lnTo>
-                  <a:pt x="752434" y="1574576"/>
-                </a:lnTo>
-                <a:close/>
-                <a:lnTo>
-                  <a:pt x="754800" y="1570599"/>
-                </a:lnTo>
-                <a:close/>
-                <a:lnTo>
-                  <a:pt x="757166" y="1566614"/>
-                </a:lnTo>
-                <a:close/>
-                <a:lnTo>
-                  <a:pt x="759532" y="1562621"/>
-                </a:lnTo>
-                <a:close/>
-                <a:lnTo>
-                  <a:pt x="761898" y="1558618"/>
-                </a:lnTo>
-                <a:close/>
-                <a:lnTo>
-                  <a:pt x="764264" y="1554607"/>
-                </a:lnTo>
-                <a:close/>
-                <a:lnTo>
-                  <a:pt x="766631" y="1550587"/>
-                </a:lnTo>
-                <a:close/>
-                <a:lnTo>
-                  <a:pt x="768997" y="1546557"/>
-                </a:lnTo>
-                <a:close/>
-                <a:lnTo>
-                  <a:pt x="771363" y="1542518"/>
-                </a:lnTo>
-                <a:close/>
-                <a:lnTo>
-                  <a:pt x="773729" y="1538469"/>
-                </a:lnTo>
-                <a:close/>
-                <a:lnTo>
-                  <a:pt x="776095" y="1534411"/>
-                </a:lnTo>
-                <a:close/>
-                <a:lnTo>
-                  <a:pt x="778461" y="1530342"/>
-                </a:lnTo>
-                <a:close/>
-                <a:lnTo>
-                  <a:pt x="780827" y="1526263"/>
-                </a:lnTo>
-                <a:close/>
-                <a:lnTo>
-                  <a:pt x="783194" y="1522175"/>
-                </a:lnTo>
-                <a:close/>
-                <a:lnTo>
-                  <a:pt x="785560" y="1518076"/>
-                </a:lnTo>
-                <a:close/>
-                <a:lnTo>
-                  <a:pt x="787926" y="1513967"/>
-                </a:lnTo>
-                <a:close/>
-                <a:lnTo>
-                  <a:pt x="790292" y="1509848"/>
-                </a:lnTo>
-                <a:close/>
-                <a:lnTo>
-                  <a:pt x="792658" y="1505719"/>
-                </a:lnTo>
-                <a:close/>
-                <a:lnTo>
-                  <a:pt x="795024" y="1501580"/>
-                </a:lnTo>
-                <a:close/>
-                <a:lnTo>
-                  <a:pt x="797390" y="1497431"/>
-                </a:lnTo>
-                <a:close/>
-                <a:lnTo>
-                  <a:pt x="799757" y="1493272"/>
-                </a:lnTo>
-                <a:close/>
-                <a:lnTo>
-                  <a:pt x="802123" y="1489103"/>
-                </a:lnTo>
-                <a:close/>
-                <a:lnTo>
-                  <a:pt x="804489" y="1484924"/>
-                </a:lnTo>
-                <a:close/>
-                <a:lnTo>
-                  <a:pt x="806855" y="1480735"/>
-                </a:lnTo>
-                <a:close/>
-                <a:lnTo>
-                  <a:pt x="809221" y="1476537"/>
-                </a:lnTo>
-                <a:close/>
-                <a:lnTo>
-                  <a:pt x="811587" y="1472329"/>
-                </a:lnTo>
-                <a:close/>
-                <a:lnTo>
-                  <a:pt x="813953" y="1468112"/>
-                </a:lnTo>
-                <a:close/>
-                <a:lnTo>
-                  <a:pt x="816320" y="1463886"/>
-                </a:lnTo>
-                <a:close/>
-                <a:lnTo>
-                  <a:pt x="818686" y="1459650"/>
-                </a:lnTo>
-                <a:close/>
-                <a:lnTo>
-                  <a:pt x="821052" y="1455406"/>
-                </a:lnTo>
-                <a:close/>
-                <a:lnTo>
-                  <a:pt x="823418" y="1451152"/>
-                </a:lnTo>
-                <a:close/>
-                <a:lnTo>
-                  <a:pt x="825784" y="1446890"/>
-                </a:lnTo>
-                <a:close/>
-                <a:lnTo>
-                  <a:pt x="828150" y="1442619"/>
-                </a:lnTo>
-                <a:close/>
-                <a:lnTo>
-                  <a:pt x="830516" y="1438338"/>
-                </a:lnTo>
-                <a:close/>
-                <a:lnTo>
-                  <a:pt x="832883" y="1434048"/>
-                </a:lnTo>
-                <a:close/>
-                <a:lnTo>
-                  <a:pt x="835249" y="1429749"/>
-                </a:lnTo>
-                <a:close/>
-                <a:lnTo>
-                  <a:pt x="837615" y="1425440"/>
-                </a:lnTo>
-                <a:close/>
-                <a:lnTo>
-                  <a:pt x="839981" y="1421120"/>
-                </a:lnTo>
-                <a:close/>
-                <a:lnTo>
-                  <a:pt x="842347" y="1416790"/>
-                </a:lnTo>
-                <a:close/>
-                <a:lnTo>
-                  <a:pt x="844713" y="1412450"/>
-                </a:lnTo>
-                <a:close/>
-                <a:lnTo>
-                  <a:pt x="847079" y="1408100"/>
-                </a:lnTo>
-                <a:close/>
-                <a:lnTo>
-                  <a:pt x="849446" y="1403738"/>
-                </a:lnTo>
-                <a:close/>
-                <a:lnTo>
-                  <a:pt x="851812" y="1399366"/>
-                </a:lnTo>
-                <a:close/>
-                <a:lnTo>
-                  <a:pt x="854178" y="1394984"/>
-                </a:lnTo>
-                <a:close/>
-                <a:lnTo>
-                  <a:pt x="856544" y="1390591"/>
-                </a:lnTo>
-                <a:close/>
-                <a:lnTo>
-                  <a:pt x="858910" y="1386187"/>
-                </a:lnTo>
-                <a:close/>
-                <a:lnTo>
-                  <a:pt x="861276" y="1381774"/>
-                </a:lnTo>
-                <a:close/>
-                <a:lnTo>
-                  <a:pt x="863642" y="1377350"/>
-                </a:lnTo>
-                <a:close/>
-                <a:lnTo>
-                  <a:pt x="866009" y="1372916"/>
-                </a:lnTo>
-                <a:close/>
-                <a:lnTo>
-                  <a:pt x="868375" y="1368471"/>
-                </a:lnTo>
-                <a:close/>
-                <a:lnTo>
-                  <a:pt x="870741" y="1364017"/>
-                </a:lnTo>
-                <a:close/>
-                <a:lnTo>
-                  <a:pt x="873107" y="1359553"/>
-                </a:lnTo>
-                <a:close/>
-                <a:lnTo>
-                  <a:pt x="875473" y="1355078"/>
-                </a:lnTo>
-                <a:close/>
-                <a:lnTo>
-                  <a:pt x="877839" y="1350593"/>
-                </a:lnTo>
-                <a:close/>
-                <a:lnTo>
-                  <a:pt x="880205" y="1346098"/>
-                </a:lnTo>
-                <a:close/>
-                <a:lnTo>
-                  <a:pt x="882572" y="1341592"/>
-                </a:lnTo>
-                <a:close/>
-                <a:lnTo>
-                  <a:pt x="884938" y="1337076"/>
-                </a:lnTo>
-                <a:close/>
-                <a:lnTo>
-                  <a:pt x="887304" y="1332549"/>
-                </a:lnTo>
-                <a:close/>
-                <a:lnTo>
-                  <a:pt x="889670" y="1328011"/>
-                </a:lnTo>
-                <a:close/>
-                <a:lnTo>
-                  <a:pt x="892036" y="1323463"/>
-                </a:lnTo>
-                <a:close/>
-                <a:lnTo>
-                  <a:pt x="894402" y="1318903"/>
-                </a:lnTo>
-                <a:close/>
-                <a:lnTo>
-                  <a:pt x="896768" y="1314333"/>
-                </a:lnTo>
-                <a:close/>
-                <a:lnTo>
-                  <a:pt x="899135" y="1309751"/>
-                </a:lnTo>
-                <a:close/>
-                <a:lnTo>
-                  <a:pt x="901501" y="1305159"/>
-                </a:lnTo>
-                <a:close/>
-                <a:lnTo>
-                  <a:pt x="903867" y="1300555"/>
-                </a:lnTo>
-                <a:close/>
-                <a:lnTo>
-                  <a:pt x="906233" y="1295941"/>
-                </a:lnTo>
-                <a:close/>
-                <a:lnTo>
-                  <a:pt x="908599" y="1291316"/>
-                </a:lnTo>
-                <a:close/>
-                <a:lnTo>
-                  <a:pt x="910965" y="1286680"/>
-                </a:lnTo>
-                <a:close/>
-                <a:lnTo>
-                  <a:pt x="913331" y="1282034"/>
-                </a:lnTo>
-                <a:close/>
-                <a:lnTo>
-                  <a:pt x="915698" y="1277376"/>
-                </a:lnTo>
-                <a:close/>
-                <a:lnTo>
-                  <a:pt x="918064" y="1272708"/>
-                </a:lnTo>
-                <a:close/>
-                <a:lnTo>
-                  <a:pt x="920430" y="1268030"/>
-                </a:lnTo>
-                <a:close/>
-                <a:lnTo>
-                  <a:pt x="922796" y="1263340"/>
-                </a:lnTo>
-                <a:close/>
-                <a:lnTo>
-                  <a:pt x="925162" y="1258640"/>
-                </a:lnTo>
-                <a:close/>
-                <a:lnTo>
-                  <a:pt x="927528" y="1253929"/>
-                </a:lnTo>
-                <a:close/>
-                <a:lnTo>
-                  <a:pt x="929894" y="1249207"/>
-                </a:lnTo>
-                <a:close/>
-                <a:lnTo>
-                  <a:pt x="932261" y="1244475"/>
-                </a:lnTo>
-                <a:close/>
-                <a:lnTo>
-                  <a:pt x="934627" y="1239732"/>
-                </a:lnTo>
-                <a:close/>
-                <a:lnTo>
-                  <a:pt x="936993" y="1234978"/>
-                </a:lnTo>
-                <a:close/>
-                <a:lnTo>
-                  <a:pt x="939359" y="1230213"/>
-                </a:lnTo>
-                <a:close/>
-                <a:lnTo>
-                  <a:pt x="941725" y="1225438"/>
-                </a:lnTo>
-                <a:close/>
-                <a:lnTo>
-                  <a:pt x="944091" y="1220652"/>
-                </a:lnTo>
-                <a:close/>
-                <a:lnTo>
-                  <a:pt x="946457" y="1215856"/>
-                </a:lnTo>
-                <a:close/>
-                <a:lnTo>
-                  <a:pt x="948824" y="1211048"/>
-                </a:lnTo>
-                <a:close/>
-                <a:lnTo>
-                  <a:pt x="951190" y="1206229"/>
-                </a:lnTo>
-                <a:close/>
-                <a:lnTo>
-                  <a:pt x="953556" y="1201400"/>
-                </a:lnTo>
-                <a:close/>
-                <a:lnTo>
-                  <a:pt x="955922" y="1196559"/>
-                </a:lnTo>
-                <a:close/>
-                <a:lnTo>
-                  <a:pt x="958288" y="1191707"/>
-                </a:lnTo>
-                <a:close/>
-                <a:lnTo>
-                  <a:pt x="960654" y="1186844"/>
-                </a:lnTo>
-                <a:close/>
-                <a:lnTo>
-                  <a:pt x="963020" y="1181970"/>
-                </a:lnTo>
-                <a:close/>
-                <a:lnTo>
-                  <a:pt x="965387" y="1177084"/>
-                </a:lnTo>
-                <a:close/>
-                <a:lnTo>
-                  <a:pt x="967753" y="1172187"/>
-                </a:lnTo>
-                <a:close/>
-                <a:lnTo>
-                  <a:pt x="970119" y="1167278"/>
-                </a:lnTo>
-                <a:close/>
-                <a:lnTo>
-                  <a:pt x="972485" y="1162358"/>
-                </a:lnTo>
-                <a:close/>
-                <a:lnTo>
-                  <a:pt x="974851" y="1157426"/>
-                </a:lnTo>
-                <a:close/>
-                <a:lnTo>
-                  <a:pt x="977217" y="1152483"/>
-                </a:lnTo>
-                <a:close/>
-                <a:lnTo>
-                  <a:pt x="979583" y="1147528"/>
-                </a:lnTo>
-                <a:close/>
-                <a:lnTo>
-                  <a:pt x="981950" y="1142561"/>
-                </a:lnTo>
-                <a:close/>
-                <a:lnTo>
-                  <a:pt x="984316" y="1137582"/>
-                </a:lnTo>
-                <a:close/>
-                <a:lnTo>
-                  <a:pt x="986682" y="1132592"/>
-                </a:lnTo>
-                <a:close/>
-                <a:lnTo>
-                  <a:pt x="989048" y="1127589"/>
-                </a:lnTo>
-                <a:close/>
-                <a:lnTo>
-                  <a:pt x="991414" y="1122575"/>
-                </a:lnTo>
-                <a:close/>
-                <a:lnTo>
-                  <a:pt x="993780" y="1117549"/>
-                </a:lnTo>
-                <a:close/>
-                <a:lnTo>
-                  <a:pt x="996146" y="1112511"/>
-                </a:lnTo>
-                <a:close/>
-                <a:lnTo>
-                  <a:pt x="998513" y="1107461"/>
-                </a:lnTo>
-                <a:close/>
-                <a:lnTo>
-                  <a:pt x="1000879" y="1102400"/>
-                </a:lnTo>
-                <a:close/>
-                <a:lnTo>
-                  <a:pt x="1003245" y="1097326"/>
-                </a:lnTo>
-                <a:close/>
-                <a:lnTo>
-                  <a:pt x="1005611" y="1092241"/>
-                </a:lnTo>
-                <a:close/>
-                <a:lnTo>
-                  <a:pt x="1007977" y="1087144"/>
-                </a:lnTo>
-                <a:close/>
-                <a:lnTo>
-                  <a:pt x="1010343" y="1082035"/>
-                </a:lnTo>
-                <a:close/>
-                <a:lnTo>
-                  <a:pt x="1012709" y="1076915"/>
-                </a:lnTo>
-                <a:close/>
-                <a:lnTo>
-                  <a:pt x="1015076" y="1071782"/>
-                </a:lnTo>
-                <a:close/>
-                <a:lnTo>
-                  <a:pt x="1017442" y="1066638"/>
-                </a:lnTo>
-                <a:close/>
-                <a:lnTo>
-                  <a:pt x="1019808" y="1061483"/>
-                </a:lnTo>
-                <a:close/>
-                <a:lnTo>
-                  <a:pt x="1022174" y="1056316"/>
-                </a:lnTo>
-                <a:close/>
-                <a:lnTo>
-                  <a:pt x="1024540" y="1051137"/>
-                </a:lnTo>
-                <a:close/>
-                <a:lnTo>
-                  <a:pt x="1026906" y="1045947"/>
-                </a:lnTo>
-                <a:close/>
-                <a:lnTo>
-                  <a:pt x="1029272" y="1040745"/>
-                </a:lnTo>
-                <a:close/>
-                <a:lnTo>
-                  <a:pt x="1031639" y="1035532"/>
-                </a:lnTo>
-                <a:close/>
-                <a:lnTo>
-                  <a:pt x="1034005" y="1030308"/>
-                </a:lnTo>
-                <a:close/>
-                <a:lnTo>
-                  <a:pt x="1036371" y="1025071"/>
-                </a:lnTo>
-                <a:close/>
-                <a:lnTo>
-                  <a:pt x="1038737" y="1019823"/>
-                </a:lnTo>
-                <a:close/>
-                <a:lnTo>
-                  <a:pt x="1041103" y="1014562"/>
-                </a:lnTo>
-                <a:close/>
-                <a:lnTo>
-                  <a:pt x="1043469" y="1009289"/>
-                </a:lnTo>
-                <a:close/>
-                <a:lnTo>
-                  <a:pt x="1045835" y="1004004"/>
-                </a:lnTo>
-                <a:close/>
-                <a:lnTo>
-                  <a:pt x="1048202" y="998706"/>
-                </a:lnTo>
-                <a:close/>
-                <a:lnTo>
-                  <a:pt x="1050568" y="993395"/>
-                </a:lnTo>
-                <a:close/>
-                <a:lnTo>
-                  <a:pt x="1052934" y="988071"/>
-                </a:lnTo>
-                <a:close/>
-                <a:lnTo>
-                  <a:pt x="1055300" y="982735"/>
-                </a:lnTo>
-                <a:close/>
-                <a:lnTo>
-                  <a:pt x="1057666" y="977385"/>
-                </a:lnTo>
-                <a:close/>
-                <a:lnTo>
-                  <a:pt x="1060032" y="972022"/>
-                </a:lnTo>
-                <a:close/>
-                <a:lnTo>
-                  <a:pt x="1062398" y="966646"/>
-                </a:lnTo>
-                <a:close/>
-                <a:lnTo>
-                  <a:pt x="1064765" y="961258"/>
-                </a:lnTo>
-                <a:close/>
-                <a:lnTo>
-                  <a:pt x="1067131" y="955856"/>
-                </a:lnTo>
-                <a:close/>
-                <a:lnTo>
-                  <a:pt x="1069497" y="950442"/>
-                </a:lnTo>
-                <a:close/>
-                <a:lnTo>
-                  <a:pt x="1071863" y="945014"/>
-                </a:lnTo>
-                <a:close/>
-                <a:lnTo>
-                  <a:pt x="1074229" y="939574"/>
-                </a:lnTo>
-                <a:close/>
-                <a:lnTo>
-                  <a:pt x="1076595" y="934121"/>
-                </a:lnTo>
-                <a:close/>
-                <a:lnTo>
-                  <a:pt x="1078961" y="928656"/>
-                </a:lnTo>
-                <a:close/>
-                <a:lnTo>
-                  <a:pt x="1081328" y="923178"/>
-                </a:lnTo>
-                <a:close/>
-                <a:lnTo>
-                  <a:pt x="1083694" y="917687"/>
-                </a:lnTo>
-                <a:close/>
-                <a:lnTo>
-                  <a:pt x="1086060" y="912184"/>
-                </a:lnTo>
-                <a:close/>
-                <a:lnTo>
-                  <a:pt x="1088426" y="906668"/>
-                </a:lnTo>
-                <a:close/>
-                <a:lnTo>
-                  <a:pt x="1090792" y="901139"/>
-                </a:lnTo>
-                <a:close/>
-                <a:lnTo>
-                  <a:pt x="1093158" y="895598"/>
-                </a:lnTo>
-                <a:close/>
-                <a:lnTo>
-                  <a:pt x="1095524" y="890045"/>
-                </a:lnTo>
-                <a:close/>
-                <a:lnTo>
-                  <a:pt x="1097891" y="884479"/>
-                </a:lnTo>
-                <a:close/>
-                <a:lnTo>
-                  <a:pt x="1100257" y="878901"/>
-                </a:lnTo>
-                <a:close/>
-                <a:lnTo>
-                  <a:pt x="1102623" y="873311"/>
-                </a:lnTo>
-                <a:close/>
-                <a:lnTo>
-                  <a:pt x="1104989" y="867707"/>
-                </a:lnTo>
-                <a:close/>
-                <a:lnTo>
-                  <a:pt x="1107355" y="862091"/>
-                </a:lnTo>
-                <a:close/>
-                <a:lnTo>
-                  <a:pt x="1109721" y="856461"/>
-                </a:lnTo>
-                <a:close/>
-                <a:lnTo>
-                  <a:pt x="1112087" y="850818"/>
-                </a:lnTo>
-                <a:close/>
-                <a:lnTo>
-                  <a:pt x="1114454" y="845161"/>
-                </a:lnTo>
-                <a:close/>
-                <a:lnTo>
-                  <a:pt x="1116820" y="839491"/>
-                </a:lnTo>
-                <a:close/>
-                <a:lnTo>
-                  <a:pt x="1119186" y="833806"/>
-                </a:lnTo>
-                <a:close/>
-                <a:lnTo>
-                  <a:pt x="1121552" y="828107"/>
-                </a:lnTo>
-                <a:close/>
-                <a:lnTo>
-                  <a:pt x="1123918" y="822394"/>
-                </a:lnTo>
-                <a:close/>
-                <a:lnTo>
-                  <a:pt x="1126284" y="816667"/>
-                </a:lnTo>
-                <a:close/>
-                <a:lnTo>
-                  <a:pt x="1128650" y="810926"/>
-                </a:lnTo>
-                <a:close/>
-                <a:lnTo>
-                  <a:pt x="1131017" y="805171"/>
-                </a:lnTo>
-                <a:close/>
-                <a:lnTo>
-                  <a:pt x="1133383" y="799403"/>
-                </a:lnTo>
-                <a:close/>
-                <a:lnTo>
-                  <a:pt x="1135749" y="793622"/>
-                </a:lnTo>
-                <a:close/>
-                <a:lnTo>
-                  <a:pt x="1138115" y="787827"/>
-                </a:lnTo>
-                <a:close/>
-                <a:lnTo>
-                  <a:pt x="1140481" y="782019"/>
-                </a:lnTo>
-                <a:close/>
-                <a:lnTo>
-                  <a:pt x="1142847" y="776199"/>
-                </a:lnTo>
-                <a:close/>
-                <a:lnTo>
-                  <a:pt x="1145213" y="770366"/>
-                </a:lnTo>
-                <a:close/>
-                <a:lnTo>
-                  <a:pt x="1147580" y="764520"/>
-                </a:lnTo>
-                <a:close/>
-                <a:lnTo>
-                  <a:pt x="1149946" y="758661"/>
-                </a:lnTo>
-                <a:close/>
-                <a:lnTo>
-                  <a:pt x="1152312" y="752789"/>
-                </a:lnTo>
-                <a:close/>
-                <a:lnTo>
-                  <a:pt x="1154678" y="746904"/>
-                </a:lnTo>
-                <a:close/>
-                <a:lnTo>
-                  <a:pt x="1157044" y="741005"/>
-                </a:lnTo>
-                <a:close/>
-                <a:lnTo>
-                  <a:pt x="1159410" y="735092"/>
-                </a:lnTo>
-                <a:close/>
-                <a:lnTo>
-                  <a:pt x="1161776" y="729165"/>
-                </a:lnTo>
-                <a:close/>
-                <a:lnTo>
-                  <a:pt x="1164143" y="723223"/>
-                </a:lnTo>
-                <a:close/>
-                <a:lnTo>
-                  <a:pt x="1166509" y="717267"/>
-                </a:lnTo>
-                <a:close/>
-                <a:lnTo>
-                  <a:pt x="1168875" y="711297"/>
-                </a:lnTo>
-                <a:close/>
-                <a:lnTo>
-                  <a:pt x="1171241" y="705311"/>
-                </a:lnTo>
-                <a:close/>
-                <a:lnTo>
-                  <a:pt x="1173607" y="699312"/>
-                </a:lnTo>
-                <a:close/>
-                <a:lnTo>
-                  <a:pt x="1175973" y="693298"/>
-                </a:lnTo>
-                <a:close/>
-                <a:lnTo>
-                  <a:pt x="1178339" y="687269"/>
-                </a:lnTo>
-                <a:close/>
-                <a:lnTo>
-                  <a:pt x="1180706" y="681226"/>
-                </a:lnTo>
-                <a:close/>
-                <a:lnTo>
-                  <a:pt x="1183072" y="675170"/>
-                </a:lnTo>
-                <a:close/>
-                <a:lnTo>
-                  <a:pt x="1185438" y="669099"/>
-                </a:lnTo>
-                <a:close/>
-                <a:lnTo>
-                  <a:pt x="1187804" y="663014"/>
-                </a:lnTo>
-                <a:close/>
-                <a:lnTo>
-                  <a:pt x="1190170" y="656915"/>
-                </a:lnTo>
-                <a:close/>
-                <a:lnTo>
-                  <a:pt x="1192536" y="650802"/>
-                </a:lnTo>
-                <a:close/>
-                <a:lnTo>
-                  <a:pt x="1194903" y="644675"/>
-                </a:lnTo>
-                <a:close/>
-                <a:lnTo>
-                  <a:pt x="1197269" y="638534"/>
-                </a:lnTo>
-                <a:close/>
-                <a:lnTo>
-                  <a:pt x="1199635" y="632379"/>
-                </a:lnTo>
-                <a:close/>
-                <a:lnTo>
-                  <a:pt x="1202001" y="626209"/>
-                </a:lnTo>
-                <a:close/>
-                <a:lnTo>
-                  <a:pt x="1204367" y="620024"/>
-                </a:lnTo>
-                <a:close/>
-                <a:lnTo>
-                  <a:pt x="1206733" y="613825"/>
-                </a:lnTo>
-                <a:close/>
-                <a:lnTo>
-                  <a:pt x="1209099" y="607612"/>
-                </a:lnTo>
-                <a:close/>
-                <a:lnTo>
-                  <a:pt x="1211466" y="601383"/>
-                </a:lnTo>
-                <a:close/>
-                <a:lnTo>
-                  <a:pt x="1213832" y="595139"/>
-                </a:lnTo>
-                <a:close/>
-                <a:lnTo>
-                  <a:pt x="1216198" y="588881"/>
-                </a:lnTo>
-                <a:close/>
-                <a:lnTo>
-                  <a:pt x="1218564" y="582607"/>
-                </a:lnTo>
-                <a:close/>
-                <a:lnTo>
-                  <a:pt x="1220930" y="576319"/>
-                </a:lnTo>
-                <a:close/>
-                <a:lnTo>
-                  <a:pt x="1223296" y="570016"/>
-                </a:lnTo>
-                <a:close/>
-                <a:lnTo>
-                  <a:pt x="1225662" y="563699"/>
-                </a:lnTo>
-                <a:close/>
-                <a:lnTo>
-                  <a:pt x="1228029" y="557367"/>
-                </a:lnTo>
-                <a:close/>
-                <a:lnTo>
-                  <a:pt x="1230395" y="551020"/>
-                </a:lnTo>
-                <a:close/>
-                <a:lnTo>
-                  <a:pt x="1232761" y="544659"/>
-                </a:lnTo>
-                <a:close/>
-                <a:lnTo>
-                  <a:pt x="1235127" y="538284"/>
-                </a:lnTo>
-                <a:close/>
-                <a:lnTo>
-                  <a:pt x="1237493" y="531895"/>
-                </a:lnTo>
-                <a:close/>
-                <a:lnTo>
-                  <a:pt x="1239859" y="525491"/>
-                </a:lnTo>
-                <a:close/>
-                <a:lnTo>
-                  <a:pt x="1242225" y="519072"/>
-                </a:lnTo>
-                <a:close/>
-                <a:lnTo>
-                  <a:pt x="1244592" y="512639"/>
-                </a:lnTo>
-                <a:close/>
-                <a:lnTo>
-                  <a:pt x="1246958" y="506190"/>
-                </a:lnTo>
-                <a:close/>
-                <a:lnTo>
-                  <a:pt x="1249324" y="499726"/>
-                </a:lnTo>
-                <a:close/>
-                <a:lnTo>
-                  <a:pt x="1251690" y="493246"/>
-                </a:lnTo>
-                <a:close/>
-                <a:lnTo>
-                  <a:pt x="1254056" y="486751"/>
-                </a:lnTo>
-                <a:close/>
-                <a:lnTo>
-                  <a:pt x="1256422" y="480240"/>
-                </a:lnTo>
-                <a:close/>
-                <a:lnTo>
-                  <a:pt x="1258788" y="473712"/>
-                </a:lnTo>
-                <a:close/>
-                <a:lnTo>
-                  <a:pt x="1261155" y="467169"/>
-                </a:lnTo>
-                <a:close/>
-                <a:lnTo>
-                  <a:pt x="1263521" y="460609"/>
-                </a:lnTo>
-                <a:close/>
-                <a:lnTo>
-                  <a:pt x="1265887" y="454034"/>
-                </a:lnTo>
-                <a:close/>
-                <a:lnTo>
-                  <a:pt x="1268253" y="447443"/>
-                </a:lnTo>
-                <a:close/>
-                <a:lnTo>
-                  <a:pt x="1270619" y="440836"/>
-                </a:lnTo>
-                <a:close/>
-                <a:lnTo>
-                  <a:pt x="1272985" y="434214"/>
-                </a:lnTo>
-                <a:close/>
-                <a:lnTo>
-                  <a:pt x="1275351" y="427576"/>
-                </a:lnTo>
-                <a:close/>
-                <a:lnTo>
-                  <a:pt x="1277718" y="420924"/>
-                </a:lnTo>
-                <a:close/>
-                <a:lnTo>
-                  <a:pt x="1280084" y="414256"/>
-                </a:lnTo>
-                <a:close/>
-                <a:lnTo>
-                  <a:pt x="1282450" y="407574"/>
-                </a:lnTo>
-                <a:close/>
-                <a:lnTo>
-                  <a:pt x="1284816" y="400876"/>
-                </a:lnTo>
-                <a:close/>
-                <a:lnTo>
-                  <a:pt x="1287182" y="394164"/>
-                </a:lnTo>
-                <a:close/>
-                <a:lnTo>
-                  <a:pt x="1289548" y="387437"/>
-                </a:lnTo>
-                <a:close/>
-                <a:lnTo>
-                  <a:pt x="1291914" y="380694"/>
-                </a:lnTo>
-                <a:close/>
-                <a:lnTo>
-                  <a:pt x="1294281" y="373936"/>
-                </a:lnTo>
-                <a:close/>
-                <a:lnTo>
-                  <a:pt x="1296647" y="367164"/>
-                </a:lnTo>
-                <a:close/>
-                <a:lnTo>
-                  <a:pt x="1299013" y="360375"/>
-                </a:lnTo>
-                <a:close/>
-                <a:lnTo>
-                  <a:pt x="1301379" y="353572"/>
-                </a:lnTo>
-                <a:close/>
-                <a:lnTo>
-                  <a:pt x="1303745" y="346753"/>
-                </a:lnTo>
-                <a:close/>
-                <a:lnTo>
-                  <a:pt x="1306111" y="339918"/>
-                </a:lnTo>
-                <a:close/>
-                <a:lnTo>
-                  <a:pt x="1308477" y="333068"/>
-                </a:lnTo>
-                <a:close/>
-                <a:lnTo>
-                  <a:pt x="1310844" y="326201"/>
-                </a:lnTo>
-                <a:close/>
-                <a:lnTo>
-                  <a:pt x="1313210" y="319319"/>
-                </a:lnTo>
-                <a:close/>
-                <a:lnTo>
-                  <a:pt x="1315576" y="312421"/>
-                </a:lnTo>
-                <a:close/>
-                <a:lnTo>
-                  <a:pt x="1317942" y="305506"/>
-                </a:lnTo>
-                <a:close/>
-                <a:lnTo>
-                  <a:pt x="1320308" y="298574"/>
-                </a:lnTo>
-                <a:close/>
-                <a:lnTo>
-                  <a:pt x="1322674" y="291625"/>
-                </a:lnTo>
-                <a:close/>
-                <a:lnTo>
-                  <a:pt x="1325040" y="284660"/>
-                </a:lnTo>
-                <a:close/>
-                <a:lnTo>
-                  <a:pt x="1327407" y="277677"/>
-                </a:lnTo>
-                <a:close/>
-                <a:lnTo>
-                  <a:pt x="1329773" y="270678"/>
-                </a:lnTo>
-                <a:close/>
-                <a:lnTo>
-                  <a:pt x="1332139" y="263661"/>
-                </a:lnTo>
-                <a:close/>
-                <a:lnTo>
-                  <a:pt x="1334505" y="256628"/>
-                </a:lnTo>
-                <a:close/>
-                <a:lnTo>
-                  <a:pt x="1336871" y="249578"/>
-                </a:lnTo>
-                <a:close/>
-                <a:lnTo>
-                  <a:pt x="1339237" y="242511"/>
-                </a:lnTo>
-                <a:close/>
-                <a:lnTo>
-                  <a:pt x="1341603" y="235429"/>
-                </a:lnTo>
-                <a:close/>
-                <a:lnTo>
-                  <a:pt x="1343970" y="228330"/>
-                </a:lnTo>
-                <a:close/>
-                <a:lnTo>
-                  <a:pt x="1346336" y="221216"/>
-                </a:lnTo>
-                <a:close/>
-                <a:lnTo>
-                  <a:pt x="1348702" y="214085"/>
-                </a:lnTo>
-                <a:close/>
-                <a:lnTo>
-                  <a:pt x="1351068" y="206939"/>
-                </a:lnTo>
-                <a:close/>
-                <a:lnTo>
-                  <a:pt x="1353434" y="199778"/>
-                </a:lnTo>
-                <a:close/>
-                <a:lnTo>
-                  <a:pt x="1355800" y="192600"/>
-                </a:lnTo>
-                <a:close/>
-                <a:lnTo>
-                  <a:pt x="1358166" y="185406"/>
-                </a:lnTo>
-                <a:close/>
-                <a:lnTo>
-                  <a:pt x="1360533" y="178196"/>
-                </a:lnTo>
-                <a:close/>
-                <a:lnTo>
-                  <a:pt x="1362899" y="170969"/>
-                </a:lnTo>
-                <a:close/>
-                <a:lnTo>
-                  <a:pt x="1365265" y="163725"/>
-                </a:lnTo>
-                <a:close/>
-                <a:lnTo>
-                  <a:pt x="1367631" y="156465"/>
-                </a:lnTo>
-                <a:close/>
-                <a:lnTo>
-                  <a:pt x="1369997" y="149187"/>
-                </a:lnTo>
-                <a:close/>
-                <a:lnTo>
-                  <a:pt x="1372363" y="141892"/>
-                </a:lnTo>
-                <a:close/>
-                <a:lnTo>
-                  <a:pt x="1374729" y="134579"/>
-                </a:lnTo>
-                <a:close/>
-                <a:lnTo>
-                  <a:pt x="1377096" y="127249"/>
-                </a:lnTo>
-                <a:close/>
-                <a:lnTo>
-                  <a:pt x="1379462" y="119901"/>
-                </a:lnTo>
-                <a:close/>
-                <a:lnTo>
-                  <a:pt x="1381828" y="112536"/>
-                </a:lnTo>
-                <a:close/>
-                <a:lnTo>
-                  <a:pt x="1384194" y="105154"/>
-                </a:lnTo>
-                <a:close/>
-                <a:lnTo>
-                  <a:pt x="1386560" y="97754"/>
-                </a:lnTo>
-                <a:close/>
-                <a:lnTo>
-                  <a:pt x="1388926" y="90337"/>
-                </a:lnTo>
-                <a:close/>
-                <a:lnTo>
-                  <a:pt x="1391292" y="82903"/>
-                </a:lnTo>
-                <a:close/>
-                <a:lnTo>
-                  <a:pt x="1393659" y="75452"/>
-                </a:lnTo>
-                <a:close/>
-                <a:lnTo>
-                  <a:pt x="1396025" y="67983"/>
-                </a:lnTo>
-                <a:close/>
-                <a:lnTo>
-                  <a:pt x="1398391" y="60497"/>
-                </a:lnTo>
-                <a:close/>
-                <a:lnTo>
-                  <a:pt x="1400757" y="52995"/>
-                </a:lnTo>
-                <a:close/>
-                <a:lnTo>
-                  <a:pt x="1403123" y="45475"/>
-                </a:lnTo>
-                <a:close/>
-                <a:lnTo>
-                  <a:pt x="1405489" y="37938"/>
-                </a:lnTo>
-                <a:close/>
-                <a:lnTo>
-                  <a:pt x="1407855" y="30384"/>
-                </a:lnTo>
-                <a:close/>
-                <a:lnTo>
-                  <a:pt x="1410222" y="22813"/>
-                </a:lnTo>
-                <a:close/>
-                <a:lnTo>
-                  <a:pt x="1412588" y="15226"/>
-                </a:lnTo>
-                <a:close/>
-                <a:lnTo>
-                  <a:pt x="1414954" y="7622"/>
-                </a:lnTo>
-                <a:close/>
-                <a:lnTo>
-                  <a:pt x="1417320" y="0"/>
+                  <a:pt x="3106" y="3540249"/>
+                </a:lnTo>
+                <a:close/>
+                <a:lnTo>
+                  <a:pt x="6186" y="3538135"/>
+                </a:lnTo>
+                <a:close/>
+                <a:lnTo>
+                  <a:pt x="9243" y="3536039"/>
+                </a:lnTo>
+                <a:close/>
+                <a:lnTo>
+                  <a:pt x="12279" y="3533959"/>
+                </a:lnTo>
+                <a:close/>
+                <a:lnTo>
+                  <a:pt x="15297" y="3531891"/>
+                </a:lnTo>
+                <a:close/>
+                <a:lnTo>
+                  <a:pt x="18300" y="3529832"/>
+                </a:lnTo>
+                <a:close/>
+                <a:lnTo>
+                  <a:pt x="21291" y="3527778"/>
+                </a:lnTo>
+                <a:close/>
+                <a:lnTo>
+                  <a:pt x="24272" y="3525726"/>
+                </a:lnTo>
+                <a:close/>
+                <a:lnTo>
+                  <a:pt x="27246" y="3523674"/>
+                </a:lnTo>
+                <a:close/>
+                <a:lnTo>
+                  <a:pt x="30216" y="3521617"/>
+                </a:lnTo>
+                <a:close/>
+                <a:lnTo>
+                  <a:pt x="33185" y="3519552"/>
+                </a:lnTo>
+                <a:close/>
+                <a:lnTo>
+                  <a:pt x="36155" y="3517477"/>
+                </a:lnTo>
+                <a:close/>
+                <a:lnTo>
+                  <a:pt x="39129" y="3515387"/>
+                </a:lnTo>
+                <a:close/>
+                <a:lnTo>
+                  <a:pt x="42110" y="3513280"/>
+                </a:lnTo>
+                <a:close/>
+                <a:lnTo>
+                  <a:pt x="45101" y="3511151"/>
+                </a:lnTo>
+                <a:close/>
+                <a:lnTo>
+                  <a:pt x="48104" y="3508999"/>
+                </a:lnTo>
+                <a:close/>
+                <a:lnTo>
+                  <a:pt x="51119" y="3506825"/>
+                </a:lnTo>
+                <a:close/>
+                <a:lnTo>
+                  <a:pt x="54144" y="3504632"/>
+                </a:lnTo>
+                <a:close/>
+                <a:lnTo>
+                  <a:pt x="57179" y="3502426"/>
+                </a:lnTo>
+                <a:close/>
+                <a:lnTo>
+                  <a:pt x="60221" y="3500210"/>
+                </a:lnTo>
+                <a:close/>
+                <a:lnTo>
+                  <a:pt x="63270" y="3497990"/>
+                </a:lnTo>
+                <a:close/>
+                <a:lnTo>
+                  <a:pt x="66322" y="3495768"/>
+                </a:lnTo>
+                <a:close/>
+                <a:lnTo>
+                  <a:pt x="69377" y="3493551"/>
+                </a:lnTo>
+                <a:close/>
+                <a:lnTo>
+                  <a:pt x="72433" y="3491340"/>
+                </a:lnTo>
+                <a:close/>
+                <a:lnTo>
+                  <a:pt x="75487" y="3489136"/>
+                </a:lnTo>
+                <a:close/>
+                <a:lnTo>
+                  <a:pt x="78538" y="3486936"/>
+                </a:lnTo>
+                <a:close/>
+                <a:lnTo>
+                  <a:pt x="81583" y="3484738"/>
+                </a:lnTo>
+                <a:close/>
+                <a:lnTo>
+                  <a:pt x="84620" y="3482540"/>
+                </a:lnTo>
+                <a:close/>
+                <a:lnTo>
+                  <a:pt x="87645" y="3480340"/>
+                </a:lnTo>
+                <a:close/>
+                <a:lnTo>
+                  <a:pt x="90658" y="3478135"/>
+                </a:lnTo>
+                <a:close/>
+                <a:lnTo>
+                  <a:pt x="93655" y="3475925"/>
+                </a:lnTo>
+                <a:close/>
+                <a:lnTo>
+                  <a:pt x="96637" y="3473705"/>
+                </a:lnTo>
+                <a:close/>
+                <a:lnTo>
+                  <a:pt x="99608" y="3471476"/>
+                </a:lnTo>
+                <a:close/>
+                <a:lnTo>
+                  <a:pt x="102574" y="3469233"/>
+                </a:lnTo>
+                <a:close/>
+                <a:lnTo>
+                  <a:pt x="105538" y="3466977"/>
+                </a:lnTo>
+                <a:close/>
+                <a:lnTo>
+                  <a:pt x="108507" y="3464704"/>
+                </a:lnTo>
+                <a:close/>
+                <a:lnTo>
+                  <a:pt x="111485" y="3462412"/>
+                </a:lnTo>
+                <a:close/>
+                <a:lnTo>
+                  <a:pt x="114477" y="3460100"/>
+                </a:lnTo>
+                <a:close/>
+                <a:lnTo>
+                  <a:pt x="117488" y="3457766"/>
+                </a:lnTo>
+                <a:close/>
+                <a:lnTo>
+                  <a:pt x="120517" y="3455411"/>
+                </a:lnTo>
+                <a:close/>
+                <a:lnTo>
+                  <a:pt x="123559" y="3453040"/>
+                </a:lnTo>
+                <a:close/>
+                <a:lnTo>
+                  <a:pt x="126607" y="3450656"/>
+                </a:lnTo>
+                <a:close/>
+                <a:lnTo>
+                  <a:pt x="129656" y="3448263"/>
+                </a:lnTo>
+                <a:close/>
+                <a:lnTo>
+                  <a:pt x="132701" y="3445865"/>
+                </a:lnTo>
+                <a:close/>
+                <a:lnTo>
+                  <a:pt x="135737" y="3443467"/>
+                </a:lnTo>
+                <a:close/>
+                <a:lnTo>
+                  <a:pt x="138757" y="3441071"/>
+                </a:lnTo>
+                <a:close/>
+                <a:lnTo>
+                  <a:pt x="141758" y="3438683"/>
+                </a:lnTo>
+                <a:close/>
+                <a:lnTo>
+                  <a:pt x="144742" y="3436300"/>
+                </a:lnTo>
+                <a:close/>
+                <a:lnTo>
+                  <a:pt x="147715" y="3433921"/>
+                </a:lnTo>
+                <a:close/>
+                <a:lnTo>
+                  <a:pt x="150681" y="3431544"/>
+                </a:lnTo>
+                <a:close/>
+                <a:lnTo>
+                  <a:pt x="153646" y="3429167"/>
+                </a:lnTo>
+                <a:close/>
+                <a:lnTo>
+                  <a:pt x="156613" y="3426788"/>
+                </a:lnTo>
+                <a:close/>
+                <a:lnTo>
+                  <a:pt x="159589" y="3424406"/>
+                </a:lnTo>
+                <a:close/>
+                <a:lnTo>
+                  <a:pt x="162578" y="3422017"/>
+                </a:lnTo>
+                <a:close/>
+                <a:lnTo>
+                  <a:pt x="165584" y="3419620"/>
+                </a:lnTo>
+                <a:close/>
+                <a:lnTo>
+                  <a:pt x="168603" y="3417214"/>
+                </a:lnTo>
+                <a:close/>
+                <a:lnTo>
+                  <a:pt x="171634" y="3414794"/>
+                </a:lnTo>
+                <a:close/>
+                <a:lnTo>
+                  <a:pt x="174675" y="3412361"/>
+                </a:lnTo>
+                <a:close/>
+                <a:lnTo>
+                  <a:pt x="177724" y="3409910"/>
+                </a:lnTo>
+                <a:close/>
+                <a:lnTo>
+                  <a:pt x="180777" y="3407440"/>
+                </a:lnTo>
+                <a:close/>
+                <a:lnTo>
+                  <a:pt x="183833" y="3404948"/>
+                </a:lnTo>
+                <a:close/>
+                <a:lnTo>
+                  <a:pt x="186890" y="3402432"/>
+                </a:lnTo>
+                <a:close/>
+                <a:lnTo>
+                  <a:pt x="189946" y="3399895"/>
+                </a:lnTo>
+                <a:close/>
+                <a:lnTo>
+                  <a:pt x="192998" y="3397340"/>
+                </a:lnTo>
+                <a:close/>
+                <a:lnTo>
+                  <a:pt x="196044" y="3394774"/>
+                </a:lnTo>
+                <a:close/>
+                <a:lnTo>
+                  <a:pt x="199083" y="3392201"/>
+                </a:lnTo>
+                <a:close/>
+                <a:lnTo>
+                  <a:pt x="202113" y="3389626"/>
+                </a:lnTo>
+                <a:close/>
+                <a:lnTo>
+                  <a:pt x="205132" y="3387054"/>
+                </a:lnTo>
+                <a:close/>
+                <a:lnTo>
+                  <a:pt x="208137" y="3384490"/>
+                </a:lnTo>
+                <a:close/>
+                <a:lnTo>
+                  <a:pt x="211128" y="3381938"/>
+                </a:lnTo>
+                <a:close/>
+                <a:lnTo>
+                  <a:pt x="214107" y="3379394"/>
+                </a:lnTo>
+                <a:close/>
+                <a:lnTo>
+                  <a:pt x="217079" y="3376854"/>
+                </a:lnTo>
+                <a:close/>
+                <a:lnTo>
+                  <a:pt x="220046" y="3374311"/>
+                </a:lnTo>
+                <a:close/>
+                <a:lnTo>
+                  <a:pt x="223014" y="3371760"/>
+                </a:lnTo>
+                <a:close/>
+                <a:lnTo>
+                  <a:pt x="225986" y="3369194"/>
+                </a:lnTo>
+                <a:close/>
+                <a:lnTo>
+                  <a:pt x="228966" y="3366608"/>
+                </a:lnTo>
+                <a:close/>
+                <a:lnTo>
+                  <a:pt x="231958" y="3363997"/>
+                </a:lnTo>
+                <a:close/>
+                <a:lnTo>
+                  <a:pt x="234965" y="3361358"/>
+                </a:lnTo>
+                <a:close/>
+                <a:lnTo>
+                  <a:pt x="237985" y="3358695"/>
+                </a:lnTo>
+                <a:close/>
+                <a:lnTo>
+                  <a:pt x="241015" y="3356015"/>
+                </a:lnTo>
+                <a:close/>
+                <a:lnTo>
+                  <a:pt x="244055" y="3353323"/>
+                </a:lnTo>
+                <a:close/>
+                <a:lnTo>
+                  <a:pt x="247102" y="3350625"/>
+                </a:lnTo>
+                <a:close/>
+                <a:lnTo>
+                  <a:pt x="250155" y="3347927"/>
+                </a:lnTo>
+                <a:close/>
+                <a:lnTo>
+                  <a:pt x="253210" y="3345235"/>
+                </a:lnTo>
+                <a:close/>
+                <a:lnTo>
+                  <a:pt x="256267" y="3342553"/>
+                </a:lnTo>
+                <a:close/>
+                <a:lnTo>
+                  <a:pt x="259323" y="3339883"/>
+                </a:lnTo>
+                <a:close/>
+                <a:lnTo>
+                  <a:pt x="262377" y="3337219"/>
+                </a:lnTo>
+                <a:close/>
+                <a:lnTo>
+                  <a:pt x="265424" y="3334556"/>
+                </a:lnTo>
+                <a:close/>
+                <a:lnTo>
+                  <a:pt x="268465" y="3331888"/>
+                </a:lnTo>
+                <a:close/>
+                <a:lnTo>
+                  <a:pt x="271495" y="3329211"/>
+                </a:lnTo>
+                <a:close/>
+                <a:lnTo>
+                  <a:pt x="274513" y="3326519"/>
+                </a:lnTo>
+                <a:close/>
+                <a:lnTo>
+                  <a:pt x="277517" y="3323806"/>
+                </a:lnTo>
+                <a:close/>
+                <a:lnTo>
+                  <a:pt x="280505" y="3321070"/>
+                </a:lnTo>
+                <a:close/>
+                <a:lnTo>
+                  <a:pt x="283480" y="3318309"/>
+                </a:lnTo>
+                <a:close/>
+                <a:lnTo>
+                  <a:pt x="286447" y="3315529"/>
+                </a:lnTo>
+                <a:close/>
+                <a:lnTo>
+                  <a:pt x="289411" y="3312731"/>
+                </a:lnTo>
+                <a:close/>
+                <a:lnTo>
+                  <a:pt x="292378" y="3309918"/>
+                </a:lnTo>
+                <a:close/>
+                <a:lnTo>
+                  <a:pt x="295351" y="3307095"/>
+                </a:lnTo>
+                <a:close/>
+                <a:lnTo>
+                  <a:pt x="298337" y="3304263"/>
+                </a:lnTo>
+                <a:close/>
+                <a:lnTo>
+                  <a:pt x="301339" y="3301426"/>
+                </a:lnTo>
+                <a:close/>
+                <a:lnTo>
+                  <a:pt x="304361" y="3298585"/>
+                </a:lnTo>
+                <a:close/>
+                <a:lnTo>
+                  <a:pt x="307398" y="3295741"/>
+                </a:lnTo>
+                <a:close/>
+                <a:lnTo>
+                  <a:pt x="310444" y="3292893"/>
+                </a:lnTo>
+                <a:close/>
+                <a:lnTo>
+                  <a:pt x="313493" y="3290039"/>
+                </a:lnTo>
+                <a:close/>
+                <a:lnTo>
+                  <a:pt x="316541" y="3287178"/>
+                </a:lnTo>
+                <a:close/>
+                <a:lnTo>
+                  <a:pt x="319581" y="3284309"/>
+                </a:lnTo>
+                <a:close/>
+                <a:lnTo>
+                  <a:pt x="322609" y="3281432"/>
+                </a:lnTo>
+                <a:close/>
+                <a:lnTo>
+                  <a:pt x="325618" y="3278545"/>
+                </a:lnTo>
+                <a:close/>
+                <a:lnTo>
+                  <a:pt x="328609" y="3275649"/>
+                </a:lnTo>
+                <a:close/>
+                <a:lnTo>
+                  <a:pt x="331587" y="3272744"/>
+                </a:lnTo>
+                <a:close/>
+                <a:lnTo>
+                  <a:pt x="334555" y="3269831"/>
+                </a:lnTo>
+                <a:close/>
+                <a:lnTo>
+                  <a:pt x="337520" y="3266911"/>
+                </a:lnTo>
+                <a:close/>
+                <a:lnTo>
+                  <a:pt x="340485" y="3263985"/>
+                </a:lnTo>
+                <a:close/>
+                <a:lnTo>
+                  <a:pt x="343457" y="3261052"/>
+                </a:lnTo>
+                <a:close/>
+                <a:lnTo>
+                  <a:pt x="346440" y="3258115"/>
+                </a:lnTo>
+                <a:close/>
+                <a:lnTo>
+                  <a:pt x="349438" y="3255174"/>
+                </a:lnTo>
+                <a:close/>
+                <a:lnTo>
+                  <a:pt x="352451" y="3252228"/>
+                </a:lnTo>
+                <a:close/>
+                <a:lnTo>
+                  <a:pt x="355477" y="3249273"/>
+                </a:lnTo>
+                <a:close/>
+                <a:lnTo>
+                  <a:pt x="358514" y="3246308"/>
+                </a:lnTo>
+                <a:close/>
+                <a:lnTo>
+                  <a:pt x="361559" y="3243331"/>
+                </a:lnTo>
+                <a:close/>
+                <a:lnTo>
+                  <a:pt x="364611" y="3240339"/>
+                </a:lnTo>
+                <a:close/>
+                <a:lnTo>
+                  <a:pt x="367666" y="3237329"/>
+                </a:lnTo>
+                <a:close/>
+                <a:lnTo>
+                  <a:pt x="370724" y="3234301"/>
+                </a:lnTo>
+                <a:close/>
+                <a:lnTo>
+                  <a:pt x="373781" y="3231252"/>
+                </a:lnTo>
+                <a:close/>
+                <a:lnTo>
+                  <a:pt x="376836" y="3228184"/>
+                </a:lnTo>
+                <a:close/>
+                <a:lnTo>
+                  <a:pt x="379887" y="3225099"/>
+                </a:lnTo>
+                <a:close/>
+                <a:lnTo>
+                  <a:pt x="382930" y="3222001"/>
+                </a:lnTo>
+                <a:close/>
+                <a:lnTo>
+                  <a:pt x="385964" y="3218890"/>
+                </a:lnTo>
+                <a:close/>
+                <a:lnTo>
+                  <a:pt x="388987" y="3215770"/>
+                </a:lnTo>
+                <a:close/>
+                <a:lnTo>
+                  <a:pt x="391997" y="3212642"/>
+                </a:lnTo>
+                <a:close/>
+                <a:lnTo>
+                  <a:pt x="394991" y="3209510"/>
+                </a:lnTo>
+                <a:close/>
+                <a:lnTo>
+                  <a:pt x="397970" y="3206373"/>
+                </a:lnTo>
+                <a:close/>
+                <a:lnTo>
+                  <a:pt x="400940" y="3203230"/>
+                </a:lnTo>
+                <a:close/>
+                <a:lnTo>
+                  <a:pt x="403904" y="3200083"/>
+                </a:lnTo>
+                <a:close/>
+                <a:lnTo>
+                  <a:pt x="406870" y="3196928"/>
+                </a:lnTo>
+                <a:close/>
+                <a:lnTo>
+                  <a:pt x="409840" y="3193767"/>
+                </a:lnTo>
+                <a:close/>
+                <a:lnTo>
+                  <a:pt x="412820" y="3190597"/>
+                </a:lnTo>
+                <a:close/>
+                <a:lnTo>
+                  <a:pt x="415815" y="3187419"/>
+                </a:lnTo>
+                <a:close/>
+                <a:lnTo>
+                  <a:pt x="418830" y="3184231"/>
+                </a:lnTo>
+                <a:close/>
+                <a:lnTo>
+                  <a:pt x="421861" y="3181034"/>
+                </a:lnTo>
+                <a:close/>
+                <a:lnTo>
+                  <a:pt x="424904" y="3177829"/>
+                </a:lnTo>
+                <a:close/>
+                <a:lnTo>
+                  <a:pt x="427953" y="3174616"/>
+                </a:lnTo>
+                <a:close/>
+                <a:lnTo>
+                  <a:pt x="431002" y="3171396"/>
+                </a:lnTo>
+                <a:close/>
+                <a:lnTo>
+                  <a:pt x="434046" y="3168171"/>
+                </a:lnTo>
+                <a:close/>
+                <a:lnTo>
+                  <a:pt x="437079" y="3164940"/>
+                </a:lnTo>
+                <a:close/>
+                <a:lnTo>
+                  <a:pt x="440096" y="3161705"/>
+                </a:lnTo>
+                <a:close/>
+                <a:lnTo>
+                  <a:pt x="443094" y="3158466"/>
+                </a:lnTo>
+                <a:close/>
+                <a:lnTo>
+                  <a:pt x="446076" y="3155220"/>
+                </a:lnTo>
+                <a:close/>
+                <a:lnTo>
+                  <a:pt x="449047" y="3151966"/>
+                </a:lnTo>
+                <a:close/>
+                <a:lnTo>
+                  <a:pt x="452013" y="3148700"/>
+                </a:lnTo>
+                <a:close/>
+                <a:lnTo>
+                  <a:pt x="454977" y="3145421"/>
+                </a:lnTo>
+                <a:close/>
+                <a:lnTo>
+                  <a:pt x="457946" y="3142126"/>
+                </a:lnTo>
+                <a:close/>
+                <a:lnTo>
+                  <a:pt x="460924" y="3138813"/>
+                </a:lnTo>
+                <a:close/>
+                <a:lnTo>
+                  <a:pt x="463916" y="3135479"/>
+                </a:lnTo>
+                <a:close/>
+                <a:lnTo>
+                  <a:pt x="466924" y="3132124"/>
+                </a:lnTo>
+                <a:close/>
+                <a:lnTo>
+                  <a:pt x="469945" y="3128751"/>
+                </a:lnTo>
+                <a:close/>
+                <a:lnTo>
+                  <a:pt x="472978" y="3125363"/>
+                </a:lnTo>
+                <a:close/>
+                <a:lnTo>
+                  <a:pt x="476020" y="3121961"/>
+                </a:lnTo>
+                <a:close/>
+                <a:lnTo>
+                  <a:pt x="479070" y="3118551"/>
+                </a:lnTo>
+                <a:close/>
+                <a:lnTo>
+                  <a:pt x="482124" y="3115133"/>
+                </a:lnTo>
+                <a:close/>
+                <a:lnTo>
+                  <a:pt x="485181" y="3111711"/>
+                </a:lnTo>
+                <a:close/>
+                <a:lnTo>
+                  <a:pt x="488237" y="3108287"/>
+                </a:lnTo>
+                <a:close/>
+                <a:lnTo>
+                  <a:pt x="491292" y="3104861"/>
+                </a:lnTo>
+                <a:close/>
+                <a:lnTo>
+                  <a:pt x="494343" y="3101429"/>
+                </a:lnTo>
+                <a:close/>
+                <a:lnTo>
+                  <a:pt x="497389" y="3097989"/>
+                </a:lnTo>
+                <a:close/>
+                <a:lnTo>
+                  <a:pt x="500427" y="3094538"/>
+                </a:lnTo>
+                <a:close/>
+                <a:lnTo>
+                  <a:pt x="503455" y="3091073"/>
+                </a:lnTo>
+                <a:close/>
+                <a:lnTo>
+                  <a:pt x="506471" y="3087592"/>
+                </a:lnTo>
+                <a:close/>
+                <a:lnTo>
+                  <a:pt x="509474" y="3084091"/>
+                </a:lnTo>
+                <a:close/>
+                <a:lnTo>
+                  <a:pt x="512463" y="3080570"/>
+                </a:lnTo>
+                <a:close/>
+                <a:lnTo>
+                  <a:pt x="515441" y="3077028"/>
+                </a:lnTo>
+                <a:close/>
+                <a:lnTo>
+                  <a:pt x="518411" y="3073470"/>
+                </a:lnTo>
+                <a:close/>
+                <a:lnTo>
+                  <a:pt x="521378" y="3069896"/>
+                </a:lnTo>
+                <a:close/>
+                <a:lnTo>
+                  <a:pt x="524347" y="3066310"/>
+                </a:lnTo>
+                <a:close/>
+                <a:lnTo>
+                  <a:pt x="527319" y="3062713"/>
+                </a:lnTo>
+                <a:close/>
+                <a:lnTo>
+                  <a:pt x="530301" y="3059107"/>
+                </a:lnTo>
+                <a:close/>
+                <a:lnTo>
+                  <a:pt x="533296" y="3055496"/>
+                </a:lnTo>
+                <a:close/>
+                <a:lnTo>
+                  <a:pt x="536305" y="3051880"/>
+                </a:lnTo>
+                <a:close/>
+                <a:lnTo>
+                  <a:pt x="539327" y="3048259"/>
+                </a:lnTo>
+                <a:close/>
+                <a:lnTo>
+                  <a:pt x="542359" y="3044633"/>
+                </a:lnTo>
+                <a:close/>
+                <a:lnTo>
+                  <a:pt x="545400" y="3041002"/>
+                </a:lnTo>
+                <a:close/>
+                <a:lnTo>
+                  <a:pt x="548448" y="3037365"/>
+                </a:lnTo>
+                <a:close/>
+                <a:lnTo>
+                  <a:pt x="551501" y="3033723"/>
+                </a:lnTo>
+                <a:close/>
+                <a:lnTo>
+                  <a:pt x="554557" y="3030074"/>
+                </a:lnTo>
+                <a:close/>
+                <a:lnTo>
+                  <a:pt x="557614" y="3026419"/>
+                </a:lnTo>
+                <a:close/>
+                <a:lnTo>
+                  <a:pt x="560670" y="3022757"/>
+                </a:lnTo>
+                <a:close/>
+                <a:lnTo>
+                  <a:pt x="563723" y="3019087"/>
+                </a:lnTo>
+                <a:close/>
+                <a:lnTo>
+                  <a:pt x="566769" y="3015406"/>
+                </a:lnTo>
+                <a:close/>
+                <a:lnTo>
+                  <a:pt x="569808" y="3011714"/>
+                </a:lnTo>
+                <a:close/>
+                <a:lnTo>
+                  <a:pt x="572836" y="3008010"/>
+                </a:lnTo>
+                <a:close/>
+                <a:lnTo>
+                  <a:pt x="575852" y="3004290"/>
+                </a:lnTo>
+                <a:close/>
+                <a:lnTo>
+                  <a:pt x="578854" y="3000556"/>
+                </a:lnTo>
+                <a:close/>
+                <a:lnTo>
+                  <a:pt x="581839" y="2996804"/>
+                </a:lnTo>
+                <a:close/>
+                <a:lnTo>
+                  <a:pt x="584812" y="2993036"/>
+                </a:lnTo>
+                <a:close/>
+                <a:lnTo>
+                  <a:pt x="587779" y="2989249"/>
+                </a:lnTo>
+                <a:close/>
+                <a:lnTo>
+                  <a:pt x="590743" y="2985445"/>
+                </a:lnTo>
+                <a:close/>
+                <a:lnTo>
+                  <a:pt x="593710" y="2981624"/>
+                </a:lnTo>
+                <a:close/>
+                <a:lnTo>
+                  <a:pt x="596685" y="2977784"/>
+                </a:lnTo>
+                <a:close/>
+                <a:lnTo>
+                  <a:pt x="599674" y="2973925"/>
+                </a:lnTo>
+                <a:close/>
+                <a:lnTo>
+                  <a:pt x="602679" y="2970049"/>
+                </a:lnTo>
+                <a:close/>
+                <a:lnTo>
+                  <a:pt x="605704" y="2966154"/>
+                </a:lnTo>
+                <a:close/>
+                <a:lnTo>
+                  <a:pt x="608743" y="2962244"/>
+                </a:lnTo>
+                <a:close/>
+                <a:lnTo>
+                  <a:pt x="611789" y="2958320"/>
+                </a:lnTo>
+                <a:close/>
+                <a:lnTo>
+                  <a:pt x="614839" y="2954386"/>
+                </a:lnTo>
+                <a:close/>
+                <a:lnTo>
+                  <a:pt x="617886" y="2950442"/>
+                </a:lnTo>
+                <a:close/>
+                <a:lnTo>
+                  <a:pt x="620925" y="2946492"/>
+                </a:lnTo>
+                <a:close/>
+                <a:lnTo>
+                  <a:pt x="623950" y="2942537"/>
+                </a:lnTo>
+                <a:close/>
+                <a:lnTo>
+                  <a:pt x="626956" y="2938580"/>
+                </a:lnTo>
+                <a:close/>
+                <a:lnTo>
+                  <a:pt x="629944" y="2934620"/>
+                </a:lnTo>
+                <a:close/>
+                <a:lnTo>
+                  <a:pt x="632919" y="2930655"/>
+                </a:lnTo>
+                <a:close/>
+                <a:lnTo>
+                  <a:pt x="635887" y="2926680"/>
+                </a:lnTo>
+                <a:close/>
+                <a:lnTo>
+                  <a:pt x="638851" y="2922694"/>
+                </a:lnTo>
+                <a:close/>
+                <a:lnTo>
+                  <a:pt x="641817" y="2918694"/>
+                </a:lnTo>
+                <a:close/>
+                <a:lnTo>
+                  <a:pt x="644790" y="2914676"/>
+                </a:lnTo>
+                <a:close/>
+                <a:lnTo>
+                  <a:pt x="647776" y="2910639"/>
+                </a:lnTo>
+                <a:close/>
+                <a:lnTo>
+                  <a:pt x="650777" y="2906580"/>
+                </a:lnTo>
+                <a:close/>
+                <a:lnTo>
+                  <a:pt x="653792" y="2902502"/>
+                </a:lnTo>
+                <a:close/>
+                <a:lnTo>
+                  <a:pt x="656821" y="2898406"/>
+                </a:lnTo>
+                <a:close/>
+                <a:lnTo>
+                  <a:pt x="659859" y="2894295"/>
+                </a:lnTo>
+                <a:close/>
+                <a:lnTo>
+                  <a:pt x="662906" y="2890174"/>
+                </a:lnTo>
+                <a:close/>
+                <a:lnTo>
+                  <a:pt x="665958" y="2886043"/>
+                </a:lnTo>
+                <a:close/>
+                <a:lnTo>
+                  <a:pt x="669014" y="2881907"/>
+                </a:lnTo>
+                <a:close/>
+                <a:lnTo>
+                  <a:pt x="672071" y="2877768"/>
+                </a:lnTo>
+                <a:close/>
+                <a:lnTo>
+                  <a:pt x="675127" y="2873627"/>
+                </a:lnTo>
+                <a:close/>
+                <a:lnTo>
+                  <a:pt x="678180" y="2869481"/>
+                </a:lnTo>
+                <a:close/>
+                <a:lnTo>
+                  <a:pt x="681228" y="2865329"/>
+                </a:lnTo>
+                <a:close/>
+                <a:lnTo>
+                  <a:pt x="684270" y="2861168"/>
+                </a:lnTo>
+                <a:close/>
+                <a:lnTo>
+                  <a:pt x="687302" y="2856995"/>
+                </a:lnTo>
+                <a:close/>
+                <a:lnTo>
+                  <a:pt x="690324" y="2852809"/>
+                </a:lnTo>
+                <a:close/>
+                <a:lnTo>
+                  <a:pt x="693333" y="2848606"/>
+                </a:lnTo>
+                <a:close/>
+                <a:lnTo>
+                  <a:pt x="696328" y="2844384"/>
+                </a:lnTo>
+                <a:close/>
+                <a:lnTo>
+                  <a:pt x="699310" y="2840144"/>
+                </a:lnTo>
+                <a:close/>
+                <a:lnTo>
+                  <a:pt x="702283" y="2835885"/>
+                </a:lnTo>
+                <a:close/>
+                <a:lnTo>
+                  <a:pt x="705251" y="2831608"/>
+                </a:lnTo>
+                <a:close/>
+                <a:lnTo>
+                  <a:pt x="708218" y="2827315"/>
+                </a:lnTo>
+                <a:close/>
+                <a:lnTo>
+                  <a:pt x="711189" y="2823006"/>
+                </a:lnTo>
+                <a:close/>
+                <a:lnTo>
+                  <a:pt x="714166" y="2818683"/>
+                </a:lnTo>
+                <a:close/>
+                <a:lnTo>
+                  <a:pt x="717155" y="2814345"/>
+                </a:lnTo>
+                <a:close/>
+                <a:lnTo>
+                  <a:pt x="720158" y="2809993"/>
+                </a:lnTo>
+                <a:close/>
+                <a:lnTo>
+                  <a:pt x="723174" y="2805628"/>
+                </a:lnTo>
+                <a:close/>
+                <a:lnTo>
+                  <a:pt x="726202" y="2801247"/>
+                </a:lnTo>
+                <a:close/>
+                <a:lnTo>
+                  <a:pt x="729240" y="2796851"/>
+                </a:lnTo>
+                <a:close/>
+                <a:lnTo>
+                  <a:pt x="732285" y="2792437"/>
+                </a:lnTo>
+                <a:close/>
+                <a:lnTo>
+                  <a:pt x="735336" y="2788006"/>
+                </a:lnTo>
+                <a:close/>
+                <a:lnTo>
+                  <a:pt x="738391" y="2783555"/>
+                </a:lnTo>
+                <a:close/>
+                <a:lnTo>
+                  <a:pt x="741448" y="2779085"/>
+                </a:lnTo>
+                <a:close/>
+                <a:lnTo>
+                  <a:pt x="744504" y="2774595"/>
+                </a:lnTo>
+                <a:close/>
+                <a:lnTo>
+                  <a:pt x="747559" y="2770089"/>
+                </a:lnTo>
+                <a:close/>
+                <a:lnTo>
+                  <a:pt x="750608" y="2765568"/>
+                </a:lnTo>
+                <a:close/>
+                <a:lnTo>
+                  <a:pt x="753651" y="2761037"/>
+                </a:lnTo>
+                <a:close/>
+                <a:lnTo>
+                  <a:pt x="756684" y="2756498"/>
+                </a:lnTo>
+                <a:close/>
+                <a:lnTo>
+                  <a:pt x="759705" y="2751955"/>
+                </a:lnTo>
+                <a:close/>
+                <a:lnTo>
+                  <a:pt x="762713" y="2747409"/>
+                </a:lnTo>
+                <a:close/>
+                <a:lnTo>
+                  <a:pt x="765705" y="2742865"/>
+                </a:lnTo>
+                <a:close/>
+                <a:lnTo>
+                  <a:pt x="768683" y="2738320"/>
+                </a:lnTo>
+                <a:close/>
+                <a:lnTo>
+                  <a:pt x="771652" y="2733770"/>
+                </a:lnTo>
+                <a:close/>
+                <a:lnTo>
+                  <a:pt x="774617" y="2729209"/>
+                </a:lnTo>
+                <a:close/>
+                <a:lnTo>
+                  <a:pt x="777582" y="2724633"/>
+                </a:lnTo>
+                <a:close/>
+                <a:lnTo>
+                  <a:pt x="780553" y="2720036"/>
+                </a:lnTo>
+                <a:close/>
+                <a:lnTo>
+                  <a:pt x="783535" y="2715414"/>
+                </a:lnTo>
+                <a:close/>
+                <a:lnTo>
+                  <a:pt x="786533" y="2710761"/>
+                </a:lnTo>
+                <a:close/>
+                <a:lnTo>
+                  <a:pt x="789550" y="2706074"/>
+                </a:lnTo>
+                <a:close/>
+                <a:lnTo>
+                  <a:pt x="792583" y="2701355"/>
+                </a:lnTo>
+                <a:close/>
+                <a:lnTo>
+                  <a:pt x="795627" y="2696609"/>
+                </a:lnTo>
+                <a:close/>
+                <a:lnTo>
+                  <a:pt x="798676" y="2691842"/>
+                </a:lnTo>
+                <a:close/>
+                <a:lnTo>
+                  <a:pt x="801725" y="2687059"/>
+                </a:lnTo>
+                <a:close/>
+                <a:lnTo>
+                  <a:pt x="804767" y="2682264"/>
+                </a:lnTo>
+                <a:close/>
+                <a:lnTo>
+                  <a:pt x="807799" y="2677462"/>
+                </a:lnTo>
+                <a:close/>
+                <a:lnTo>
+                  <a:pt x="810814" y="2672659"/>
+                </a:lnTo>
+                <a:close/>
+                <a:lnTo>
+                  <a:pt x="813809" y="2667857"/>
+                </a:lnTo>
+                <a:close/>
+                <a:lnTo>
+                  <a:pt x="816790" y="2663055"/>
+                </a:lnTo>
+                <a:close/>
+                <a:lnTo>
+                  <a:pt x="819760" y="2658248"/>
+                </a:lnTo>
+                <a:close/>
+                <a:lnTo>
+                  <a:pt x="822725" y="2653433"/>
+                </a:lnTo>
+                <a:close/>
+                <a:lnTo>
+                  <a:pt x="825690" y="2648609"/>
+                </a:lnTo>
+                <a:close/>
+                <a:lnTo>
+                  <a:pt x="828659" y="2643772"/>
+                </a:lnTo>
+                <a:close/>
+                <a:lnTo>
+                  <a:pt x="831639" y="2638919"/>
+                </a:lnTo>
+                <a:close/>
+                <a:lnTo>
+                  <a:pt x="834633" y="2634047"/>
+                </a:lnTo>
+                <a:close/>
+                <a:lnTo>
+                  <a:pt x="837642" y="2629154"/>
+                </a:lnTo>
+                <a:close/>
+                <a:lnTo>
+                  <a:pt x="840665" y="2624243"/>
+                </a:lnTo>
+                <a:close/>
+                <a:lnTo>
+                  <a:pt x="843700" y="2619314"/>
+                </a:lnTo>
+                <a:close/>
+                <a:lnTo>
+                  <a:pt x="846743" y="2614367"/>
+                </a:lnTo>
+                <a:close/>
+                <a:lnTo>
+                  <a:pt x="849793" y="2609403"/>
+                </a:lnTo>
+                <a:close/>
+                <a:lnTo>
+                  <a:pt x="852848" y="2604424"/>
+                </a:lnTo>
+                <a:close/>
+                <a:lnTo>
+                  <a:pt x="855904" y="2599430"/>
+                </a:lnTo>
+                <a:close/>
+                <a:lnTo>
+                  <a:pt x="858961" y="2594422"/>
+                </a:lnTo>
+                <a:close/>
+                <a:lnTo>
+                  <a:pt x="862016" y="2589400"/>
+                </a:lnTo>
+                <a:close/>
+                <a:lnTo>
+                  <a:pt x="865066" y="2584363"/>
+                </a:lnTo>
+                <a:close/>
+                <a:lnTo>
+                  <a:pt x="868111" y="2579311"/>
+                </a:lnTo>
+                <a:close/>
+                <a:lnTo>
+                  <a:pt x="871147" y="2574243"/>
+                </a:lnTo>
+                <a:close/>
+                <a:lnTo>
+                  <a:pt x="874174" y="2569160"/>
+                </a:lnTo>
+                <a:close/>
+                <a:lnTo>
+                  <a:pt x="877189" y="2564060"/>
+                </a:lnTo>
+                <a:close/>
+                <a:lnTo>
+                  <a:pt x="880190" y="2558943"/>
+                </a:lnTo>
+                <a:close/>
+                <a:lnTo>
+                  <a:pt x="883177" y="2553810"/>
+                </a:lnTo>
+                <a:close/>
+                <a:lnTo>
+                  <a:pt x="886154" y="2548660"/>
+                </a:lnTo>
+                <a:close/>
+                <a:lnTo>
+                  <a:pt x="889124" y="2543495"/>
+                </a:lnTo>
+                <a:close/>
+                <a:lnTo>
+                  <a:pt x="892091" y="2538316"/>
+                </a:lnTo>
+                <a:close/>
+                <a:lnTo>
+                  <a:pt x="895059" y="2533123"/>
+                </a:lnTo>
+                <a:close/>
+                <a:lnTo>
+                  <a:pt x="898033" y="2527917"/>
+                </a:lnTo>
+                <a:close/>
+                <a:lnTo>
+                  <a:pt x="901016" y="2522700"/>
+                </a:lnTo>
+                <a:close/>
+                <a:lnTo>
+                  <a:pt x="904013" y="2517471"/>
+                </a:lnTo>
+                <a:close/>
+                <a:lnTo>
+                  <a:pt x="907024" y="2512230"/>
+                </a:lnTo>
+                <a:close/>
+                <a:lnTo>
+                  <a:pt x="910047" y="2506974"/>
+                </a:lnTo>
+                <a:close/>
+                <a:lnTo>
+                  <a:pt x="913081" y="2501700"/>
+                </a:lnTo>
+                <a:close/>
+                <a:lnTo>
+                  <a:pt x="916123" y="2496405"/>
+                </a:lnTo>
+                <a:close/>
+                <a:lnTo>
+                  <a:pt x="919172" y="2491086"/>
+                </a:lnTo>
+                <a:close/>
+                <a:lnTo>
+                  <a:pt x="922225" y="2485740"/>
+                </a:lnTo>
+                <a:close/>
+                <a:lnTo>
+                  <a:pt x="925281" y="2480364"/>
+                </a:lnTo>
+                <a:close/>
+                <a:lnTo>
+                  <a:pt x="928338" y="2474956"/>
+                </a:lnTo>
+                <a:close/>
+                <a:lnTo>
+                  <a:pt x="931394" y="2469518"/>
+                </a:lnTo>
+                <a:close/>
+                <a:lnTo>
+                  <a:pt x="934446" y="2464056"/>
+                </a:lnTo>
+                <a:close/>
+                <a:lnTo>
+                  <a:pt x="937491" y="2458575"/>
+                </a:lnTo>
+                <a:close/>
+                <a:lnTo>
+                  <a:pt x="940529" y="2453079"/>
+                </a:lnTo>
+                <a:close/>
+                <a:lnTo>
+                  <a:pt x="943556" y="2447574"/>
+                </a:lnTo>
+                <a:close/>
+                <a:lnTo>
+                  <a:pt x="946570" y="2442065"/>
+                </a:lnTo>
+                <a:close/>
+                <a:lnTo>
+                  <a:pt x="949569" y="2436557"/>
+                </a:lnTo>
+                <a:close/>
+                <a:lnTo>
+                  <a:pt x="952553" y="2431052"/>
+                </a:lnTo>
+                <a:close/>
+                <a:lnTo>
+                  <a:pt x="955525" y="2425546"/>
+                </a:lnTo>
+                <a:close/>
+                <a:lnTo>
+                  <a:pt x="958491" y="2420035"/>
+                </a:lnTo>
+                <a:close/>
+                <a:lnTo>
+                  <a:pt x="961455" y="2414513"/>
+                </a:lnTo>
+                <a:close/>
+                <a:lnTo>
+                  <a:pt x="964423" y="2408976"/>
+                </a:lnTo>
+                <a:close/>
+                <a:lnTo>
+                  <a:pt x="967400" y="2403417"/>
+                </a:lnTo>
+                <a:close/>
+                <a:lnTo>
+                  <a:pt x="970390" y="2397833"/>
+                </a:lnTo>
+                <a:close/>
+                <a:lnTo>
+                  <a:pt x="973398" y="2392218"/>
+                </a:lnTo>
+                <a:close/>
+                <a:lnTo>
+                  <a:pt x="976425" y="2386571"/>
+                </a:lnTo>
+                <a:close/>
+                <a:lnTo>
+                  <a:pt x="979465" y="2380895"/>
+                </a:lnTo>
+                <a:close/>
+                <a:lnTo>
+                  <a:pt x="982512" y="2375193"/>
+                </a:lnTo>
+                <a:close/>
+                <a:lnTo>
+                  <a:pt x="985562" y="2369468"/>
+                </a:lnTo>
+                <a:close/>
+                <a:lnTo>
+                  <a:pt x="988608" y="2363722"/>
+                </a:lnTo>
+                <a:close/>
+                <a:lnTo>
+                  <a:pt x="991645" y="2357960"/>
+                </a:lnTo>
+                <a:close/>
+                <a:lnTo>
+                  <a:pt x="994668" y="2352183"/>
+                </a:lnTo>
+                <a:close/>
+                <a:lnTo>
+                  <a:pt x="997672" y="2346395"/>
+                </a:lnTo>
+                <a:close/>
+                <a:lnTo>
+                  <a:pt x="1000658" y="2340596"/>
+                </a:lnTo>
+                <a:close/>
+                <a:lnTo>
+                  <a:pt x="1003632" y="2334785"/>
+                </a:lnTo>
+                <a:close/>
+                <a:lnTo>
+                  <a:pt x="1006599" y="2328960"/>
+                </a:lnTo>
+                <a:close/>
+                <a:lnTo>
+                  <a:pt x="1009563" y="2323122"/>
+                </a:lnTo>
+                <a:close/>
+                <a:lnTo>
+                  <a:pt x="1012530" y="2317268"/>
+                </a:lnTo>
+                <a:close/>
+                <a:lnTo>
+                  <a:pt x="1015504" y="2311399"/>
+                </a:lnTo>
+                <a:close/>
+                <a:lnTo>
+                  <a:pt x="1018491" y="2305512"/>
+                </a:lnTo>
+                <a:close/>
+                <a:lnTo>
+                  <a:pt x="1021494" y="2299608"/>
+                </a:lnTo>
+                <a:close/>
+                <a:lnTo>
+                  <a:pt x="1024512" y="2293688"/>
+                </a:lnTo>
+                <a:close/>
+                <a:lnTo>
+                  <a:pt x="1027542" y="2287751"/>
+                </a:lnTo>
+                <a:close/>
+                <a:lnTo>
+                  <a:pt x="1030582" y="2281799"/>
+                </a:lnTo>
+                <a:close/>
+                <a:lnTo>
+                  <a:pt x="1033629" y="2275832"/>
+                </a:lnTo>
+                <a:close/>
+                <a:lnTo>
+                  <a:pt x="1036682" y="2269852"/>
+                </a:lnTo>
+                <a:close/>
+                <a:lnTo>
+                  <a:pt x="1039738" y="2263860"/>
+                </a:lnTo>
+                <a:close/>
+                <a:lnTo>
+                  <a:pt x="1042795" y="2257855"/>
+                </a:lnTo>
+                <a:close/>
+                <a:lnTo>
+                  <a:pt x="1045851" y="2251838"/>
+                </a:lnTo>
+                <a:close/>
+                <a:lnTo>
+                  <a:pt x="1048903" y="2245807"/>
+                </a:lnTo>
+                <a:close/>
+                <a:lnTo>
+                  <a:pt x="1051951" y="2239758"/>
+                </a:lnTo>
+                <a:close/>
+                <a:lnTo>
+                  <a:pt x="1054991" y="2233690"/>
+                </a:lnTo>
+                <a:close/>
+                <a:lnTo>
+                  <a:pt x="1058022" y="2227599"/>
+                </a:lnTo>
+                <a:close/>
+                <a:lnTo>
+                  <a:pt x="1061043" y="2221484"/>
+                </a:lnTo>
+                <a:close/>
+                <a:lnTo>
+                  <a:pt x="1064050" y="2215342"/>
+                </a:lnTo>
+                <a:close/>
+                <a:lnTo>
+                  <a:pt x="1067043" y="2209171"/>
+                </a:lnTo>
+                <a:close/>
+                <a:lnTo>
+                  <a:pt x="1070024" y="2202972"/>
+                </a:lnTo>
+                <a:close/>
+                <a:lnTo>
+                  <a:pt x="1072996" y="2196748"/>
+                </a:lnTo>
+                <a:close/>
+                <a:lnTo>
+                  <a:pt x="1075964" y="2190502"/>
+                </a:lnTo>
+                <a:close/>
+                <a:lnTo>
+                  <a:pt x="1078931" y="2184236"/>
+                </a:lnTo>
+                <a:close/>
+                <a:lnTo>
+                  <a:pt x="1081902" y="2177954"/>
+                </a:lnTo>
+                <a:close/>
+                <a:lnTo>
+                  <a:pt x="1084881" y="2171658"/>
+                </a:lnTo>
+                <a:close/>
+                <a:lnTo>
+                  <a:pt x="1087871" y="2165352"/>
+                </a:lnTo>
+                <a:close/>
+                <a:lnTo>
+                  <a:pt x="1090876" y="2159037"/>
+                </a:lnTo>
+                <a:close/>
+                <a:lnTo>
+                  <a:pt x="1093894" y="2152710"/>
+                </a:lnTo>
+                <a:close/>
+                <a:lnTo>
+                  <a:pt x="1096923" y="2146370"/>
+                </a:lnTo>
+                <a:close/>
+                <a:lnTo>
+                  <a:pt x="1099962" y="2140012"/>
+                </a:lnTo>
+                <a:close/>
+                <a:lnTo>
+                  <a:pt x="1103008" y="2133634"/>
+                </a:lnTo>
+                <a:close/>
+                <a:lnTo>
+                  <a:pt x="1106060" y="2127233"/>
+                </a:lnTo>
+                <a:close/>
+                <a:lnTo>
+                  <a:pt x="1109115" y="2120806"/>
+                </a:lnTo>
+                <a:close/>
+                <a:lnTo>
+                  <a:pt x="1112172" y="2114349"/>
+                </a:lnTo>
+                <a:close/>
+                <a:lnTo>
+                  <a:pt x="1115228" y="2107864"/>
+                </a:lnTo>
+                <a:close/>
+                <a:lnTo>
+                  <a:pt x="1118282" y="2101351"/>
+                </a:lnTo>
+                <a:close/>
+                <a:lnTo>
+                  <a:pt x="1121331" y="2094815"/>
+                </a:lnTo>
+                <a:close/>
+                <a:lnTo>
+                  <a:pt x="1124372" y="2088258"/>
+                </a:lnTo>
+                <a:close/>
+                <a:lnTo>
+                  <a:pt x="1127404" y="2081683"/>
+                </a:lnTo>
+                <a:close/>
+                <a:lnTo>
+                  <a:pt x="1130424" y="2075094"/>
+                </a:lnTo>
+                <a:close/>
+                <a:lnTo>
+                  <a:pt x="1133430" y="2068493"/>
+                </a:lnTo>
+                <a:close/>
+                <a:lnTo>
+                  <a:pt x="1136420" y="2061882"/>
+                </a:lnTo>
+                <a:close/>
+                <a:lnTo>
+                  <a:pt x="1139396" y="2055262"/>
+                </a:lnTo>
+                <a:close/>
+                <a:lnTo>
+                  <a:pt x="1142364" y="2048629"/>
+                </a:lnTo>
+                <a:close/>
+                <a:lnTo>
+                  <a:pt x="1145329" y="2041980"/>
+                </a:lnTo>
+                <a:close/>
+                <a:lnTo>
+                  <a:pt x="1148295" y="2035312"/>
+                </a:lnTo>
+                <a:close/>
+                <a:lnTo>
+                  <a:pt x="1151267" y="2028622"/>
+                </a:lnTo>
+                <a:close/>
+                <a:lnTo>
+                  <a:pt x="1154250" y="2021907"/>
+                </a:lnTo>
+                <a:close/>
+                <a:lnTo>
+                  <a:pt x="1157250" y="2015165"/>
+                </a:lnTo>
+                <a:close/>
+                <a:lnTo>
+                  <a:pt x="1160270" y="2008392"/>
+                </a:lnTo>
+                <a:close/>
+                <a:lnTo>
+                  <a:pt x="1163305" y="2001592"/>
+                </a:lnTo>
+                <a:close/>
+                <a:lnTo>
+                  <a:pt x="1166349" y="1994767"/>
+                </a:lnTo>
+                <a:close/>
+                <a:lnTo>
+                  <a:pt x="1169399" y="1987920"/>
+                </a:lnTo>
+                <a:close/>
+                <a:lnTo>
+                  <a:pt x="1172447" y="1981054"/>
+                </a:lnTo>
+                <a:close/>
+                <a:lnTo>
+                  <a:pt x="1175489" y="1974171"/>
+                </a:lnTo>
+                <a:close/>
+                <a:lnTo>
+                  <a:pt x="1178519" y="1967275"/>
+                </a:lnTo>
+                <a:close/>
+                <a:lnTo>
+                  <a:pt x="1181531" y="1960368"/>
+                </a:lnTo>
+                <a:close/>
+                <a:lnTo>
+                  <a:pt x="1184524" y="1953451"/>
+                </a:lnTo>
+                <a:close/>
+                <a:lnTo>
+                  <a:pt x="1187503" y="1946522"/>
+                </a:lnTo>
+                <a:close/>
+                <a:lnTo>
+                  <a:pt x="1190472" y="1939579"/>
+                </a:lnTo>
+                <a:close/>
+                <a:lnTo>
+                  <a:pt x="1193437" y="1932619"/>
+                </a:lnTo>
+                <a:close/>
+                <a:lnTo>
+                  <a:pt x="1196402" y="1925640"/>
+                </a:lnTo>
+                <a:close/>
+                <a:lnTo>
+                  <a:pt x="1199373" y="1918639"/>
+                </a:lnTo>
+                <a:close/>
+                <a:lnTo>
+                  <a:pt x="1202354" y="1911615"/>
+                </a:lnTo>
+                <a:close/>
+                <a:lnTo>
+                  <a:pt x="1205350" y="1904564"/>
+                </a:lnTo>
+                <a:close/>
+                <a:lnTo>
+                  <a:pt x="1208361" y="1897487"/>
+                </a:lnTo>
+                <a:close/>
+                <a:lnTo>
+                  <a:pt x="1211386" y="1890383"/>
+                </a:lnTo>
+                <a:close/>
+                <a:lnTo>
+                  <a:pt x="1214421" y="1883254"/>
+                </a:lnTo>
+                <a:close/>
+                <a:lnTo>
+                  <a:pt x="1217466" y="1876101"/>
+                </a:lnTo>
+                <a:close/>
+                <a:lnTo>
+                  <a:pt x="1220517" y="1868923"/>
+                </a:lnTo>
+                <a:close/>
+                <a:lnTo>
+                  <a:pt x="1223572" y="1861721"/>
+                </a:lnTo>
+                <a:close/>
+                <a:lnTo>
+                  <a:pt x="1226628" y="1854496"/>
+                </a:lnTo>
+                <a:close/>
+                <a:lnTo>
+                  <a:pt x="1229685" y="1847249"/>
+                </a:lnTo>
+                <a:close/>
+                <a:lnTo>
+                  <a:pt x="1232739" y="1839979"/>
+                </a:lnTo>
+                <a:close/>
+                <a:lnTo>
+                  <a:pt x="1235789" y="1832687"/>
+                </a:lnTo>
+                <a:close/>
+                <a:lnTo>
+                  <a:pt x="1238833" y="1825372"/>
+                </a:lnTo>
+                <a:close/>
+                <a:lnTo>
+                  <a:pt x="1241868" y="1818035"/>
+                </a:lnTo>
+                <a:close/>
+                <a:lnTo>
+                  <a:pt x="1244893" y="1810675"/>
+                </a:lnTo>
+                <a:close/>
+                <a:lnTo>
+                  <a:pt x="1247907" y="1803292"/>
+                </a:lnTo>
+                <a:close/>
+                <a:lnTo>
+                  <a:pt x="1250906" y="1795887"/>
+                </a:lnTo>
+                <a:close/>
+                <a:lnTo>
+                  <a:pt x="1253892" y="1788459"/>
+                </a:lnTo>
+                <a:close/>
+                <a:lnTo>
+                  <a:pt x="1256867" y="1781007"/>
+                </a:lnTo>
+                <a:close/>
+                <a:lnTo>
+                  <a:pt x="1259836" y="1773532"/>
+                </a:lnTo>
+                <a:close/>
+                <a:lnTo>
+                  <a:pt x="1262803" y="1766033"/>
+                </a:lnTo>
+                <a:close/>
+                <a:lnTo>
+                  <a:pt x="1265772" y="1758509"/>
+                </a:lnTo>
+                <a:close/>
+                <a:lnTo>
+                  <a:pt x="1268747" y="1750959"/>
+                </a:lnTo>
+                <a:close/>
+                <a:lnTo>
+                  <a:pt x="1271732" y="1743384"/>
+                </a:lnTo>
+                <a:close/>
+                <a:lnTo>
+                  <a:pt x="1274730" y="1735782"/>
+                </a:lnTo>
+                <a:close/>
+                <a:lnTo>
+                  <a:pt x="1277743" y="1728156"/>
+                </a:lnTo>
+                <a:close/>
+                <a:lnTo>
+                  <a:pt x="1280767" y="1720506"/>
+                </a:lnTo>
+                <a:close/>
+                <a:lnTo>
+                  <a:pt x="1283802" y="1712835"/>
+                </a:lnTo>
+                <a:close/>
+                <a:lnTo>
+                  <a:pt x="1286845" y="1705145"/>
+                </a:lnTo>
+                <a:close/>
+                <a:lnTo>
+                  <a:pt x="1289895" y="1697437"/>
+                </a:lnTo>
+                <a:close/>
+                <a:lnTo>
+                  <a:pt x="1292949" y="1689715"/>
+                </a:lnTo>
+                <a:close/>
+                <a:lnTo>
+                  <a:pt x="1296005" y="1681979"/>
+                </a:lnTo>
+                <a:close/>
+                <a:lnTo>
+                  <a:pt x="1299062" y="1674231"/>
+                </a:lnTo>
+                <a:close/>
+                <a:lnTo>
+                  <a:pt x="1302117" y="1666471"/>
+                </a:lnTo>
+                <a:close/>
+                <a:lnTo>
+                  <a:pt x="1305168" y="1658697"/>
+                </a:lnTo>
+                <a:close/>
+                <a:lnTo>
+                  <a:pt x="1308213" y="1650908"/>
+                </a:lnTo>
+                <a:close/>
+                <a:lnTo>
+                  <a:pt x="1311250" y="1643102"/>
+                </a:lnTo>
+                <a:close/>
+                <a:lnTo>
+                  <a:pt x="1314275" y="1635278"/>
+                </a:lnTo>
+                <a:close/>
+                <a:lnTo>
+                  <a:pt x="1317287" y="1627434"/>
+                </a:lnTo>
+                <a:close/>
+                <a:lnTo>
+                  <a:pt x="1320284" y="1619569"/>
+                </a:lnTo>
+                <a:close/>
+                <a:lnTo>
+                  <a:pt x="1323266" y="1611681"/>
+                </a:lnTo>
+                <a:close/>
+                <a:lnTo>
+                  <a:pt x="1326237" y="1603769"/>
+                </a:lnTo>
+                <a:close/>
+                <a:lnTo>
+                  <a:pt x="1329203" y="1595829"/>
+                </a:lnTo>
+                <a:close/>
+                <a:lnTo>
+                  <a:pt x="1332167" y="1587859"/>
+                </a:lnTo>
+                <a:close/>
+                <a:lnTo>
+                  <a:pt x="1335136" y="1579857"/>
+                </a:lnTo>
+                <a:close/>
+                <a:lnTo>
+                  <a:pt x="1338114" y="1571821"/>
+                </a:lnTo>
+                <a:close/>
+                <a:lnTo>
+                  <a:pt x="1341106" y="1563747"/>
+                </a:lnTo>
+                <a:close/>
+                <a:lnTo>
+                  <a:pt x="1344117" y="1555635"/>
+                </a:lnTo>
+                <a:close/>
+                <a:lnTo>
+                  <a:pt x="1347146" y="1547485"/>
+                </a:lnTo>
+                <a:close/>
+                <a:lnTo>
+                  <a:pt x="1350187" y="1539303"/>
+                </a:lnTo>
+                <a:close/>
+                <a:lnTo>
+                  <a:pt x="1353235" y="1531093"/>
+                </a:lnTo>
+                <a:close/>
+                <a:lnTo>
+                  <a:pt x="1356285" y="1522860"/>
+                </a:lnTo>
+                <a:close/>
+                <a:lnTo>
+                  <a:pt x="1359330" y="1514609"/>
+                </a:lnTo>
+                <a:close/>
+                <a:lnTo>
+                  <a:pt x="1362366" y="1506345"/>
+                </a:lnTo>
+                <a:close/>
+                <a:lnTo>
+                  <a:pt x="1365386" y="1498073"/>
+                </a:lnTo>
+                <a:close/>
+                <a:lnTo>
+                  <a:pt x="1368387" y="1489796"/>
+                </a:lnTo>
+                <a:close/>
+                <a:lnTo>
+                  <a:pt x="1371372" y="1481512"/>
+                </a:lnTo>
+                <a:close/>
+                <a:lnTo>
+                  <a:pt x="1374345" y="1473215"/>
+                </a:lnTo>
+                <a:close/>
+                <a:lnTo>
+                  <a:pt x="1377311" y="1464901"/>
+                </a:lnTo>
+                <a:close/>
+                <a:lnTo>
+                  <a:pt x="1380275" y="1456565"/>
+                </a:lnTo>
+                <a:close/>
+                <a:lnTo>
+                  <a:pt x="1383243" y="1448201"/>
+                </a:lnTo>
+                <a:close/>
+                <a:lnTo>
+                  <a:pt x="1386219" y="1439805"/>
+                </a:lnTo>
+                <a:close/>
+                <a:lnTo>
+                  <a:pt x="1389208" y="1431373"/>
+                </a:lnTo>
+                <a:close/>
+                <a:lnTo>
+                  <a:pt x="1392213" y="1422900"/>
+                </a:lnTo>
+                <a:close/>
+                <a:lnTo>
+                  <a:pt x="1395232" y="1414390"/>
+                </a:lnTo>
+                <a:close/>
+                <a:lnTo>
+                  <a:pt x="1398263" y="1405845"/>
+                </a:lnTo>
+                <a:close/>
+                <a:lnTo>
+                  <a:pt x="1401304" y="1397269"/>
+                </a:lnTo>
+                <a:close/>
+                <a:lnTo>
+                  <a:pt x="1404352" y="1388663"/>
+                </a:lnTo>
+                <a:close/>
+                <a:lnTo>
+                  <a:pt x="1407406" y="1380031"/>
+                </a:lnTo>
+                <a:close/>
+                <a:lnTo>
+                  <a:pt x="1410462" y="1371376"/>
+                </a:lnTo>
+                <a:close/>
+                <a:lnTo>
+                  <a:pt x="1413519" y="1362700"/>
+                </a:lnTo>
+                <a:close/>
+                <a:lnTo>
+                  <a:pt x="1416574" y="1354004"/>
+                </a:lnTo>
+                <a:close/>
+                <a:lnTo>
+                  <a:pt x="1419626" y="1345289"/>
+                </a:lnTo>
+                <a:close/>
+                <a:lnTo>
+                  <a:pt x="1422673" y="1336554"/>
+                </a:lnTo>
+                <a:close/>
+                <a:lnTo>
+                  <a:pt x="1425712" y="1327798"/>
+                </a:lnTo>
+                <a:close/>
+                <a:lnTo>
+                  <a:pt x="1428742" y="1319022"/>
+                </a:lnTo>
+                <a:close/>
+                <a:lnTo>
+                  <a:pt x="1431761" y="1310226"/>
+                </a:lnTo>
+                <a:close/>
+                <a:lnTo>
+                  <a:pt x="1434767" y="1301409"/>
+                </a:lnTo>
+                <a:close/>
+                <a:lnTo>
+                  <a:pt x="1437758" y="1292571"/>
+                </a:lnTo>
+                <a:close/>
+                <a:lnTo>
+                  <a:pt x="1440737" y="1283710"/>
+                </a:lnTo>
+                <a:close/>
+                <a:lnTo>
+                  <a:pt x="1443708" y="1274824"/>
+                </a:lnTo>
+                <a:close/>
+                <a:lnTo>
+                  <a:pt x="1446676" y="1265912"/>
+                </a:lnTo>
+                <a:close/>
+                <a:lnTo>
+                  <a:pt x="1449644" y="1256971"/>
+                </a:lnTo>
+                <a:close/>
+                <a:lnTo>
+                  <a:pt x="1452615" y="1247999"/>
+                </a:lnTo>
+                <a:close/>
+                <a:lnTo>
+                  <a:pt x="1455595" y="1238995"/>
+                </a:lnTo>
+                <a:close/>
+                <a:lnTo>
+                  <a:pt x="1458587" y="1229956"/>
+                </a:lnTo>
+                <a:close/>
+                <a:lnTo>
+                  <a:pt x="1461594" y="1220882"/>
+                </a:lnTo>
+                <a:close/>
+                <a:lnTo>
+                  <a:pt x="1464613" y="1211774"/>
+                </a:lnTo>
+                <a:close/>
+                <a:lnTo>
+                  <a:pt x="1467644" y="1202634"/>
+                </a:lnTo>
+                <a:close/>
+                <a:lnTo>
+                  <a:pt x="1470684" y="1193465"/>
+                </a:lnTo>
+                <a:close/>
+                <a:lnTo>
+                  <a:pt x="1473731" y="1184268"/>
+                </a:lnTo>
+                <a:close/>
+                <a:lnTo>
+                  <a:pt x="1476783" y="1175046"/>
+                </a:lnTo>
+                <a:close/>
+                <a:lnTo>
+                  <a:pt x="1479839" y="1165800"/>
+                </a:lnTo>
+                <a:close/>
+                <a:lnTo>
+                  <a:pt x="1482896" y="1156533"/>
+                </a:lnTo>
+                <a:close/>
+                <a:lnTo>
+                  <a:pt x="1485952" y="1147245"/>
+                </a:lnTo>
+                <a:close/>
+                <a:lnTo>
+                  <a:pt x="1489005" y="1137937"/>
+                </a:lnTo>
+                <a:close/>
+                <a:lnTo>
+                  <a:pt x="1492053" y="1128608"/>
+                </a:lnTo>
+                <a:close/>
+                <a:lnTo>
+                  <a:pt x="1495093" y="1119257"/>
+                </a:lnTo>
+                <a:close/>
+                <a:lnTo>
+                  <a:pt x="1498124" y="1109886"/>
+                </a:lnTo>
+                <a:close/>
+                <a:lnTo>
+                  <a:pt x="1501142" y="1100493"/>
+                </a:lnTo>
+                <a:close/>
+                <a:lnTo>
+                  <a:pt x="1504146" y="1091079"/>
+                </a:lnTo>
+                <a:close/>
+                <a:lnTo>
+                  <a:pt x="1507134" y="1081643"/>
+                </a:lnTo>
+                <a:close/>
+                <a:lnTo>
+                  <a:pt x="1510109" y="1072184"/>
+                </a:lnTo>
+                <a:close/>
+                <a:lnTo>
+                  <a:pt x="1513077" y="1062701"/>
+                </a:lnTo>
+                <a:close/>
+                <a:lnTo>
+                  <a:pt x="1516041" y="1053193"/>
+                </a:lnTo>
+                <a:close/>
+                <a:lnTo>
+                  <a:pt x="1519007" y="1043657"/>
+                </a:lnTo>
+                <a:close/>
+                <a:lnTo>
+                  <a:pt x="1521981" y="1034093"/>
+                </a:lnTo>
+                <a:close/>
+                <a:lnTo>
+                  <a:pt x="1524966" y="1024499"/>
+                </a:lnTo>
+                <a:close/>
+                <a:lnTo>
+                  <a:pt x="1527968" y="1014873"/>
+                </a:lnTo>
+                <a:close/>
+                <a:lnTo>
+                  <a:pt x="1530990" y="1005215"/>
+                </a:lnTo>
+                <a:close/>
+                <a:lnTo>
+                  <a:pt x="1534026" y="995524"/>
+                </a:lnTo>
+                <a:close/>
+                <a:lnTo>
+                  <a:pt x="1537072" y="985800"/>
+                </a:lnTo>
+                <a:close/>
+                <a:lnTo>
+                  <a:pt x="1540122" y="976042"/>
+                </a:lnTo>
+                <a:close/>
+                <a:lnTo>
+                  <a:pt x="1543170" y="966252"/>
+                </a:lnTo>
+                <a:close/>
+                <a:lnTo>
+                  <a:pt x="1546210" y="956428"/>
+                </a:lnTo>
+                <a:close/>
+                <a:lnTo>
+                  <a:pt x="1549238" y="946570"/>
+                </a:lnTo>
+                <a:close/>
+                <a:lnTo>
+                  <a:pt x="1552248" y="936679"/>
+                </a:lnTo>
+                <a:close/>
+                <a:lnTo>
+                  <a:pt x="1555239" y="926754"/>
+                </a:lnTo>
+                <a:close/>
+                <a:lnTo>
+                  <a:pt x="1558216" y="916799"/>
+                </a:lnTo>
+                <a:close/>
+                <a:lnTo>
+                  <a:pt x="1561184" y="906815"/>
+                </a:lnTo>
+                <a:close/>
+                <a:lnTo>
+                  <a:pt x="1564149" y="896805"/>
+                </a:lnTo>
+                <a:close/>
+                <a:lnTo>
+                  <a:pt x="1567114" y="886770"/>
+                </a:lnTo>
+                <a:close/>
+                <a:lnTo>
+                  <a:pt x="1570086" y="876713"/>
+                </a:lnTo>
+                <a:close/>
+                <a:lnTo>
+                  <a:pt x="1573069" y="866635"/>
+                </a:lnTo>
+                <a:close/>
+                <a:lnTo>
+                  <a:pt x="1576067" y="856539"/>
+                </a:lnTo>
+                <a:close/>
+                <a:lnTo>
+                  <a:pt x="1579080" y="846423"/>
+                </a:lnTo>
+                <a:close/>
+                <a:lnTo>
+                  <a:pt x="1582106" y="836286"/>
+                </a:lnTo>
+                <a:close/>
+                <a:lnTo>
+                  <a:pt x="1585143" y="826124"/>
+                </a:lnTo>
+                <a:close/>
+                <a:lnTo>
+                  <a:pt x="1588189" y="815937"/>
+                </a:lnTo>
+                <a:close/>
+                <a:lnTo>
+                  <a:pt x="1591240" y="805721"/>
+                </a:lnTo>
+                <a:close/>
+                <a:lnTo>
+                  <a:pt x="1594295" y="795475"/>
+                </a:lnTo>
+                <a:close/>
+                <a:lnTo>
+                  <a:pt x="1597352" y="785196"/>
+                </a:lnTo>
+                <a:close/>
+                <a:lnTo>
+                  <a:pt x="1600409" y="774884"/>
+                </a:lnTo>
+                <a:close/>
+                <a:lnTo>
+                  <a:pt x="1603462" y="764537"/>
+                </a:lnTo>
+                <a:close/>
+                <a:lnTo>
+                  <a:pt x="1606512" y="754157"/>
+                </a:lnTo>
+                <a:close/>
+                <a:lnTo>
+                  <a:pt x="1609554" y="743744"/>
+                </a:lnTo>
+                <a:close/>
+                <a:lnTo>
+                  <a:pt x="1612589" y="733299"/>
+                </a:lnTo>
+                <a:close/>
+                <a:lnTo>
+                  <a:pt x="1615613" y="722822"/>
+                </a:lnTo>
+                <a:close/>
+                <a:lnTo>
+                  <a:pt x="1618624" y="712315"/>
+                </a:lnTo>
+                <a:close/>
+                <a:lnTo>
+                  <a:pt x="1621622" y="701777"/>
+                </a:lnTo>
+                <a:close/>
+                <a:lnTo>
+                  <a:pt x="1624605" y="691209"/>
+                </a:lnTo>
+                <a:close/>
+                <a:lnTo>
+                  <a:pt x="1627580" y="680611"/>
+                </a:lnTo>
+                <a:close/>
+                <a:lnTo>
+                  <a:pt x="1630549" y="669982"/>
+                </a:lnTo>
+                <a:close/>
+                <a:lnTo>
+                  <a:pt x="1633516" y="659323"/>
+                </a:lnTo>
+                <a:close/>
+                <a:lnTo>
+                  <a:pt x="1636485" y="648632"/>
+                </a:lnTo>
+                <a:close/>
+                <a:lnTo>
+                  <a:pt x="1639461" y="637911"/>
+                </a:lnTo>
+                <a:close/>
+                <a:lnTo>
+                  <a:pt x="1642447" y="627159"/>
+                </a:lnTo>
+                <a:close/>
+                <a:lnTo>
+                  <a:pt x="1645448" y="616376"/>
+                </a:lnTo>
+                <a:close/>
+                <a:lnTo>
+                  <a:pt x="1648462" y="605561"/>
+                </a:lnTo>
+                <a:close/>
+                <a:lnTo>
+                  <a:pt x="1651488" y="594716"/>
+                </a:lnTo>
+                <a:close/>
+                <a:lnTo>
+                  <a:pt x="1654524" y="583839"/>
+                </a:lnTo>
+                <a:close/>
+                <a:lnTo>
+                  <a:pt x="1657568" y="572931"/>
+                </a:lnTo>
+                <a:close/>
+                <a:lnTo>
+                  <a:pt x="1660618" y="561992"/>
+                </a:lnTo>
+                <a:close/>
+                <a:lnTo>
+                  <a:pt x="1663673" y="551022"/>
+                </a:lnTo>
+                <a:close/>
+                <a:lnTo>
+                  <a:pt x="1666729" y="540020"/>
+                </a:lnTo>
+                <a:close/>
+                <a:lnTo>
+                  <a:pt x="1669786" y="528988"/>
+                </a:lnTo>
+                <a:close/>
+                <a:lnTo>
+                  <a:pt x="1672841" y="517926"/>
+                </a:lnTo>
+                <a:close/>
+                <a:lnTo>
+                  <a:pt x="1675891" y="506832"/>
+                </a:lnTo>
+                <a:close/>
+                <a:lnTo>
+                  <a:pt x="1678935" y="495707"/>
+                </a:lnTo>
+                <a:close/>
+                <a:lnTo>
+                  <a:pt x="1681970" y="484551"/>
+                </a:lnTo>
+                <a:close/>
+                <a:lnTo>
+                  <a:pt x="1684994" y="473364"/>
+                </a:lnTo>
+                <a:close/>
+                <a:lnTo>
+                  <a:pt x="1688005" y="462146"/>
+                </a:lnTo>
+                <a:close/>
+                <a:lnTo>
+                  <a:pt x="1691000" y="450897"/>
+                </a:lnTo>
+                <a:close/>
+                <a:lnTo>
+                  <a:pt x="1693980" y="439617"/>
+                </a:lnTo>
+                <a:close/>
+                <a:lnTo>
+                  <a:pt x="1696950" y="428306"/>
+                </a:lnTo>
+                <a:close/>
+                <a:lnTo>
+                  <a:pt x="1699915" y="416964"/>
+                </a:lnTo>
+                <a:close/>
+                <a:lnTo>
+                  <a:pt x="1702880" y="405591"/>
+                </a:lnTo>
+                <a:close/>
+                <a:lnTo>
+                  <a:pt x="1705849" y="394187"/>
+                </a:lnTo>
+                <a:close/>
+                <a:lnTo>
+                  <a:pt x="1708829" y="382752"/>
+                </a:lnTo>
+                <a:close/>
+                <a:lnTo>
+                  <a:pt x="1711823" y="371286"/>
+                </a:lnTo>
+                <a:close/>
+                <a:lnTo>
+                  <a:pt x="1714837" y="359789"/>
+                </a:lnTo>
+                <a:close/>
+                <a:lnTo>
+                  <a:pt x="1717867" y="348261"/>
+                </a:lnTo>
+                <a:close/>
+                <a:lnTo>
+                  <a:pt x="1720910" y="336703"/>
+                </a:lnTo>
+                <a:close/>
+                <a:lnTo>
+                  <a:pt x="1723958" y="325113"/>
+                </a:lnTo>
+                <a:close/>
+                <a:lnTo>
+                  <a:pt x="1727007" y="313492"/>
+                </a:lnTo>
+                <a:close/>
+                <a:lnTo>
+                  <a:pt x="1730052" y="301840"/>
+                </a:lnTo>
+                <a:close/>
+                <a:lnTo>
+                  <a:pt x="1733086" y="290156"/>
+                </a:lnTo>
+                <a:close/>
+                <a:lnTo>
+                  <a:pt x="1736104" y="278441"/>
+                </a:lnTo>
+                <a:close/>
+                <a:lnTo>
+                  <a:pt x="1739103" y="266694"/>
+                </a:lnTo>
+                <a:close/>
+                <a:lnTo>
+                  <a:pt x="1742086" y="254917"/>
+                </a:lnTo>
+                <a:close/>
+                <a:lnTo>
+                  <a:pt x="1745057" y="243108"/>
+                </a:lnTo>
+                <a:close/>
+                <a:lnTo>
+                  <a:pt x="1748023" y="231269"/>
+                </a:lnTo>
+                <a:close/>
+                <a:lnTo>
+                  <a:pt x="1750988" y="219399"/>
+                </a:lnTo>
+                <a:close/>
+                <a:lnTo>
+                  <a:pt x="1753956" y="207500"/>
+                </a:lnTo>
+                <a:close/>
+                <a:lnTo>
+                  <a:pt x="1756933" y="195571"/>
+                </a:lnTo>
+                <a:close/>
+                <a:lnTo>
+                  <a:pt x="1759924" y="183613"/>
+                </a:lnTo>
+                <a:close/>
+                <a:lnTo>
+                  <a:pt x="1762931" y="171626"/>
+                </a:lnTo>
+                <a:close/>
+                <a:lnTo>
+                  <a:pt x="1765951" y="159608"/>
+                </a:lnTo>
+                <a:close/>
+                <a:lnTo>
+                  <a:pt x="1768983" y="147558"/>
+                </a:lnTo>
+                <a:close/>
+                <a:lnTo>
+                  <a:pt x="1772025" y="135475"/>
+                </a:lnTo>
+                <a:close/>
+                <a:lnTo>
+                  <a:pt x="1775074" y="123357"/>
+                </a:lnTo>
+                <a:close/>
+                <a:lnTo>
+                  <a:pt x="1778128" y="111204"/>
+                </a:lnTo>
+                <a:close/>
+                <a:lnTo>
+                  <a:pt x="1781186" y="99013"/>
+                </a:lnTo>
+                <a:close/>
+                <a:lnTo>
+                  <a:pt x="1784243" y="86784"/>
+                </a:lnTo>
+                <a:close/>
+                <a:lnTo>
+                  <a:pt x="1787300" y="74516"/>
+                </a:lnTo>
+                <a:close/>
+                <a:lnTo>
+                  <a:pt x="1790352" y="62206"/>
+                </a:lnTo>
+                <a:close/>
+                <a:lnTo>
+                  <a:pt x="1793399" y="49854"/>
+                </a:lnTo>
+                <a:close/>
+                <a:lnTo>
+                  <a:pt x="1796438" y="37459"/>
+                </a:lnTo>
+                <a:close/>
+                <a:lnTo>
+                  <a:pt x="1799466" y="25019"/>
+                </a:lnTo>
+                <a:close/>
+                <a:lnTo>
+                  <a:pt x="1802482" y="12533"/>
+                </a:lnTo>
+                <a:close/>
+                <a:lnTo>
+                  <a:pt x="1805483" y="0"/>
                 </a:lnTo>
                 <a:close/>
               </a:path>
@@ -5623,8 +5623,8 @@
         </p:nvCxnSpPr>
         <p:spPr>
           <a:xfrm flipV="1">
-            <a:off x="5943600.0" y="162123.11999999965"/>
-            <a:ext cx="0.0" cy="2409626.8800000004"/>
+            <a:off x="6400800.0" y="-379476.0"/>
+            <a:ext cx="0.0" cy="2951226.0"/>
           </a:xfrm>
           <a:prstGeom prst="line">
             <a:avLst/>
@@ -5659,8 +5659,8 @@
         </p:nvCxnSpPr>
         <p:spPr>
           <a:xfrm>
-            <a:off x="4572000.0" y="162123.11999999965"/>
-            <a:ext cx="1371600.0" cy="0.0"/>
+            <a:off x="4572000.0" y="-379476.0"/>
+            <a:ext cx="1828800.0" cy="0.0"/>
           </a:xfrm>
           <a:prstGeom prst="line">
             <a:avLst/>
@@ -5695,7 +5695,7 @@
         </p:nvSpPr>
         <p:spPr>
           <a:xfrm>
-            <a:off x="5854700" y="73223"/>
+            <a:off x="6311900" y="-468376"/>
             <a:ext cx="177800" cy="177800"/>
           </a:xfrm>
           <a:prstGeom prst="ellipse">
@@ -5740,8 +5740,8 @@
         </p:nvCxnSpPr>
         <p:spPr>
           <a:xfrm>
-            <a:off x="5257800.0" y="2571750.0"/>
-            <a:ext cx="594360.0" cy="0.0"/>
+            <a:off x="5257800.0" y="2434590.0"/>
+            <a:ext cx="1051560.0" cy="0.0"/>
           </a:xfrm>
           <a:prstGeom prst="line">
             <a:avLst/>
@@ -5775,8 +5775,8 @@
         </p:nvCxnSpPr>
         <p:spPr>
           <a:xfrm flipH="1">
-            <a:off x="6035040.0" y="2571750.0"/>
-            <a:ext cx="594360.0" cy="0.0"/>
+            <a:off x="6492240.0" y="2434590.0"/>
+            <a:ext cx="1051560.0" cy="0.0"/>
           </a:xfrm>
           <a:prstGeom prst="line">
             <a:avLst/>
@@ -5802,85 +5802,15 @@
           </a:fontRef>
         </p:style>
       </p:cxnSp>
-      <p:cxnSp>
-        <p:nvCxnSpPr>
-          <p:cNvPr id="10" name="Connector 9"/>
-          <p:cNvCxnSpPr/>
-          <p:nvPr/>
-        </p:nvCxnSpPr>
-        <p:spPr>
-          <a:xfrm flipV="1">
-            <a:off x="5623560.0" y="478048.32000000007"/>
-            <a:ext cx="182880.0" cy="360227.8799999999"/>
-          </a:xfrm>
-          <a:prstGeom prst="line">
-            <a:avLst/>
-          </a:prstGeom>
-          <a:ln w="15240">
-            <a:solidFill>
-              <a:srgbClr val="FFFFFF"/>
-            </a:solidFill>
-          </a:ln>
-        </p:spPr>
-        <p:style>
-          <a:lnRef idx="2">
-            <a:schemeClr val="accent1"/>
-          </a:lnRef>
-          <a:fillRef idx="0">
-            <a:schemeClr val="accent1"/>
-          </a:fillRef>
-          <a:effectRef idx="1">
-            <a:schemeClr val="accent1"/>
-          </a:effectRef>
-          <a:fontRef idx="minor">
-            <a:schemeClr val="tx1"/>
-          </a:fontRef>
-        </p:style>
-      </p:cxnSp>
-      <p:cxnSp>
-        <p:nvCxnSpPr>
-          <p:cNvPr id="11" name="Connector 10"/>
-          <p:cNvCxnSpPr/>
-          <p:nvPr/>
-        </p:nvCxnSpPr>
-        <p:spPr>
-          <a:xfrm flipH="1">
-            <a:off x="5989320.0" y="-469452.95999999996"/>
-            <a:ext cx="182880.0" cy="516407.3999999999"/>
-          </a:xfrm>
-          <a:prstGeom prst="line">
-            <a:avLst/>
-          </a:prstGeom>
-          <a:ln w="15240">
-            <a:solidFill>
-              <a:srgbClr val="FFFFFF"/>
-            </a:solidFill>
-          </a:ln>
-        </p:spPr>
-        <p:style>
-          <a:lnRef idx="2">
-            <a:schemeClr val="accent1"/>
-          </a:lnRef>
-          <a:fillRef idx="0">
-            <a:schemeClr val="accent1"/>
-          </a:fillRef>
-          <a:effectRef idx="1">
-            <a:schemeClr val="accent1"/>
-          </a:effectRef>
-          <a:fontRef idx="minor">
-            <a:schemeClr val="tx1"/>
-          </a:fontRef>
-        </p:style>
-      </p:cxnSp>
-      <p:sp>
-        <p:nvSpPr>
-          <p:cNvPr id="12" name="TextBox 11"/>
+      <p:sp>
+        <p:nvSpPr>
+          <p:cNvPr id="10" name="TextBox 9"/>
           <p:cNvSpPr txBox="1"/>
           <p:nvPr/>
         </p:nvSpPr>
         <p:spPr>
           <a:xfrm>
-            <a:off x="5735320" y="-1174750"/>
+            <a:off x="5918200" y="-1631950"/>
             <a:ext cx="1524000" cy="508000"/>
           </a:xfrm>
           <a:prstGeom prst="rect">
@@ -5910,13 +5840,13 @@
       </p:sp>
       <p:sp>
         <p:nvSpPr>
-          <p:cNvPr id="13" name="TextBox 12"/>
+          <p:cNvPr id="11" name="TextBox 10"/>
           <p:cNvSpPr txBox="1"/>
           <p:nvPr/>
         </p:nvSpPr>
         <p:spPr>
           <a:xfrm>
-            <a:off x="5689600" y="2437130"/>
+            <a:off x="3952240" y="-696976"/>
             <a:ext cx="1524000" cy="508000"/>
           </a:xfrm>
           <a:prstGeom prst="rect">
@@ -5939,20 +5869,20 @@
               </a:defRPr>
             </a:pPr>
             <a:r>
-              <a:t>a</a:t>
-            </a:r>
-          </a:p>
-        </p:txBody>
-      </p:sp>
-      <p:sp>
-        <p:nvSpPr>
-          <p:cNvPr id="14" name="TextBox 13"/>
+              <a:t>f(a)</a:t>
+            </a:r>
+          </a:p>
+        </p:txBody>
+      </p:sp>
+      <p:sp>
+        <p:nvSpPr>
+          <p:cNvPr id="12" name="TextBox 11"/>
           <p:cNvSpPr txBox="1"/>
           <p:nvPr/>
         </p:nvSpPr>
         <p:spPr>
           <a:xfrm>
-            <a:off x="4043680" y="-155376"/>
+            <a:off x="6146800" y="2528570"/>
             <a:ext cx="1524000" cy="508000"/>
           </a:xfrm>
           <a:prstGeom prst="rect">
@@ -5975,20 +5905,20 @@
               </a:defRPr>
             </a:pPr>
             <a:r>
-              <a:t>f(a)</a:t>
-            </a:r>
-          </a:p>
-        </p:txBody>
-      </p:sp>
-      <p:sp>
-        <p:nvSpPr>
-          <p:cNvPr id="15" name="TextBox 14"/>
+              <a:t>a</a:t>
+            </a:r>
+          </a:p>
+        </p:txBody>
+      </p:sp>
+      <p:sp>
+        <p:nvSpPr>
+          <p:cNvPr id="13" name="TextBox 12"/>
           <p:cNvSpPr txBox="1"/>
           <p:nvPr/>
         </p:nvSpPr>
         <p:spPr>
           <a:xfrm>
-            <a:off x="4180840" y="2391410"/>
+            <a:off x="4089400" y="2482850"/>
             <a:ext cx="1524000" cy="508000"/>
           </a:xfrm>
           <a:prstGeom prst="rect">

--- a/output/3.pptx
+++ b/output/3.pptx
@@ -3104,8 +3104,8 @@
         </p:nvCxnSpPr>
         <p:spPr>
           <a:xfrm>
-            <a:off x="4114800.0" y="2571750.0"/>
-            <a:ext cx="3657600.0" cy="0.0"/>
+            <a:off x="2286000.0" y="2571750.0"/>
+            <a:ext cx="4572000.0" cy="0.0"/>
           </a:xfrm>
           <a:prstGeom prst="line">
             <a:avLst/>
@@ -3139,7 +3139,7 @@
         </p:nvCxnSpPr>
         <p:spPr>
           <a:xfrm flipV="1">
-            <a:off x="4572000.0" y="-1543050.0"/>
+            <a:off x="4572000.0" y="285750.0"/>
             <a:ext cx="0.0" cy="4572000.0"/>
           </a:xfrm>
           <a:prstGeom prst="line">
@@ -3174,8 +3174,8 @@
         </p:nvSpPr>
         <p:spPr>
           <a:xfrm>
-            <a:off x="4937760" y="-1611173"/>
-            <a:ext cx="1805483" cy="3542386"/>
+            <a:off x="4937760" y="-1218438"/>
+            <a:ext cx="1623060" cy="2665882"/>
           </a:xfrm>
           <a:custGeom>
             <a:avLst/>
@@ -3184,2404 +3184,2404 @@
             <a:cxnLst/>
             <a:rect l="l" t="t" r="r" b="b"/>
             <a:pathLst>
-              <a:path w="1805483" h="3542386">
+              <a:path w="1623060" h="2665882">
                 <a:moveTo>
-                  <a:pt x="0" y="3542386"/>
+                  <a:pt x="0" y="2633472"/>
                 </a:moveTo>
                 <a:lnTo>
-                  <a:pt x="3106" y="3540249"/>
-                </a:lnTo>
-                <a:close/>
-                <a:lnTo>
-                  <a:pt x="6186" y="3538135"/>
-                </a:lnTo>
-                <a:close/>
-                <a:lnTo>
-                  <a:pt x="9243" y="3536039"/>
-                </a:lnTo>
-                <a:close/>
-                <a:lnTo>
-                  <a:pt x="12279" y="3533959"/>
-                </a:lnTo>
-                <a:close/>
-                <a:lnTo>
-                  <a:pt x="15297" y="3531891"/>
-                </a:lnTo>
-                <a:close/>
-                <a:lnTo>
-                  <a:pt x="18300" y="3529832"/>
-                </a:lnTo>
-                <a:close/>
-                <a:lnTo>
-                  <a:pt x="21291" y="3527778"/>
-                </a:lnTo>
-                <a:close/>
-                <a:lnTo>
-                  <a:pt x="24272" y="3525726"/>
-                </a:lnTo>
-                <a:close/>
-                <a:lnTo>
-                  <a:pt x="27246" y="3523674"/>
-                </a:lnTo>
-                <a:close/>
-                <a:lnTo>
-                  <a:pt x="30216" y="3521617"/>
-                </a:lnTo>
-                <a:close/>
-                <a:lnTo>
-                  <a:pt x="33185" y="3519552"/>
-                </a:lnTo>
-                <a:close/>
-                <a:lnTo>
-                  <a:pt x="36155" y="3517477"/>
-                </a:lnTo>
-                <a:close/>
-                <a:lnTo>
-                  <a:pt x="39129" y="3515387"/>
-                </a:lnTo>
-                <a:close/>
-                <a:lnTo>
-                  <a:pt x="42110" y="3513280"/>
-                </a:lnTo>
-                <a:close/>
-                <a:lnTo>
-                  <a:pt x="45101" y="3511151"/>
-                </a:lnTo>
-                <a:close/>
-                <a:lnTo>
-                  <a:pt x="48104" y="3508999"/>
-                </a:lnTo>
-                <a:close/>
-                <a:lnTo>
-                  <a:pt x="51119" y="3506825"/>
-                </a:lnTo>
-                <a:close/>
-                <a:lnTo>
-                  <a:pt x="54144" y="3504632"/>
-                </a:lnTo>
-                <a:close/>
-                <a:lnTo>
-                  <a:pt x="57179" y="3502426"/>
-                </a:lnTo>
-                <a:close/>
-                <a:lnTo>
-                  <a:pt x="60221" y="3500210"/>
-                </a:lnTo>
-                <a:close/>
-                <a:lnTo>
-                  <a:pt x="63270" y="3497990"/>
-                </a:lnTo>
-                <a:close/>
-                <a:lnTo>
-                  <a:pt x="66322" y="3495768"/>
-                </a:lnTo>
-                <a:close/>
-                <a:lnTo>
-                  <a:pt x="69377" y="3493551"/>
-                </a:lnTo>
-                <a:close/>
-                <a:lnTo>
-                  <a:pt x="72433" y="3491340"/>
-                </a:lnTo>
-                <a:close/>
-                <a:lnTo>
-                  <a:pt x="75487" y="3489136"/>
-                </a:lnTo>
-                <a:close/>
-                <a:lnTo>
-                  <a:pt x="78538" y="3486936"/>
-                </a:lnTo>
-                <a:close/>
-                <a:lnTo>
-                  <a:pt x="81583" y="3484738"/>
-                </a:lnTo>
-                <a:close/>
-                <a:lnTo>
-                  <a:pt x="84620" y="3482540"/>
-                </a:lnTo>
-                <a:close/>
-                <a:lnTo>
-                  <a:pt x="87645" y="3480340"/>
-                </a:lnTo>
-                <a:close/>
-                <a:lnTo>
-                  <a:pt x="90658" y="3478135"/>
-                </a:lnTo>
-                <a:close/>
-                <a:lnTo>
-                  <a:pt x="93655" y="3475925"/>
-                </a:lnTo>
-                <a:close/>
-                <a:lnTo>
-                  <a:pt x="96637" y="3473705"/>
-                </a:lnTo>
-                <a:close/>
-                <a:lnTo>
-                  <a:pt x="99608" y="3471476"/>
-                </a:lnTo>
-                <a:close/>
-                <a:lnTo>
-                  <a:pt x="102574" y="3469233"/>
-                </a:lnTo>
-                <a:close/>
-                <a:lnTo>
-                  <a:pt x="105538" y="3466977"/>
-                </a:lnTo>
-                <a:close/>
-                <a:lnTo>
-                  <a:pt x="108507" y="3464704"/>
-                </a:lnTo>
-                <a:close/>
-                <a:lnTo>
-                  <a:pt x="111485" y="3462412"/>
-                </a:lnTo>
-                <a:close/>
-                <a:lnTo>
-                  <a:pt x="114477" y="3460100"/>
-                </a:lnTo>
-                <a:close/>
-                <a:lnTo>
-                  <a:pt x="117488" y="3457766"/>
-                </a:lnTo>
-                <a:close/>
-                <a:lnTo>
-                  <a:pt x="120517" y="3455411"/>
-                </a:lnTo>
-                <a:close/>
-                <a:lnTo>
-                  <a:pt x="123559" y="3453040"/>
-                </a:lnTo>
-                <a:close/>
-                <a:lnTo>
-                  <a:pt x="126607" y="3450656"/>
-                </a:lnTo>
-                <a:close/>
-                <a:lnTo>
-                  <a:pt x="129656" y="3448263"/>
-                </a:lnTo>
-                <a:close/>
-                <a:lnTo>
-                  <a:pt x="132701" y="3445865"/>
-                </a:lnTo>
-                <a:close/>
-                <a:lnTo>
-                  <a:pt x="135737" y="3443467"/>
-                </a:lnTo>
-                <a:close/>
-                <a:lnTo>
-                  <a:pt x="138757" y="3441071"/>
-                </a:lnTo>
-                <a:close/>
-                <a:lnTo>
-                  <a:pt x="141758" y="3438683"/>
-                </a:lnTo>
-                <a:close/>
-                <a:lnTo>
-                  <a:pt x="144742" y="3436300"/>
-                </a:lnTo>
-                <a:close/>
-                <a:lnTo>
-                  <a:pt x="147715" y="3433921"/>
-                </a:lnTo>
-                <a:close/>
-                <a:lnTo>
-                  <a:pt x="150681" y="3431544"/>
-                </a:lnTo>
-                <a:close/>
-                <a:lnTo>
-                  <a:pt x="153646" y="3429167"/>
-                </a:lnTo>
-                <a:close/>
-                <a:lnTo>
-                  <a:pt x="156613" y="3426788"/>
-                </a:lnTo>
-                <a:close/>
-                <a:lnTo>
-                  <a:pt x="159589" y="3424406"/>
-                </a:lnTo>
-                <a:close/>
-                <a:lnTo>
-                  <a:pt x="162578" y="3422017"/>
-                </a:lnTo>
-                <a:close/>
-                <a:lnTo>
-                  <a:pt x="165584" y="3419620"/>
-                </a:lnTo>
-                <a:close/>
-                <a:lnTo>
-                  <a:pt x="168603" y="3417214"/>
-                </a:lnTo>
-                <a:close/>
-                <a:lnTo>
-                  <a:pt x="171634" y="3414794"/>
-                </a:lnTo>
-                <a:close/>
-                <a:lnTo>
-                  <a:pt x="174675" y="3412361"/>
-                </a:lnTo>
-                <a:close/>
-                <a:lnTo>
-                  <a:pt x="177724" y="3409910"/>
-                </a:lnTo>
-                <a:close/>
-                <a:lnTo>
-                  <a:pt x="180777" y="3407440"/>
-                </a:lnTo>
-                <a:close/>
-                <a:lnTo>
-                  <a:pt x="183833" y="3404948"/>
-                </a:lnTo>
-                <a:close/>
-                <a:lnTo>
-                  <a:pt x="186890" y="3402432"/>
-                </a:lnTo>
-                <a:close/>
-                <a:lnTo>
-                  <a:pt x="189946" y="3399895"/>
-                </a:lnTo>
-                <a:close/>
-                <a:lnTo>
-                  <a:pt x="192998" y="3397340"/>
-                </a:lnTo>
-                <a:close/>
-                <a:lnTo>
-                  <a:pt x="196044" y="3394774"/>
-                </a:lnTo>
-                <a:close/>
-                <a:lnTo>
-                  <a:pt x="199083" y="3392201"/>
-                </a:lnTo>
-                <a:close/>
-                <a:lnTo>
-                  <a:pt x="202113" y="3389626"/>
-                </a:lnTo>
-                <a:close/>
-                <a:lnTo>
-                  <a:pt x="205132" y="3387054"/>
-                </a:lnTo>
-                <a:close/>
-                <a:lnTo>
-                  <a:pt x="208137" y="3384490"/>
-                </a:lnTo>
-                <a:close/>
-                <a:lnTo>
-                  <a:pt x="211128" y="3381938"/>
-                </a:lnTo>
-                <a:close/>
-                <a:lnTo>
-                  <a:pt x="214107" y="3379394"/>
-                </a:lnTo>
-                <a:close/>
-                <a:lnTo>
-                  <a:pt x="217079" y="3376854"/>
-                </a:lnTo>
-                <a:close/>
-                <a:lnTo>
-                  <a:pt x="220046" y="3374311"/>
-                </a:lnTo>
-                <a:close/>
-                <a:lnTo>
-                  <a:pt x="223014" y="3371760"/>
-                </a:lnTo>
-                <a:close/>
-                <a:lnTo>
-                  <a:pt x="225986" y="3369194"/>
-                </a:lnTo>
-                <a:close/>
-                <a:lnTo>
-                  <a:pt x="228966" y="3366608"/>
-                </a:lnTo>
-                <a:close/>
-                <a:lnTo>
-                  <a:pt x="231958" y="3363997"/>
-                </a:lnTo>
-                <a:close/>
-                <a:lnTo>
-                  <a:pt x="234965" y="3361358"/>
-                </a:lnTo>
-                <a:close/>
-                <a:lnTo>
-                  <a:pt x="237985" y="3358695"/>
-                </a:lnTo>
-                <a:close/>
-                <a:lnTo>
-                  <a:pt x="241015" y="3356015"/>
-                </a:lnTo>
-                <a:close/>
-                <a:lnTo>
-                  <a:pt x="244055" y="3353323"/>
-                </a:lnTo>
-                <a:close/>
-                <a:lnTo>
-                  <a:pt x="247102" y="3350625"/>
-                </a:lnTo>
-                <a:close/>
-                <a:lnTo>
-                  <a:pt x="250155" y="3347927"/>
-                </a:lnTo>
-                <a:close/>
-                <a:lnTo>
-                  <a:pt x="253210" y="3345235"/>
-                </a:lnTo>
-                <a:close/>
-                <a:lnTo>
-                  <a:pt x="256267" y="3342553"/>
-                </a:lnTo>
-                <a:close/>
-                <a:lnTo>
-                  <a:pt x="259323" y="3339883"/>
-                </a:lnTo>
-                <a:close/>
-                <a:lnTo>
-                  <a:pt x="262377" y="3337219"/>
-                </a:lnTo>
-                <a:close/>
-                <a:lnTo>
-                  <a:pt x="265424" y="3334556"/>
-                </a:lnTo>
-                <a:close/>
-                <a:lnTo>
-                  <a:pt x="268465" y="3331888"/>
-                </a:lnTo>
-                <a:close/>
-                <a:lnTo>
-                  <a:pt x="271495" y="3329211"/>
-                </a:lnTo>
-                <a:close/>
-                <a:lnTo>
-                  <a:pt x="274513" y="3326519"/>
-                </a:lnTo>
-                <a:close/>
-                <a:lnTo>
-                  <a:pt x="277517" y="3323806"/>
-                </a:lnTo>
-                <a:close/>
-                <a:lnTo>
-                  <a:pt x="280505" y="3321070"/>
-                </a:lnTo>
-                <a:close/>
-                <a:lnTo>
-                  <a:pt x="283480" y="3318309"/>
-                </a:lnTo>
-                <a:close/>
-                <a:lnTo>
-                  <a:pt x="286447" y="3315529"/>
-                </a:lnTo>
-                <a:close/>
-                <a:lnTo>
-                  <a:pt x="289411" y="3312731"/>
-                </a:lnTo>
-                <a:close/>
-                <a:lnTo>
-                  <a:pt x="292378" y="3309918"/>
-                </a:lnTo>
-                <a:close/>
-                <a:lnTo>
-                  <a:pt x="295351" y="3307095"/>
-                </a:lnTo>
-                <a:close/>
-                <a:lnTo>
-                  <a:pt x="298337" y="3304263"/>
-                </a:lnTo>
-                <a:close/>
-                <a:lnTo>
-                  <a:pt x="301339" y="3301426"/>
-                </a:lnTo>
-                <a:close/>
-                <a:lnTo>
-                  <a:pt x="304361" y="3298585"/>
-                </a:lnTo>
-                <a:close/>
-                <a:lnTo>
-                  <a:pt x="307398" y="3295741"/>
-                </a:lnTo>
-                <a:close/>
-                <a:lnTo>
-                  <a:pt x="310444" y="3292893"/>
-                </a:lnTo>
-                <a:close/>
-                <a:lnTo>
-                  <a:pt x="313493" y="3290039"/>
-                </a:lnTo>
-                <a:close/>
-                <a:lnTo>
-                  <a:pt x="316541" y="3287178"/>
-                </a:lnTo>
-                <a:close/>
-                <a:lnTo>
-                  <a:pt x="319581" y="3284309"/>
-                </a:lnTo>
-                <a:close/>
-                <a:lnTo>
-                  <a:pt x="322609" y="3281432"/>
-                </a:lnTo>
-                <a:close/>
-                <a:lnTo>
-                  <a:pt x="325618" y="3278545"/>
-                </a:lnTo>
-                <a:close/>
-                <a:lnTo>
-                  <a:pt x="328609" y="3275649"/>
-                </a:lnTo>
-                <a:close/>
-                <a:lnTo>
-                  <a:pt x="331587" y="3272744"/>
-                </a:lnTo>
-                <a:close/>
-                <a:lnTo>
-                  <a:pt x="334555" y="3269831"/>
-                </a:lnTo>
-                <a:close/>
-                <a:lnTo>
-                  <a:pt x="337520" y="3266911"/>
-                </a:lnTo>
-                <a:close/>
-                <a:lnTo>
-                  <a:pt x="340485" y="3263985"/>
-                </a:lnTo>
-                <a:close/>
-                <a:lnTo>
-                  <a:pt x="343457" y="3261052"/>
-                </a:lnTo>
-                <a:close/>
-                <a:lnTo>
-                  <a:pt x="346440" y="3258115"/>
-                </a:lnTo>
-                <a:close/>
-                <a:lnTo>
-                  <a:pt x="349438" y="3255174"/>
-                </a:lnTo>
-                <a:close/>
-                <a:lnTo>
-                  <a:pt x="352451" y="3252228"/>
-                </a:lnTo>
-                <a:close/>
-                <a:lnTo>
-                  <a:pt x="355477" y="3249273"/>
-                </a:lnTo>
-                <a:close/>
-                <a:lnTo>
-                  <a:pt x="358514" y="3246308"/>
-                </a:lnTo>
-                <a:close/>
-                <a:lnTo>
-                  <a:pt x="361559" y="3243331"/>
-                </a:lnTo>
-                <a:close/>
-                <a:lnTo>
-                  <a:pt x="364611" y="3240339"/>
-                </a:lnTo>
-                <a:close/>
-                <a:lnTo>
-                  <a:pt x="367666" y="3237329"/>
-                </a:lnTo>
-                <a:close/>
-                <a:lnTo>
-                  <a:pt x="370724" y="3234301"/>
-                </a:lnTo>
-                <a:close/>
-                <a:lnTo>
-                  <a:pt x="373781" y="3231252"/>
-                </a:lnTo>
-                <a:close/>
-                <a:lnTo>
-                  <a:pt x="376836" y="3228184"/>
-                </a:lnTo>
-                <a:close/>
-                <a:lnTo>
-                  <a:pt x="379887" y="3225099"/>
-                </a:lnTo>
-                <a:close/>
-                <a:lnTo>
-                  <a:pt x="382930" y="3222001"/>
-                </a:lnTo>
-                <a:close/>
-                <a:lnTo>
-                  <a:pt x="385964" y="3218890"/>
-                </a:lnTo>
-                <a:close/>
-                <a:lnTo>
-                  <a:pt x="388987" y="3215770"/>
-                </a:lnTo>
-                <a:close/>
-                <a:lnTo>
-                  <a:pt x="391997" y="3212642"/>
-                </a:lnTo>
-                <a:close/>
-                <a:lnTo>
-                  <a:pt x="394991" y="3209510"/>
-                </a:lnTo>
-                <a:close/>
-                <a:lnTo>
-                  <a:pt x="397970" y="3206373"/>
-                </a:lnTo>
-                <a:close/>
-                <a:lnTo>
-                  <a:pt x="400940" y="3203230"/>
-                </a:lnTo>
-                <a:close/>
-                <a:lnTo>
-                  <a:pt x="403904" y="3200083"/>
-                </a:lnTo>
-                <a:close/>
-                <a:lnTo>
-                  <a:pt x="406870" y="3196928"/>
-                </a:lnTo>
-                <a:close/>
-                <a:lnTo>
-                  <a:pt x="409840" y="3193767"/>
-                </a:lnTo>
-                <a:close/>
-                <a:lnTo>
-                  <a:pt x="412820" y="3190597"/>
-                </a:lnTo>
-                <a:close/>
-                <a:lnTo>
-                  <a:pt x="415815" y="3187419"/>
-                </a:lnTo>
-                <a:close/>
-                <a:lnTo>
-                  <a:pt x="418830" y="3184231"/>
-                </a:lnTo>
-                <a:close/>
-                <a:lnTo>
-                  <a:pt x="421861" y="3181034"/>
-                </a:lnTo>
-                <a:close/>
-                <a:lnTo>
-                  <a:pt x="424904" y="3177829"/>
-                </a:lnTo>
-                <a:close/>
-                <a:lnTo>
-                  <a:pt x="427953" y="3174616"/>
-                </a:lnTo>
-                <a:close/>
-                <a:lnTo>
-                  <a:pt x="431002" y="3171396"/>
-                </a:lnTo>
-                <a:close/>
-                <a:lnTo>
-                  <a:pt x="434046" y="3168171"/>
-                </a:lnTo>
-                <a:close/>
-                <a:lnTo>
-                  <a:pt x="437079" y="3164940"/>
-                </a:lnTo>
-                <a:close/>
-                <a:lnTo>
-                  <a:pt x="440096" y="3161705"/>
-                </a:lnTo>
-                <a:close/>
-                <a:lnTo>
-                  <a:pt x="443094" y="3158466"/>
-                </a:lnTo>
-                <a:close/>
-                <a:lnTo>
-                  <a:pt x="446076" y="3155220"/>
-                </a:lnTo>
-                <a:close/>
-                <a:lnTo>
-                  <a:pt x="449047" y="3151966"/>
-                </a:lnTo>
-                <a:close/>
-                <a:lnTo>
-                  <a:pt x="452013" y="3148700"/>
-                </a:lnTo>
-                <a:close/>
-                <a:lnTo>
-                  <a:pt x="454977" y="3145421"/>
-                </a:lnTo>
-                <a:close/>
-                <a:lnTo>
-                  <a:pt x="457946" y="3142126"/>
-                </a:lnTo>
-                <a:close/>
-                <a:lnTo>
-                  <a:pt x="460924" y="3138813"/>
-                </a:lnTo>
-                <a:close/>
-                <a:lnTo>
-                  <a:pt x="463916" y="3135479"/>
-                </a:lnTo>
-                <a:close/>
-                <a:lnTo>
-                  <a:pt x="466924" y="3132124"/>
-                </a:lnTo>
-                <a:close/>
-                <a:lnTo>
-                  <a:pt x="469945" y="3128751"/>
-                </a:lnTo>
-                <a:close/>
-                <a:lnTo>
-                  <a:pt x="472978" y="3125363"/>
-                </a:lnTo>
-                <a:close/>
-                <a:lnTo>
-                  <a:pt x="476020" y="3121961"/>
-                </a:lnTo>
-                <a:close/>
-                <a:lnTo>
-                  <a:pt x="479070" y="3118551"/>
-                </a:lnTo>
-                <a:close/>
-                <a:lnTo>
-                  <a:pt x="482124" y="3115133"/>
-                </a:lnTo>
-                <a:close/>
-                <a:lnTo>
-                  <a:pt x="485181" y="3111711"/>
-                </a:lnTo>
-                <a:close/>
-                <a:lnTo>
-                  <a:pt x="488237" y="3108287"/>
-                </a:lnTo>
-                <a:close/>
-                <a:lnTo>
-                  <a:pt x="491292" y="3104861"/>
-                </a:lnTo>
-                <a:close/>
-                <a:lnTo>
-                  <a:pt x="494343" y="3101429"/>
-                </a:lnTo>
-                <a:close/>
-                <a:lnTo>
-                  <a:pt x="497389" y="3097989"/>
-                </a:lnTo>
-                <a:close/>
-                <a:lnTo>
-                  <a:pt x="500427" y="3094538"/>
-                </a:lnTo>
-                <a:close/>
-                <a:lnTo>
-                  <a:pt x="503455" y="3091073"/>
-                </a:lnTo>
-                <a:close/>
-                <a:lnTo>
-                  <a:pt x="506471" y="3087592"/>
-                </a:lnTo>
-                <a:close/>
-                <a:lnTo>
-                  <a:pt x="509474" y="3084091"/>
-                </a:lnTo>
-                <a:close/>
-                <a:lnTo>
-                  <a:pt x="512463" y="3080570"/>
-                </a:lnTo>
-                <a:close/>
-                <a:lnTo>
-                  <a:pt x="515441" y="3077028"/>
-                </a:lnTo>
-                <a:close/>
-                <a:lnTo>
-                  <a:pt x="518411" y="3073470"/>
-                </a:lnTo>
-                <a:close/>
-                <a:lnTo>
-                  <a:pt x="521378" y="3069896"/>
-                </a:lnTo>
-                <a:close/>
-                <a:lnTo>
-                  <a:pt x="524347" y="3066310"/>
-                </a:lnTo>
-                <a:close/>
-                <a:lnTo>
-                  <a:pt x="527319" y="3062713"/>
-                </a:lnTo>
-                <a:close/>
-                <a:lnTo>
-                  <a:pt x="530301" y="3059107"/>
-                </a:lnTo>
-                <a:close/>
-                <a:lnTo>
-                  <a:pt x="533296" y="3055496"/>
-                </a:lnTo>
-                <a:close/>
-                <a:lnTo>
-                  <a:pt x="536305" y="3051880"/>
-                </a:lnTo>
-                <a:close/>
-                <a:lnTo>
-                  <a:pt x="539327" y="3048259"/>
-                </a:lnTo>
-                <a:close/>
-                <a:lnTo>
-                  <a:pt x="542359" y="3044633"/>
-                </a:lnTo>
-                <a:close/>
-                <a:lnTo>
-                  <a:pt x="545400" y="3041002"/>
-                </a:lnTo>
-                <a:close/>
-                <a:lnTo>
-                  <a:pt x="548448" y="3037365"/>
-                </a:lnTo>
-                <a:close/>
-                <a:lnTo>
-                  <a:pt x="551501" y="3033723"/>
-                </a:lnTo>
-                <a:close/>
-                <a:lnTo>
-                  <a:pt x="554557" y="3030074"/>
-                </a:lnTo>
-                <a:close/>
-                <a:lnTo>
-                  <a:pt x="557614" y="3026419"/>
-                </a:lnTo>
-                <a:close/>
-                <a:lnTo>
-                  <a:pt x="560670" y="3022757"/>
-                </a:lnTo>
-                <a:close/>
-                <a:lnTo>
-                  <a:pt x="563723" y="3019087"/>
-                </a:lnTo>
-                <a:close/>
-                <a:lnTo>
-                  <a:pt x="566769" y="3015406"/>
-                </a:lnTo>
-                <a:close/>
-                <a:lnTo>
-                  <a:pt x="569808" y="3011714"/>
-                </a:lnTo>
-                <a:close/>
-                <a:lnTo>
-                  <a:pt x="572836" y="3008010"/>
-                </a:lnTo>
-                <a:close/>
-                <a:lnTo>
-                  <a:pt x="575852" y="3004290"/>
-                </a:lnTo>
-                <a:close/>
-                <a:lnTo>
-                  <a:pt x="578854" y="3000556"/>
-                </a:lnTo>
-                <a:close/>
-                <a:lnTo>
-                  <a:pt x="581839" y="2996804"/>
-                </a:lnTo>
-                <a:close/>
-                <a:lnTo>
-                  <a:pt x="584812" y="2993036"/>
-                </a:lnTo>
-                <a:close/>
-                <a:lnTo>
-                  <a:pt x="587779" y="2989249"/>
-                </a:lnTo>
-                <a:close/>
-                <a:lnTo>
-                  <a:pt x="590743" y="2985445"/>
-                </a:lnTo>
-                <a:close/>
-                <a:lnTo>
-                  <a:pt x="593710" y="2981624"/>
-                </a:lnTo>
-                <a:close/>
-                <a:lnTo>
-                  <a:pt x="596685" y="2977784"/>
-                </a:lnTo>
-                <a:close/>
-                <a:lnTo>
-                  <a:pt x="599674" y="2973925"/>
-                </a:lnTo>
-                <a:close/>
-                <a:lnTo>
-                  <a:pt x="602679" y="2970049"/>
-                </a:lnTo>
-                <a:close/>
-                <a:lnTo>
-                  <a:pt x="605704" y="2966154"/>
-                </a:lnTo>
-                <a:close/>
-                <a:lnTo>
-                  <a:pt x="608743" y="2962244"/>
-                </a:lnTo>
-                <a:close/>
-                <a:lnTo>
-                  <a:pt x="611789" y="2958320"/>
-                </a:lnTo>
-                <a:close/>
-                <a:lnTo>
-                  <a:pt x="614839" y="2954386"/>
-                </a:lnTo>
-                <a:close/>
-                <a:lnTo>
-                  <a:pt x="617886" y="2950442"/>
-                </a:lnTo>
-                <a:close/>
-                <a:lnTo>
-                  <a:pt x="620925" y="2946492"/>
-                </a:lnTo>
-                <a:close/>
-                <a:lnTo>
-                  <a:pt x="623950" y="2942537"/>
-                </a:lnTo>
-                <a:close/>
-                <a:lnTo>
-                  <a:pt x="626956" y="2938580"/>
-                </a:lnTo>
-                <a:close/>
-                <a:lnTo>
-                  <a:pt x="629944" y="2934620"/>
-                </a:lnTo>
-                <a:close/>
-                <a:lnTo>
-                  <a:pt x="632919" y="2930655"/>
-                </a:lnTo>
-                <a:close/>
-                <a:lnTo>
-                  <a:pt x="635887" y="2926680"/>
-                </a:lnTo>
-                <a:close/>
-                <a:lnTo>
-                  <a:pt x="638851" y="2922694"/>
-                </a:lnTo>
-                <a:close/>
-                <a:lnTo>
-                  <a:pt x="641817" y="2918694"/>
-                </a:lnTo>
-                <a:close/>
-                <a:lnTo>
-                  <a:pt x="644790" y="2914676"/>
-                </a:lnTo>
-                <a:close/>
-                <a:lnTo>
-                  <a:pt x="647776" y="2910639"/>
-                </a:lnTo>
-                <a:close/>
-                <a:lnTo>
-                  <a:pt x="650777" y="2906580"/>
-                </a:lnTo>
-                <a:close/>
-                <a:lnTo>
-                  <a:pt x="653792" y="2902502"/>
-                </a:lnTo>
-                <a:close/>
-                <a:lnTo>
-                  <a:pt x="656821" y="2898406"/>
-                </a:lnTo>
-                <a:close/>
-                <a:lnTo>
-                  <a:pt x="659859" y="2894295"/>
-                </a:lnTo>
-                <a:close/>
-                <a:lnTo>
-                  <a:pt x="662906" y="2890174"/>
-                </a:lnTo>
-                <a:close/>
-                <a:lnTo>
-                  <a:pt x="665958" y="2886043"/>
-                </a:lnTo>
-                <a:close/>
-                <a:lnTo>
-                  <a:pt x="669014" y="2881907"/>
-                </a:lnTo>
-                <a:close/>
-                <a:lnTo>
-                  <a:pt x="672071" y="2877768"/>
-                </a:lnTo>
-                <a:close/>
-                <a:lnTo>
-                  <a:pt x="675127" y="2873627"/>
-                </a:lnTo>
-                <a:close/>
-                <a:lnTo>
-                  <a:pt x="678180" y="2869481"/>
-                </a:lnTo>
-                <a:close/>
-                <a:lnTo>
-                  <a:pt x="681228" y="2865329"/>
-                </a:lnTo>
-                <a:close/>
-                <a:lnTo>
-                  <a:pt x="684270" y="2861168"/>
-                </a:lnTo>
-                <a:close/>
-                <a:lnTo>
-                  <a:pt x="687302" y="2856995"/>
-                </a:lnTo>
-                <a:close/>
-                <a:lnTo>
-                  <a:pt x="690324" y="2852809"/>
-                </a:lnTo>
-                <a:close/>
-                <a:lnTo>
-                  <a:pt x="693333" y="2848606"/>
-                </a:lnTo>
-                <a:close/>
-                <a:lnTo>
-                  <a:pt x="696328" y="2844384"/>
-                </a:lnTo>
-                <a:close/>
-                <a:lnTo>
-                  <a:pt x="699310" y="2840144"/>
-                </a:lnTo>
-                <a:close/>
-                <a:lnTo>
-                  <a:pt x="702283" y="2835885"/>
-                </a:lnTo>
-                <a:close/>
-                <a:lnTo>
-                  <a:pt x="705251" y="2831608"/>
-                </a:lnTo>
-                <a:close/>
-                <a:lnTo>
-                  <a:pt x="708218" y="2827315"/>
-                </a:lnTo>
-                <a:close/>
-                <a:lnTo>
-                  <a:pt x="711189" y="2823006"/>
-                </a:lnTo>
-                <a:close/>
-                <a:lnTo>
-                  <a:pt x="714166" y="2818683"/>
-                </a:lnTo>
-                <a:close/>
-                <a:lnTo>
-                  <a:pt x="717155" y="2814345"/>
-                </a:lnTo>
-                <a:close/>
-                <a:lnTo>
-                  <a:pt x="720158" y="2809993"/>
-                </a:lnTo>
-                <a:close/>
-                <a:lnTo>
-                  <a:pt x="723174" y="2805628"/>
-                </a:lnTo>
-                <a:close/>
-                <a:lnTo>
-                  <a:pt x="726202" y="2801247"/>
-                </a:lnTo>
-                <a:close/>
-                <a:lnTo>
-                  <a:pt x="729240" y="2796851"/>
-                </a:lnTo>
-                <a:close/>
-                <a:lnTo>
-                  <a:pt x="732285" y="2792437"/>
-                </a:lnTo>
-                <a:close/>
-                <a:lnTo>
-                  <a:pt x="735336" y="2788006"/>
-                </a:lnTo>
-                <a:close/>
-                <a:lnTo>
-                  <a:pt x="738391" y="2783555"/>
-                </a:lnTo>
-                <a:close/>
-                <a:lnTo>
-                  <a:pt x="741448" y="2779085"/>
-                </a:lnTo>
-                <a:close/>
-                <a:lnTo>
-                  <a:pt x="744504" y="2774595"/>
-                </a:lnTo>
-                <a:close/>
-                <a:lnTo>
-                  <a:pt x="747559" y="2770089"/>
-                </a:lnTo>
-                <a:close/>
-                <a:lnTo>
-                  <a:pt x="750608" y="2765568"/>
-                </a:lnTo>
-                <a:close/>
-                <a:lnTo>
-                  <a:pt x="753651" y="2761037"/>
-                </a:lnTo>
-                <a:close/>
-                <a:lnTo>
-                  <a:pt x="756684" y="2756498"/>
-                </a:lnTo>
-                <a:close/>
-                <a:lnTo>
-                  <a:pt x="759705" y="2751955"/>
-                </a:lnTo>
-                <a:close/>
-                <a:lnTo>
-                  <a:pt x="762713" y="2747409"/>
-                </a:lnTo>
-                <a:close/>
-                <a:lnTo>
-                  <a:pt x="765705" y="2742865"/>
-                </a:lnTo>
-                <a:close/>
-                <a:lnTo>
-                  <a:pt x="768683" y="2738320"/>
-                </a:lnTo>
-                <a:close/>
-                <a:lnTo>
-                  <a:pt x="771652" y="2733770"/>
-                </a:lnTo>
-                <a:close/>
-                <a:lnTo>
-                  <a:pt x="774617" y="2729209"/>
-                </a:lnTo>
-                <a:close/>
-                <a:lnTo>
-                  <a:pt x="777582" y="2724633"/>
-                </a:lnTo>
-                <a:close/>
-                <a:lnTo>
-                  <a:pt x="780553" y="2720036"/>
-                </a:lnTo>
-                <a:close/>
-                <a:lnTo>
-                  <a:pt x="783535" y="2715414"/>
-                </a:lnTo>
-                <a:close/>
-                <a:lnTo>
-                  <a:pt x="786533" y="2710761"/>
-                </a:lnTo>
-                <a:close/>
-                <a:lnTo>
-                  <a:pt x="789550" y="2706074"/>
-                </a:lnTo>
-                <a:close/>
-                <a:lnTo>
-                  <a:pt x="792583" y="2701355"/>
-                </a:lnTo>
-                <a:close/>
-                <a:lnTo>
-                  <a:pt x="795627" y="2696609"/>
-                </a:lnTo>
-                <a:close/>
-                <a:lnTo>
-                  <a:pt x="798676" y="2691842"/>
-                </a:lnTo>
-                <a:close/>
-                <a:lnTo>
-                  <a:pt x="801725" y="2687059"/>
-                </a:lnTo>
-                <a:close/>
-                <a:lnTo>
-                  <a:pt x="804767" y="2682264"/>
-                </a:lnTo>
-                <a:close/>
-                <a:lnTo>
-                  <a:pt x="807799" y="2677462"/>
-                </a:lnTo>
-                <a:close/>
-                <a:lnTo>
-                  <a:pt x="810814" y="2672659"/>
-                </a:lnTo>
-                <a:close/>
-                <a:lnTo>
-                  <a:pt x="813809" y="2667857"/>
-                </a:lnTo>
-                <a:close/>
-                <a:lnTo>
-                  <a:pt x="816790" y="2663055"/>
-                </a:lnTo>
-                <a:close/>
-                <a:lnTo>
-                  <a:pt x="819760" y="2658248"/>
-                </a:lnTo>
-                <a:close/>
-                <a:lnTo>
-                  <a:pt x="822725" y="2653433"/>
-                </a:lnTo>
-                <a:close/>
-                <a:lnTo>
-                  <a:pt x="825690" y="2648609"/>
-                </a:lnTo>
-                <a:close/>
-                <a:lnTo>
-                  <a:pt x="828659" y="2643772"/>
-                </a:lnTo>
-                <a:close/>
-                <a:lnTo>
-                  <a:pt x="831639" y="2638919"/>
-                </a:lnTo>
-                <a:close/>
-                <a:lnTo>
-                  <a:pt x="834633" y="2634047"/>
-                </a:lnTo>
-                <a:close/>
-                <a:lnTo>
-                  <a:pt x="837642" y="2629154"/>
-                </a:lnTo>
-                <a:close/>
-                <a:lnTo>
-                  <a:pt x="840665" y="2624243"/>
-                </a:lnTo>
-                <a:close/>
-                <a:lnTo>
-                  <a:pt x="843700" y="2619314"/>
-                </a:lnTo>
-                <a:close/>
-                <a:lnTo>
-                  <a:pt x="846743" y="2614367"/>
-                </a:lnTo>
-                <a:close/>
-                <a:lnTo>
-                  <a:pt x="849793" y="2609403"/>
-                </a:lnTo>
-                <a:close/>
-                <a:lnTo>
-                  <a:pt x="852848" y="2604424"/>
-                </a:lnTo>
-                <a:close/>
-                <a:lnTo>
-                  <a:pt x="855904" y="2599430"/>
-                </a:lnTo>
-                <a:close/>
-                <a:lnTo>
-                  <a:pt x="858961" y="2594422"/>
-                </a:lnTo>
-                <a:close/>
-                <a:lnTo>
-                  <a:pt x="862016" y="2589400"/>
-                </a:lnTo>
-                <a:close/>
-                <a:lnTo>
-                  <a:pt x="865066" y="2584363"/>
-                </a:lnTo>
-                <a:close/>
-                <a:lnTo>
-                  <a:pt x="868111" y="2579311"/>
-                </a:lnTo>
-                <a:close/>
-                <a:lnTo>
-                  <a:pt x="871147" y="2574243"/>
-                </a:lnTo>
-                <a:close/>
-                <a:lnTo>
-                  <a:pt x="874174" y="2569160"/>
-                </a:lnTo>
-                <a:close/>
-                <a:lnTo>
-                  <a:pt x="877189" y="2564060"/>
-                </a:lnTo>
-                <a:close/>
-                <a:lnTo>
-                  <a:pt x="880190" y="2558943"/>
-                </a:lnTo>
-                <a:close/>
-                <a:lnTo>
-                  <a:pt x="883177" y="2553810"/>
-                </a:lnTo>
-                <a:close/>
-                <a:lnTo>
-                  <a:pt x="886154" y="2548660"/>
-                </a:lnTo>
-                <a:close/>
-                <a:lnTo>
-                  <a:pt x="889124" y="2543495"/>
-                </a:lnTo>
-                <a:close/>
-                <a:lnTo>
-                  <a:pt x="892091" y="2538316"/>
-                </a:lnTo>
-                <a:close/>
-                <a:lnTo>
-                  <a:pt x="895059" y="2533123"/>
-                </a:lnTo>
-                <a:close/>
-                <a:lnTo>
-                  <a:pt x="898033" y="2527917"/>
-                </a:lnTo>
-                <a:close/>
-                <a:lnTo>
-                  <a:pt x="901016" y="2522700"/>
-                </a:lnTo>
-                <a:close/>
-                <a:lnTo>
-                  <a:pt x="904013" y="2517471"/>
-                </a:lnTo>
-                <a:close/>
-                <a:lnTo>
-                  <a:pt x="907024" y="2512230"/>
-                </a:lnTo>
-                <a:close/>
-                <a:lnTo>
-                  <a:pt x="910047" y="2506974"/>
-                </a:lnTo>
-                <a:close/>
-                <a:lnTo>
-                  <a:pt x="913081" y="2501700"/>
-                </a:lnTo>
-                <a:close/>
-                <a:lnTo>
-                  <a:pt x="916123" y="2496405"/>
-                </a:lnTo>
-                <a:close/>
-                <a:lnTo>
-                  <a:pt x="919172" y="2491086"/>
-                </a:lnTo>
-                <a:close/>
-                <a:lnTo>
-                  <a:pt x="922225" y="2485740"/>
-                </a:lnTo>
-                <a:close/>
-                <a:lnTo>
-                  <a:pt x="925281" y="2480364"/>
-                </a:lnTo>
-                <a:close/>
-                <a:lnTo>
-                  <a:pt x="928338" y="2474956"/>
-                </a:lnTo>
-                <a:close/>
-                <a:lnTo>
-                  <a:pt x="931394" y="2469518"/>
-                </a:lnTo>
-                <a:close/>
-                <a:lnTo>
-                  <a:pt x="934446" y="2464056"/>
-                </a:lnTo>
-                <a:close/>
-                <a:lnTo>
-                  <a:pt x="937491" y="2458575"/>
-                </a:lnTo>
-                <a:close/>
-                <a:lnTo>
-                  <a:pt x="940529" y="2453079"/>
-                </a:lnTo>
-                <a:close/>
-                <a:lnTo>
-                  <a:pt x="943556" y="2447574"/>
-                </a:lnTo>
-                <a:close/>
-                <a:lnTo>
-                  <a:pt x="946570" y="2442065"/>
-                </a:lnTo>
-                <a:close/>
-                <a:lnTo>
-                  <a:pt x="949569" y="2436557"/>
-                </a:lnTo>
-                <a:close/>
-                <a:lnTo>
-                  <a:pt x="952553" y="2431052"/>
-                </a:lnTo>
-                <a:close/>
-                <a:lnTo>
-                  <a:pt x="955525" y="2425546"/>
-                </a:lnTo>
-                <a:close/>
-                <a:lnTo>
-                  <a:pt x="958491" y="2420035"/>
-                </a:lnTo>
-                <a:close/>
-                <a:lnTo>
-                  <a:pt x="961455" y="2414513"/>
-                </a:lnTo>
-                <a:close/>
-                <a:lnTo>
-                  <a:pt x="964423" y="2408976"/>
-                </a:lnTo>
-                <a:close/>
-                <a:lnTo>
-                  <a:pt x="967400" y="2403417"/>
-                </a:lnTo>
-                <a:close/>
-                <a:lnTo>
-                  <a:pt x="970390" y="2397833"/>
-                </a:lnTo>
-                <a:close/>
-                <a:lnTo>
-                  <a:pt x="973398" y="2392218"/>
-                </a:lnTo>
-                <a:close/>
-                <a:lnTo>
-                  <a:pt x="976425" y="2386571"/>
-                </a:lnTo>
-                <a:close/>
-                <a:lnTo>
-                  <a:pt x="979465" y="2380895"/>
-                </a:lnTo>
-                <a:close/>
-                <a:lnTo>
-                  <a:pt x="982512" y="2375193"/>
-                </a:lnTo>
-                <a:close/>
-                <a:lnTo>
-                  <a:pt x="985562" y="2369468"/>
-                </a:lnTo>
-                <a:close/>
-                <a:lnTo>
-                  <a:pt x="988608" y="2363722"/>
-                </a:lnTo>
-                <a:close/>
-                <a:lnTo>
-                  <a:pt x="991645" y="2357960"/>
-                </a:lnTo>
-                <a:close/>
-                <a:lnTo>
-                  <a:pt x="994668" y="2352183"/>
-                </a:lnTo>
-                <a:close/>
-                <a:lnTo>
-                  <a:pt x="997672" y="2346395"/>
-                </a:lnTo>
-                <a:close/>
-                <a:lnTo>
-                  <a:pt x="1000658" y="2340596"/>
-                </a:lnTo>
-                <a:close/>
-                <a:lnTo>
-                  <a:pt x="1003632" y="2334785"/>
-                </a:lnTo>
-                <a:close/>
-                <a:lnTo>
-                  <a:pt x="1006599" y="2328960"/>
-                </a:lnTo>
-                <a:close/>
-                <a:lnTo>
-                  <a:pt x="1009563" y="2323122"/>
-                </a:lnTo>
-                <a:close/>
-                <a:lnTo>
-                  <a:pt x="1012530" y="2317268"/>
-                </a:lnTo>
-                <a:close/>
-                <a:lnTo>
-                  <a:pt x="1015504" y="2311399"/>
-                </a:lnTo>
-                <a:close/>
-                <a:lnTo>
-                  <a:pt x="1018491" y="2305512"/>
-                </a:lnTo>
-                <a:close/>
-                <a:lnTo>
-                  <a:pt x="1021494" y="2299608"/>
-                </a:lnTo>
-                <a:close/>
-                <a:lnTo>
-                  <a:pt x="1024512" y="2293688"/>
-                </a:lnTo>
-                <a:close/>
-                <a:lnTo>
-                  <a:pt x="1027542" y="2287751"/>
-                </a:lnTo>
-                <a:close/>
-                <a:lnTo>
-                  <a:pt x="1030582" y="2281799"/>
-                </a:lnTo>
-                <a:close/>
-                <a:lnTo>
-                  <a:pt x="1033629" y="2275832"/>
-                </a:lnTo>
-                <a:close/>
-                <a:lnTo>
-                  <a:pt x="1036682" y="2269852"/>
-                </a:lnTo>
-                <a:close/>
-                <a:lnTo>
-                  <a:pt x="1039738" y="2263860"/>
-                </a:lnTo>
-                <a:close/>
-                <a:lnTo>
-                  <a:pt x="1042795" y="2257855"/>
-                </a:lnTo>
-                <a:close/>
-                <a:lnTo>
-                  <a:pt x="1045851" y="2251838"/>
-                </a:lnTo>
-                <a:close/>
-                <a:lnTo>
-                  <a:pt x="1048903" y="2245807"/>
-                </a:lnTo>
-                <a:close/>
-                <a:lnTo>
-                  <a:pt x="1051951" y="2239758"/>
-                </a:lnTo>
-                <a:close/>
-                <a:lnTo>
-                  <a:pt x="1054991" y="2233690"/>
-                </a:lnTo>
-                <a:close/>
-                <a:lnTo>
-                  <a:pt x="1058022" y="2227599"/>
-                </a:lnTo>
-                <a:close/>
-                <a:lnTo>
-                  <a:pt x="1061043" y="2221484"/>
-                </a:lnTo>
-                <a:close/>
-                <a:lnTo>
-                  <a:pt x="1064050" y="2215342"/>
-                </a:lnTo>
-                <a:close/>
-                <a:lnTo>
-                  <a:pt x="1067043" y="2209171"/>
-                </a:lnTo>
-                <a:close/>
-                <a:lnTo>
-                  <a:pt x="1070024" y="2202972"/>
-                </a:lnTo>
-                <a:close/>
-                <a:lnTo>
-                  <a:pt x="1072996" y="2196748"/>
-                </a:lnTo>
-                <a:close/>
-                <a:lnTo>
-                  <a:pt x="1075964" y="2190502"/>
-                </a:lnTo>
-                <a:close/>
-                <a:lnTo>
-                  <a:pt x="1078931" y="2184236"/>
-                </a:lnTo>
-                <a:close/>
-                <a:lnTo>
-                  <a:pt x="1081902" y="2177954"/>
-                </a:lnTo>
-                <a:close/>
-                <a:lnTo>
-                  <a:pt x="1084881" y="2171658"/>
-                </a:lnTo>
-                <a:close/>
-                <a:lnTo>
-                  <a:pt x="1087871" y="2165352"/>
-                </a:lnTo>
-                <a:close/>
-                <a:lnTo>
-                  <a:pt x="1090876" y="2159037"/>
-                </a:lnTo>
-                <a:close/>
-                <a:lnTo>
-                  <a:pt x="1093894" y="2152710"/>
-                </a:lnTo>
-                <a:close/>
-                <a:lnTo>
-                  <a:pt x="1096923" y="2146370"/>
-                </a:lnTo>
-                <a:close/>
-                <a:lnTo>
-                  <a:pt x="1099962" y="2140012"/>
-                </a:lnTo>
-                <a:close/>
-                <a:lnTo>
-                  <a:pt x="1103008" y="2133634"/>
-                </a:lnTo>
-                <a:close/>
-                <a:lnTo>
-                  <a:pt x="1106060" y="2127233"/>
-                </a:lnTo>
-                <a:close/>
-                <a:lnTo>
-                  <a:pt x="1109115" y="2120806"/>
-                </a:lnTo>
-                <a:close/>
-                <a:lnTo>
-                  <a:pt x="1112172" y="2114349"/>
-                </a:lnTo>
-                <a:close/>
-                <a:lnTo>
-                  <a:pt x="1115228" y="2107864"/>
-                </a:lnTo>
-                <a:close/>
-                <a:lnTo>
-                  <a:pt x="1118282" y="2101351"/>
-                </a:lnTo>
-                <a:close/>
-                <a:lnTo>
-                  <a:pt x="1121331" y="2094815"/>
-                </a:lnTo>
-                <a:close/>
-                <a:lnTo>
-                  <a:pt x="1124372" y="2088258"/>
-                </a:lnTo>
-                <a:close/>
-                <a:lnTo>
-                  <a:pt x="1127404" y="2081683"/>
-                </a:lnTo>
-                <a:close/>
-                <a:lnTo>
-                  <a:pt x="1130424" y="2075094"/>
-                </a:lnTo>
-                <a:close/>
-                <a:lnTo>
-                  <a:pt x="1133430" y="2068493"/>
-                </a:lnTo>
-                <a:close/>
-                <a:lnTo>
-                  <a:pt x="1136420" y="2061882"/>
-                </a:lnTo>
-                <a:close/>
-                <a:lnTo>
-                  <a:pt x="1139396" y="2055262"/>
-                </a:lnTo>
-                <a:close/>
-                <a:lnTo>
-                  <a:pt x="1142364" y="2048629"/>
-                </a:lnTo>
-                <a:close/>
-                <a:lnTo>
-                  <a:pt x="1145329" y="2041980"/>
-                </a:lnTo>
-                <a:close/>
-                <a:lnTo>
-                  <a:pt x="1148295" y="2035312"/>
-                </a:lnTo>
-                <a:close/>
-                <a:lnTo>
-                  <a:pt x="1151267" y="2028622"/>
-                </a:lnTo>
-                <a:close/>
-                <a:lnTo>
-                  <a:pt x="1154250" y="2021907"/>
-                </a:lnTo>
-                <a:close/>
-                <a:lnTo>
-                  <a:pt x="1157250" y="2015165"/>
-                </a:lnTo>
-                <a:close/>
-                <a:lnTo>
-                  <a:pt x="1160270" y="2008392"/>
-                </a:lnTo>
-                <a:close/>
-                <a:lnTo>
-                  <a:pt x="1163305" y="2001592"/>
-                </a:lnTo>
-                <a:close/>
-                <a:lnTo>
-                  <a:pt x="1166349" y="1994767"/>
-                </a:lnTo>
-                <a:close/>
-                <a:lnTo>
-                  <a:pt x="1169399" y="1987920"/>
-                </a:lnTo>
-                <a:close/>
-                <a:lnTo>
-                  <a:pt x="1172447" y="1981054"/>
-                </a:lnTo>
-                <a:close/>
-                <a:lnTo>
-                  <a:pt x="1175489" y="1974171"/>
-                </a:lnTo>
-                <a:close/>
-                <a:lnTo>
-                  <a:pt x="1178519" y="1967275"/>
-                </a:lnTo>
-                <a:close/>
-                <a:lnTo>
-                  <a:pt x="1181531" y="1960368"/>
-                </a:lnTo>
-                <a:close/>
-                <a:lnTo>
-                  <a:pt x="1184524" y="1953451"/>
-                </a:lnTo>
-                <a:close/>
-                <a:lnTo>
-                  <a:pt x="1187503" y="1946522"/>
-                </a:lnTo>
-                <a:close/>
-                <a:lnTo>
-                  <a:pt x="1190472" y="1939579"/>
-                </a:lnTo>
-                <a:close/>
-                <a:lnTo>
-                  <a:pt x="1193437" y="1932619"/>
-                </a:lnTo>
-                <a:close/>
-                <a:lnTo>
-                  <a:pt x="1196402" y="1925640"/>
-                </a:lnTo>
-                <a:close/>
-                <a:lnTo>
-                  <a:pt x="1199373" y="1918639"/>
-                </a:lnTo>
-                <a:close/>
-                <a:lnTo>
-                  <a:pt x="1202354" y="1911615"/>
-                </a:lnTo>
-                <a:close/>
-                <a:lnTo>
-                  <a:pt x="1205350" y="1904564"/>
-                </a:lnTo>
-                <a:close/>
-                <a:lnTo>
-                  <a:pt x="1208361" y="1897487"/>
-                </a:lnTo>
-                <a:close/>
-                <a:lnTo>
-                  <a:pt x="1211386" y="1890383"/>
-                </a:lnTo>
-                <a:close/>
-                <a:lnTo>
-                  <a:pt x="1214421" y="1883254"/>
-                </a:lnTo>
-                <a:close/>
-                <a:lnTo>
-                  <a:pt x="1217466" y="1876101"/>
-                </a:lnTo>
-                <a:close/>
-                <a:lnTo>
-                  <a:pt x="1220517" y="1868923"/>
-                </a:lnTo>
-                <a:close/>
-                <a:lnTo>
-                  <a:pt x="1223572" y="1861721"/>
-                </a:lnTo>
-                <a:close/>
-                <a:lnTo>
-                  <a:pt x="1226628" y="1854496"/>
-                </a:lnTo>
-                <a:close/>
-                <a:lnTo>
-                  <a:pt x="1229685" y="1847249"/>
-                </a:lnTo>
-                <a:close/>
-                <a:lnTo>
-                  <a:pt x="1232739" y="1839979"/>
-                </a:lnTo>
-                <a:close/>
-                <a:lnTo>
-                  <a:pt x="1235789" y="1832687"/>
-                </a:lnTo>
-                <a:close/>
-                <a:lnTo>
-                  <a:pt x="1238833" y="1825372"/>
-                </a:lnTo>
-                <a:close/>
-                <a:lnTo>
-                  <a:pt x="1241868" y="1818035"/>
-                </a:lnTo>
-                <a:close/>
-                <a:lnTo>
-                  <a:pt x="1244893" y="1810675"/>
-                </a:lnTo>
-                <a:close/>
-                <a:lnTo>
-                  <a:pt x="1247907" y="1803292"/>
-                </a:lnTo>
-                <a:close/>
-                <a:lnTo>
-                  <a:pt x="1250906" y="1795887"/>
-                </a:lnTo>
-                <a:close/>
-                <a:lnTo>
-                  <a:pt x="1253892" y="1788459"/>
-                </a:lnTo>
-                <a:close/>
-                <a:lnTo>
-                  <a:pt x="1256867" y="1781007"/>
-                </a:lnTo>
-                <a:close/>
-                <a:lnTo>
-                  <a:pt x="1259836" y="1773532"/>
-                </a:lnTo>
-                <a:close/>
-                <a:lnTo>
-                  <a:pt x="1262803" y="1766033"/>
-                </a:lnTo>
-                <a:close/>
-                <a:lnTo>
-                  <a:pt x="1265772" y="1758509"/>
-                </a:lnTo>
-                <a:close/>
-                <a:lnTo>
-                  <a:pt x="1268747" y="1750959"/>
-                </a:lnTo>
-                <a:close/>
-                <a:lnTo>
-                  <a:pt x="1271732" y="1743384"/>
-                </a:lnTo>
-                <a:close/>
-                <a:lnTo>
-                  <a:pt x="1274730" y="1735782"/>
-                </a:lnTo>
-                <a:close/>
-                <a:lnTo>
-                  <a:pt x="1277743" y="1728156"/>
-                </a:lnTo>
-                <a:close/>
-                <a:lnTo>
-                  <a:pt x="1280767" y="1720506"/>
-                </a:lnTo>
-                <a:close/>
-                <a:lnTo>
-                  <a:pt x="1283802" y="1712835"/>
-                </a:lnTo>
-                <a:close/>
-                <a:lnTo>
-                  <a:pt x="1286845" y="1705145"/>
-                </a:lnTo>
-                <a:close/>
-                <a:lnTo>
-                  <a:pt x="1289895" y="1697437"/>
-                </a:lnTo>
-                <a:close/>
-                <a:lnTo>
-                  <a:pt x="1292949" y="1689715"/>
-                </a:lnTo>
-                <a:close/>
-                <a:lnTo>
-                  <a:pt x="1296005" y="1681979"/>
-                </a:lnTo>
-                <a:close/>
-                <a:lnTo>
-                  <a:pt x="1299062" y="1674231"/>
-                </a:lnTo>
-                <a:close/>
-                <a:lnTo>
-                  <a:pt x="1302117" y="1666471"/>
-                </a:lnTo>
-                <a:close/>
-                <a:lnTo>
-                  <a:pt x="1305168" y="1658697"/>
-                </a:lnTo>
-                <a:close/>
-                <a:lnTo>
-                  <a:pt x="1308213" y="1650908"/>
-                </a:lnTo>
-                <a:close/>
-                <a:lnTo>
-                  <a:pt x="1311250" y="1643102"/>
-                </a:lnTo>
-                <a:close/>
-                <a:lnTo>
-                  <a:pt x="1314275" y="1635278"/>
-                </a:lnTo>
-                <a:close/>
-                <a:lnTo>
-                  <a:pt x="1317287" y="1627434"/>
-                </a:lnTo>
-                <a:close/>
-                <a:lnTo>
-                  <a:pt x="1320284" y="1619569"/>
-                </a:lnTo>
-                <a:close/>
-                <a:lnTo>
-                  <a:pt x="1323266" y="1611681"/>
-                </a:lnTo>
-                <a:close/>
-                <a:lnTo>
-                  <a:pt x="1326237" y="1603769"/>
-                </a:lnTo>
-                <a:close/>
-                <a:lnTo>
-                  <a:pt x="1329203" y="1595829"/>
-                </a:lnTo>
-                <a:close/>
-                <a:lnTo>
-                  <a:pt x="1332167" y="1587859"/>
-                </a:lnTo>
-                <a:close/>
-                <a:lnTo>
-                  <a:pt x="1335136" y="1579857"/>
-                </a:lnTo>
-                <a:close/>
-                <a:lnTo>
-                  <a:pt x="1338114" y="1571821"/>
-                </a:lnTo>
-                <a:close/>
-                <a:lnTo>
-                  <a:pt x="1341106" y="1563747"/>
-                </a:lnTo>
-                <a:close/>
-                <a:lnTo>
-                  <a:pt x="1344117" y="1555635"/>
-                </a:lnTo>
-                <a:close/>
-                <a:lnTo>
-                  <a:pt x="1347146" y="1547485"/>
-                </a:lnTo>
-                <a:close/>
-                <a:lnTo>
-                  <a:pt x="1350187" y="1539303"/>
-                </a:lnTo>
-                <a:close/>
-                <a:lnTo>
-                  <a:pt x="1353235" y="1531093"/>
-                </a:lnTo>
-                <a:close/>
-                <a:lnTo>
-                  <a:pt x="1356285" y="1522860"/>
-                </a:lnTo>
-                <a:close/>
-                <a:lnTo>
-                  <a:pt x="1359330" y="1514609"/>
-                </a:lnTo>
-                <a:close/>
-                <a:lnTo>
-                  <a:pt x="1362366" y="1506345"/>
-                </a:lnTo>
-                <a:close/>
-                <a:lnTo>
-                  <a:pt x="1365386" y="1498073"/>
-                </a:lnTo>
-                <a:close/>
-                <a:lnTo>
-                  <a:pt x="1368387" y="1489796"/>
-                </a:lnTo>
-                <a:close/>
-                <a:lnTo>
-                  <a:pt x="1371372" y="1481512"/>
-                </a:lnTo>
-                <a:close/>
-                <a:lnTo>
-                  <a:pt x="1374345" y="1473215"/>
-                </a:lnTo>
-                <a:close/>
-                <a:lnTo>
-                  <a:pt x="1377311" y="1464901"/>
-                </a:lnTo>
-                <a:close/>
-                <a:lnTo>
-                  <a:pt x="1380275" y="1456565"/>
-                </a:lnTo>
-                <a:close/>
-                <a:lnTo>
-                  <a:pt x="1383243" y="1448201"/>
-                </a:lnTo>
-                <a:close/>
-                <a:lnTo>
-                  <a:pt x="1386219" y="1439805"/>
-                </a:lnTo>
-                <a:close/>
-                <a:lnTo>
-                  <a:pt x="1389208" y="1431373"/>
-                </a:lnTo>
-                <a:close/>
-                <a:lnTo>
-                  <a:pt x="1392213" y="1422900"/>
-                </a:lnTo>
-                <a:close/>
-                <a:lnTo>
-                  <a:pt x="1395232" y="1414390"/>
-                </a:lnTo>
-                <a:close/>
-                <a:lnTo>
-                  <a:pt x="1398263" y="1405845"/>
-                </a:lnTo>
-                <a:close/>
-                <a:lnTo>
-                  <a:pt x="1401304" y="1397269"/>
-                </a:lnTo>
-                <a:close/>
-                <a:lnTo>
-                  <a:pt x="1404352" y="1388663"/>
-                </a:lnTo>
-                <a:close/>
-                <a:lnTo>
-                  <a:pt x="1407406" y="1380031"/>
-                </a:lnTo>
-                <a:close/>
-                <a:lnTo>
-                  <a:pt x="1410462" y="1371376"/>
-                </a:lnTo>
-                <a:close/>
-                <a:lnTo>
-                  <a:pt x="1413519" y="1362700"/>
-                </a:lnTo>
-                <a:close/>
-                <a:lnTo>
-                  <a:pt x="1416574" y="1354004"/>
-                </a:lnTo>
-                <a:close/>
-                <a:lnTo>
-                  <a:pt x="1419626" y="1345289"/>
-                </a:lnTo>
-                <a:close/>
-                <a:lnTo>
-                  <a:pt x="1422673" y="1336554"/>
-                </a:lnTo>
-                <a:close/>
-                <a:lnTo>
-                  <a:pt x="1425712" y="1327798"/>
-                </a:lnTo>
-                <a:close/>
-                <a:lnTo>
-                  <a:pt x="1428742" y="1319022"/>
-                </a:lnTo>
-                <a:close/>
-                <a:lnTo>
-                  <a:pt x="1431761" y="1310226"/>
-                </a:lnTo>
-                <a:close/>
-                <a:lnTo>
-                  <a:pt x="1434767" y="1301409"/>
-                </a:lnTo>
-                <a:close/>
-                <a:lnTo>
-                  <a:pt x="1437758" y="1292571"/>
-                </a:lnTo>
-                <a:close/>
-                <a:lnTo>
-                  <a:pt x="1440737" y="1283710"/>
-                </a:lnTo>
-                <a:close/>
-                <a:lnTo>
-                  <a:pt x="1443708" y="1274824"/>
-                </a:lnTo>
-                <a:close/>
-                <a:lnTo>
-                  <a:pt x="1446676" y="1265912"/>
-                </a:lnTo>
-                <a:close/>
-                <a:lnTo>
-                  <a:pt x="1449644" y="1256971"/>
-                </a:lnTo>
-                <a:close/>
-                <a:lnTo>
-                  <a:pt x="1452615" y="1247999"/>
-                </a:lnTo>
-                <a:close/>
-                <a:lnTo>
-                  <a:pt x="1455595" y="1238995"/>
-                </a:lnTo>
-                <a:close/>
-                <a:lnTo>
-                  <a:pt x="1458587" y="1229956"/>
-                </a:lnTo>
-                <a:close/>
-                <a:lnTo>
-                  <a:pt x="1461594" y="1220882"/>
-                </a:lnTo>
-                <a:close/>
-                <a:lnTo>
-                  <a:pt x="1464613" y="1211774"/>
-                </a:lnTo>
-                <a:close/>
-                <a:lnTo>
-                  <a:pt x="1467644" y="1202634"/>
-                </a:lnTo>
-                <a:close/>
-                <a:lnTo>
-                  <a:pt x="1470684" y="1193465"/>
-                </a:lnTo>
-                <a:close/>
-                <a:lnTo>
-                  <a:pt x="1473731" y="1184268"/>
-                </a:lnTo>
-                <a:close/>
-                <a:lnTo>
-                  <a:pt x="1476783" y="1175046"/>
-                </a:lnTo>
-                <a:close/>
-                <a:lnTo>
-                  <a:pt x="1479839" y="1165800"/>
-                </a:lnTo>
-                <a:close/>
-                <a:lnTo>
-                  <a:pt x="1482896" y="1156533"/>
-                </a:lnTo>
-                <a:close/>
-                <a:lnTo>
-                  <a:pt x="1485952" y="1147245"/>
-                </a:lnTo>
-                <a:close/>
-                <a:lnTo>
-                  <a:pt x="1489005" y="1137937"/>
-                </a:lnTo>
-                <a:close/>
-                <a:lnTo>
-                  <a:pt x="1492053" y="1128608"/>
-                </a:lnTo>
-                <a:close/>
-                <a:lnTo>
-                  <a:pt x="1495093" y="1119257"/>
-                </a:lnTo>
-                <a:close/>
-                <a:lnTo>
-                  <a:pt x="1498124" y="1109886"/>
-                </a:lnTo>
-                <a:close/>
-                <a:lnTo>
-                  <a:pt x="1501142" y="1100493"/>
-                </a:lnTo>
-                <a:close/>
-                <a:lnTo>
-                  <a:pt x="1504146" y="1091079"/>
-                </a:lnTo>
-                <a:close/>
-                <a:lnTo>
-                  <a:pt x="1507134" y="1081643"/>
-                </a:lnTo>
-                <a:close/>
-                <a:lnTo>
-                  <a:pt x="1510109" y="1072184"/>
-                </a:lnTo>
-                <a:close/>
-                <a:lnTo>
-                  <a:pt x="1513077" y="1062701"/>
-                </a:lnTo>
-                <a:close/>
-                <a:lnTo>
-                  <a:pt x="1516041" y="1053193"/>
-                </a:lnTo>
-                <a:close/>
-                <a:lnTo>
-                  <a:pt x="1519007" y="1043657"/>
-                </a:lnTo>
-                <a:close/>
-                <a:lnTo>
-                  <a:pt x="1521981" y="1034093"/>
-                </a:lnTo>
-                <a:close/>
-                <a:lnTo>
-                  <a:pt x="1524966" y="1024499"/>
-                </a:lnTo>
-                <a:close/>
-                <a:lnTo>
-                  <a:pt x="1527968" y="1014873"/>
-                </a:lnTo>
-                <a:close/>
-                <a:lnTo>
-                  <a:pt x="1530990" y="1005215"/>
-                </a:lnTo>
-                <a:close/>
-                <a:lnTo>
-                  <a:pt x="1534026" y="995524"/>
-                </a:lnTo>
-                <a:close/>
-                <a:lnTo>
-                  <a:pt x="1537072" y="985800"/>
-                </a:lnTo>
-                <a:close/>
-                <a:lnTo>
-                  <a:pt x="1540122" y="976042"/>
-                </a:lnTo>
-                <a:close/>
-                <a:lnTo>
-                  <a:pt x="1543170" y="966252"/>
-                </a:lnTo>
-                <a:close/>
-                <a:lnTo>
-                  <a:pt x="1546210" y="956428"/>
-                </a:lnTo>
-                <a:close/>
-                <a:lnTo>
-                  <a:pt x="1549238" y="946570"/>
-                </a:lnTo>
-                <a:close/>
-                <a:lnTo>
-                  <a:pt x="1552248" y="936679"/>
-                </a:lnTo>
-                <a:close/>
-                <a:lnTo>
-                  <a:pt x="1555239" y="926754"/>
-                </a:lnTo>
-                <a:close/>
-                <a:lnTo>
-                  <a:pt x="1558216" y="916799"/>
-                </a:lnTo>
-                <a:close/>
-                <a:lnTo>
-                  <a:pt x="1561184" y="906815"/>
-                </a:lnTo>
-                <a:close/>
-                <a:lnTo>
-                  <a:pt x="1564149" y="896805"/>
-                </a:lnTo>
-                <a:close/>
-                <a:lnTo>
-                  <a:pt x="1567114" y="886770"/>
-                </a:lnTo>
-                <a:close/>
-                <a:lnTo>
-                  <a:pt x="1570086" y="876713"/>
-                </a:lnTo>
-                <a:close/>
-                <a:lnTo>
-                  <a:pt x="1573069" y="866635"/>
-                </a:lnTo>
-                <a:close/>
-                <a:lnTo>
-                  <a:pt x="1576067" y="856539"/>
-                </a:lnTo>
-                <a:close/>
-                <a:lnTo>
-                  <a:pt x="1579080" y="846423"/>
-                </a:lnTo>
-                <a:close/>
-                <a:lnTo>
-                  <a:pt x="1582106" y="836286"/>
-                </a:lnTo>
-                <a:close/>
-                <a:lnTo>
-                  <a:pt x="1585143" y="826124"/>
-                </a:lnTo>
-                <a:close/>
-                <a:lnTo>
-                  <a:pt x="1588189" y="815937"/>
-                </a:lnTo>
-                <a:close/>
-                <a:lnTo>
-                  <a:pt x="1591240" y="805721"/>
-                </a:lnTo>
-                <a:close/>
-                <a:lnTo>
-                  <a:pt x="1594295" y="795475"/>
-                </a:lnTo>
-                <a:close/>
-                <a:lnTo>
-                  <a:pt x="1597352" y="785196"/>
-                </a:lnTo>
-                <a:close/>
-                <a:lnTo>
-                  <a:pt x="1600409" y="774884"/>
-                </a:lnTo>
-                <a:close/>
-                <a:lnTo>
-                  <a:pt x="1603462" y="764537"/>
-                </a:lnTo>
-                <a:close/>
-                <a:lnTo>
-                  <a:pt x="1606512" y="754157"/>
-                </a:lnTo>
-                <a:close/>
-                <a:lnTo>
-                  <a:pt x="1609554" y="743744"/>
-                </a:lnTo>
-                <a:close/>
-                <a:lnTo>
-                  <a:pt x="1612589" y="733299"/>
-                </a:lnTo>
-                <a:close/>
-                <a:lnTo>
-                  <a:pt x="1615613" y="722822"/>
-                </a:lnTo>
-                <a:close/>
-                <a:lnTo>
-                  <a:pt x="1618624" y="712315"/>
-                </a:lnTo>
-                <a:close/>
-                <a:lnTo>
-                  <a:pt x="1621622" y="701777"/>
-                </a:lnTo>
-                <a:close/>
-                <a:lnTo>
-                  <a:pt x="1624605" y="691209"/>
-                </a:lnTo>
-                <a:close/>
-                <a:lnTo>
-                  <a:pt x="1627580" y="680611"/>
-                </a:lnTo>
-                <a:close/>
-                <a:lnTo>
-                  <a:pt x="1630549" y="669982"/>
-                </a:lnTo>
-                <a:close/>
-                <a:lnTo>
-                  <a:pt x="1633516" y="659323"/>
-                </a:lnTo>
-                <a:close/>
-                <a:lnTo>
-                  <a:pt x="1636485" y="648632"/>
-                </a:lnTo>
-                <a:close/>
-                <a:lnTo>
-                  <a:pt x="1639461" y="637911"/>
-                </a:lnTo>
-                <a:close/>
-                <a:lnTo>
-                  <a:pt x="1642447" y="627159"/>
-                </a:lnTo>
-                <a:close/>
-                <a:lnTo>
-                  <a:pt x="1645448" y="616376"/>
-                </a:lnTo>
-                <a:close/>
-                <a:lnTo>
-                  <a:pt x="1648462" y="605561"/>
-                </a:lnTo>
-                <a:close/>
-                <a:lnTo>
-                  <a:pt x="1651488" y="594716"/>
-                </a:lnTo>
-                <a:close/>
-                <a:lnTo>
-                  <a:pt x="1654524" y="583839"/>
-                </a:lnTo>
-                <a:close/>
-                <a:lnTo>
-                  <a:pt x="1657568" y="572931"/>
-                </a:lnTo>
-                <a:close/>
-                <a:lnTo>
-                  <a:pt x="1660618" y="561992"/>
-                </a:lnTo>
-                <a:close/>
-                <a:lnTo>
-                  <a:pt x="1663673" y="551022"/>
-                </a:lnTo>
-                <a:close/>
-                <a:lnTo>
-                  <a:pt x="1666729" y="540020"/>
-                </a:lnTo>
-                <a:close/>
-                <a:lnTo>
-                  <a:pt x="1669786" y="528988"/>
-                </a:lnTo>
-                <a:close/>
-                <a:lnTo>
-                  <a:pt x="1672841" y="517926"/>
-                </a:lnTo>
-                <a:close/>
-                <a:lnTo>
-                  <a:pt x="1675891" y="506832"/>
-                </a:lnTo>
-                <a:close/>
-                <a:lnTo>
-                  <a:pt x="1678935" y="495707"/>
-                </a:lnTo>
-                <a:close/>
-                <a:lnTo>
-                  <a:pt x="1681970" y="484551"/>
-                </a:lnTo>
-                <a:close/>
-                <a:lnTo>
-                  <a:pt x="1684994" y="473364"/>
-                </a:lnTo>
-                <a:close/>
-                <a:lnTo>
-                  <a:pt x="1688005" y="462146"/>
-                </a:lnTo>
-                <a:close/>
-                <a:lnTo>
-                  <a:pt x="1691000" y="450897"/>
-                </a:lnTo>
-                <a:close/>
-                <a:lnTo>
-                  <a:pt x="1693980" y="439617"/>
-                </a:lnTo>
-                <a:close/>
-                <a:lnTo>
-                  <a:pt x="1696950" y="428306"/>
-                </a:lnTo>
-                <a:close/>
-                <a:lnTo>
-                  <a:pt x="1699915" y="416964"/>
-                </a:lnTo>
-                <a:close/>
-                <a:lnTo>
-                  <a:pt x="1702880" y="405591"/>
-                </a:lnTo>
-                <a:close/>
-                <a:lnTo>
-                  <a:pt x="1705849" y="394187"/>
-                </a:lnTo>
-                <a:close/>
-                <a:lnTo>
-                  <a:pt x="1708829" y="382752"/>
-                </a:lnTo>
-                <a:close/>
-                <a:lnTo>
-                  <a:pt x="1711823" y="371286"/>
-                </a:lnTo>
-                <a:close/>
-                <a:lnTo>
-                  <a:pt x="1714837" y="359789"/>
-                </a:lnTo>
-                <a:close/>
-                <a:lnTo>
-                  <a:pt x="1717867" y="348261"/>
-                </a:lnTo>
-                <a:close/>
-                <a:lnTo>
-                  <a:pt x="1720910" y="336703"/>
-                </a:lnTo>
-                <a:close/>
-                <a:lnTo>
-                  <a:pt x="1723958" y="325113"/>
-                </a:lnTo>
-                <a:close/>
-                <a:lnTo>
-                  <a:pt x="1727007" y="313492"/>
-                </a:lnTo>
-                <a:close/>
-                <a:lnTo>
-                  <a:pt x="1730052" y="301840"/>
-                </a:lnTo>
-                <a:close/>
-                <a:lnTo>
-                  <a:pt x="1733086" y="290156"/>
-                </a:lnTo>
-                <a:close/>
-                <a:lnTo>
-                  <a:pt x="1736104" y="278441"/>
-                </a:lnTo>
-                <a:close/>
-                <a:lnTo>
-                  <a:pt x="1739103" y="266694"/>
-                </a:lnTo>
-                <a:close/>
-                <a:lnTo>
-                  <a:pt x="1742086" y="254917"/>
-                </a:lnTo>
-                <a:close/>
-                <a:lnTo>
-                  <a:pt x="1745057" y="243108"/>
-                </a:lnTo>
-                <a:close/>
-                <a:lnTo>
-                  <a:pt x="1748023" y="231269"/>
-                </a:lnTo>
-                <a:close/>
-                <a:lnTo>
-                  <a:pt x="1750988" y="219399"/>
-                </a:lnTo>
-                <a:close/>
-                <a:lnTo>
-                  <a:pt x="1753956" y="207500"/>
-                </a:lnTo>
-                <a:close/>
-                <a:lnTo>
-                  <a:pt x="1756933" y="195571"/>
-                </a:lnTo>
-                <a:close/>
-                <a:lnTo>
-                  <a:pt x="1759924" y="183613"/>
-                </a:lnTo>
-                <a:close/>
-                <a:lnTo>
-                  <a:pt x="1762931" y="171626"/>
-                </a:lnTo>
-                <a:close/>
-                <a:lnTo>
-                  <a:pt x="1765951" y="159608"/>
-                </a:lnTo>
-                <a:close/>
-                <a:lnTo>
-                  <a:pt x="1768983" y="147558"/>
-                </a:lnTo>
-                <a:close/>
-                <a:lnTo>
-                  <a:pt x="1772025" y="135475"/>
-                </a:lnTo>
-                <a:close/>
-                <a:lnTo>
-                  <a:pt x="1775074" y="123357"/>
-                </a:lnTo>
-                <a:close/>
-                <a:lnTo>
-                  <a:pt x="1778128" y="111204"/>
-                </a:lnTo>
-                <a:close/>
-                <a:lnTo>
-                  <a:pt x="1781186" y="99013"/>
-                </a:lnTo>
-                <a:close/>
-                <a:lnTo>
-                  <a:pt x="1784243" y="86784"/>
-                </a:lnTo>
-                <a:close/>
-                <a:lnTo>
-                  <a:pt x="1787300" y="74516"/>
-                </a:lnTo>
-                <a:close/>
-                <a:lnTo>
-                  <a:pt x="1790352" y="62206"/>
-                </a:lnTo>
-                <a:close/>
-                <a:lnTo>
-                  <a:pt x="1793399" y="49854"/>
-                </a:lnTo>
-                <a:close/>
-                <a:lnTo>
-                  <a:pt x="1796438" y="37459"/>
-                </a:lnTo>
-                <a:close/>
-                <a:lnTo>
-                  <a:pt x="1799466" y="25019"/>
-                </a:lnTo>
-                <a:close/>
-                <a:lnTo>
-                  <a:pt x="1802482" y="12533"/>
-                </a:lnTo>
-                <a:close/>
-                <a:lnTo>
-                  <a:pt x="1805483" y="0"/>
+                  <a:pt x="2504" y="2635205"/>
+                </a:lnTo>
+                <a:close/>
+                <a:lnTo>
+                  <a:pt x="5007" y="2636760"/>
+                </a:lnTo>
+                <a:close/>
+                <a:lnTo>
+                  <a:pt x="7511" y="2638150"/>
+                </a:lnTo>
+                <a:close/>
+                <a:lnTo>
+                  <a:pt x="10014" y="2639391"/>
+                </a:lnTo>
+                <a:close/>
+                <a:lnTo>
+                  <a:pt x="12518" y="2640497"/>
+                </a:lnTo>
+                <a:close/>
+                <a:lnTo>
+                  <a:pt x="15021" y="2641484"/>
+                </a:lnTo>
+                <a:close/>
+                <a:lnTo>
+                  <a:pt x="17525" y="2642366"/>
+                </a:lnTo>
+                <a:close/>
+                <a:lnTo>
+                  <a:pt x="20028" y="2643157"/>
+                </a:lnTo>
+                <a:close/>
+                <a:lnTo>
+                  <a:pt x="22532" y="2643874"/>
+                </a:lnTo>
+                <a:close/>
+                <a:lnTo>
+                  <a:pt x="25035" y="2644529"/>
+                </a:lnTo>
+                <a:close/>
+                <a:lnTo>
+                  <a:pt x="27539" y="2645139"/>
+                </a:lnTo>
+                <a:close/>
+                <a:lnTo>
+                  <a:pt x="30042" y="2645717"/>
+                </a:lnTo>
+                <a:close/>
+                <a:lnTo>
+                  <a:pt x="32546" y="2646280"/>
+                </a:lnTo>
+                <a:close/>
+                <a:lnTo>
+                  <a:pt x="35049" y="2646840"/>
+                </a:lnTo>
+                <a:close/>
+                <a:lnTo>
+                  <a:pt x="37553" y="2647414"/>
+                </a:lnTo>
+                <a:close/>
+                <a:lnTo>
+                  <a:pt x="40057" y="2648008"/>
+                </a:lnTo>
+                <a:close/>
+                <a:lnTo>
+                  <a:pt x="42560" y="2648620"/>
+                </a:lnTo>
+                <a:close/>
+                <a:lnTo>
+                  <a:pt x="45064" y="2649245"/>
+                </a:lnTo>
+                <a:close/>
+                <a:lnTo>
+                  <a:pt x="47567" y="2649881"/>
+                </a:lnTo>
+                <a:close/>
+                <a:lnTo>
+                  <a:pt x="50071" y="2650523"/>
+                </a:lnTo>
+                <a:close/>
+                <a:lnTo>
+                  <a:pt x="52574" y="2651169"/>
+                </a:lnTo>
+                <a:close/>
+                <a:lnTo>
+                  <a:pt x="55078" y="2651815"/>
+                </a:lnTo>
+                <a:close/>
+                <a:lnTo>
+                  <a:pt x="57581" y="2652458"/>
+                </a:lnTo>
+                <a:close/>
+                <a:lnTo>
+                  <a:pt x="60085" y="2653096"/>
+                </a:lnTo>
+                <a:close/>
+                <a:lnTo>
+                  <a:pt x="62588" y="2653730"/>
+                </a:lnTo>
+                <a:close/>
+                <a:lnTo>
+                  <a:pt x="65092" y="2654358"/>
+                </a:lnTo>
+                <a:close/>
+                <a:lnTo>
+                  <a:pt x="67595" y="2654979"/>
+                </a:lnTo>
+                <a:close/>
+                <a:lnTo>
+                  <a:pt x="70099" y="2655594"/>
+                </a:lnTo>
+                <a:close/>
+                <a:lnTo>
+                  <a:pt x="72602" y="2656200"/>
+                </a:lnTo>
+                <a:close/>
+                <a:lnTo>
+                  <a:pt x="75106" y="2656798"/>
+                </a:lnTo>
+                <a:close/>
+                <a:lnTo>
+                  <a:pt x="77610" y="2657393"/>
+                </a:lnTo>
+                <a:close/>
+                <a:lnTo>
+                  <a:pt x="80113" y="2657990"/>
+                </a:lnTo>
+                <a:close/>
+                <a:lnTo>
+                  <a:pt x="82617" y="2658597"/>
+                </a:lnTo>
+                <a:close/>
+                <a:lnTo>
+                  <a:pt x="85120" y="2659219"/>
+                </a:lnTo>
+                <a:close/>
+                <a:lnTo>
+                  <a:pt x="87624" y="2659864"/>
+                </a:lnTo>
+                <a:close/>
+                <a:lnTo>
+                  <a:pt x="90127" y="2660537"/>
+                </a:lnTo>
+                <a:close/>
+                <a:lnTo>
+                  <a:pt x="92631" y="2661245"/>
+                </a:lnTo>
+                <a:close/>
+                <a:lnTo>
+                  <a:pt x="95134" y="2661979"/>
+                </a:lnTo>
+                <a:close/>
+                <a:lnTo>
+                  <a:pt x="97638" y="2662714"/>
+                </a:lnTo>
+                <a:close/>
+                <a:lnTo>
+                  <a:pt x="100141" y="2663425"/>
+                </a:lnTo>
+                <a:close/>
+                <a:lnTo>
+                  <a:pt x="102645" y="2664087"/>
+                </a:lnTo>
+                <a:close/>
+                <a:lnTo>
+                  <a:pt x="105148" y="2664675"/>
+                </a:lnTo>
+                <a:close/>
+                <a:lnTo>
+                  <a:pt x="107652" y="2665164"/>
+                </a:lnTo>
+                <a:close/>
+                <a:lnTo>
+                  <a:pt x="110155" y="2665528"/>
+                </a:lnTo>
+                <a:close/>
+                <a:lnTo>
+                  <a:pt x="112659" y="2665756"/>
+                </a:lnTo>
+                <a:close/>
+                <a:lnTo>
+                  <a:pt x="115162" y="2665866"/>
+                </a:lnTo>
+                <a:close/>
+                <a:lnTo>
+                  <a:pt x="117666" y="2665882"/>
+                </a:lnTo>
+                <a:close/>
+                <a:lnTo>
+                  <a:pt x="120170" y="2665829"/>
+                </a:lnTo>
+                <a:close/>
+                <a:lnTo>
+                  <a:pt x="122673" y="2665730"/>
+                </a:lnTo>
+                <a:close/>
+                <a:lnTo>
+                  <a:pt x="125177" y="2665609"/>
+                </a:lnTo>
+                <a:close/>
+                <a:lnTo>
+                  <a:pt x="127680" y="2665490"/>
+                </a:lnTo>
+                <a:close/>
+                <a:lnTo>
+                  <a:pt x="130184" y="2665395"/>
+                </a:lnTo>
+                <a:close/>
+                <a:lnTo>
+                  <a:pt x="132687" y="2665329"/>
+                </a:lnTo>
+                <a:close/>
+                <a:lnTo>
+                  <a:pt x="135191" y="2665292"/>
+                </a:lnTo>
+                <a:close/>
+                <a:lnTo>
+                  <a:pt x="137694" y="2665285"/>
+                </a:lnTo>
+                <a:close/>
+                <a:lnTo>
+                  <a:pt x="140198" y="2665305"/>
+                </a:lnTo>
+                <a:close/>
+                <a:lnTo>
+                  <a:pt x="142701" y="2665355"/>
+                </a:lnTo>
+                <a:close/>
+                <a:lnTo>
+                  <a:pt x="145205" y="2665433"/>
+                </a:lnTo>
+                <a:close/>
+                <a:lnTo>
+                  <a:pt x="147708" y="2665538"/>
+                </a:lnTo>
+                <a:close/>
+                <a:lnTo>
+                  <a:pt x="150212" y="2665659"/>
+                </a:lnTo>
+                <a:close/>
+                <a:lnTo>
+                  <a:pt x="152715" y="2665771"/>
+                </a:lnTo>
+                <a:close/>
+                <a:lnTo>
+                  <a:pt x="155219" y="2665852"/>
+                </a:lnTo>
+                <a:close/>
+                <a:lnTo>
+                  <a:pt x="157723" y="2665878"/>
+                </a:lnTo>
+                <a:close/>
+                <a:lnTo>
+                  <a:pt x="160226" y="2665825"/>
+                </a:lnTo>
+                <a:close/>
+                <a:lnTo>
+                  <a:pt x="162730" y="2665671"/>
+                </a:lnTo>
+                <a:close/>
+                <a:lnTo>
+                  <a:pt x="165233" y="2665391"/>
+                </a:lnTo>
+                <a:close/>
+                <a:lnTo>
+                  <a:pt x="167737" y="2664978"/>
+                </a:lnTo>
+                <a:close/>
+                <a:lnTo>
+                  <a:pt x="170240" y="2664452"/>
+                </a:lnTo>
+                <a:close/>
+                <a:lnTo>
+                  <a:pt x="172744" y="2663835"/>
+                </a:lnTo>
+                <a:close/>
+                <a:lnTo>
+                  <a:pt x="175247" y="2663153"/>
+                </a:lnTo>
+                <a:close/>
+                <a:lnTo>
+                  <a:pt x="177751" y="2662427"/>
+                </a:lnTo>
+                <a:close/>
+                <a:lnTo>
+                  <a:pt x="180254" y="2661681"/>
+                </a:lnTo>
+                <a:close/>
+                <a:lnTo>
+                  <a:pt x="182758" y="2660940"/>
+                </a:lnTo>
+                <a:close/>
+                <a:lnTo>
+                  <a:pt x="185261" y="2660222"/>
+                </a:lnTo>
+                <a:close/>
+                <a:lnTo>
+                  <a:pt x="187765" y="2659532"/>
+                </a:lnTo>
+                <a:close/>
+                <a:lnTo>
+                  <a:pt x="190268" y="2658871"/>
+                </a:lnTo>
+                <a:close/>
+                <a:lnTo>
+                  <a:pt x="192772" y="2658239"/>
+                </a:lnTo>
+                <a:close/>
+                <a:lnTo>
+                  <a:pt x="195276" y="2657636"/>
+                </a:lnTo>
+                <a:close/>
+                <a:lnTo>
+                  <a:pt x="197779" y="2657062"/>
+                </a:lnTo>
+                <a:close/>
+                <a:lnTo>
+                  <a:pt x="200283" y="2656518"/>
+                </a:lnTo>
+                <a:close/>
+                <a:lnTo>
+                  <a:pt x="202786" y="2656001"/>
+                </a:lnTo>
+                <a:close/>
+                <a:lnTo>
+                  <a:pt x="205290" y="2655499"/>
+                </a:lnTo>
+                <a:close/>
+                <a:lnTo>
+                  <a:pt x="207793" y="2654987"/>
+                </a:lnTo>
+                <a:close/>
+                <a:lnTo>
+                  <a:pt x="210297" y="2654440"/>
+                </a:lnTo>
+                <a:close/>
+                <a:lnTo>
+                  <a:pt x="212800" y="2653835"/>
+                </a:lnTo>
+                <a:close/>
+                <a:lnTo>
+                  <a:pt x="215304" y="2653147"/>
+                </a:lnTo>
+                <a:close/>
+                <a:lnTo>
+                  <a:pt x="217807" y="2652353"/>
+                </a:lnTo>
+                <a:close/>
+                <a:lnTo>
+                  <a:pt x="220311" y="2651428"/>
+                </a:lnTo>
+                <a:close/>
+                <a:lnTo>
+                  <a:pt x="222814" y="2650368"/>
+                </a:lnTo>
+                <a:close/>
+                <a:lnTo>
+                  <a:pt x="225318" y="2649196"/>
+                </a:lnTo>
+                <a:close/>
+                <a:lnTo>
+                  <a:pt x="227821" y="2647939"/>
+                </a:lnTo>
+                <a:close/>
+                <a:lnTo>
+                  <a:pt x="230325" y="2646621"/>
+                </a:lnTo>
+                <a:close/>
+                <a:lnTo>
+                  <a:pt x="232829" y="2645269"/>
+                </a:lnTo>
+                <a:close/>
+                <a:lnTo>
+                  <a:pt x="235332" y="2643909"/>
+                </a:lnTo>
+                <a:close/>
+                <a:lnTo>
+                  <a:pt x="237836" y="2642568"/>
+                </a:lnTo>
+                <a:close/>
+                <a:lnTo>
+                  <a:pt x="240339" y="2641263"/>
+                </a:lnTo>
+                <a:close/>
+                <a:lnTo>
+                  <a:pt x="242843" y="2639991"/>
+                </a:lnTo>
+                <a:close/>
+                <a:lnTo>
+                  <a:pt x="245346" y="2638744"/>
+                </a:lnTo>
+                <a:close/>
+                <a:lnTo>
+                  <a:pt x="247850" y="2637511"/>
+                </a:lnTo>
+                <a:close/>
+                <a:lnTo>
+                  <a:pt x="250353" y="2636284"/>
+                </a:lnTo>
+                <a:close/>
+                <a:lnTo>
+                  <a:pt x="252857" y="2635053"/>
+                </a:lnTo>
+                <a:close/>
+                <a:lnTo>
+                  <a:pt x="255360" y="2633809"/>
+                </a:lnTo>
+                <a:close/>
+                <a:lnTo>
+                  <a:pt x="257864" y="2632544"/>
+                </a:lnTo>
+                <a:close/>
+                <a:lnTo>
+                  <a:pt x="260367" y="2631263"/>
+                </a:lnTo>
+                <a:close/>
+                <a:lnTo>
+                  <a:pt x="262871" y="2629976"/>
+                </a:lnTo>
+                <a:close/>
+                <a:lnTo>
+                  <a:pt x="265374" y="2628694"/>
+                </a:lnTo>
+                <a:close/>
+                <a:lnTo>
+                  <a:pt x="267878" y="2627429"/>
+                </a:lnTo>
+                <a:close/>
+                <a:lnTo>
+                  <a:pt x="270382" y="2626192"/>
+                </a:lnTo>
+                <a:close/>
+                <a:lnTo>
+                  <a:pt x="272885" y="2624993"/>
+                </a:lnTo>
+                <a:close/>
+                <a:lnTo>
+                  <a:pt x="275389" y="2623844"/>
+                </a:lnTo>
+                <a:close/>
+                <a:lnTo>
+                  <a:pt x="277892" y="2622734"/>
+                </a:lnTo>
+                <a:close/>
+                <a:lnTo>
+                  <a:pt x="280396" y="2621630"/>
+                </a:lnTo>
+                <a:close/>
+                <a:lnTo>
+                  <a:pt x="282899" y="2620498"/>
+                </a:lnTo>
+                <a:close/>
+                <a:lnTo>
+                  <a:pt x="285403" y="2619301"/>
+                </a:lnTo>
+                <a:close/>
+                <a:lnTo>
+                  <a:pt x="287906" y="2618006"/>
+                </a:lnTo>
+                <a:close/>
+                <a:lnTo>
+                  <a:pt x="290410" y="2616577"/>
+                </a:lnTo>
+                <a:close/>
+                <a:lnTo>
+                  <a:pt x="292913" y="2614979"/>
+                </a:lnTo>
+                <a:close/>
+                <a:lnTo>
+                  <a:pt x="295417" y="2613199"/>
+                </a:lnTo>
+                <a:close/>
+                <a:lnTo>
+                  <a:pt x="297920" y="2611285"/>
+                </a:lnTo>
+                <a:close/>
+                <a:lnTo>
+                  <a:pt x="300424" y="2609296"/>
+                </a:lnTo>
+                <a:close/>
+                <a:lnTo>
+                  <a:pt x="302927" y="2607290"/>
+                </a:lnTo>
+                <a:close/>
+                <a:lnTo>
+                  <a:pt x="305431" y="2605326"/>
+                </a:lnTo>
+                <a:close/>
+                <a:lnTo>
+                  <a:pt x="307935" y="2603463"/>
+                </a:lnTo>
+                <a:close/>
+                <a:lnTo>
+                  <a:pt x="310438" y="2601758"/>
+                </a:lnTo>
+                <a:close/>
+                <a:lnTo>
+                  <a:pt x="312942" y="2600260"/>
+                </a:lnTo>
+                <a:close/>
+                <a:lnTo>
+                  <a:pt x="315445" y="2598943"/>
+                </a:lnTo>
+                <a:close/>
+                <a:lnTo>
+                  <a:pt x="317949" y="2597748"/>
+                </a:lnTo>
+                <a:close/>
+                <a:lnTo>
+                  <a:pt x="320452" y="2596616"/>
+                </a:lnTo>
+                <a:close/>
+                <a:lnTo>
+                  <a:pt x="322956" y="2595488"/>
+                </a:lnTo>
+                <a:close/>
+                <a:lnTo>
+                  <a:pt x="325459" y="2594307"/>
+                </a:lnTo>
+                <a:close/>
+                <a:lnTo>
+                  <a:pt x="327963" y="2593014"/>
+                </a:lnTo>
+                <a:close/>
+                <a:lnTo>
+                  <a:pt x="330466" y="2591551"/>
+                </a:lnTo>
+                <a:close/>
+                <a:lnTo>
+                  <a:pt x="332970" y="2589908"/>
+                </a:lnTo>
+                <a:close/>
+                <a:lnTo>
+                  <a:pt x="335473" y="2588119"/>
+                </a:lnTo>
+                <a:close/>
+                <a:lnTo>
+                  <a:pt x="337977" y="2586218"/>
+                </a:lnTo>
+                <a:close/>
+                <a:lnTo>
+                  <a:pt x="340480" y="2584241"/>
+                </a:lnTo>
+                <a:close/>
+                <a:lnTo>
+                  <a:pt x="342984" y="2582221"/>
+                </a:lnTo>
+                <a:close/>
+                <a:lnTo>
+                  <a:pt x="345487" y="2580195"/>
+                </a:lnTo>
+                <a:close/>
+                <a:lnTo>
+                  <a:pt x="347991" y="2578198"/>
+                </a:lnTo>
+                <a:close/>
+                <a:lnTo>
+                  <a:pt x="350495" y="2576250"/>
+                </a:lnTo>
+                <a:close/>
+                <a:lnTo>
+                  <a:pt x="352998" y="2574346"/>
+                </a:lnTo>
+                <a:close/>
+                <a:lnTo>
+                  <a:pt x="355502" y="2572472"/>
+                </a:lnTo>
+                <a:close/>
+                <a:lnTo>
+                  <a:pt x="358005" y="2570620"/>
+                </a:lnTo>
+                <a:close/>
+                <a:lnTo>
+                  <a:pt x="360509" y="2568777"/>
+                </a:lnTo>
+                <a:close/>
+                <a:lnTo>
+                  <a:pt x="363012" y="2566932"/>
+                </a:lnTo>
+                <a:close/>
+                <a:lnTo>
+                  <a:pt x="365516" y="2565074"/>
+                </a:lnTo>
+                <a:close/>
+                <a:lnTo>
+                  <a:pt x="368019" y="2563195"/>
+                </a:lnTo>
+                <a:close/>
+                <a:lnTo>
+                  <a:pt x="370523" y="2561300"/>
+                </a:lnTo>
+                <a:close/>
+                <a:lnTo>
+                  <a:pt x="373026" y="2559398"/>
+                </a:lnTo>
+                <a:close/>
+                <a:lnTo>
+                  <a:pt x="375530" y="2557498"/>
+                </a:lnTo>
+                <a:close/>
+                <a:lnTo>
+                  <a:pt x="378033" y="2555609"/>
+                </a:lnTo>
+                <a:close/>
+                <a:lnTo>
+                  <a:pt x="380537" y="2553742"/>
+                </a:lnTo>
+                <a:close/>
+                <a:lnTo>
+                  <a:pt x="383040" y="2551905"/>
+                </a:lnTo>
+                <a:close/>
+                <a:lnTo>
+                  <a:pt x="385544" y="2550106"/>
+                </a:lnTo>
+                <a:close/>
+                <a:lnTo>
+                  <a:pt x="388048" y="2548335"/>
+                </a:lnTo>
+                <a:close/>
+                <a:lnTo>
+                  <a:pt x="390551" y="2546565"/>
+                </a:lnTo>
+                <a:close/>
+                <a:lnTo>
+                  <a:pt x="393055" y="2544770"/>
+                </a:lnTo>
+                <a:close/>
+                <a:lnTo>
+                  <a:pt x="395558" y="2542924"/>
+                </a:lnTo>
+                <a:close/>
+                <a:lnTo>
+                  <a:pt x="398062" y="2541000"/>
+                </a:lnTo>
+                <a:close/>
+                <a:lnTo>
+                  <a:pt x="400565" y="2538972"/>
+                </a:lnTo>
+                <a:close/>
+                <a:lnTo>
+                  <a:pt x="403069" y="2536813"/>
+                </a:lnTo>
+                <a:close/>
+                <a:lnTo>
+                  <a:pt x="405572" y="2534516"/>
+                </a:lnTo>
+                <a:close/>
+                <a:lnTo>
+                  <a:pt x="408076" y="2532104"/>
+                </a:lnTo>
+                <a:close/>
+                <a:lnTo>
+                  <a:pt x="410579" y="2529601"/>
+                </a:lnTo>
+                <a:close/>
+                <a:lnTo>
+                  <a:pt x="413083" y="2527034"/>
+                </a:lnTo>
+                <a:close/>
+                <a:lnTo>
+                  <a:pt x="415586" y="2524428"/>
+                </a:lnTo>
+                <a:close/>
+                <a:lnTo>
+                  <a:pt x="418090" y="2521809"/>
+                </a:lnTo>
+                <a:close/>
+                <a:lnTo>
+                  <a:pt x="420593" y="2519204"/>
+                </a:lnTo>
+                <a:close/>
+                <a:lnTo>
+                  <a:pt x="423097" y="2516631"/>
+                </a:lnTo>
+                <a:close/>
+                <a:lnTo>
+                  <a:pt x="425601" y="2514092"/>
+                </a:lnTo>
+                <a:close/>
+                <a:lnTo>
+                  <a:pt x="428104" y="2511579"/>
+                </a:lnTo>
+                <a:close/>
+                <a:lnTo>
+                  <a:pt x="430608" y="2509087"/>
+                </a:lnTo>
+                <a:close/>
+                <a:lnTo>
+                  <a:pt x="433111" y="2506608"/>
+                </a:lnTo>
+                <a:close/>
+                <a:lnTo>
+                  <a:pt x="435615" y="2504137"/>
+                </a:lnTo>
+                <a:close/>
+                <a:lnTo>
+                  <a:pt x="438118" y="2501668"/>
+                </a:lnTo>
+                <a:close/>
+                <a:lnTo>
+                  <a:pt x="440622" y="2499194"/>
+                </a:lnTo>
+                <a:close/>
+                <a:lnTo>
+                  <a:pt x="443125" y="2496712"/>
+                </a:lnTo>
+                <a:close/>
+                <a:lnTo>
+                  <a:pt x="445629" y="2494223"/>
+                </a:lnTo>
+                <a:close/>
+                <a:lnTo>
+                  <a:pt x="448132" y="2491725"/>
+                </a:lnTo>
+                <a:close/>
+                <a:lnTo>
+                  <a:pt x="450636" y="2489218"/>
+                </a:lnTo>
+                <a:close/>
+                <a:lnTo>
+                  <a:pt x="453139" y="2486701"/>
+                </a:lnTo>
+                <a:close/>
+                <a:lnTo>
+                  <a:pt x="455643" y="2484173"/>
+                </a:lnTo>
+                <a:close/>
+                <a:lnTo>
+                  <a:pt x="458146" y="2481635"/>
+                </a:lnTo>
+                <a:close/>
+                <a:lnTo>
+                  <a:pt x="460650" y="2479089"/>
+                </a:lnTo>
+                <a:close/>
+                <a:lnTo>
+                  <a:pt x="463154" y="2476544"/>
+                </a:lnTo>
+                <a:close/>
+                <a:lnTo>
+                  <a:pt x="465657" y="2474008"/>
+                </a:lnTo>
+                <a:close/>
+                <a:lnTo>
+                  <a:pt x="468161" y="2471490"/>
+                </a:lnTo>
+                <a:close/>
+                <a:lnTo>
+                  <a:pt x="470664" y="2468999"/>
+                </a:lnTo>
+                <a:close/>
+                <a:lnTo>
+                  <a:pt x="473168" y="2466544"/>
+                </a:lnTo>
+                <a:close/>
+                <a:lnTo>
+                  <a:pt x="475671" y="2464133"/>
+                </a:lnTo>
+                <a:close/>
+                <a:lnTo>
+                  <a:pt x="478175" y="2461767"/>
+                </a:lnTo>
+                <a:close/>
+                <a:lnTo>
+                  <a:pt x="480678" y="2459416"/>
+                </a:lnTo>
+                <a:close/>
+                <a:lnTo>
+                  <a:pt x="483182" y="2457046"/>
+                </a:lnTo>
+                <a:close/>
+                <a:lnTo>
+                  <a:pt x="485685" y="2454623"/>
+                </a:lnTo>
+                <a:close/>
+                <a:lnTo>
+                  <a:pt x="488189" y="2452113"/>
+                </a:lnTo>
+                <a:close/>
+                <a:lnTo>
+                  <a:pt x="490692" y="2449481"/>
+                </a:lnTo>
+                <a:close/>
+                <a:lnTo>
+                  <a:pt x="493196" y="2446692"/>
+                </a:lnTo>
+                <a:close/>
+                <a:lnTo>
+                  <a:pt x="495699" y="2443720"/>
+                </a:lnTo>
+                <a:close/>
+                <a:lnTo>
+                  <a:pt x="498203" y="2440594"/>
+                </a:lnTo>
+                <a:close/>
+                <a:lnTo>
+                  <a:pt x="500707" y="2437373"/>
+                </a:lnTo>
+                <a:close/>
+                <a:lnTo>
+                  <a:pt x="503210" y="2434115"/>
+                </a:lnTo>
+                <a:close/>
+                <a:lnTo>
+                  <a:pt x="505714" y="2430878"/>
+                </a:lnTo>
+                <a:close/>
+                <a:lnTo>
+                  <a:pt x="508217" y="2427721"/>
+                </a:lnTo>
+                <a:close/>
+                <a:lnTo>
+                  <a:pt x="510721" y="2424702"/>
+                </a:lnTo>
+                <a:close/>
+                <a:lnTo>
+                  <a:pt x="513224" y="2421878"/>
+                </a:lnTo>
+                <a:close/>
+                <a:lnTo>
+                  <a:pt x="515728" y="2419252"/>
+                </a:lnTo>
+                <a:close/>
+                <a:lnTo>
+                  <a:pt x="518231" y="2416768"/>
+                </a:lnTo>
+                <a:close/>
+                <a:lnTo>
+                  <a:pt x="520735" y="2414368"/>
+                </a:lnTo>
+                <a:close/>
+                <a:lnTo>
+                  <a:pt x="523238" y="2411994"/>
+                </a:lnTo>
+                <a:close/>
+                <a:lnTo>
+                  <a:pt x="525742" y="2409587"/>
+                </a:lnTo>
+                <a:close/>
+                <a:lnTo>
+                  <a:pt x="528245" y="2407088"/>
+                </a:lnTo>
+                <a:close/>
+                <a:lnTo>
+                  <a:pt x="530749" y="2404440"/>
+                </a:lnTo>
+                <a:close/>
+                <a:lnTo>
+                  <a:pt x="533252" y="2401607"/>
+                </a:lnTo>
+                <a:close/>
+                <a:lnTo>
+                  <a:pt x="535756" y="2398616"/>
+                </a:lnTo>
+                <a:close/>
+                <a:lnTo>
+                  <a:pt x="538259" y="2395501"/>
+                </a:lnTo>
+                <a:close/>
+                <a:lnTo>
+                  <a:pt x="540763" y="2392295"/>
+                </a:lnTo>
+                <a:close/>
+                <a:lnTo>
+                  <a:pt x="543267" y="2389035"/>
+                </a:lnTo>
+                <a:close/>
+                <a:lnTo>
+                  <a:pt x="545770" y="2385754"/>
+                </a:lnTo>
+                <a:close/>
+                <a:lnTo>
+                  <a:pt x="548274" y="2382487"/>
+                </a:lnTo>
+                <a:close/>
+                <a:lnTo>
+                  <a:pt x="550777" y="2379264"/>
+                </a:lnTo>
+                <a:close/>
+                <a:lnTo>
+                  <a:pt x="553281" y="2376086"/>
+                </a:lnTo>
+                <a:close/>
+                <a:lnTo>
+                  <a:pt x="555784" y="2372944"/>
+                </a:lnTo>
+                <a:close/>
+                <a:lnTo>
+                  <a:pt x="558288" y="2369829"/>
+                </a:lnTo>
+                <a:close/>
+                <a:lnTo>
+                  <a:pt x="560791" y="2366732"/>
+                </a:lnTo>
+                <a:close/>
+                <a:lnTo>
+                  <a:pt x="563295" y="2363642"/>
+                </a:lnTo>
+                <a:close/>
+                <a:lnTo>
+                  <a:pt x="565798" y="2360550"/>
+                </a:lnTo>
+                <a:close/>
+                <a:lnTo>
+                  <a:pt x="568302" y="2357448"/>
+                </a:lnTo>
+                <a:close/>
+                <a:lnTo>
+                  <a:pt x="570805" y="2354332"/>
+                </a:lnTo>
+                <a:close/>
+                <a:lnTo>
+                  <a:pt x="573309" y="2351206"/>
+                </a:lnTo>
+                <a:close/>
+                <a:lnTo>
+                  <a:pt x="575812" y="2348073"/>
+                </a:lnTo>
+                <a:close/>
+                <a:lnTo>
+                  <a:pt x="578316" y="2344935"/>
+                </a:lnTo>
+                <a:close/>
+                <a:lnTo>
+                  <a:pt x="580820" y="2341797"/>
+                </a:lnTo>
+                <a:close/>
+                <a:lnTo>
+                  <a:pt x="583323" y="2338660"/>
+                </a:lnTo>
+                <a:close/>
+                <a:lnTo>
+                  <a:pt x="585827" y="2335529"/>
+                </a:lnTo>
+                <a:close/>
+                <a:lnTo>
+                  <a:pt x="588330" y="2332404"/>
+                </a:lnTo>
+                <a:close/>
+                <a:lnTo>
+                  <a:pt x="590834" y="2329283"/>
+                </a:lnTo>
+                <a:close/>
+                <a:lnTo>
+                  <a:pt x="593337" y="2326163"/>
+                </a:lnTo>
+                <a:close/>
+                <a:lnTo>
+                  <a:pt x="595841" y="2323040"/>
+                </a:lnTo>
+                <a:close/>
+                <a:lnTo>
+                  <a:pt x="598344" y="2319911"/>
+                </a:lnTo>
+                <a:close/>
+                <a:lnTo>
+                  <a:pt x="600848" y="2316774"/>
+                </a:lnTo>
+                <a:close/>
+                <a:lnTo>
+                  <a:pt x="603351" y="2313624"/>
+                </a:lnTo>
+                <a:close/>
+                <a:lnTo>
+                  <a:pt x="605855" y="2310462"/>
+                </a:lnTo>
+                <a:close/>
+                <a:lnTo>
+                  <a:pt x="608358" y="2307292"/>
+                </a:lnTo>
+                <a:close/>
+                <a:lnTo>
+                  <a:pt x="610862" y="2304126"/>
+                </a:lnTo>
+                <a:close/>
+                <a:lnTo>
+                  <a:pt x="613365" y="2300972"/>
+                </a:lnTo>
+                <a:close/>
+                <a:lnTo>
+                  <a:pt x="615869" y="2297840"/>
+                </a:lnTo>
+                <a:close/>
+                <a:lnTo>
+                  <a:pt x="618373" y="2294740"/>
+                </a:lnTo>
+                <a:close/>
+                <a:lnTo>
+                  <a:pt x="620876" y="2291680"/>
+                </a:lnTo>
+                <a:close/>
+                <a:lnTo>
+                  <a:pt x="623380" y="2288668"/>
+                </a:lnTo>
+                <a:close/>
+                <a:lnTo>
+                  <a:pt x="625883" y="2285687"/>
+                </a:lnTo>
+                <a:close/>
+                <a:lnTo>
+                  <a:pt x="628387" y="2282704"/>
+                </a:lnTo>
+                <a:close/>
+                <a:lnTo>
+                  <a:pt x="630890" y="2279683"/>
+                </a:lnTo>
+                <a:close/>
+                <a:lnTo>
+                  <a:pt x="633394" y="2276590"/>
+                </a:lnTo>
+                <a:close/>
+                <a:lnTo>
+                  <a:pt x="635897" y="2273390"/>
+                </a:lnTo>
+                <a:close/>
+                <a:lnTo>
+                  <a:pt x="638401" y="2270049"/>
+                </a:lnTo>
+                <a:close/>
+                <a:lnTo>
+                  <a:pt x="640904" y="2266533"/>
+                </a:lnTo>
+                <a:close/>
+                <a:lnTo>
+                  <a:pt x="643408" y="2262842"/>
+                </a:lnTo>
+                <a:close/>
+                <a:lnTo>
+                  <a:pt x="645911" y="2259030"/>
+                </a:lnTo>
+                <a:close/>
+                <a:lnTo>
+                  <a:pt x="648415" y="2255155"/>
+                </a:lnTo>
+                <a:close/>
+                <a:lnTo>
+                  <a:pt x="650918" y="2251276"/>
+                </a:lnTo>
+                <a:close/>
+                <a:lnTo>
+                  <a:pt x="653422" y="2247451"/>
+                </a:lnTo>
+                <a:close/>
+                <a:lnTo>
+                  <a:pt x="655926" y="2243738"/>
+                </a:lnTo>
+                <a:close/>
+                <a:lnTo>
+                  <a:pt x="658429" y="2240196"/>
+                </a:lnTo>
+                <a:close/>
+                <a:lnTo>
+                  <a:pt x="660933" y="2236863"/>
+                </a:lnTo>
+                <a:close/>
+                <a:lnTo>
+                  <a:pt x="663436" y="2233698"/>
+                </a:lnTo>
+                <a:close/>
+                <a:lnTo>
+                  <a:pt x="665940" y="2230642"/>
+                </a:lnTo>
+                <a:close/>
+                <a:lnTo>
+                  <a:pt x="668443" y="2227638"/>
+                </a:lnTo>
+                <a:close/>
+                <a:lnTo>
+                  <a:pt x="670947" y="2224626"/>
+                </a:lnTo>
+                <a:close/>
+                <a:lnTo>
+                  <a:pt x="673450" y="2221549"/>
+                </a:lnTo>
+                <a:close/>
+                <a:lnTo>
+                  <a:pt x="675954" y="2218348"/>
+                </a:lnTo>
+                <a:close/>
+                <a:lnTo>
+                  <a:pt x="678457" y="2214970"/>
+                </a:lnTo>
+                <a:close/>
+                <a:lnTo>
+                  <a:pt x="680961" y="2211419"/>
+                </a:lnTo>
+                <a:close/>
+                <a:lnTo>
+                  <a:pt x="683464" y="2207728"/>
+                </a:lnTo>
+                <a:close/>
+                <a:lnTo>
+                  <a:pt x="685968" y="2203932"/>
+                </a:lnTo>
+                <a:close/>
+                <a:lnTo>
+                  <a:pt x="688471" y="2200065"/>
+                </a:lnTo>
+                <a:close/>
+                <a:lnTo>
+                  <a:pt x="690975" y="2196163"/>
+                </a:lnTo>
+                <a:close/>
+                <a:lnTo>
+                  <a:pt x="693479" y="2192260"/>
+                </a:lnTo>
+                <a:close/>
+                <a:lnTo>
+                  <a:pt x="695982" y="2188389"/>
+                </a:lnTo>
+                <a:close/>
+                <a:lnTo>
+                  <a:pt x="698486" y="2184567"/>
+                </a:lnTo>
+                <a:close/>
+                <a:lnTo>
+                  <a:pt x="700989" y="2180784"/>
+                </a:lnTo>
+                <a:close/>
+                <a:lnTo>
+                  <a:pt x="703493" y="2177033"/>
+                </a:lnTo>
+                <a:close/>
+                <a:lnTo>
+                  <a:pt x="705996" y="2173303"/>
+                </a:lnTo>
+                <a:close/>
+                <a:lnTo>
+                  <a:pt x="708500" y="2169585"/>
+                </a:lnTo>
+                <a:close/>
+                <a:lnTo>
+                  <a:pt x="711003" y="2165869"/>
+                </a:lnTo>
+                <a:close/>
+                <a:lnTo>
+                  <a:pt x="713507" y="2162147"/>
+                </a:lnTo>
+                <a:close/>
+                <a:lnTo>
+                  <a:pt x="716010" y="2158411"/>
+                </a:lnTo>
+                <a:close/>
+                <a:lnTo>
+                  <a:pt x="718514" y="2154663"/>
+                </a:lnTo>
+                <a:close/>
+                <a:lnTo>
+                  <a:pt x="721017" y="2150907"/>
+                </a:lnTo>
+                <a:close/>
+                <a:lnTo>
+                  <a:pt x="723521" y="2147145"/>
+                </a:lnTo>
+                <a:close/>
+                <a:lnTo>
+                  <a:pt x="726024" y="2143380"/>
+                </a:lnTo>
+                <a:close/>
+                <a:lnTo>
+                  <a:pt x="728528" y="2139617"/>
+                </a:lnTo>
+                <a:close/>
+                <a:lnTo>
+                  <a:pt x="731032" y="2135857"/>
+                </a:lnTo>
+                <a:close/>
+                <a:lnTo>
+                  <a:pt x="733535" y="2132104"/>
+                </a:lnTo>
+                <a:close/>
+                <a:lnTo>
+                  <a:pt x="736039" y="2128356"/>
+                </a:lnTo>
+                <a:close/>
+                <a:lnTo>
+                  <a:pt x="738542" y="2124609"/>
+                </a:lnTo>
+                <a:close/>
+                <a:lnTo>
+                  <a:pt x="741046" y="2120862"/>
+                </a:lnTo>
+                <a:close/>
+                <a:lnTo>
+                  <a:pt x="743549" y="2117110"/>
+                </a:lnTo>
+                <a:close/>
+                <a:lnTo>
+                  <a:pt x="746053" y="2113351"/>
+                </a:lnTo>
+                <a:close/>
+                <a:lnTo>
+                  <a:pt x="748556" y="2109582"/>
+                </a:lnTo>
+                <a:close/>
+                <a:lnTo>
+                  <a:pt x="751060" y="2105799"/>
+                </a:lnTo>
+                <a:close/>
+                <a:lnTo>
+                  <a:pt x="753563" y="2102005"/>
+                </a:lnTo>
+                <a:close/>
+                <a:lnTo>
+                  <a:pt x="756067" y="2098211"/>
+                </a:lnTo>
+                <a:close/>
+                <a:lnTo>
+                  <a:pt x="758570" y="2094424"/>
+                </a:lnTo>
+                <a:close/>
+                <a:lnTo>
+                  <a:pt x="761074" y="2090656"/>
+                </a:lnTo>
+                <a:close/>
+                <a:lnTo>
+                  <a:pt x="763577" y="2086914"/>
+                </a:lnTo>
+                <a:close/>
+                <a:lnTo>
+                  <a:pt x="766081" y="2083209"/>
+                </a:lnTo>
+                <a:close/>
+                <a:lnTo>
+                  <a:pt x="768584" y="2079550"/>
+                </a:lnTo>
+                <a:close/>
+                <a:lnTo>
+                  <a:pt x="771088" y="2075934"/>
+                </a:lnTo>
+                <a:close/>
+                <a:lnTo>
+                  <a:pt x="773592" y="2072330"/>
+                </a:lnTo>
+                <a:close/>
+                <a:lnTo>
+                  <a:pt x="776095" y="2068704"/>
+                </a:lnTo>
+                <a:close/>
+                <a:lnTo>
+                  <a:pt x="778599" y="2065021"/>
+                </a:lnTo>
+                <a:close/>
+                <a:lnTo>
+                  <a:pt x="781102" y="2061246"/>
+                </a:lnTo>
+                <a:close/>
+                <a:lnTo>
+                  <a:pt x="783606" y="2057346"/>
+                </a:lnTo>
+                <a:close/>
+                <a:lnTo>
+                  <a:pt x="786109" y="2053285"/>
+                </a:lnTo>
+                <a:close/>
+                <a:lnTo>
+                  <a:pt x="788613" y="2049040"/>
+                </a:lnTo>
+                <a:close/>
+                <a:lnTo>
+                  <a:pt x="791116" y="2044648"/>
+                </a:lnTo>
+                <a:close/>
+                <a:lnTo>
+                  <a:pt x="793620" y="2040167"/>
+                </a:lnTo>
+                <a:close/>
+                <a:lnTo>
+                  <a:pt x="796123" y="2035657"/>
+                </a:lnTo>
+                <a:close/>
+                <a:lnTo>
+                  <a:pt x="798627" y="2031175"/>
+                </a:lnTo>
+                <a:close/>
+                <a:lnTo>
+                  <a:pt x="801130" y="2026780"/>
+                </a:lnTo>
+                <a:close/>
+                <a:lnTo>
+                  <a:pt x="803634" y="2022530"/>
+                </a:lnTo>
+                <a:close/>
+                <a:lnTo>
+                  <a:pt x="806137" y="2018480"/>
+                </a:lnTo>
+                <a:close/>
+                <a:lnTo>
+                  <a:pt x="808641" y="2014622"/>
+                </a:lnTo>
+                <a:close/>
+                <a:lnTo>
+                  <a:pt x="811145" y="2010900"/>
+                </a:lnTo>
+                <a:close/>
+                <a:lnTo>
+                  <a:pt x="813648" y="2007254"/>
+                </a:lnTo>
+                <a:close/>
+                <a:lnTo>
+                  <a:pt x="816152" y="2003627"/>
+                </a:lnTo>
+                <a:close/>
+                <a:lnTo>
+                  <a:pt x="818655" y="1999960"/>
+                </a:lnTo>
+                <a:close/>
+                <a:lnTo>
+                  <a:pt x="821159" y="1996195"/>
+                </a:lnTo>
+                <a:close/>
+                <a:lnTo>
+                  <a:pt x="823662" y="1992273"/>
+                </a:lnTo>
+                <a:close/>
+                <a:lnTo>
+                  <a:pt x="826166" y="1988168"/>
+                </a:lnTo>
+                <a:close/>
+                <a:lnTo>
+                  <a:pt x="828669" y="1983908"/>
+                </a:lnTo>
+                <a:close/>
+                <a:lnTo>
+                  <a:pt x="831173" y="1979528"/>
+                </a:lnTo>
+                <a:close/>
+                <a:lnTo>
+                  <a:pt x="833676" y="1975062"/>
+                </a:lnTo>
+                <a:close/>
+                <a:lnTo>
+                  <a:pt x="836180" y="1970545"/>
+                </a:lnTo>
+                <a:close/>
+                <a:lnTo>
+                  <a:pt x="838683" y="1966012"/>
+                </a:lnTo>
+                <a:close/>
+                <a:lnTo>
+                  <a:pt x="841187" y="1961498"/>
+                </a:lnTo>
+                <a:close/>
+                <a:lnTo>
+                  <a:pt x="843690" y="1957029"/>
+                </a:lnTo>
+                <a:close/>
+                <a:lnTo>
+                  <a:pt x="846194" y="1952604"/>
+                </a:lnTo>
+                <a:close/>
+                <a:lnTo>
+                  <a:pt x="848698" y="1948214"/>
+                </a:lnTo>
+                <a:close/>
+                <a:lnTo>
+                  <a:pt x="851201" y="1943850"/>
+                </a:lnTo>
+                <a:close/>
+                <a:lnTo>
+                  <a:pt x="853705" y="1939502"/>
+                </a:lnTo>
+                <a:close/>
+                <a:lnTo>
+                  <a:pt x="856208" y="1935161"/>
+                </a:lnTo>
+                <a:close/>
+                <a:lnTo>
+                  <a:pt x="858712" y="1930817"/>
+                </a:lnTo>
+                <a:close/>
+                <a:lnTo>
+                  <a:pt x="861215" y="1926461"/>
+                </a:lnTo>
+                <a:close/>
+                <a:lnTo>
+                  <a:pt x="863719" y="1922092"/>
+                </a:lnTo>
+                <a:close/>
+                <a:lnTo>
+                  <a:pt x="866222" y="1917713"/>
+                </a:lnTo>
+                <a:close/>
+                <a:lnTo>
+                  <a:pt x="868726" y="1913327"/>
+                </a:lnTo>
+                <a:close/>
+                <a:lnTo>
+                  <a:pt x="871229" y="1908938"/>
+                </a:lnTo>
+                <a:close/>
+                <a:lnTo>
+                  <a:pt x="873733" y="1904547"/>
+                </a:lnTo>
+                <a:close/>
+                <a:lnTo>
+                  <a:pt x="876236" y="1900160"/>
+                </a:lnTo>
+                <a:close/>
+                <a:lnTo>
+                  <a:pt x="878740" y="1895778"/>
+                </a:lnTo>
+                <a:close/>
+                <a:lnTo>
+                  <a:pt x="881243" y="1891402"/>
+                </a:lnTo>
+                <a:close/>
+                <a:lnTo>
+                  <a:pt x="883747" y="1887029"/>
+                </a:lnTo>
+                <a:close/>
+                <a:lnTo>
+                  <a:pt x="886251" y="1882657"/>
+                </a:lnTo>
+                <a:close/>
+                <a:lnTo>
+                  <a:pt x="888754" y="1878282"/>
+                </a:lnTo>
+                <a:close/>
+                <a:lnTo>
+                  <a:pt x="891258" y="1873900"/>
+                </a:lnTo>
+                <a:close/>
+                <a:lnTo>
+                  <a:pt x="893761" y="1869510"/>
+                </a:lnTo>
+                <a:close/>
+                <a:lnTo>
+                  <a:pt x="896265" y="1865107"/>
+                </a:lnTo>
+                <a:close/>
+                <a:lnTo>
+                  <a:pt x="898768" y="1860691"/>
+                </a:lnTo>
+                <a:close/>
+                <a:lnTo>
+                  <a:pt x="901272" y="1856270"/>
+                </a:lnTo>
+                <a:close/>
+                <a:lnTo>
+                  <a:pt x="903775" y="1851853"/>
+                </a:lnTo>
+                <a:close/>
+                <a:lnTo>
+                  <a:pt x="906279" y="1847450"/>
+                </a:lnTo>
+                <a:close/>
+                <a:lnTo>
+                  <a:pt x="908782" y="1843069"/>
+                </a:lnTo>
+                <a:close/>
+                <a:lnTo>
+                  <a:pt x="911286" y="1838721"/>
+                </a:lnTo>
+                <a:close/>
+                <a:lnTo>
+                  <a:pt x="913789" y="1834415"/>
+                </a:lnTo>
+                <a:close/>
+                <a:lnTo>
+                  <a:pt x="916293" y="1830157"/>
+                </a:lnTo>
+                <a:close/>
+                <a:lnTo>
+                  <a:pt x="918796" y="1825926"/>
+                </a:lnTo>
+                <a:close/>
+                <a:lnTo>
+                  <a:pt x="921300" y="1821688"/>
+                </a:lnTo>
+                <a:close/>
+                <a:lnTo>
+                  <a:pt x="923804" y="1817408"/>
+                </a:lnTo>
+                <a:close/>
+                <a:lnTo>
+                  <a:pt x="926307" y="1813052"/>
+                </a:lnTo>
+                <a:close/>
+                <a:lnTo>
+                  <a:pt x="928811" y="1808585"/>
+                </a:lnTo>
+                <a:close/>
+                <a:lnTo>
+                  <a:pt x="931314" y="1803973"/>
+                </a:lnTo>
+                <a:close/>
+                <a:lnTo>
+                  <a:pt x="933818" y="1799183"/>
+                </a:lnTo>
+                <a:close/>
+                <a:lnTo>
+                  <a:pt x="936321" y="1794222"/>
+                </a:lnTo>
+                <a:close/>
+                <a:lnTo>
+                  <a:pt x="938825" y="1789147"/>
+                </a:lnTo>
+                <a:close/>
+                <a:lnTo>
+                  <a:pt x="941328" y="1784017"/>
+                </a:lnTo>
+                <a:close/>
+                <a:lnTo>
+                  <a:pt x="943832" y="1778889"/>
+                </a:lnTo>
+                <a:close/>
+                <a:lnTo>
+                  <a:pt x="946335" y="1773823"/>
+                </a:lnTo>
+                <a:close/>
+                <a:lnTo>
+                  <a:pt x="948839" y="1768876"/>
+                </a:lnTo>
+                <a:close/>
+                <a:lnTo>
+                  <a:pt x="951342" y="1764107"/>
+                </a:lnTo>
+                <a:close/>
+                <a:lnTo>
+                  <a:pt x="953846" y="1759546"/>
+                </a:lnTo>
+                <a:close/>
+                <a:lnTo>
+                  <a:pt x="956349" y="1755146"/>
+                </a:lnTo>
+                <a:close/>
+                <a:lnTo>
+                  <a:pt x="958853" y="1750848"/>
+                </a:lnTo>
+                <a:close/>
+                <a:lnTo>
+                  <a:pt x="961357" y="1746594"/>
+                </a:lnTo>
+                <a:close/>
+                <a:lnTo>
+                  <a:pt x="963860" y="1742326"/>
+                </a:lnTo>
+                <a:close/>
+                <a:lnTo>
+                  <a:pt x="966364" y="1737985"/>
+                </a:lnTo>
+                <a:close/>
+                <a:lnTo>
+                  <a:pt x="968867" y="1733513"/>
+                </a:lnTo>
+                <a:close/>
+                <a:lnTo>
+                  <a:pt x="971371" y="1728860"/>
+                </a:lnTo>
+                <a:close/>
+                <a:lnTo>
+                  <a:pt x="973874" y="1724038"/>
+                </a:lnTo>
+                <a:close/>
+                <a:lnTo>
+                  <a:pt x="976378" y="1719081"/>
+                </a:lnTo>
+                <a:close/>
+                <a:lnTo>
+                  <a:pt x="978881" y="1714023"/>
+                </a:lnTo>
+                <a:close/>
+                <a:lnTo>
+                  <a:pt x="981385" y="1708898"/>
+                </a:lnTo>
+                <a:close/>
+                <a:lnTo>
+                  <a:pt x="983888" y="1703742"/>
+                </a:lnTo>
+                <a:close/>
+                <a:lnTo>
+                  <a:pt x="986392" y="1698589"/>
+                </a:lnTo>
+                <a:close/>
+                <a:lnTo>
+                  <a:pt x="988895" y="1693473"/>
+                </a:lnTo>
+                <a:close/>
+                <a:lnTo>
+                  <a:pt x="991399" y="1688404"/>
+                </a:lnTo>
+                <a:close/>
+                <a:lnTo>
+                  <a:pt x="993902" y="1683374"/>
+                </a:lnTo>
+                <a:close/>
+                <a:lnTo>
+                  <a:pt x="996406" y="1678374"/>
+                </a:lnTo>
+                <a:close/>
+                <a:lnTo>
+                  <a:pt x="998909" y="1673394"/>
+                </a:lnTo>
+                <a:close/>
+                <a:lnTo>
+                  <a:pt x="1001413" y="1668425"/>
+                </a:lnTo>
+                <a:close/>
+                <a:lnTo>
+                  <a:pt x="1003917" y="1663458"/>
+                </a:lnTo>
+                <a:close/>
+                <a:lnTo>
+                  <a:pt x="1006420" y="1658482"/>
+                </a:lnTo>
+                <a:close/>
+                <a:lnTo>
+                  <a:pt x="1008924" y="1653493"/>
+                </a:lnTo>
+                <a:close/>
+                <a:lnTo>
+                  <a:pt x="1011427" y="1648492"/>
+                </a:lnTo>
+                <a:close/>
+                <a:lnTo>
+                  <a:pt x="1013931" y="1643483"/>
+                </a:lnTo>
+                <a:close/>
+                <a:lnTo>
+                  <a:pt x="1016434" y="1638469"/>
+                </a:lnTo>
+                <a:close/>
+                <a:lnTo>
+                  <a:pt x="1018938" y="1633452"/>
+                </a:lnTo>
+                <a:close/>
+                <a:lnTo>
+                  <a:pt x="1021441" y="1628437"/>
+                </a:lnTo>
+                <a:close/>
+                <a:lnTo>
+                  <a:pt x="1023945" y="1623426"/>
+                </a:lnTo>
+                <a:close/>
+                <a:lnTo>
+                  <a:pt x="1026448" y="1618422"/>
+                </a:lnTo>
+                <a:close/>
+                <a:lnTo>
+                  <a:pt x="1028952" y="1613423"/>
+                </a:lnTo>
+                <a:close/>
+                <a:lnTo>
+                  <a:pt x="1031455" y="1608425"/>
+                </a:lnTo>
+                <a:close/>
+                <a:lnTo>
+                  <a:pt x="1033959" y="1603425"/>
+                </a:lnTo>
+                <a:close/>
+                <a:lnTo>
+                  <a:pt x="1036462" y="1598421"/>
+                </a:lnTo>
+                <a:close/>
+                <a:lnTo>
+                  <a:pt x="1038966" y="1593409"/>
+                </a:lnTo>
+                <a:close/>
+                <a:lnTo>
+                  <a:pt x="1041470" y="1588386"/>
+                </a:lnTo>
+                <a:close/>
+                <a:lnTo>
+                  <a:pt x="1043973" y="1583350"/>
+                </a:lnTo>
+                <a:close/>
+                <a:lnTo>
+                  <a:pt x="1046477" y="1578304"/>
+                </a:lnTo>
+                <a:close/>
+                <a:lnTo>
+                  <a:pt x="1048980" y="1573259"/>
+                </a:lnTo>
+                <a:close/>
+                <a:lnTo>
+                  <a:pt x="1051484" y="1568222"/>
+                </a:lnTo>
+                <a:close/>
+                <a:lnTo>
+                  <a:pt x="1053987" y="1563205"/>
+                </a:lnTo>
+                <a:close/>
+                <a:lnTo>
+                  <a:pt x="1056491" y="1558215"/>
+                </a:lnTo>
+                <a:close/>
+                <a:lnTo>
+                  <a:pt x="1058994" y="1553263"/>
+                </a:lnTo>
+                <a:close/>
+                <a:lnTo>
+                  <a:pt x="1061498" y="1548358"/>
+                </a:lnTo>
+                <a:close/>
+                <a:lnTo>
+                  <a:pt x="1064001" y="1543493"/>
+                </a:lnTo>
+                <a:close/>
+                <a:lnTo>
+                  <a:pt x="1066505" y="1538636"/>
+                </a:lnTo>
+                <a:close/>
+                <a:lnTo>
+                  <a:pt x="1069008" y="1533752"/>
+                </a:lnTo>
+                <a:close/>
+                <a:lnTo>
+                  <a:pt x="1071512" y="1528808"/>
+                </a:lnTo>
+                <a:close/>
+                <a:lnTo>
+                  <a:pt x="1074016" y="1523768"/>
+                </a:lnTo>
+                <a:close/>
+                <a:lnTo>
+                  <a:pt x="1076519" y="1518599"/>
+                </a:lnTo>
+                <a:close/>
+                <a:lnTo>
+                  <a:pt x="1079023" y="1513266"/>
+                </a:lnTo>
+                <a:close/>
+                <a:lnTo>
+                  <a:pt x="1081526" y="1507750"/>
+                </a:lnTo>
+                <a:close/>
+                <a:lnTo>
+                  <a:pt x="1084030" y="1502095"/>
+                </a:lnTo>
+                <a:close/>
+                <a:lnTo>
+                  <a:pt x="1086533" y="1496358"/>
+                </a:lnTo>
+                <a:close/>
+                <a:lnTo>
+                  <a:pt x="1089037" y="1490598"/>
+                </a:lnTo>
+                <a:close/>
+                <a:lnTo>
+                  <a:pt x="1091540" y="1484871"/>
+                </a:lnTo>
+                <a:close/>
+                <a:lnTo>
+                  <a:pt x="1094044" y="1479237"/>
+                </a:lnTo>
+                <a:close/>
+                <a:lnTo>
+                  <a:pt x="1096547" y="1473753"/>
+                </a:lnTo>
+                <a:close/>
+                <a:lnTo>
+                  <a:pt x="1099051" y="1468469"/>
+                </a:lnTo>
+                <a:close/>
+                <a:lnTo>
+                  <a:pt x="1101555" y="1463370"/>
+                </a:lnTo>
+                <a:close/>
+                <a:lnTo>
+                  <a:pt x="1104058" y="1458399"/>
+                </a:lnTo>
+                <a:close/>
+                <a:lnTo>
+                  <a:pt x="1106562" y="1453501"/>
+                </a:lnTo>
+                <a:close/>
+                <a:lnTo>
+                  <a:pt x="1109066" y="1448618"/>
+                </a:lnTo>
+                <a:close/>
+                <a:lnTo>
+                  <a:pt x="1111569" y="1443696"/>
+                </a:lnTo>
+                <a:close/>
+                <a:lnTo>
+                  <a:pt x="1114072" y="1438677"/>
+                </a:lnTo>
+                <a:close/>
+                <a:lnTo>
+                  <a:pt x="1116575" y="1433506"/>
+                </a:lnTo>
+                <a:close/>
+                <a:lnTo>
+                  <a:pt x="1119078" y="1428162"/>
+                </a:lnTo>
+                <a:close/>
+                <a:lnTo>
+                  <a:pt x="1121581" y="1422669"/>
+                </a:lnTo>
+                <a:close/>
+                <a:lnTo>
+                  <a:pt x="1124084" y="1417053"/>
+                </a:lnTo>
+                <a:close/>
+                <a:lnTo>
+                  <a:pt x="1126587" y="1411341"/>
+                </a:lnTo>
+                <a:close/>
+                <a:lnTo>
+                  <a:pt x="1129091" y="1405559"/>
+                </a:lnTo>
+                <a:close/>
+                <a:lnTo>
+                  <a:pt x="1131595" y="1399733"/>
+                </a:lnTo>
+                <a:close/>
+                <a:lnTo>
+                  <a:pt x="1134100" y="1393890"/>
+                </a:lnTo>
+                <a:close/>
+                <a:lnTo>
+                  <a:pt x="1136606" y="1388055"/>
+                </a:lnTo>
+                <a:close/>
+                <a:lnTo>
+                  <a:pt x="1139112" y="1382250"/>
+                </a:lnTo>
+                <a:close/>
+                <a:lnTo>
+                  <a:pt x="1141618" y="1376495"/>
+                </a:lnTo>
+                <a:close/>
+                <a:lnTo>
+                  <a:pt x="1144123" y="1370812"/>
+                </a:lnTo>
+                <a:close/>
+                <a:lnTo>
+                  <a:pt x="1146626" y="1365222"/>
+                </a:lnTo>
+                <a:close/>
+                <a:lnTo>
+                  <a:pt x="1149127" y="1359744"/>
+                </a:lnTo>
+                <a:close/>
+                <a:lnTo>
+                  <a:pt x="1151626" y="1354401"/>
+                </a:lnTo>
+                <a:close/>
+                <a:lnTo>
+                  <a:pt x="1154122" y="1349202"/>
+                </a:lnTo>
+                <a:close/>
+                <a:lnTo>
+                  <a:pt x="1156617" y="1344075"/>
+                </a:lnTo>
+                <a:close/>
+                <a:lnTo>
+                  <a:pt x="1159112" y="1338910"/>
+                </a:lnTo>
+                <a:close/>
+                <a:lnTo>
+                  <a:pt x="1161610" y="1333597"/>
+                </a:lnTo>
+                <a:close/>
+                <a:lnTo>
+                  <a:pt x="1164112" y="1328027"/>
+                </a:lnTo>
+                <a:close/>
+                <a:lnTo>
+                  <a:pt x="1166621" y="1322088"/>
+                </a:lnTo>
+                <a:close/>
+                <a:lnTo>
+                  <a:pt x="1169138" y="1315671"/>
+                </a:lnTo>
+                <a:close/>
+                <a:lnTo>
+                  <a:pt x="1171667" y="1308677"/>
+                </a:lnTo>
+                <a:close/>
+                <a:lnTo>
+                  <a:pt x="1174203" y="1301255"/>
+                </a:lnTo>
+                <a:close/>
+                <a:lnTo>
+                  <a:pt x="1176739" y="1293812"/>
+                </a:lnTo>
+                <a:close/>
+                <a:lnTo>
+                  <a:pt x="1179269" y="1286767"/>
+                </a:lnTo>
+                <a:close/>
+                <a:lnTo>
+                  <a:pt x="1181783" y="1280541"/>
+                </a:lnTo>
+                <a:close/>
+                <a:lnTo>
+                  <a:pt x="1184275" y="1275551"/>
+                </a:lnTo>
+                <a:close/>
+                <a:lnTo>
+                  <a:pt x="1186736" y="1272218"/>
+                </a:lnTo>
+                <a:close/>
+                <a:lnTo>
+                  <a:pt x="1189160" y="1270958"/>
+                </a:lnTo>
+                <a:close/>
+                <a:lnTo>
+                  <a:pt x="1191548" y="1271649"/>
+                </a:lnTo>
+                <a:close/>
+                <a:lnTo>
+                  <a:pt x="1193926" y="1272905"/>
+                </a:lnTo>
+                <a:close/>
+                <a:lnTo>
+                  <a:pt x="1196322" y="1273158"/>
+                </a:lnTo>
+                <a:close/>
+                <a:lnTo>
+                  <a:pt x="1198765" y="1270842"/>
+                </a:lnTo>
+                <a:close/>
+                <a:lnTo>
+                  <a:pt x="1201284" y="1264390"/>
+                </a:lnTo>
+                <a:close/>
+                <a:lnTo>
+                  <a:pt x="1203906" y="1252235"/>
+                </a:lnTo>
+                <a:close/>
+                <a:lnTo>
+                  <a:pt x="1206662" y="1232810"/>
+                </a:lnTo>
+                <a:close/>
+                <a:lnTo>
+                  <a:pt x="1209563" y="1205385"/>
+                </a:lnTo>
+                <a:close/>
+                <a:lnTo>
+                  <a:pt x="1212535" y="1174069"/>
+                </a:lnTo>
+                <a:close/>
+                <a:lnTo>
+                  <a:pt x="1215471" y="1144710"/>
+                </a:lnTo>
+                <a:close/>
+                <a:lnTo>
+                  <a:pt x="1218266" y="1123153"/>
+                </a:lnTo>
+                <a:close/>
+                <a:lnTo>
+                  <a:pt x="1220811" y="1115249"/>
+                </a:lnTo>
+                <a:close/>
+                <a:lnTo>
+                  <a:pt x="1223000" y="1126846"/>
+                </a:lnTo>
+                <a:close/>
+                <a:lnTo>
+                  <a:pt x="1224726" y="1163791"/>
+                </a:lnTo>
+                <a:close/>
+                <a:lnTo>
+                  <a:pt x="1225895" y="1231458"/>
+                </a:lnTo>
+                <a:close/>
+                <a:lnTo>
+                  <a:pt x="1226601" y="1327292"/>
+                </a:lnTo>
+                <a:close/>
+                <a:lnTo>
+                  <a:pt x="1227098" y="1442189"/>
+                </a:lnTo>
+                <a:close/>
+                <a:lnTo>
+                  <a:pt x="1227642" y="1566850"/>
+                </a:lnTo>
+                <a:close/>
+                <a:lnTo>
+                  <a:pt x="1228492" y="1691975"/>
+                </a:lnTo>
+                <a:close/>
+                <a:lnTo>
+                  <a:pt x="1229904" y="1808266"/>
+                </a:lnTo>
+                <a:close/>
+                <a:lnTo>
+                  <a:pt x="1232138" y="1906421"/>
+                </a:lnTo>
+                <a:close/>
+                <a:lnTo>
+                  <a:pt x="1235447" y="1977190"/>
+                </a:lnTo>
+                <a:close/>
+                <a:lnTo>
+                  <a:pt x="1239933" y="2016217"/>
+                </a:lnTo>
+                <a:close/>
+                <a:lnTo>
+                  <a:pt x="1245407" y="2028187"/>
+                </a:lnTo>
+                <a:close/>
+                <a:lnTo>
+                  <a:pt x="1251649" y="2018764"/>
+                </a:lnTo>
+                <a:close/>
+                <a:lnTo>
+                  <a:pt x="1258440" y="1993611"/>
+                </a:lnTo>
+                <a:close/>
+                <a:lnTo>
+                  <a:pt x="1265559" y="1958390"/>
+                </a:lnTo>
+                <a:close/>
+                <a:lnTo>
+                  <a:pt x="1272787" y="1918765"/>
+                </a:lnTo>
+                <a:close/>
+                <a:lnTo>
+                  <a:pt x="1279905" y="1880399"/>
+                </a:lnTo>
+                <a:close/>
+                <a:lnTo>
+                  <a:pt x="1286733" y="1847914"/>
+                </a:lnTo>
+                <a:close/>
+                <a:lnTo>
+                  <a:pt x="1293279" y="1821288"/>
+                </a:lnTo>
+                <a:close/>
+                <a:lnTo>
+                  <a:pt x="1299602" y="1799202"/>
+                </a:lnTo>
+                <a:close/>
+                <a:lnTo>
+                  <a:pt x="1305758" y="1780338"/>
+                </a:lnTo>
+                <a:close/>
+                <a:lnTo>
+                  <a:pt x="1311807" y="1763377"/>
+                </a:lnTo>
+                <a:close/>
+                <a:lnTo>
+                  <a:pt x="1317807" y="1747001"/>
+                </a:lnTo>
+                <a:close/>
+                <a:lnTo>
+                  <a:pt x="1323816" y="1729890"/>
+                </a:lnTo>
+                <a:close/>
+                <a:lnTo>
+                  <a:pt x="1329888" y="1710805"/>
+                </a:lnTo>
+                <a:close/>
+                <a:lnTo>
+                  <a:pt x="1336039" y="1689436"/>
+                </a:lnTo>
+                <a:close/>
+                <a:lnTo>
+                  <a:pt x="1342254" y="1666086"/>
+                </a:lnTo>
+                <a:close/>
+                <a:lnTo>
+                  <a:pt x="1348522" y="1641070"/>
+                </a:lnTo>
+                <a:close/>
+                <a:lnTo>
+                  <a:pt x="1354827" y="1614704"/>
+                </a:lnTo>
+                <a:close/>
+                <a:lnTo>
+                  <a:pt x="1361158" y="1587301"/>
+                </a:lnTo>
+                <a:close/>
+                <a:lnTo>
+                  <a:pt x="1367501" y="1559177"/>
+                </a:lnTo>
+                <a:close/>
+                <a:lnTo>
+                  <a:pt x="1373842" y="1530645"/>
+                </a:lnTo>
+                <a:close/>
+                <a:lnTo>
+                  <a:pt x="1380171" y="1501891"/>
+                </a:lnTo>
+                <a:close/>
+                <a:lnTo>
+                  <a:pt x="1386483" y="1472919"/>
+                </a:lnTo>
+                <a:close/>
+                <a:lnTo>
+                  <a:pt x="1392774" y="1443718"/>
+                </a:lnTo>
+                <a:close/>
+                <a:lnTo>
+                  <a:pt x="1399038" y="1414277"/>
+                </a:lnTo>
+                <a:close/>
+                <a:lnTo>
+                  <a:pt x="1405270" y="1384584"/>
+                </a:lnTo>
+                <a:close/>
+                <a:lnTo>
+                  <a:pt x="1411465" y="1354628"/>
+                </a:lnTo>
+                <a:close/>
+                <a:lnTo>
+                  <a:pt x="1417619" y="1324399"/>
+                </a:lnTo>
+                <a:close/>
+                <a:lnTo>
+                  <a:pt x="1423734" y="1293848"/>
+                </a:lnTo>
+                <a:close/>
+                <a:lnTo>
+                  <a:pt x="1429836" y="1262803"/>
+                </a:lnTo>
+                <a:close/>
+                <a:lnTo>
+                  <a:pt x="1435961" y="1231064"/>
+                </a:lnTo>
+                <a:close/>
+                <a:lnTo>
+                  <a:pt x="1442140" y="1198432"/>
+                </a:lnTo>
+                <a:close/>
+                <a:lnTo>
+                  <a:pt x="1448406" y="1164707"/>
+                </a:lnTo>
+                <a:close/>
+                <a:lnTo>
+                  <a:pt x="1454794" y="1129689"/>
+                </a:lnTo>
+                <a:close/>
+                <a:lnTo>
+                  <a:pt x="1461336" y="1093178"/>
+                </a:lnTo>
+                <a:close/>
+                <a:lnTo>
+                  <a:pt x="1468054" y="1055045"/>
+                </a:lnTo>
+                <a:close/>
+                <a:lnTo>
+                  <a:pt x="1474872" y="1015774"/>
+                </a:lnTo>
+                <a:close/>
+                <a:lnTo>
+                  <a:pt x="1481664" y="976172"/>
+                </a:lnTo>
+                <a:close/>
+                <a:lnTo>
+                  <a:pt x="1488301" y="937049"/>
+                </a:lnTo>
+                <a:close/>
+                <a:lnTo>
+                  <a:pt x="1494656" y="899215"/>
+                </a:lnTo>
+                <a:close/>
+                <a:lnTo>
+                  <a:pt x="1500601" y="863480"/>
+                </a:lnTo>
+                <a:close/>
+                <a:lnTo>
+                  <a:pt x="1506009" y="830654"/>
+                </a:lnTo>
+                <a:close/>
+                <a:lnTo>
+                  <a:pt x="1510756" y="801526"/>
+                </a:lnTo>
+                <a:close/>
+                <a:lnTo>
+                  <a:pt x="1514828" y="776210"/>
+                </a:lnTo>
+                <a:close/>
+                <a:lnTo>
+                  <a:pt x="1518345" y="754035"/>
+                </a:lnTo>
+                <a:close/>
+                <a:lnTo>
+                  <a:pt x="1521431" y="734282"/>
+                </a:lnTo>
+                <a:close/>
+                <a:lnTo>
+                  <a:pt x="1524212" y="716235"/>
+                </a:lnTo>
+                <a:close/>
+                <a:lnTo>
+                  <a:pt x="1526813" y="699175"/>
+                </a:lnTo>
+                <a:close/>
+                <a:lnTo>
+                  <a:pt x="1529361" y="682385"/>
+                </a:lnTo>
+                <a:close/>
+                <a:lnTo>
+                  <a:pt x="1531980" y="665148"/>
+                </a:lnTo>
+                <a:close/>
+                <a:lnTo>
+                  <a:pt x="1534760" y="646941"/>
+                </a:lnTo>
+                <a:close/>
+                <a:lnTo>
+                  <a:pt x="1537695" y="627767"/>
+                </a:lnTo>
+                <a:close/>
+                <a:lnTo>
+                  <a:pt x="1540762" y="607716"/>
+                </a:lnTo>
+                <a:close/>
+                <a:lnTo>
+                  <a:pt x="1543939" y="586879"/>
+                </a:lnTo>
+                <a:close/>
+                <a:lnTo>
+                  <a:pt x="1547203" y="565345"/>
+                </a:lnTo>
+                <a:close/>
+                <a:lnTo>
+                  <a:pt x="1550531" y="543205"/>
+                </a:lnTo>
+                <a:close/>
+                <a:lnTo>
+                  <a:pt x="1553902" y="520549"/>
+                </a:lnTo>
+                <a:close/>
+                <a:lnTo>
+                  <a:pt x="1557291" y="497486"/>
+                </a:lnTo>
+                <a:close/>
+                <a:lnTo>
+                  <a:pt x="1560666" y="474251"/>
+                </a:lnTo>
+                <a:close/>
+                <a:lnTo>
+                  <a:pt x="1563992" y="451129"/>
+                </a:lnTo>
+                <a:close/>
+                <a:lnTo>
+                  <a:pt x="1567234" y="428407"/>
+                </a:lnTo>
+                <a:close/>
+                <a:lnTo>
+                  <a:pt x="1570356" y="406372"/>
+                </a:lnTo>
+                <a:close/>
+                <a:lnTo>
+                  <a:pt x="1573322" y="385311"/>
+                </a:lnTo>
+                <a:close/>
+                <a:lnTo>
+                  <a:pt x="1576097" y="365509"/>
+                </a:lnTo>
+                <a:close/>
+                <a:lnTo>
+                  <a:pt x="1578648" y="347242"/>
+                </a:lnTo>
+                <a:close/>
+                <a:lnTo>
+                  <a:pt x="1580968" y="330555"/>
+                </a:lnTo>
+                <a:close/>
+                <a:lnTo>
+                  <a:pt x="1583081" y="315275"/>
+                </a:lnTo>
+                <a:close/>
+                <a:lnTo>
+                  <a:pt x="1585011" y="301221"/>
+                </a:lnTo>
+                <a:close/>
+                <a:lnTo>
+                  <a:pt x="1586780" y="288214"/>
+                </a:lnTo>
+                <a:close/>
+                <a:lnTo>
+                  <a:pt x="1588413" y="276072"/>
+                </a:lnTo>
+                <a:close/>
+                <a:lnTo>
+                  <a:pt x="1589933" y="264615"/>
+                </a:lnTo>
+                <a:close/>
+                <a:lnTo>
+                  <a:pt x="1591364" y="253662"/>
+                </a:lnTo>
+                <a:close/>
+                <a:lnTo>
+                  <a:pt x="1592724" y="243070"/>
+                </a:lnTo>
+                <a:close/>
+                <a:lnTo>
+                  <a:pt x="1594028" y="232772"/>
+                </a:lnTo>
+                <a:close/>
+                <a:lnTo>
+                  <a:pt x="1595287" y="222711"/>
+                </a:lnTo>
+                <a:close/>
+                <a:lnTo>
+                  <a:pt x="1596512" y="212831"/>
+                </a:lnTo>
+                <a:close/>
+                <a:lnTo>
+                  <a:pt x="1597714" y="203075"/>
+                </a:lnTo>
+                <a:close/>
+                <a:lnTo>
+                  <a:pt x="1598906" y="193386"/>
+                </a:lnTo>
+                <a:close/>
+                <a:lnTo>
+                  <a:pt x="1600098" y="183708"/>
+                </a:lnTo>
+                <a:close/>
+                <a:lnTo>
+                  <a:pt x="1601301" y="173988"/>
+                </a:lnTo>
+                <a:close/>
+                <a:lnTo>
+                  <a:pt x="1602518" y="164204"/>
+                </a:lnTo>
+                <a:close/>
+                <a:lnTo>
+                  <a:pt x="1603749" y="154340"/>
+                </a:lnTo>
+                <a:close/>
+                <a:lnTo>
+                  <a:pt x="1604996" y="144383"/>
+                </a:lnTo>
+                <a:close/>
+                <a:lnTo>
+                  <a:pt x="1606258" y="134317"/>
+                </a:lnTo>
+                <a:close/>
+                <a:lnTo>
+                  <a:pt x="1607537" y="124127"/>
+                </a:lnTo>
+                <a:close/>
+                <a:lnTo>
+                  <a:pt x="1608833" y="113799"/>
+                </a:lnTo>
+                <a:close/>
+                <a:lnTo>
+                  <a:pt x="1610147" y="103323"/>
+                </a:lnTo>
+                <a:close/>
+                <a:lnTo>
+                  <a:pt x="1611470" y="92761"/>
+                </a:lnTo>
+                <a:close/>
+                <a:lnTo>
+                  <a:pt x="1612788" y="82226"/>
+                </a:lnTo>
+                <a:close/>
+                <a:lnTo>
+                  <a:pt x="1614087" y="71833"/>
+                </a:lnTo>
+                <a:close/>
+                <a:lnTo>
+                  <a:pt x="1615352" y="61700"/>
+                </a:lnTo>
+                <a:close/>
+                <a:lnTo>
+                  <a:pt x="1616571" y="51940"/>
+                </a:lnTo>
+                <a:close/>
+                <a:lnTo>
+                  <a:pt x="1617728" y="42670"/>
+                </a:lnTo>
+                <a:close/>
+                <a:lnTo>
+                  <a:pt x="1618809" y="34005"/>
+                </a:lnTo>
+                <a:close/>
+                <a:lnTo>
+                  <a:pt x="1619800" y="26061"/>
+                </a:lnTo>
+                <a:close/>
+                <a:lnTo>
+                  <a:pt x="1620687" y="18953"/>
+                </a:lnTo>
+                <a:close/>
+                <a:lnTo>
+                  <a:pt x="1621455" y="12797"/>
+                </a:lnTo>
+                <a:close/>
+                <a:lnTo>
+                  <a:pt x="1622091" y="7708"/>
+                </a:lnTo>
+                <a:close/>
+                <a:lnTo>
+                  <a:pt x="1622580" y="3802"/>
+                </a:lnTo>
+                <a:close/>
+                <a:lnTo>
+                  <a:pt x="1622907" y="1194"/>
+                </a:lnTo>
+                <a:close/>
+                <a:lnTo>
+                  <a:pt x="1623060" y="0"/>
                 </a:lnTo>
                 <a:close/>
               </a:path>
@@ -5623,8 +5623,8 @@
         </p:nvCxnSpPr>
         <p:spPr>
           <a:xfrm flipV="1">
-            <a:off x="6400800.0" y="-379476.0"/>
-            <a:ext cx="0.0" cy="2951226.0"/>
+            <a:off x="6172200.0" y="742950.0"/>
+            <a:ext cx="0.0" cy="1828800.0"/>
           </a:xfrm>
           <a:prstGeom prst="line">
             <a:avLst/>
@@ -5659,8 +5659,8 @@
         </p:nvCxnSpPr>
         <p:spPr>
           <a:xfrm>
-            <a:off x="4572000.0" y="-379476.0"/>
-            <a:ext cx="1828800.0" cy="0.0"/>
+            <a:off x="4572000.0" y="742950.0"/>
+            <a:ext cx="1600200.0" cy="0.0"/>
           </a:xfrm>
           <a:prstGeom prst="line">
             <a:avLst/>
@@ -5695,7 +5695,7 @@
         </p:nvSpPr>
         <p:spPr>
           <a:xfrm>
-            <a:off x="6311900" y="-468376"/>
+            <a:off x="6083300" y="654050"/>
             <a:ext cx="177800" cy="177800"/>
           </a:xfrm>
           <a:prstGeom prst="ellipse">
@@ -5740,8 +5740,8 @@
         </p:nvCxnSpPr>
         <p:spPr>
           <a:xfrm>
-            <a:off x="5257800.0" y="2434590.0"/>
-            <a:ext cx="1051560.0" cy="0.0"/>
+            <a:off x="5257800.0" y="2503170.0"/>
+            <a:ext cx="822960.0" cy="0.0"/>
           </a:xfrm>
           <a:prstGeom prst="line">
             <a:avLst/>
@@ -5775,8 +5775,8 @@
         </p:nvCxnSpPr>
         <p:spPr>
           <a:xfrm flipH="1">
-            <a:off x="6492240.0" y="2434590.0"/>
-            <a:ext cx="1051560.0" cy="0.0"/>
+            <a:off x="6263640.0" y="2503170.0"/>
+            <a:ext cx="502920.0" cy="0.0"/>
           </a:xfrm>
           <a:prstGeom prst="line">
             <a:avLst/>
@@ -5810,7 +5810,7 @@
         </p:nvSpPr>
         <p:spPr>
           <a:xfrm>
-            <a:off x="5918200" y="-1631950"/>
+            <a:off x="5918200" y="-1769110"/>
             <a:ext cx="1524000" cy="508000"/>
           </a:xfrm>
           <a:prstGeom prst="rect">
@@ -5846,7 +5846,7 @@
         </p:nvSpPr>
         <p:spPr>
           <a:xfrm>
-            <a:off x="3952240" y="-696976"/>
+            <a:off x="3906520" y="425450"/>
             <a:ext cx="1524000" cy="508000"/>
           </a:xfrm>
           <a:prstGeom prst="rect">
@@ -5882,7 +5882,7 @@
         </p:nvSpPr>
         <p:spPr>
           <a:xfrm>
-            <a:off x="6146800" y="2528570"/>
+            <a:off x="5918200" y="2528570"/>
             <a:ext cx="1524000" cy="508000"/>
           </a:xfrm>
           <a:prstGeom prst="rect">
@@ -5918,7 +5918,7 @@
         </p:nvSpPr>
         <p:spPr>
           <a:xfrm>
-            <a:off x="4089400" y="2482850"/>
+            <a:off x="4135120" y="2437130"/>
             <a:ext cx="1524000" cy="508000"/>
           </a:xfrm>
           <a:prstGeom prst="rect">

--- a/output/3.pptx
+++ b/output/3.pptx
@@ -3104,8 +3104,8 @@
         </p:nvCxnSpPr>
         <p:spPr>
           <a:xfrm>
-            <a:off x="2286000.0" y="2571750.0"/>
-            <a:ext cx="4572000.0" cy="0.0"/>
+            <a:off x="3886200.0" y="2571750.0"/>
+            <a:ext cx="3657600.0" cy="0.0"/>
           </a:xfrm>
           <a:prstGeom prst="line">
             <a:avLst/>
@@ -3139,8 +3139,8 @@
         </p:nvCxnSpPr>
         <p:spPr>
           <a:xfrm flipV="1">
-            <a:off x="4572000.0" y="285750.0"/>
-            <a:ext cx="0.0" cy="4572000.0"/>
+            <a:off x="4572000.0" y="-1085850.0"/>
+            <a:ext cx="0.0" cy="4343400.0"/>
           </a:xfrm>
           <a:prstGeom prst="line">
             <a:avLst/>
@@ -3174,8 +3174,8 @@
         </p:nvSpPr>
         <p:spPr>
           <a:xfrm>
-            <a:off x="4937760" y="-1218438"/>
-            <a:ext cx="1623060" cy="2665882"/>
+            <a:off x="5029200" y="-628650"/>
+            <a:ext cx="1828800" cy="2377440"/>
           </a:xfrm>
           <a:custGeom>
             <a:avLst/>
@@ -3184,2404 +3184,2404 @@
             <a:cxnLst/>
             <a:rect l="l" t="t" r="r" b="b"/>
             <a:pathLst>
-              <a:path w="1623060" h="2665882">
+              <a:path w="1828800" h="2377440">
                 <a:moveTo>
-                  <a:pt x="0" y="2633472"/>
+                  <a:pt x="0" y="2377440"/>
                 </a:moveTo>
                 <a:lnTo>
-                  <a:pt x="2504" y="2635205"/>
-                </a:lnTo>
-                <a:close/>
-                <a:lnTo>
-                  <a:pt x="5007" y="2636760"/>
-                </a:lnTo>
-                <a:close/>
-                <a:lnTo>
-                  <a:pt x="7511" y="2638150"/>
-                </a:lnTo>
-                <a:close/>
-                <a:lnTo>
-                  <a:pt x="10014" y="2639391"/>
-                </a:lnTo>
-                <a:close/>
-                <a:lnTo>
-                  <a:pt x="12518" y="2640497"/>
-                </a:lnTo>
-                <a:close/>
-                <a:lnTo>
-                  <a:pt x="15021" y="2641484"/>
-                </a:lnTo>
-                <a:close/>
-                <a:lnTo>
-                  <a:pt x="17525" y="2642366"/>
-                </a:lnTo>
-                <a:close/>
-                <a:lnTo>
-                  <a:pt x="20028" y="2643157"/>
-                </a:lnTo>
-                <a:close/>
-                <a:lnTo>
-                  <a:pt x="22532" y="2643874"/>
-                </a:lnTo>
-                <a:close/>
-                <a:lnTo>
-                  <a:pt x="25035" y="2644529"/>
-                </a:lnTo>
-                <a:close/>
-                <a:lnTo>
-                  <a:pt x="27539" y="2645139"/>
-                </a:lnTo>
-                <a:close/>
-                <a:lnTo>
-                  <a:pt x="30042" y="2645717"/>
-                </a:lnTo>
-                <a:close/>
-                <a:lnTo>
-                  <a:pt x="32546" y="2646280"/>
-                </a:lnTo>
-                <a:close/>
-                <a:lnTo>
-                  <a:pt x="35049" y="2646840"/>
-                </a:lnTo>
-                <a:close/>
-                <a:lnTo>
-                  <a:pt x="37553" y="2647414"/>
-                </a:lnTo>
-                <a:close/>
-                <a:lnTo>
-                  <a:pt x="40057" y="2648008"/>
-                </a:lnTo>
-                <a:close/>
-                <a:lnTo>
-                  <a:pt x="42560" y="2648620"/>
-                </a:lnTo>
-                <a:close/>
-                <a:lnTo>
-                  <a:pt x="45064" y="2649245"/>
-                </a:lnTo>
-                <a:close/>
-                <a:lnTo>
-                  <a:pt x="47567" y="2649881"/>
-                </a:lnTo>
-                <a:close/>
-                <a:lnTo>
-                  <a:pt x="50071" y="2650523"/>
-                </a:lnTo>
-                <a:close/>
-                <a:lnTo>
-                  <a:pt x="52574" y="2651169"/>
-                </a:lnTo>
-                <a:close/>
-                <a:lnTo>
-                  <a:pt x="55078" y="2651815"/>
-                </a:lnTo>
-                <a:close/>
-                <a:lnTo>
-                  <a:pt x="57581" y="2652458"/>
-                </a:lnTo>
-                <a:close/>
-                <a:lnTo>
-                  <a:pt x="60085" y="2653096"/>
-                </a:lnTo>
-                <a:close/>
-                <a:lnTo>
-                  <a:pt x="62588" y="2653730"/>
-                </a:lnTo>
-                <a:close/>
-                <a:lnTo>
-                  <a:pt x="65092" y="2654358"/>
-                </a:lnTo>
-                <a:close/>
-                <a:lnTo>
-                  <a:pt x="67595" y="2654979"/>
-                </a:lnTo>
-                <a:close/>
-                <a:lnTo>
-                  <a:pt x="70099" y="2655594"/>
-                </a:lnTo>
-                <a:close/>
-                <a:lnTo>
-                  <a:pt x="72602" y="2656200"/>
-                </a:lnTo>
-                <a:close/>
-                <a:lnTo>
-                  <a:pt x="75106" y="2656798"/>
-                </a:lnTo>
-                <a:close/>
-                <a:lnTo>
-                  <a:pt x="77610" y="2657393"/>
-                </a:lnTo>
-                <a:close/>
-                <a:lnTo>
-                  <a:pt x="80113" y="2657990"/>
-                </a:lnTo>
-                <a:close/>
-                <a:lnTo>
-                  <a:pt x="82617" y="2658597"/>
-                </a:lnTo>
-                <a:close/>
-                <a:lnTo>
-                  <a:pt x="85120" y="2659219"/>
-                </a:lnTo>
-                <a:close/>
-                <a:lnTo>
-                  <a:pt x="87624" y="2659864"/>
-                </a:lnTo>
-                <a:close/>
-                <a:lnTo>
-                  <a:pt x="90127" y="2660537"/>
-                </a:lnTo>
-                <a:close/>
-                <a:lnTo>
-                  <a:pt x="92631" y="2661245"/>
-                </a:lnTo>
-                <a:close/>
-                <a:lnTo>
-                  <a:pt x="95134" y="2661979"/>
-                </a:lnTo>
-                <a:close/>
-                <a:lnTo>
-                  <a:pt x="97638" y="2662714"/>
-                </a:lnTo>
-                <a:close/>
-                <a:lnTo>
-                  <a:pt x="100141" y="2663425"/>
-                </a:lnTo>
-                <a:close/>
-                <a:lnTo>
-                  <a:pt x="102645" y="2664087"/>
-                </a:lnTo>
-                <a:close/>
-                <a:lnTo>
-                  <a:pt x="105148" y="2664675"/>
-                </a:lnTo>
-                <a:close/>
-                <a:lnTo>
-                  <a:pt x="107652" y="2665164"/>
-                </a:lnTo>
-                <a:close/>
-                <a:lnTo>
-                  <a:pt x="110155" y="2665528"/>
-                </a:lnTo>
-                <a:close/>
-                <a:lnTo>
-                  <a:pt x="112659" y="2665756"/>
-                </a:lnTo>
-                <a:close/>
-                <a:lnTo>
-                  <a:pt x="115162" y="2665866"/>
-                </a:lnTo>
-                <a:close/>
-                <a:lnTo>
-                  <a:pt x="117666" y="2665882"/>
-                </a:lnTo>
-                <a:close/>
-                <a:lnTo>
-                  <a:pt x="120170" y="2665829"/>
-                </a:lnTo>
-                <a:close/>
-                <a:lnTo>
-                  <a:pt x="122673" y="2665730"/>
-                </a:lnTo>
-                <a:close/>
-                <a:lnTo>
-                  <a:pt x="125177" y="2665609"/>
-                </a:lnTo>
-                <a:close/>
-                <a:lnTo>
-                  <a:pt x="127680" y="2665490"/>
-                </a:lnTo>
-                <a:close/>
-                <a:lnTo>
-                  <a:pt x="130184" y="2665395"/>
-                </a:lnTo>
-                <a:close/>
-                <a:lnTo>
-                  <a:pt x="132687" y="2665329"/>
-                </a:lnTo>
-                <a:close/>
-                <a:lnTo>
-                  <a:pt x="135191" y="2665292"/>
-                </a:lnTo>
-                <a:close/>
-                <a:lnTo>
-                  <a:pt x="137694" y="2665285"/>
-                </a:lnTo>
-                <a:close/>
-                <a:lnTo>
-                  <a:pt x="140198" y="2665305"/>
-                </a:lnTo>
-                <a:close/>
-                <a:lnTo>
-                  <a:pt x="142701" y="2665355"/>
-                </a:lnTo>
-                <a:close/>
-                <a:lnTo>
-                  <a:pt x="145205" y="2665433"/>
-                </a:lnTo>
-                <a:close/>
-                <a:lnTo>
-                  <a:pt x="147708" y="2665538"/>
-                </a:lnTo>
-                <a:close/>
-                <a:lnTo>
-                  <a:pt x="150212" y="2665659"/>
-                </a:lnTo>
-                <a:close/>
-                <a:lnTo>
-                  <a:pt x="152715" y="2665771"/>
-                </a:lnTo>
-                <a:close/>
-                <a:lnTo>
-                  <a:pt x="155219" y="2665852"/>
-                </a:lnTo>
-                <a:close/>
-                <a:lnTo>
-                  <a:pt x="157723" y="2665878"/>
-                </a:lnTo>
-                <a:close/>
-                <a:lnTo>
-                  <a:pt x="160226" y="2665825"/>
-                </a:lnTo>
-                <a:close/>
-                <a:lnTo>
-                  <a:pt x="162730" y="2665671"/>
-                </a:lnTo>
-                <a:close/>
-                <a:lnTo>
-                  <a:pt x="165233" y="2665391"/>
-                </a:lnTo>
-                <a:close/>
-                <a:lnTo>
-                  <a:pt x="167737" y="2664978"/>
-                </a:lnTo>
-                <a:close/>
-                <a:lnTo>
-                  <a:pt x="170240" y="2664452"/>
-                </a:lnTo>
-                <a:close/>
-                <a:lnTo>
-                  <a:pt x="172744" y="2663835"/>
-                </a:lnTo>
-                <a:close/>
-                <a:lnTo>
-                  <a:pt x="175247" y="2663153"/>
-                </a:lnTo>
-                <a:close/>
-                <a:lnTo>
-                  <a:pt x="177751" y="2662427"/>
-                </a:lnTo>
-                <a:close/>
-                <a:lnTo>
-                  <a:pt x="180254" y="2661681"/>
-                </a:lnTo>
-                <a:close/>
-                <a:lnTo>
-                  <a:pt x="182758" y="2660940"/>
-                </a:lnTo>
-                <a:close/>
-                <a:lnTo>
-                  <a:pt x="185261" y="2660222"/>
-                </a:lnTo>
-                <a:close/>
-                <a:lnTo>
-                  <a:pt x="187765" y="2659532"/>
-                </a:lnTo>
-                <a:close/>
-                <a:lnTo>
-                  <a:pt x="190268" y="2658871"/>
-                </a:lnTo>
-                <a:close/>
-                <a:lnTo>
-                  <a:pt x="192772" y="2658239"/>
-                </a:lnTo>
-                <a:close/>
-                <a:lnTo>
-                  <a:pt x="195276" y="2657636"/>
-                </a:lnTo>
-                <a:close/>
-                <a:lnTo>
-                  <a:pt x="197779" y="2657062"/>
-                </a:lnTo>
-                <a:close/>
-                <a:lnTo>
-                  <a:pt x="200283" y="2656518"/>
-                </a:lnTo>
-                <a:close/>
-                <a:lnTo>
-                  <a:pt x="202786" y="2656001"/>
-                </a:lnTo>
-                <a:close/>
-                <a:lnTo>
-                  <a:pt x="205290" y="2655499"/>
-                </a:lnTo>
-                <a:close/>
-                <a:lnTo>
-                  <a:pt x="207793" y="2654987"/>
-                </a:lnTo>
-                <a:close/>
-                <a:lnTo>
-                  <a:pt x="210297" y="2654440"/>
-                </a:lnTo>
-                <a:close/>
-                <a:lnTo>
-                  <a:pt x="212800" y="2653835"/>
-                </a:lnTo>
-                <a:close/>
-                <a:lnTo>
-                  <a:pt x="215304" y="2653147"/>
-                </a:lnTo>
-                <a:close/>
-                <a:lnTo>
-                  <a:pt x="217807" y="2652353"/>
-                </a:lnTo>
-                <a:close/>
-                <a:lnTo>
-                  <a:pt x="220311" y="2651428"/>
-                </a:lnTo>
-                <a:close/>
-                <a:lnTo>
-                  <a:pt x="222814" y="2650368"/>
-                </a:lnTo>
-                <a:close/>
-                <a:lnTo>
-                  <a:pt x="225318" y="2649196"/>
-                </a:lnTo>
-                <a:close/>
-                <a:lnTo>
-                  <a:pt x="227821" y="2647939"/>
-                </a:lnTo>
-                <a:close/>
-                <a:lnTo>
-                  <a:pt x="230325" y="2646621"/>
-                </a:lnTo>
-                <a:close/>
-                <a:lnTo>
-                  <a:pt x="232829" y="2645269"/>
-                </a:lnTo>
-                <a:close/>
-                <a:lnTo>
-                  <a:pt x="235332" y="2643909"/>
-                </a:lnTo>
-                <a:close/>
-                <a:lnTo>
-                  <a:pt x="237836" y="2642568"/>
-                </a:lnTo>
-                <a:close/>
-                <a:lnTo>
-                  <a:pt x="240339" y="2641263"/>
-                </a:lnTo>
-                <a:close/>
-                <a:lnTo>
-                  <a:pt x="242843" y="2639991"/>
-                </a:lnTo>
-                <a:close/>
-                <a:lnTo>
-                  <a:pt x="245346" y="2638744"/>
-                </a:lnTo>
-                <a:close/>
-                <a:lnTo>
-                  <a:pt x="247850" y="2637511"/>
-                </a:lnTo>
-                <a:close/>
-                <a:lnTo>
-                  <a:pt x="250353" y="2636284"/>
-                </a:lnTo>
-                <a:close/>
-                <a:lnTo>
-                  <a:pt x="252857" y="2635053"/>
-                </a:lnTo>
-                <a:close/>
-                <a:lnTo>
-                  <a:pt x="255360" y="2633809"/>
-                </a:lnTo>
-                <a:close/>
-                <a:lnTo>
-                  <a:pt x="257864" y="2632544"/>
-                </a:lnTo>
-                <a:close/>
-                <a:lnTo>
-                  <a:pt x="260367" y="2631263"/>
-                </a:lnTo>
-                <a:close/>
-                <a:lnTo>
-                  <a:pt x="262871" y="2629976"/>
-                </a:lnTo>
-                <a:close/>
-                <a:lnTo>
-                  <a:pt x="265374" y="2628694"/>
-                </a:lnTo>
-                <a:close/>
-                <a:lnTo>
-                  <a:pt x="267878" y="2627429"/>
-                </a:lnTo>
-                <a:close/>
-                <a:lnTo>
-                  <a:pt x="270382" y="2626192"/>
-                </a:lnTo>
-                <a:close/>
-                <a:lnTo>
-                  <a:pt x="272885" y="2624993"/>
-                </a:lnTo>
-                <a:close/>
-                <a:lnTo>
-                  <a:pt x="275389" y="2623844"/>
-                </a:lnTo>
-                <a:close/>
-                <a:lnTo>
-                  <a:pt x="277892" y="2622734"/>
-                </a:lnTo>
-                <a:close/>
-                <a:lnTo>
-                  <a:pt x="280396" y="2621630"/>
-                </a:lnTo>
-                <a:close/>
-                <a:lnTo>
-                  <a:pt x="282899" y="2620498"/>
-                </a:lnTo>
-                <a:close/>
-                <a:lnTo>
-                  <a:pt x="285403" y="2619301"/>
-                </a:lnTo>
-                <a:close/>
-                <a:lnTo>
-                  <a:pt x="287906" y="2618006"/>
-                </a:lnTo>
-                <a:close/>
-                <a:lnTo>
-                  <a:pt x="290410" y="2616577"/>
-                </a:lnTo>
-                <a:close/>
-                <a:lnTo>
-                  <a:pt x="292913" y="2614979"/>
-                </a:lnTo>
-                <a:close/>
-                <a:lnTo>
-                  <a:pt x="295417" y="2613199"/>
-                </a:lnTo>
-                <a:close/>
-                <a:lnTo>
-                  <a:pt x="297920" y="2611285"/>
-                </a:lnTo>
-                <a:close/>
-                <a:lnTo>
-                  <a:pt x="300424" y="2609296"/>
-                </a:lnTo>
-                <a:close/>
-                <a:lnTo>
-                  <a:pt x="302927" y="2607290"/>
-                </a:lnTo>
-                <a:close/>
-                <a:lnTo>
-                  <a:pt x="305431" y="2605326"/>
-                </a:lnTo>
-                <a:close/>
-                <a:lnTo>
-                  <a:pt x="307935" y="2603463"/>
-                </a:lnTo>
-                <a:close/>
-                <a:lnTo>
-                  <a:pt x="310438" y="2601758"/>
-                </a:lnTo>
-                <a:close/>
-                <a:lnTo>
-                  <a:pt x="312942" y="2600260"/>
-                </a:lnTo>
-                <a:close/>
-                <a:lnTo>
-                  <a:pt x="315445" y="2598943"/>
-                </a:lnTo>
-                <a:close/>
-                <a:lnTo>
-                  <a:pt x="317949" y="2597748"/>
-                </a:lnTo>
-                <a:close/>
-                <a:lnTo>
-                  <a:pt x="320452" y="2596616"/>
-                </a:lnTo>
-                <a:close/>
-                <a:lnTo>
-                  <a:pt x="322956" y="2595488"/>
-                </a:lnTo>
-                <a:close/>
-                <a:lnTo>
-                  <a:pt x="325459" y="2594307"/>
-                </a:lnTo>
-                <a:close/>
-                <a:lnTo>
-                  <a:pt x="327963" y="2593014"/>
-                </a:lnTo>
-                <a:close/>
-                <a:lnTo>
-                  <a:pt x="330466" y="2591551"/>
-                </a:lnTo>
-                <a:close/>
-                <a:lnTo>
-                  <a:pt x="332970" y="2589908"/>
-                </a:lnTo>
-                <a:close/>
-                <a:lnTo>
-                  <a:pt x="335473" y="2588119"/>
-                </a:lnTo>
-                <a:close/>
-                <a:lnTo>
-                  <a:pt x="337977" y="2586218"/>
-                </a:lnTo>
-                <a:close/>
-                <a:lnTo>
-                  <a:pt x="340480" y="2584241"/>
-                </a:lnTo>
-                <a:close/>
-                <a:lnTo>
-                  <a:pt x="342984" y="2582221"/>
-                </a:lnTo>
-                <a:close/>
-                <a:lnTo>
-                  <a:pt x="345487" y="2580195"/>
-                </a:lnTo>
-                <a:close/>
-                <a:lnTo>
-                  <a:pt x="347991" y="2578198"/>
-                </a:lnTo>
-                <a:close/>
-                <a:lnTo>
-                  <a:pt x="350495" y="2576250"/>
-                </a:lnTo>
-                <a:close/>
-                <a:lnTo>
-                  <a:pt x="352998" y="2574346"/>
-                </a:lnTo>
-                <a:close/>
-                <a:lnTo>
-                  <a:pt x="355502" y="2572472"/>
-                </a:lnTo>
-                <a:close/>
-                <a:lnTo>
-                  <a:pt x="358005" y="2570620"/>
-                </a:lnTo>
-                <a:close/>
-                <a:lnTo>
-                  <a:pt x="360509" y="2568777"/>
-                </a:lnTo>
-                <a:close/>
-                <a:lnTo>
-                  <a:pt x="363012" y="2566932"/>
-                </a:lnTo>
-                <a:close/>
-                <a:lnTo>
-                  <a:pt x="365516" y="2565074"/>
-                </a:lnTo>
-                <a:close/>
-                <a:lnTo>
-                  <a:pt x="368019" y="2563195"/>
-                </a:lnTo>
-                <a:close/>
-                <a:lnTo>
-                  <a:pt x="370523" y="2561300"/>
-                </a:lnTo>
-                <a:close/>
-                <a:lnTo>
-                  <a:pt x="373026" y="2559398"/>
-                </a:lnTo>
-                <a:close/>
-                <a:lnTo>
-                  <a:pt x="375530" y="2557498"/>
-                </a:lnTo>
-                <a:close/>
-                <a:lnTo>
-                  <a:pt x="378033" y="2555609"/>
-                </a:lnTo>
-                <a:close/>
-                <a:lnTo>
-                  <a:pt x="380537" y="2553742"/>
-                </a:lnTo>
-                <a:close/>
-                <a:lnTo>
-                  <a:pt x="383040" y="2551905"/>
-                </a:lnTo>
-                <a:close/>
-                <a:lnTo>
-                  <a:pt x="385544" y="2550106"/>
-                </a:lnTo>
-                <a:close/>
-                <a:lnTo>
-                  <a:pt x="388048" y="2548335"/>
-                </a:lnTo>
-                <a:close/>
-                <a:lnTo>
-                  <a:pt x="390551" y="2546565"/>
-                </a:lnTo>
-                <a:close/>
-                <a:lnTo>
-                  <a:pt x="393055" y="2544770"/>
-                </a:lnTo>
-                <a:close/>
-                <a:lnTo>
-                  <a:pt x="395558" y="2542924"/>
-                </a:lnTo>
-                <a:close/>
-                <a:lnTo>
-                  <a:pt x="398062" y="2541000"/>
-                </a:lnTo>
-                <a:close/>
-                <a:lnTo>
-                  <a:pt x="400565" y="2538972"/>
-                </a:lnTo>
-                <a:close/>
-                <a:lnTo>
-                  <a:pt x="403069" y="2536813"/>
-                </a:lnTo>
-                <a:close/>
-                <a:lnTo>
-                  <a:pt x="405572" y="2534516"/>
-                </a:lnTo>
-                <a:close/>
-                <a:lnTo>
-                  <a:pt x="408076" y="2532104"/>
-                </a:lnTo>
-                <a:close/>
-                <a:lnTo>
-                  <a:pt x="410579" y="2529601"/>
-                </a:lnTo>
-                <a:close/>
-                <a:lnTo>
-                  <a:pt x="413083" y="2527034"/>
-                </a:lnTo>
-                <a:close/>
-                <a:lnTo>
-                  <a:pt x="415586" y="2524428"/>
-                </a:lnTo>
-                <a:close/>
-                <a:lnTo>
-                  <a:pt x="418090" y="2521809"/>
-                </a:lnTo>
-                <a:close/>
-                <a:lnTo>
-                  <a:pt x="420593" y="2519204"/>
-                </a:lnTo>
-                <a:close/>
-                <a:lnTo>
-                  <a:pt x="423097" y="2516631"/>
-                </a:lnTo>
-                <a:close/>
-                <a:lnTo>
-                  <a:pt x="425601" y="2514092"/>
-                </a:lnTo>
-                <a:close/>
-                <a:lnTo>
-                  <a:pt x="428104" y="2511579"/>
-                </a:lnTo>
-                <a:close/>
-                <a:lnTo>
-                  <a:pt x="430608" y="2509087"/>
-                </a:lnTo>
-                <a:close/>
-                <a:lnTo>
-                  <a:pt x="433111" y="2506608"/>
-                </a:lnTo>
-                <a:close/>
-                <a:lnTo>
-                  <a:pt x="435615" y="2504137"/>
-                </a:lnTo>
-                <a:close/>
-                <a:lnTo>
-                  <a:pt x="438118" y="2501668"/>
-                </a:lnTo>
-                <a:close/>
-                <a:lnTo>
-                  <a:pt x="440622" y="2499194"/>
-                </a:lnTo>
-                <a:close/>
-                <a:lnTo>
-                  <a:pt x="443125" y="2496712"/>
-                </a:lnTo>
-                <a:close/>
-                <a:lnTo>
-                  <a:pt x="445629" y="2494223"/>
-                </a:lnTo>
-                <a:close/>
-                <a:lnTo>
-                  <a:pt x="448132" y="2491725"/>
-                </a:lnTo>
-                <a:close/>
-                <a:lnTo>
-                  <a:pt x="450636" y="2489218"/>
-                </a:lnTo>
-                <a:close/>
-                <a:lnTo>
-                  <a:pt x="453139" y="2486701"/>
-                </a:lnTo>
-                <a:close/>
-                <a:lnTo>
-                  <a:pt x="455643" y="2484173"/>
-                </a:lnTo>
-                <a:close/>
-                <a:lnTo>
-                  <a:pt x="458146" y="2481635"/>
-                </a:lnTo>
-                <a:close/>
-                <a:lnTo>
-                  <a:pt x="460650" y="2479089"/>
-                </a:lnTo>
-                <a:close/>
-                <a:lnTo>
-                  <a:pt x="463154" y="2476544"/>
-                </a:lnTo>
-                <a:close/>
-                <a:lnTo>
-                  <a:pt x="465657" y="2474008"/>
-                </a:lnTo>
-                <a:close/>
-                <a:lnTo>
-                  <a:pt x="468161" y="2471490"/>
-                </a:lnTo>
-                <a:close/>
-                <a:lnTo>
-                  <a:pt x="470664" y="2468999"/>
-                </a:lnTo>
-                <a:close/>
-                <a:lnTo>
-                  <a:pt x="473168" y="2466544"/>
-                </a:lnTo>
-                <a:close/>
-                <a:lnTo>
-                  <a:pt x="475671" y="2464133"/>
-                </a:lnTo>
-                <a:close/>
-                <a:lnTo>
-                  <a:pt x="478175" y="2461767"/>
-                </a:lnTo>
-                <a:close/>
-                <a:lnTo>
-                  <a:pt x="480678" y="2459416"/>
-                </a:lnTo>
-                <a:close/>
-                <a:lnTo>
-                  <a:pt x="483182" y="2457046"/>
-                </a:lnTo>
-                <a:close/>
-                <a:lnTo>
-                  <a:pt x="485685" y="2454623"/>
-                </a:lnTo>
-                <a:close/>
-                <a:lnTo>
-                  <a:pt x="488189" y="2452113"/>
-                </a:lnTo>
-                <a:close/>
-                <a:lnTo>
-                  <a:pt x="490692" y="2449481"/>
-                </a:lnTo>
-                <a:close/>
-                <a:lnTo>
-                  <a:pt x="493196" y="2446692"/>
-                </a:lnTo>
-                <a:close/>
-                <a:lnTo>
-                  <a:pt x="495699" y="2443720"/>
-                </a:lnTo>
-                <a:close/>
-                <a:lnTo>
-                  <a:pt x="498203" y="2440594"/>
-                </a:lnTo>
-                <a:close/>
-                <a:lnTo>
-                  <a:pt x="500707" y="2437373"/>
-                </a:lnTo>
-                <a:close/>
-                <a:lnTo>
-                  <a:pt x="503210" y="2434115"/>
-                </a:lnTo>
-                <a:close/>
-                <a:lnTo>
-                  <a:pt x="505714" y="2430878"/>
-                </a:lnTo>
-                <a:close/>
-                <a:lnTo>
-                  <a:pt x="508217" y="2427721"/>
-                </a:lnTo>
-                <a:close/>
-                <a:lnTo>
-                  <a:pt x="510721" y="2424702"/>
-                </a:lnTo>
-                <a:close/>
-                <a:lnTo>
-                  <a:pt x="513224" y="2421878"/>
-                </a:lnTo>
-                <a:close/>
-                <a:lnTo>
-                  <a:pt x="515728" y="2419252"/>
-                </a:lnTo>
-                <a:close/>
-                <a:lnTo>
-                  <a:pt x="518231" y="2416768"/>
-                </a:lnTo>
-                <a:close/>
-                <a:lnTo>
-                  <a:pt x="520735" y="2414368"/>
-                </a:lnTo>
-                <a:close/>
-                <a:lnTo>
-                  <a:pt x="523238" y="2411994"/>
-                </a:lnTo>
-                <a:close/>
-                <a:lnTo>
-                  <a:pt x="525742" y="2409587"/>
-                </a:lnTo>
-                <a:close/>
-                <a:lnTo>
-                  <a:pt x="528245" y="2407088"/>
-                </a:lnTo>
-                <a:close/>
-                <a:lnTo>
-                  <a:pt x="530749" y="2404440"/>
-                </a:lnTo>
-                <a:close/>
-                <a:lnTo>
-                  <a:pt x="533252" y="2401607"/>
-                </a:lnTo>
-                <a:close/>
-                <a:lnTo>
-                  <a:pt x="535756" y="2398616"/>
-                </a:lnTo>
-                <a:close/>
-                <a:lnTo>
-                  <a:pt x="538259" y="2395501"/>
-                </a:lnTo>
-                <a:close/>
-                <a:lnTo>
-                  <a:pt x="540763" y="2392295"/>
-                </a:lnTo>
-                <a:close/>
-                <a:lnTo>
-                  <a:pt x="543267" y="2389035"/>
-                </a:lnTo>
-                <a:close/>
-                <a:lnTo>
-                  <a:pt x="545770" y="2385754"/>
-                </a:lnTo>
-                <a:close/>
-                <a:lnTo>
-                  <a:pt x="548274" y="2382487"/>
-                </a:lnTo>
-                <a:close/>
-                <a:lnTo>
-                  <a:pt x="550777" y="2379264"/>
-                </a:lnTo>
-                <a:close/>
-                <a:lnTo>
-                  <a:pt x="553281" y="2376086"/>
-                </a:lnTo>
-                <a:close/>
-                <a:lnTo>
-                  <a:pt x="555784" y="2372944"/>
-                </a:lnTo>
-                <a:close/>
-                <a:lnTo>
-                  <a:pt x="558288" y="2369829"/>
-                </a:lnTo>
-                <a:close/>
-                <a:lnTo>
-                  <a:pt x="560791" y="2366732"/>
-                </a:lnTo>
-                <a:close/>
-                <a:lnTo>
-                  <a:pt x="563295" y="2363642"/>
-                </a:lnTo>
-                <a:close/>
-                <a:lnTo>
-                  <a:pt x="565798" y="2360550"/>
-                </a:lnTo>
-                <a:close/>
-                <a:lnTo>
-                  <a:pt x="568302" y="2357448"/>
-                </a:lnTo>
-                <a:close/>
-                <a:lnTo>
-                  <a:pt x="570805" y="2354332"/>
-                </a:lnTo>
-                <a:close/>
-                <a:lnTo>
-                  <a:pt x="573309" y="2351206"/>
-                </a:lnTo>
-                <a:close/>
-                <a:lnTo>
-                  <a:pt x="575812" y="2348073"/>
-                </a:lnTo>
-                <a:close/>
-                <a:lnTo>
-                  <a:pt x="578316" y="2344935"/>
-                </a:lnTo>
-                <a:close/>
-                <a:lnTo>
-                  <a:pt x="580820" y="2341797"/>
-                </a:lnTo>
-                <a:close/>
-                <a:lnTo>
-                  <a:pt x="583323" y="2338660"/>
-                </a:lnTo>
-                <a:close/>
-                <a:lnTo>
-                  <a:pt x="585827" y="2335529"/>
-                </a:lnTo>
-                <a:close/>
-                <a:lnTo>
-                  <a:pt x="588330" y="2332404"/>
-                </a:lnTo>
-                <a:close/>
-                <a:lnTo>
-                  <a:pt x="590834" y="2329283"/>
-                </a:lnTo>
-                <a:close/>
-                <a:lnTo>
-                  <a:pt x="593337" y="2326163"/>
-                </a:lnTo>
-                <a:close/>
-                <a:lnTo>
-                  <a:pt x="595841" y="2323040"/>
-                </a:lnTo>
-                <a:close/>
-                <a:lnTo>
-                  <a:pt x="598344" y="2319911"/>
-                </a:lnTo>
-                <a:close/>
-                <a:lnTo>
-                  <a:pt x="600848" y="2316774"/>
-                </a:lnTo>
-                <a:close/>
-                <a:lnTo>
-                  <a:pt x="603351" y="2313624"/>
-                </a:lnTo>
-                <a:close/>
-                <a:lnTo>
-                  <a:pt x="605855" y="2310462"/>
-                </a:lnTo>
-                <a:close/>
-                <a:lnTo>
-                  <a:pt x="608358" y="2307292"/>
-                </a:lnTo>
-                <a:close/>
-                <a:lnTo>
-                  <a:pt x="610862" y="2304126"/>
-                </a:lnTo>
-                <a:close/>
-                <a:lnTo>
-                  <a:pt x="613365" y="2300972"/>
-                </a:lnTo>
-                <a:close/>
-                <a:lnTo>
-                  <a:pt x="615869" y="2297840"/>
-                </a:lnTo>
-                <a:close/>
-                <a:lnTo>
-                  <a:pt x="618373" y="2294740"/>
-                </a:lnTo>
-                <a:close/>
-                <a:lnTo>
-                  <a:pt x="620876" y="2291680"/>
-                </a:lnTo>
-                <a:close/>
-                <a:lnTo>
-                  <a:pt x="623380" y="2288668"/>
-                </a:lnTo>
-                <a:close/>
-                <a:lnTo>
-                  <a:pt x="625883" y="2285687"/>
-                </a:lnTo>
-                <a:close/>
-                <a:lnTo>
-                  <a:pt x="628387" y="2282704"/>
-                </a:lnTo>
-                <a:close/>
-                <a:lnTo>
-                  <a:pt x="630890" y="2279683"/>
-                </a:lnTo>
-                <a:close/>
-                <a:lnTo>
-                  <a:pt x="633394" y="2276590"/>
-                </a:lnTo>
-                <a:close/>
-                <a:lnTo>
-                  <a:pt x="635897" y="2273390"/>
-                </a:lnTo>
-                <a:close/>
-                <a:lnTo>
-                  <a:pt x="638401" y="2270049"/>
-                </a:lnTo>
-                <a:close/>
-                <a:lnTo>
-                  <a:pt x="640904" y="2266533"/>
-                </a:lnTo>
-                <a:close/>
-                <a:lnTo>
-                  <a:pt x="643408" y="2262842"/>
-                </a:lnTo>
-                <a:close/>
-                <a:lnTo>
-                  <a:pt x="645911" y="2259030"/>
-                </a:lnTo>
-                <a:close/>
-                <a:lnTo>
-                  <a:pt x="648415" y="2255155"/>
-                </a:lnTo>
-                <a:close/>
-                <a:lnTo>
-                  <a:pt x="650918" y="2251276"/>
-                </a:lnTo>
-                <a:close/>
-                <a:lnTo>
-                  <a:pt x="653422" y="2247451"/>
-                </a:lnTo>
-                <a:close/>
-                <a:lnTo>
-                  <a:pt x="655926" y="2243738"/>
-                </a:lnTo>
-                <a:close/>
-                <a:lnTo>
-                  <a:pt x="658429" y="2240196"/>
-                </a:lnTo>
-                <a:close/>
-                <a:lnTo>
-                  <a:pt x="660933" y="2236863"/>
-                </a:lnTo>
-                <a:close/>
-                <a:lnTo>
-                  <a:pt x="663436" y="2233698"/>
-                </a:lnTo>
-                <a:close/>
-                <a:lnTo>
-                  <a:pt x="665940" y="2230642"/>
-                </a:lnTo>
-                <a:close/>
-                <a:lnTo>
-                  <a:pt x="668443" y="2227638"/>
-                </a:lnTo>
-                <a:close/>
-                <a:lnTo>
-                  <a:pt x="670947" y="2224626"/>
-                </a:lnTo>
-                <a:close/>
-                <a:lnTo>
-                  <a:pt x="673450" y="2221549"/>
-                </a:lnTo>
-                <a:close/>
-                <a:lnTo>
-                  <a:pt x="675954" y="2218348"/>
-                </a:lnTo>
-                <a:close/>
-                <a:lnTo>
-                  <a:pt x="678457" y="2214970"/>
-                </a:lnTo>
-                <a:close/>
-                <a:lnTo>
-                  <a:pt x="680961" y="2211419"/>
-                </a:lnTo>
-                <a:close/>
-                <a:lnTo>
-                  <a:pt x="683464" y="2207728"/>
-                </a:lnTo>
-                <a:close/>
-                <a:lnTo>
-                  <a:pt x="685968" y="2203932"/>
-                </a:lnTo>
-                <a:close/>
-                <a:lnTo>
-                  <a:pt x="688471" y="2200065"/>
-                </a:lnTo>
-                <a:close/>
-                <a:lnTo>
-                  <a:pt x="690975" y="2196163"/>
-                </a:lnTo>
-                <a:close/>
-                <a:lnTo>
-                  <a:pt x="693479" y="2192260"/>
-                </a:lnTo>
-                <a:close/>
-                <a:lnTo>
-                  <a:pt x="695982" y="2188389"/>
-                </a:lnTo>
-                <a:close/>
-                <a:lnTo>
-                  <a:pt x="698486" y="2184567"/>
-                </a:lnTo>
-                <a:close/>
-                <a:lnTo>
-                  <a:pt x="700989" y="2180784"/>
-                </a:lnTo>
-                <a:close/>
-                <a:lnTo>
-                  <a:pt x="703493" y="2177033"/>
-                </a:lnTo>
-                <a:close/>
-                <a:lnTo>
-                  <a:pt x="705996" y="2173303"/>
-                </a:lnTo>
-                <a:close/>
-                <a:lnTo>
-                  <a:pt x="708500" y="2169585"/>
-                </a:lnTo>
-                <a:close/>
-                <a:lnTo>
-                  <a:pt x="711003" y="2165869"/>
-                </a:lnTo>
-                <a:close/>
-                <a:lnTo>
-                  <a:pt x="713507" y="2162147"/>
-                </a:lnTo>
-                <a:close/>
-                <a:lnTo>
-                  <a:pt x="716010" y="2158411"/>
-                </a:lnTo>
-                <a:close/>
-                <a:lnTo>
-                  <a:pt x="718514" y="2154663"/>
-                </a:lnTo>
-                <a:close/>
-                <a:lnTo>
-                  <a:pt x="721017" y="2150907"/>
-                </a:lnTo>
-                <a:close/>
-                <a:lnTo>
-                  <a:pt x="723521" y="2147145"/>
-                </a:lnTo>
-                <a:close/>
-                <a:lnTo>
-                  <a:pt x="726024" y="2143380"/>
-                </a:lnTo>
-                <a:close/>
-                <a:lnTo>
-                  <a:pt x="728528" y="2139617"/>
-                </a:lnTo>
-                <a:close/>
-                <a:lnTo>
-                  <a:pt x="731032" y="2135857"/>
-                </a:lnTo>
-                <a:close/>
-                <a:lnTo>
-                  <a:pt x="733535" y="2132104"/>
-                </a:lnTo>
-                <a:close/>
-                <a:lnTo>
-                  <a:pt x="736039" y="2128356"/>
-                </a:lnTo>
-                <a:close/>
-                <a:lnTo>
-                  <a:pt x="738542" y="2124609"/>
-                </a:lnTo>
-                <a:close/>
-                <a:lnTo>
-                  <a:pt x="741046" y="2120862"/>
-                </a:lnTo>
-                <a:close/>
-                <a:lnTo>
-                  <a:pt x="743549" y="2117110"/>
-                </a:lnTo>
-                <a:close/>
-                <a:lnTo>
-                  <a:pt x="746053" y="2113351"/>
-                </a:lnTo>
-                <a:close/>
-                <a:lnTo>
-                  <a:pt x="748556" y="2109582"/>
-                </a:lnTo>
-                <a:close/>
-                <a:lnTo>
-                  <a:pt x="751060" y="2105799"/>
-                </a:lnTo>
-                <a:close/>
-                <a:lnTo>
-                  <a:pt x="753563" y="2102005"/>
-                </a:lnTo>
-                <a:close/>
-                <a:lnTo>
-                  <a:pt x="756067" y="2098211"/>
-                </a:lnTo>
-                <a:close/>
-                <a:lnTo>
-                  <a:pt x="758570" y="2094424"/>
-                </a:lnTo>
-                <a:close/>
-                <a:lnTo>
-                  <a:pt x="761074" y="2090656"/>
-                </a:lnTo>
-                <a:close/>
-                <a:lnTo>
-                  <a:pt x="763577" y="2086914"/>
-                </a:lnTo>
-                <a:close/>
-                <a:lnTo>
-                  <a:pt x="766081" y="2083209"/>
-                </a:lnTo>
-                <a:close/>
-                <a:lnTo>
-                  <a:pt x="768584" y="2079550"/>
-                </a:lnTo>
-                <a:close/>
-                <a:lnTo>
-                  <a:pt x="771088" y="2075934"/>
-                </a:lnTo>
-                <a:close/>
-                <a:lnTo>
-                  <a:pt x="773592" y="2072330"/>
-                </a:lnTo>
-                <a:close/>
-                <a:lnTo>
-                  <a:pt x="776095" y="2068704"/>
-                </a:lnTo>
-                <a:close/>
-                <a:lnTo>
-                  <a:pt x="778599" y="2065021"/>
-                </a:lnTo>
-                <a:close/>
-                <a:lnTo>
-                  <a:pt x="781102" y="2061246"/>
-                </a:lnTo>
-                <a:close/>
-                <a:lnTo>
-                  <a:pt x="783606" y="2057346"/>
-                </a:lnTo>
-                <a:close/>
-                <a:lnTo>
-                  <a:pt x="786109" y="2053285"/>
-                </a:lnTo>
-                <a:close/>
-                <a:lnTo>
-                  <a:pt x="788613" y="2049040"/>
-                </a:lnTo>
-                <a:close/>
-                <a:lnTo>
-                  <a:pt x="791116" y="2044648"/>
-                </a:lnTo>
-                <a:close/>
-                <a:lnTo>
-                  <a:pt x="793620" y="2040167"/>
-                </a:lnTo>
-                <a:close/>
-                <a:lnTo>
-                  <a:pt x="796123" y="2035657"/>
-                </a:lnTo>
-                <a:close/>
-                <a:lnTo>
-                  <a:pt x="798627" y="2031175"/>
-                </a:lnTo>
-                <a:close/>
-                <a:lnTo>
-                  <a:pt x="801130" y="2026780"/>
-                </a:lnTo>
-                <a:close/>
-                <a:lnTo>
-                  <a:pt x="803634" y="2022530"/>
-                </a:lnTo>
-                <a:close/>
-                <a:lnTo>
-                  <a:pt x="806137" y="2018480"/>
-                </a:lnTo>
-                <a:close/>
-                <a:lnTo>
-                  <a:pt x="808641" y="2014622"/>
-                </a:lnTo>
-                <a:close/>
-                <a:lnTo>
-                  <a:pt x="811145" y="2010900"/>
-                </a:lnTo>
-                <a:close/>
-                <a:lnTo>
-                  <a:pt x="813648" y="2007254"/>
-                </a:lnTo>
-                <a:close/>
-                <a:lnTo>
-                  <a:pt x="816152" y="2003627"/>
-                </a:lnTo>
-                <a:close/>
-                <a:lnTo>
-                  <a:pt x="818655" y="1999960"/>
-                </a:lnTo>
-                <a:close/>
-                <a:lnTo>
-                  <a:pt x="821159" y="1996195"/>
-                </a:lnTo>
-                <a:close/>
-                <a:lnTo>
-                  <a:pt x="823662" y="1992273"/>
-                </a:lnTo>
-                <a:close/>
-                <a:lnTo>
-                  <a:pt x="826166" y="1988168"/>
-                </a:lnTo>
-                <a:close/>
-                <a:lnTo>
-                  <a:pt x="828669" y="1983908"/>
-                </a:lnTo>
-                <a:close/>
-                <a:lnTo>
-                  <a:pt x="831173" y="1979528"/>
-                </a:lnTo>
-                <a:close/>
-                <a:lnTo>
-                  <a:pt x="833676" y="1975062"/>
-                </a:lnTo>
-                <a:close/>
-                <a:lnTo>
-                  <a:pt x="836180" y="1970545"/>
-                </a:lnTo>
-                <a:close/>
-                <a:lnTo>
-                  <a:pt x="838683" y="1966012"/>
-                </a:lnTo>
-                <a:close/>
-                <a:lnTo>
-                  <a:pt x="841187" y="1961498"/>
-                </a:lnTo>
-                <a:close/>
-                <a:lnTo>
-                  <a:pt x="843690" y="1957029"/>
-                </a:lnTo>
-                <a:close/>
-                <a:lnTo>
-                  <a:pt x="846194" y="1952604"/>
-                </a:lnTo>
-                <a:close/>
-                <a:lnTo>
-                  <a:pt x="848698" y="1948214"/>
-                </a:lnTo>
-                <a:close/>
-                <a:lnTo>
-                  <a:pt x="851201" y="1943850"/>
-                </a:lnTo>
-                <a:close/>
-                <a:lnTo>
-                  <a:pt x="853705" y="1939502"/>
-                </a:lnTo>
-                <a:close/>
-                <a:lnTo>
-                  <a:pt x="856208" y="1935161"/>
-                </a:lnTo>
-                <a:close/>
-                <a:lnTo>
-                  <a:pt x="858712" y="1930817"/>
-                </a:lnTo>
-                <a:close/>
-                <a:lnTo>
-                  <a:pt x="861215" y="1926461"/>
-                </a:lnTo>
-                <a:close/>
-                <a:lnTo>
-                  <a:pt x="863719" y="1922092"/>
-                </a:lnTo>
-                <a:close/>
-                <a:lnTo>
-                  <a:pt x="866222" y="1917713"/>
-                </a:lnTo>
-                <a:close/>
-                <a:lnTo>
-                  <a:pt x="868726" y="1913327"/>
-                </a:lnTo>
-                <a:close/>
-                <a:lnTo>
-                  <a:pt x="871229" y="1908938"/>
-                </a:lnTo>
-                <a:close/>
-                <a:lnTo>
-                  <a:pt x="873733" y="1904547"/>
-                </a:lnTo>
-                <a:close/>
-                <a:lnTo>
-                  <a:pt x="876236" y="1900160"/>
-                </a:lnTo>
-                <a:close/>
-                <a:lnTo>
-                  <a:pt x="878740" y="1895778"/>
-                </a:lnTo>
-                <a:close/>
-                <a:lnTo>
-                  <a:pt x="881243" y="1891402"/>
-                </a:lnTo>
-                <a:close/>
-                <a:lnTo>
-                  <a:pt x="883747" y="1887029"/>
-                </a:lnTo>
-                <a:close/>
-                <a:lnTo>
-                  <a:pt x="886251" y="1882657"/>
-                </a:lnTo>
-                <a:close/>
-                <a:lnTo>
-                  <a:pt x="888754" y="1878282"/>
-                </a:lnTo>
-                <a:close/>
-                <a:lnTo>
-                  <a:pt x="891258" y="1873900"/>
-                </a:lnTo>
-                <a:close/>
-                <a:lnTo>
-                  <a:pt x="893761" y="1869510"/>
-                </a:lnTo>
-                <a:close/>
-                <a:lnTo>
-                  <a:pt x="896265" y="1865107"/>
-                </a:lnTo>
-                <a:close/>
-                <a:lnTo>
-                  <a:pt x="898768" y="1860691"/>
-                </a:lnTo>
-                <a:close/>
-                <a:lnTo>
-                  <a:pt x="901272" y="1856270"/>
-                </a:lnTo>
-                <a:close/>
-                <a:lnTo>
-                  <a:pt x="903775" y="1851853"/>
-                </a:lnTo>
-                <a:close/>
-                <a:lnTo>
-                  <a:pt x="906279" y="1847450"/>
-                </a:lnTo>
-                <a:close/>
-                <a:lnTo>
-                  <a:pt x="908782" y="1843069"/>
-                </a:lnTo>
-                <a:close/>
-                <a:lnTo>
-                  <a:pt x="911286" y="1838721"/>
-                </a:lnTo>
-                <a:close/>
-                <a:lnTo>
-                  <a:pt x="913789" y="1834415"/>
-                </a:lnTo>
-                <a:close/>
-                <a:lnTo>
-                  <a:pt x="916293" y="1830157"/>
-                </a:lnTo>
-                <a:close/>
-                <a:lnTo>
-                  <a:pt x="918796" y="1825926"/>
-                </a:lnTo>
-                <a:close/>
-                <a:lnTo>
-                  <a:pt x="921300" y="1821688"/>
-                </a:lnTo>
-                <a:close/>
-                <a:lnTo>
-                  <a:pt x="923804" y="1817408"/>
-                </a:lnTo>
-                <a:close/>
-                <a:lnTo>
-                  <a:pt x="926307" y="1813052"/>
-                </a:lnTo>
-                <a:close/>
-                <a:lnTo>
-                  <a:pt x="928811" y="1808585"/>
-                </a:lnTo>
-                <a:close/>
-                <a:lnTo>
-                  <a:pt x="931314" y="1803973"/>
-                </a:lnTo>
-                <a:close/>
-                <a:lnTo>
-                  <a:pt x="933818" y="1799183"/>
-                </a:lnTo>
-                <a:close/>
-                <a:lnTo>
-                  <a:pt x="936321" y="1794222"/>
-                </a:lnTo>
-                <a:close/>
-                <a:lnTo>
-                  <a:pt x="938825" y="1789147"/>
-                </a:lnTo>
-                <a:close/>
-                <a:lnTo>
-                  <a:pt x="941328" y="1784017"/>
-                </a:lnTo>
-                <a:close/>
-                <a:lnTo>
-                  <a:pt x="943832" y="1778889"/>
-                </a:lnTo>
-                <a:close/>
-                <a:lnTo>
-                  <a:pt x="946335" y="1773823"/>
-                </a:lnTo>
-                <a:close/>
-                <a:lnTo>
-                  <a:pt x="948839" y="1768876"/>
-                </a:lnTo>
-                <a:close/>
-                <a:lnTo>
-                  <a:pt x="951342" y="1764107"/>
-                </a:lnTo>
-                <a:close/>
-                <a:lnTo>
-                  <a:pt x="953846" y="1759546"/>
-                </a:lnTo>
-                <a:close/>
-                <a:lnTo>
-                  <a:pt x="956349" y="1755146"/>
-                </a:lnTo>
-                <a:close/>
-                <a:lnTo>
-                  <a:pt x="958853" y="1750848"/>
-                </a:lnTo>
-                <a:close/>
-                <a:lnTo>
-                  <a:pt x="961357" y="1746594"/>
-                </a:lnTo>
-                <a:close/>
-                <a:lnTo>
-                  <a:pt x="963860" y="1742326"/>
-                </a:lnTo>
-                <a:close/>
-                <a:lnTo>
-                  <a:pt x="966364" y="1737985"/>
-                </a:lnTo>
-                <a:close/>
-                <a:lnTo>
-                  <a:pt x="968867" y="1733513"/>
-                </a:lnTo>
-                <a:close/>
-                <a:lnTo>
-                  <a:pt x="971371" y="1728860"/>
-                </a:lnTo>
-                <a:close/>
-                <a:lnTo>
-                  <a:pt x="973874" y="1724038"/>
-                </a:lnTo>
-                <a:close/>
-                <a:lnTo>
-                  <a:pt x="976378" y="1719081"/>
-                </a:lnTo>
-                <a:close/>
-                <a:lnTo>
-                  <a:pt x="978881" y="1714023"/>
-                </a:lnTo>
-                <a:close/>
-                <a:lnTo>
-                  <a:pt x="981385" y="1708898"/>
-                </a:lnTo>
-                <a:close/>
-                <a:lnTo>
-                  <a:pt x="983888" y="1703742"/>
-                </a:lnTo>
-                <a:close/>
-                <a:lnTo>
-                  <a:pt x="986392" y="1698589"/>
-                </a:lnTo>
-                <a:close/>
-                <a:lnTo>
-                  <a:pt x="988895" y="1693473"/>
-                </a:lnTo>
-                <a:close/>
-                <a:lnTo>
-                  <a:pt x="991399" y="1688404"/>
-                </a:lnTo>
-                <a:close/>
-                <a:lnTo>
-                  <a:pt x="993902" y="1683374"/>
-                </a:lnTo>
-                <a:close/>
-                <a:lnTo>
-                  <a:pt x="996406" y="1678374"/>
-                </a:lnTo>
-                <a:close/>
-                <a:lnTo>
-                  <a:pt x="998909" y="1673394"/>
-                </a:lnTo>
-                <a:close/>
-                <a:lnTo>
-                  <a:pt x="1001413" y="1668425"/>
-                </a:lnTo>
-                <a:close/>
-                <a:lnTo>
-                  <a:pt x="1003917" y="1663458"/>
-                </a:lnTo>
-                <a:close/>
-                <a:lnTo>
-                  <a:pt x="1006420" y="1658482"/>
-                </a:lnTo>
-                <a:close/>
-                <a:lnTo>
-                  <a:pt x="1008924" y="1653493"/>
-                </a:lnTo>
-                <a:close/>
-                <a:lnTo>
-                  <a:pt x="1011427" y="1648492"/>
-                </a:lnTo>
-                <a:close/>
-                <a:lnTo>
-                  <a:pt x="1013931" y="1643483"/>
-                </a:lnTo>
-                <a:close/>
-                <a:lnTo>
-                  <a:pt x="1016434" y="1638469"/>
-                </a:lnTo>
-                <a:close/>
-                <a:lnTo>
-                  <a:pt x="1018938" y="1633452"/>
-                </a:lnTo>
-                <a:close/>
-                <a:lnTo>
-                  <a:pt x="1021441" y="1628437"/>
-                </a:lnTo>
-                <a:close/>
-                <a:lnTo>
-                  <a:pt x="1023945" y="1623426"/>
-                </a:lnTo>
-                <a:close/>
-                <a:lnTo>
-                  <a:pt x="1026448" y="1618422"/>
-                </a:lnTo>
-                <a:close/>
-                <a:lnTo>
-                  <a:pt x="1028952" y="1613423"/>
-                </a:lnTo>
-                <a:close/>
-                <a:lnTo>
-                  <a:pt x="1031455" y="1608425"/>
-                </a:lnTo>
-                <a:close/>
-                <a:lnTo>
-                  <a:pt x="1033959" y="1603425"/>
-                </a:lnTo>
-                <a:close/>
-                <a:lnTo>
-                  <a:pt x="1036462" y="1598421"/>
-                </a:lnTo>
-                <a:close/>
-                <a:lnTo>
-                  <a:pt x="1038966" y="1593409"/>
-                </a:lnTo>
-                <a:close/>
-                <a:lnTo>
-                  <a:pt x="1041470" y="1588386"/>
-                </a:lnTo>
-                <a:close/>
-                <a:lnTo>
-                  <a:pt x="1043973" y="1583350"/>
-                </a:lnTo>
-                <a:close/>
-                <a:lnTo>
-                  <a:pt x="1046477" y="1578304"/>
-                </a:lnTo>
-                <a:close/>
-                <a:lnTo>
-                  <a:pt x="1048980" y="1573259"/>
-                </a:lnTo>
-                <a:close/>
-                <a:lnTo>
-                  <a:pt x="1051484" y="1568222"/>
-                </a:lnTo>
-                <a:close/>
-                <a:lnTo>
-                  <a:pt x="1053987" y="1563205"/>
-                </a:lnTo>
-                <a:close/>
-                <a:lnTo>
-                  <a:pt x="1056491" y="1558215"/>
-                </a:lnTo>
-                <a:close/>
-                <a:lnTo>
-                  <a:pt x="1058994" y="1553263"/>
-                </a:lnTo>
-                <a:close/>
-                <a:lnTo>
-                  <a:pt x="1061498" y="1548358"/>
-                </a:lnTo>
-                <a:close/>
-                <a:lnTo>
-                  <a:pt x="1064001" y="1543493"/>
-                </a:lnTo>
-                <a:close/>
-                <a:lnTo>
-                  <a:pt x="1066505" y="1538636"/>
-                </a:lnTo>
-                <a:close/>
-                <a:lnTo>
-                  <a:pt x="1069008" y="1533752"/>
-                </a:lnTo>
-                <a:close/>
-                <a:lnTo>
-                  <a:pt x="1071512" y="1528808"/>
-                </a:lnTo>
-                <a:close/>
-                <a:lnTo>
-                  <a:pt x="1074016" y="1523768"/>
-                </a:lnTo>
-                <a:close/>
-                <a:lnTo>
-                  <a:pt x="1076519" y="1518599"/>
-                </a:lnTo>
-                <a:close/>
-                <a:lnTo>
-                  <a:pt x="1079023" y="1513266"/>
-                </a:lnTo>
-                <a:close/>
-                <a:lnTo>
-                  <a:pt x="1081526" y="1507750"/>
-                </a:lnTo>
-                <a:close/>
-                <a:lnTo>
-                  <a:pt x="1084030" y="1502095"/>
-                </a:lnTo>
-                <a:close/>
-                <a:lnTo>
-                  <a:pt x="1086533" y="1496358"/>
-                </a:lnTo>
-                <a:close/>
-                <a:lnTo>
-                  <a:pt x="1089037" y="1490598"/>
-                </a:lnTo>
-                <a:close/>
-                <a:lnTo>
-                  <a:pt x="1091540" y="1484871"/>
-                </a:lnTo>
-                <a:close/>
-                <a:lnTo>
-                  <a:pt x="1094044" y="1479237"/>
-                </a:lnTo>
-                <a:close/>
-                <a:lnTo>
-                  <a:pt x="1096547" y="1473753"/>
-                </a:lnTo>
-                <a:close/>
-                <a:lnTo>
-                  <a:pt x="1099051" y="1468469"/>
-                </a:lnTo>
-                <a:close/>
-                <a:lnTo>
-                  <a:pt x="1101555" y="1463370"/>
-                </a:lnTo>
-                <a:close/>
-                <a:lnTo>
-                  <a:pt x="1104058" y="1458399"/>
-                </a:lnTo>
-                <a:close/>
-                <a:lnTo>
-                  <a:pt x="1106562" y="1453501"/>
-                </a:lnTo>
-                <a:close/>
-                <a:lnTo>
-                  <a:pt x="1109066" y="1448618"/>
-                </a:lnTo>
-                <a:close/>
-                <a:lnTo>
-                  <a:pt x="1111569" y="1443696"/>
-                </a:lnTo>
-                <a:close/>
-                <a:lnTo>
-                  <a:pt x="1114072" y="1438677"/>
-                </a:lnTo>
-                <a:close/>
-                <a:lnTo>
-                  <a:pt x="1116575" y="1433506"/>
-                </a:lnTo>
-                <a:close/>
-                <a:lnTo>
-                  <a:pt x="1119078" y="1428162"/>
-                </a:lnTo>
-                <a:close/>
-                <a:lnTo>
-                  <a:pt x="1121581" y="1422669"/>
-                </a:lnTo>
-                <a:close/>
-                <a:lnTo>
-                  <a:pt x="1124084" y="1417053"/>
-                </a:lnTo>
-                <a:close/>
-                <a:lnTo>
-                  <a:pt x="1126587" y="1411341"/>
-                </a:lnTo>
-                <a:close/>
-                <a:lnTo>
-                  <a:pt x="1129091" y="1405559"/>
-                </a:lnTo>
-                <a:close/>
-                <a:lnTo>
-                  <a:pt x="1131595" y="1399733"/>
-                </a:lnTo>
-                <a:close/>
-                <a:lnTo>
-                  <a:pt x="1134100" y="1393890"/>
-                </a:lnTo>
-                <a:close/>
-                <a:lnTo>
-                  <a:pt x="1136606" y="1388055"/>
-                </a:lnTo>
-                <a:close/>
-                <a:lnTo>
-                  <a:pt x="1139112" y="1382250"/>
-                </a:lnTo>
-                <a:close/>
-                <a:lnTo>
-                  <a:pt x="1141618" y="1376495"/>
-                </a:lnTo>
-                <a:close/>
-                <a:lnTo>
-                  <a:pt x="1144123" y="1370812"/>
-                </a:lnTo>
-                <a:close/>
-                <a:lnTo>
-                  <a:pt x="1146626" y="1365222"/>
-                </a:lnTo>
-                <a:close/>
-                <a:lnTo>
-                  <a:pt x="1149127" y="1359744"/>
-                </a:lnTo>
-                <a:close/>
-                <a:lnTo>
-                  <a:pt x="1151626" y="1354401"/>
-                </a:lnTo>
-                <a:close/>
-                <a:lnTo>
-                  <a:pt x="1154122" y="1349202"/>
-                </a:lnTo>
-                <a:close/>
-                <a:lnTo>
-                  <a:pt x="1156617" y="1344075"/>
-                </a:lnTo>
-                <a:close/>
-                <a:lnTo>
-                  <a:pt x="1159112" y="1338910"/>
-                </a:lnTo>
-                <a:close/>
-                <a:lnTo>
-                  <a:pt x="1161610" y="1333597"/>
-                </a:lnTo>
-                <a:close/>
-                <a:lnTo>
-                  <a:pt x="1164112" y="1328027"/>
-                </a:lnTo>
-                <a:close/>
-                <a:lnTo>
-                  <a:pt x="1166621" y="1322088"/>
-                </a:lnTo>
-                <a:close/>
-                <a:lnTo>
-                  <a:pt x="1169138" y="1315671"/>
-                </a:lnTo>
-                <a:close/>
-                <a:lnTo>
-                  <a:pt x="1171667" y="1308677"/>
-                </a:lnTo>
-                <a:close/>
-                <a:lnTo>
-                  <a:pt x="1174203" y="1301255"/>
-                </a:lnTo>
-                <a:close/>
-                <a:lnTo>
-                  <a:pt x="1176739" y="1293812"/>
-                </a:lnTo>
-                <a:close/>
-                <a:lnTo>
-                  <a:pt x="1179269" y="1286767"/>
-                </a:lnTo>
-                <a:close/>
-                <a:lnTo>
-                  <a:pt x="1181783" y="1280541"/>
-                </a:lnTo>
-                <a:close/>
-                <a:lnTo>
-                  <a:pt x="1184275" y="1275551"/>
-                </a:lnTo>
-                <a:close/>
-                <a:lnTo>
-                  <a:pt x="1186736" y="1272218"/>
-                </a:lnTo>
-                <a:close/>
-                <a:lnTo>
-                  <a:pt x="1189160" y="1270958"/>
-                </a:lnTo>
-                <a:close/>
-                <a:lnTo>
-                  <a:pt x="1191548" y="1271649"/>
-                </a:lnTo>
-                <a:close/>
-                <a:lnTo>
-                  <a:pt x="1193926" y="1272905"/>
-                </a:lnTo>
-                <a:close/>
-                <a:lnTo>
-                  <a:pt x="1196322" y="1273158"/>
-                </a:lnTo>
-                <a:close/>
-                <a:lnTo>
-                  <a:pt x="1198765" y="1270842"/>
-                </a:lnTo>
-                <a:close/>
-                <a:lnTo>
-                  <a:pt x="1201284" y="1264390"/>
-                </a:lnTo>
-                <a:close/>
-                <a:lnTo>
-                  <a:pt x="1203906" y="1252235"/>
-                </a:lnTo>
-                <a:close/>
-                <a:lnTo>
-                  <a:pt x="1206662" y="1232810"/>
-                </a:lnTo>
-                <a:close/>
-                <a:lnTo>
-                  <a:pt x="1209563" y="1205385"/>
-                </a:lnTo>
-                <a:close/>
-                <a:lnTo>
-                  <a:pt x="1212535" y="1174069"/>
-                </a:lnTo>
-                <a:close/>
-                <a:lnTo>
-                  <a:pt x="1215471" y="1144710"/>
-                </a:lnTo>
-                <a:close/>
-                <a:lnTo>
-                  <a:pt x="1218266" y="1123153"/>
-                </a:lnTo>
-                <a:close/>
-                <a:lnTo>
-                  <a:pt x="1220811" y="1115249"/>
-                </a:lnTo>
-                <a:close/>
-                <a:lnTo>
-                  <a:pt x="1223000" y="1126846"/>
-                </a:lnTo>
-                <a:close/>
-                <a:lnTo>
-                  <a:pt x="1224726" y="1163791"/>
-                </a:lnTo>
-                <a:close/>
-                <a:lnTo>
-                  <a:pt x="1225895" y="1231458"/>
-                </a:lnTo>
-                <a:close/>
-                <a:lnTo>
-                  <a:pt x="1226601" y="1327292"/>
-                </a:lnTo>
-                <a:close/>
-                <a:lnTo>
-                  <a:pt x="1227098" y="1442189"/>
-                </a:lnTo>
-                <a:close/>
-                <a:lnTo>
-                  <a:pt x="1227642" y="1566850"/>
-                </a:lnTo>
-                <a:close/>
-                <a:lnTo>
-                  <a:pt x="1228492" y="1691975"/>
-                </a:lnTo>
-                <a:close/>
-                <a:lnTo>
-                  <a:pt x="1229904" y="1808266"/>
-                </a:lnTo>
-                <a:close/>
-                <a:lnTo>
-                  <a:pt x="1232138" y="1906421"/>
-                </a:lnTo>
-                <a:close/>
-                <a:lnTo>
-                  <a:pt x="1235447" y="1977190"/>
-                </a:lnTo>
-                <a:close/>
-                <a:lnTo>
-                  <a:pt x="1239933" y="2016217"/>
-                </a:lnTo>
-                <a:close/>
-                <a:lnTo>
-                  <a:pt x="1245407" y="2028187"/>
-                </a:lnTo>
-                <a:close/>
-                <a:lnTo>
-                  <a:pt x="1251649" y="2018764"/>
-                </a:lnTo>
-                <a:close/>
-                <a:lnTo>
-                  <a:pt x="1258440" y="1993611"/>
-                </a:lnTo>
-                <a:close/>
-                <a:lnTo>
-                  <a:pt x="1265559" y="1958390"/>
-                </a:lnTo>
-                <a:close/>
-                <a:lnTo>
-                  <a:pt x="1272787" y="1918765"/>
-                </a:lnTo>
-                <a:close/>
-                <a:lnTo>
-                  <a:pt x="1279905" y="1880399"/>
-                </a:lnTo>
-                <a:close/>
-                <a:lnTo>
-                  <a:pt x="1286733" y="1847914"/>
-                </a:lnTo>
-                <a:close/>
-                <a:lnTo>
-                  <a:pt x="1293279" y="1821288"/>
-                </a:lnTo>
-                <a:close/>
-                <a:lnTo>
-                  <a:pt x="1299602" y="1799202"/>
-                </a:lnTo>
-                <a:close/>
-                <a:lnTo>
-                  <a:pt x="1305758" y="1780338"/>
-                </a:lnTo>
-                <a:close/>
-                <a:lnTo>
-                  <a:pt x="1311807" y="1763377"/>
-                </a:lnTo>
-                <a:close/>
-                <a:lnTo>
-                  <a:pt x="1317807" y="1747001"/>
-                </a:lnTo>
-                <a:close/>
-                <a:lnTo>
-                  <a:pt x="1323816" y="1729890"/>
-                </a:lnTo>
-                <a:close/>
-                <a:lnTo>
-                  <a:pt x="1329888" y="1710805"/>
-                </a:lnTo>
-                <a:close/>
-                <a:lnTo>
-                  <a:pt x="1336039" y="1689436"/>
-                </a:lnTo>
-                <a:close/>
-                <a:lnTo>
-                  <a:pt x="1342254" y="1666086"/>
-                </a:lnTo>
-                <a:close/>
-                <a:lnTo>
-                  <a:pt x="1348522" y="1641070"/>
-                </a:lnTo>
-                <a:close/>
-                <a:lnTo>
-                  <a:pt x="1354827" y="1614704"/>
-                </a:lnTo>
-                <a:close/>
-                <a:lnTo>
-                  <a:pt x="1361158" y="1587301"/>
-                </a:lnTo>
-                <a:close/>
-                <a:lnTo>
-                  <a:pt x="1367501" y="1559177"/>
-                </a:lnTo>
-                <a:close/>
-                <a:lnTo>
-                  <a:pt x="1373842" y="1530645"/>
-                </a:lnTo>
-                <a:close/>
-                <a:lnTo>
-                  <a:pt x="1380171" y="1501891"/>
-                </a:lnTo>
-                <a:close/>
-                <a:lnTo>
-                  <a:pt x="1386483" y="1472919"/>
-                </a:lnTo>
-                <a:close/>
-                <a:lnTo>
-                  <a:pt x="1392774" y="1443718"/>
-                </a:lnTo>
-                <a:close/>
-                <a:lnTo>
-                  <a:pt x="1399038" y="1414277"/>
-                </a:lnTo>
-                <a:close/>
-                <a:lnTo>
-                  <a:pt x="1405270" y="1384584"/>
-                </a:lnTo>
-                <a:close/>
-                <a:lnTo>
-                  <a:pt x="1411465" y="1354628"/>
-                </a:lnTo>
-                <a:close/>
-                <a:lnTo>
-                  <a:pt x="1417619" y="1324399"/>
-                </a:lnTo>
-                <a:close/>
-                <a:lnTo>
-                  <a:pt x="1423734" y="1293848"/>
-                </a:lnTo>
-                <a:close/>
-                <a:lnTo>
-                  <a:pt x="1429836" y="1262803"/>
-                </a:lnTo>
-                <a:close/>
-                <a:lnTo>
-                  <a:pt x="1435961" y="1231064"/>
-                </a:lnTo>
-                <a:close/>
-                <a:lnTo>
-                  <a:pt x="1442140" y="1198432"/>
-                </a:lnTo>
-                <a:close/>
-                <a:lnTo>
-                  <a:pt x="1448406" y="1164707"/>
-                </a:lnTo>
-                <a:close/>
-                <a:lnTo>
-                  <a:pt x="1454794" y="1129689"/>
-                </a:lnTo>
-                <a:close/>
-                <a:lnTo>
-                  <a:pt x="1461336" y="1093178"/>
-                </a:lnTo>
-                <a:close/>
-                <a:lnTo>
-                  <a:pt x="1468054" y="1055045"/>
-                </a:lnTo>
-                <a:close/>
-                <a:lnTo>
-                  <a:pt x="1474872" y="1015774"/>
-                </a:lnTo>
-                <a:close/>
-                <a:lnTo>
-                  <a:pt x="1481664" y="976172"/>
-                </a:lnTo>
-                <a:close/>
-                <a:lnTo>
-                  <a:pt x="1488301" y="937049"/>
-                </a:lnTo>
-                <a:close/>
-                <a:lnTo>
-                  <a:pt x="1494656" y="899215"/>
-                </a:lnTo>
-                <a:close/>
-                <a:lnTo>
-                  <a:pt x="1500601" y="863480"/>
-                </a:lnTo>
-                <a:close/>
-                <a:lnTo>
-                  <a:pt x="1506009" y="830654"/>
-                </a:lnTo>
-                <a:close/>
-                <a:lnTo>
-                  <a:pt x="1510756" y="801526"/>
-                </a:lnTo>
-                <a:close/>
-                <a:lnTo>
-                  <a:pt x="1514828" y="776210"/>
-                </a:lnTo>
-                <a:close/>
-                <a:lnTo>
-                  <a:pt x="1518345" y="754035"/>
-                </a:lnTo>
-                <a:close/>
-                <a:lnTo>
-                  <a:pt x="1521431" y="734282"/>
-                </a:lnTo>
-                <a:close/>
-                <a:lnTo>
-                  <a:pt x="1524212" y="716235"/>
-                </a:lnTo>
-                <a:close/>
-                <a:lnTo>
-                  <a:pt x="1526813" y="699175"/>
-                </a:lnTo>
-                <a:close/>
-                <a:lnTo>
-                  <a:pt x="1529361" y="682385"/>
-                </a:lnTo>
-                <a:close/>
-                <a:lnTo>
-                  <a:pt x="1531980" y="665148"/>
-                </a:lnTo>
-                <a:close/>
-                <a:lnTo>
-                  <a:pt x="1534760" y="646941"/>
-                </a:lnTo>
-                <a:close/>
-                <a:lnTo>
-                  <a:pt x="1537695" y="627767"/>
-                </a:lnTo>
-                <a:close/>
-                <a:lnTo>
-                  <a:pt x="1540762" y="607716"/>
-                </a:lnTo>
-                <a:close/>
-                <a:lnTo>
-                  <a:pt x="1543939" y="586879"/>
-                </a:lnTo>
-                <a:close/>
-                <a:lnTo>
-                  <a:pt x="1547203" y="565345"/>
-                </a:lnTo>
-                <a:close/>
-                <a:lnTo>
-                  <a:pt x="1550531" y="543205"/>
-                </a:lnTo>
-                <a:close/>
-                <a:lnTo>
-                  <a:pt x="1553902" y="520549"/>
-                </a:lnTo>
-                <a:close/>
-                <a:lnTo>
-                  <a:pt x="1557291" y="497486"/>
-                </a:lnTo>
-                <a:close/>
-                <a:lnTo>
-                  <a:pt x="1560666" y="474251"/>
-                </a:lnTo>
-                <a:close/>
-                <a:lnTo>
-                  <a:pt x="1563992" y="451129"/>
-                </a:lnTo>
-                <a:close/>
-                <a:lnTo>
-                  <a:pt x="1567234" y="428407"/>
-                </a:lnTo>
-                <a:close/>
-                <a:lnTo>
-                  <a:pt x="1570356" y="406372"/>
-                </a:lnTo>
-                <a:close/>
-                <a:lnTo>
-                  <a:pt x="1573322" y="385311"/>
-                </a:lnTo>
-                <a:close/>
-                <a:lnTo>
-                  <a:pt x="1576097" y="365509"/>
-                </a:lnTo>
-                <a:close/>
-                <a:lnTo>
-                  <a:pt x="1578648" y="347242"/>
-                </a:lnTo>
-                <a:close/>
-                <a:lnTo>
-                  <a:pt x="1580968" y="330555"/>
-                </a:lnTo>
-                <a:close/>
-                <a:lnTo>
-                  <a:pt x="1583081" y="315275"/>
-                </a:lnTo>
-                <a:close/>
-                <a:lnTo>
-                  <a:pt x="1585011" y="301221"/>
-                </a:lnTo>
-                <a:close/>
-                <a:lnTo>
-                  <a:pt x="1586780" y="288214"/>
-                </a:lnTo>
-                <a:close/>
-                <a:lnTo>
-                  <a:pt x="1588413" y="276072"/>
-                </a:lnTo>
-                <a:close/>
-                <a:lnTo>
-                  <a:pt x="1589933" y="264615"/>
-                </a:lnTo>
-                <a:close/>
-                <a:lnTo>
-                  <a:pt x="1591364" y="253662"/>
-                </a:lnTo>
-                <a:close/>
-                <a:lnTo>
-                  <a:pt x="1592724" y="243070"/>
-                </a:lnTo>
-                <a:close/>
-                <a:lnTo>
-                  <a:pt x="1594028" y="232772"/>
-                </a:lnTo>
-                <a:close/>
-                <a:lnTo>
-                  <a:pt x="1595287" y="222711"/>
-                </a:lnTo>
-                <a:close/>
-                <a:lnTo>
-                  <a:pt x="1596512" y="212831"/>
-                </a:lnTo>
-                <a:close/>
-                <a:lnTo>
-                  <a:pt x="1597714" y="203075"/>
-                </a:lnTo>
-                <a:close/>
-                <a:lnTo>
-                  <a:pt x="1598906" y="193386"/>
-                </a:lnTo>
-                <a:close/>
-                <a:lnTo>
-                  <a:pt x="1600098" y="183708"/>
-                </a:lnTo>
-                <a:close/>
-                <a:lnTo>
-                  <a:pt x="1601301" y="173988"/>
-                </a:lnTo>
-                <a:close/>
-                <a:lnTo>
-                  <a:pt x="1602518" y="164204"/>
-                </a:lnTo>
-                <a:close/>
-                <a:lnTo>
-                  <a:pt x="1603749" y="154340"/>
-                </a:lnTo>
-                <a:close/>
-                <a:lnTo>
-                  <a:pt x="1604996" y="144383"/>
-                </a:lnTo>
-                <a:close/>
-                <a:lnTo>
-                  <a:pt x="1606258" y="134317"/>
-                </a:lnTo>
-                <a:close/>
-                <a:lnTo>
-                  <a:pt x="1607537" y="124127"/>
-                </a:lnTo>
-                <a:close/>
-                <a:lnTo>
-                  <a:pt x="1608833" y="113799"/>
-                </a:lnTo>
-                <a:close/>
-                <a:lnTo>
-                  <a:pt x="1610147" y="103323"/>
-                </a:lnTo>
-                <a:close/>
-                <a:lnTo>
-                  <a:pt x="1611470" y="92761"/>
-                </a:lnTo>
-                <a:close/>
-                <a:lnTo>
-                  <a:pt x="1612788" y="82226"/>
-                </a:lnTo>
-                <a:close/>
-                <a:lnTo>
-                  <a:pt x="1614087" y="71833"/>
-                </a:lnTo>
-                <a:close/>
-                <a:lnTo>
-                  <a:pt x="1615352" y="61700"/>
-                </a:lnTo>
-                <a:close/>
-                <a:lnTo>
-                  <a:pt x="1616571" y="51940"/>
-                </a:lnTo>
-                <a:close/>
-                <a:lnTo>
-                  <a:pt x="1617728" y="42670"/>
-                </a:lnTo>
-                <a:close/>
-                <a:lnTo>
-                  <a:pt x="1618809" y="34005"/>
-                </a:lnTo>
-                <a:close/>
-                <a:lnTo>
-                  <a:pt x="1619800" y="26061"/>
-                </a:lnTo>
-                <a:close/>
-                <a:lnTo>
-                  <a:pt x="1620687" y="18953"/>
-                </a:lnTo>
-                <a:close/>
-                <a:lnTo>
-                  <a:pt x="1621455" y="12797"/>
-                </a:lnTo>
-                <a:close/>
-                <a:lnTo>
-                  <a:pt x="1622091" y="7708"/>
-                </a:lnTo>
-                <a:close/>
-                <a:lnTo>
-                  <a:pt x="1622580" y="3802"/>
-                </a:lnTo>
-                <a:close/>
-                <a:lnTo>
-                  <a:pt x="1622907" y="1194"/>
-                </a:lnTo>
-                <a:close/>
-                <a:lnTo>
-                  <a:pt x="1623060" y="0"/>
+                  <a:pt x="3807" y="2376846"/>
+                </a:lnTo>
+                <a:close/>
+                <a:lnTo>
+                  <a:pt x="7662" y="2376235"/>
+                </a:lnTo>
+                <a:close/>
+                <a:lnTo>
+                  <a:pt x="11564" y="2375607"/>
+                </a:lnTo>
+                <a:close/>
+                <a:lnTo>
+                  <a:pt x="15514" y="2374962"/>
+                </a:lnTo>
+                <a:close/>
+                <a:lnTo>
+                  <a:pt x="19512" y="2374300"/>
+                </a:lnTo>
+                <a:close/>
+                <a:lnTo>
+                  <a:pt x="23555" y="2373621"/>
+                </a:lnTo>
+                <a:close/>
+                <a:lnTo>
+                  <a:pt x="27645" y="2372924"/>
+                </a:lnTo>
+                <a:close/>
+                <a:lnTo>
+                  <a:pt x="31781" y="2372211"/>
+                </a:lnTo>
+                <a:close/>
+                <a:lnTo>
+                  <a:pt x="35962" y="2371481"/>
+                </a:lnTo>
+                <a:close/>
+                <a:lnTo>
+                  <a:pt x="40188" y="2370734"/>
+                </a:lnTo>
+                <a:close/>
+                <a:lnTo>
+                  <a:pt x="44459" y="2369971"/>
+                </a:lnTo>
+                <a:close/>
+                <a:lnTo>
+                  <a:pt x="48774" y="2369190"/>
+                </a:lnTo>
+                <a:close/>
+                <a:lnTo>
+                  <a:pt x="53133" y="2368393"/>
+                </a:lnTo>
+                <a:close/>
+                <a:lnTo>
+                  <a:pt x="57535" y="2367579"/>
+                </a:lnTo>
+                <a:close/>
+                <a:lnTo>
+                  <a:pt x="61979" y="2366748"/>
+                </a:lnTo>
+                <a:close/>
+                <a:lnTo>
+                  <a:pt x="66467" y="2365901"/>
+                </a:lnTo>
+                <a:close/>
+                <a:lnTo>
+                  <a:pt x="70997" y="2365037"/>
+                </a:lnTo>
+                <a:close/>
+                <a:lnTo>
+                  <a:pt x="75568" y="2364156"/>
+                </a:lnTo>
+                <a:close/>
+                <a:lnTo>
+                  <a:pt x="80181" y="2363259"/>
+                </a:lnTo>
+                <a:close/>
+                <a:lnTo>
+                  <a:pt x="84834" y="2362346"/>
+                </a:lnTo>
+                <a:close/>
+                <a:lnTo>
+                  <a:pt x="89528" y="2361416"/>
+                </a:lnTo>
+                <a:close/>
+                <a:lnTo>
+                  <a:pt x="94263" y="2360469"/>
+                </a:lnTo>
+                <a:close/>
+                <a:lnTo>
+                  <a:pt x="99036" y="2359506"/>
+                </a:lnTo>
+                <a:close/>
+                <a:lnTo>
+                  <a:pt x="103850" y="2358527"/>
+                </a:lnTo>
+                <a:close/>
+                <a:lnTo>
+                  <a:pt x="108702" y="2357532"/>
+                </a:lnTo>
+                <a:close/>
+                <a:lnTo>
+                  <a:pt x="113592" y="2356520"/>
+                </a:lnTo>
+                <a:close/>
+                <a:lnTo>
+                  <a:pt x="118521" y="2355492"/>
+                </a:lnTo>
+                <a:close/>
+                <a:lnTo>
+                  <a:pt x="123487" y="2354448"/>
+                </a:lnTo>
+                <a:close/>
+                <a:lnTo>
+                  <a:pt x="128491" y="2353388"/>
+                </a:lnTo>
+                <a:close/>
+                <a:lnTo>
+                  <a:pt x="133531" y="2352311"/>
+                </a:lnTo>
+                <a:close/>
+                <a:lnTo>
+                  <a:pt x="138608" y="2351219"/>
+                </a:lnTo>
+                <a:close/>
+                <a:lnTo>
+                  <a:pt x="143721" y="2350110"/>
+                </a:lnTo>
+                <a:close/>
+                <a:lnTo>
+                  <a:pt x="148870" y="2348986"/>
+                </a:lnTo>
+                <a:close/>
+                <a:lnTo>
+                  <a:pt x="154054" y="2347845"/>
+                </a:lnTo>
+                <a:close/>
+                <a:lnTo>
+                  <a:pt x="159273" y="2346688"/>
+                </a:lnTo>
+                <a:close/>
+                <a:lnTo>
+                  <a:pt x="164526" y="2345516"/>
+                </a:lnTo>
+                <a:close/>
+                <a:lnTo>
+                  <a:pt x="169813" y="2344328"/>
+                </a:lnTo>
+                <a:close/>
+                <a:lnTo>
+                  <a:pt x="175134" y="2343124"/>
+                </a:lnTo>
+                <a:close/>
+                <a:lnTo>
+                  <a:pt x="180487" y="2341904"/>
+                </a:lnTo>
+                <a:close/>
+                <a:lnTo>
+                  <a:pt x="185874" y="2340668"/>
+                </a:lnTo>
+                <a:close/>
+                <a:lnTo>
+                  <a:pt x="191293" y="2339417"/>
+                </a:lnTo>
+                <a:close/>
+                <a:lnTo>
+                  <a:pt x="196744" y="2338150"/>
+                </a:lnTo>
+                <a:close/>
+                <a:lnTo>
+                  <a:pt x="202227" y="2336867"/>
+                </a:lnTo>
+                <a:close/>
+                <a:lnTo>
+                  <a:pt x="207741" y="2335569"/>
+                </a:lnTo>
+                <a:close/>
+                <a:lnTo>
+                  <a:pt x="213286" y="2334255"/>
+                </a:lnTo>
+                <a:close/>
+                <a:lnTo>
+                  <a:pt x="218861" y="2332926"/>
+                </a:lnTo>
+                <a:close/>
+                <a:lnTo>
+                  <a:pt x="224466" y="2331581"/>
+                </a:lnTo>
+                <a:close/>
+                <a:lnTo>
+                  <a:pt x="230100" y="2330221"/>
+                </a:lnTo>
+                <a:close/>
+                <a:lnTo>
+                  <a:pt x="235764" y="2328845"/>
+                </a:lnTo>
+                <a:close/>
+                <a:lnTo>
+                  <a:pt x="241456" y="2327454"/>
+                </a:lnTo>
+                <a:close/>
+                <a:lnTo>
+                  <a:pt x="247177" y="2326048"/>
+                </a:lnTo>
+                <a:close/>
+                <a:lnTo>
+                  <a:pt x="252926" y="2324626"/>
+                </a:lnTo>
+                <a:close/>
+                <a:lnTo>
+                  <a:pt x="258702" y="2323189"/>
+                </a:lnTo>
+                <a:close/>
+                <a:lnTo>
+                  <a:pt x="264506" y="2321737"/>
+                </a:lnTo>
+                <a:close/>
+                <a:lnTo>
+                  <a:pt x="270336" y="2320269"/>
+                </a:lnTo>
+                <a:close/>
+                <a:lnTo>
+                  <a:pt x="276192" y="2318787"/>
+                </a:lnTo>
+                <a:close/>
+                <a:lnTo>
+                  <a:pt x="282074" y="2317289"/>
+                </a:lnTo>
+                <a:close/>
+                <a:lnTo>
+                  <a:pt x="287982" y="2315776"/>
+                </a:lnTo>
+                <a:close/>
+                <a:lnTo>
+                  <a:pt x="293915" y="2314248"/>
+                </a:lnTo>
+                <a:close/>
+                <a:lnTo>
+                  <a:pt x="299872" y="2312706"/>
+                </a:lnTo>
+                <a:close/>
+                <a:lnTo>
+                  <a:pt x="305854" y="2311148"/>
+                </a:lnTo>
+                <a:close/>
+                <a:lnTo>
+                  <a:pt x="311860" y="2309575"/>
+                </a:lnTo>
+                <a:close/>
+                <a:lnTo>
+                  <a:pt x="317889" y="2307987"/>
+                </a:lnTo>
+                <a:close/>
+                <a:lnTo>
+                  <a:pt x="323941" y="2306385"/>
+                </a:lnTo>
+                <a:close/>
+                <a:lnTo>
+                  <a:pt x="330016" y="2304768"/>
+                </a:lnTo>
+                <a:close/>
+                <a:lnTo>
+                  <a:pt x="336113" y="2303136"/>
+                </a:lnTo>
+                <a:close/>
+                <a:lnTo>
+                  <a:pt x="342232" y="2301489"/>
+                </a:lnTo>
+                <a:close/>
+                <a:lnTo>
+                  <a:pt x="348372" y="2299827"/>
+                </a:lnTo>
+                <a:close/>
+                <a:lnTo>
+                  <a:pt x="354534" y="2298151"/>
+                </a:lnTo>
+                <a:close/>
+                <a:lnTo>
+                  <a:pt x="360716" y="2296460"/>
+                </a:lnTo>
+                <a:close/>
+                <a:lnTo>
+                  <a:pt x="366918" y="2294755"/>
+                </a:lnTo>
+                <a:close/>
+                <a:lnTo>
+                  <a:pt x="373140" y="2293035"/>
+                </a:lnTo>
+                <a:close/>
+                <a:lnTo>
+                  <a:pt x="379382" y="2291300"/>
+                </a:lnTo>
+                <a:close/>
+                <a:lnTo>
+                  <a:pt x="385642" y="2289551"/>
+                </a:lnTo>
+                <a:close/>
+                <a:lnTo>
+                  <a:pt x="391921" y="2287788"/>
+                </a:lnTo>
+                <a:close/>
+                <a:lnTo>
+                  <a:pt x="398218" y="2286010"/>
+                </a:lnTo>
+                <a:close/>
+                <a:lnTo>
+                  <a:pt x="404533" y="2284218"/>
+                </a:lnTo>
+                <a:close/>
+                <a:lnTo>
+                  <a:pt x="410866" y="2282411"/>
+                </a:lnTo>
+                <a:close/>
+                <a:lnTo>
+                  <a:pt x="417215" y="2280590"/>
+                </a:lnTo>
+                <a:close/>
+                <a:lnTo>
+                  <a:pt x="423581" y="2278755"/>
+                </a:lnTo>
+                <a:close/>
+                <a:lnTo>
+                  <a:pt x="429963" y="2276906"/>
+                </a:lnTo>
+                <a:close/>
+                <a:lnTo>
+                  <a:pt x="436361" y="2275043"/>
+                </a:lnTo>
+                <a:close/>
+                <a:lnTo>
+                  <a:pt x="442774" y="2273165"/>
+                </a:lnTo>
+                <a:close/>
+                <a:lnTo>
+                  <a:pt x="449202" y="2271273"/>
+                </a:lnTo>
+                <a:close/>
+                <a:lnTo>
+                  <a:pt x="455645" y="2269367"/>
+                </a:lnTo>
+                <a:close/>
+                <a:lnTo>
+                  <a:pt x="462102" y="2267447"/>
+                </a:lnTo>
+                <a:close/>
+                <a:lnTo>
+                  <a:pt x="468572" y="2265513"/>
+                </a:lnTo>
+                <a:close/>
+                <a:lnTo>
+                  <a:pt x="475056" y="2263566"/>
+                </a:lnTo>
+                <a:close/>
+                <a:lnTo>
+                  <a:pt x="481553" y="2261604"/>
+                </a:lnTo>
+                <a:close/>
+                <a:lnTo>
+                  <a:pt x="488062" y="2259628"/>
+                </a:lnTo>
+                <a:close/>
+                <a:lnTo>
+                  <a:pt x="494583" y="2257639"/>
+                </a:lnTo>
+                <a:close/>
+                <a:lnTo>
+                  <a:pt x="501116" y="2255635"/>
+                </a:lnTo>
+                <a:close/>
+                <a:lnTo>
+                  <a:pt x="507660" y="2253618"/>
+                </a:lnTo>
+                <a:close/>
+                <a:lnTo>
+                  <a:pt x="514216" y="2251587"/>
+                </a:lnTo>
+                <a:close/>
+                <a:lnTo>
+                  <a:pt x="520781" y="2249543"/>
+                </a:lnTo>
+                <a:close/>
+                <a:lnTo>
+                  <a:pt x="527357" y="2247484"/>
+                </a:lnTo>
+                <a:close/>
+                <a:lnTo>
+                  <a:pt x="533942" y="2245413"/>
+                </a:lnTo>
+                <a:close/>
+                <a:lnTo>
+                  <a:pt x="540537" y="2243327"/>
+                </a:lnTo>
+                <a:close/>
+                <a:lnTo>
+                  <a:pt x="547141" y="2241228"/>
+                </a:lnTo>
+                <a:close/>
+                <a:lnTo>
+                  <a:pt x="553752" y="2239116"/>
+                </a:lnTo>
+                <a:close/>
+                <a:lnTo>
+                  <a:pt x="560372" y="2236990"/>
+                </a:lnTo>
+                <a:close/>
+                <a:lnTo>
+                  <a:pt x="567000" y="2234850"/>
+                </a:lnTo>
+                <a:close/>
+                <a:lnTo>
+                  <a:pt x="573635" y="2232697"/>
+                </a:lnTo>
+                <a:close/>
+                <a:lnTo>
+                  <a:pt x="580277" y="2230531"/>
+                </a:lnTo>
+                <a:close/>
+                <a:lnTo>
+                  <a:pt x="586925" y="2228352"/>
+                </a:lnTo>
+                <a:close/>
+                <a:lnTo>
+                  <a:pt x="593579" y="2226159"/>
+                </a:lnTo>
+                <a:close/>
+                <a:lnTo>
+                  <a:pt x="600238" y="2223953"/>
+                </a:lnTo>
+                <a:close/>
+                <a:lnTo>
+                  <a:pt x="606903" y="2221733"/>
+                </a:lnTo>
+                <a:close/>
+                <a:lnTo>
+                  <a:pt x="613573" y="2219501"/>
+                </a:lnTo>
+                <a:close/>
+                <a:lnTo>
+                  <a:pt x="620247" y="2217255"/>
+                </a:lnTo>
+                <a:close/>
+                <a:lnTo>
+                  <a:pt x="626925" y="2214996"/>
+                </a:lnTo>
+                <a:close/>
+                <a:lnTo>
+                  <a:pt x="633606" y="2212725"/>
+                </a:lnTo>
+                <a:close/>
+                <a:lnTo>
+                  <a:pt x="640291" y="2210440"/>
+                </a:lnTo>
+                <a:close/>
+                <a:lnTo>
+                  <a:pt x="646979" y="2208142"/>
+                </a:lnTo>
+                <a:close/>
+                <a:lnTo>
+                  <a:pt x="653669" y="2205831"/>
+                </a:lnTo>
+                <a:close/>
+                <a:lnTo>
+                  <a:pt x="660360" y="2203507"/>
+                </a:lnTo>
+                <a:close/>
+                <a:lnTo>
+                  <a:pt x="667054" y="2201171"/>
+                </a:lnTo>
+                <a:close/>
+                <a:lnTo>
+                  <a:pt x="673748" y="2198821"/>
+                </a:lnTo>
+                <a:close/>
+                <a:lnTo>
+                  <a:pt x="680444" y="2196459"/>
+                </a:lnTo>
+                <a:close/>
+                <a:lnTo>
+                  <a:pt x="687139" y="2194084"/>
+                </a:lnTo>
+                <a:close/>
+                <a:lnTo>
+                  <a:pt x="693835" y="2191696"/>
+                </a:lnTo>
+                <a:close/>
+                <a:lnTo>
+                  <a:pt x="700530" y="2189296"/>
+                </a:lnTo>
+                <a:close/>
+                <a:lnTo>
+                  <a:pt x="707224" y="2186883"/>
+                </a:lnTo>
+                <a:close/>
+                <a:lnTo>
+                  <a:pt x="713916" y="2184457"/>
+                </a:lnTo>
+                <a:close/>
+                <a:lnTo>
+                  <a:pt x="720608" y="2182018"/>
+                </a:lnTo>
+                <a:close/>
+                <a:lnTo>
+                  <a:pt x="727297" y="2179568"/>
+                </a:lnTo>
+                <a:close/>
+                <a:lnTo>
+                  <a:pt x="733983" y="2177104"/>
+                </a:lnTo>
+                <a:close/>
+                <a:lnTo>
+                  <a:pt x="740667" y="2174628"/>
+                </a:lnTo>
+                <a:close/>
+                <a:lnTo>
+                  <a:pt x="747347" y="2172140"/>
+                </a:lnTo>
+                <a:close/>
+                <a:lnTo>
+                  <a:pt x="754023" y="2169639"/>
+                </a:lnTo>
+                <a:close/>
+                <a:lnTo>
+                  <a:pt x="760696" y="2167126"/>
+                </a:lnTo>
+                <a:close/>
+                <a:lnTo>
+                  <a:pt x="767363" y="2164601"/>
+                </a:lnTo>
+                <a:close/>
+                <a:lnTo>
+                  <a:pt x="774026" y="2162063"/>
+                </a:lnTo>
+                <a:close/>
+                <a:lnTo>
+                  <a:pt x="780684" y="2159513"/>
+                </a:lnTo>
+                <a:close/>
+                <a:lnTo>
+                  <a:pt x="787335" y="2156951"/>
+                </a:lnTo>
+                <a:close/>
+                <a:lnTo>
+                  <a:pt x="793981" y="2154377"/>
+                </a:lnTo>
+                <a:close/>
+                <a:lnTo>
+                  <a:pt x="800620" y="2151790"/>
+                </a:lnTo>
+                <a:close/>
+                <a:lnTo>
+                  <a:pt x="807252" y="2149192"/>
+                </a:lnTo>
+                <a:close/>
+                <a:lnTo>
+                  <a:pt x="813876" y="2146581"/>
+                </a:lnTo>
+                <a:close/>
+                <a:lnTo>
+                  <a:pt x="820493" y="2143958"/>
+                </a:lnTo>
+                <a:close/>
+                <a:lnTo>
+                  <a:pt x="827102" y="2141324"/>
+                </a:lnTo>
+                <a:close/>
+                <a:lnTo>
+                  <a:pt x="833702" y="2138677"/>
+                </a:lnTo>
+                <a:close/>
+                <a:lnTo>
+                  <a:pt x="840293" y="2136019"/>
+                </a:lnTo>
+                <a:close/>
+                <a:lnTo>
+                  <a:pt x="846874" y="2133348"/>
+                </a:lnTo>
+                <a:close/>
+                <a:lnTo>
+                  <a:pt x="853446" y="2130666"/>
+                </a:lnTo>
+                <a:close/>
+                <a:lnTo>
+                  <a:pt x="860008" y="2127972"/>
+                </a:lnTo>
+                <a:close/>
+                <a:lnTo>
+                  <a:pt x="866559" y="2125266"/>
+                </a:lnTo>
+                <a:close/>
+                <a:lnTo>
+                  <a:pt x="873098" y="2122549"/>
+                </a:lnTo>
+                <a:close/>
+                <a:lnTo>
+                  <a:pt x="879627" y="2119819"/>
+                </a:lnTo>
+                <a:close/>
+                <a:lnTo>
+                  <a:pt x="886143" y="2117078"/>
+                </a:lnTo>
+                <a:close/>
+                <a:lnTo>
+                  <a:pt x="892648" y="2114326"/>
+                </a:lnTo>
+                <a:close/>
+                <a:lnTo>
+                  <a:pt x="899139" y="2111562"/>
+                </a:lnTo>
+                <a:close/>
+                <a:lnTo>
+                  <a:pt x="905618" y="2108786"/>
+                </a:lnTo>
+                <a:close/>
+                <a:lnTo>
+                  <a:pt x="912083" y="2105999"/>
+                </a:lnTo>
+                <a:close/>
+                <a:lnTo>
+                  <a:pt x="918534" y="2103200"/>
+                </a:lnTo>
+                <a:close/>
+                <a:lnTo>
+                  <a:pt x="924971" y="2100390"/>
+                </a:lnTo>
+                <a:close/>
+                <a:lnTo>
+                  <a:pt x="931393" y="2097569"/>
+                </a:lnTo>
+                <a:close/>
+                <a:lnTo>
+                  <a:pt x="937800" y="2094736"/>
+                </a:lnTo>
+                <a:close/>
+                <a:lnTo>
+                  <a:pt x="944192" y="2091892"/>
+                </a:lnTo>
+                <a:close/>
+                <a:lnTo>
+                  <a:pt x="950567" y="2089037"/>
+                </a:lnTo>
+                <a:close/>
+                <a:lnTo>
+                  <a:pt x="956927" y="2086170"/>
+                </a:lnTo>
+                <a:close/>
+                <a:lnTo>
+                  <a:pt x="963269" y="2083292"/>
+                </a:lnTo>
+                <a:close/>
+                <a:lnTo>
+                  <a:pt x="969595" y="2080403"/>
+                </a:lnTo>
+                <a:close/>
+                <a:lnTo>
+                  <a:pt x="975903" y="2077503"/>
+                </a:lnTo>
+                <a:close/>
+                <a:lnTo>
+                  <a:pt x="982193" y="2074592"/>
+                </a:lnTo>
+                <a:close/>
+                <a:lnTo>
+                  <a:pt x="988464" y="2071669"/>
+                </a:lnTo>
+                <a:close/>
+                <a:lnTo>
+                  <a:pt x="994717" y="2068736"/>
+                </a:lnTo>
+                <a:close/>
+                <a:lnTo>
+                  <a:pt x="1000951" y="2065792"/>
+                </a:lnTo>
+                <a:close/>
+                <a:lnTo>
+                  <a:pt x="1007165" y="2062836"/>
+                </a:lnTo>
+                <a:close/>
+                <a:lnTo>
+                  <a:pt x="1013359" y="2059870"/>
+                </a:lnTo>
+                <a:close/>
+                <a:lnTo>
+                  <a:pt x="1019533" y="2056893"/>
+                </a:lnTo>
+                <a:close/>
+                <a:lnTo>
+                  <a:pt x="1025686" y="2053905"/>
+                </a:lnTo>
+                <a:close/>
+                <a:lnTo>
+                  <a:pt x="1031818" y="2050907"/>
+                </a:lnTo>
+                <a:close/>
+                <a:lnTo>
+                  <a:pt x="1037928" y="2047897"/>
+                </a:lnTo>
+                <a:close/>
+                <a:lnTo>
+                  <a:pt x="1044017" y="2044877"/>
+                </a:lnTo>
+                <a:close/>
+                <a:lnTo>
+                  <a:pt x="1050082" y="2041846"/>
+                </a:lnTo>
+                <a:close/>
+                <a:lnTo>
+                  <a:pt x="1056125" y="2038805"/>
+                </a:lnTo>
+                <a:close/>
+                <a:lnTo>
+                  <a:pt x="1062145" y="2035752"/>
+                </a:lnTo>
+                <a:close/>
+                <a:lnTo>
+                  <a:pt x="1068141" y="2032690"/>
+                </a:lnTo>
+                <a:close/>
+                <a:lnTo>
+                  <a:pt x="1074114" y="2029616"/>
+                </a:lnTo>
+                <a:close/>
+                <a:lnTo>
+                  <a:pt x="1080061" y="2026533"/>
+                </a:lnTo>
+                <a:close/>
+                <a:lnTo>
+                  <a:pt x="1085984" y="2023438"/>
+                </a:lnTo>
+                <a:close/>
+                <a:lnTo>
+                  <a:pt x="1091882" y="2020334"/>
+                </a:lnTo>
+                <a:close/>
+                <a:lnTo>
+                  <a:pt x="1097754" y="2017219"/>
+                </a:lnTo>
+                <a:close/>
+                <a:lnTo>
+                  <a:pt x="1103600" y="2014093"/>
+                </a:lnTo>
+                <a:close/>
+                <a:lnTo>
+                  <a:pt x="1109419" y="2010958"/>
+                </a:lnTo>
+                <a:close/>
+                <a:lnTo>
+                  <a:pt x="1115212" y="2007812"/>
+                </a:lnTo>
+                <a:close/>
+                <a:lnTo>
+                  <a:pt x="1120977" y="2004656"/>
+                </a:lnTo>
+                <a:close/>
+                <a:lnTo>
+                  <a:pt x="1126714" y="2001489"/>
+                </a:lnTo>
+                <a:close/>
+                <a:lnTo>
+                  <a:pt x="1132424" y="1998313"/>
+                </a:lnTo>
+                <a:close/>
+                <a:lnTo>
+                  <a:pt x="1138105" y="1995126"/>
+                </a:lnTo>
+                <a:close/>
+                <a:lnTo>
+                  <a:pt x="1143757" y="1991929"/>
+                </a:lnTo>
+                <a:close/>
+                <a:lnTo>
+                  <a:pt x="1149380" y="1988722"/>
+                </a:lnTo>
+                <a:close/>
+                <a:lnTo>
+                  <a:pt x="1154973" y="1985505"/>
+                </a:lnTo>
+                <a:close/>
+                <a:lnTo>
+                  <a:pt x="1160536" y="1982278"/>
+                </a:lnTo>
+                <a:close/>
+                <a:lnTo>
+                  <a:pt x="1166068" y="1979042"/>
+                </a:lnTo>
+                <a:close/>
+                <a:lnTo>
+                  <a:pt x="1171570" y="1975795"/>
+                </a:lnTo>
+                <a:close/>
+                <a:lnTo>
+                  <a:pt x="1177040" y="1972538"/>
+                </a:lnTo>
+                <a:close/>
+                <a:lnTo>
+                  <a:pt x="1182478" y="1969272"/>
+                </a:lnTo>
+                <a:close/>
+                <a:lnTo>
+                  <a:pt x="1187884" y="1965996"/>
+                </a:lnTo>
+                <a:close/>
+                <a:lnTo>
+                  <a:pt x="1193258" y="1962710"/>
+                </a:lnTo>
+                <a:close/>
+                <a:lnTo>
+                  <a:pt x="1198599" y="1959414"/>
+                </a:lnTo>
+                <a:close/>
+                <a:lnTo>
+                  <a:pt x="1203906" y="1956109"/>
+                </a:lnTo>
+                <a:close/>
+                <a:lnTo>
+                  <a:pt x="1209180" y="1952794"/>
+                </a:lnTo>
+                <a:close/>
+                <a:lnTo>
+                  <a:pt x="1214419" y="1949469"/>
+                </a:lnTo>
+                <a:close/>
+                <a:lnTo>
+                  <a:pt x="1219624" y="1946135"/>
+                </a:lnTo>
+                <a:close/>
+                <a:lnTo>
+                  <a:pt x="1224794" y="1942791"/>
+                </a:lnTo>
+                <a:close/>
+                <a:lnTo>
+                  <a:pt x="1229928" y="1939438"/>
+                </a:lnTo>
+                <a:close/>
+                <a:lnTo>
+                  <a:pt x="1235027" y="1936075"/>
+                </a:lnTo>
+                <a:close/>
+                <a:lnTo>
+                  <a:pt x="1240089" y="1932703"/>
+                </a:lnTo>
+                <a:close/>
+                <a:lnTo>
+                  <a:pt x="1245115" y="1929322"/>
+                </a:lnTo>
+                <a:close/>
+                <a:lnTo>
+                  <a:pt x="1250104" y="1925931"/>
+                </a:lnTo>
+                <a:close/>
+                <a:lnTo>
+                  <a:pt x="1255055" y="1922531"/>
+                </a:lnTo>
+                <a:close/>
+                <a:lnTo>
+                  <a:pt x="1259968" y="1919121"/>
+                </a:lnTo>
+                <a:close/>
+                <a:lnTo>
+                  <a:pt x="1264844" y="1915703"/>
+                </a:lnTo>
+                <a:close/>
+                <a:lnTo>
+                  <a:pt x="1269680" y="1912275"/>
+                </a:lnTo>
+                <a:close/>
+                <a:lnTo>
+                  <a:pt x="1274478" y="1908838"/>
+                </a:lnTo>
+                <a:close/>
+                <a:lnTo>
+                  <a:pt x="1279236" y="1905392"/>
+                </a:lnTo>
+                <a:close/>
+                <a:lnTo>
+                  <a:pt x="1283954" y="1901937"/>
+                </a:lnTo>
+                <a:close/>
+                <a:lnTo>
+                  <a:pt x="1288632" y="1898472"/>
+                </a:lnTo>
+                <a:close/>
+                <a:lnTo>
+                  <a:pt x="1293269" y="1894999"/>
+                </a:lnTo>
+                <a:close/>
+                <a:lnTo>
+                  <a:pt x="1297866" y="1891517"/>
+                </a:lnTo>
+                <a:close/>
+                <a:lnTo>
+                  <a:pt x="1302420" y="1888026"/>
+                </a:lnTo>
+                <a:close/>
+                <a:lnTo>
+                  <a:pt x="1306933" y="1884526"/>
+                </a:lnTo>
+                <a:close/>
+                <a:lnTo>
+                  <a:pt x="1311404" y="1881017"/>
+                </a:lnTo>
+                <a:close/>
+                <a:lnTo>
+                  <a:pt x="1315831" y="1877499"/>
+                </a:lnTo>
+                <a:close/>
+                <a:lnTo>
+                  <a:pt x="1320216" y="1873972"/>
+                </a:lnTo>
+                <a:close/>
+                <a:lnTo>
+                  <a:pt x="1324557" y="1870437"/>
+                </a:lnTo>
+                <a:close/>
+                <a:lnTo>
+                  <a:pt x="1328855" y="1866893"/>
+                </a:lnTo>
+                <a:close/>
+                <a:lnTo>
+                  <a:pt x="1333107" y="1863340"/>
+                </a:lnTo>
+                <a:close/>
+                <a:lnTo>
+                  <a:pt x="1337316" y="1859779"/>
+                </a:lnTo>
+                <a:close/>
+                <a:lnTo>
+                  <a:pt x="1341479" y="1856209"/>
+                </a:lnTo>
+                <a:close/>
+                <a:lnTo>
+                  <a:pt x="1345596" y="1852630"/>
+                </a:lnTo>
+                <a:close/>
+                <a:lnTo>
+                  <a:pt x="1349668" y="1849043"/>
+                </a:lnTo>
+                <a:close/>
+                <a:lnTo>
+                  <a:pt x="1353693" y="1845448"/>
+                </a:lnTo>
+                <a:close/>
+                <a:lnTo>
+                  <a:pt x="1357671" y="1841844"/>
+                </a:lnTo>
+                <a:close/>
+                <a:lnTo>
+                  <a:pt x="1361602" y="1838231"/>
+                </a:lnTo>
+                <a:close/>
+                <a:lnTo>
+                  <a:pt x="1365486" y="1834611"/>
+                </a:lnTo>
+                <a:close/>
+                <a:lnTo>
+                  <a:pt x="1369322" y="1830981"/>
+                </a:lnTo>
+                <a:close/>
+                <a:lnTo>
+                  <a:pt x="1373109" y="1827344"/>
+                </a:lnTo>
+                <a:close/>
+                <a:lnTo>
+                  <a:pt x="1376848" y="1823698"/>
+                </a:lnTo>
+                <a:close/>
+                <a:lnTo>
+                  <a:pt x="1380539" y="1820044"/>
+                </a:lnTo>
+                <a:close/>
+                <a:lnTo>
+                  <a:pt x="1384182" y="1816382"/>
+                </a:lnTo>
+                <a:close/>
+                <a:lnTo>
+                  <a:pt x="1387778" y="1812711"/>
+                </a:lnTo>
+                <a:close/>
+                <a:lnTo>
+                  <a:pt x="1391327" y="1809032"/>
+                </a:lnTo>
+                <a:close/>
+                <a:lnTo>
+                  <a:pt x="1394831" y="1805344"/>
+                </a:lnTo>
+                <a:close/>
+                <a:lnTo>
+                  <a:pt x="1398288" y="1801648"/>
+                </a:lnTo>
+                <a:close/>
+                <a:lnTo>
+                  <a:pt x="1401700" y="1797944"/>
+                </a:lnTo>
+                <a:close/>
+                <a:lnTo>
+                  <a:pt x="1405066" y="1794231"/>
+                </a:lnTo>
+                <a:close/>
+                <a:lnTo>
+                  <a:pt x="1408389" y="1790509"/>
+                </a:lnTo>
+                <a:close/>
+                <a:lnTo>
+                  <a:pt x="1411667" y="1786779"/>
+                </a:lnTo>
+                <a:close/>
+                <a:lnTo>
+                  <a:pt x="1414901" y="1783040"/>
+                </a:lnTo>
+                <a:close/>
+                <a:lnTo>
+                  <a:pt x="1418093" y="1779293"/>
+                </a:lnTo>
+                <a:close/>
+                <a:lnTo>
+                  <a:pt x="1421241" y="1775537"/>
+                </a:lnTo>
+                <a:close/>
+                <a:lnTo>
+                  <a:pt x="1424347" y="1771772"/>
+                </a:lnTo>
+                <a:close/>
+                <a:lnTo>
+                  <a:pt x="1427411" y="1767999"/>
+                </a:lnTo>
+                <a:close/>
+                <a:lnTo>
+                  <a:pt x="1430434" y="1764217"/>
+                </a:lnTo>
+                <a:close/>
+                <a:lnTo>
+                  <a:pt x="1433415" y="1760426"/>
+                </a:lnTo>
+                <a:close/>
+                <a:lnTo>
+                  <a:pt x="1436356" y="1756627"/>
+                </a:lnTo>
+                <a:close/>
+                <a:lnTo>
+                  <a:pt x="1439257" y="1752818"/>
+                </a:lnTo>
+                <a:close/>
+                <a:lnTo>
+                  <a:pt x="1442117" y="1749001"/>
+                </a:lnTo>
+                <a:close/>
+                <a:lnTo>
+                  <a:pt x="1444939" y="1745175"/>
+                </a:lnTo>
+                <a:close/>
+                <a:lnTo>
+                  <a:pt x="1447722" y="1741340"/>
+                </a:lnTo>
+                <a:close/>
+                <a:lnTo>
+                  <a:pt x="1450466" y="1737496"/>
+                </a:lnTo>
+                <a:close/>
+                <a:lnTo>
+                  <a:pt x="1453172" y="1733644"/>
+                </a:lnTo>
+                <a:close/>
+                <a:lnTo>
+                  <a:pt x="1455840" y="1729782"/>
+                </a:lnTo>
+                <a:close/>
+                <a:lnTo>
+                  <a:pt x="1458472" y="1725911"/>
+                </a:lnTo>
+                <a:close/>
+                <a:lnTo>
+                  <a:pt x="1461066" y="1722032"/>
+                </a:lnTo>
+                <a:close/>
+                <a:lnTo>
+                  <a:pt x="1463625" y="1718143"/>
+                </a:lnTo>
+                <a:close/>
+                <a:lnTo>
+                  <a:pt x="1466147" y="1714245"/>
+                </a:lnTo>
+                <a:close/>
+                <a:lnTo>
+                  <a:pt x="1468634" y="1710338"/>
+                </a:lnTo>
+                <a:close/>
+                <a:lnTo>
+                  <a:pt x="1471086" y="1706422"/>
+                </a:lnTo>
+                <a:close/>
+                <a:lnTo>
+                  <a:pt x="1473504" y="1702497"/>
+                </a:lnTo>
+                <a:close/>
+                <a:lnTo>
+                  <a:pt x="1475887" y="1698563"/>
+                </a:lnTo>
+                <a:close/>
+                <a:lnTo>
+                  <a:pt x="1478237" y="1694619"/>
+                </a:lnTo>
+                <a:close/>
+                <a:lnTo>
+                  <a:pt x="1480553" y="1690666"/>
+                </a:lnTo>
+                <a:close/>
+                <a:lnTo>
+                  <a:pt x="1482837" y="1686704"/>
+                </a:lnTo>
+                <a:close/>
+                <a:lnTo>
+                  <a:pt x="1485088" y="1682733"/>
+                </a:lnTo>
+                <a:close/>
+                <a:lnTo>
+                  <a:pt x="1487307" y="1678753"/>
+                </a:lnTo>
+                <a:close/>
+                <a:lnTo>
+                  <a:pt x="1489495" y="1674763"/>
+                </a:lnTo>
+                <a:close/>
+                <a:lnTo>
+                  <a:pt x="1491651" y="1670763"/>
+                </a:lnTo>
+                <a:close/>
+                <a:lnTo>
+                  <a:pt x="1493777" y="1666755"/>
+                </a:lnTo>
+                <a:close/>
+                <a:lnTo>
+                  <a:pt x="1495873" y="1662737"/>
+                </a:lnTo>
+                <a:close/>
+                <a:lnTo>
+                  <a:pt x="1497939" y="1658709"/>
+                </a:lnTo>
+                <a:close/>
+                <a:lnTo>
+                  <a:pt x="1499976" y="1654672"/>
+                </a:lnTo>
+                <a:close/>
+                <a:lnTo>
+                  <a:pt x="1501983" y="1650626"/>
+                </a:lnTo>
+                <a:close/>
+                <a:lnTo>
+                  <a:pt x="1503962" y="1646570"/>
+                </a:lnTo>
+                <a:close/>
+                <a:lnTo>
+                  <a:pt x="1505914" y="1642504"/>
+                </a:lnTo>
+                <a:close/>
+                <a:lnTo>
+                  <a:pt x="1507837" y="1638429"/>
+                </a:lnTo>
+                <a:close/>
+                <a:lnTo>
+                  <a:pt x="1509733" y="1634345"/>
+                </a:lnTo>
+                <a:close/>
+                <a:lnTo>
+                  <a:pt x="1511603" y="1630250"/>
+                </a:lnTo>
+                <a:close/>
+                <a:lnTo>
+                  <a:pt x="1513446" y="1626146"/>
+                </a:lnTo>
+                <a:close/>
+                <a:lnTo>
+                  <a:pt x="1515264" y="1622033"/>
+                </a:lnTo>
+                <a:close/>
+                <a:lnTo>
+                  <a:pt x="1517056" y="1617909"/>
+                </a:lnTo>
+                <a:close/>
+                <a:lnTo>
+                  <a:pt x="1518823" y="1613776"/>
+                </a:lnTo>
+                <a:close/>
+                <a:lnTo>
+                  <a:pt x="1520565" y="1609634"/>
+                </a:lnTo>
+                <a:close/>
+                <a:lnTo>
+                  <a:pt x="1522284" y="1605481"/>
+                </a:lnTo>
+                <a:close/>
+                <a:lnTo>
+                  <a:pt x="1523978" y="1601319"/>
+                </a:lnTo>
+                <a:close/>
+                <a:lnTo>
+                  <a:pt x="1525649" y="1597146"/>
+                </a:lnTo>
+                <a:close/>
+                <a:lnTo>
+                  <a:pt x="1527298" y="1592964"/>
+                </a:lnTo>
+                <a:close/>
+                <a:lnTo>
+                  <a:pt x="1528924" y="1588772"/>
+                </a:lnTo>
+                <a:close/>
+                <a:lnTo>
+                  <a:pt x="1530528" y="1584570"/>
+                </a:lnTo>
+                <a:close/>
+                <a:lnTo>
+                  <a:pt x="1532111" y="1580358"/>
+                </a:lnTo>
+                <a:close/>
+                <a:lnTo>
+                  <a:pt x="1533672" y="1576137"/>
+                </a:lnTo>
+                <a:close/>
+                <a:lnTo>
+                  <a:pt x="1535213" y="1571905"/>
+                </a:lnTo>
+                <a:close/>
+                <a:lnTo>
+                  <a:pt x="1536734" y="1567663"/>
+                </a:lnTo>
+                <a:close/>
+                <a:lnTo>
+                  <a:pt x="1538234" y="1563411"/>
+                </a:lnTo>
+                <a:close/>
+                <a:lnTo>
+                  <a:pt x="1539716" y="1559149"/>
+                </a:lnTo>
+                <a:close/>
+                <a:lnTo>
+                  <a:pt x="1541178" y="1554877"/>
+                </a:lnTo>
+                <a:close/>
+                <a:lnTo>
+                  <a:pt x="1542622" y="1550595"/>
+                </a:lnTo>
+                <a:close/>
+                <a:lnTo>
+                  <a:pt x="1544048" y="1546303"/>
+                </a:lnTo>
+                <a:close/>
+                <a:lnTo>
+                  <a:pt x="1545457" y="1542000"/>
+                </a:lnTo>
+                <a:close/>
+                <a:lnTo>
+                  <a:pt x="1546848" y="1537687"/>
+                </a:lnTo>
+                <a:close/>
+                <a:lnTo>
+                  <a:pt x="1548222" y="1533364"/>
+                </a:lnTo>
+                <a:close/>
+                <a:lnTo>
+                  <a:pt x="1549580" y="1529031"/>
+                </a:lnTo>
+                <a:close/>
+                <a:lnTo>
+                  <a:pt x="1550922" y="1524688"/>
+                </a:lnTo>
+                <a:close/>
+                <a:lnTo>
+                  <a:pt x="1552249" y="1520334"/>
+                </a:lnTo>
+                <a:close/>
+                <a:lnTo>
+                  <a:pt x="1553561" y="1515970"/>
+                </a:lnTo>
+                <a:close/>
+                <a:lnTo>
+                  <a:pt x="1554858" y="1511595"/>
+                </a:lnTo>
+                <a:close/>
+                <a:lnTo>
+                  <a:pt x="1556141" y="1507210"/>
+                </a:lnTo>
+                <a:close/>
+                <a:lnTo>
+                  <a:pt x="1557410" y="1502815"/>
+                </a:lnTo>
+                <a:close/>
+                <a:lnTo>
+                  <a:pt x="1558666" y="1498409"/>
+                </a:lnTo>
+                <a:close/>
+                <a:lnTo>
+                  <a:pt x="1559909" y="1493993"/>
+                </a:lnTo>
+                <a:close/>
+                <a:lnTo>
+                  <a:pt x="1561140" y="1489566"/>
+                </a:lnTo>
+                <a:close/>
+                <a:lnTo>
+                  <a:pt x="1562359" y="1485129"/>
+                </a:lnTo>
+                <a:close/>
+                <a:lnTo>
+                  <a:pt x="1563566" y="1480681"/>
+                </a:lnTo>
+                <a:close/>
+                <a:lnTo>
+                  <a:pt x="1564762" y="1476223"/>
+                </a:lnTo>
+                <a:close/>
+                <a:lnTo>
+                  <a:pt x="1565948" y="1471754"/>
+                </a:lnTo>
+                <a:close/>
+                <a:lnTo>
+                  <a:pt x="1567123" y="1467274"/>
+                </a:lnTo>
+                <a:close/>
+                <a:lnTo>
+                  <a:pt x="1568288" y="1462784"/>
+                </a:lnTo>
+                <a:close/>
+                <a:lnTo>
+                  <a:pt x="1569444" y="1458283"/>
+                </a:lnTo>
+                <a:close/>
+                <a:lnTo>
+                  <a:pt x="1570591" y="1453771"/>
+                </a:lnTo>
+                <a:close/>
+                <a:lnTo>
+                  <a:pt x="1571730" y="1449248"/>
+                </a:lnTo>
+                <a:close/>
+                <a:lnTo>
+                  <a:pt x="1572860" y="1444715"/>
+                </a:lnTo>
+                <a:close/>
+                <a:lnTo>
+                  <a:pt x="1573983" y="1440171"/>
+                </a:lnTo>
+                <a:close/>
+                <a:lnTo>
+                  <a:pt x="1575099" y="1435616"/>
+                </a:lnTo>
+                <a:close/>
+                <a:lnTo>
+                  <a:pt x="1576208" y="1431051"/>
+                </a:lnTo>
+                <a:close/>
+                <a:lnTo>
+                  <a:pt x="1577310" y="1426474"/>
+                </a:lnTo>
+                <a:close/>
+                <a:lnTo>
+                  <a:pt x="1578407" y="1421887"/>
+                </a:lnTo>
+                <a:close/>
+                <a:lnTo>
+                  <a:pt x="1579498" y="1417288"/>
+                </a:lnTo>
+                <a:close/>
+                <a:lnTo>
+                  <a:pt x="1580584" y="1412679"/>
+                </a:lnTo>
+                <a:close/>
+                <a:lnTo>
+                  <a:pt x="1581666" y="1408059"/>
+                </a:lnTo>
+                <a:close/>
+                <a:lnTo>
+                  <a:pt x="1582743" y="1403427"/>
+                </a:lnTo>
+                <a:close/>
+                <a:lnTo>
+                  <a:pt x="1583817" y="1398785"/>
+                </a:lnTo>
+                <a:close/>
+                <a:lnTo>
+                  <a:pt x="1584888" y="1394131"/>
+                </a:lnTo>
+                <a:close/>
+                <a:lnTo>
+                  <a:pt x="1585955" y="1389467"/>
+                </a:lnTo>
+                <a:close/>
+                <a:lnTo>
+                  <a:pt x="1587020" y="1384791"/>
+                </a:lnTo>
+                <a:close/>
+                <a:lnTo>
+                  <a:pt x="1588083" y="1380105"/>
+                </a:lnTo>
+                <a:close/>
+                <a:lnTo>
+                  <a:pt x="1589145" y="1375407"/>
+                </a:lnTo>
+                <a:close/>
+                <a:lnTo>
+                  <a:pt x="1590205" y="1370698"/>
+                </a:lnTo>
+                <a:close/>
+                <a:lnTo>
+                  <a:pt x="1591265" y="1365977"/>
+                </a:lnTo>
+                <a:close/>
+                <a:lnTo>
+                  <a:pt x="1592325" y="1361246"/>
+                </a:lnTo>
+                <a:close/>
+                <a:lnTo>
+                  <a:pt x="1593385" y="1356503"/>
+                </a:lnTo>
+                <a:close/>
+                <a:lnTo>
+                  <a:pt x="1594445" y="1351749"/>
+                </a:lnTo>
+                <a:close/>
+                <a:lnTo>
+                  <a:pt x="1595506" y="1346983"/>
+                </a:lnTo>
+                <a:close/>
+                <a:lnTo>
+                  <a:pt x="1596569" y="1342206"/>
+                </a:lnTo>
+                <a:close/>
+                <a:lnTo>
+                  <a:pt x="1597634" y="1337418"/>
+                </a:lnTo>
+                <a:close/>
+                <a:lnTo>
+                  <a:pt x="1598701" y="1332619"/>
+                </a:lnTo>
+                <a:close/>
+                <a:lnTo>
+                  <a:pt x="1599771" y="1327808"/>
+                </a:lnTo>
+                <a:close/>
+                <a:lnTo>
+                  <a:pt x="1600844" y="1322985"/>
+                </a:lnTo>
+                <a:close/>
+                <a:lnTo>
+                  <a:pt x="1601921" y="1318151"/>
+                </a:lnTo>
+                <a:close/>
+                <a:lnTo>
+                  <a:pt x="1603001" y="1313306"/>
+                </a:lnTo>
+                <a:close/>
+                <a:lnTo>
+                  <a:pt x="1604084" y="1308449"/>
+                </a:lnTo>
+                <a:close/>
+                <a:lnTo>
+                  <a:pt x="1605170" y="1303582"/>
+                </a:lnTo>
+                <a:close/>
+                <a:lnTo>
+                  <a:pt x="1606259" y="1298703"/>
+                </a:lnTo>
+                <a:close/>
+                <a:lnTo>
+                  <a:pt x="1607352" y="1293813"/>
+                </a:lnTo>
+                <a:close/>
+                <a:lnTo>
+                  <a:pt x="1608448" y="1288912"/>
+                </a:lnTo>
+                <a:close/>
+                <a:lnTo>
+                  <a:pt x="1609546" y="1284000"/>
+                </a:lnTo>
+                <a:close/>
+                <a:lnTo>
+                  <a:pt x="1610648" y="1279077"/>
+                </a:lnTo>
+                <a:close/>
+                <a:lnTo>
+                  <a:pt x="1611752" y="1274143"/>
+                </a:lnTo>
+                <a:close/>
+                <a:lnTo>
+                  <a:pt x="1612859" y="1269199"/>
+                </a:lnTo>
+                <a:close/>
+                <a:lnTo>
+                  <a:pt x="1613969" y="1264244"/>
+                </a:lnTo>
+                <a:close/>
+                <a:lnTo>
+                  <a:pt x="1615082" y="1259278"/>
+                </a:lnTo>
+                <a:close/>
+                <a:lnTo>
+                  <a:pt x="1616197" y="1254302"/>
+                </a:lnTo>
+                <a:close/>
+                <a:lnTo>
+                  <a:pt x="1617315" y="1249315"/>
+                </a:lnTo>
+                <a:close/>
+                <a:lnTo>
+                  <a:pt x="1618435" y="1244318"/>
+                </a:lnTo>
+                <a:close/>
+                <a:lnTo>
+                  <a:pt x="1619558" y="1239311"/>
+                </a:lnTo>
+                <a:close/>
+                <a:lnTo>
+                  <a:pt x="1620683" y="1234294"/>
+                </a:lnTo>
+                <a:close/>
+                <a:lnTo>
+                  <a:pt x="1621811" y="1229266"/>
+                </a:lnTo>
+                <a:close/>
+                <a:lnTo>
+                  <a:pt x="1622941" y="1224228"/>
+                </a:lnTo>
+                <a:close/>
+                <a:lnTo>
+                  <a:pt x="1624073" y="1219180"/>
+                </a:lnTo>
+                <a:close/>
+                <a:lnTo>
+                  <a:pt x="1625208" y="1214122"/>
+                </a:lnTo>
+                <a:close/>
+                <a:lnTo>
+                  <a:pt x="1626344" y="1209054"/>
+                </a:lnTo>
+                <a:close/>
+                <a:lnTo>
+                  <a:pt x="1627483" y="1203977"/>
+                </a:lnTo>
+                <a:close/>
+                <a:lnTo>
+                  <a:pt x="1628624" y="1198889"/>
+                </a:lnTo>
+                <a:close/>
+                <a:lnTo>
+                  <a:pt x="1629767" y="1193792"/>
+                </a:lnTo>
+                <a:close/>
+                <a:lnTo>
+                  <a:pt x="1630912" y="1188685"/>
+                </a:lnTo>
+                <a:close/>
+                <a:lnTo>
+                  <a:pt x="1632058" y="1183569"/>
+                </a:lnTo>
+                <a:close/>
+                <a:lnTo>
+                  <a:pt x="1633207" y="1178443"/>
+                </a:lnTo>
+                <a:close/>
+                <a:lnTo>
+                  <a:pt x="1634357" y="1173308"/>
+                </a:lnTo>
+                <a:close/>
+                <a:lnTo>
+                  <a:pt x="1635509" y="1168164"/>
+                </a:lnTo>
+                <a:close/>
+                <a:lnTo>
+                  <a:pt x="1636662" y="1163010"/>
+                </a:lnTo>
+                <a:close/>
+                <a:lnTo>
+                  <a:pt x="1637817" y="1157847"/>
+                </a:lnTo>
+                <a:close/>
+                <a:lnTo>
+                  <a:pt x="1638974" y="1152674"/>
+                </a:lnTo>
+                <a:close/>
+                <a:lnTo>
+                  <a:pt x="1640132" y="1147493"/>
+                </a:lnTo>
+                <a:close/>
+                <a:lnTo>
+                  <a:pt x="1641292" y="1142303"/>
+                </a:lnTo>
+                <a:close/>
+                <a:lnTo>
+                  <a:pt x="1642453" y="1137104"/>
+                </a:lnTo>
+                <a:close/>
+                <a:lnTo>
+                  <a:pt x="1643616" y="1131896"/>
+                </a:lnTo>
+                <a:close/>
+                <a:lnTo>
+                  <a:pt x="1644779" y="1126679"/>
+                </a:lnTo>
+                <a:close/>
+                <a:lnTo>
+                  <a:pt x="1645944" y="1121453"/>
+                </a:lnTo>
+                <a:close/>
+                <a:lnTo>
+                  <a:pt x="1647110" y="1116219"/>
+                </a:lnTo>
+                <a:close/>
+                <a:lnTo>
+                  <a:pt x="1648277" y="1110976"/>
+                </a:lnTo>
+                <a:close/>
+                <a:lnTo>
+                  <a:pt x="1649446" y="1105725"/>
+                </a:lnTo>
+                <a:close/>
+                <a:lnTo>
+                  <a:pt x="1650615" y="1100465"/>
+                </a:lnTo>
+                <a:close/>
+                <a:lnTo>
+                  <a:pt x="1651785" y="1095196"/>
+                </a:lnTo>
+                <a:close/>
+                <a:lnTo>
+                  <a:pt x="1652956" y="1089920"/>
+                </a:lnTo>
+                <a:close/>
+                <a:lnTo>
+                  <a:pt x="1654128" y="1084635"/>
+                </a:lnTo>
+                <a:close/>
+                <a:lnTo>
+                  <a:pt x="1655301" y="1079342"/>
+                </a:lnTo>
+                <a:close/>
+                <a:lnTo>
+                  <a:pt x="1656474" y="1074041"/>
+                </a:lnTo>
+                <a:close/>
+                <a:lnTo>
+                  <a:pt x="1657648" y="1068732"/>
+                </a:lnTo>
+                <a:close/>
+                <a:lnTo>
+                  <a:pt x="1658823" y="1063415"/>
+                </a:lnTo>
+                <a:close/>
+                <a:lnTo>
+                  <a:pt x="1659998" y="1058090"/>
+                </a:lnTo>
+                <a:close/>
+                <a:lnTo>
+                  <a:pt x="1661174" y="1052757"/>
+                </a:lnTo>
+                <a:close/>
+                <a:lnTo>
+                  <a:pt x="1662350" y="1047416"/>
+                </a:lnTo>
+                <a:close/>
+                <a:lnTo>
+                  <a:pt x="1663527" y="1042068"/>
+                </a:lnTo>
+                <a:close/>
+                <a:lnTo>
+                  <a:pt x="1664704" y="1036712"/>
+                </a:lnTo>
+                <a:close/>
+                <a:lnTo>
+                  <a:pt x="1665881" y="1031349"/>
+                </a:lnTo>
+                <a:close/>
+                <a:lnTo>
+                  <a:pt x="1667059" y="1025978"/>
+                </a:lnTo>
+                <a:close/>
+                <a:lnTo>
+                  <a:pt x="1668236" y="1020599"/>
+                </a:lnTo>
+                <a:close/>
+                <a:lnTo>
+                  <a:pt x="1669414" y="1015214"/>
+                </a:lnTo>
+                <a:close/>
+                <a:lnTo>
+                  <a:pt x="1670592" y="1009821"/>
+                </a:lnTo>
+                <a:close/>
+                <a:lnTo>
+                  <a:pt x="1671770" y="1004421"/>
+                </a:lnTo>
+                <a:close/>
+                <a:lnTo>
+                  <a:pt x="1672948" y="999013"/>
+                </a:lnTo>
+                <a:close/>
+                <a:lnTo>
+                  <a:pt x="1674125" y="993599"/>
+                </a:lnTo>
+                <a:close/>
+                <a:lnTo>
+                  <a:pt x="1675303" y="988177"/>
+                </a:lnTo>
+                <a:close/>
+                <a:lnTo>
+                  <a:pt x="1676480" y="982749"/>
+                </a:lnTo>
+                <a:close/>
+                <a:lnTo>
+                  <a:pt x="1677657" y="977314"/>
+                </a:lnTo>
+                <a:close/>
+                <a:lnTo>
+                  <a:pt x="1678834" y="971872"/>
+                </a:lnTo>
+                <a:close/>
+                <a:lnTo>
+                  <a:pt x="1680011" y="966423"/>
+                </a:lnTo>
+                <a:close/>
+                <a:lnTo>
+                  <a:pt x="1681187" y="960968"/>
+                </a:lnTo>
+                <a:close/>
+                <a:lnTo>
+                  <a:pt x="1682362" y="955506"/>
+                </a:lnTo>
+                <a:close/>
+                <a:lnTo>
+                  <a:pt x="1683537" y="950037"/>
+                </a:lnTo>
+                <a:close/>
+                <a:lnTo>
+                  <a:pt x="1684711" y="944562"/>
+                </a:lnTo>
+                <a:close/>
+                <a:lnTo>
+                  <a:pt x="1685885" y="939081"/>
+                </a:lnTo>
+                <a:close/>
+                <a:lnTo>
+                  <a:pt x="1687058" y="933593"/>
+                </a:lnTo>
+                <a:close/>
+                <a:lnTo>
+                  <a:pt x="1688230" y="928100"/>
+                </a:lnTo>
+                <a:close/>
+                <a:lnTo>
+                  <a:pt x="1689402" y="922599"/>
+                </a:lnTo>
+                <a:close/>
+                <a:lnTo>
+                  <a:pt x="1690572" y="917093"/>
+                </a:lnTo>
+                <a:close/>
+                <a:lnTo>
+                  <a:pt x="1691742" y="911581"/>
+                </a:lnTo>
+                <a:close/>
+                <a:lnTo>
+                  <a:pt x="1692911" y="906063"/>
+                </a:lnTo>
+                <a:close/>
+                <a:lnTo>
+                  <a:pt x="1694079" y="900539"/>
+                </a:lnTo>
+                <a:close/>
+                <a:lnTo>
+                  <a:pt x="1695245" y="895009"/>
+                </a:lnTo>
+                <a:close/>
+                <a:lnTo>
+                  <a:pt x="1696411" y="889473"/>
+                </a:lnTo>
+                <a:close/>
+                <a:lnTo>
+                  <a:pt x="1697575" y="883932"/>
+                </a:lnTo>
+                <a:close/>
+                <a:lnTo>
+                  <a:pt x="1698738" y="878385"/>
+                </a:lnTo>
+                <a:close/>
+                <a:lnTo>
+                  <a:pt x="1699900" y="872833"/>
+                </a:lnTo>
+                <a:close/>
+                <a:lnTo>
+                  <a:pt x="1701060" y="867275"/>
+                </a:lnTo>
+                <a:close/>
+                <a:lnTo>
+                  <a:pt x="1702219" y="861711"/>
+                </a:lnTo>
+                <a:close/>
+                <a:lnTo>
+                  <a:pt x="1703376" y="856143"/>
+                </a:lnTo>
+                <a:close/>
+                <a:lnTo>
+                  <a:pt x="1704532" y="850569"/>
+                </a:lnTo>
+                <a:close/>
+                <a:lnTo>
+                  <a:pt x="1705686" y="844990"/>
+                </a:lnTo>
+                <a:close/>
+                <a:lnTo>
+                  <a:pt x="1706839" y="839405"/>
+                </a:lnTo>
+                <a:close/>
+                <a:lnTo>
+                  <a:pt x="1707990" y="833816"/>
+                </a:lnTo>
+                <a:close/>
+                <a:lnTo>
+                  <a:pt x="1709139" y="828221"/>
+                </a:lnTo>
+                <a:close/>
+                <a:lnTo>
+                  <a:pt x="1710287" y="822622"/>
+                </a:lnTo>
+                <a:close/>
+                <a:lnTo>
+                  <a:pt x="1711432" y="817018"/>
+                </a:lnTo>
+                <a:close/>
+                <a:lnTo>
+                  <a:pt x="1712576" y="811409"/>
+                </a:lnTo>
+                <a:close/>
+                <a:lnTo>
+                  <a:pt x="1713718" y="805795"/>
+                </a:lnTo>
+                <a:close/>
+                <a:lnTo>
+                  <a:pt x="1714858" y="800177"/>
+                </a:lnTo>
+                <a:close/>
+                <a:lnTo>
+                  <a:pt x="1715995" y="794554"/>
+                </a:lnTo>
+                <a:close/>
+                <a:lnTo>
+                  <a:pt x="1717131" y="788927"/>
+                </a:lnTo>
+                <a:close/>
+                <a:lnTo>
+                  <a:pt x="1718264" y="783295"/>
+                </a:lnTo>
+                <a:close/>
+                <a:lnTo>
+                  <a:pt x="1719395" y="777658"/>
+                </a:lnTo>
+                <a:close/>
+                <a:lnTo>
+                  <a:pt x="1720524" y="772018"/>
+                </a:lnTo>
+                <a:close/>
+                <a:lnTo>
+                  <a:pt x="1721650" y="766373"/>
+                </a:lnTo>
+                <a:close/>
+                <a:lnTo>
+                  <a:pt x="1722774" y="760724"/>
+                </a:lnTo>
+                <a:close/>
+                <a:lnTo>
+                  <a:pt x="1723896" y="755071"/>
+                </a:lnTo>
+                <a:close/>
+                <a:lnTo>
+                  <a:pt x="1725015" y="749414"/>
+                </a:lnTo>
+                <a:close/>
+                <a:lnTo>
+                  <a:pt x="1726131" y="743753"/>
+                </a:lnTo>
+                <a:close/>
+                <a:lnTo>
+                  <a:pt x="1727245" y="738088"/>
+                </a:lnTo>
+                <a:close/>
+                <a:lnTo>
+                  <a:pt x="1728357" y="732419"/>
+                </a:lnTo>
+                <a:close/>
+                <a:lnTo>
+                  <a:pt x="1729465" y="726747"/>
+                </a:lnTo>
+                <a:close/>
+                <a:lnTo>
+                  <a:pt x="1730571" y="721070"/>
+                </a:lnTo>
+                <a:close/>
+                <a:lnTo>
+                  <a:pt x="1731673" y="715391"/>
+                </a:lnTo>
+                <a:close/>
+                <a:lnTo>
+                  <a:pt x="1732773" y="709707"/>
+                </a:lnTo>
+                <a:close/>
+                <a:lnTo>
+                  <a:pt x="1733870" y="704020"/>
+                </a:lnTo>
+                <a:close/>
+                <a:lnTo>
+                  <a:pt x="1734964" y="698330"/>
+                </a:lnTo>
+                <a:close/>
+                <a:lnTo>
+                  <a:pt x="1736055" y="692637"/>
+                </a:lnTo>
+                <a:close/>
+                <a:lnTo>
+                  <a:pt x="1737143" y="686940"/>
+                </a:lnTo>
+                <a:close/>
+                <a:lnTo>
+                  <a:pt x="1738227" y="681240"/>
+                </a:lnTo>
+                <a:close/>
+                <a:lnTo>
+                  <a:pt x="1739309" y="675537"/>
+                </a:lnTo>
+                <a:close/>
+                <a:lnTo>
+                  <a:pt x="1740387" y="669830"/>
+                </a:lnTo>
+                <a:close/>
+                <a:lnTo>
+                  <a:pt x="1741462" y="664121"/>
+                </a:lnTo>
+                <a:close/>
+                <a:lnTo>
+                  <a:pt x="1742533" y="658409"/>
+                </a:lnTo>
+                <a:close/>
+                <a:lnTo>
+                  <a:pt x="1743601" y="652694"/>
+                </a:lnTo>
+                <a:close/>
+                <a:lnTo>
+                  <a:pt x="1744665" y="646976"/>
+                </a:lnTo>
+                <a:close/>
+                <a:lnTo>
+                  <a:pt x="1745726" y="641256"/>
+                </a:lnTo>
+                <a:close/>
+                <a:lnTo>
+                  <a:pt x="1746783" y="635532"/>
+                </a:lnTo>
+                <a:close/>
+                <a:lnTo>
+                  <a:pt x="1747837" y="629807"/>
+                </a:lnTo>
+                <a:close/>
+                <a:lnTo>
+                  <a:pt x="1748887" y="624078"/>
+                </a:lnTo>
+                <a:close/>
+                <a:lnTo>
+                  <a:pt x="1749933" y="618348"/>
+                </a:lnTo>
+                <a:close/>
+                <a:lnTo>
+                  <a:pt x="1750975" y="612615"/>
+                </a:lnTo>
+                <a:close/>
+                <a:lnTo>
+                  <a:pt x="1752013" y="606879"/>
+                </a:lnTo>
+                <a:close/>
+                <a:lnTo>
+                  <a:pt x="1753047" y="601142"/>
+                </a:lnTo>
+                <a:close/>
+                <a:lnTo>
+                  <a:pt x="1754078" y="595402"/>
+                </a:lnTo>
+                <a:close/>
+                <a:lnTo>
+                  <a:pt x="1755104" y="589660"/>
+                </a:lnTo>
+                <a:close/>
+                <a:lnTo>
+                  <a:pt x="1756126" y="583916"/>
+                </a:lnTo>
+                <a:close/>
+                <a:lnTo>
+                  <a:pt x="1757144" y="578171"/>
+                </a:lnTo>
+                <a:close/>
+                <a:lnTo>
+                  <a:pt x="1758158" y="572423"/>
+                </a:lnTo>
+                <a:close/>
+                <a:lnTo>
+                  <a:pt x="1759168" y="566673"/>
+                </a:lnTo>
+                <a:close/>
+                <a:lnTo>
+                  <a:pt x="1760173" y="560922"/>
+                </a:lnTo>
+                <a:close/>
+                <a:lnTo>
+                  <a:pt x="1761174" y="555169"/>
+                </a:lnTo>
+                <a:close/>
+                <a:lnTo>
+                  <a:pt x="1762170" y="549415"/>
+                </a:lnTo>
+                <a:close/>
+                <a:lnTo>
+                  <a:pt x="1763162" y="543658"/>
+                </a:lnTo>
+                <a:close/>
+                <a:lnTo>
+                  <a:pt x="1764149" y="537901"/>
+                </a:lnTo>
+                <a:close/>
+                <a:lnTo>
+                  <a:pt x="1765132" y="532142"/>
+                </a:lnTo>
+                <a:close/>
+                <a:lnTo>
+                  <a:pt x="1766110" y="526382"/>
+                </a:lnTo>
+                <a:close/>
+                <a:lnTo>
+                  <a:pt x="1767084" y="520620"/>
+                </a:lnTo>
+                <a:close/>
+                <a:lnTo>
+                  <a:pt x="1768052" y="514857"/>
+                </a:lnTo>
+                <a:close/>
+                <a:lnTo>
+                  <a:pt x="1769016" y="509093"/>
+                </a:lnTo>
+                <a:close/>
+                <a:lnTo>
+                  <a:pt x="1769975" y="503329"/>
+                </a:lnTo>
+                <a:close/>
+                <a:lnTo>
+                  <a:pt x="1770929" y="497563"/>
+                </a:lnTo>
+                <a:close/>
+                <a:lnTo>
+                  <a:pt x="1771878" y="491796"/>
+                </a:lnTo>
+                <a:close/>
+                <a:lnTo>
+                  <a:pt x="1772822" y="486028"/>
+                </a:lnTo>
+                <a:close/>
+                <a:lnTo>
+                  <a:pt x="1773761" y="480260"/>
+                </a:lnTo>
+                <a:close/>
+                <a:lnTo>
+                  <a:pt x="1774694" y="474490"/>
+                </a:lnTo>
+                <a:close/>
+                <a:lnTo>
+                  <a:pt x="1775623" y="468721"/>
+                </a:lnTo>
+                <a:close/>
+                <a:lnTo>
+                  <a:pt x="1776546" y="462950"/>
+                </a:lnTo>
+                <a:close/>
+                <a:lnTo>
+                  <a:pt x="1777464" y="457179"/>
+                </a:lnTo>
+                <a:close/>
+                <a:lnTo>
+                  <a:pt x="1778377" y="451408"/>
+                </a:lnTo>
+                <a:close/>
+                <a:lnTo>
+                  <a:pt x="1779284" y="445636"/>
+                </a:lnTo>
+                <a:close/>
+                <a:lnTo>
+                  <a:pt x="1780185" y="439864"/>
+                </a:lnTo>
+                <a:close/>
+                <a:lnTo>
+                  <a:pt x="1781081" y="434092"/>
+                </a:lnTo>
+                <a:close/>
+                <a:lnTo>
+                  <a:pt x="1781972" y="428320"/>
+                </a:lnTo>
+                <a:close/>
+                <a:lnTo>
+                  <a:pt x="1782857" y="422547"/>
+                </a:lnTo>
+                <a:close/>
+                <a:lnTo>
+                  <a:pt x="1783736" y="416775"/>
+                </a:lnTo>
+                <a:close/>
+                <a:lnTo>
+                  <a:pt x="1784609" y="411002"/>
+                </a:lnTo>
+                <a:close/>
+                <a:lnTo>
+                  <a:pt x="1785477" y="405230"/>
+                </a:lnTo>
+                <a:close/>
+                <a:lnTo>
+                  <a:pt x="1786339" y="399458"/>
+                </a:lnTo>
+                <a:close/>
+                <a:lnTo>
+                  <a:pt x="1787194" y="393686"/>
+                </a:lnTo>
+                <a:close/>
+                <a:lnTo>
+                  <a:pt x="1788044" y="387914"/>
+                </a:lnTo>
+                <a:close/>
+                <a:lnTo>
+                  <a:pt x="1788888" y="382143"/>
+                </a:lnTo>
+                <a:close/>
+                <a:lnTo>
+                  <a:pt x="1789726" y="376373"/>
+                </a:lnTo>
+                <a:close/>
+                <a:lnTo>
+                  <a:pt x="1790557" y="370602"/>
+                </a:lnTo>
+                <a:close/>
+                <a:lnTo>
+                  <a:pt x="1791383" y="364833"/>
+                </a:lnTo>
+                <a:close/>
+                <a:lnTo>
+                  <a:pt x="1792202" y="359064"/>
+                </a:lnTo>
+                <a:close/>
+                <a:lnTo>
+                  <a:pt x="1793014" y="353296"/>
+                </a:lnTo>
+                <a:close/>
+                <a:lnTo>
+                  <a:pt x="1793821" y="347529"/>
+                </a:lnTo>
+                <a:close/>
+                <a:lnTo>
+                  <a:pt x="1794621" y="341762"/>
+                </a:lnTo>
+                <a:close/>
+                <a:lnTo>
+                  <a:pt x="1795414" y="335997"/>
+                </a:lnTo>
+                <a:close/>
+                <a:lnTo>
+                  <a:pt x="1796201" y="330232"/>
+                </a:lnTo>
+                <a:close/>
+                <a:lnTo>
+                  <a:pt x="1796982" y="324469"/>
+                </a:lnTo>
+                <a:close/>
+                <a:lnTo>
+                  <a:pt x="1797756" y="318707"/>
+                </a:lnTo>
+                <a:close/>
+                <a:lnTo>
+                  <a:pt x="1798523" y="312945"/>
+                </a:lnTo>
+                <a:close/>
+                <a:lnTo>
+                  <a:pt x="1799283" y="307186"/>
+                </a:lnTo>
+                <a:close/>
+                <a:lnTo>
+                  <a:pt x="1800037" y="301427"/>
+                </a:lnTo>
+                <a:close/>
+                <a:lnTo>
+                  <a:pt x="1800783" y="295671"/>
+                </a:lnTo>
+                <a:close/>
+                <a:lnTo>
+                  <a:pt x="1801523" y="289915"/>
+                </a:lnTo>
+                <a:close/>
+                <a:lnTo>
+                  <a:pt x="1802256" y="284161"/>
+                </a:lnTo>
+                <a:close/>
+                <a:lnTo>
+                  <a:pt x="1802982" y="278409"/>
+                </a:lnTo>
+                <a:close/>
+                <a:lnTo>
+                  <a:pt x="1803700" y="272659"/>
+                </a:lnTo>
+                <a:close/>
+                <a:lnTo>
+                  <a:pt x="1804412" y="266910"/>
+                </a:lnTo>
+                <a:close/>
+                <a:lnTo>
+                  <a:pt x="1805116" y="261163"/>
+                </a:lnTo>
+                <a:close/>
+                <a:lnTo>
+                  <a:pt x="1805814" y="255418"/>
+                </a:lnTo>
+                <a:close/>
+                <a:lnTo>
+                  <a:pt x="1806503" y="249675"/>
+                </a:lnTo>
+                <a:close/>
+                <a:lnTo>
+                  <a:pt x="1807186" y="243934"/>
+                </a:lnTo>
+                <a:close/>
+                <a:lnTo>
+                  <a:pt x="1807861" y="238195"/>
+                </a:lnTo>
+                <a:close/>
+                <a:lnTo>
+                  <a:pt x="1808529" y="232459"/>
+                </a:lnTo>
+                <a:close/>
+                <a:lnTo>
+                  <a:pt x="1809189" y="226724"/>
+                </a:lnTo>
+                <a:close/>
+                <a:lnTo>
+                  <a:pt x="1809841" y="220992"/>
+                </a:lnTo>
+                <a:close/>
+                <a:lnTo>
+                  <a:pt x="1810486" y="215263"/>
+                </a:lnTo>
+                <a:close/>
+                <a:lnTo>
+                  <a:pt x="1811124" y="209536"/>
+                </a:lnTo>
+                <a:close/>
+                <a:lnTo>
+                  <a:pt x="1811753" y="203811"/>
+                </a:lnTo>
+                <a:close/>
+                <a:lnTo>
+                  <a:pt x="1812375" y="198089"/>
+                </a:lnTo>
+                <a:close/>
+                <a:lnTo>
+                  <a:pt x="1812989" y="192370"/>
+                </a:lnTo>
+                <a:close/>
+                <a:lnTo>
+                  <a:pt x="1813595" y="186653"/>
+                </a:lnTo>
+                <a:close/>
+                <a:lnTo>
+                  <a:pt x="1814193" y="180940"/>
+                </a:lnTo>
+                <a:close/>
+                <a:lnTo>
+                  <a:pt x="1814783" y="175229"/>
+                </a:lnTo>
+                <a:close/>
+                <a:lnTo>
+                  <a:pt x="1815365" y="169521"/>
+                </a:lnTo>
+                <a:close/>
+                <a:lnTo>
+                  <a:pt x="1815939" y="163816"/>
+                </a:lnTo>
+                <a:close/>
+                <a:lnTo>
+                  <a:pt x="1816504" y="158114"/>
+                </a:lnTo>
+                <a:close/>
+                <a:lnTo>
+                  <a:pt x="1817062" y="152415"/>
+                </a:lnTo>
+                <a:close/>
+                <a:lnTo>
+                  <a:pt x="1817611" y="146720"/>
+                </a:lnTo>
+                <a:close/>
+                <a:lnTo>
+                  <a:pt x="1818152" y="141028"/>
+                </a:lnTo>
+                <a:close/>
+                <a:lnTo>
+                  <a:pt x="1818684" y="135339"/>
+                </a:lnTo>
+                <a:close/>
+                <a:lnTo>
+                  <a:pt x="1819208" y="129654"/>
+                </a:lnTo>
+                <a:close/>
+                <a:lnTo>
+                  <a:pt x="1819723" y="123972"/>
+                </a:lnTo>
+                <a:close/>
+                <a:lnTo>
+                  <a:pt x="1820230" y="118294"/>
+                </a:lnTo>
+                <a:close/>
+                <a:lnTo>
+                  <a:pt x="1820728" y="112619"/>
+                </a:lnTo>
+                <a:close/>
+                <a:lnTo>
+                  <a:pt x="1821218" y="106949"/>
+                </a:lnTo>
+                <a:close/>
+                <a:lnTo>
+                  <a:pt x="1821699" y="101281"/>
+                </a:lnTo>
+                <a:close/>
+                <a:lnTo>
+                  <a:pt x="1822171" y="95618"/>
+                </a:lnTo>
+                <a:close/>
+                <a:lnTo>
+                  <a:pt x="1822634" y="89959"/>
+                </a:lnTo>
+                <a:close/>
+                <a:lnTo>
+                  <a:pt x="1823089" y="84304"/>
+                </a:lnTo>
+                <a:close/>
+                <a:lnTo>
+                  <a:pt x="1823534" y="78652"/>
+                </a:lnTo>
+                <a:close/>
+                <a:lnTo>
+                  <a:pt x="1823970" y="73005"/>
+                </a:lnTo>
+                <a:close/>
+                <a:lnTo>
+                  <a:pt x="1824398" y="67362"/>
+                </a:lnTo>
+                <a:close/>
+                <a:lnTo>
+                  <a:pt x="1824816" y="61724"/>
+                </a:lnTo>
+                <a:close/>
+                <a:lnTo>
+                  <a:pt x="1825225" y="56089"/>
+                </a:lnTo>
+                <a:close/>
+                <a:lnTo>
+                  <a:pt x="1825625" y="50459"/>
+                </a:lnTo>
+                <a:close/>
+                <a:lnTo>
+                  <a:pt x="1826016" y="44834"/>
+                </a:lnTo>
+                <a:close/>
+                <a:lnTo>
+                  <a:pt x="1826397" y="39213"/>
+                </a:lnTo>
+                <a:close/>
+                <a:lnTo>
+                  <a:pt x="1826769" y="33597"/>
+                </a:lnTo>
+                <a:close/>
+                <a:lnTo>
+                  <a:pt x="1827131" y="27985"/>
+                </a:lnTo>
+                <a:close/>
+                <a:lnTo>
+                  <a:pt x="1827484" y="22378"/>
+                </a:lnTo>
+                <a:close/>
+                <a:lnTo>
+                  <a:pt x="1827828" y="16776"/>
+                </a:lnTo>
+                <a:close/>
+                <a:lnTo>
+                  <a:pt x="1828161" y="11179"/>
+                </a:lnTo>
+                <a:close/>
+                <a:lnTo>
+                  <a:pt x="1828486" y="5587"/>
+                </a:lnTo>
+                <a:close/>
+                <a:lnTo>
+                  <a:pt x="1828800" y="0"/>
                 </a:lnTo>
                 <a:close/>
               </a:path>
@@ -5623,8 +5623,8 @@
         </p:nvCxnSpPr>
         <p:spPr>
           <a:xfrm flipV="1">
-            <a:off x="6172200.0" y="742950.0"/>
-            <a:ext cx="0.0" cy="1828800.0"/>
+            <a:off x="6400800.0" y="1200150.0"/>
+            <a:ext cx="0.0" cy="1371600.0"/>
           </a:xfrm>
           <a:prstGeom prst="line">
             <a:avLst/>
@@ -5659,8 +5659,8 @@
         </p:nvCxnSpPr>
         <p:spPr>
           <a:xfrm>
-            <a:off x="4572000.0" y="742950.0"/>
-            <a:ext cx="1600200.0" cy="0.0"/>
+            <a:off x="4572000.0" y="1200150.0"/>
+            <a:ext cx="1828800.0" cy="0.0"/>
           </a:xfrm>
           <a:prstGeom prst="line">
             <a:avLst/>
@@ -5695,7 +5695,7 @@
         </p:nvSpPr>
         <p:spPr>
           <a:xfrm>
-            <a:off x="6083300" y="654050"/>
+            <a:off x="6311900" y="1111250"/>
             <a:ext cx="177800" cy="177800"/>
           </a:xfrm>
           <a:prstGeom prst="ellipse">
@@ -5740,7 +5740,7 @@
         </p:nvCxnSpPr>
         <p:spPr>
           <a:xfrm>
-            <a:off x="5257800.0" y="2503170.0"/>
+            <a:off x="5486400.0" y="2503170.0"/>
             <a:ext cx="822960.0" cy="0.0"/>
           </a:xfrm>
           <a:prstGeom prst="line">
@@ -5775,8 +5775,8 @@
         </p:nvCxnSpPr>
         <p:spPr>
           <a:xfrm flipH="1">
-            <a:off x="6263640.0" y="2503170.0"/>
-            <a:ext cx="502920.0" cy="0.0"/>
+            <a:off x="6492240.0" y="2503170.0"/>
+            <a:ext cx="822960.0" cy="0.0"/>
           </a:xfrm>
           <a:prstGeom prst="line">
             <a:avLst/>
@@ -5802,15 +5802,85 @@
           </a:fontRef>
         </p:style>
       </p:cxnSp>
-      <p:sp>
-        <p:nvSpPr>
-          <p:cNvPr id="10" name="TextBox 9"/>
+      <p:cxnSp>
+        <p:nvCxnSpPr>
+          <p:cNvPr id="10" name="Connector 9"/>
+          <p:cNvCxnSpPr/>
+          <p:nvPr/>
+        </p:nvCxnSpPr>
+        <p:spPr>
+          <a:xfrm flipV="1">
+            <a:off x="6172200.0" y="1245870.0"/>
+            <a:ext cx="182880.0" cy="228600.0"/>
+          </a:xfrm>
+          <a:prstGeom prst="line">
+            <a:avLst/>
+          </a:prstGeom>
+          <a:ln w="15240">
+            <a:solidFill>
+              <a:srgbClr val="FFFFFF"/>
+            </a:solidFill>
+          </a:ln>
+        </p:spPr>
+        <p:style>
+          <a:lnRef idx="2">
+            <a:schemeClr val="accent1"/>
+          </a:lnRef>
+          <a:fillRef idx="0">
+            <a:schemeClr val="accent1"/>
+          </a:fillRef>
+          <a:effectRef idx="1">
+            <a:schemeClr val="accent1"/>
+          </a:effectRef>
+          <a:fontRef idx="minor">
+            <a:schemeClr val="tx1"/>
+          </a:fontRef>
+        </p:style>
+      </p:cxnSp>
+      <p:cxnSp>
+        <p:nvCxnSpPr>
+          <p:cNvPr id="11" name="Connector 10"/>
+          <p:cNvCxnSpPr/>
+          <p:nvPr/>
+        </p:nvCxnSpPr>
+        <p:spPr>
+          <a:xfrm flipH="1">
+            <a:off x="6446520.0" y="834390.0"/>
+            <a:ext cx="182880.0" cy="320040.0"/>
+          </a:xfrm>
+          <a:prstGeom prst="line">
+            <a:avLst/>
+          </a:prstGeom>
+          <a:ln w="15240">
+            <a:solidFill>
+              <a:srgbClr val="FFFFFF"/>
+            </a:solidFill>
+          </a:ln>
+        </p:spPr>
+        <p:style>
+          <a:lnRef idx="2">
+            <a:schemeClr val="accent1"/>
+          </a:lnRef>
+          <a:fillRef idx="0">
+            <a:schemeClr val="accent1"/>
+          </a:fillRef>
+          <a:effectRef idx="1">
+            <a:schemeClr val="accent1"/>
+          </a:effectRef>
+          <a:fontRef idx="minor">
+            <a:schemeClr val="tx1"/>
+          </a:fontRef>
+        </p:style>
+      </p:cxnSp>
+      <p:sp>
+        <p:nvSpPr>
+          <p:cNvPr id="12" name="TextBox 11"/>
           <p:cNvSpPr txBox="1"/>
           <p:nvPr/>
         </p:nvSpPr>
         <p:spPr>
           <a:xfrm>
-            <a:off x="5918200" y="-1769110"/>
+            <a:off x="6375400" y="-1174750"/>
             <a:ext cx="1524000" cy="508000"/>
           </a:xfrm>
           <a:prstGeom prst="rect">
@@ -5840,13 +5910,13 @@
       </p:sp>
       <p:sp>
         <p:nvSpPr>
-          <p:cNvPr id="11" name="TextBox 10"/>
+          <p:cNvPr id="13" name="TextBox 12"/>
           <p:cNvSpPr txBox="1"/>
           <p:nvPr/>
         </p:nvSpPr>
         <p:spPr>
           <a:xfrm>
-            <a:off x="3906520" y="425450"/>
+            <a:off x="3952240" y="882650"/>
             <a:ext cx="1524000" cy="508000"/>
           </a:xfrm>
           <a:prstGeom prst="rect">
@@ -5876,13 +5946,13 @@
       </p:sp>
       <p:sp>
         <p:nvSpPr>
-          <p:cNvPr id="12" name="TextBox 11"/>
+          <p:cNvPr id="14" name="TextBox 13"/>
           <p:cNvSpPr txBox="1"/>
           <p:nvPr/>
         </p:nvSpPr>
         <p:spPr>
           <a:xfrm>
-            <a:off x="5918200" y="2528570"/>
+            <a:off x="6146800" y="2437130"/>
             <a:ext cx="1524000" cy="508000"/>
           </a:xfrm>
           <a:prstGeom prst="rect">
@@ -5912,7 +5982,7 @@
       </p:sp>
       <p:sp>
         <p:nvSpPr>
-          <p:cNvPr id="13" name="TextBox 12"/>
+          <p:cNvPr id="15" name="TextBox 14"/>
           <p:cNvSpPr txBox="1"/>
           <p:nvPr/>
         </p:nvSpPr>
